--- a/protected-downloads/praesentation/M22.pptx
+++ b/protected-downloads/praesentation/M22.pptx
@@ -8,17 +8,17 @@
     <p:sldId id="256" r:id="rId7"/>
     <p:sldId id="257" r:id="rId8"/>
     <p:sldId id="258" r:id="rId9"/>
-    <p:sldId id="259" r:id="rId10"/>
-    <p:sldId id="260" r:id="rId11"/>
-    <p:sldId id="261" r:id="rId12"/>
-    <p:sldId id="262" r:id="rId13"/>
-    <p:sldId id="263" r:id="rId14"/>
-    <p:sldId id="264" r:id="rId15"/>
-    <p:sldId id="265" r:id="rId16"/>
-    <p:sldId id="266" r:id="rId17"/>
-    <p:sldId id="267" r:id="rId18"/>
-    <p:sldId id="268" r:id="rId19"/>
-    <p:sldId id="269" r:id="rId20"/>
+    <p:sldId id="259" r:id="rId11"/>
+    <p:sldId id="260" r:id="rId12"/>
+    <p:sldId id="261" r:id="rId13"/>
+    <p:sldId id="262" r:id="rId14"/>
+    <p:sldId id="263" r:id="rId15"/>
+    <p:sldId id="264" r:id="rId16"/>
+    <p:sldId id="265" r:id="rId17"/>
+    <p:sldId id="266" r:id="rId18"/>
+    <p:sldId id="267" r:id="rId19"/>
+    <p:sldId id="268" r:id="rId20"/>
+    <p:sldId id="269" r:id="rId21"/>
   </p:sldIdLst>
   <p:sldSz cx="12188952" cy="6858000" type="screen4x3"/>
   <p:notesSz cx="6858000" cy="9144000"/>
@@ -118,6 +118,1101 @@
     </a:lvl9pPr>
   </p:defaultTextStyle>
 </p:presentation>
+</file>
+
+<file path=ppt/notesMasters/notesMaster1.xml><?xml version="1.0" encoding="utf-8"?>
+<p:notesMaster xmlns:a="http://schemas.openxmlformats.org/drawingml/2006/main" xmlns:p="http://schemas.openxmlformats.org/presentationml/2006/main" xmlns:r="http://schemas.openxmlformats.org/officeDocument/2006/relationships">
+  <p:cSld>
+    <p:bg>
+      <p:bgRef idx="1001">
+        <a:schemeClr val="bg1"/>
+      </p:bgRef>
+    </p:bg>
+    <p:spTree>
+      <p:nvGrpSpPr>
+        <p:cNvPr id="1" name=""/>
+        <p:cNvGrpSpPr/>
+        <p:nvPr/>
+      </p:nvGrpSpPr>
+      <p:grpSpPr>
+        <a:xfrm>
+          <a:off x="0" y="0"/>
+          <a:ext cx="0" cy="0"/>
+          <a:chOff x="0" y="0"/>
+          <a:chExt cx="0" cy="0"/>
+        </a:xfrm>
+      </p:grpSpPr>
+      <p:sp>
+        <p:nvSpPr>
+          <p:cNvPr id="2" name="Header Placeholder 1"/>
+          <p:cNvSpPr>
+            <a:spLocks noGrp="1"/>
+          </p:cNvSpPr>
+          <p:nvPr>
+            <p:ph type="hdr" sz="quarter"/>
+          </p:nvPr>
+        </p:nvSpPr>
+        <p:spPr>
+          <a:xfrm>
+            <a:off x="0" y="0"/>
+            <a:ext cx="2971800" cy="457200"/>
+          </a:xfrm>
+          <a:prstGeom prst="rect">
+            <a:avLst/>
+          </a:prstGeom>
+        </p:spPr>
+        <p:txBody>
+          <a:bodyPr vert="horz" lIns="91440" tIns="45720" rIns="91440" bIns="45720" rtlCol="0"/>
+          <a:lstStyle>
+            <a:lvl1pPr algn="l">
+              <a:defRPr sz="1200"/>
+            </a:lvl1pPr>
+          </a:lstStyle>
+          <a:p>
+            <a:endParaRPr lang="en-US"/>
+          </a:p>
+        </p:txBody>
+      </p:sp>
+      <p:sp>
+        <p:nvSpPr>
+          <p:cNvPr id="3" name="Date Placeholder 2"/>
+          <p:cNvSpPr>
+            <a:spLocks noGrp="1"/>
+          </p:cNvSpPr>
+          <p:nvPr>
+            <p:ph type="dt" idx="1"/>
+          </p:nvPr>
+        </p:nvSpPr>
+        <p:spPr>
+          <a:xfrm>
+            <a:off x="3884613" y="0"/>
+            <a:ext cx="2971800" cy="457200"/>
+          </a:xfrm>
+          <a:prstGeom prst="rect">
+            <a:avLst/>
+          </a:prstGeom>
+        </p:spPr>
+        <p:txBody>
+          <a:bodyPr vert="horz" lIns="91440" tIns="45720" rIns="91440" bIns="45720" rtlCol="0"/>
+          <a:lstStyle>
+            <a:lvl1pPr algn="r">
+              <a:defRPr sz="1200"/>
+            </a:lvl1pPr>
+          </a:lstStyle>
+          <a:p>
+            <a:fld id="{0F89C1C7-3DCD-1040-A9CF-14679D8B5DDD}" type="datetimeFigureOut">
+              <a:rPr lang="en-US" smtClean="0"/>
+              <a:t>10/17/16</a:t>
+            </a:fld>
+            <a:endParaRPr lang="en-US"/>
+          </a:p>
+        </p:txBody>
+      </p:sp>
+      <p:sp>
+        <p:nvSpPr>
+          <p:cNvPr id="4" name="Slide Image Placeholder 3"/>
+          <p:cNvSpPr>
+            <a:spLocks noGrp="1" noRot="1" noChangeAspect="1"/>
+          </p:cNvSpPr>
+          <p:nvPr>
+            <p:ph type="sldImg" idx="2"/>
+          </p:nvPr>
+        </p:nvSpPr>
+        <p:spPr>
+          <a:xfrm>
+            <a:off x="1143000" y="685800"/>
+            <a:ext cx="4572000" cy="3429000"/>
+          </a:xfrm>
+          <a:prstGeom prst="rect">
+            <a:avLst/>
+          </a:prstGeom>
+          <a:noFill/>
+          <a:ln w="12700">
+            <a:solidFill>
+              <a:prstClr val="black"/>
+            </a:solidFill>
+          </a:ln>
+        </p:spPr>
+        <p:txBody>
+          <a:bodyPr vert="horz" lIns="91440" tIns="45720" rIns="91440" bIns="45720" rtlCol="0" anchor="ctr"/>
+          <a:lstStyle/>
+          <a:p>
+            <a:endParaRPr lang="en-US"/>
+          </a:p>
+        </p:txBody>
+      </p:sp>
+      <p:sp>
+        <p:nvSpPr>
+          <p:cNvPr id="5" name="Notes Placeholder 4"/>
+          <p:cNvSpPr>
+            <a:spLocks noGrp="1"/>
+          </p:cNvSpPr>
+          <p:nvPr>
+            <p:ph type="body" sz="quarter" idx="3"/>
+          </p:nvPr>
+        </p:nvSpPr>
+        <p:spPr>
+          <a:xfrm>
+            <a:off x="685800" y="4343400"/>
+            <a:ext cx="5486400" cy="4114800"/>
+          </a:xfrm>
+          <a:prstGeom prst="rect">
+            <a:avLst/>
+          </a:prstGeom>
+        </p:spPr>
+        <p:txBody>
+          <a:bodyPr vert="horz" lIns="91440" tIns="45720" rIns="91440" bIns="45720" rtlCol="0"/>
+          <a:lstStyle/>
+          <a:p>
+            <a:pPr lvl="0"/>
+            <a:r>
+              <a:rPr lang="en-US" smtClean="0"/>
+              <a:t>Click to edit Master text styles</a:t>
+            </a:r>
+          </a:p>
+          <a:p>
+            <a:pPr lvl="1"/>
+            <a:r>
+              <a:rPr lang="en-US" smtClean="0"/>
+              <a:t>Second level</a:t>
+            </a:r>
+          </a:p>
+          <a:p>
+            <a:pPr lvl="2"/>
+            <a:r>
+              <a:rPr lang="en-US" smtClean="0"/>
+              <a:t>Third level</a:t>
+            </a:r>
+          </a:p>
+          <a:p>
+            <a:pPr lvl="3"/>
+            <a:r>
+              <a:rPr lang="en-US" smtClean="0"/>
+              <a:t>Fourth level</a:t>
+            </a:r>
+          </a:p>
+          <a:p>
+            <a:pPr lvl="4"/>
+            <a:r>
+              <a:rPr lang="en-US" smtClean="0"/>
+              <a:t>Fifth level</a:t>
+            </a:r>
+            <a:endParaRPr lang="en-US"/>
+          </a:p>
+        </p:txBody>
+      </p:sp>
+      <p:sp>
+        <p:nvSpPr>
+          <p:cNvPr id="6" name="Footer Placeholder 5"/>
+          <p:cNvSpPr>
+            <a:spLocks noGrp="1"/>
+          </p:cNvSpPr>
+          <p:nvPr>
+            <p:ph type="ftr" sz="quarter" idx="4"/>
+          </p:nvPr>
+        </p:nvSpPr>
+        <p:spPr>
+          <a:xfrm>
+            <a:off x="0" y="8685213"/>
+            <a:ext cx="2971800" cy="457200"/>
+          </a:xfrm>
+          <a:prstGeom prst="rect">
+            <a:avLst/>
+          </a:prstGeom>
+        </p:spPr>
+        <p:txBody>
+          <a:bodyPr vert="horz" lIns="91440" tIns="45720" rIns="91440" bIns="45720" rtlCol="0" anchor="b"/>
+          <a:lstStyle>
+            <a:lvl1pPr algn="l">
+              <a:defRPr sz="1200"/>
+            </a:lvl1pPr>
+          </a:lstStyle>
+          <a:p>
+            <a:endParaRPr lang="en-US"/>
+          </a:p>
+        </p:txBody>
+      </p:sp>
+      <p:sp>
+        <p:nvSpPr>
+          <p:cNvPr id="7" name="Slide Number Placeholder 6"/>
+          <p:cNvSpPr>
+            <a:spLocks noGrp="1"/>
+          </p:cNvSpPr>
+          <p:nvPr>
+            <p:ph type="sldNum" sz="quarter" idx="5"/>
+          </p:nvPr>
+        </p:nvSpPr>
+        <p:spPr>
+          <a:xfrm>
+            <a:off x="3884613" y="8685213"/>
+            <a:ext cx="2971800" cy="457200"/>
+          </a:xfrm>
+          <a:prstGeom prst="rect">
+            <a:avLst/>
+          </a:prstGeom>
+        </p:spPr>
+        <p:txBody>
+          <a:bodyPr vert="horz" lIns="91440" tIns="45720" rIns="91440" bIns="45720" rtlCol="0" anchor="b"/>
+          <a:lstStyle>
+            <a:lvl1pPr algn="r">
+              <a:defRPr sz="1200"/>
+            </a:lvl1pPr>
+          </a:lstStyle>
+          <a:p>
+            <a:fld id="{BB5E49A5-4136-284D-997B-48E1D791AD67}" type="slidenum">
+              <a:rPr lang="en-US" smtClean="0"/>
+              <a:t>‹#›</a:t>
+            </a:fld>
+            <a:endParaRPr lang="en-US"/>
+          </a:p>
+        </p:txBody>
+      </p:sp>
+    </p:spTree>
+    <p:extLst>
+      <p:ext uri="{BB962C8B-B14F-4D97-AF65-F5344CB8AC3E}">
+        <p14:creationId xmlns:p14="http://schemas.microsoft.com/office/powerpoint/2010/main" val="2623252185"/>
+      </p:ext>
+    </p:extLst>
+  </p:cSld>
+  <p:clrMap bg1="lt1" tx1="dk1" bg2="lt2" tx2="dk2" accent1="accent1" accent2="accent2" accent3="accent3" accent4="accent4" accent5="accent5" accent6="accent6" hlink="hlink" folHlink="folHlink"/>
+  <p:notesStyle>
+    <a:lvl1pPr marL="0" algn="l" defTabSz="457200" rtl="0" eaLnBrk="1" latinLnBrk="0" hangingPunct="1">
+      <a:defRPr sz="1200" kern="1200">
+        <a:solidFill>
+          <a:schemeClr val="tx1"/>
+        </a:solidFill>
+        <a:latin typeface="+mn-lt"/>
+        <a:ea typeface="+mn-ea"/>
+        <a:cs typeface="+mn-cs"/>
+      </a:defRPr>
+    </a:lvl1pPr>
+    <a:lvl2pPr marL="457200" algn="l" defTabSz="457200" rtl="0" eaLnBrk="1" latinLnBrk="0" hangingPunct="1">
+      <a:defRPr sz="1200" kern="1200">
+        <a:solidFill>
+          <a:schemeClr val="tx1"/>
+        </a:solidFill>
+        <a:latin typeface="+mn-lt"/>
+        <a:ea typeface="+mn-ea"/>
+        <a:cs typeface="+mn-cs"/>
+      </a:defRPr>
+    </a:lvl2pPr>
+    <a:lvl3pPr marL="914400" algn="l" defTabSz="457200" rtl="0" eaLnBrk="1" latinLnBrk="0" hangingPunct="1">
+      <a:defRPr sz="1200" kern="1200">
+        <a:solidFill>
+          <a:schemeClr val="tx1"/>
+        </a:solidFill>
+        <a:latin typeface="+mn-lt"/>
+        <a:ea typeface="+mn-ea"/>
+        <a:cs typeface="+mn-cs"/>
+      </a:defRPr>
+    </a:lvl3pPr>
+    <a:lvl4pPr marL="1371600" algn="l" defTabSz="457200" rtl="0" eaLnBrk="1" latinLnBrk="0" hangingPunct="1">
+      <a:defRPr sz="1200" kern="1200">
+        <a:solidFill>
+          <a:schemeClr val="tx1"/>
+        </a:solidFill>
+        <a:latin typeface="+mn-lt"/>
+        <a:ea typeface="+mn-ea"/>
+        <a:cs typeface="+mn-cs"/>
+      </a:defRPr>
+    </a:lvl4pPr>
+    <a:lvl5pPr marL="1828800" algn="l" defTabSz="457200" rtl="0" eaLnBrk="1" latinLnBrk="0" hangingPunct="1">
+      <a:defRPr sz="1200" kern="1200">
+        <a:solidFill>
+          <a:schemeClr val="tx1"/>
+        </a:solidFill>
+        <a:latin typeface="+mn-lt"/>
+        <a:ea typeface="+mn-ea"/>
+        <a:cs typeface="+mn-cs"/>
+      </a:defRPr>
+    </a:lvl5pPr>
+    <a:lvl6pPr marL="2286000" algn="l" defTabSz="457200" rtl="0" eaLnBrk="1" latinLnBrk="0" hangingPunct="1">
+      <a:defRPr sz="1200" kern="1200">
+        <a:solidFill>
+          <a:schemeClr val="tx1"/>
+        </a:solidFill>
+        <a:latin typeface="+mn-lt"/>
+        <a:ea typeface="+mn-ea"/>
+        <a:cs typeface="+mn-cs"/>
+      </a:defRPr>
+    </a:lvl6pPr>
+    <a:lvl7pPr marL="2743200" algn="l" defTabSz="457200" rtl="0" eaLnBrk="1" latinLnBrk="0" hangingPunct="1">
+      <a:defRPr sz="1200" kern="1200">
+        <a:solidFill>
+          <a:schemeClr val="tx1"/>
+        </a:solidFill>
+        <a:latin typeface="+mn-lt"/>
+        <a:ea typeface="+mn-ea"/>
+        <a:cs typeface="+mn-cs"/>
+      </a:defRPr>
+    </a:lvl7pPr>
+    <a:lvl8pPr marL="3200400" algn="l" defTabSz="457200" rtl="0" eaLnBrk="1" latinLnBrk="0" hangingPunct="1">
+      <a:defRPr sz="1200" kern="1200">
+        <a:solidFill>
+          <a:schemeClr val="tx1"/>
+        </a:solidFill>
+        <a:latin typeface="+mn-lt"/>
+        <a:ea typeface="+mn-ea"/>
+        <a:cs typeface="+mn-cs"/>
+      </a:defRPr>
+    </a:lvl8pPr>
+    <a:lvl9pPr marL="3657600" algn="l" defTabSz="457200" rtl="0" eaLnBrk="1" latinLnBrk="0" hangingPunct="1">
+      <a:defRPr sz="1200" kern="1200">
+        <a:solidFill>
+          <a:schemeClr val="tx1"/>
+        </a:solidFill>
+        <a:latin typeface="+mn-lt"/>
+        <a:ea typeface="+mn-ea"/>
+        <a:cs typeface="+mn-cs"/>
+      </a:defRPr>
+    </a:lvl9pPr>
+  </p:notesStyle>
+</p:notesMaster>
+</file>
+
+<file path=ppt/notesSlides/notesSlide1.xml><?xml version="1.0" encoding="utf-8"?>
+<p:notes xmlns:a="http://schemas.openxmlformats.org/drawingml/2006/main" xmlns:p="http://schemas.openxmlformats.org/presentationml/2006/main" xmlns:r="http://schemas.openxmlformats.org/officeDocument/2006/relationships">
+  <p:cSld>
+    <p:spTree>
+      <p:nvGrpSpPr>
+        <p:cNvPr id="1" name=""/>
+        <p:cNvGrpSpPr/>
+        <p:nvPr/>
+      </p:nvGrpSpPr>
+      <p:grpSpPr>
+        <a:xfrm>
+          <a:off x="0" y="0"/>
+          <a:ext cx="0" cy="0"/>
+          <a:chOff x="0" y="0"/>
+          <a:chExt cx="0" cy="0"/>
+        </a:xfrm>
+      </p:grpSpPr>
+      <p:sp>
+        <p:nvSpPr>
+          <p:cNvPr id="2" name="Slide Image Placeholder 1"/>
+          <p:cNvSpPr>
+            <a:spLocks noGrp="1"/>
+          </p:cNvSpPr>
+          <p:nvPr>
+            <p:ph type="sldImg" idx="2"/>
+          </p:nvPr>
+        </p:nvSpPr>
+        <p:spPr/>
+      </p:sp>
+      <p:sp>
+        <p:nvSpPr>
+          <p:cNvPr id="3" name="Notes Placeholder 2"/>
+          <p:cNvSpPr>
+            <a:spLocks noGrp="1"/>
+          </p:cNvSpPr>
+          <p:nvPr>
+            <p:ph type="body" idx="3" sz="quarter"/>
+          </p:nvPr>
+        </p:nvSpPr>
+        <p:spPr/>
+        <p:txBody>
+          <a:bodyPr/>
+          <a:lstStyle/>
+          <a:p>
+            <a:r>
+              <a:t>Siehe Trainerhandbuch (Sektion 3) für Moderationshinweise, Timing und erwartete Teilnehmerreaktionen.</a:t>
+            </a:r>
+          </a:p>
+        </p:txBody>
+      </p:sp>
+      <p:sp>
+        <p:nvSpPr>
+          <p:cNvPr id="4" name="Slide Number Placeholder 3"/>
+          <p:cNvSpPr>
+            <a:spLocks noGrp="1"/>
+          </p:cNvSpPr>
+          <p:nvPr>
+            <p:ph type="sldNum" idx="5" sz="quarter"/>
+          </p:nvPr>
+        </p:nvSpPr>
+        <p:spPr/>
+      </p:sp>
+    </p:spTree>
+  </p:cSld>
+  <p:clrMapOvr>
+    <a:masterClrMapping/>
+  </p:clrMapOvr>
+</p:notes>
+</file>
+
+<file path=ppt/notesSlides/notesSlide10.xml><?xml version="1.0" encoding="utf-8"?>
+<p:notes xmlns:a="http://schemas.openxmlformats.org/drawingml/2006/main" xmlns:p="http://schemas.openxmlformats.org/presentationml/2006/main" xmlns:r="http://schemas.openxmlformats.org/officeDocument/2006/relationships">
+  <p:cSld>
+    <p:spTree>
+      <p:nvGrpSpPr>
+        <p:cNvPr id="1" name=""/>
+        <p:cNvGrpSpPr/>
+        <p:nvPr/>
+      </p:nvGrpSpPr>
+      <p:grpSpPr>
+        <a:xfrm>
+          <a:off x="0" y="0"/>
+          <a:ext cx="0" cy="0"/>
+          <a:chOff x="0" y="0"/>
+          <a:chExt cx="0" cy="0"/>
+        </a:xfrm>
+      </p:grpSpPr>
+      <p:sp>
+        <p:nvSpPr>
+          <p:cNvPr id="2" name="Slide Image Placeholder 1"/>
+          <p:cNvSpPr>
+            <a:spLocks noGrp="1"/>
+          </p:cNvSpPr>
+          <p:nvPr>
+            <p:ph type="sldImg" idx="2"/>
+          </p:nvPr>
+        </p:nvSpPr>
+        <p:spPr/>
+      </p:sp>
+      <p:sp>
+        <p:nvSpPr>
+          <p:cNvPr id="3" name="Notes Placeholder 2"/>
+          <p:cNvSpPr>
+            <a:spLocks noGrp="1"/>
+          </p:cNvSpPr>
+          <p:nvPr>
+            <p:ph type="body" idx="3" sz="quarter"/>
+          </p:nvPr>
+        </p:nvSpPr>
+        <p:spPr/>
+        <p:txBody>
+          <a:bodyPr/>
+          <a:lstStyle/>
+          <a:p>
+            <a:r>
+              <a:t>Siehe Trainerhandbuch (Sektion 3) für Moderationshinweise, Timing und erwartete Teilnehmerreaktionen.</a:t>
+            </a:r>
+          </a:p>
+        </p:txBody>
+      </p:sp>
+      <p:sp>
+        <p:nvSpPr>
+          <p:cNvPr id="4" name="Slide Number Placeholder 3"/>
+          <p:cNvSpPr>
+            <a:spLocks noGrp="1"/>
+          </p:cNvSpPr>
+          <p:nvPr>
+            <p:ph type="sldNum" idx="5" sz="quarter"/>
+          </p:nvPr>
+        </p:nvSpPr>
+        <p:spPr/>
+      </p:sp>
+    </p:spTree>
+  </p:cSld>
+  <p:clrMapOvr>
+    <a:masterClrMapping/>
+  </p:clrMapOvr>
+</p:notes>
+</file>
+
+<file path=ppt/notesSlides/notesSlide2.xml><?xml version="1.0" encoding="utf-8"?>
+<p:notes xmlns:a="http://schemas.openxmlformats.org/drawingml/2006/main" xmlns:p="http://schemas.openxmlformats.org/presentationml/2006/main" xmlns:r="http://schemas.openxmlformats.org/officeDocument/2006/relationships">
+  <p:cSld>
+    <p:spTree>
+      <p:nvGrpSpPr>
+        <p:cNvPr id="1" name=""/>
+        <p:cNvGrpSpPr/>
+        <p:nvPr/>
+      </p:nvGrpSpPr>
+      <p:grpSpPr>
+        <a:xfrm>
+          <a:off x="0" y="0"/>
+          <a:ext cx="0" cy="0"/>
+          <a:chOff x="0" y="0"/>
+          <a:chExt cx="0" cy="0"/>
+        </a:xfrm>
+      </p:grpSpPr>
+      <p:sp>
+        <p:nvSpPr>
+          <p:cNvPr id="2" name="Slide Image Placeholder 1"/>
+          <p:cNvSpPr>
+            <a:spLocks noGrp="1"/>
+          </p:cNvSpPr>
+          <p:nvPr>
+            <p:ph type="sldImg" idx="2"/>
+          </p:nvPr>
+        </p:nvSpPr>
+        <p:spPr/>
+      </p:sp>
+      <p:sp>
+        <p:nvSpPr>
+          <p:cNvPr id="3" name="Notes Placeholder 2"/>
+          <p:cNvSpPr>
+            <a:spLocks noGrp="1"/>
+          </p:cNvSpPr>
+          <p:nvPr>
+            <p:ph type="body" idx="3" sz="quarter"/>
+          </p:nvPr>
+        </p:nvSpPr>
+        <p:spPr/>
+        <p:txBody>
+          <a:bodyPr/>
+          <a:lstStyle/>
+          <a:p>
+            <a:r>
+              <a:t>Moderation (HB Sec 3): Methode: Problembasiertes Lernen in Kleingruppen (Barrows, 1986) Fallblatt Haller GmbH austeilen, 2 Minuten Lesezeit, dann AB-1 austeilen. Aufgabenstellung (Trainer liest vor): „Analysieren Sie die Wettbewerbssituation der Haller GmbH mit dem Five-Forces-Modell. Bewerten Sie jede Kraft von 1 (gering) bis 3 (hoch). Bestimmen Sie: Welche generische Strategie verfolgt Haller — oder ist das Unternehmen stuck in the middle? Begründen Sie." Gruppen: 3–4 Personen, 20 Minuten Arbeitszeit. Trainer-Runde durch den Raum (ab Minute 5):</a:t>
+            </a:r>
+          </a:p>
+        </p:txBody>
+      </p:sp>
+      <p:sp>
+        <p:nvSpPr>
+          <p:cNvPr id="4" name="Slide Number Placeholder 3"/>
+          <p:cNvSpPr>
+            <a:spLocks noGrp="1"/>
+          </p:cNvSpPr>
+          <p:nvPr>
+            <p:ph type="sldNum" idx="5" sz="quarter"/>
+          </p:nvPr>
+        </p:nvSpPr>
+        <p:spPr/>
+      </p:sp>
+    </p:spTree>
+  </p:cSld>
+  <p:clrMapOvr>
+    <a:masterClrMapping/>
+  </p:clrMapOvr>
+</p:notes>
+</file>
+
+<file path=ppt/notesSlides/notesSlide3.xml><?xml version="1.0" encoding="utf-8"?>
+<p:notes xmlns:a="http://schemas.openxmlformats.org/drawingml/2006/main" xmlns:p="http://schemas.openxmlformats.org/presentationml/2006/main" xmlns:r="http://schemas.openxmlformats.org/officeDocument/2006/relationships">
+  <p:cSld>
+    <p:spTree>
+      <p:nvGrpSpPr>
+        <p:cNvPr id="1" name=""/>
+        <p:cNvGrpSpPr/>
+        <p:nvPr/>
+      </p:nvGrpSpPr>
+      <p:grpSpPr>
+        <a:xfrm>
+          <a:off x="0" y="0"/>
+          <a:ext cx="0" cy="0"/>
+          <a:chOff x="0" y="0"/>
+          <a:chExt cx="0" cy="0"/>
+        </a:xfrm>
+      </p:grpSpPr>
+      <p:sp>
+        <p:nvSpPr>
+          <p:cNvPr id="2" name="Slide Image Placeholder 1"/>
+          <p:cNvSpPr>
+            <a:spLocks noGrp="1"/>
+          </p:cNvSpPr>
+          <p:nvPr>
+            <p:ph type="sldImg" idx="2"/>
+          </p:nvPr>
+        </p:nvSpPr>
+        <p:spPr/>
+      </p:sp>
+      <p:sp>
+        <p:nvSpPr>
+          <p:cNvPr id="3" name="Notes Placeholder 2"/>
+          <p:cNvSpPr>
+            <a:spLocks noGrp="1"/>
+          </p:cNvSpPr>
+          <p:nvPr>
+            <p:ph type="body" idx="3" sz="quarter"/>
+          </p:nvPr>
+        </p:nvSpPr>
+        <p:spPr/>
+        <p:txBody>
+          <a:bodyPr/>
+          <a:lstStyle/>
+          <a:p>
+            <a:r>
+              <a:t>Siehe Trainerhandbuch (Sektion 3) für Moderationshinweise, Timing und erwartete Teilnehmerreaktionen.</a:t>
+            </a:r>
+          </a:p>
+        </p:txBody>
+      </p:sp>
+      <p:sp>
+        <p:nvSpPr>
+          <p:cNvPr id="4" name="Slide Number Placeholder 3"/>
+          <p:cNvSpPr>
+            <a:spLocks noGrp="1"/>
+          </p:cNvSpPr>
+          <p:nvPr>
+            <p:ph type="sldNum" idx="5" sz="quarter"/>
+          </p:nvPr>
+        </p:nvSpPr>
+        <p:spPr/>
+      </p:sp>
+    </p:spTree>
+  </p:cSld>
+  <p:clrMapOvr>
+    <a:masterClrMapping/>
+  </p:clrMapOvr>
+</p:notes>
+</file>
+
+<file path=ppt/notesSlides/notesSlide4.xml><?xml version="1.0" encoding="utf-8"?>
+<p:notes xmlns:a="http://schemas.openxmlformats.org/drawingml/2006/main" xmlns:p="http://schemas.openxmlformats.org/presentationml/2006/main" xmlns:r="http://schemas.openxmlformats.org/officeDocument/2006/relationships">
+  <p:cSld>
+    <p:spTree>
+      <p:nvGrpSpPr>
+        <p:cNvPr id="1" name=""/>
+        <p:cNvGrpSpPr/>
+        <p:nvPr/>
+      </p:nvGrpSpPr>
+      <p:grpSpPr>
+        <a:xfrm>
+          <a:off x="0" y="0"/>
+          <a:ext cx="0" cy="0"/>
+          <a:chOff x="0" y="0"/>
+          <a:chExt cx="0" cy="0"/>
+        </a:xfrm>
+      </p:grpSpPr>
+      <p:sp>
+        <p:nvSpPr>
+          <p:cNvPr id="2" name="Slide Image Placeholder 1"/>
+          <p:cNvSpPr>
+            <a:spLocks noGrp="1"/>
+          </p:cNvSpPr>
+          <p:nvPr>
+            <p:ph type="sldImg" idx="2"/>
+          </p:nvPr>
+        </p:nvSpPr>
+        <p:spPr/>
+      </p:sp>
+      <p:sp>
+        <p:nvSpPr>
+          <p:cNvPr id="3" name="Notes Placeholder 2"/>
+          <p:cNvSpPr>
+            <a:spLocks noGrp="1"/>
+          </p:cNvSpPr>
+          <p:nvPr>
+            <p:ph type="body" idx="3" sz="quarter"/>
+          </p:nvPr>
+        </p:nvSpPr>
+        <p:spPr/>
+        <p:txBody>
+          <a:bodyPr/>
+          <a:lstStyle/>
+          <a:p>
+            <a:r>
+              <a:t>Trainer-Hinweis: Das Business Model Canvas ist kein Pflichtbestandteil des Workshop-Ablaufs — es dient als Referenzrahmen und Selbststudium-Werkzeug. Im Workshop-Setting fokussieren wir auf Five Forces, Generische Strategien und SWOT. Teilnehmer, die das BMC vertiefen möchten, finden hier den kreditwirtschaftlichen Übertrag.</a:t>
+            </a:r>
+          </a:p>
+        </p:txBody>
+      </p:sp>
+      <p:sp>
+        <p:nvSpPr>
+          <p:cNvPr id="4" name="Slide Number Placeholder 3"/>
+          <p:cNvSpPr>
+            <a:spLocks noGrp="1"/>
+          </p:cNvSpPr>
+          <p:nvPr>
+            <p:ph type="sldNum" idx="5" sz="quarter"/>
+          </p:nvPr>
+        </p:nvSpPr>
+        <p:spPr/>
+      </p:sp>
+    </p:spTree>
+  </p:cSld>
+  <p:clrMapOvr>
+    <a:masterClrMapping/>
+  </p:clrMapOvr>
+</p:notes>
+</file>
+
+<file path=ppt/notesSlides/notesSlide5.xml><?xml version="1.0" encoding="utf-8"?>
+<p:notes xmlns:a="http://schemas.openxmlformats.org/drawingml/2006/main" xmlns:p="http://schemas.openxmlformats.org/presentationml/2006/main" xmlns:r="http://schemas.openxmlformats.org/officeDocument/2006/relationships">
+  <p:cSld>
+    <p:spTree>
+      <p:nvGrpSpPr>
+        <p:cNvPr id="1" name=""/>
+        <p:cNvGrpSpPr/>
+        <p:nvPr/>
+      </p:nvGrpSpPr>
+      <p:grpSpPr>
+        <a:xfrm>
+          <a:off x="0" y="0"/>
+          <a:ext cx="0" cy="0"/>
+          <a:chOff x="0" y="0"/>
+          <a:chExt cx="0" cy="0"/>
+        </a:xfrm>
+      </p:grpSpPr>
+      <p:sp>
+        <p:nvSpPr>
+          <p:cNvPr id="2" name="Slide Image Placeholder 1"/>
+          <p:cNvSpPr>
+            <a:spLocks noGrp="1"/>
+          </p:cNvSpPr>
+          <p:nvPr>
+            <p:ph type="sldImg" idx="2"/>
+          </p:nvPr>
+        </p:nvSpPr>
+        <p:spPr/>
+      </p:sp>
+      <p:sp>
+        <p:nvSpPr>
+          <p:cNvPr id="3" name="Notes Placeholder 2"/>
+          <p:cNvSpPr>
+            <a:spLocks noGrp="1"/>
+          </p:cNvSpPr>
+          <p:nvPr>
+            <p:ph type="body" idx="3" sz="quarter"/>
+          </p:nvPr>
+        </p:nvSpPr>
+        <p:spPr/>
+        <p:txBody>
+          <a:bodyPr/>
+          <a:lstStyle/>
+          <a:p>
+            <a:r>
+              <a:t>Siehe Trainerhandbuch (Sektion 3) für Moderationshinweise, Timing und erwartete Teilnehmerreaktionen.</a:t>
+            </a:r>
+          </a:p>
+        </p:txBody>
+      </p:sp>
+      <p:sp>
+        <p:nvSpPr>
+          <p:cNvPr id="4" name="Slide Number Placeholder 3"/>
+          <p:cNvSpPr>
+            <a:spLocks noGrp="1"/>
+          </p:cNvSpPr>
+          <p:nvPr>
+            <p:ph type="sldNum" idx="5" sz="quarter"/>
+          </p:nvPr>
+        </p:nvSpPr>
+        <p:spPr/>
+      </p:sp>
+    </p:spTree>
+  </p:cSld>
+  <p:clrMapOvr>
+    <a:masterClrMapping/>
+  </p:clrMapOvr>
+</p:notes>
+</file>
+
+<file path=ppt/notesSlides/notesSlide6.xml><?xml version="1.0" encoding="utf-8"?>
+<p:notes xmlns:a="http://schemas.openxmlformats.org/drawingml/2006/main" xmlns:p="http://schemas.openxmlformats.org/presentationml/2006/main" xmlns:r="http://schemas.openxmlformats.org/officeDocument/2006/relationships">
+  <p:cSld>
+    <p:spTree>
+      <p:nvGrpSpPr>
+        <p:cNvPr id="1" name=""/>
+        <p:cNvGrpSpPr/>
+        <p:nvPr/>
+      </p:nvGrpSpPr>
+      <p:grpSpPr>
+        <a:xfrm>
+          <a:off x="0" y="0"/>
+          <a:ext cx="0" cy="0"/>
+          <a:chOff x="0" y="0"/>
+          <a:chExt cx="0" cy="0"/>
+        </a:xfrm>
+      </p:grpSpPr>
+      <p:sp>
+        <p:nvSpPr>
+          <p:cNvPr id="2" name="Slide Image Placeholder 1"/>
+          <p:cNvSpPr>
+            <a:spLocks noGrp="1"/>
+          </p:cNvSpPr>
+          <p:nvPr>
+            <p:ph type="sldImg" idx="2"/>
+          </p:nvPr>
+        </p:nvSpPr>
+        <p:spPr/>
+      </p:sp>
+      <p:sp>
+        <p:nvSpPr>
+          <p:cNvPr id="3" name="Notes Placeholder 2"/>
+          <p:cNvSpPr>
+            <a:spLocks noGrp="1"/>
+          </p:cNvSpPr>
+          <p:nvPr>
+            <p:ph type="body" idx="3" sz="quarter"/>
+          </p:nvPr>
+        </p:nvSpPr>
+        <p:spPr/>
+        <p:txBody>
+          <a:bodyPr/>
+          <a:lstStyle/>
+          <a:p>
+            <a:r>
+              <a:t>Moderation (HB Sec 3): Gleiche Gruppen. AB-2 und AB-3 gleichzeitig austeilen. AB-2 SWOT: Ergebnisse aus Five Forces in SWOT-Raster übertragen; explizit: „Markieren Sie die drei größten Red Flags für das Kreditvotum." AB-3 Krediturteil: Formulierung in max. 5 Sätzen mit: 1. Strategische Positionierung (max. 2 Sätze) 2. Identifizierte Risikofaktoren mit Fallbezug (1–2 Sätze) 3. Kreditempfehlung mit Bedingung oder Vorbehalt (1 Satz) Häufiger Fehler: Empfehlung ohne Begründung oder Risiken ohne Strategiebezug. Korrekturimpuls: „Ihr Kreditausschuss fragt: Woher wissen Sie das? — Was ist Ihre Antwort?"</a:t>
+            </a:r>
+          </a:p>
+        </p:txBody>
+      </p:sp>
+      <p:sp>
+        <p:nvSpPr>
+          <p:cNvPr id="4" name="Slide Number Placeholder 3"/>
+          <p:cNvSpPr>
+            <a:spLocks noGrp="1"/>
+          </p:cNvSpPr>
+          <p:nvPr>
+            <p:ph type="sldNum" idx="5" sz="quarter"/>
+          </p:nvPr>
+        </p:nvSpPr>
+        <p:spPr/>
+      </p:sp>
+    </p:spTree>
+  </p:cSld>
+  <p:clrMapOvr>
+    <a:masterClrMapping/>
+  </p:clrMapOvr>
+</p:notes>
+</file>
+
+<file path=ppt/notesSlides/notesSlide7.xml><?xml version="1.0" encoding="utf-8"?>
+<p:notes xmlns:a="http://schemas.openxmlformats.org/drawingml/2006/main" xmlns:p="http://schemas.openxmlformats.org/presentationml/2006/main" xmlns:r="http://schemas.openxmlformats.org/officeDocument/2006/relationships">
+  <p:cSld>
+    <p:spTree>
+      <p:nvGrpSpPr>
+        <p:cNvPr id="1" name=""/>
+        <p:cNvGrpSpPr/>
+        <p:nvPr/>
+      </p:nvGrpSpPr>
+      <p:grpSpPr>
+        <a:xfrm>
+          <a:off x="0" y="0"/>
+          <a:ext cx="0" cy="0"/>
+          <a:chOff x="0" y="0"/>
+          <a:chExt cx="0" cy="0"/>
+        </a:xfrm>
+      </p:grpSpPr>
+      <p:sp>
+        <p:nvSpPr>
+          <p:cNvPr id="2" name="Slide Image Placeholder 1"/>
+          <p:cNvSpPr>
+            <a:spLocks noGrp="1"/>
+          </p:cNvSpPr>
+          <p:nvPr>
+            <p:ph type="sldImg" idx="2"/>
+          </p:nvPr>
+        </p:nvSpPr>
+        <p:spPr/>
+      </p:sp>
+      <p:sp>
+        <p:nvSpPr>
+          <p:cNvPr id="3" name="Notes Placeholder 2"/>
+          <p:cNvSpPr>
+            <a:spLocks noGrp="1"/>
+          </p:cNvSpPr>
+          <p:nvPr>
+            <p:ph type="body" idx="3" sz="quarter"/>
+          </p:nvPr>
+        </p:nvSpPr>
+        <p:spPr/>
+        <p:txBody>
+          <a:bodyPr/>
+          <a:lstStyle/>
+          <a:p>
+            <a:r>
+              <a:t>Moderation (HB Sec 3): Methode: Problembasiertes Lernen in Kleingruppen (Barrows, 1986) Fallblatt Haller GmbH austeilen, 2 Minuten Lesezeit, dann AB-1 austeilen. Aufgabenstellung (Trainer liest vor): „Analysieren Sie die Wettbewerbssituation der Haller GmbH mit dem Five-Forces-Modell. Bewerten Sie jede Kraft von 1 (gering) bis 3 (hoch). Bestimmen Sie: Welche generische Strategie verfolgt Haller — oder ist das Unternehmen stuck in the middle? Begründen Sie." Gruppen: 3–4 Personen, 20 Minuten Arbeitszeit. Trainer-Runde durch den Raum (ab Minute 5):</a:t>
+            </a:r>
+          </a:p>
+        </p:txBody>
+      </p:sp>
+      <p:sp>
+        <p:nvSpPr>
+          <p:cNvPr id="4" name="Slide Number Placeholder 3"/>
+          <p:cNvSpPr>
+            <a:spLocks noGrp="1"/>
+          </p:cNvSpPr>
+          <p:nvPr>
+            <p:ph type="sldNum" idx="5" sz="quarter"/>
+          </p:nvPr>
+        </p:nvSpPr>
+        <p:spPr/>
+      </p:sp>
+    </p:spTree>
+  </p:cSld>
+  <p:clrMapOvr>
+    <a:masterClrMapping/>
+  </p:clrMapOvr>
+</p:notes>
+</file>
+
+<file path=ppt/notesSlides/notesSlide8.xml><?xml version="1.0" encoding="utf-8"?>
+<p:notes xmlns:a="http://schemas.openxmlformats.org/drawingml/2006/main" xmlns:p="http://schemas.openxmlformats.org/presentationml/2006/main" xmlns:r="http://schemas.openxmlformats.org/officeDocument/2006/relationships">
+  <p:cSld>
+    <p:spTree>
+      <p:nvGrpSpPr>
+        <p:cNvPr id="1" name=""/>
+        <p:cNvGrpSpPr/>
+        <p:nvPr/>
+      </p:nvGrpSpPr>
+      <p:grpSpPr>
+        <a:xfrm>
+          <a:off x="0" y="0"/>
+          <a:ext cx="0" cy="0"/>
+          <a:chOff x="0" y="0"/>
+          <a:chExt cx="0" cy="0"/>
+        </a:xfrm>
+      </p:grpSpPr>
+      <p:sp>
+        <p:nvSpPr>
+          <p:cNvPr id="2" name="Slide Image Placeholder 1"/>
+          <p:cNvSpPr>
+            <a:spLocks noGrp="1"/>
+          </p:cNvSpPr>
+          <p:nvPr>
+            <p:ph type="sldImg" idx="2"/>
+          </p:nvPr>
+        </p:nvSpPr>
+        <p:spPr/>
+      </p:sp>
+      <p:sp>
+        <p:nvSpPr>
+          <p:cNvPr id="3" name="Notes Placeholder 2"/>
+          <p:cNvSpPr>
+            <a:spLocks noGrp="1"/>
+          </p:cNvSpPr>
+          <p:nvPr>
+            <p:ph type="body" idx="3" sz="quarter"/>
+          </p:nvPr>
+        </p:nvSpPr>
+        <p:spPr/>
+        <p:txBody>
+          <a:bodyPr/>
+          <a:lstStyle/>
+          <a:p>
+            <a:r>
+              <a:t>AB-1 Musterlösung (Trainer-Version)</a:t>
+            </a:r>
+          </a:p>
+          <a:p>
+            <a:r>
+              <a:t>Gesamteinschätzung Branchenattraktivität: mittel bis niedrig. Dominierende Risiken: Kundenklumpen + Niedrigpreiswettbewerb aus Asien. Für die Kreditwürdigkeitsbeurteilung ist die Abhängigkeit von Kunde A das zentrale qualitative Red Flag.</a:t>
+            </a:r>
+          </a:p>
+          <a:p>
+            <a:r>
+              <a:t>Strategische Positionierung: Haller verfolgt implizit eine Differenzierungsstrategie (Qualität, Liefertreue, Präzisions-Know-how). Diese Strategie ist solange tragfähig, wie der Qualitätsvorteil verteidigbar bleibt. Mit dem Eintritt asiatischer Wettbewerber und ohne erkennbare Reinvestition in neue Differenzierungsmerkmale droht jedoch ein Stuck-in-the-Middle: nicht günstig genug für Preiskampf, aber zunehmend weniger differenziert. Klassisches Signal: GF Haller kann vermutlich nicht klar benennen, was das Unternehmen in 5 Jahren noch einzigartig macht.</a:t>
+            </a:r>
+          </a:p>
+          <a:p>
+            <a:r>
+              <a:t>AB-2 Musterlösung (Trainer-Version)</a:t>
+            </a:r>
+          </a:p>
+          <a:p>
+            <a:r>
+              <a:t>Stärken: (1) Langjährige Kundenbindungen, hohe Liefertreue und Qualitätsstandard; (2) Erfahrenes Facharbeiterteam mit spezifischem Präzisions-Know-how (VRIN-Ressource nach Barney, 1991); (3) Gesunde Eigenkapitalquote (31,4 %) und positiver DSCR (1,42x)</a:t>
+            </a:r>
+          </a:p>
+          <a:p>
+            <a:r>
+              <a:t>Schwächen: (1) ! Extreme Kundenabhängigkeit (Kunde A = 60 % Umsatz — Klumpenrisiko); (2) ! Fehlende Nachfolgeplanung (GF 63 Jahre, kein Nachfolger); (3) Veralteter Maschinenpark (Ø 9 Jahre, letzte große Investition 2019)</a:t>
+            </a:r>
+          </a:p>
+          <a:p>
+            <a:r>
+              <a:t>Chancen: (1) Reshoring-Trend — europäische Kunden bauen asiatische Abhängigkeiten ab; (2) Wachstum im Bereich Elektromobilität-Komponenten als Diversifikationsoption; (3) Förderprogramme für KMU-Digitalisierung (z. B. go-digital, BMWi)</a:t>
+            </a:r>
+          </a:p>
+          <a:p>
+            <a:r>
+              <a:t>Risiken: (1) ! Asiatischer Niedrigpreiswettbewerb bereits im Markt; (2) Fachkräfteverlust durch Altersabgänge ohne Nachbesetzung; (3) Abhängigkeit vom Konjunkturzyklus des Maschinenbaus</a:t>
+            </a:r>
+          </a:p>
+          <a:p>
+            <a:r>
+              <a:t>Die drei kritischsten: (1) Klumpenrisiko Kunde A — Wegfall würde Deckungsbeitrag auf 40 % reduzieren; Zahlungsunfähigkeit droht. (2) Nachfolgerisiko GF Haller — kein Managementnachfolger = operatives Schlüsselpersonenrisiko. (3) Preiserosion durch asiatische Wettbewerber — mittelfristige Margenkompression strukturell angelegt.</a:t>
+            </a:r>
+          </a:p>
+          <a:p>
+            <a:r>
+              <a:t>Kreditvorlage-Formulierungsvorschlag: „Die Haller GmbH verfügt über eine solide Bilanzstruktur und ein qualifiziertes Facharbeiterteam als nachhaltige Wettbewerbsressource. Die Kreditwürdigkeit wird jedoch durch drei qualitative Risiken erheblich belastet: das extreme Klumpenrisiko auf Kundenseite (Kunde A: 60 % Umsatzanteil), das ungeklärte Nachfolgeproblem des 63-jährigen Alleingeschäftsführers sowie den strukturell zunehmenden Preisdruck durch asiatische Wettbewerber. Diese Faktoren erfordern eine differenzierte Bewertung und ggf. Absicherungsmaßnahmen im Kreditrahmen."</a:t>
+            </a:r>
+          </a:p>
+        </p:txBody>
+      </p:sp>
+      <p:sp>
+        <p:nvSpPr>
+          <p:cNvPr id="4" name="Slide Number Placeholder 3"/>
+          <p:cNvSpPr>
+            <a:spLocks noGrp="1"/>
+          </p:cNvSpPr>
+          <p:nvPr>
+            <p:ph type="sldNum" idx="5" sz="quarter"/>
+          </p:nvPr>
+        </p:nvSpPr>
+        <p:spPr/>
+      </p:sp>
+    </p:spTree>
+  </p:cSld>
+  <p:clrMapOvr>
+    <a:masterClrMapping/>
+  </p:clrMapOvr>
+</p:notes>
+</file>
+
+<file path=ppt/notesSlides/notesSlide9.xml><?xml version="1.0" encoding="utf-8"?>
+<p:notes xmlns:a="http://schemas.openxmlformats.org/drawingml/2006/main" xmlns:p="http://schemas.openxmlformats.org/presentationml/2006/main" xmlns:r="http://schemas.openxmlformats.org/officeDocument/2006/relationships">
+  <p:cSld>
+    <p:spTree>
+      <p:nvGrpSpPr>
+        <p:cNvPr id="1" name=""/>
+        <p:cNvGrpSpPr/>
+        <p:nvPr/>
+      </p:nvGrpSpPr>
+      <p:grpSpPr>
+        <a:xfrm>
+          <a:off x="0" y="0"/>
+          <a:ext cx="0" cy="0"/>
+          <a:chOff x="0" y="0"/>
+          <a:chExt cx="0" cy="0"/>
+        </a:xfrm>
+      </p:grpSpPr>
+      <p:sp>
+        <p:nvSpPr>
+          <p:cNvPr id="2" name="Slide Image Placeholder 1"/>
+          <p:cNvSpPr>
+            <a:spLocks noGrp="1"/>
+          </p:cNvSpPr>
+          <p:nvPr>
+            <p:ph type="sldImg" idx="2"/>
+          </p:nvPr>
+        </p:nvSpPr>
+        <p:spPr/>
+      </p:sp>
+      <p:sp>
+        <p:nvSpPr>
+          <p:cNvPr id="3" name="Notes Placeholder 2"/>
+          <p:cNvSpPr>
+            <a:spLocks noGrp="1"/>
+          </p:cNvSpPr>
+          <p:nvPr>
+            <p:ph type="body" idx="3" sz="quarter"/>
+          </p:nvPr>
+        </p:nvSpPr>
+        <p:spPr/>
+        <p:txBody>
+          <a:bodyPr/>
+          <a:lstStyle/>
+          <a:p>
+            <a:r>
+              <a:t>Trainer-Hinweis: Die Kennzahlen der Haller GmbH sind quantitativ unauffällig. Genau darin liegt die didaktische Stärke des Fallbeispiels: Teilnehmer sollen erkennen, dass ein auf den ersten Blick gesundes Unternehmen qualitativ erhebliche Risiken trägt, die sich in einer reinen Bilanzanalyse nicht zeigen.</a:t>
+            </a:r>
+          </a:p>
+        </p:txBody>
+      </p:sp>
+      <p:sp>
+        <p:nvSpPr>
+          <p:cNvPr id="4" name="Slide Number Placeholder 3"/>
+          <p:cNvSpPr>
+            <a:spLocks noGrp="1"/>
+          </p:cNvSpPr>
+          <p:nvPr>
+            <p:ph type="sldNum" idx="5" sz="quarter"/>
+          </p:nvPr>
+        </p:nvSpPr>
+        <p:spPr/>
+      </p:sp>
+    </p:spTree>
+  </p:cSld>
+  <p:clrMapOvr>
+    <a:masterClrMapping/>
+  </p:clrMapOvr>
+</p:notes>
 </file>
 
 <file path=ppt/slideLayouts/slideLayout1.xml><?xml version="1.0" encoding="utf-8"?>
@@ -3540,7 +4635,7 @@
                 </a:solidFill>
                 <a:latin typeface="Arial"/>
               </a:rPr>
-              <a:t>v0.1</a:t>
+              <a:t>v0.2</a:t>
             </a:r>
           </a:p>
         </p:txBody>
@@ -4723,7 +5818,7 @@
                 </a:solidFill>
                 <a:latin typeface="JetBrains Mono"/>
               </a:rPr>
-              <a:t>M22  ·  INHALT</a:t>
+              <a:t>M22  ·  ARBEITSBLATT</a:t>
             </a:r>
           </a:p>
         </p:txBody>
@@ -4857,8 +5952,8 @@
         </p:nvSpPr>
         <p:spPr>
           <a:xfrm>
-            <a:off x="685800" y="1417320"/>
-            <a:ext cx="10817352" cy="5029200"/>
+            <a:off x="685800" y="1554480"/>
+            <a:ext cx="10817352" cy="3840480"/>
           </a:xfrm>
           <a:prstGeom prst="rect">
             <a:avLst/>
@@ -4870,25 +5965,6 @@
             <a:spAutoFit/>
           </a:bodyPr>
           <a:lstStyle/>
-          <a:p>
-            <a:pPr>
-              <a:spcBef>
-                <a:spcPts val="1000"/>
-              </a:spcBef>
-              <a:spcAft>
-                <a:spcPts val="200"/>
-              </a:spcAft>
-            </a:pPr>
-            <a:r>
-              <a:rPr sz="800" b="1">
-                <a:solidFill>
-                  <a:srgbClr val="78808C"/>
-                </a:solidFill>
-                <a:latin typeface="JetBrains Mono"/>
-              </a:rPr>
-              <a:t>UNTERNEHMENSPORTRAIT</a:t>
-            </a:r>
-          </a:p>
           <a:p>
             <a:pPr>
               <a:spcBef>
@@ -4899,13 +5975,13 @@
               </a:spcAft>
             </a:pPr>
             <a:r>
-              <a:rPr sz="1200">
+              <a:rPr sz="1400">
                 <a:solidFill>
                   <a:srgbClr val="3D5466"/>
                 </a:solidFill>
                 <a:latin typeface="Arial"/>
               </a:rPr>
-              <a:t>Kennzahlen Geschäftsjahr 2024:</a:t>
+              <a:t>▸  Unternehmensportrait</a:t>
             </a:r>
           </a:p>
           <a:p>
@@ -4918,13 +5994,13 @@
               </a:spcAft>
             </a:pPr>
             <a:r>
-              <a:rPr sz="1200">
+              <a:rPr sz="1400">
                 <a:solidFill>
                   <a:srgbClr val="3D5466"/>
                 </a:solidFill>
                 <a:latin typeface="Arial"/>
               </a:rPr>
-              <a:t>*Branchenbenchmark: VDMA Maschinenbau-Statistik 2024; zeb-Mittelstandsstudie 2023</a:t>
+              <a:t>▸  Kennzahlen Geschäftsjahr 2024:</a:t>
             </a:r>
           </a:p>
           <a:p>
@@ -4937,13 +6013,13 @@
               </a:spcAft>
             </a:pPr>
             <a:r>
-              <a:rPr sz="1200">
+              <a:rPr sz="1400">
                 <a:solidFill>
                   <a:srgbClr val="3D5466"/>
                 </a:solidFill>
                 <a:latin typeface="Arial"/>
               </a:rPr>
-              <a:t>Strategische Ausgangssituation:</a:t>
+              <a:t>▸  *Branchenbenchmark: VDMA Maschinenbau-Statistik 2024; zeb-Mittelstandsstudie 2023</a:t>
             </a:r>
           </a:p>
           <a:p>
@@ -4956,13 +6032,13 @@
               </a:spcAft>
             </a:pPr>
             <a:r>
-              <a:rPr sz="1300">
+              <a:rPr sz="1400">
                 <a:solidFill>
                   <a:srgbClr val="3D5466"/>
                 </a:solidFill>
                 <a:latin typeface="Arial"/>
               </a:rPr>
-              <a:t>▸  Drei Hauptkunden, einer davon (Maschinenbaukonzern aus Baden-Württemberg) stellt 60 % des Jahresumsatzes</a:t>
+              <a:t>▸  Strategische Ausgangssituation:</a:t>
             </a:r>
           </a:p>
           <a:p>
@@ -4975,134 +6051,98 @@
               </a:spcAft>
             </a:pPr>
             <a:r>
-              <a:rPr sz="1300">
+              <a:rPr sz="1400">
                 <a:solidFill>
                   <a:srgbClr val="3D5466"/>
                 </a:solidFill>
                 <a:latin typeface="Arial"/>
               </a:rPr>
-              <a:t>▸  Kein Export; 100 % Inlandsgeschäft, keine Internationalisierungsstrategie vorhanden</a:t>
-            </a:r>
-          </a:p>
-          <a:p>
-            <a:pPr>
-              <a:spcBef>
-                <a:spcPts val="400"/>
-              </a:spcBef>
-              <a:spcAft>
-                <a:spcPts val="200"/>
-              </a:spcAft>
-            </a:pPr>
-            <a:r>
-              <a:rPr sz="1300">
-                <a:solidFill>
-                  <a:srgbClr val="3D5466"/>
+              <a:t>▸  Drei Hauptkunden, einer davon (Maschinenbaukonzern aus Baden-Württemberg) stellt 60 % des Jahresumsatzes</a:t>
+            </a:r>
+          </a:p>
+        </p:txBody>
+      </p:sp>
+      <p:sp>
+        <p:nvSpPr>
+          <p:cNvPr id="9" name="Rectangle 8"/>
+          <p:cNvSpPr/>
+          <p:nvPr/>
+        </p:nvSpPr>
+        <p:spPr>
+          <a:xfrm>
+            <a:off x="685800" y="5486400"/>
+            <a:ext cx="10817352" cy="640080"/>
+          </a:xfrm>
+          <a:prstGeom prst="rect">
+            <a:avLst/>
+          </a:prstGeom>
+          <a:solidFill>
+            <a:srgbClr val="1F2C56"/>
+          </a:solidFill>
+          <a:ln>
+            <a:noFill/>
+          </a:ln>
+        </p:spPr>
+        <p:style>
+          <a:lnRef idx="1">
+            <a:schemeClr val="accent1"/>
+          </a:lnRef>
+          <a:fillRef idx="3">
+            <a:schemeClr val="accent1"/>
+          </a:fillRef>
+          <a:effectRef idx="2">
+            <a:schemeClr val="accent1"/>
+          </a:effectRef>
+          <a:fontRef idx="minor">
+            <a:schemeClr val="lt1"/>
+          </a:fontRef>
+        </p:style>
+        <p:txBody>
+          <a:bodyPr rtlCol="0" anchor="ctr"/>
+          <a:lstStyle/>
+          <a:p>
+            <a:pPr algn="ctr"/>
+          </a:p>
+        </p:txBody>
+      </p:sp>
+      <p:sp>
+        <p:nvSpPr>
+          <p:cNvPr id="10" name="TextBox 9"/>
+          <p:cNvSpPr txBox="1"/>
+          <p:nvPr/>
+        </p:nvSpPr>
+        <p:spPr>
+          <a:xfrm>
+            <a:off x="868680" y="5596128"/>
+            <a:ext cx="10451592" cy="457200"/>
+          </a:xfrm>
+          <a:prstGeom prst="rect">
+            <a:avLst/>
+          </a:prstGeom>
+          <a:noFill/>
+        </p:spPr>
+        <p:txBody>
+          <a:bodyPr wrap="square">
+            <a:spAutoFit/>
+          </a:bodyPr>
+          <a:lstStyle/>
+          <a:p>
+            <a:pPr algn="l"/>
+            <a:r>
+              <a:rPr sz="1300" b="1" i="0">
+                <a:solidFill>
+                  <a:srgbClr val="FFFFFF"/>
                 </a:solidFill>
                 <a:latin typeface="Arial"/>
               </a:rPr>
-              <a:t>▸  Geschäftsführer Andreas Haller (63 Jahre) ist alleiniger GF und Gesellschafter; kein Nachfolger identifiziert</a:t>
-            </a:r>
-          </a:p>
-          <a:p>
-            <a:pPr>
-              <a:spcBef>
-                <a:spcPts val="400"/>
-              </a:spcBef>
-              <a:spcAft>
-                <a:spcPts val="200"/>
-              </a:spcAft>
-            </a:pPr>
-            <a:r>
-              <a:rPr sz="1300">
-                <a:solidFill>
-                  <a:srgbClr val="3D5466"/>
-                </a:solidFill>
-                <a:latin typeface="Arial"/>
-              </a:rPr>
-              <a:t>▸  Zwei asiatische Wettbewerber (Taiwan, China) sind seit 2023 aktiv in den deutschen Markt eingetreten und bieten vergleichbare Teile zu 15–20 % niedrigeren Preisen an</a:t>
-            </a:r>
-          </a:p>
-          <a:p>
-            <a:pPr>
-              <a:spcBef>
-                <a:spcPts val="400"/>
-              </a:spcBef>
-              <a:spcAft>
-                <a:spcPts val="200"/>
-              </a:spcAft>
-            </a:pPr>
-            <a:r>
-              <a:rPr sz="1300">
-                <a:solidFill>
-                  <a:srgbClr val="3D5466"/>
-                </a:solidFill>
-                <a:latin typeface="Arial"/>
-              </a:rPr>
-              <a:t>▸  Maschinen- und Anlagenpark: Durchschnittsalter 9 Jahre; zuletzt größere Investition 2019</a:t>
-            </a:r>
-          </a:p>
-          <a:p>
-            <a:pPr>
-              <a:spcBef>
-                <a:spcPts val="400"/>
-              </a:spcBef>
-              <a:spcAft>
-                <a:spcPts val="200"/>
-              </a:spcAft>
-            </a:pPr>
-            <a:r>
-              <a:rPr sz="1300">
-                <a:solidFill>
-                  <a:srgbClr val="3D5466"/>
-                </a:solidFill>
-                <a:latin typeface="Arial"/>
-              </a:rPr>
-              <a:t>▸  Mitarbeiterstamm: 12 langjährige Facharbeiter (Durchschnittsalter 51 Jahre), kein Ausbildungsprogramm aktiv</a:t>
-            </a:r>
-          </a:p>
-          <a:p>
-            <a:pPr>
-              <a:spcBef>
-                <a:spcPts val="400"/>
-              </a:spcBef>
-              <a:spcAft>
-                <a:spcPts val="200"/>
-              </a:spcAft>
-            </a:pPr>
-            <a:r>
-              <a:rPr sz="1200">
-                <a:solidFill>
-                  <a:srgbClr val="3D5466"/>
-                </a:solidFill>
-                <a:latin typeface="Arial"/>
-              </a:rPr>
-              <a:t>Kreditanfrage: Betriebsmittelkredit 800 TEUR zur Überbrückung eines vorübergehenden Liquiditätsengpasses; Laufzeit 3 Jahre.</a:t>
-            </a:r>
-          </a:p>
-          <a:p>
-            <a:pPr>
-              <a:spcBef>
-                <a:spcPts val="1000"/>
-              </a:spcBef>
-              <a:spcAft>
-                <a:spcPts val="200"/>
-              </a:spcAft>
-            </a:pPr>
-            <a:r>
-              <a:rPr sz="800" b="1">
-                <a:solidFill>
-                  <a:srgbClr val="78808C"/>
-                </a:solidFill>
-                <a:latin typeface="JetBrains Mono"/>
-              </a:rPr>
-              <a:t>FIVE FORCES — BRANCHENANALYSE PRÄZISIONSWERK HALLER</a:t>
-            </a:r>
-          </a:p>
-        </p:txBody>
-      </p:sp>
-      <p:sp>
-        <p:nvSpPr>
-          <p:cNvPr id="9" name="Rectangle 8"/>
+              <a:t>→  Bearbeitung im Teilnehmer-Workbook (Arbeitsblatt mit Ausfüllfeldern)</a:t>
+            </a:r>
+          </a:p>
+        </p:txBody>
+      </p:sp>
+      <p:sp>
+        <p:nvSpPr>
+          <p:cNvPr id="11" name="Rectangle 10"/>
           <p:cNvSpPr/>
           <p:nvPr/>
         </p:nvSpPr>
@@ -5145,7 +6185,7 @@
       </p:sp>
       <p:sp>
         <p:nvSpPr>
-          <p:cNvPr id="10" name="TextBox 9"/>
+          <p:cNvPr id="12" name="TextBox 11"/>
           <p:cNvSpPr txBox="1"/>
           <p:nvPr/>
         </p:nvSpPr>
@@ -9661,4 +10701,324 @@
   </a:objectDefaults>
   <a:extraClrSchemeLst/>
 </a:theme>
+</file>
+
+<file path=ppt/theme/theme2.xml><?xml version="1.0" encoding="utf-8"?>
+<a:theme xmlns:a="http://schemas.openxmlformats.org/drawingml/2006/main" name="Office Theme">
+  <a:themeElements>
+    <a:clrScheme name="Office">
+      <a:dk1>
+        <a:sysClr val="windowText" lastClr="000000"/>
+      </a:dk1>
+      <a:lt1>
+        <a:sysClr val="window" lastClr="FFFFFF"/>
+      </a:lt1>
+      <a:dk2>
+        <a:srgbClr val="1F497D"/>
+      </a:dk2>
+      <a:lt2>
+        <a:srgbClr val="EEECE1"/>
+      </a:lt2>
+      <a:accent1>
+        <a:srgbClr val="4F81BD"/>
+      </a:accent1>
+      <a:accent2>
+        <a:srgbClr val="C0504D"/>
+      </a:accent2>
+      <a:accent3>
+        <a:srgbClr val="9BBB59"/>
+      </a:accent3>
+      <a:accent4>
+        <a:srgbClr val="8064A2"/>
+      </a:accent4>
+      <a:accent5>
+        <a:srgbClr val="4BACC6"/>
+      </a:accent5>
+      <a:accent6>
+        <a:srgbClr val="F79646"/>
+      </a:accent6>
+      <a:hlink>
+        <a:srgbClr val="0000FF"/>
+      </a:hlink>
+      <a:folHlink>
+        <a:srgbClr val="800080"/>
+      </a:folHlink>
+    </a:clrScheme>
+    <a:fontScheme name="Office">
+      <a:majorFont>
+        <a:latin typeface="Calibri"/>
+        <a:ea typeface=""/>
+        <a:cs typeface=""/>
+        <a:font script="Jpan" typeface="ＭＳ Ｐゴシック"/>
+        <a:font script="Hang" typeface="맑은 고딕"/>
+        <a:font script="Hans" typeface="宋体"/>
+        <a:font script="Hant" typeface="新細明體"/>
+        <a:font script="Arab" typeface="Times New Roman"/>
+        <a:font script="Hebr" typeface="Times New Roman"/>
+        <a:font script="Thai" typeface="Angsana New"/>
+        <a:font script="Ethi" typeface="Nyala"/>
+        <a:font script="Beng" typeface="Vrinda"/>
+        <a:font script="Gujr" typeface="Shruti"/>
+        <a:font script="Khmr" typeface="MoolBoran"/>
+        <a:font script="Knda" typeface="Tunga"/>
+        <a:font script="Guru" typeface="Raavi"/>
+        <a:font script="Cans" typeface="Euphemia"/>
+        <a:font script="Cher" typeface="Plantagenet Cherokee"/>
+        <a:font script="Yiii" typeface="Microsoft Yi Baiti"/>
+        <a:font script="Tibt" typeface="Microsoft Himalaya"/>
+        <a:font script="Thaa" typeface="MV Boli"/>
+        <a:font script="Deva" typeface="Mangal"/>
+        <a:font script="Telu" typeface="Gautami"/>
+        <a:font script="Taml" typeface="Latha"/>
+        <a:font script="Syrc" typeface="Estrangelo Edessa"/>
+        <a:font script="Orya" typeface="Kalinga"/>
+        <a:font script="Mlym" typeface="Kartika"/>
+        <a:font script="Laoo" typeface="DokChampa"/>
+        <a:font script="Sinh" typeface="Iskoola Pota"/>
+        <a:font script="Mong" typeface="Mongolian Baiti"/>
+        <a:font script="Viet" typeface="Times New Roman"/>
+        <a:font script="Uigh" typeface="Microsoft Uighur"/>
+        <a:font script="Geor" typeface="Sylfaen"/>
+      </a:majorFont>
+      <a:minorFont>
+        <a:latin typeface="Calibri"/>
+        <a:ea typeface=""/>
+        <a:cs typeface=""/>
+        <a:font script="Jpan" typeface="ＭＳ Ｐゴシック"/>
+        <a:font script="Hang" typeface="맑은 고딕"/>
+        <a:font script="Hans" typeface="宋体"/>
+        <a:font script="Hant" typeface="新細明體"/>
+        <a:font script="Arab" typeface="Arial"/>
+        <a:font script="Hebr" typeface="Arial"/>
+        <a:font script="Thai" typeface="Cordia New"/>
+        <a:font script="Ethi" typeface="Nyala"/>
+        <a:font script="Beng" typeface="Vrinda"/>
+        <a:font script="Gujr" typeface="Shruti"/>
+        <a:font script="Khmr" typeface="DaunPenh"/>
+        <a:font script="Knda" typeface="Tunga"/>
+        <a:font script="Guru" typeface="Raavi"/>
+        <a:font script="Cans" typeface="Euphemia"/>
+        <a:font script="Cher" typeface="Plantagenet Cherokee"/>
+        <a:font script="Yiii" typeface="Microsoft Yi Baiti"/>
+        <a:font script="Tibt" typeface="Microsoft Himalaya"/>
+        <a:font script="Thaa" typeface="MV Boli"/>
+        <a:font script="Deva" typeface="Mangal"/>
+        <a:font script="Telu" typeface="Gautami"/>
+        <a:font script="Taml" typeface="Latha"/>
+        <a:font script="Syrc" typeface="Estrangelo Edessa"/>
+        <a:font script="Orya" typeface="Kalinga"/>
+        <a:font script="Mlym" typeface="Kartika"/>
+        <a:font script="Laoo" typeface="DokChampa"/>
+        <a:font script="Sinh" typeface="Iskoola Pota"/>
+        <a:font script="Mong" typeface="Mongolian Baiti"/>
+        <a:font script="Viet" typeface="Arial"/>
+        <a:font script="Uigh" typeface="Microsoft Uighur"/>
+        <a:font script="Geor" typeface="Sylfaen"/>
+      </a:minorFont>
+    </a:fontScheme>
+    <a:fmtScheme name="Office">
+      <a:fillStyleLst>
+        <a:solidFill>
+          <a:schemeClr val="phClr"/>
+        </a:solidFill>
+        <a:gradFill rotWithShape="1">
+          <a:gsLst>
+            <a:gs pos="0">
+              <a:schemeClr val="phClr">
+                <a:tint val="50000"/>
+                <a:satMod val="300000"/>
+              </a:schemeClr>
+            </a:gs>
+            <a:gs pos="35000">
+              <a:schemeClr val="phClr">
+                <a:tint val="37000"/>
+                <a:satMod val="300000"/>
+              </a:schemeClr>
+            </a:gs>
+            <a:gs pos="100000">
+              <a:schemeClr val="phClr">
+                <a:tint val="15000"/>
+                <a:satMod val="350000"/>
+              </a:schemeClr>
+            </a:gs>
+          </a:gsLst>
+          <a:lin ang="16200000" scaled="1"/>
+        </a:gradFill>
+        <a:gradFill rotWithShape="1">
+          <a:gsLst>
+            <a:gs pos="0">
+              <a:schemeClr val="phClr">
+                <a:tint val="100000"/>
+                <a:shade val="100000"/>
+                <a:satMod val="130000"/>
+              </a:schemeClr>
+            </a:gs>
+            <a:gs pos="100000">
+              <a:schemeClr val="phClr">
+                <a:tint val="50000"/>
+                <a:shade val="100000"/>
+                <a:satMod val="350000"/>
+              </a:schemeClr>
+            </a:gs>
+          </a:gsLst>
+          <a:lin ang="16200000" scaled="0"/>
+        </a:gradFill>
+      </a:fillStyleLst>
+      <a:lnStyleLst>
+        <a:ln w="9525" cap="flat" cmpd="sng" algn="ctr">
+          <a:solidFill>
+            <a:schemeClr val="phClr">
+              <a:shade val="95000"/>
+              <a:satMod val="105000"/>
+            </a:schemeClr>
+          </a:solidFill>
+          <a:prstDash val="solid"/>
+        </a:ln>
+        <a:ln w="25400" cap="flat" cmpd="sng" algn="ctr">
+          <a:solidFill>
+            <a:schemeClr val="phClr"/>
+          </a:solidFill>
+          <a:prstDash val="solid"/>
+        </a:ln>
+        <a:ln w="38100" cap="flat" cmpd="sng" algn="ctr">
+          <a:solidFill>
+            <a:schemeClr val="phClr"/>
+          </a:solidFill>
+          <a:prstDash val="solid"/>
+        </a:ln>
+      </a:lnStyleLst>
+      <a:effectStyleLst>
+        <a:effectStyle>
+          <a:effectLst>
+            <a:outerShdw blurRad="40000" dist="20000" dir="5400000" rotWithShape="0">
+              <a:srgbClr val="000000">
+                <a:alpha val="38000"/>
+              </a:srgbClr>
+            </a:outerShdw>
+          </a:effectLst>
+        </a:effectStyle>
+        <a:effectStyle>
+          <a:effectLst>
+            <a:outerShdw blurRad="40000" dist="23000" dir="5400000" rotWithShape="0">
+              <a:srgbClr val="000000">
+                <a:alpha val="35000"/>
+              </a:srgbClr>
+            </a:outerShdw>
+          </a:effectLst>
+        </a:effectStyle>
+        <a:effectStyle>
+          <a:effectLst>
+            <a:outerShdw blurRad="40000" dist="23000" dir="5400000" rotWithShape="0">
+              <a:srgbClr val="000000">
+                <a:alpha val="35000"/>
+              </a:srgbClr>
+            </a:outerShdw>
+          </a:effectLst>
+          <a:scene3d>
+            <a:camera prst="orthographicFront">
+              <a:rot lat="0" lon="0" rev="0"/>
+            </a:camera>
+            <a:lightRig rig="threePt" dir="t">
+              <a:rot lat="0" lon="0" rev="1200000"/>
+            </a:lightRig>
+          </a:scene3d>
+          <a:sp3d>
+            <a:bevelT w="63500" h="25400"/>
+          </a:sp3d>
+        </a:effectStyle>
+      </a:effectStyleLst>
+      <a:bgFillStyleLst>
+        <a:solidFill>
+          <a:schemeClr val="phClr"/>
+        </a:solidFill>
+        <a:gradFill rotWithShape="1">
+          <a:gsLst>
+            <a:gs pos="0">
+              <a:schemeClr val="phClr">
+                <a:tint val="40000"/>
+                <a:satMod val="350000"/>
+              </a:schemeClr>
+            </a:gs>
+            <a:gs pos="40000">
+              <a:schemeClr val="phClr">
+                <a:tint val="45000"/>
+                <a:shade val="99000"/>
+                <a:satMod val="350000"/>
+              </a:schemeClr>
+            </a:gs>
+            <a:gs pos="100000">
+              <a:schemeClr val="phClr">
+                <a:shade val="20000"/>
+                <a:satMod val="255000"/>
+              </a:schemeClr>
+            </a:gs>
+          </a:gsLst>
+          <a:path path="circle">
+            <a:fillToRect l="50000" t="-80000" r="50000" b="180000"/>
+          </a:path>
+        </a:gradFill>
+        <a:gradFill rotWithShape="1">
+          <a:gsLst>
+            <a:gs pos="0">
+              <a:schemeClr val="phClr">
+                <a:tint val="80000"/>
+                <a:satMod val="300000"/>
+              </a:schemeClr>
+            </a:gs>
+            <a:gs pos="100000">
+              <a:schemeClr val="phClr">
+                <a:shade val="30000"/>
+                <a:satMod val="200000"/>
+              </a:schemeClr>
+            </a:gs>
+          </a:gsLst>
+          <a:path path="circle">
+            <a:fillToRect l="50000" t="50000" r="50000" b="50000"/>
+          </a:path>
+        </a:gradFill>
+      </a:bgFillStyleLst>
+    </a:fmtScheme>
+  </a:themeElements>
+  <a:objectDefaults>
+    <a:spDef>
+      <a:spPr/>
+      <a:bodyPr/>
+      <a:lstStyle/>
+      <a:style>
+        <a:lnRef idx="1">
+          <a:schemeClr val="accent1"/>
+        </a:lnRef>
+        <a:fillRef idx="3">
+          <a:schemeClr val="accent1"/>
+        </a:fillRef>
+        <a:effectRef idx="2">
+          <a:schemeClr val="accent1"/>
+        </a:effectRef>
+        <a:fontRef idx="minor">
+          <a:schemeClr val="lt1"/>
+        </a:fontRef>
+      </a:style>
+    </a:spDef>
+    <a:lnDef>
+      <a:spPr/>
+      <a:bodyPr/>
+      <a:lstStyle/>
+      <a:style>
+        <a:lnRef idx="2">
+          <a:schemeClr val="accent1"/>
+        </a:lnRef>
+        <a:fillRef idx="0">
+          <a:schemeClr val="accent1"/>
+        </a:fillRef>
+        <a:effectRef idx="1">
+          <a:schemeClr val="accent1"/>
+        </a:effectRef>
+        <a:fontRef idx="minor">
+          <a:schemeClr val="tx1"/>
+        </a:fontRef>
+      </a:style>
+    </a:lnDef>
+  </a:objectDefaults>
+  <a:extraClrSchemeLst/>
+</a:theme>
 </file>
--- a/protected-downloads/praesentation/M22.pptx
+++ b/protected-downloads/praesentation/M22.pptx
@@ -19,6 +19,8 @@
     <p:sldId id="267" r:id="rId19"/>
     <p:sldId id="268" r:id="rId20"/>
     <p:sldId id="269" r:id="rId21"/>
+    <p:sldId id="270" r:id="rId22"/>
+    <p:sldId id="271" r:id="rId23"/>
   </p:sldIdLst>
   <p:sldSz cx="12188952" cy="6858000" type="screen4x3"/>
   <p:notesSz cx="6858000" cy="9144000"/>
@@ -5008,7 +5010,7 @@
                 </a:solidFill>
                 <a:latin typeface="Source Serif 4"/>
               </a:rPr>
-              <a:t>Framework 3: SWOT als Kreditrisikofilter</a:t>
+              <a:t>Framework 2: Business Model Canvas als Robustheitscheck</a:t>
             </a:r>
           </a:p>
         </p:txBody>
@@ -5050,7 +5052,7 @@
                 </a:solidFill>
                 <a:latin typeface="JetBrains Mono"/>
               </a:rPr>
-              <a:t>VON DER STRATEGISCHEN SWOT ZUR RISIKOKLASSIFIZIERUNG</a:t>
+              <a:t>GRUNDSTRUKTUR</a:t>
             </a:r>
           </a:p>
           <a:p>
@@ -5069,7 +5071,7 @@
                 </a:solidFill>
                 <a:latin typeface="Arial"/>
               </a:rPr>
-              <a:t>Kreditrelevante SWOT-Lesart:</a:t>
+              <a:t>Gruppe A – Ertragsstabilität (rechte Canvas-Seite)</a:t>
             </a:r>
           </a:p>
           <a:p>
@@ -5088,64 +5090,7 @@
                 </a:solidFill>
                 <a:latin typeface="Arial"/>
               </a:rPr>
-              <a:t>Kritische Hinweise zur SWOT im Kreditkontext (nach Welge &amp; Al-Laham, 2012):</a:t>
-            </a:r>
-          </a:p>
-          <a:p>
-            <a:pPr>
-              <a:spcBef>
-                <a:spcPts val="400"/>
-              </a:spcBef>
-              <a:spcAft>
-                <a:spcPts val="200"/>
-              </a:spcAft>
-            </a:pPr>
-            <a:r>
-              <a:rPr sz="1300">
-                <a:solidFill>
-                  <a:srgbClr val="3D5466"/>
-                </a:solidFill>
-                <a:latin typeface="Arial"/>
-              </a:rPr>
-              <a:t>▸  Alle Faktoren erscheinen formal gleichwertig — Berater müssen aktiv gewichten</a:t>
-            </a:r>
-          </a:p>
-          <a:p>
-            <a:pPr>
-              <a:spcBef>
-                <a:spcPts val="400"/>
-              </a:spcBef>
-              <a:spcAft>
-                <a:spcPts val="200"/>
-              </a:spcAft>
-            </a:pPr>
-            <a:r>
-              <a:rPr sz="1300">
-                <a:solidFill>
-                  <a:srgbClr val="3D5466"/>
-                </a:solidFill>
-                <a:latin typeface="Arial"/>
-              </a:rPr>
-              <a:t>▸  Subjektive Unternehmersicht dominiert; externe Verifikation (z. B. Branchendaten) ist nötig</a:t>
-            </a:r>
-          </a:p>
-          <a:p>
-            <a:pPr>
-              <a:spcBef>
-                <a:spcPts val="400"/>
-              </a:spcBef>
-              <a:spcAft>
-                <a:spcPts val="200"/>
-              </a:spcAft>
-            </a:pPr>
-            <a:r>
-              <a:rPr sz="1300">
-                <a:solidFill>
-                  <a:srgbClr val="3D5466"/>
-                </a:solidFill>
-                <a:latin typeface="Arial"/>
-              </a:rPr>
-              <a:t>▸  Die SWOT liefert ein Lagebild, keine Prognose; strategische Dynamik muss separat eingeschätzt werden</a:t>
+              <a:t>Gruppe B – Kostenstruktur &amp; Abhängigkeiten (linke Canvas-Seite)</a:t>
             </a:r>
           </a:p>
         </p:txBody>
@@ -5483,7 +5428,7 @@
                 </a:solidFill>
                 <a:latin typeface="Source Serif 4"/>
               </a:rPr>
-              <a:t>Framework 4: Strategische Ressourcenstärke (Resource-based View)</a:t>
+              <a:t>Framework 3: SWOT als Kreditrisikofilter</a:t>
             </a:r>
           </a:p>
         </p:txBody>
@@ -5509,6 +5454,25 @@
             <a:spAutoFit/>
           </a:bodyPr>
           <a:lstStyle/>
+          <a:p>
+            <a:pPr>
+              <a:spcBef>
+                <a:spcPts val="1000"/>
+              </a:spcBef>
+              <a:spcAft>
+                <a:spcPts val="200"/>
+              </a:spcAft>
+            </a:pPr>
+            <a:r>
+              <a:rPr sz="800" b="1">
+                <a:solidFill>
+                  <a:srgbClr val="78808C"/>
+                </a:solidFill>
+                <a:latin typeface="JetBrains Mono"/>
+              </a:rPr>
+              <a:t>VON DER STRATEGISCHEN SWOT ZUR RISIKOKLASSIFIZIERUNG</a:t>
+            </a:r>
+          </a:p>
           <a:p>
             <a:pPr>
               <a:spcBef>
@@ -5525,7 +5489,7 @@
                 </a:solidFill>
                 <a:latin typeface="Arial"/>
               </a:rPr>
-              <a:t>Beispiele kreditrelevanter VRIN-Ressourcen im Mittelstand:</a:t>
+              <a:t>Kreditrelevante SWOT-Lesart:</a:t>
             </a:r>
           </a:p>
           <a:p>
@@ -5538,13 +5502,13 @@
               </a:spcAft>
             </a:pPr>
             <a:r>
-              <a:rPr sz="1300">
+              <a:rPr sz="1200">
                 <a:solidFill>
                   <a:srgbClr val="3D5466"/>
                 </a:solidFill>
                 <a:latin typeface="Arial"/>
               </a:rPr>
-              <a:t>▸  Spezialisiertes Know-how mit langjähriger Entwicklungszeit (schwer zu kopieren)</a:t>
+              <a:t>Kritische Hinweise zur SWOT im Kreditkontext (nach Welge &amp; Al-Laham, 2012):</a:t>
             </a:r>
           </a:p>
           <a:p>
@@ -5563,7 +5527,7 @@
                 </a:solidFill>
                 <a:latin typeface="Arial"/>
               </a:rPr>
-              <a:t>▸  Exklusivlieferantenverträge oder Zulassungen (selten, nicht substituierbar)</a:t>
+              <a:t>▸  Alle Faktoren erscheinen formal gleichwertig — Berater müssen aktiv gewichten</a:t>
             </a:r>
           </a:p>
           <a:p>
@@ -5582,7 +5546,7 @@
                 </a:solidFill>
                 <a:latin typeface="Arial"/>
               </a:rPr>
-              <a:t>▸  Langfristige Kundenbeziehungen mit Wechselkosten auf Kundenseite (wertvoll, nicht imitierbar)</a:t>
+              <a:t>▸  Subjektive Unternehmersicht dominiert; externe Verifikation (z. B. Branchendaten) ist nötig</a:t>
             </a:r>
           </a:p>
           <a:p>
@@ -5601,7 +5565,7 @@
                 </a:solidFill>
                 <a:latin typeface="Arial"/>
               </a:rPr>
-              <a:t>▸  Qualifizierte Fachkräfte mit spezifischer Expertise (Schlüsselpersonenrisiko = Kehrseite)</a:t>
+              <a:t>▸  Die SWOT liefert ein Lagebild, keine Prognose; strategische Dynamik muss separat eingeschätzt werden</a:t>
             </a:r>
           </a:p>
         </p:txBody>
@@ -5818,7 +5782,7 @@
                 </a:solidFill>
                 <a:latin typeface="JetBrains Mono"/>
               </a:rPr>
-              <a:t>M22  ·  ARBEITSBLATT</a:t>
+              <a:t>M22  ·  INHALT</a:t>
             </a:r>
           </a:p>
         </p:txBody>
@@ -5939,7 +5903,7 @@
                 </a:solidFill>
                 <a:latin typeface="Source Serif 4"/>
               </a:rPr>
-              <a:t>Praxisfall: Präzisionswerk Haller GmbH</a:t>
+              <a:t>Framework 4: Strategische Ressourcenstärke (Resource-based View)</a:t>
             </a:r>
           </a:p>
         </p:txBody>
@@ -5952,8 +5916,8 @@
         </p:nvSpPr>
         <p:spPr>
           <a:xfrm>
-            <a:off x="685800" y="1554480"/>
-            <a:ext cx="10817352" cy="3840480"/>
+            <a:off x="685800" y="1417320"/>
+            <a:ext cx="10817352" cy="5029200"/>
           </a:xfrm>
           <a:prstGeom prst="rect">
             <a:avLst/>
@@ -5975,13 +5939,13 @@
               </a:spcAft>
             </a:pPr>
             <a:r>
-              <a:rPr sz="1400">
+              <a:rPr sz="1200">
                 <a:solidFill>
                   <a:srgbClr val="3D5466"/>
                 </a:solidFill>
                 <a:latin typeface="Arial"/>
               </a:rPr>
-              <a:t>▸  Unternehmensportrait</a:t>
+              <a:t>Beispiele kreditrelevanter VRIN-Ressourcen im Mittelstand:</a:t>
             </a:r>
           </a:p>
           <a:p>
@@ -5994,13 +5958,13 @@
               </a:spcAft>
             </a:pPr>
             <a:r>
-              <a:rPr sz="1400">
+              <a:rPr sz="1300">
                 <a:solidFill>
                   <a:srgbClr val="3D5466"/>
                 </a:solidFill>
                 <a:latin typeface="Arial"/>
               </a:rPr>
-              <a:t>▸  Kennzahlen Geschäftsjahr 2024:</a:t>
+              <a:t>▸  Spezialisiertes Know-how mit langjähriger Entwicklungszeit (schwer zu kopieren)</a:t>
             </a:r>
           </a:p>
           <a:p>
@@ -6013,13 +5977,13 @@
               </a:spcAft>
             </a:pPr>
             <a:r>
-              <a:rPr sz="1400">
+              <a:rPr sz="1300">
                 <a:solidFill>
                   <a:srgbClr val="3D5466"/>
                 </a:solidFill>
                 <a:latin typeface="Arial"/>
               </a:rPr>
-              <a:t>▸  *Branchenbenchmark: VDMA Maschinenbau-Statistik 2024; zeb-Mittelstandsstudie 2023</a:t>
+              <a:t>▸  Exklusivlieferantenverträge oder Zulassungen (selten, nicht substituierbar)</a:t>
             </a:r>
           </a:p>
           <a:p>
@@ -6032,13 +5996,13 @@
               </a:spcAft>
             </a:pPr>
             <a:r>
-              <a:rPr sz="1400">
+              <a:rPr sz="1300">
                 <a:solidFill>
                   <a:srgbClr val="3D5466"/>
                 </a:solidFill>
                 <a:latin typeface="Arial"/>
               </a:rPr>
-              <a:t>▸  Strategische Ausgangssituation:</a:t>
+              <a:t>▸  Langfristige Kundenbeziehungen mit Wechselkosten auf Kundenseite (wertvoll, nicht imitierbar)</a:t>
             </a:r>
           </a:p>
           <a:p>
@@ -6051,13 +6015,13 @@
               </a:spcAft>
             </a:pPr>
             <a:r>
-              <a:rPr sz="1400">
+              <a:rPr sz="1300">
                 <a:solidFill>
                   <a:srgbClr val="3D5466"/>
                 </a:solidFill>
                 <a:latin typeface="Arial"/>
               </a:rPr>
-              <a:t>▸  Drei Hauptkunden, einer davon (Maschinenbaukonzern aus Baden-Württemberg) stellt 60 % des Jahresumsatzes</a:t>
+              <a:t>▸  Qualifizierte Fachkräfte mit spezifischer Expertise (Schlüsselpersonenrisiko = Kehrseite)</a:t>
             </a:r>
           </a:p>
         </p:txBody>
@@ -6065,84 +6029,6 @@
       <p:sp>
         <p:nvSpPr>
           <p:cNvPr id="9" name="Rectangle 8"/>
-          <p:cNvSpPr/>
-          <p:nvPr/>
-        </p:nvSpPr>
-        <p:spPr>
-          <a:xfrm>
-            <a:off x="685800" y="5486400"/>
-            <a:ext cx="10817352" cy="640080"/>
-          </a:xfrm>
-          <a:prstGeom prst="rect">
-            <a:avLst/>
-          </a:prstGeom>
-          <a:solidFill>
-            <a:srgbClr val="1F2C56"/>
-          </a:solidFill>
-          <a:ln>
-            <a:noFill/>
-          </a:ln>
-        </p:spPr>
-        <p:style>
-          <a:lnRef idx="1">
-            <a:schemeClr val="accent1"/>
-          </a:lnRef>
-          <a:fillRef idx="3">
-            <a:schemeClr val="accent1"/>
-          </a:fillRef>
-          <a:effectRef idx="2">
-            <a:schemeClr val="accent1"/>
-          </a:effectRef>
-          <a:fontRef idx="minor">
-            <a:schemeClr val="lt1"/>
-          </a:fontRef>
-        </p:style>
-        <p:txBody>
-          <a:bodyPr rtlCol="0" anchor="ctr"/>
-          <a:lstStyle/>
-          <a:p>
-            <a:pPr algn="ctr"/>
-          </a:p>
-        </p:txBody>
-      </p:sp>
-      <p:sp>
-        <p:nvSpPr>
-          <p:cNvPr id="10" name="TextBox 9"/>
-          <p:cNvSpPr txBox="1"/>
-          <p:nvPr/>
-        </p:nvSpPr>
-        <p:spPr>
-          <a:xfrm>
-            <a:off x="868680" y="5596128"/>
-            <a:ext cx="10451592" cy="457200"/>
-          </a:xfrm>
-          <a:prstGeom prst="rect">
-            <a:avLst/>
-          </a:prstGeom>
-          <a:noFill/>
-        </p:spPr>
-        <p:txBody>
-          <a:bodyPr wrap="square">
-            <a:spAutoFit/>
-          </a:bodyPr>
-          <a:lstStyle/>
-          <a:p>
-            <a:pPr algn="l"/>
-            <a:r>
-              <a:rPr sz="1300" b="1" i="0">
-                <a:solidFill>
-                  <a:srgbClr val="FFFFFF"/>
-                </a:solidFill>
-                <a:latin typeface="Arial"/>
-              </a:rPr>
-              <a:t>→  Bearbeitung im Teilnehmer-Workbook (Arbeitsblatt mit Ausfüllfeldern)</a:t>
-            </a:r>
-          </a:p>
-        </p:txBody>
-      </p:sp>
-      <p:sp>
-        <p:nvSpPr>
-          <p:cNvPr id="11" name="Rectangle 10"/>
           <p:cNvSpPr/>
           <p:nvPr/>
         </p:nvSpPr>
@@ -6185,7 +6071,7 @@
       </p:sp>
       <p:sp>
         <p:nvSpPr>
-          <p:cNvPr id="12" name="TextBox 11"/>
+          <p:cNvPr id="10" name="TextBox 9"/>
           <p:cNvSpPr txBox="1"/>
           <p:nvPr/>
         </p:nvSpPr>
@@ -6352,7 +6238,7 @@
                 </a:solidFill>
                 <a:latin typeface="JetBrains Mono"/>
               </a:rPr>
-              <a:t>M22  ·  INHALT</a:t>
+              <a:t>M22  ·  ARBEITSBLATT</a:t>
             </a:r>
           </a:p>
         </p:txBody>
@@ -6473,7 +6359,7 @@
                 </a:solidFill>
                 <a:latin typeface="Source Serif 4"/>
               </a:rPr>
-              <a:t>Kennzahlen- und Formelkarte: Qualitative Kreditwürdigkeitsanalyse</a:t>
+              <a:t>Praxisfall: Präzisionswerk Haller GmbH</a:t>
             </a:r>
           </a:p>
         </p:txBody>
@@ -6486,8 +6372,8 @@
         </p:nvSpPr>
         <p:spPr>
           <a:xfrm>
-            <a:off x="685800" y="1417320"/>
-            <a:ext cx="10817352" cy="5029200"/>
+            <a:off x="685800" y="1554480"/>
+            <a:ext cx="10817352" cy="3840480"/>
           </a:xfrm>
           <a:prstGeom prst="rect">
             <a:avLst/>
@@ -6502,39 +6388,96 @@
           <a:p>
             <a:pPr>
               <a:spcBef>
-                <a:spcPts val="1000"/>
+                <a:spcPts val="400"/>
               </a:spcBef>
               <a:spcAft>
                 <a:spcPts val="200"/>
               </a:spcAft>
             </a:pPr>
             <a:r>
-              <a:rPr sz="800" b="1">
-                <a:solidFill>
-                  <a:srgbClr val="78808C"/>
-                </a:solidFill>
-                <a:latin typeface="JetBrains Mono"/>
+              <a:rPr sz="1400">
+                <a:solidFill>
+                  <a:srgbClr val="3D5466"/>
+                </a:solidFill>
+                <a:latin typeface="Arial"/>
               </a:rPr>
-              <a:t>STRATEGISCHE RED-FLAG-CHECKLISTE</a:t>
+              <a:t>▸  Unternehmensportrait</a:t>
             </a:r>
           </a:p>
           <a:p>
             <a:pPr>
               <a:spcBef>
-                <a:spcPts val="1000"/>
+                <a:spcPts val="400"/>
               </a:spcBef>
               <a:spcAft>
                 <a:spcPts val="200"/>
               </a:spcAft>
             </a:pPr>
             <a:r>
-              <a:rPr sz="800" b="1">
-                <a:solidFill>
-                  <a:srgbClr val="78808C"/>
-                </a:solidFill>
-                <a:latin typeface="JetBrains Mono"/>
+              <a:rPr sz="1400">
+                <a:solidFill>
+                  <a:srgbClr val="3D5466"/>
+                </a:solidFill>
+                <a:latin typeface="Arial"/>
               </a:rPr>
-              <a:t>QUANTITATIVE UNTERSTÜTZUNGSKENNZAHLEN</a:t>
+              <a:t>▸  Kennzahlen Geschäftsjahr 2024:</a:t>
+            </a:r>
+          </a:p>
+          <a:p>
+            <a:pPr>
+              <a:spcBef>
+                <a:spcPts val="400"/>
+              </a:spcBef>
+              <a:spcAft>
+                <a:spcPts val="200"/>
+              </a:spcAft>
+            </a:pPr>
+            <a:r>
+              <a:rPr sz="1400">
+                <a:solidFill>
+                  <a:srgbClr val="3D5466"/>
+                </a:solidFill>
+                <a:latin typeface="Arial"/>
+              </a:rPr>
+              <a:t>▸  *Branchenbenchmark: VDMA Maschinenbau-Statistik 2024; zeb-Mittelstandsstudie 2023</a:t>
+            </a:r>
+          </a:p>
+          <a:p>
+            <a:pPr>
+              <a:spcBef>
+                <a:spcPts val="400"/>
+              </a:spcBef>
+              <a:spcAft>
+                <a:spcPts val="200"/>
+              </a:spcAft>
+            </a:pPr>
+            <a:r>
+              <a:rPr sz="1400">
+                <a:solidFill>
+                  <a:srgbClr val="3D5466"/>
+                </a:solidFill>
+                <a:latin typeface="Arial"/>
+              </a:rPr>
+              <a:t>▸  Strategische Ausgangssituation:</a:t>
+            </a:r>
+          </a:p>
+          <a:p>
+            <a:pPr>
+              <a:spcBef>
+                <a:spcPts val="400"/>
+              </a:spcBef>
+              <a:spcAft>
+                <a:spcPts val="200"/>
+              </a:spcAft>
+            </a:pPr>
+            <a:r>
+              <a:rPr sz="1400">
+                <a:solidFill>
+                  <a:srgbClr val="3D5466"/>
+                </a:solidFill>
+                <a:latin typeface="Arial"/>
+              </a:rPr>
+              <a:t>▸  Drei Hauptkunden, einer davon (Maschinenbaukonzern aus Baden-Württemberg) stellt 60 % des Jahresumsatzes</a:t>
             </a:r>
           </a:p>
         </p:txBody>
@@ -6542,6 +6485,84 @@
       <p:sp>
         <p:nvSpPr>
           <p:cNvPr id="9" name="Rectangle 8"/>
+          <p:cNvSpPr/>
+          <p:nvPr/>
+        </p:nvSpPr>
+        <p:spPr>
+          <a:xfrm>
+            <a:off x="685800" y="5486400"/>
+            <a:ext cx="10817352" cy="640080"/>
+          </a:xfrm>
+          <a:prstGeom prst="rect">
+            <a:avLst/>
+          </a:prstGeom>
+          <a:solidFill>
+            <a:srgbClr val="1F2C56"/>
+          </a:solidFill>
+          <a:ln>
+            <a:noFill/>
+          </a:ln>
+        </p:spPr>
+        <p:style>
+          <a:lnRef idx="1">
+            <a:schemeClr val="accent1"/>
+          </a:lnRef>
+          <a:fillRef idx="3">
+            <a:schemeClr val="accent1"/>
+          </a:fillRef>
+          <a:effectRef idx="2">
+            <a:schemeClr val="accent1"/>
+          </a:effectRef>
+          <a:fontRef idx="minor">
+            <a:schemeClr val="lt1"/>
+          </a:fontRef>
+        </p:style>
+        <p:txBody>
+          <a:bodyPr rtlCol="0" anchor="ctr"/>
+          <a:lstStyle/>
+          <a:p>
+            <a:pPr algn="ctr"/>
+          </a:p>
+        </p:txBody>
+      </p:sp>
+      <p:sp>
+        <p:nvSpPr>
+          <p:cNvPr id="10" name="TextBox 9"/>
+          <p:cNvSpPr txBox="1"/>
+          <p:nvPr/>
+        </p:nvSpPr>
+        <p:spPr>
+          <a:xfrm>
+            <a:off x="868680" y="5596128"/>
+            <a:ext cx="10451592" cy="457200"/>
+          </a:xfrm>
+          <a:prstGeom prst="rect">
+            <a:avLst/>
+          </a:prstGeom>
+          <a:noFill/>
+        </p:spPr>
+        <p:txBody>
+          <a:bodyPr wrap="square">
+            <a:spAutoFit/>
+          </a:bodyPr>
+          <a:lstStyle/>
+          <a:p>
+            <a:pPr algn="l"/>
+            <a:r>
+              <a:rPr sz="1300" b="1" i="0">
+                <a:solidFill>
+                  <a:srgbClr val="FFFFFF"/>
+                </a:solidFill>
+                <a:latin typeface="Arial"/>
+              </a:rPr>
+              <a:t>→  Bearbeitung im Teilnehmer-Workbook (Arbeitsblatt mit Ausfüllfeldern)</a:t>
+            </a:r>
+          </a:p>
+        </p:txBody>
+      </p:sp>
+      <p:sp>
+        <p:nvSpPr>
+          <p:cNvPr id="11" name="Rectangle 10"/>
           <p:cNvSpPr/>
           <p:nvPr/>
         </p:nvSpPr>
@@ -6584,7 +6605,7 @@
       </p:sp>
       <p:sp>
         <p:nvSpPr>
-          <p:cNvPr id="10" name="TextBox 9"/>
+          <p:cNvPr id="12" name="TextBox 11"/>
           <p:cNvSpPr txBox="1"/>
           <p:nvPr/>
         </p:nvSpPr>
@@ -6872,6 +6893,759 @@
                 </a:solidFill>
                 <a:latin typeface="Source Serif 4"/>
               </a:rPr>
+              <a:t>Kennzahlen- und Formelkarte: Qualitative Kreditwürdigkeitsanalyse</a:t>
+            </a:r>
+          </a:p>
+        </p:txBody>
+      </p:sp>
+      <p:sp>
+        <p:nvSpPr>
+          <p:cNvPr id="8" name="TextBox 7"/>
+          <p:cNvSpPr txBox="1"/>
+          <p:nvPr/>
+        </p:nvSpPr>
+        <p:spPr>
+          <a:xfrm>
+            <a:off x="685800" y="1417320"/>
+            <a:ext cx="10817352" cy="5029200"/>
+          </a:xfrm>
+          <a:prstGeom prst="rect">
+            <a:avLst/>
+          </a:prstGeom>
+          <a:noFill/>
+        </p:spPr>
+        <p:txBody>
+          <a:bodyPr wrap="square">
+            <a:spAutoFit/>
+          </a:bodyPr>
+          <a:lstStyle/>
+          <a:p>
+            <a:pPr>
+              <a:spcBef>
+                <a:spcPts val="1000"/>
+              </a:spcBef>
+              <a:spcAft>
+                <a:spcPts val="200"/>
+              </a:spcAft>
+            </a:pPr>
+            <a:r>
+              <a:rPr sz="800" b="1">
+                <a:solidFill>
+                  <a:srgbClr val="78808C"/>
+                </a:solidFill>
+                <a:latin typeface="JetBrains Mono"/>
+              </a:rPr>
+              <a:t>STRATEGISCHE RED-FLAG-CHECKLISTE</a:t>
+            </a:r>
+          </a:p>
+          <a:p>
+            <a:pPr>
+              <a:spcBef>
+                <a:spcPts val="1000"/>
+              </a:spcBef>
+              <a:spcAft>
+                <a:spcPts val="200"/>
+              </a:spcAft>
+            </a:pPr>
+            <a:r>
+              <a:rPr sz="800" b="1">
+                <a:solidFill>
+                  <a:srgbClr val="78808C"/>
+                </a:solidFill>
+                <a:latin typeface="JetBrains Mono"/>
+              </a:rPr>
+              <a:t>QUANTITATIVE UNTERSTÜTZUNGSKENNZAHLEN</a:t>
+            </a:r>
+          </a:p>
+        </p:txBody>
+      </p:sp>
+      <p:sp>
+        <p:nvSpPr>
+          <p:cNvPr id="9" name="Rectangle 8"/>
+          <p:cNvSpPr/>
+          <p:nvPr/>
+        </p:nvSpPr>
+        <p:spPr>
+          <a:xfrm>
+            <a:off x="0" y="6510528"/>
+            <a:ext cx="12188952" cy="347472"/>
+          </a:xfrm>
+          <a:prstGeom prst="rect">
+            <a:avLst/>
+          </a:prstGeom>
+          <a:solidFill>
+            <a:srgbClr val="0A1937"/>
+          </a:solidFill>
+          <a:ln>
+            <a:noFill/>
+          </a:ln>
+        </p:spPr>
+        <p:style>
+          <a:lnRef idx="1">
+            <a:schemeClr val="accent1"/>
+          </a:lnRef>
+          <a:fillRef idx="3">
+            <a:schemeClr val="accent1"/>
+          </a:fillRef>
+          <a:effectRef idx="2">
+            <a:schemeClr val="accent1"/>
+          </a:effectRef>
+          <a:fontRef idx="minor">
+            <a:schemeClr val="lt1"/>
+          </a:fontRef>
+        </p:style>
+        <p:txBody>
+          <a:bodyPr rtlCol="0" anchor="ctr"/>
+          <a:lstStyle/>
+          <a:p>
+            <a:pPr algn="ctr"/>
+          </a:p>
+        </p:txBody>
+      </p:sp>
+      <p:sp>
+        <p:nvSpPr>
+          <p:cNvPr id="10" name="TextBox 9"/>
+          <p:cNvSpPr txBox="1"/>
+          <p:nvPr/>
+        </p:nvSpPr>
+        <p:spPr>
+          <a:xfrm>
+            <a:off x="685800" y="6583680"/>
+            <a:ext cx="6490411" cy="256032"/>
+          </a:xfrm>
+          <a:prstGeom prst="rect">
+            <a:avLst/>
+          </a:prstGeom>
+          <a:noFill/>
+        </p:spPr>
+        <p:txBody>
+          <a:bodyPr wrap="none">
+            <a:spAutoFit/>
+          </a:bodyPr>
+          <a:lstStyle/>
+          <a:p>
+            <a:pPr algn="l"/>
+            <a:r>
+              <a:rPr sz="700">
+                <a:solidFill>
+                  <a:srgbClr val="A0B4D2"/>
+                </a:solidFill>
+                <a:latin typeface="JetBrains Mono"/>
+              </a:rPr>
+              <a:t>Benedikt Zoller Coaching  ·  FKB Campus  ·  M22</a:t>
+            </a:r>
+          </a:p>
+        </p:txBody>
+      </p:sp>
+    </p:spTree>
+  </p:cSld>
+  <p:clrMapOvr>
+    <a:masterClrMapping/>
+  </p:clrMapOvr>
+</p:sld>
+</file>
+
+<file path=ppt/slides/slide15.xml><?xml version="1.0" encoding="utf-8"?>
+<p:sld xmlns:a="http://schemas.openxmlformats.org/drawingml/2006/main" xmlns:p="http://schemas.openxmlformats.org/presentationml/2006/main" xmlns:r="http://schemas.openxmlformats.org/officeDocument/2006/relationships">
+  <p:cSld>
+    <p:spTree>
+      <p:nvGrpSpPr>
+        <p:cNvPr id="1" name=""/>
+        <p:cNvGrpSpPr/>
+        <p:nvPr/>
+      </p:nvGrpSpPr>
+      <p:grpSpPr/>
+      <p:sp>
+        <p:nvSpPr>
+          <p:cNvPr id="2" name="Rectangle 1"/>
+          <p:cNvSpPr/>
+          <p:nvPr/>
+        </p:nvSpPr>
+        <p:spPr>
+          <a:xfrm>
+            <a:off x="0" y="0"/>
+            <a:ext cx="12188952" cy="6858000"/>
+          </a:xfrm>
+          <a:prstGeom prst="rect">
+            <a:avLst/>
+          </a:prstGeom>
+          <a:solidFill>
+            <a:srgbClr val="FFFFFF"/>
+          </a:solidFill>
+          <a:ln>
+            <a:noFill/>
+          </a:ln>
+        </p:spPr>
+        <p:style>
+          <a:lnRef idx="1">
+            <a:schemeClr val="accent1"/>
+          </a:lnRef>
+          <a:fillRef idx="3">
+            <a:schemeClr val="accent1"/>
+          </a:fillRef>
+          <a:effectRef idx="2">
+            <a:schemeClr val="accent1"/>
+          </a:effectRef>
+          <a:fontRef idx="minor">
+            <a:schemeClr val="lt1"/>
+          </a:fontRef>
+        </p:style>
+        <p:txBody>
+          <a:bodyPr rtlCol="0" anchor="ctr"/>
+          <a:lstStyle/>
+          <a:p>
+            <a:pPr algn="ctr"/>
+          </a:p>
+        </p:txBody>
+      </p:sp>
+      <p:sp>
+        <p:nvSpPr>
+          <p:cNvPr id="3" name="Rectangle 2"/>
+          <p:cNvSpPr/>
+          <p:nvPr/>
+        </p:nvSpPr>
+        <p:spPr>
+          <a:xfrm>
+            <a:off x="0" y="0"/>
+            <a:ext cx="12188952" cy="50292"/>
+          </a:xfrm>
+          <a:prstGeom prst="rect">
+            <a:avLst/>
+          </a:prstGeom>
+          <a:solidFill>
+            <a:srgbClr val="1F2C56"/>
+          </a:solidFill>
+          <a:ln>
+            <a:noFill/>
+          </a:ln>
+        </p:spPr>
+        <p:style>
+          <a:lnRef idx="1">
+            <a:schemeClr val="accent1"/>
+          </a:lnRef>
+          <a:fillRef idx="3">
+            <a:schemeClr val="accent1"/>
+          </a:fillRef>
+          <a:effectRef idx="2">
+            <a:schemeClr val="accent1"/>
+          </a:effectRef>
+          <a:fontRef idx="minor">
+            <a:schemeClr val="lt1"/>
+          </a:fontRef>
+        </p:style>
+        <p:txBody>
+          <a:bodyPr rtlCol="0" anchor="ctr"/>
+          <a:lstStyle/>
+          <a:p>
+            <a:pPr algn="ctr"/>
+          </a:p>
+        </p:txBody>
+      </p:sp>
+      <p:sp>
+        <p:nvSpPr>
+          <p:cNvPr id="4" name="TextBox 3"/>
+          <p:cNvSpPr txBox="1"/>
+          <p:nvPr/>
+        </p:nvSpPr>
+        <p:spPr>
+          <a:xfrm>
+            <a:off x="685800" y="109728"/>
+            <a:ext cx="10817352" cy="228600"/>
+          </a:xfrm>
+          <a:prstGeom prst="rect">
+            <a:avLst/>
+          </a:prstGeom>
+          <a:noFill/>
+        </p:spPr>
+        <p:txBody>
+          <a:bodyPr wrap="none">
+            <a:spAutoFit/>
+          </a:bodyPr>
+          <a:lstStyle/>
+          <a:p>
+            <a:pPr algn="l"/>
+            <a:r>
+              <a:rPr sz="750">
+                <a:solidFill>
+                  <a:srgbClr val="78808C"/>
+                </a:solidFill>
+                <a:latin typeface="JetBrains Mono"/>
+              </a:rPr>
+              <a:t>M22  ·  SCHAUBILD</a:t>
+            </a:r>
+          </a:p>
+        </p:txBody>
+      </p:sp>
+      <p:sp>
+        <p:nvSpPr>
+          <p:cNvPr id="5" name="TextBox 4"/>
+          <p:cNvSpPr txBox="1"/>
+          <p:nvPr/>
+        </p:nvSpPr>
+        <p:spPr>
+          <a:xfrm>
+            <a:off x="685800" y="502920"/>
+            <a:ext cx="10817352" cy="594360"/>
+          </a:xfrm>
+          <a:prstGeom prst="rect">
+            <a:avLst/>
+          </a:prstGeom>
+          <a:noFill/>
+        </p:spPr>
+        <p:txBody>
+          <a:bodyPr wrap="square">
+            <a:spAutoFit/>
+          </a:bodyPr>
+          <a:lstStyle/>
+          <a:p>
+            <a:pPr algn="l"/>
+            <a:r>
+              <a:rPr sz="2000" b="1" i="0">
+                <a:solidFill>
+                  <a:srgbClr val="1F2C56"/>
+                </a:solidFill>
+                <a:latin typeface="Source Serif 4"/>
+              </a:rPr>
+              <a:t>Handlungsempfehlung</a:t>
+            </a:r>
+          </a:p>
+        </p:txBody>
+      </p:sp>
+      <p:sp>
+        <p:nvSpPr>
+          <p:cNvPr id="6" name="Rectangle 5"/>
+          <p:cNvSpPr/>
+          <p:nvPr/>
+        </p:nvSpPr>
+        <p:spPr>
+          <a:xfrm>
+            <a:off x="685800" y="1143000"/>
+            <a:ext cx="10817352" cy="25400"/>
+          </a:xfrm>
+          <a:prstGeom prst="rect">
+            <a:avLst/>
+          </a:prstGeom>
+          <a:solidFill>
+            <a:srgbClr val="D9C089"/>
+          </a:solidFill>
+          <a:ln>
+            <a:noFill/>
+          </a:ln>
+        </p:spPr>
+        <p:style>
+          <a:lnRef idx="1">
+            <a:schemeClr val="accent1"/>
+          </a:lnRef>
+          <a:fillRef idx="3">
+            <a:schemeClr val="accent1"/>
+          </a:fillRef>
+          <a:effectRef idx="2">
+            <a:schemeClr val="accent1"/>
+          </a:effectRef>
+          <a:fontRef idx="minor">
+            <a:schemeClr val="lt1"/>
+          </a:fontRef>
+        </p:style>
+        <p:txBody>
+          <a:bodyPr rtlCol="0" anchor="ctr"/>
+          <a:lstStyle/>
+          <a:p>
+            <a:pPr algn="ctr"/>
+          </a:p>
+        </p:txBody>
+      </p:sp>
+      <p:pic>
+        <p:nvPicPr>
+          <p:cNvPr id="7" name="Picture 6" descr="image.png"/>
+          <p:cNvPicPr>
+            <a:picLocks noChangeAspect="1"/>
+          </p:cNvPicPr>
+          <p:nvPr/>
+        </p:nvPicPr>
+        <p:blipFill>
+          <a:blip r:embed="rId2"/>
+          <a:stretch>
+            <a:fillRect/>
+          </a:stretch>
+        </p:blipFill>
+        <p:spPr>
+          <a:xfrm>
+            <a:off x="2303489" y="1325880"/>
+            <a:ext cx="7581973" cy="4937760"/>
+          </a:xfrm>
+          <a:prstGeom prst="rect">
+            <a:avLst/>
+          </a:prstGeom>
+        </p:spPr>
+      </p:pic>
+      <p:sp>
+        <p:nvSpPr>
+          <p:cNvPr id="8" name="Rectangle 7"/>
+          <p:cNvSpPr/>
+          <p:nvPr/>
+        </p:nvSpPr>
+        <p:spPr>
+          <a:xfrm>
+            <a:off x="0" y="6510528"/>
+            <a:ext cx="12188952" cy="347472"/>
+          </a:xfrm>
+          <a:prstGeom prst="rect">
+            <a:avLst/>
+          </a:prstGeom>
+          <a:solidFill>
+            <a:srgbClr val="0A1937"/>
+          </a:solidFill>
+          <a:ln>
+            <a:noFill/>
+          </a:ln>
+        </p:spPr>
+        <p:style>
+          <a:lnRef idx="1">
+            <a:schemeClr val="accent1"/>
+          </a:lnRef>
+          <a:fillRef idx="3">
+            <a:schemeClr val="accent1"/>
+          </a:fillRef>
+          <a:effectRef idx="2">
+            <a:schemeClr val="accent1"/>
+          </a:effectRef>
+          <a:fontRef idx="minor">
+            <a:schemeClr val="lt1"/>
+          </a:fontRef>
+        </p:style>
+        <p:txBody>
+          <a:bodyPr rtlCol="0" anchor="ctr"/>
+          <a:lstStyle/>
+          <a:p>
+            <a:pPr algn="ctr"/>
+          </a:p>
+        </p:txBody>
+      </p:sp>
+      <p:sp>
+        <p:nvSpPr>
+          <p:cNvPr id="9" name="TextBox 8"/>
+          <p:cNvSpPr txBox="1"/>
+          <p:nvPr/>
+        </p:nvSpPr>
+        <p:spPr>
+          <a:xfrm>
+            <a:off x="685800" y="6583680"/>
+            <a:ext cx="6490411" cy="256032"/>
+          </a:xfrm>
+          <a:prstGeom prst="rect">
+            <a:avLst/>
+          </a:prstGeom>
+          <a:noFill/>
+        </p:spPr>
+        <p:txBody>
+          <a:bodyPr wrap="none">
+            <a:spAutoFit/>
+          </a:bodyPr>
+          <a:lstStyle/>
+          <a:p>
+            <a:pPr algn="l"/>
+            <a:r>
+              <a:rPr sz="700">
+                <a:solidFill>
+                  <a:srgbClr val="A0B4D2"/>
+                </a:solidFill>
+                <a:latin typeface="JetBrains Mono"/>
+              </a:rPr>
+              <a:t>Benedikt Zoller Coaching  ·  FKB Campus  ·  M22</a:t>
+            </a:r>
+          </a:p>
+        </p:txBody>
+      </p:sp>
+      <p:sp>
+        <p:nvSpPr>
+          <p:cNvPr id="10" name="TextBox 9"/>
+          <p:cNvSpPr txBox="1"/>
+          <p:nvPr/>
+        </p:nvSpPr>
+        <p:spPr>
+          <a:xfrm>
+            <a:off x="7176211" y="6583680"/>
+            <a:ext cx="4326940" cy="256032"/>
+          </a:xfrm>
+          <a:prstGeom prst="rect">
+            <a:avLst/>
+          </a:prstGeom>
+          <a:noFill/>
+        </p:spPr>
+        <p:txBody>
+          <a:bodyPr wrap="none">
+            <a:spAutoFit/>
+          </a:bodyPr>
+          <a:lstStyle/>
+          <a:p>
+            <a:pPr algn="r"/>
+            <a:r>
+              <a:rPr sz="700">
+                <a:solidFill>
+                  <a:srgbClr val="A0B4D2"/>
+                </a:solidFill>
+                <a:latin typeface="JetBrains Mono"/>
+              </a:rPr>
+              <a:t>Schaubild</a:t>
+            </a:r>
+          </a:p>
+        </p:txBody>
+      </p:sp>
+    </p:spTree>
+  </p:cSld>
+  <p:clrMapOvr>
+    <a:masterClrMapping/>
+  </p:clrMapOvr>
+</p:sld>
+</file>
+
+<file path=ppt/slides/slide16.xml><?xml version="1.0" encoding="utf-8"?>
+<p:sld xmlns:a="http://schemas.openxmlformats.org/drawingml/2006/main" xmlns:p="http://schemas.openxmlformats.org/presentationml/2006/main" xmlns:r="http://schemas.openxmlformats.org/officeDocument/2006/relationships">
+  <p:cSld>
+    <p:spTree>
+      <p:nvGrpSpPr>
+        <p:cNvPr id="1" name=""/>
+        <p:cNvGrpSpPr/>
+        <p:nvPr/>
+      </p:nvGrpSpPr>
+      <p:grpSpPr/>
+      <p:sp>
+        <p:nvSpPr>
+          <p:cNvPr id="2" name="Rectangle 1"/>
+          <p:cNvSpPr/>
+          <p:nvPr/>
+        </p:nvSpPr>
+        <p:spPr>
+          <a:xfrm>
+            <a:off x="0" y="0"/>
+            <a:ext cx="12188952" cy="6858000"/>
+          </a:xfrm>
+          <a:prstGeom prst="rect">
+            <a:avLst/>
+          </a:prstGeom>
+          <a:solidFill>
+            <a:srgbClr val="EDEDF3"/>
+          </a:solidFill>
+          <a:ln>
+            <a:noFill/>
+          </a:ln>
+        </p:spPr>
+        <p:style>
+          <a:lnRef idx="1">
+            <a:schemeClr val="accent1"/>
+          </a:lnRef>
+          <a:fillRef idx="3">
+            <a:schemeClr val="accent1"/>
+          </a:fillRef>
+          <a:effectRef idx="2">
+            <a:schemeClr val="accent1"/>
+          </a:effectRef>
+          <a:fontRef idx="minor">
+            <a:schemeClr val="lt1"/>
+          </a:fontRef>
+        </p:style>
+        <p:txBody>
+          <a:bodyPr rtlCol="0" anchor="ctr"/>
+          <a:lstStyle/>
+          <a:p>
+            <a:pPr algn="ctr"/>
+          </a:p>
+        </p:txBody>
+      </p:sp>
+      <p:sp>
+        <p:nvSpPr>
+          <p:cNvPr id="3" name="Rectangle 2"/>
+          <p:cNvSpPr/>
+          <p:nvPr/>
+        </p:nvSpPr>
+        <p:spPr>
+          <a:xfrm>
+            <a:off x="0" y="0"/>
+            <a:ext cx="12188952" cy="50292"/>
+          </a:xfrm>
+          <a:prstGeom prst="rect">
+            <a:avLst/>
+          </a:prstGeom>
+          <a:solidFill>
+            <a:srgbClr val="1F2C56"/>
+          </a:solidFill>
+          <a:ln>
+            <a:noFill/>
+          </a:ln>
+        </p:spPr>
+        <p:style>
+          <a:lnRef idx="1">
+            <a:schemeClr val="accent1"/>
+          </a:lnRef>
+          <a:fillRef idx="3">
+            <a:schemeClr val="accent1"/>
+          </a:fillRef>
+          <a:effectRef idx="2">
+            <a:schemeClr val="accent1"/>
+          </a:effectRef>
+          <a:fontRef idx="minor">
+            <a:schemeClr val="lt1"/>
+          </a:fontRef>
+        </p:style>
+        <p:txBody>
+          <a:bodyPr rtlCol="0" anchor="ctr"/>
+          <a:lstStyle/>
+          <a:p>
+            <a:pPr algn="ctr"/>
+          </a:p>
+        </p:txBody>
+      </p:sp>
+      <p:sp>
+        <p:nvSpPr>
+          <p:cNvPr id="4" name="TextBox 3"/>
+          <p:cNvSpPr txBox="1"/>
+          <p:nvPr/>
+        </p:nvSpPr>
+        <p:spPr>
+          <a:xfrm>
+            <a:off x="685800" y="109728"/>
+            <a:ext cx="10817352" cy="228600"/>
+          </a:xfrm>
+          <a:prstGeom prst="rect">
+            <a:avLst/>
+          </a:prstGeom>
+          <a:noFill/>
+        </p:spPr>
+        <p:txBody>
+          <a:bodyPr wrap="none">
+            <a:spAutoFit/>
+          </a:bodyPr>
+          <a:lstStyle/>
+          <a:p>
+            <a:pPr algn="l"/>
+            <a:r>
+              <a:rPr sz="750">
+                <a:solidFill>
+                  <a:srgbClr val="78808C"/>
+                </a:solidFill>
+                <a:latin typeface="JetBrains Mono"/>
+              </a:rPr>
+              <a:t>M22  ·  INHALT</a:t>
+            </a:r>
+          </a:p>
+        </p:txBody>
+      </p:sp>
+      <p:sp>
+        <p:nvSpPr>
+          <p:cNvPr id="5" name="Rectangle 4"/>
+          <p:cNvSpPr/>
+          <p:nvPr/>
+        </p:nvSpPr>
+        <p:spPr>
+          <a:xfrm>
+            <a:off x="0" y="1234440"/>
+            <a:ext cx="12188952" cy="12700"/>
+          </a:xfrm>
+          <a:prstGeom prst="rect">
+            <a:avLst/>
+          </a:prstGeom>
+          <a:solidFill>
+            <a:srgbClr val="D8DFE4"/>
+          </a:solidFill>
+          <a:ln>
+            <a:noFill/>
+          </a:ln>
+        </p:spPr>
+        <p:style>
+          <a:lnRef idx="1">
+            <a:schemeClr val="accent1"/>
+          </a:lnRef>
+          <a:fillRef idx="3">
+            <a:schemeClr val="accent1"/>
+          </a:fillRef>
+          <a:effectRef idx="2">
+            <a:schemeClr val="accent1"/>
+          </a:effectRef>
+          <a:fontRef idx="minor">
+            <a:schemeClr val="lt1"/>
+          </a:fontRef>
+        </p:style>
+        <p:txBody>
+          <a:bodyPr rtlCol="0" anchor="ctr"/>
+          <a:lstStyle/>
+          <a:p>
+            <a:pPr algn="ctr"/>
+          </a:p>
+        </p:txBody>
+      </p:sp>
+      <p:sp>
+        <p:nvSpPr>
+          <p:cNvPr id="6" name="Rectangle 5"/>
+          <p:cNvSpPr/>
+          <p:nvPr/>
+        </p:nvSpPr>
+        <p:spPr>
+          <a:xfrm>
+            <a:off x="685800" y="502920"/>
+            <a:ext cx="36576" cy="658368"/>
+          </a:xfrm>
+          <a:prstGeom prst="rect">
+            <a:avLst/>
+          </a:prstGeom>
+          <a:solidFill>
+            <a:srgbClr val="D9C089"/>
+          </a:solidFill>
+          <a:ln>
+            <a:noFill/>
+          </a:ln>
+        </p:spPr>
+        <p:style>
+          <a:lnRef idx="1">
+            <a:schemeClr val="accent1"/>
+          </a:lnRef>
+          <a:fillRef idx="3">
+            <a:schemeClr val="accent1"/>
+          </a:fillRef>
+          <a:effectRef idx="2">
+            <a:schemeClr val="accent1"/>
+          </a:effectRef>
+          <a:fontRef idx="minor">
+            <a:schemeClr val="lt1"/>
+          </a:fontRef>
+        </p:style>
+        <p:txBody>
+          <a:bodyPr rtlCol="0" anchor="ctr"/>
+          <a:lstStyle/>
+          <a:p>
+            <a:pPr algn="ctr"/>
+          </a:p>
+        </p:txBody>
+      </p:sp>
+      <p:sp>
+        <p:nvSpPr>
+          <p:cNvPr id="7" name="TextBox 6"/>
+          <p:cNvSpPr txBox="1"/>
+          <p:nvPr/>
+        </p:nvSpPr>
+        <p:spPr>
+          <a:xfrm>
+            <a:off x="813816" y="502920"/>
+            <a:ext cx="10634472" cy="685800"/>
+          </a:xfrm>
+          <a:prstGeom prst="rect">
+            <a:avLst/>
+          </a:prstGeom>
+          <a:noFill/>
+        </p:spPr>
+        <p:txBody>
+          <a:bodyPr wrap="square">
+            <a:spAutoFit/>
+          </a:bodyPr>
+          <a:lstStyle/>
+          <a:p>
+            <a:pPr algn="l"/>
+            <a:r>
+              <a:rPr sz="2400" b="1" i="0">
+                <a:solidFill>
+                  <a:srgbClr val="1F2C56"/>
+                </a:solidFill>
+                <a:latin typeface="Source Serif 4"/>
+              </a:rPr>
               <a:t>Reflexionsfragen</a:t>
             </a:r>
           </a:p>
@@ -8728,7 +9502,7 @@
             <a:avLst/>
           </a:prstGeom>
           <a:solidFill>
-            <a:srgbClr val="EDEDF3"/>
+            <a:srgbClr val="FFFFFF"/>
           </a:solidFill>
           <a:ln>
             <a:noFill/>
@@ -8829,51 +9603,43 @@
                 </a:solidFill>
                 <a:latin typeface="JetBrains Mono"/>
               </a:rPr>
-              <a:t>M22  ·  INHALT</a:t>
-            </a:r>
-          </a:p>
-        </p:txBody>
-      </p:sp>
-      <p:sp>
-        <p:nvSpPr>
-          <p:cNvPr id="5" name="Rectangle 4"/>
-          <p:cNvSpPr/>
-          <p:nvPr/>
-        </p:nvSpPr>
-        <p:spPr>
-          <a:xfrm>
-            <a:off x="0" y="1234440"/>
-            <a:ext cx="12188952" cy="12700"/>
-          </a:xfrm>
-          <a:prstGeom prst="rect">
-            <a:avLst/>
-          </a:prstGeom>
-          <a:solidFill>
-            <a:srgbClr val="D8DFE4"/>
-          </a:solidFill>
-          <a:ln>
-            <a:noFill/>
-          </a:ln>
-        </p:spPr>
-        <p:style>
-          <a:lnRef idx="1">
-            <a:schemeClr val="accent1"/>
-          </a:lnRef>
-          <a:fillRef idx="3">
-            <a:schemeClr val="accent1"/>
-          </a:fillRef>
-          <a:effectRef idx="2">
-            <a:schemeClr val="accent1"/>
-          </a:effectRef>
-          <a:fontRef idx="minor">
-            <a:schemeClr val="lt1"/>
-          </a:fontRef>
-        </p:style>
-        <p:txBody>
-          <a:bodyPr rtlCol="0" anchor="ctr"/>
-          <a:lstStyle/>
-          <a:p>
-            <a:pPr algn="ctr"/>
+              <a:t>M22  ·  SCHAUBILD</a:t>
+            </a:r>
+          </a:p>
+        </p:txBody>
+      </p:sp>
+      <p:sp>
+        <p:nvSpPr>
+          <p:cNvPr id="5" name="TextBox 4"/>
+          <p:cNvSpPr txBox="1"/>
+          <p:nvPr/>
+        </p:nvSpPr>
+        <p:spPr>
+          <a:xfrm>
+            <a:off x="685800" y="502920"/>
+            <a:ext cx="10817352" cy="594360"/>
+          </a:xfrm>
+          <a:prstGeom prst="rect">
+            <a:avLst/>
+          </a:prstGeom>
+          <a:noFill/>
+        </p:spPr>
+        <p:txBody>
+          <a:bodyPr wrap="square">
+            <a:spAutoFit/>
+          </a:bodyPr>
+          <a:lstStyle/>
+          <a:p>
+            <a:pPr algn="l"/>
+            <a:r>
+              <a:rPr sz="2000" b="1" i="0">
+                <a:solidFill>
+                  <a:srgbClr val="1F2C56"/>
+                </a:solidFill>
+                <a:latin typeface="Source Serif 4"/>
+              </a:rPr>
+              <a:t>Five-Forces-Modell nach Porter</a:t>
+            </a:r>
           </a:p>
         </p:txBody>
       </p:sp>
@@ -8885,8 +9651,8 @@
         </p:nvSpPr>
         <p:spPr>
           <a:xfrm>
-            <a:off x="685800" y="502920"/>
-            <a:ext cx="36576" cy="658368"/>
+            <a:off x="685800" y="1143000"/>
+            <a:ext cx="10817352" cy="25400"/>
           </a:xfrm>
           <a:prstGeom prst="rect">
             <a:avLst/>
@@ -8920,276 +9686,33 @@
           </a:p>
         </p:txBody>
       </p:sp>
-      <p:sp>
-        <p:nvSpPr>
-          <p:cNvPr id="7" name="TextBox 6"/>
-          <p:cNvSpPr txBox="1"/>
-          <p:nvPr/>
-        </p:nvSpPr>
-        <p:spPr>
-          <a:xfrm>
-            <a:off x="813816" y="502920"/>
-            <a:ext cx="10634472" cy="685800"/>
-          </a:xfrm>
-          <a:prstGeom prst="rect">
-            <a:avLst/>
-          </a:prstGeom>
-          <a:noFill/>
-        </p:spPr>
-        <p:txBody>
-          <a:bodyPr wrap="square">
-            <a:spAutoFit/>
-          </a:bodyPr>
-          <a:lstStyle/>
-          <a:p>
-            <a:pPr algn="l"/>
-            <a:r>
-              <a:rPr sz="2400" b="1" i="0">
-                <a:solidFill>
-                  <a:srgbClr val="1F2C56"/>
-                </a:solidFill>
-                <a:latin typeface="Source Serif 4"/>
-              </a:rPr>
-              <a:t>Framework 1b: Generische Wettbewerbsstrategien und das Stuck-in-the-Middle-Risiko</a:t>
-            </a:r>
-          </a:p>
-        </p:txBody>
-      </p:sp>
-      <p:sp>
-        <p:nvSpPr>
-          <p:cNvPr id="8" name="TextBox 7"/>
-          <p:cNvSpPr txBox="1"/>
-          <p:nvPr/>
-        </p:nvSpPr>
-        <p:spPr>
-          <a:xfrm>
-            <a:off x="685800" y="1417320"/>
-            <a:ext cx="10817352" cy="5029200"/>
-          </a:xfrm>
-          <a:prstGeom prst="rect">
-            <a:avLst/>
-          </a:prstGeom>
-          <a:noFill/>
-        </p:spPr>
-        <p:txBody>
-          <a:bodyPr wrap="square">
-            <a:spAutoFit/>
-          </a:bodyPr>
-          <a:lstStyle/>
-          <a:p>
-            <a:pPr>
-              <a:spcBef>
-                <a:spcPts val="1000"/>
-              </a:spcBef>
-              <a:spcAft>
-                <a:spcPts val="200"/>
-              </a:spcAft>
-            </a:pPr>
-            <a:r>
-              <a:rPr sz="800" b="1">
-                <a:solidFill>
-                  <a:srgbClr val="78808C"/>
-                </a:solidFill>
-                <a:latin typeface="JetBrains Mono"/>
-              </a:rPr>
-              <a:t>DIE DREI GRUNDSTRATEGIEN NACH PORTER (1980)</a:t>
-            </a:r>
-          </a:p>
-          <a:p>
-            <a:pPr>
-              <a:spcBef>
-                <a:spcPts val="400"/>
-              </a:spcBef>
-              <a:spcAft>
-                <a:spcPts val="200"/>
-              </a:spcAft>
-            </a:pPr>
-            <a:r>
-              <a:rPr sz="1200">
-                <a:solidFill>
-                  <a:srgbClr val="3D5466"/>
-                </a:solidFill>
-                <a:latin typeface="Arial"/>
-              </a:rPr>
-              <a:t>Eine vierte Option gibt es laut Porter (1980) nicht — ein Unternehmen, das keine klare Strategie wählt, hat keine.</a:t>
-            </a:r>
-          </a:p>
-          <a:p>
-            <a:pPr>
-              <a:spcBef>
-                <a:spcPts val="1000"/>
-              </a:spcBef>
-              <a:spcAft>
-                <a:spcPts val="200"/>
-              </a:spcAft>
-            </a:pPr>
-            <a:r>
-              <a:rPr sz="800" b="1">
-                <a:solidFill>
-                  <a:srgbClr val="78808C"/>
-                </a:solidFill>
-                <a:latin typeface="JetBrains Mono"/>
-              </a:rPr>
-              <a:t>DAS STUCK-IN-THE-MIDDLE-PROBLEM</a:t>
-            </a:r>
-          </a:p>
-          <a:p>
-            <a:pPr>
-              <a:spcBef>
-                <a:spcPts val="400"/>
-              </a:spcBef>
-              <a:spcAft>
-                <a:spcPts val="200"/>
-              </a:spcAft>
-            </a:pPr>
-            <a:r>
-              <a:rPr sz="1200">
-                <a:solidFill>
-                  <a:srgbClr val="3D5466"/>
-                </a:solidFill>
-                <a:latin typeface="Arial"/>
-              </a:rPr>
-              <a:t>Warum das für Kreditberater relevant ist:</a:t>
-            </a:r>
-          </a:p>
-          <a:p>
-            <a:pPr>
-              <a:spcBef>
-                <a:spcPts val="400"/>
-              </a:spcBef>
-              <a:spcAft>
-                <a:spcPts val="200"/>
-              </a:spcAft>
-            </a:pPr>
-            <a:r>
-              <a:rPr sz="1200">
-                <a:solidFill>
-                  <a:srgbClr val="3D5466"/>
-                </a:solidFill>
-                <a:latin typeface="Arial"/>
-              </a:rPr>
-              <a:t>Warnsignale für Stuck in the Middle im Kundengespräch:</a:t>
-            </a:r>
-          </a:p>
-          <a:p>
-            <a:pPr>
-              <a:spcBef>
-                <a:spcPts val="400"/>
-              </a:spcBef>
-              <a:spcAft>
-                <a:spcPts val="200"/>
-              </a:spcAft>
-            </a:pPr>
-            <a:r>
-              <a:rPr sz="1300">
-                <a:solidFill>
-                  <a:srgbClr val="3D5466"/>
-                </a:solidFill>
-                <a:latin typeface="Arial"/>
-              </a:rPr>
-              <a:t>▸  Unklare Antwort auf die Frage: „Was ist Ihr Alleinstellungsmerkmal — und wofür bezahlen Ihre Kunden gerne mehr?"</a:t>
-            </a:r>
-          </a:p>
-          <a:p>
-            <a:pPr>
-              <a:spcBef>
-                <a:spcPts val="400"/>
-              </a:spcBef>
-              <a:spcAft>
-                <a:spcPts val="200"/>
-              </a:spcAft>
-            </a:pPr>
-            <a:r>
-              <a:rPr sz="1300">
-                <a:solidFill>
-                  <a:srgbClr val="3D5466"/>
-                </a:solidFill>
-                <a:latin typeface="Arial"/>
-              </a:rPr>
-              <a:t>▸  Gleichzeitig Preisdruck von günstigeren Wettbewerbern und Qualitätsdruck von Premiumanbietern</a:t>
-            </a:r>
-          </a:p>
-          <a:p>
-            <a:pPr>
-              <a:spcBef>
-                <a:spcPts val="400"/>
-              </a:spcBef>
-              <a:spcAft>
-                <a:spcPts val="200"/>
-              </a:spcAft>
-            </a:pPr>
-            <a:r>
-              <a:rPr sz="1300">
-                <a:solidFill>
-                  <a:srgbClr val="3D5466"/>
-                </a:solidFill>
-                <a:latin typeface="Arial"/>
-              </a:rPr>
-              <a:t>▸  Rückläufige Marge trotz stabilem Umsatz</a:t>
-            </a:r>
-          </a:p>
-          <a:p>
-            <a:pPr>
-              <a:spcBef>
-                <a:spcPts val="400"/>
-              </a:spcBef>
-              <a:spcAft>
-                <a:spcPts val="200"/>
-              </a:spcAft>
-            </a:pPr>
-            <a:r>
-              <a:rPr sz="1300">
-                <a:solidFill>
-                  <a:srgbClr val="3D5466"/>
-                </a:solidFill>
-                <a:latin typeface="Arial"/>
-              </a:rPr>
-              <a:t>▸  Investitionen in beide Richtungen: gleichzeitig Kostenoptimierung und Qualitätsausbau ohne klare Priorisierung</a:t>
-            </a:r>
-          </a:p>
-          <a:p>
-            <a:pPr>
-              <a:spcBef>
-                <a:spcPts val="400"/>
-              </a:spcBef>
-              <a:spcAft>
-                <a:spcPts val="200"/>
-              </a:spcAft>
-            </a:pPr>
-            <a:r>
-              <a:rPr sz="1300">
-                <a:solidFill>
-                  <a:srgbClr val="3D5466"/>
-                </a:solidFill>
-                <a:latin typeface="Arial"/>
-              </a:rPr>
-              <a:t>▸  GF-Aussagen wie: „Wir machen alles — wir sind flexibel"</a:t>
-            </a:r>
-          </a:p>
-          <a:p>
-            <a:pPr>
-              <a:spcBef>
-                <a:spcPts val="400"/>
-              </a:spcBef>
-              <a:spcAft>
-                <a:spcPts val="200"/>
-              </a:spcAft>
-            </a:pPr>
-            <a:r>
-              <a:rPr sz="1200">
-                <a:solidFill>
-                  <a:srgbClr val="3D5466"/>
-                </a:solidFill>
-                <a:latin typeface="Arial"/>
-              </a:rPr>
-              <a:t>Stuck in the Middle und der Haller-Fall:</a:t>
-            </a:r>
-          </a:p>
-        </p:txBody>
-      </p:sp>
-      <p:sp>
-        <p:nvSpPr>
-          <p:cNvPr id="9" name="Rectangle 8"/>
+      <p:pic>
+        <p:nvPicPr>
+          <p:cNvPr id="7" name="Picture 6" descr="image.png"/>
+          <p:cNvPicPr>
+            <a:picLocks noChangeAspect="1"/>
+          </p:cNvPicPr>
+          <p:nvPr/>
+        </p:nvPicPr>
+        <p:blipFill>
+          <a:blip r:embed="rId2"/>
+          <a:stretch>
+            <a:fillRect/>
+          </a:stretch>
+        </p:blipFill>
+        <p:spPr>
+          <a:xfrm>
+            <a:off x="2554863" y="1325880"/>
+            <a:ext cx="7079225" cy="4937760"/>
+          </a:xfrm>
+          <a:prstGeom prst="rect">
+            <a:avLst/>
+          </a:prstGeom>
+        </p:spPr>
+      </p:pic>
+      <p:sp>
+        <p:nvSpPr>
+          <p:cNvPr id="8" name="Rectangle 7"/>
           <p:cNvSpPr/>
           <p:nvPr/>
         </p:nvSpPr>
@@ -9232,7 +9755,7 @@
       </p:sp>
       <p:sp>
         <p:nvSpPr>
-          <p:cNvPr id="10" name="TextBox 9"/>
+          <p:cNvPr id="9" name="TextBox 8"/>
           <p:cNvSpPr txBox="1"/>
           <p:nvPr/>
         </p:nvSpPr>
@@ -9261,6 +9784,41 @@
                 <a:latin typeface="JetBrains Mono"/>
               </a:rPr>
               <a:t>Benedikt Zoller Coaching  ·  FKB Campus  ·  M22</a:t>
+            </a:r>
+          </a:p>
+        </p:txBody>
+      </p:sp>
+      <p:sp>
+        <p:nvSpPr>
+          <p:cNvPr id="10" name="TextBox 9"/>
+          <p:cNvSpPr txBox="1"/>
+          <p:nvPr/>
+        </p:nvSpPr>
+        <p:spPr>
+          <a:xfrm>
+            <a:off x="7176211" y="6583680"/>
+            <a:ext cx="4326940" cy="256032"/>
+          </a:xfrm>
+          <a:prstGeom prst="rect">
+            <a:avLst/>
+          </a:prstGeom>
+          <a:noFill/>
+        </p:spPr>
+        <p:txBody>
+          <a:bodyPr wrap="none">
+            <a:spAutoFit/>
+          </a:bodyPr>
+          <a:lstStyle/>
+          <a:p>
+            <a:pPr algn="r"/>
+            <a:r>
+              <a:rPr sz="700">
+                <a:solidFill>
+                  <a:srgbClr val="A0B4D2"/>
+                </a:solidFill>
+                <a:latin typeface="JetBrains Mono"/>
+              </a:rPr>
+              <a:t>Schaubild</a:t>
             </a:r>
           </a:p>
         </p:txBody>
@@ -9298,7 +9856,7 @@
             <a:avLst/>
           </a:prstGeom>
           <a:solidFill>
-            <a:srgbClr val="FFFFFF"/>
+            <a:srgbClr val="EDEDF3"/>
           </a:solidFill>
           <a:ln>
             <a:noFill/>
@@ -9399,43 +9957,51 @@
                 </a:solidFill>
                 <a:latin typeface="JetBrains Mono"/>
               </a:rPr>
-              <a:t>M22  ·  SCHAUBILD</a:t>
-            </a:r>
-          </a:p>
-        </p:txBody>
-      </p:sp>
-      <p:sp>
-        <p:nvSpPr>
-          <p:cNvPr id="5" name="TextBox 4"/>
-          <p:cNvSpPr txBox="1"/>
-          <p:nvPr/>
-        </p:nvSpPr>
-        <p:spPr>
-          <a:xfrm>
-            <a:off x="685800" y="502920"/>
-            <a:ext cx="10817352" cy="594360"/>
-          </a:xfrm>
-          <a:prstGeom prst="rect">
-            <a:avLst/>
-          </a:prstGeom>
-          <a:noFill/>
-        </p:spPr>
-        <p:txBody>
-          <a:bodyPr wrap="square">
-            <a:spAutoFit/>
-          </a:bodyPr>
-          <a:lstStyle/>
-          <a:p>
-            <a:pPr algn="l"/>
-            <a:r>
-              <a:rPr sz="2000" b="1" i="0">
-                <a:solidFill>
-                  <a:srgbClr val="1F2C56"/>
-                </a:solidFill>
-                <a:latin typeface="Source Serif 4"/>
-              </a:rPr>
-              <a:t>Wettbewerbsstrategie-Matrix nach Porter</a:t>
-            </a:r>
+              <a:t>M22  ·  INHALT</a:t>
+            </a:r>
+          </a:p>
+        </p:txBody>
+      </p:sp>
+      <p:sp>
+        <p:nvSpPr>
+          <p:cNvPr id="5" name="Rectangle 4"/>
+          <p:cNvSpPr/>
+          <p:nvPr/>
+        </p:nvSpPr>
+        <p:spPr>
+          <a:xfrm>
+            <a:off x="0" y="1234440"/>
+            <a:ext cx="12188952" cy="12700"/>
+          </a:xfrm>
+          <a:prstGeom prst="rect">
+            <a:avLst/>
+          </a:prstGeom>
+          <a:solidFill>
+            <a:srgbClr val="D8DFE4"/>
+          </a:solidFill>
+          <a:ln>
+            <a:noFill/>
+          </a:ln>
+        </p:spPr>
+        <p:style>
+          <a:lnRef idx="1">
+            <a:schemeClr val="accent1"/>
+          </a:lnRef>
+          <a:fillRef idx="3">
+            <a:schemeClr val="accent1"/>
+          </a:fillRef>
+          <a:effectRef idx="2">
+            <a:schemeClr val="accent1"/>
+          </a:effectRef>
+          <a:fontRef idx="minor">
+            <a:schemeClr val="lt1"/>
+          </a:fontRef>
+        </p:style>
+        <p:txBody>
+          <a:bodyPr rtlCol="0" anchor="ctr"/>
+          <a:lstStyle/>
+          <a:p>
+            <a:pPr algn="ctr"/>
           </a:p>
         </p:txBody>
       </p:sp>
@@ -9447,8 +10013,8 @@
         </p:nvSpPr>
         <p:spPr>
           <a:xfrm>
-            <a:off x="685800" y="1143000"/>
-            <a:ext cx="10817352" cy="25400"/>
+            <a:off x="685800" y="502920"/>
+            <a:ext cx="36576" cy="658368"/>
           </a:xfrm>
           <a:prstGeom prst="rect">
             <a:avLst/>
@@ -9482,33 +10048,276 @@
           </a:p>
         </p:txBody>
       </p:sp>
-      <p:pic>
-        <p:nvPicPr>
-          <p:cNvPr id="7" name="Picture 6" descr="image.png"/>
-          <p:cNvPicPr>
-            <a:picLocks noChangeAspect="1"/>
-          </p:cNvPicPr>
-          <p:nvPr/>
-        </p:nvPicPr>
-        <p:blipFill>
-          <a:blip r:embed="rId2"/>
-          <a:stretch>
-            <a:fillRect/>
-          </a:stretch>
-        </p:blipFill>
-        <p:spPr>
-          <a:xfrm>
-            <a:off x="2303489" y="1325880"/>
-            <a:ext cx="7581973" cy="4937760"/>
-          </a:xfrm>
-          <a:prstGeom prst="rect">
-            <a:avLst/>
-          </a:prstGeom>
-        </p:spPr>
-      </p:pic>
-      <p:sp>
-        <p:nvSpPr>
-          <p:cNvPr id="8" name="Rectangle 7"/>
+      <p:sp>
+        <p:nvSpPr>
+          <p:cNvPr id="7" name="TextBox 6"/>
+          <p:cNvSpPr txBox="1"/>
+          <p:nvPr/>
+        </p:nvSpPr>
+        <p:spPr>
+          <a:xfrm>
+            <a:off x="813816" y="502920"/>
+            <a:ext cx="10634472" cy="685800"/>
+          </a:xfrm>
+          <a:prstGeom prst="rect">
+            <a:avLst/>
+          </a:prstGeom>
+          <a:noFill/>
+        </p:spPr>
+        <p:txBody>
+          <a:bodyPr wrap="square">
+            <a:spAutoFit/>
+          </a:bodyPr>
+          <a:lstStyle/>
+          <a:p>
+            <a:pPr algn="l"/>
+            <a:r>
+              <a:rPr sz="2400" b="1" i="0">
+                <a:solidFill>
+                  <a:srgbClr val="1F2C56"/>
+                </a:solidFill>
+                <a:latin typeface="Source Serif 4"/>
+              </a:rPr>
+              <a:t>Framework 1b: Generische Wettbewerbsstrategien und das Stuck-in-the-Middle-Risiko</a:t>
+            </a:r>
+          </a:p>
+        </p:txBody>
+      </p:sp>
+      <p:sp>
+        <p:nvSpPr>
+          <p:cNvPr id="8" name="TextBox 7"/>
+          <p:cNvSpPr txBox="1"/>
+          <p:nvPr/>
+        </p:nvSpPr>
+        <p:spPr>
+          <a:xfrm>
+            <a:off x="685800" y="1417320"/>
+            <a:ext cx="10817352" cy="5029200"/>
+          </a:xfrm>
+          <a:prstGeom prst="rect">
+            <a:avLst/>
+          </a:prstGeom>
+          <a:noFill/>
+        </p:spPr>
+        <p:txBody>
+          <a:bodyPr wrap="square">
+            <a:spAutoFit/>
+          </a:bodyPr>
+          <a:lstStyle/>
+          <a:p>
+            <a:pPr>
+              <a:spcBef>
+                <a:spcPts val="1000"/>
+              </a:spcBef>
+              <a:spcAft>
+                <a:spcPts val="200"/>
+              </a:spcAft>
+            </a:pPr>
+            <a:r>
+              <a:rPr sz="800" b="1">
+                <a:solidFill>
+                  <a:srgbClr val="78808C"/>
+                </a:solidFill>
+                <a:latin typeface="JetBrains Mono"/>
+              </a:rPr>
+              <a:t>DIE DREI GRUNDSTRATEGIEN NACH PORTER (1980)</a:t>
+            </a:r>
+          </a:p>
+          <a:p>
+            <a:pPr>
+              <a:spcBef>
+                <a:spcPts val="400"/>
+              </a:spcBef>
+              <a:spcAft>
+                <a:spcPts val="200"/>
+              </a:spcAft>
+            </a:pPr>
+            <a:r>
+              <a:rPr sz="1200">
+                <a:solidFill>
+                  <a:srgbClr val="3D5466"/>
+                </a:solidFill>
+                <a:latin typeface="Arial"/>
+              </a:rPr>
+              <a:t>Eine vierte Option gibt es laut Porter (1980) nicht — ein Unternehmen, das keine klare Strategie wählt, hat keine.</a:t>
+            </a:r>
+          </a:p>
+          <a:p>
+            <a:pPr>
+              <a:spcBef>
+                <a:spcPts val="1000"/>
+              </a:spcBef>
+              <a:spcAft>
+                <a:spcPts val="200"/>
+              </a:spcAft>
+            </a:pPr>
+            <a:r>
+              <a:rPr sz="800" b="1">
+                <a:solidFill>
+                  <a:srgbClr val="78808C"/>
+                </a:solidFill>
+                <a:latin typeface="JetBrains Mono"/>
+              </a:rPr>
+              <a:t>DAS STUCK-IN-THE-MIDDLE-PROBLEM</a:t>
+            </a:r>
+          </a:p>
+          <a:p>
+            <a:pPr>
+              <a:spcBef>
+                <a:spcPts val="400"/>
+              </a:spcBef>
+              <a:spcAft>
+                <a:spcPts val="200"/>
+              </a:spcAft>
+            </a:pPr>
+            <a:r>
+              <a:rPr sz="1200">
+                <a:solidFill>
+                  <a:srgbClr val="3D5466"/>
+                </a:solidFill>
+                <a:latin typeface="Arial"/>
+              </a:rPr>
+              <a:t>Warum das für Kreditberater relevant ist:</a:t>
+            </a:r>
+          </a:p>
+          <a:p>
+            <a:pPr>
+              <a:spcBef>
+                <a:spcPts val="400"/>
+              </a:spcBef>
+              <a:spcAft>
+                <a:spcPts val="200"/>
+              </a:spcAft>
+            </a:pPr>
+            <a:r>
+              <a:rPr sz="1200">
+                <a:solidFill>
+                  <a:srgbClr val="3D5466"/>
+                </a:solidFill>
+                <a:latin typeface="Arial"/>
+              </a:rPr>
+              <a:t>Warnsignale für Stuck in the Middle im Kundengespräch:</a:t>
+            </a:r>
+          </a:p>
+          <a:p>
+            <a:pPr>
+              <a:spcBef>
+                <a:spcPts val="400"/>
+              </a:spcBef>
+              <a:spcAft>
+                <a:spcPts val="200"/>
+              </a:spcAft>
+            </a:pPr>
+            <a:r>
+              <a:rPr sz="1300">
+                <a:solidFill>
+                  <a:srgbClr val="3D5466"/>
+                </a:solidFill>
+                <a:latin typeface="Arial"/>
+              </a:rPr>
+              <a:t>▸  Unklare Antwort auf die Frage: „Was ist Ihr Alleinstellungsmerkmal — und wofür bezahlen Ihre Kunden gerne mehr?"</a:t>
+            </a:r>
+          </a:p>
+          <a:p>
+            <a:pPr>
+              <a:spcBef>
+                <a:spcPts val="400"/>
+              </a:spcBef>
+              <a:spcAft>
+                <a:spcPts val="200"/>
+              </a:spcAft>
+            </a:pPr>
+            <a:r>
+              <a:rPr sz="1300">
+                <a:solidFill>
+                  <a:srgbClr val="3D5466"/>
+                </a:solidFill>
+                <a:latin typeface="Arial"/>
+              </a:rPr>
+              <a:t>▸  Gleichzeitig Preisdruck von günstigeren Wettbewerbern und Qualitätsdruck von Premiumanbietern</a:t>
+            </a:r>
+          </a:p>
+          <a:p>
+            <a:pPr>
+              <a:spcBef>
+                <a:spcPts val="400"/>
+              </a:spcBef>
+              <a:spcAft>
+                <a:spcPts val="200"/>
+              </a:spcAft>
+            </a:pPr>
+            <a:r>
+              <a:rPr sz="1300">
+                <a:solidFill>
+                  <a:srgbClr val="3D5466"/>
+                </a:solidFill>
+                <a:latin typeface="Arial"/>
+              </a:rPr>
+              <a:t>▸  Rückläufige Marge trotz stabilem Umsatz</a:t>
+            </a:r>
+          </a:p>
+          <a:p>
+            <a:pPr>
+              <a:spcBef>
+                <a:spcPts val="400"/>
+              </a:spcBef>
+              <a:spcAft>
+                <a:spcPts val="200"/>
+              </a:spcAft>
+            </a:pPr>
+            <a:r>
+              <a:rPr sz="1300">
+                <a:solidFill>
+                  <a:srgbClr val="3D5466"/>
+                </a:solidFill>
+                <a:latin typeface="Arial"/>
+              </a:rPr>
+              <a:t>▸  Investitionen in beide Richtungen: gleichzeitig Kostenoptimierung und Qualitätsausbau ohne klare Priorisierung</a:t>
+            </a:r>
+          </a:p>
+          <a:p>
+            <a:pPr>
+              <a:spcBef>
+                <a:spcPts val="400"/>
+              </a:spcBef>
+              <a:spcAft>
+                <a:spcPts val="200"/>
+              </a:spcAft>
+            </a:pPr>
+            <a:r>
+              <a:rPr sz="1300">
+                <a:solidFill>
+                  <a:srgbClr val="3D5466"/>
+                </a:solidFill>
+                <a:latin typeface="Arial"/>
+              </a:rPr>
+              <a:t>▸  GF-Aussagen wie: „Wir machen alles — wir sind flexibel"</a:t>
+            </a:r>
+          </a:p>
+          <a:p>
+            <a:pPr>
+              <a:spcBef>
+                <a:spcPts val="400"/>
+              </a:spcBef>
+              <a:spcAft>
+                <a:spcPts val="200"/>
+              </a:spcAft>
+            </a:pPr>
+            <a:r>
+              <a:rPr sz="1200">
+                <a:solidFill>
+                  <a:srgbClr val="3D5466"/>
+                </a:solidFill>
+                <a:latin typeface="Arial"/>
+              </a:rPr>
+              <a:t>Stuck in the Middle und der Haller-Fall:</a:t>
+            </a:r>
+          </a:p>
+        </p:txBody>
+      </p:sp>
+      <p:sp>
+        <p:nvSpPr>
+          <p:cNvPr id="9" name="Rectangle 8"/>
           <p:cNvSpPr/>
           <p:nvPr/>
         </p:nvSpPr>
@@ -9551,7 +10360,7 @@
       </p:sp>
       <p:sp>
         <p:nvSpPr>
-          <p:cNvPr id="9" name="TextBox 8"/>
+          <p:cNvPr id="10" name="TextBox 9"/>
           <p:cNvSpPr txBox="1"/>
           <p:nvPr/>
         </p:nvSpPr>
@@ -9580,41 +10389,6 @@
                 <a:latin typeface="JetBrains Mono"/>
               </a:rPr>
               <a:t>Benedikt Zoller Coaching  ·  FKB Campus  ·  M22</a:t>
-            </a:r>
-          </a:p>
-        </p:txBody>
-      </p:sp>
-      <p:sp>
-        <p:nvSpPr>
-          <p:cNvPr id="10" name="TextBox 9"/>
-          <p:cNvSpPr txBox="1"/>
-          <p:nvPr/>
-        </p:nvSpPr>
-        <p:spPr>
-          <a:xfrm>
-            <a:off x="7176211" y="6583680"/>
-            <a:ext cx="4326940" cy="256032"/>
-          </a:xfrm>
-          <a:prstGeom prst="rect">
-            <a:avLst/>
-          </a:prstGeom>
-          <a:noFill/>
-        </p:spPr>
-        <p:txBody>
-          <a:bodyPr wrap="none">
-            <a:spAutoFit/>
-          </a:bodyPr>
-          <a:lstStyle/>
-          <a:p>
-            <a:pPr algn="r"/>
-            <a:r>
-              <a:rPr sz="700">
-                <a:solidFill>
-                  <a:srgbClr val="A0B4D2"/>
-                </a:solidFill>
-                <a:latin typeface="JetBrains Mono"/>
-              </a:rPr>
-              <a:t>Schaubild</a:t>
             </a:r>
           </a:p>
         </p:txBody>
@@ -9652,7 +10426,7 @@
             <a:avLst/>
           </a:prstGeom>
           <a:solidFill>
-            <a:srgbClr val="EDEDF3"/>
+            <a:srgbClr val="FFFFFF"/>
           </a:solidFill>
           <a:ln>
             <a:noFill/>
@@ -9753,51 +10527,43 @@
                 </a:solidFill>
                 <a:latin typeface="JetBrains Mono"/>
               </a:rPr>
-              <a:t>M22  ·  INHALT</a:t>
-            </a:r>
-          </a:p>
-        </p:txBody>
-      </p:sp>
-      <p:sp>
-        <p:nvSpPr>
-          <p:cNvPr id="5" name="Rectangle 4"/>
-          <p:cNvSpPr/>
-          <p:nvPr/>
-        </p:nvSpPr>
-        <p:spPr>
-          <a:xfrm>
-            <a:off x="0" y="1234440"/>
-            <a:ext cx="12188952" cy="12700"/>
-          </a:xfrm>
-          <a:prstGeom prst="rect">
-            <a:avLst/>
-          </a:prstGeom>
-          <a:solidFill>
-            <a:srgbClr val="D8DFE4"/>
-          </a:solidFill>
-          <a:ln>
-            <a:noFill/>
-          </a:ln>
-        </p:spPr>
-        <p:style>
-          <a:lnRef idx="1">
-            <a:schemeClr val="accent1"/>
-          </a:lnRef>
-          <a:fillRef idx="3">
-            <a:schemeClr val="accent1"/>
-          </a:fillRef>
-          <a:effectRef idx="2">
-            <a:schemeClr val="accent1"/>
-          </a:effectRef>
-          <a:fontRef idx="minor">
-            <a:schemeClr val="lt1"/>
-          </a:fontRef>
-        </p:style>
-        <p:txBody>
-          <a:bodyPr rtlCol="0" anchor="ctr"/>
-          <a:lstStyle/>
-          <a:p>
-            <a:pPr algn="ctr"/>
+              <a:t>M22  ·  SCHAUBILD</a:t>
+            </a:r>
+          </a:p>
+        </p:txBody>
+      </p:sp>
+      <p:sp>
+        <p:nvSpPr>
+          <p:cNvPr id="5" name="TextBox 4"/>
+          <p:cNvSpPr txBox="1"/>
+          <p:nvPr/>
+        </p:nvSpPr>
+        <p:spPr>
+          <a:xfrm>
+            <a:off x="685800" y="502920"/>
+            <a:ext cx="10817352" cy="594360"/>
+          </a:xfrm>
+          <a:prstGeom prst="rect">
+            <a:avLst/>
+          </a:prstGeom>
+          <a:noFill/>
+        </p:spPr>
+        <p:txBody>
+          <a:bodyPr wrap="square">
+            <a:spAutoFit/>
+          </a:bodyPr>
+          <a:lstStyle/>
+          <a:p>
+            <a:pPr algn="l"/>
+            <a:r>
+              <a:rPr sz="2000" b="1" i="0">
+                <a:solidFill>
+                  <a:srgbClr val="1F2C56"/>
+                </a:solidFill>
+                <a:latin typeface="Source Serif 4"/>
+              </a:rPr>
+              <a:t>Wettbewerbsstrategie-Matrix nach Porter</a:t>
+            </a:r>
           </a:p>
         </p:txBody>
       </p:sp>
@@ -9809,8 +10575,8 @@
         </p:nvSpPr>
         <p:spPr>
           <a:xfrm>
-            <a:off x="685800" y="502920"/>
-            <a:ext cx="36576" cy="658368"/>
+            <a:off x="685800" y="1143000"/>
+            <a:ext cx="10817352" cy="25400"/>
           </a:xfrm>
           <a:prstGeom prst="rect">
             <a:avLst/>
@@ -9844,41 +10610,30 @@
           </a:p>
         </p:txBody>
       </p:sp>
-      <p:sp>
-        <p:nvSpPr>
-          <p:cNvPr id="7" name="TextBox 6"/>
-          <p:cNvSpPr txBox="1"/>
-          <p:nvPr/>
-        </p:nvSpPr>
-        <p:spPr>
-          <a:xfrm>
-            <a:off x="813816" y="502920"/>
-            <a:ext cx="10634472" cy="685800"/>
-          </a:xfrm>
-          <a:prstGeom prst="rect">
-            <a:avLst/>
-          </a:prstGeom>
-          <a:noFill/>
-        </p:spPr>
-        <p:txBody>
-          <a:bodyPr wrap="square">
-            <a:spAutoFit/>
-          </a:bodyPr>
-          <a:lstStyle/>
-          <a:p>
-            <a:pPr algn="l"/>
-            <a:r>
-              <a:rPr sz="2400" b="1" i="0">
-                <a:solidFill>
-                  <a:srgbClr val="1F2C56"/>
-                </a:solidFill>
-                <a:latin typeface="Source Serif 4"/>
-              </a:rPr>
-              <a:t>Framework 2: Business Model Canvas als Robustheitscheck *(Vertiefung / Selbststudium)*</a:t>
-            </a:r>
-          </a:p>
-        </p:txBody>
-      </p:sp>
+      <p:pic>
+        <p:nvPicPr>
+          <p:cNvPr id="7" name="Picture 6" descr="image.png"/>
+          <p:cNvPicPr>
+            <a:picLocks noChangeAspect="1"/>
+          </p:cNvPicPr>
+          <p:nvPr/>
+        </p:nvPicPr>
+        <p:blipFill>
+          <a:blip r:embed="rId2"/>
+          <a:stretch>
+            <a:fillRect/>
+          </a:stretch>
+        </p:blipFill>
+        <p:spPr>
+          <a:xfrm>
+            <a:off x="2303489" y="1325880"/>
+            <a:ext cx="7581973" cy="4937760"/>
+          </a:xfrm>
+          <a:prstGeom prst="rect">
+            <a:avLst/>
+          </a:prstGeom>
+        </p:spPr>
+      </p:pic>
       <p:sp>
         <p:nvSpPr>
           <p:cNvPr id="8" name="Rectangle 7"/>
@@ -9953,6 +10708,41 @@
                 <a:latin typeface="JetBrains Mono"/>
               </a:rPr>
               <a:t>Benedikt Zoller Coaching  ·  FKB Campus  ·  M22</a:t>
+            </a:r>
+          </a:p>
+        </p:txBody>
+      </p:sp>
+      <p:sp>
+        <p:nvSpPr>
+          <p:cNvPr id="10" name="TextBox 9"/>
+          <p:cNvSpPr txBox="1"/>
+          <p:nvPr/>
+        </p:nvSpPr>
+        <p:spPr>
+          <a:xfrm>
+            <a:off x="7176211" y="6583680"/>
+            <a:ext cx="4326940" cy="256032"/>
+          </a:xfrm>
+          <a:prstGeom prst="rect">
+            <a:avLst/>
+          </a:prstGeom>
+          <a:noFill/>
+        </p:spPr>
+        <p:txBody>
+          <a:bodyPr wrap="none">
+            <a:spAutoFit/>
+          </a:bodyPr>
+          <a:lstStyle/>
+          <a:p>
+            <a:pPr algn="r"/>
+            <a:r>
+              <a:rPr sz="700">
+                <a:solidFill>
+                  <a:srgbClr val="A0B4D2"/>
+                </a:solidFill>
+                <a:latin typeface="JetBrains Mono"/>
+              </a:rPr>
+              <a:t>Schaubild</a:t>
             </a:r>
           </a:p>
         </p:txBody>
@@ -10212,94 +11002,14 @@
                 </a:solidFill>
                 <a:latin typeface="Source Serif 4"/>
               </a:rPr>
-              <a:t>Framework 2: Business Model Canvas als Robustheitscheck</a:t>
-            </a:r>
-          </a:p>
-        </p:txBody>
-      </p:sp>
-      <p:sp>
-        <p:nvSpPr>
-          <p:cNvPr id="8" name="TextBox 7"/>
-          <p:cNvSpPr txBox="1"/>
-          <p:nvPr/>
-        </p:nvSpPr>
-        <p:spPr>
-          <a:xfrm>
-            <a:off x="685800" y="1417320"/>
-            <a:ext cx="10817352" cy="5029200"/>
-          </a:xfrm>
-          <a:prstGeom prst="rect">
-            <a:avLst/>
-          </a:prstGeom>
-          <a:noFill/>
-        </p:spPr>
-        <p:txBody>
-          <a:bodyPr wrap="square">
-            <a:spAutoFit/>
-          </a:bodyPr>
-          <a:lstStyle/>
-          <a:p>
-            <a:pPr>
-              <a:spcBef>
-                <a:spcPts val="1000"/>
-              </a:spcBef>
-              <a:spcAft>
-                <a:spcPts val="200"/>
-              </a:spcAft>
-            </a:pPr>
-            <a:r>
-              <a:rPr sz="800" b="1">
-                <a:solidFill>
-                  <a:srgbClr val="78808C"/>
-                </a:solidFill>
-                <a:latin typeface="JetBrains Mono"/>
-              </a:rPr>
-              <a:t>GRUNDSTRUKTUR</a:t>
-            </a:r>
-          </a:p>
-          <a:p>
-            <a:pPr>
-              <a:spcBef>
-                <a:spcPts val="400"/>
-              </a:spcBef>
-              <a:spcAft>
-                <a:spcPts val="200"/>
-              </a:spcAft>
-            </a:pPr>
-            <a:r>
-              <a:rPr sz="1200">
-                <a:solidFill>
-                  <a:srgbClr val="3D5466"/>
-                </a:solidFill>
-                <a:latin typeface="Arial"/>
-              </a:rPr>
-              <a:t>Gruppe A – Ertragsstabilität (rechte Canvas-Seite)</a:t>
-            </a:r>
-          </a:p>
-          <a:p>
-            <a:pPr>
-              <a:spcBef>
-                <a:spcPts val="400"/>
-              </a:spcBef>
-              <a:spcAft>
-                <a:spcPts val="200"/>
-              </a:spcAft>
-            </a:pPr>
-            <a:r>
-              <a:rPr sz="1200">
-                <a:solidFill>
-                  <a:srgbClr val="3D5466"/>
-                </a:solidFill>
-                <a:latin typeface="Arial"/>
-              </a:rPr>
-              <a:t>Gruppe B – Kostenstruktur &amp; Abhängigkeiten (linke Canvas-Seite)</a:t>
-            </a:r>
-          </a:p>
-        </p:txBody>
-      </p:sp>
-      <p:sp>
-        <p:nvSpPr>
-          <p:cNvPr id="9" name="Rectangle 8"/>
+              <a:t>Framework 2: Business Model Canvas als Robustheitscheck *(Vertiefung / Selbststudium)*</a:t>
+            </a:r>
+          </a:p>
+        </p:txBody>
+      </p:sp>
+      <p:sp>
+        <p:nvSpPr>
+          <p:cNvPr id="8" name="Rectangle 7"/>
           <p:cNvSpPr/>
           <p:nvPr/>
         </p:nvSpPr>
@@ -10342,7 +11052,7 @@
       </p:sp>
       <p:sp>
         <p:nvSpPr>
-          <p:cNvPr id="10" name="TextBox 9"/>
+          <p:cNvPr id="9" name="TextBox 8"/>
           <p:cNvSpPr txBox="1"/>
           <p:nvPr/>
         </p:nvSpPr>

--- a/protected-downloads/praesentation/M22.pptx
+++ b/protected-downloads/praesentation/M22.pptx
@@ -8,7 +8,7 @@
     <p:sldId id="256" r:id="rId7"/>
     <p:sldId id="257" r:id="rId8"/>
     <p:sldId id="258" r:id="rId9"/>
-    <p:sldId id="259" r:id="rId11"/>
+    <p:sldId id="259" r:id="rId10"/>
     <p:sldId id="260" r:id="rId12"/>
     <p:sldId id="261" r:id="rId13"/>
     <p:sldId id="262" r:id="rId14"/>
@@ -21,6 +21,7 @@
     <p:sldId id="269" r:id="rId21"/>
     <p:sldId id="270" r:id="rId22"/>
     <p:sldId id="271" r:id="rId23"/>
+    <p:sldId id="272" r:id="rId24"/>
   </p:sldIdLst>
   <p:sldSz cx="12188952" cy="6858000" type="screen4x3"/>
   <p:notesSz cx="6858000" cy="9144000"/>
@@ -5010,94 +5011,14 @@
                 </a:solidFill>
                 <a:latin typeface="Source Serif 4"/>
               </a:rPr>
-              <a:t>Framework 2: Business Model Canvas als Robustheitscheck</a:t>
-            </a:r>
-          </a:p>
-        </p:txBody>
-      </p:sp>
-      <p:sp>
-        <p:nvSpPr>
-          <p:cNvPr id="8" name="TextBox 7"/>
-          <p:cNvSpPr txBox="1"/>
-          <p:nvPr/>
-        </p:nvSpPr>
-        <p:spPr>
-          <a:xfrm>
-            <a:off x="685800" y="1417320"/>
-            <a:ext cx="10817352" cy="5029200"/>
-          </a:xfrm>
-          <a:prstGeom prst="rect">
-            <a:avLst/>
-          </a:prstGeom>
-          <a:noFill/>
-        </p:spPr>
-        <p:txBody>
-          <a:bodyPr wrap="square">
-            <a:spAutoFit/>
-          </a:bodyPr>
-          <a:lstStyle/>
-          <a:p>
-            <a:pPr>
-              <a:spcBef>
-                <a:spcPts val="1000"/>
-              </a:spcBef>
-              <a:spcAft>
-                <a:spcPts val="200"/>
-              </a:spcAft>
-            </a:pPr>
-            <a:r>
-              <a:rPr sz="800" b="1">
-                <a:solidFill>
-                  <a:srgbClr val="78808C"/>
-                </a:solidFill>
-                <a:latin typeface="JetBrains Mono"/>
-              </a:rPr>
-              <a:t>GRUNDSTRUKTUR</a:t>
-            </a:r>
-          </a:p>
-          <a:p>
-            <a:pPr>
-              <a:spcBef>
-                <a:spcPts val="400"/>
-              </a:spcBef>
-              <a:spcAft>
-                <a:spcPts val="200"/>
-              </a:spcAft>
-            </a:pPr>
-            <a:r>
-              <a:rPr sz="1200">
-                <a:solidFill>
-                  <a:srgbClr val="3D5466"/>
-                </a:solidFill>
-                <a:latin typeface="Arial"/>
-              </a:rPr>
-              <a:t>Gruppe A – Ertragsstabilität (rechte Canvas-Seite)</a:t>
-            </a:r>
-          </a:p>
-          <a:p>
-            <a:pPr>
-              <a:spcBef>
-                <a:spcPts val="400"/>
-              </a:spcBef>
-              <a:spcAft>
-                <a:spcPts val="200"/>
-              </a:spcAft>
-            </a:pPr>
-            <a:r>
-              <a:rPr sz="1200">
-                <a:solidFill>
-                  <a:srgbClr val="3D5466"/>
-                </a:solidFill>
-                <a:latin typeface="Arial"/>
-              </a:rPr>
-              <a:t>Gruppe B – Kostenstruktur &amp; Abhängigkeiten (linke Canvas-Seite)</a:t>
-            </a:r>
-          </a:p>
-        </p:txBody>
-      </p:sp>
-      <p:sp>
-        <p:nvSpPr>
-          <p:cNvPr id="9" name="Rectangle 8"/>
+              <a:t>Framework 2: Business Model Canvas als Robustheitscheck *(Vertiefung / Selbststudium)*</a:t>
+            </a:r>
+          </a:p>
+        </p:txBody>
+      </p:sp>
+      <p:sp>
+        <p:nvSpPr>
+          <p:cNvPr id="8" name="Rectangle 7"/>
           <p:cNvSpPr/>
           <p:nvPr/>
         </p:nvSpPr>
@@ -5140,7 +5061,7 @@
       </p:sp>
       <p:sp>
         <p:nvSpPr>
-          <p:cNvPr id="10" name="TextBox 9"/>
+          <p:cNvPr id="9" name="TextBox 8"/>
           <p:cNvSpPr txBox="1"/>
           <p:nvPr/>
         </p:nvSpPr>
@@ -5428,7 +5349,7 @@
                 </a:solidFill>
                 <a:latin typeface="Source Serif 4"/>
               </a:rPr>
-              <a:t>Framework 3: SWOT als Kreditrisikofilter</a:t>
+              <a:t>Framework 2: Business Model Canvas als Robustheitscheck</a:t>
             </a:r>
           </a:p>
         </p:txBody>
@@ -5470,7 +5391,7 @@
                 </a:solidFill>
                 <a:latin typeface="JetBrains Mono"/>
               </a:rPr>
-              <a:t>VON DER STRATEGISCHEN SWOT ZUR RISIKOKLASSIFIZIERUNG</a:t>
+              <a:t>GRUNDSTRUKTUR</a:t>
             </a:r>
           </a:p>
           <a:p>
@@ -5489,7 +5410,7 @@
                 </a:solidFill>
                 <a:latin typeface="Arial"/>
               </a:rPr>
-              <a:t>Kreditrelevante SWOT-Lesart:</a:t>
+              <a:t>Gruppe A – Ertragsstabilität (rechte Canvas-Seite)</a:t>
             </a:r>
           </a:p>
           <a:p>
@@ -5508,64 +5429,7 @@
                 </a:solidFill>
                 <a:latin typeface="Arial"/>
               </a:rPr>
-              <a:t>Kritische Hinweise zur SWOT im Kreditkontext (nach Welge &amp; Al-Laham, 2012):</a:t>
-            </a:r>
-          </a:p>
-          <a:p>
-            <a:pPr>
-              <a:spcBef>
-                <a:spcPts val="400"/>
-              </a:spcBef>
-              <a:spcAft>
-                <a:spcPts val="200"/>
-              </a:spcAft>
-            </a:pPr>
-            <a:r>
-              <a:rPr sz="1300">
-                <a:solidFill>
-                  <a:srgbClr val="3D5466"/>
-                </a:solidFill>
-                <a:latin typeface="Arial"/>
-              </a:rPr>
-              <a:t>▸  Alle Faktoren erscheinen formal gleichwertig — Berater müssen aktiv gewichten</a:t>
-            </a:r>
-          </a:p>
-          <a:p>
-            <a:pPr>
-              <a:spcBef>
-                <a:spcPts val="400"/>
-              </a:spcBef>
-              <a:spcAft>
-                <a:spcPts val="200"/>
-              </a:spcAft>
-            </a:pPr>
-            <a:r>
-              <a:rPr sz="1300">
-                <a:solidFill>
-                  <a:srgbClr val="3D5466"/>
-                </a:solidFill>
-                <a:latin typeface="Arial"/>
-              </a:rPr>
-              <a:t>▸  Subjektive Unternehmersicht dominiert; externe Verifikation (z. B. Branchendaten) ist nötig</a:t>
-            </a:r>
-          </a:p>
-          <a:p>
-            <a:pPr>
-              <a:spcBef>
-                <a:spcPts val="400"/>
-              </a:spcBef>
-              <a:spcAft>
-                <a:spcPts val="200"/>
-              </a:spcAft>
-            </a:pPr>
-            <a:r>
-              <a:rPr sz="1300">
-                <a:solidFill>
-                  <a:srgbClr val="3D5466"/>
-                </a:solidFill>
-                <a:latin typeface="Arial"/>
-              </a:rPr>
-              <a:t>▸  Die SWOT liefert ein Lagebild, keine Prognose; strategische Dynamik muss separat eingeschätzt werden</a:t>
+              <a:t>Gruppe B – Kostenstruktur &amp; Abhängigkeiten (linke Canvas-Seite)</a:t>
             </a:r>
           </a:p>
         </p:txBody>
@@ -5903,7 +5767,7 @@
                 </a:solidFill>
                 <a:latin typeface="Source Serif 4"/>
               </a:rPr>
-              <a:t>Framework 4: Strategische Ressourcenstärke (Resource-based View)</a:t>
+              <a:t>Framework 3: SWOT als Kreditrisikofilter</a:t>
             </a:r>
           </a:p>
         </p:txBody>
@@ -5929,6 +5793,25 @@
             <a:spAutoFit/>
           </a:bodyPr>
           <a:lstStyle/>
+          <a:p>
+            <a:pPr>
+              <a:spcBef>
+                <a:spcPts val="1000"/>
+              </a:spcBef>
+              <a:spcAft>
+                <a:spcPts val="200"/>
+              </a:spcAft>
+            </a:pPr>
+            <a:r>
+              <a:rPr sz="800" b="1">
+                <a:solidFill>
+                  <a:srgbClr val="78808C"/>
+                </a:solidFill>
+                <a:latin typeface="JetBrains Mono"/>
+              </a:rPr>
+              <a:t>VON DER STRATEGISCHEN SWOT ZUR RISIKOKLASSIFIZIERUNG</a:t>
+            </a:r>
+          </a:p>
           <a:p>
             <a:pPr>
               <a:spcBef>
@@ -5945,7 +5828,7 @@
                 </a:solidFill>
                 <a:latin typeface="Arial"/>
               </a:rPr>
-              <a:t>Beispiele kreditrelevanter VRIN-Ressourcen im Mittelstand:</a:t>
+              <a:t>Kreditrelevante SWOT-Lesart:</a:t>
             </a:r>
           </a:p>
           <a:p>
@@ -5958,13 +5841,13 @@
               </a:spcAft>
             </a:pPr>
             <a:r>
-              <a:rPr sz="1300">
+              <a:rPr sz="1200">
                 <a:solidFill>
                   <a:srgbClr val="3D5466"/>
                 </a:solidFill>
                 <a:latin typeface="Arial"/>
               </a:rPr>
-              <a:t>▸  Spezialisiertes Know-how mit langjähriger Entwicklungszeit (schwer zu kopieren)</a:t>
+              <a:t>Kritische Hinweise zur SWOT im Kreditkontext (nach Welge &amp; Al-Laham, 2012):</a:t>
             </a:r>
           </a:p>
           <a:p>
@@ -5983,7 +5866,7 @@
                 </a:solidFill>
                 <a:latin typeface="Arial"/>
               </a:rPr>
-              <a:t>▸  Exklusivlieferantenverträge oder Zulassungen (selten, nicht substituierbar)</a:t>
+              <a:t>▸  Alle Faktoren erscheinen formal gleichwertig — Berater müssen aktiv gewichten</a:t>
             </a:r>
           </a:p>
           <a:p>
@@ -6002,7 +5885,7 @@
                 </a:solidFill>
                 <a:latin typeface="Arial"/>
               </a:rPr>
-              <a:t>▸  Langfristige Kundenbeziehungen mit Wechselkosten auf Kundenseite (wertvoll, nicht imitierbar)</a:t>
+              <a:t>▸  Subjektive Unternehmersicht dominiert; externe Verifikation (z. B. Branchendaten) ist nötig</a:t>
             </a:r>
           </a:p>
           <a:p>
@@ -6021,7 +5904,7 @@
                 </a:solidFill>
                 <a:latin typeface="Arial"/>
               </a:rPr>
-              <a:t>▸  Qualifizierte Fachkräfte mit spezifischer Expertise (Schlüsselpersonenrisiko = Kehrseite)</a:t>
+              <a:t>▸  Die SWOT liefert ein Lagebild, keine Prognose; strategische Dynamik muss separat eingeschätzt werden</a:t>
             </a:r>
           </a:p>
         </p:txBody>
@@ -6238,7 +6121,7 @@
                 </a:solidFill>
                 <a:latin typeface="JetBrains Mono"/>
               </a:rPr>
-              <a:t>M22  ·  ARBEITSBLATT</a:t>
+              <a:t>M22  ·  INHALT</a:t>
             </a:r>
           </a:p>
         </p:txBody>
@@ -6359,7 +6242,7 @@
                 </a:solidFill>
                 <a:latin typeface="Source Serif 4"/>
               </a:rPr>
-              <a:t>Praxisfall: Präzisionswerk Haller GmbH</a:t>
+              <a:t>Framework 4: Strategische Ressourcenstärke (Resource-based View)</a:t>
             </a:r>
           </a:p>
         </p:txBody>
@@ -6372,8 +6255,8 @@
         </p:nvSpPr>
         <p:spPr>
           <a:xfrm>
-            <a:off x="685800" y="1554480"/>
-            <a:ext cx="10817352" cy="3840480"/>
+            <a:off x="685800" y="1417320"/>
+            <a:ext cx="10817352" cy="5029200"/>
           </a:xfrm>
           <a:prstGeom prst="rect">
             <a:avLst/>
@@ -6395,13 +6278,13 @@
               </a:spcAft>
             </a:pPr>
             <a:r>
-              <a:rPr sz="1400">
+              <a:rPr sz="1200">
                 <a:solidFill>
                   <a:srgbClr val="3D5466"/>
                 </a:solidFill>
                 <a:latin typeface="Arial"/>
               </a:rPr>
-              <a:t>▸  Unternehmensportrait</a:t>
+              <a:t>Beispiele kreditrelevanter VRIN-Ressourcen im Mittelstand:</a:t>
             </a:r>
           </a:p>
           <a:p>
@@ -6414,13 +6297,13 @@
               </a:spcAft>
             </a:pPr>
             <a:r>
-              <a:rPr sz="1400">
+              <a:rPr sz="1300">
                 <a:solidFill>
                   <a:srgbClr val="3D5466"/>
                 </a:solidFill>
                 <a:latin typeface="Arial"/>
               </a:rPr>
-              <a:t>▸  Kennzahlen Geschäftsjahr 2024:</a:t>
+              <a:t>▸  Spezialisiertes Know-how mit langjähriger Entwicklungszeit (schwer zu kopieren)</a:t>
             </a:r>
           </a:p>
           <a:p>
@@ -6433,13 +6316,13 @@
               </a:spcAft>
             </a:pPr>
             <a:r>
-              <a:rPr sz="1400">
+              <a:rPr sz="1300">
                 <a:solidFill>
                   <a:srgbClr val="3D5466"/>
                 </a:solidFill>
                 <a:latin typeface="Arial"/>
               </a:rPr>
-              <a:t>▸  *Branchenbenchmark: VDMA Maschinenbau-Statistik 2024; zeb-Mittelstandsstudie 2023</a:t>
+              <a:t>▸  Exklusivlieferantenverträge oder Zulassungen (selten, nicht substituierbar)</a:t>
             </a:r>
           </a:p>
           <a:p>
@@ -6452,13 +6335,13 @@
               </a:spcAft>
             </a:pPr>
             <a:r>
-              <a:rPr sz="1400">
+              <a:rPr sz="1300">
                 <a:solidFill>
                   <a:srgbClr val="3D5466"/>
                 </a:solidFill>
                 <a:latin typeface="Arial"/>
               </a:rPr>
-              <a:t>▸  Strategische Ausgangssituation:</a:t>
+              <a:t>▸  Langfristige Kundenbeziehungen mit Wechselkosten auf Kundenseite (wertvoll, nicht imitierbar)</a:t>
             </a:r>
           </a:p>
           <a:p>
@@ -6471,13 +6354,13 @@
               </a:spcAft>
             </a:pPr>
             <a:r>
-              <a:rPr sz="1400">
+              <a:rPr sz="1300">
                 <a:solidFill>
                   <a:srgbClr val="3D5466"/>
                 </a:solidFill>
                 <a:latin typeface="Arial"/>
               </a:rPr>
-              <a:t>▸  Drei Hauptkunden, einer davon (Maschinenbaukonzern aus Baden-Württemberg) stellt 60 % des Jahresumsatzes</a:t>
+              <a:t>▸  Qualifizierte Fachkräfte mit spezifischer Expertise (Schlüsselpersonenrisiko = Kehrseite)</a:t>
             </a:r>
           </a:p>
         </p:txBody>
@@ -6485,84 +6368,6 @@
       <p:sp>
         <p:nvSpPr>
           <p:cNvPr id="9" name="Rectangle 8"/>
-          <p:cNvSpPr/>
-          <p:nvPr/>
-        </p:nvSpPr>
-        <p:spPr>
-          <a:xfrm>
-            <a:off x="685800" y="5486400"/>
-            <a:ext cx="10817352" cy="640080"/>
-          </a:xfrm>
-          <a:prstGeom prst="rect">
-            <a:avLst/>
-          </a:prstGeom>
-          <a:solidFill>
-            <a:srgbClr val="1F2C56"/>
-          </a:solidFill>
-          <a:ln>
-            <a:noFill/>
-          </a:ln>
-        </p:spPr>
-        <p:style>
-          <a:lnRef idx="1">
-            <a:schemeClr val="accent1"/>
-          </a:lnRef>
-          <a:fillRef idx="3">
-            <a:schemeClr val="accent1"/>
-          </a:fillRef>
-          <a:effectRef idx="2">
-            <a:schemeClr val="accent1"/>
-          </a:effectRef>
-          <a:fontRef idx="minor">
-            <a:schemeClr val="lt1"/>
-          </a:fontRef>
-        </p:style>
-        <p:txBody>
-          <a:bodyPr rtlCol="0" anchor="ctr"/>
-          <a:lstStyle/>
-          <a:p>
-            <a:pPr algn="ctr"/>
-          </a:p>
-        </p:txBody>
-      </p:sp>
-      <p:sp>
-        <p:nvSpPr>
-          <p:cNvPr id="10" name="TextBox 9"/>
-          <p:cNvSpPr txBox="1"/>
-          <p:nvPr/>
-        </p:nvSpPr>
-        <p:spPr>
-          <a:xfrm>
-            <a:off x="868680" y="5596128"/>
-            <a:ext cx="10451592" cy="457200"/>
-          </a:xfrm>
-          <a:prstGeom prst="rect">
-            <a:avLst/>
-          </a:prstGeom>
-          <a:noFill/>
-        </p:spPr>
-        <p:txBody>
-          <a:bodyPr wrap="square">
-            <a:spAutoFit/>
-          </a:bodyPr>
-          <a:lstStyle/>
-          <a:p>
-            <a:pPr algn="l"/>
-            <a:r>
-              <a:rPr sz="1300" b="1" i="0">
-                <a:solidFill>
-                  <a:srgbClr val="FFFFFF"/>
-                </a:solidFill>
-                <a:latin typeface="Arial"/>
-              </a:rPr>
-              <a:t>→  Bearbeitung im Teilnehmer-Workbook (Arbeitsblatt mit Ausfüllfeldern)</a:t>
-            </a:r>
-          </a:p>
-        </p:txBody>
-      </p:sp>
-      <p:sp>
-        <p:nvSpPr>
-          <p:cNvPr id="11" name="Rectangle 10"/>
           <p:cNvSpPr/>
           <p:nvPr/>
         </p:nvSpPr>
@@ -6605,7 +6410,7 @@
       </p:sp>
       <p:sp>
         <p:nvSpPr>
-          <p:cNvPr id="12" name="TextBox 11"/>
+          <p:cNvPr id="10" name="TextBox 9"/>
           <p:cNvSpPr txBox="1"/>
           <p:nvPr/>
         </p:nvSpPr>
@@ -6772,7 +6577,7 @@
                 </a:solidFill>
                 <a:latin typeface="JetBrains Mono"/>
               </a:rPr>
-              <a:t>M22  ·  INHALT</a:t>
+              <a:t>M22  ·  ARBEITSBLATT</a:t>
             </a:r>
           </a:p>
         </p:txBody>
@@ -6893,7 +6698,7 @@
                 </a:solidFill>
                 <a:latin typeface="Source Serif 4"/>
               </a:rPr>
-              <a:t>Kennzahlen- und Formelkarte: Qualitative Kreditwürdigkeitsanalyse</a:t>
+              <a:t>Praxisfall: Präzisionswerk Haller GmbH</a:t>
             </a:r>
           </a:p>
         </p:txBody>
@@ -6906,8 +6711,8 @@
         </p:nvSpPr>
         <p:spPr>
           <a:xfrm>
-            <a:off x="685800" y="1417320"/>
-            <a:ext cx="10817352" cy="5029200"/>
+            <a:off x="685800" y="1554480"/>
+            <a:ext cx="10817352" cy="3840480"/>
           </a:xfrm>
           <a:prstGeom prst="rect">
             <a:avLst/>
@@ -6922,39 +6727,96 @@
           <a:p>
             <a:pPr>
               <a:spcBef>
-                <a:spcPts val="1000"/>
+                <a:spcPts val="400"/>
               </a:spcBef>
               <a:spcAft>
                 <a:spcPts val="200"/>
               </a:spcAft>
             </a:pPr>
             <a:r>
-              <a:rPr sz="800" b="1">
-                <a:solidFill>
-                  <a:srgbClr val="78808C"/>
-                </a:solidFill>
-                <a:latin typeface="JetBrains Mono"/>
+              <a:rPr sz="1400">
+                <a:solidFill>
+                  <a:srgbClr val="3D5466"/>
+                </a:solidFill>
+                <a:latin typeface="Arial"/>
               </a:rPr>
-              <a:t>STRATEGISCHE RED-FLAG-CHECKLISTE</a:t>
+              <a:t>▸  Unternehmensportrait</a:t>
             </a:r>
           </a:p>
           <a:p>
             <a:pPr>
               <a:spcBef>
-                <a:spcPts val="1000"/>
+                <a:spcPts val="400"/>
               </a:spcBef>
               <a:spcAft>
                 <a:spcPts val="200"/>
               </a:spcAft>
             </a:pPr>
             <a:r>
-              <a:rPr sz="800" b="1">
-                <a:solidFill>
-                  <a:srgbClr val="78808C"/>
-                </a:solidFill>
-                <a:latin typeface="JetBrains Mono"/>
+              <a:rPr sz="1400">
+                <a:solidFill>
+                  <a:srgbClr val="3D5466"/>
+                </a:solidFill>
+                <a:latin typeface="Arial"/>
               </a:rPr>
-              <a:t>QUANTITATIVE UNTERSTÜTZUNGSKENNZAHLEN</a:t>
+              <a:t>▸  Kennzahlen Geschäftsjahr 2024:</a:t>
+            </a:r>
+          </a:p>
+          <a:p>
+            <a:pPr>
+              <a:spcBef>
+                <a:spcPts val="400"/>
+              </a:spcBef>
+              <a:spcAft>
+                <a:spcPts val="200"/>
+              </a:spcAft>
+            </a:pPr>
+            <a:r>
+              <a:rPr sz="1400">
+                <a:solidFill>
+                  <a:srgbClr val="3D5466"/>
+                </a:solidFill>
+                <a:latin typeface="Arial"/>
+              </a:rPr>
+              <a:t>▸  *Branchenbenchmark: VDMA Maschinenbau-Statistik 2024; zeb-Mittelstandsstudie 2023</a:t>
+            </a:r>
+          </a:p>
+          <a:p>
+            <a:pPr>
+              <a:spcBef>
+                <a:spcPts val="400"/>
+              </a:spcBef>
+              <a:spcAft>
+                <a:spcPts val="200"/>
+              </a:spcAft>
+            </a:pPr>
+            <a:r>
+              <a:rPr sz="1400">
+                <a:solidFill>
+                  <a:srgbClr val="3D5466"/>
+                </a:solidFill>
+                <a:latin typeface="Arial"/>
+              </a:rPr>
+              <a:t>▸  Strategische Ausgangssituation:</a:t>
+            </a:r>
+          </a:p>
+          <a:p>
+            <a:pPr>
+              <a:spcBef>
+                <a:spcPts val="400"/>
+              </a:spcBef>
+              <a:spcAft>
+                <a:spcPts val="200"/>
+              </a:spcAft>
+            </a:pPr>
+            <a:r>
+              <a:rPr sz="1400">
+                <a:solidFill>
+                  <a:srgbClr val="3D5466"/>
+                </a:solidFill>
+                <a:latin typeface="Arial"/>
+              </a:rPr>
+              <a:t>▸  Drei Hauptkunden, einer davon (Maschinenbaukonzern aus Baden-Württemberg) stellt 60 % des Jahresumsatzes</a:t>
             </a:r>
           </a:p>
         </p:txBody>
@@ -6962,6 +6824,84 @@
       <p:sp>
         <p:nvSpPr>
           <p:cNvPr id="9" name="Rectangle 8"/>
+          <p:cNvSpPr/>
+          <p:nvPr/>
+        </p:nvSpPr>
+        <p:spPr>
+          <a:xfrm>
+            <a:off x="685800" y="5486400"/>
+            <a:ext cx="10817352" cy="640080"/>
+          </a:xfrm>
+          <a:prstGeom prst="rect">
+            <a:avLst/>
+          </a:prstGeom>
+          <a:solidFill>
+            <a:srgbClr val="1F2C56"/>
+          </a:solidFill>
+          <a:ln>
+            <a:noFill/>
+          </a:ln>
+        </p:spPr>
+        <p:style>
+          <a:lnRef idx="1">
+            <a:schemeClr val="accent1"/>
+          </a:lnRef>
+          <a:fillRef idx="3">
+            <a:schemeClr val="accent1"/>
+          </a:fillRef>
+          <a:effectRef idx="2">
+            <a:schemeClr val="accent1"/>
+          </a:effectRef>
+          <a:fontRef idx="minor">
+            <a:schemeClr val="lt1"/>
+          </a:fontRef>
+        </p:style>
+        <p:txBody>
+          <a:bodyPr rtlCol="0" anchor="ctr"/>
+          <a:lstStyle/>
+          <a:p>
+            <a:pPr algn="ctr"/>
+          </a:p>
+        </p:txBody>
+      </p:sp>
+      <p:sp>
+        <p:nvSpPr>
+          <p:cNvPr id="10" name="TextBox 9"/>
+          <p:cNvSpPr txBox="1"/>
+          <p:nvPr/>
+        </p:nvSpPr>
+        <p:spPr>
+          <a:xfrm>
+            <a:off x="868680" y="5596128"/>
+            <a:ext cx="10451592" cy="457200"/>
+          </a:xfrm>
+          <a:prstGeom prst="rect">
+            <a:avLst/>
+          </a:prstGeom>
+          <a:noFill/>
+        </p:spPr>
+        <p:txBody>
+          <a:bodyPr wrap="square">
+            <a:spAutoFit/>
+          </a:bodyPr>
+          <a:lstStyle/>
+          <a:p>
+            <a:pPr algn="l"/>
+            <a:r>
+              <a:rPr sz="1300" b="1" i="0">
+                <a:solidFill>
+                  <a:srgbClr val="FFFFFF"/>
+                </a:solidFill>
+                <a:latin typeface="Arial"/>
+              </a:rPr>
+              <a:t>→  Bearbeitung im Teilnehmer-Workbook (Arbeitsblatt mit Ausfüllfeldern)</a:t>
+            </a:r>
+          </a:p>
+        </p:txBody>
+      </p:sp>
+      <p:sp>
+        <p:nvSpPr>
+          <p:cNvPr id="11" name="Rectangle 10"/>
           <p:cNvSpPr/>
           <p:nvPr/>
         </p:nvSpPr>
@@ -7004,7 +6944,7 @@
       </p:sp>
       <p:sp>
         <p:nvSpPr>
-          <p:cNvPr id="10" name="TextBox 9"/>
+          <p:cNvPr id="12" name="TextBox 11"/>
           <p:cNvSpPr txBox="1"/>
           <p:nvPr/>
         </p:nvSpPr>
@@ -7070,7 +7010,7 @@
             <a:avLst/>
           </a:prstGeom>
           <a:solidFill>
-            <a:srgbClr val="FFFFFF"/>
+            <a:srgbClr val="EDEDF3"/>
           </a:solidFill>
           <a:ln>
             <a:noFill/>
@@ -7171,43 +7111,51 @@
                 </a:solidFill>
                 <a:latin typeface="JetBrains Mono"/>
               </a:rPr>
-              <a:t>M22  ·  SCHAUBILD</a:t>
-            </a:r>
-          </a:p>
-        </p:txBody>
-      </p:sp>
-      <p:sp>
-        <p:nvSpPr>
-          <p:cNvPr id="5" name="TextBox 4"/>
-          <p:cNvSpPr txBox="1"/>
-          <p:nvPr/>
-        </p:nvSpPr>
-        <p:spPr>
-          <a:xfrm>
-            <a:off x="685800" y="502920"/>
-            <a:ext cx="10817352" cy="594360"/>
-          </a:xfrm>
-          <a:prstGeom prst="rect">
-            <a:avLst/>
-          </a:prstGeom>
-          <a:noFill/>
-        </p:spPr>
-        <p:txBody>
-          <a:bodyPr wrap="square">
-            <a:spAutoFit/>
-          </a:bodyPr>
-          <a:lstStyle/>
-          <a:p>
-            <a:pPr algn="l"/>
-            <a:r>
-              <a:rPr sz="2000" b="1" i="0">
-                <a:solidFill>
-                  <a:srgbClr val="1F2C56"/>
-                </a:solidFill>
-                <a:latin typeface="Source Serif 4"/>
-              </a:rPr>
-              <a:t>Handlungsempfehlung</a:t>
-            </a:r>
+              <a:t>M22  ·  INHALT</a:t>
+            </a:r>
+          </a:p>
+        </p:txBody>
+      </p:sp>
+      <p:sp>
+        <p:nvSpPr>
+          <p:cNvPr id="5" name="Rectangle 4"/>
+          <p:cNvSpPr/>
+          <p:nvPr/>
+        </p:nvSpPr>
+        <p:spPr>
+          <a:xfrm>
+            <a:off x="0" y="1234440"/>
+            <a:ext cx="12188952" cy="12700"/>
+          </a:xfrm>
+          <a:prstGeom prst="rect">
+            <a:avLst/>
+          </a:prstGeom>
+          <a:solidFill>
+            <a:srgbClr val="D8DFE4"/>
+          </a:solidFill>
+          <a:ln>
+            <a:noFill/>
+          </a:ln>
+        </p:spPr>
+        <p:style>
+          <a:lnRef idx="1">
+            <a:schemeClr val="accent1"/>
+          </a:lnRef>
+          <a:fillRef idx="3">
+            <a:schemeClr val="accent1"/>
+          </a:fillRef>
+          <a:effectRef idx="2">
+            <a:schemeClr val="accent1"/>
+          </a:effectRef>
+          <a:fontRef idx="minor">
+            <a:schemeClr val="lt1"/>
+          </a:fontRef>
+        </p:style>
+        <p:txBody>
+          <a:bodyPr rtlCol="0" anchor="ctr"/>
+          <a:lstStyle/>
+          <a:p>
+            <a:pPr algn="ctr"/>
           </a:p>
         </p:txBody>
       </p:sp>
@@ -7219,8 +7167,8 @@
         </p:nvSpPr>
         <p:spPr>
           <a:xfrm>
-            <a:off x="685800" y="1143000"/>
-            <a:ext cx="10817352" cy="25400"/>
+            <a:off x="685800" y="502920"/>
+            <a:ext cx="36576" cy="658368"/>
           </a:xfrm>
           <a:prstGeom prst="rect">
             <a:avLst/>
@@ -7254,33 +7202,105 @@
           </a:p>
         </p:txBody>
       </p:sp>
-      <p:pic>
-        <p:nvPicPr>
-          <p:cNvPr id="7" name="Picture 6" descr="image.png"/>
-          <p:cNvPicPr>
-            <a:picLocks noChangeAspect="1"/>
-          </p:cNvPicPr>
-          <p:nvPr/>
-        </p:nvPicPr>
-        <p:blipFill>
-          <a:blip r:embed="rId2"/>
-          <a:stretch>
-            <a:fillRect/>
-          </a:stretch>
-        </p:blipFill>
-        <p:spPr>
-          <a:xfrm>
-            <a:off x="2303489" y="1325880"/>
-            <a:ext cx="7581973" cy="4937760"/>
-          </a:xfrm>
-          <a:prstGeom prst="rect">
-            <a:avLst/>
-          </a:prstGeom>
-        </p:spPr>
-      </p:pic>
-      <p:sp>
-        <p:nvSpPr>
-          <p:cNvPr id="8" name="Rectangle 7"/>
+      <p:sp>
+        <p:nvSpPr>
+          <p:cNvPr id="7" name="TextBox 6"/>
+          <p:cNvSpPr txBox="1"/>
+          <p:nvPr/>
+        </p:nvSpPr>
+        <p:spPr>
+          <a:xfrm>
+            <a:off x="813816" y="502920"/>
+            <a:ext cx="10634472" cy="685800"/>
+          </a:xfrm>
+          <a:prstGeom prst="rect">
+            <a:avLst/>
+          </a:prstGeom>
+          <a:noFill/>
+        </p:spPr>
+        <p:txBody>
+          <a:bodyPr wrap="square">
+            <a:spAutoFit/>
+          </a:bodyPr>
+          <a:lstStyle/>
+          <a:p>
+            <a:pPr algn="l"/>
+            <a:r>
+              <a:rPr sz="2400" b="1" i="0">
+                <a:solidFill>
+                  <a:srgbClr val="1F2C56"/>
+                </a:solidFill>
+                <a:latin typeface="Source Serif 4"/>
+              </a:rPr>
+              <a:t>Kennzahlen- und Formelkarte: Qualitative Kreditwürdigkeitsanalyse</a:t>
+            </a:r>
+          </a:p>
+        </p:txBody>
+      </p:sp>
+      <p:sp>
+        <p:nvSpPr>
+          <p:cNvPr id="8" name="TextBox 7"/>
+          <p:cNvSpPr txBox="1"/>
+          <p:nvPr/>
+        </p:nvSpPr>
+        <p:spPr>
+          <a:xfrm>
+            <a:off x="685800" y="1417320"/>
+            <a:ext cx="10817352" cy="5029200"/>
+          </a:xfrm>
+          <a:prstGeom prst="rect">
+            <a:avLst/>
+          </a:prstGeom>
+          <a:noFill/>
+        </p:spPr>
+        <p:txBody>
+          <a:bodyPr wrap="square">
+            <a:spAutoFit/>
+          </a:bodyPr>
+          <a:lstStyle/>
+          <a:p>
+            <a:pPr>
+              <a:spcBef>
+                <a:spcPts val="1000"/>
+              </a:spcBef>
+              <a:spcAft>
+                <a:spcPts val="200"/>
+              </a:spcAft>
+            </a:pPr>
+            <a:r>
+              <a:rPr sz="800" b="1">
+                <a:solidFill>
+                  <a:srgbClr val="78808C"/>
+                </a:solidFill>
+                <a:latin typeface="JetBrains Mono"/>
+              </a:rPr>
+              <a:t>STRATEGISCHE RED-FLAG-CHECKLISTE</a:t>
+            </a:r>
+          </a:p>
+          <a:p>
+            <a:pPr>
+              <a:spcBef>
+                <a:spcPts val="1000"/>
+              </a:spcBef>
+              <a:spcAft>
+                <a:spcPts val="200"/>
+              </a:spcAft>
+            </a:pPr>
+            <a:r>
+              <a:rPr sz="800" b="1">
+                <a:solidFill>
+                  <a:srgbClr val="78808C"/>
+                </a:solidFill>
+                <a:latin typeface="JetBrains Mono"/>
+              </a:rPr>
+              <a:t>QUANTITATIVE UNTERSTÜTZUNGSKENNZAHLEN</a:t>
+            </a:r>
+          </a:p>
+        </p:txBody>
+      </p:sp>
+      <p:sp>
+        <p:nvSpPr>
+          <p:cNvPr id="9" name="Rectangle 8"/>
           <p:cNvSpPr/>
           <p:nvPr/>
         </p:nvSpPr>
@@ -7323,7 +7343,7 @@
       </p:sp>
       <p:sp>
         <p:nvSpPr>
-          <p:cNvPr id="9" name="TextBox 8"/>
+          <p:cNvPr id="10" name="TextBox 9"/>
           <p:cNvSpPr txBox="1"/>
           <p:nvPr/>
         </p:nvSpPr>
@@ -7352,41 +7372,6 @@
                 <a:latin typeface="JetBrains Mono"/>
               </a:rPr>
               <a:t>Benedikt Zoller Coaching  ·  FKB Campus  ·  M22</a:t>
-            </a:r>
-          </a:p>
-        </p:txBody>
-      </p:sp>
-      <p:sp>
-        <p:nvSpPr>
-          <p:cNvPr id="10" name="TextBox 9"/>
-          <p:cNvSpPr txBox="1"/>
-          <p:nvPr/>
-        </p:nvSpPr>
-        <p:spPr>
-          <a:xfrm>
-            <a:off x="7176211" y="6583680"/>
-            <a:ext cx="4326940" cy="256032"/>
-          </a:xfrm>
-          <a:prstGeom prst="rect">
-            <a:avLst/>
-          </a:prstGeom>
-          <a:noFill/>
-        </p:spPr>
-        <p:txBody>
-          <a:bodyPr wrap="none">
-            <a:spAutoFit/>
-          </a:bodyPr>
-          <a:lstStyle/>
-          <a:p>
-            <a:pPr algn="r"/>
-            <a:r>
-              <a:rPr sz="700">
-                <a:solidFill>
-                  <a:srgbClr val="A0B4D2"/>
-                </a:solidFill>
-                <a:latin typeface="JetBrains Mono"/>
-              </a:rPr>
-              <a:t>Schaubild</a:t>
             </a:r>
           </a:p>
         </p:txBody>
@@ -7424,6 +7409,360 @@
             <a:avLst/>
           </a:prstGeom>
           <a:solidFill>
+            <a:srgbClr val="FFFFFF"/>
+          </a:solidFill>
+          <a:ln>
+            <a:noFill/>
+          </a:ln>
+        </p:spPr>
+        <p:style>
+          <a:lnRef idx="1">
+            <a:schemeClr val="accent1"/>
+          </a:lnRef>
+          <a:fillRef idx="3">
+            <a:schemeClr val="accent1"/>
+          </a:fillRef>
+          <a:effectRef idx="2">
+            <a:schemeClr val="accent1"/>
+          </a:effectRef>
+          <a:fontRef idx="minor">
+            <a:schemeClr val="lt1"/>
+          </a:fontRef>
+        </p:style>
+        <p:txBody>
+          <a:bodyPr rtlCol="0" anchor="ctr"/>
+          <a:lstStyle/>
+          <a:p>
+            <a:pPr algn="ctr"/>
+          </a:p>
+        </p:txBody>
+      </p:sp>
+      <p:sp>
+        <p:nvSpPr>
+          <p:cNvPr id="3" name="Rectangle 2"/>
+          <p:cNvSpPr/>
+          <p:nvPr/>
+        </p:nvSpPr>
+        <p:spPr>
+          <a:xfrm>
+            <a:off x="0" y="0"/>
+            <a:ext cx="12188952" cy="50292"/>
+          </a:xfrm>
+          <a:prstGeom prst="rect">
+            <a:avLst/>
+          </a:prstGeom>
+          <a:solidFill>
+            <a:srgbClr val="1F2C56"/>
+          </a:solidFill>
+          <a:ln>
+            <a:noFill/>
+          </a:ln>
+        </p:spPr>
+        <p:style>
+          <a:lnRef idx="1">
+            <a:schemeClr val="accent1"/>
+          </a:lnRef>
+          <a:fillRef idx="3">
+            <a:schemeClr val="accent1"/>
+          </a:fillRef>
+          <a:effectRef idx="2">
+            <a:schemeClr val="accent1"/>
+          </a:effectRef>
+          <a:fontRef idx="minor">
+            <a:schemeClr val="lt1"/>
+          </a:fontRef>
+        </p:style>
+        <p:txBody>
+          <a:bodyPr rtlCol="0" anchor="ctr"/>
+          <a:lstStyle/>
+          <a:p>
+            <a:pPr algn="ctr"/>
+          </a:p>
+        </p:txBody>
+      </p:sp>
+      <p:sp>
+        <p:nvSpPr>
+          <p:cNvPr id="4" name="TextBox 3"/>
+          <p:cNvSpPr txBox="1"/>
+          <p:nvPr/>
+        </p:nvSpPr>
+        <p:spPr>
+          <a:xfrm>
+            <a:off x="685800" y="109728"/>
+            <a:ext cx="10817352" cy="228600"/>
+          </a:xfrm>
+          <a:prstGeom prst="rect">
+            <a:avLst/>
+          </a:prstGeom>
+          <a:noFill/>
+        </p:spPr>
+        <p:txBody>
+          <a:bodyPr wrap="none">
+            <a:spAutoFit/>
+          </a:bodyPr>
+          <a:lstStyle/>
+          <a:p>
+            <a:pPr algn="l"/>
+            <a:r>
+              <a:rPr sz="750">
+                <a:solidFill>
+                  <a:srgbClr val="78808C"/>
+                </a:solidFill>
+                <a:latin typeface="JetBrains Mono"/>
+              </a:rPr>
+              <a:t>M22  ·  SCHAUBILD</a:t>
+            </a:r>
+          </a:p>
+        </p:txBody>
+      </p:sp>
+      <p:sp>
+        <p:nvSpPr>
+          <p:cNvPr id="5" name="TextBox 4"/>
+          <p:cNvSpPr txBox="1"/>
+          <p:nvPr/>
+        </p:nvSpPr>
+        <p:spPr>
+          <a:xfrm>
+            <a:off x="685800" y="502920"/>
+            <a:ext cx="10817352" cy="594360"/>
+          </a:xfrm>
+          <a:prstGeom prst="rect">
+            <a:avLst/>
+          </a:prstGeom>
+          <a:noFill/>
+        </p:spPr>
+        <p:txBody>
+          <a:bodyPr wrap="square">
+            <a:spAutoFit/>
+          </a:bodyPr>
+          <a:lstStyle/>
+          <a:p>
+            <a:pPr algn="l"/>
+            <a:r>
+              <a:rPr sz="2000" b="1" i="0">
+                <a:solidFill>
+                  <a:srgbClr val="1F2C56"/>
+                </a:solidFill>
+                <a:latin typeface="Source Serif 4"/>
+              </a:rPr>
+              <a:t>Handlungsempfehlung</a:t>
+            </a:r>
+          </a:p>
+        </p:txBody>
+      </p:sp>
+      <p:sp>
+        <p:nvSpPr>
+          <p:cNvPr id="6" name="Rectangle 5"/>
+          <p:cNvSpPr/>
+          <p:nvPr/>
+        </p:nvSpPr>
+        <p:spPr>
+          <a:xfrm>
+            <a:off x="685800" y="1143000"/>
+            <a:ext cx="10817352" cy="25400"/>
+          </a:xfrm>
+          <a:prstGeom prst="rect">
+            <a:avLst/>
+          </a:prstGeom>
+          <a:solidFill>
+            <a:srgbClr val="D9C089"/>
+          </a:solidFill>
+          <a:ln>
+            <a:noFill/>
+          </a:ln>
+        </p:spPr>
+        <p:style>
+          <a:lnRef idx="1">
+            <a:schemeClr val="accent1"/>
+          </a:lnRef>
+          <a:fillRef idx="3">
+            <a:schemeClr val="accent1"/>
+          </a:fillRef>
+          <a:effectRef idx="2">
+            <a:schemeClr val="accent1"/>
+          </a:effectRef>
+          <a:fontRef idx="minor">
+            <a:schemeClr val="lt1"/>
+          </a:fontRef>
+        </p:style>
+        <p:txBody>
+          <a:bodyPr rtlCol="0" anchor="ctr"/>
+          <a:lstStyle/>
+          <a:p>
+            <a:pPr algn="ctr"/>
+          </a:p>
+        </p:txBody>
+      </p:sp>
+      <p:pic>
+        <p:nvPicPr>
+          <p:cNvPr id="7" name="Picture 6" descr="image.png"/>
+          <p:cNvPicPr>
+            <a:picLocks noChangeAspect="1"/>
+          </p:cNvPicPr>
+          <p:nvPr/>
+        </p:nvPicPr>
+        <p:blipFill>
+          <a:blip r:embed="rId2"/>
+          <a:stretch>
+            <a:fillRect/>
+          </a:stretch>
+        </p:blipFill>
+        <p:spPr>
+          <a:xfrm>
+            <a:off x="2303489" y="1325880"/>
+            <a:ext cx="7581973" cy="4937760"/>
+          </a:xfrm>
+          <a:prstGeom prst="rect">
+            <a:avLst/>
+          </a:prstGeom>
+        </p:spPr>
+      </p:pic>
+      <p:sp>
+        <p:nvSpPr>
+          <p:cNvPr id="8" name="Rectangle 7"/>
+          <p:cNvSpPr/>
+          <p:nvPr/>
+        </p:nvSpPr>
+        <p:spPr>
+          <a:xfrm>
+            <a:off x="0" y="6510528"/>
+            <a:ext cx="12188952" cy="347472"/>
+          </a:xfrm>
+          <a:prstGeom prst="rect">
+            <a:avLst/>
+          </a:prstGeom>
+          <a:solidFill>
+            <a:srgbClr val="0A1937"/>
+          </a:solidFill>
+          <a:ln>
+            <a:noFill/>
+          </a:ln>
+        </p:spPr>
+        <p:style>
+          <a:lnRef idx="1">
+            <a:schemeClr val="accent1"/>
+          </a:lnRef>
+          <a:fillRef idx="3">
+            <a:schemeClr val="accent1"/>
+          </a:fillRef>
+          <a:effectRef idx="2">
+            <a:schemeClr val="accent1"/>
+          </a:effectRef>
+          <a:fontRef idx="minor">
+            <a:schemeClr val="lt1"/>
+          </a:fontRef>
+        </p:style>
+        <p:txBody>
+          <a:bodyPr rtlCol="0" anchor="ctr"/>
+          <a:lstStyle/>
+          <a:p>
+            <a:pPr algn="ctr"/>
+          </a:p>
+        </p:txBody>
+      </p:sp>
+      <p:sp>
+        <p:nvSpPr>
+          <p:cNvPr id="9" name="TextBox 8"/>
+          <p:cNvSpPr txBox="1"/>
+          <p:nvPr/>
+        </p:nvSpPr>
+        <p:spPr>
+          <a:xfrm>
+            <a:off x="685800" y="6583680"/>
+            <a:ext cx="6490411" cy="256032"/>
+          </a:xfrm>
+          <a:prstGeom prst="rect">
+            <a:avLst/>
+          </a:prstGeom>
+          <a:noFill/>
+        </p:spPr>
+        <p:txBody>
+          <a:bodyPr wrap="none">
+            <a:spAutoFit/>
+          </a:bodyPr>
+          <a:lstStyle/>
+          <a:p>
+            <a:pPr algn="l"/>
+            <a:r>
+              <a:rPr sz="700">
+                <a:solidFill>
+                  <a:srgbClr val="A0B4D2"/>
+                </a:solidFill>
+                <a:latin typeface="JetBrains Mono"/>
+              </a:rPr>
+              <a:t>Benedikt Zoller Coaching  ·  FKB Campus  ·  M22</a:t>
+            </a:r>
+          </a:p>
+        </p:txBody>
+      </p:sp>
+      <p:sp>
+        <p:nvSpPr>
+          <p:cNvPr id="10" name="TextBox 9"/>
+          <p:cNvSpPr txBox="1"/>
+          <p:nvPr/>
+        </p:nvSpPr>
+        <p:spPr>
+          <a:xfrm>
+            <a:off x="7176211" y="6583680"/>
+            <a:ext cx="4326940" cy="256032"/>
+          </a:xfrm>
+          <a:prstGeom prst="rect">
+            <a:avLst/>
+          </a:prstGeom>
+          <a:noFill/>
+        </p:spPr>
+        <p:txBody>
+          <a:bodyPr wrap="none">
+            <a:spAutoFit/>
+          </a:bodyPr>
+          <a:lstStyle/>
+          <a:p>
+            <a:pPr algn="r"/>
+            <a:r>
+              <a:rPr sz="700">
+                <a:solidFill>
+                  <a:srgbClr val="A0B4D2"/>
+                </a:solidFill>
+                <a:latin typeface="JetBrains Mono"/>
+              </a:rPr>
+              <a:t>Schaubild</a:t>
+            </a:r>
+          </a:p>
+        </p:txBody>
+      </p:sp>
+    </p:spTree>
+  </p:cSld>
+  <p:clrMapOvr>
+    <a:masterClrMapping/>
+  </p:clrMapOvr>
+</p:sld>
+</file>
+
+<file path=ppt/slides/slide17.xml><?xml version="1.0" encoding="utf-8"?>
+<p:sld xmlns:a="http://schemas.openxmlformats.org/drawingml/2006/main" xmlns:p="http://schemas.openxmlformats.org/presentationml/2006/main" xmlns:r="http://schemas.openxmlformats.org/officeDocument/2006/relationships">
+  <p:cSld>
+    <p:spTree>
+      <p:nvGrpSpPr>
+        <p:cNvPr id="1" name=""/>
+        <p:cNvGrpSpPr/>
+        <p:nvPr/>
+      </p:nvGrpSpPr>
+      <p:grpSpPr/>
+      <p:sp>
+        <p:nvSpPr>
+          <p:cNvPr id="2" name="Rectangle 1"/>
+          <p:cNvSpPr/>
+          <p:nvPr/>
+        </p:nvSpPr>
+        <p:spPr>
+          <a:xfrm>
+            <a:off x="0" y="0"/>
+            <a:ext cx="12188952" cy="6858000"/>
+          </a:xfrm>
+          <a:prstGeom prst="rect">
+            <a:avLst/>
+          </a:prstGeom>
+          <a:solidFill>
             <a:srgbClr val="EDEDF3"/>
           </a:solidFill>
           <a:ln>
@@ -7981,7 +8320,7 @@
                 </a:solidFill>
                 <a:latin typeface="JetBrains Mono"/>
               </a:rPr>
-              <a:t>LERNZIELE  ·  M22</a:t>
+              <a:t>ÜBERBLICK  ·  M22</a:t>
             </a:r>
           </a:p>
         </p:txBody>
@@ -8059,7 +8398,7 @@
                 </a:solidFill>
                 <a:latin typeface="Source Serif 4"/>
               </a:rPr>
-              <a:t>Was Sie heute mitnehmen</a:t>
+              <a:t>Worum geht es heute</a:t>
             </a:r>
           </a:p>
         </p:txBody>
@@ -8072,8 +8411,8 @@
         </p:nvSpPr>
         <p:spPr>
           <a:xfrm>
-            <a:off x="685800" y="1371600"/>
-            <a:ext cx="10817352" cy="5120640"/>
+            <a:off x="685800" y="1737360"/>
+            <a:ext cx="9720072" cy="4206240"/>
           </a:xfrm>
           <a:prstGeom prst="rect">
             <a:avLst/>
@@ -8087,116 +8426,50 @@
           <a:lstStyle/>
           <a:p>
             <a:pPr>
-              <a:spcBef>
-                <a:spcPts val="800"/>
-              </a:spcBef>
               <a:spcAft>
-                <a:spcPts val="200"/>
+                <a:spcPts val="1200"/>
               </a:spcAft>
             </a:pPr>
             <a:r>
-              <a:rPr sz="1400">
+              <a:rPr sz="1700">
                 <a:solidFill>
                   <a:srgbClr val="3D5466"/>
                 </a:solidFill>
                 <a:latin typeface="Arial"/>
               </a:rPr>
-              <a:t>▸  Strategische Analyseinstrumente (Five Forces, Business Model Canvas, SWOT) auf ein KMU-Fallbeispiel anwenden</a:t>
+              <a:t>Die Bilanz erklärt die Vergangenheit – ob der Kredit zurückgezahlt wird, entscheidet das Geschäftsmodell.</a:t>
             </a:r>
           </a:p>
           <a:p>
             <a:pPr>
-              <a:spcBef>
-                <a:spcPts val="800"/>
-              </a:spcBef>
               <a:spcAft>
-                <a:spcPts val="200"/>
+                <a:spcPts val="1200"/>
               </a:spcAft>
             </a:pPr>
             <a:r>
-              <a:rPr sz="1400">
+              <a:rPr sz="1700">
                 <a:solidFill>
                   <a:srgbClr val="3D5466"/>
                 </a:solidFill>
                 <a:latin typeface="Arial"/>
               </a:rPr>
-              <a:t>▸  Stärken, Schwächen und strategische Abhängigkeiten eines Unternehmens analysieren</a:t>
+              <a:t>Sie lernen vier Strategie-Frameworks (Five Forces, generische Strategien, Business Model Canvas, SWOT) als Werkzeuge der qualitativen Kreditwürdigkeitsanalyse.</a:t>
             </a:r>
           </a:p>
           <a:p>
             <a:pPr>
-              <a:spcBef>
-                <a:spcPts val="800"/>
-              </a:spcBef>
               <a:spcAft>
-                <a:spcPts val="200"/>
+                <a:spcPts val="1200"/>
               </a:spcAft>
             </a:pPr>
             <a:r>
-              <a:rPr sz="1400">
+              <a:rPr sz="1700">
                 <a:solidFill>
                   <a:srgbClr val="3D5466"/>
                 </a:solidFill>
                 <a:latin typeface="Arial"/>
               </a:rPr>
-              <a:t>▸  Qualitative Risikofaktoren (Klumpenrisiken, Nachfolge, Wettbewerbsdruck) von Stabilitätssignalen unterscheiden</a:t>
-            </a:r>
-          </a:p>
-          <a:p>
-            <a:pPr>
-              <a:spcBef>
-                <a:spcPts val="800"/>
-              </a:spcBef>
-              <a:spcAft>
-                <a:spcPts val="200"/>
-              </a:spcAft>
-            </a:pPr>
-            <a:r>
-              <a:rPr sz="1400">
-                <a:solidFill>
-                  <a:srgbClr val="3D5466"/>
-                </a:solidFill>
-                <a:latin typeface="Arial"/>
-              </a:rPr>
-              <a:t>▸  Die strategische Position eines Unternehmens hinsichtlich seiner mittelfristigen Kreditwürdigkeit beurteilen</a:t>
-            </a:r>
-          </a:p>
-          <a:p>
-            <a:pPr>
-              <a:spcBef>
-                <a:spcPts val="800"/>
-              </a:spcBef>
-              <a:spcAft>
-                <a:spcPts val="200"/>
-              </a:spcAft>
-            </a:pPr>
-            <a:r>
-              <a:rPr sz="1400">
-                <a:solidFill>
-                  <a:srgbClr val="3D5466"/>
-                </a:solidFill>
-                <a:latin typeface="Arial"/>
-              </a:rPr>
-              <a:t>▸  Qualitative Befunde strukturiert in einer Kreditvorlage formulieren</a:t>
-            </a:r>
-          </a:p>
-          <a:p>
-            <a:pPr>
-              <a:spcBef>
-                <a:spcPts val="800"/>
-              </a:spcBef>
-              <a:spcAft>
-                <a:spcPts val="200"/>
-              </a:spcAft>
-            </a:pPr>
-            <a:r>
-              <a:rPr sz="1400">
-                <a:solidFill>
-                  <a:srgbClr val="3D5466"/>
-                </a:solidFill>
-                <a:latin typeface="Arial"/>
-              </a:rPr>
-              <a:t>▸  Porters generische Wettbewerbsstrategien (Kostenführerschaft, Differenzierung, Fokus) identifizieren und das Stuck-in-the-Middle-Risiko eines KMU beurteilen</a:t>
+              <a:t>Danach erkennen Sie strategische Risiken wie Stuck-in-the-Middle oder Klumpenrisiken und übersetzen sie in fundierte Kreditempfehlungen.</a:t>
             </a:r>
           </a:p>
         </p:txBody>
@@ -8413,7 +8686,7 @@
                 </a:solidFill>
                 <a:latin typeface="JetBrains Mono"/>
               </a:rPr>
-              <a:t>M22  ·  INHALT</a:t>
+              <a:t>LERNZIELE  ·  M22</a:t>
             </a:r>
           </a:p>
         </p:txBody>
@@ -8463,57 +8736,14 @@
       </p:sp>
       <p:sp>
         <p:nvSpPr>
-          <p:cNvPr id="6" name="Rectangle 5"/>
-          <p:cNvSpPr/>
+          <p:cNvPr id="6" name="TextBox 5"/>
+          <p:cNvSpPr txBox="1"/>
           <p:nvPr/>
         </p:nvSpPr>
         <p:spPr>
           <a:xfrm>
             <a:off x="685800" y="502920"/>
-            <a:ext cx="36576" cy="658368"/>
-          </a:xfrm>
-          <a:prstGeom prst="rect">
-            <a:avLst/>
-          </a:prstGeom>
-          <a:solidFill>
-            <a:srgbClr val="D9C089"/>
-          </a:solidFill>
-          <a:ln>
-            <a:noFill/>
-          </a:ln>
-        </p:spPr>
-        <p:style>
-          <a:lnRef idx="1">
-            <a:schemeClr val="accent1"/>
-          </a:lnRef>
-          <a:fillRef idx="3">
-            <a:schemeClr val="accent1"/>
-          </a:fillRef>
-          <a:effectRef idx="2">
-            <a:schemeClr val="accent1"/>
-          </a:effectRef>
-          <a:fontRef idx="minor">
-            <a:schemeClr val="lt1"/>
-          </a:fontRef>
-        </p:style>
-        <p:txBody>
-          <a:bodyPr rtlCol="0" anchor="ctr"/>
-          <a:lstStyle/>
-          <a:p>
-            <a:pPr algn="ctr"/>
-          </a:p>
-        </p:txBody>
-      </p:sp>
-      <p:sp>
-        <p:nvSpPr>
-          <p:cNvPr id="7" name="TextBox 6"/>
-          <p:cNvSpPr txBox="1"/>
-          <p:nvPr/>
-        </p:nvSpPr>
-        <p:spPr>
-          <a:xfrm>
-            <a:off x="813816" y="502920"/>
-            <a:ext cx="10634472" cy="685800"/>
+            <a:ext cx="10817352" cy="658368"/>
           </a:xfrm>
           <a:prstGeom prst="rect">
             <a:avLst/>
@@ -8528,27 +8758,27 @@
           <a:p>
             <a:pPr algn="l"/>
             <a:r>
-              <a:rPr sz="2400" b="1" i="0">
+              <a:rPr sz="2600" b="1" i="0">
                 <a:solidFill>
                   <a:srgbClr val="1F2C56"/>
                 </a:solidFill>
                 <a:latin typeface="Source Serif 4"/>
               </a:rPr>
-              <a:t>Theoretischer Hintergrund: Warum Strategie zur Kreditwürdigkeit gehört</a:t>
-            </a:r>
-          </a:p>
-        </p:txBody>
-      </p:sp>
-      <p:sp>
-        <p:nvSpPr>
-          <p:cNvPr id="8" name="TextBox 7"/>
+              <a:t>Was Sie heute mitnehmen</a:t>
+            </a:r>
+          </a:p>
+        </p:txBody>
+      </p:sp>
+      <p:sp>
+        <p:nvSpPr>
+          <p:cNvPr id="7" name="TextBox 6"/>
           <p:cNvSpPr txBox="1"/>
           <p:nvPr/>
         </p:nvSpPr>
         <p:spPr>
           <a:xfrm>
-            <a:off x="685800" y="1417320"/>
-            <a:ext cx="10817352" cy="5029200"/>
+            <a:off x="685800" y="1371600"/>
+            <a:ext cx="10817352" cy="5120640"/>
           </a:xfrm>
           <a:prstGeom prst="rect">
             <a:avLst/>
@@ -8563,65 +8793,122 @@
           <a:p>
             <a:pPr>
               <a:spcBef>
-                <a:spcPts val="1000"/>
+                <a:spcPts val="800"/>
               </a:spcBef>
               <a:spcAft>
                 <a:spcPts val="200"/>
               </a:spcAft>
             </a:pPr>
             <a:r>
-              <a:rPr sz="800" b="1">
-                <a:solidFill>
-                  <a:srgbClr val="78808C"/>
-                </a:solidFill>
-                <a:latin typeface="JetBrains Mono"/>
+              <a:rPr sz="1400">
+                <a:solidFill>
+                  <a:srgbClr val="3D5466"/>
+                </a:solidFill>
+                <a:latin typeface="Arial"/>
               </a:rPr>
-              <a:t>VOM BILANZBILD ZUM ZUKUNFTSURTEIL</a:t>
+              <a:t>▸  Strategische Analyseinstrumente (Five Forces, Business Model Canvas, SWOT) auf ein KMU-Fallbeispiel anwenden</a:t>
             </a:r>
           </a:p>
           <a:p>
             <a:pPr>
               <a:spcBef>
-                <a:spcPts val="1000"/>
+                <a:spcPts val="800"/>
               </a:spcBef>
               <a:spcAft>
                 <a:spcPts val="200"/>
               </a:spcAft>
             </a:pPr>
             <a:r>
-              <a:rPr sz="800" b="1">
-                <a:solidFill>
-                  <a:srgbClr val="78808C"/>
-                </a:solidFill>
-                <a:latin typeface="JetBrains Mono"/>
+              <a:rPr sz="1400">
+                <a:solidFill>
+                  <a:srgbClr val="3D5466"/>
+                </a:solidFill>
+                <a:latin typeface="Arial"/>
               </a:rPr>
-              <a:t>DAS DREI-EBENEN-MODELL DER QUALITATIVEN KREDITWÜRDIGKEITSANALYSE</a:t>
+              <a:t>▸  Stärken, Schwächen und strategische Abhängigkeiten eines Unternehmens analysieren</a:t>
             </a:r>
           </a:p>
           <a:p>
             <a:pPr>
               <a:spcBef>
-                <a:spcPts val="400"/>
+                <a:spcPts val="800"/>
               </a:spcBef>
               <a:spcAft>
                 <a:spcPts val="200"/>
               </a:spcAft>
             </a:pPr>
             <a:r>
-              <a:rPr sz="1200">
+              <a:rPr sz="1400">
                 <a:solidFill>
                   <a:srgbClr val="3D5466"/>
                 </a:solidFill>
                 <a:latin typeface="Arial"/>
               </a:rPr>
-              <a:t>Eine vollständige qualitative Unternehmensanalyse umfasst drei Ebenen:</a:t>
-            </a:r>
-          </a:p>
-        </p:txBody>
-      </p:sp>
-      <p:sp>
-        <p:nvSpPr>
-          <p:cNvPr id="9" name="Rectangle 8"/>
+              <a:t>▸  Qualitative Risikofaktoren (Klumpenrisiken, Nachfolge, Wettbewerbsdruck) von Stabilitätssignalen unterscheiden</a:t>
+            </a:r>
+          </a:p>
+          <a:p>
+            <a:pPr>
+              <a:spcBef>
+                <a:spcPts val="800"/>
+              </a:spcBef>
+              <a:spcAft>
+                <a:spcPts val="200"/>
+              </a:spcAft>
+            </a:pPr>
+            <a:r>
+              <a:rPr sz="1400">
+                <a:solidFill>
+                  <a:srgbClr val="3D5466"/>
+                </a:solidFill>
+                <a:latin typeface="Arial"/>
+              </a:rPr>
+              <a:t>▸  Die strategische Position eines Unternehmens hinsichtlich seiner mittelfristigen Kreditwürdigkeit beurteilen</a:t>
+            </a:r>
+          </a:p>
+          <a:p>
+            <a:pPr>
+              <a:spcBef>
+                <a:spcPts val="800"/>
+              </a:spcBef>
+              <a:spcAft>
+                <a:spcPts val="200"/>
+              </a:spcAft>
+            </a:pPr>
+            <a:r>
+              <a:rPr sz="1400">
+                <a:solidFill>
+                  <a:srgbClr val="3D5466"/>
+                </a:solidFill>
+                <a:latin typeface="Arial"/>
+              </a:rPr>
+              <a:t>▸  Qualitative Befunde strukturiert in einer Kreditvorlage formulieren</a:t>
+            </a:r>
+          </a:p>
+          <a:p>
+            <a:pPr>
+              <a:spcBef>
+                <a:spcPts val="800"/>
+              </a:spcBef>
+              <a:spcAft>
+                <a:spcPts val="200"/>
+              </a:spcAft>
+            </a:pPr>
+            <a:r>
+              <a:rPr sz="1400">
+                <a:solidFill>
+                  <a:srgbClr val="3D5466"/>
+                </a:solidFill>
+                <a:latin typeface="Arial"/>
+              </a:rPr>
+              <a:t>▸  Porters generische Wettbewerbsstrategien (Kostenführerschaft, Differenzierung, Fokus) identifizieren und das Stuck-in-the-Middle-Risiko eines KMU beurteilen</a:t>
+            </a:r>
+          </a:p>
+        </p:txBody>
+      </p:sp>
+      <p:sp>
+        <p:nvSpPr>
+          <p:cNvPr id="8" name="Rectangle 7"/>
           <p:cNvSpPr/>
           <p:nvPr/>
         </p:nvSpPr>
@@ -8664,7 +8951,7 @@
       </p:sp>
       <p:sp>
         <p:nvSpPr>
-          <p:cNvPr id="10" name="TextBox 9"/>
+          <p:cNvPr id="9" name="TextBox 8"/>
           <p:cNvSpPr txBox="1"/>
           <p:nvPr/>
         </p:nvSpPr>
@@ -8730,7 +9017,7 @@
             <a:avLst/>
           </a:prstGeom>
           <a:solidFill>
-            <a:srgbClr val="FFFFFF"/>
+            <a:srgbClr val="EDEDF3"/>
           </a:solidFill>
           <a:ln>
             <a:noFill/>
@@ -8831,43 +9118,51 @@
                 </a:solidFill>
                 <a:latin typeface="JetBrains Mono"/>
               </a:rPr>
-              <a:t>M22  ·  SCHAUBILD</a:t>
-            </a:r>
-          </a:p>
-        </p:txBody>
-      </p:sp>
-      <p:sp>
-        <p:nvSpPr>
-          <p:cNvPr id="5" name="TextBox 4"/>
-          <p:cNvSpPr txBox="1"/>
-          <p:nvPr/>
-        </p:nvSpPr>
-        <p:spPr>
-          <a:xfrm>
-            <a:off x="685800" y="502920"/>
-            <a:ext cx="10817352" cy="594360"/>
-          </a:xfrm>
-          <a:prstGeom prst="rect">
-            <a:avLst/>
-          </a:prstGeom>
-          <a:noFill/>
-        </p:spPr>
-        <p:txBody>
-          <a:bodyPr wrap="square">
-            <a:spAutoFit/>
-          </a:bodyPr>
-          <a:lstStyle/>
-          <a:p>
-            <a:pPr algn="l"/>
-            <a:r>
-              <a:rPr sz="2000" b="1" i="0">
-                <a:solidFill>
-                  <a:srgbClr val="1F2C56"/>
-                </a:solidFill>
-                <a:latin typeface="Source Serif 4"/>
-              </a:rPr>
-              <a:t>Drei Analyse-Ebenen der qualitativen Kreditwürdigkeitsanalys</a:t>
-            </a:r>
+              <a:t>M22  ·  INHALT</a:t>
+            </a:r>
+          </a:p>
+        </p:txBody>
+      </p:sp>
+      <p:sp>
+        <p:nvSpPr>
+          <p:cNvPr id="5" name="Rectangle 4"/>
+          <p:cNvSpPr/>
+          <p:nvPr/>
+        </p:nvSpPr>
+        <p:spPr>
+          <a:xfrm>
+            <a:off x="0" y="1234440"/>
+            <a:ext cx="12188952" cy="12700"/>
+          </a:xfrm>
+          <a:prstGeom prst="rect">
+            <a:avLst/>
+          </a:prstGeom>
+          <a:solidFill>
+            <a:srgbClr val="D8DFE4"/>
+          </a:solidFill>
+          <a:ln>
+            <a:noFill/>
+          </a:ln>
+        </p:spPr>
+        <p:style>
+          <a:lnRef idx="1">
+            <a:schemeClr val="accent1"/>
+          </a:lnRef>
+          <a:fillRef idx="3">
+            <a:schemeClr val="accent1"/>
+          </a:fillRef>
+          <a:effectRef idx="2">
+            <a:schemeClr val="accent1"/>
+          </a:effectRef>
+          <a:fontRef idx="minor">
+            <a:schemeClr val="lt1"/>
+          </a:fontRef>
+        </p:style>
+        <p:txBody>
+          <a:bodyPr rtlCol="0" anchor="ctr"/>
+          <a:lstStyle/>
+          <a:p>
+            <a:pPr algn="ctr"/>
           </a:p>
         </p:txBody>
       </p:sp>
@@ -8879,8 +9174,8 @@
         </p:nvSpPr>
         <p:spPr>
           <a:xfrm>
-            <a:off x="685800" y="1143000"/>
-            <a:ext cx="10817352" cy="25400"/>
+            <a:off x="685800" y="502920"/>
+            <a:ext cx="36576" cy="658368"/>
           </a:xfrm>
           <a:prstGeom prst="rect">
             <a:avLst/>
@@ -8914,33 +9209,124 @@
           </a:p>
         </p:txBody>
       </p:sp>
-      <p:pic>
-        <p:nvPicPr>
-          <p:cNvPr id="7" name="Picture 6" descr="image.png"/>
-          <p:cNvPicPr>
-            <a:picLocks noChangeAspect="1"/>
-          </p:cNvPicPr>
-          <p:nvPr/>
-        </p:nvPicPr>
-        <p:blipFill>
-          <a:blip r:embed="rId2"/>
-          <a:stretch>
-            <a:fillRect/>
-          </a:stretch>
-        </p:blipFill>
-        <p:spPr>
-          <a:xfrm>
-            <a:off x="2303489" y="1325880"/>
-            <a:ext cx="7581973" cy="4937760"/>
-          </a:xfrm>
-          <a:prstGeom prst="rect">
-            <a:avLst/>
-          </a:prstGeom>
-        </p:spPr>
-      </p:pic>
-      <p:sp>
-        <p:nvSpPr>
-          <p:cNvPr id="8" name="Rectangle 7"/>
+      <p:sp>
+        <p:nvSpPr>
+          <p:cNvPr id="7" name="TextBox 6"/>
+          <p:cNvSpPr txBox="1"/>
+          <p:nvPr/>
+        </p:nvSpPr>
+        <p:spPr>
+          <a:xfrm>
+            <a:off x="813816" y="502920"/>
+            <a:ext cx="10634472" cy="685800"/>
+          </a:xfrm>
+          <a:prstGeom prst="rect">
+            <a:avLst/>
+          </a:prstGeom>
+          <a:noFill/>
+        </p:spPr>
+        <p:txBody>
+          <a:bodyPr wrap="square">
+            <a:spAutoFit/>
+          </a:bodyPr>
+          <a:lstStyle/>
+          <a:p>
+            <a:pPr algn="l"/>
+            <a:r>
+              <a:rPr sz="2400" b="1" i="0">
+                <a:solidFill>
+                  <a:srgbClr val="1F2C56"/>
+                </a:solidFill>
+                <a:latin typeface="Source Serif 4"/>
+              </a:rPr>
+              <a:t>Theoretischer Hintergrund: Warum Strategie zur Kreditwürdigkeit gehört</a:t>
+            </a:r>
+          </a:p>
+        </p:txBody>
+      </p:sp>
+      <p:sp>
+        <p:nvSpPr>
+          <p:cNvPr id="8" name="TextBox 7"/>
+          <p:cNvSpPr txBox="1"/>
+          <p:nvPr/>
+        </p:nvSpPr>
+        <p:spPr>
+          <a:xfrm>
+            <a:off x="685800" y="1417320"/>
+            <a:ext cx="10817352" cy="5029200"/>
+          </a:xfrm>
+          <a:prstGeom prst="rect">
+            <a:avLst/>
+          </a:prstGeom>
+          <a:noFill/>
+        </p:spPr>
+        <p:txBody>
+          <a:bodyPr wrap="square">
+            <a:spAutoFit/>
+          </a:bodyPr>
+          <a:lstStyle/>
+          <a:p>
+            <a:pPr>
+              <a:spcBef>
+                <a:spcPts val="1000"/>
+              </a:spcBef>
+              <a:spcAft>
+                <a:spcPts val="200"/>
+              </a:spcAft>
+            </a:pPr>
+            <a:r>
+              <a:rPr sz="800" b="1">
+                <a:solidFill>
+                  <a:srgbClr val="78808C"/>
+                </a:solidFill>
+                <a:latin typeface="JetBrains Mono"/>
+              </a:rPr>
+              <a:t>VOM BILANZBILD ZUM ZUKUNFTSURTEIL</a:t>
+            </a:r>
+          </a:p>
+          <a:p>
+            <a:pPr>
+              <a:spcBef>
+                <a:spcPts val="1000"/>
+              </a:spcBef>
+              <a:spcAft>
+                <a:spcPts val="200"/>
+              </a:spcAft>
+            </a:pPr>
+            <a:r>
+              <a:rPr sz="800" b="1">
+                <a:solidFill>
+                  <a:srgbClr val="78808C"/>
+                </a:solidFill>
+                <a:latin typeface="JetBrains Mono"/>
+              </a:rPr>
+              <a:t>DAS DREI-EBENEN-MODELL DER QUALITATIVEN KREDITWÜRDIGKEITSANALYSE</a:t>
+            </a:r>
+          </a:p>
+          <a:p>
+            <a:pPr>
+              <a:spcBef>
+                <a:spcPts val="400"/>
+              </a:spcBef>
+              <a:spcAft>
+                <a:spcPts val="200"/>
+              </a:spcAft>
+            </a:pPr>
+            <a:r>
+              <a:rPr sz="1200">
+                <a:solidFill>
+                  <a:srgbClr val="3D5466"/>
+                </a:solidFill>
+                <a:latin typeface="Arial"/>
+              </a:rPr>
+              <a:t>Eine vollständige qualitative Unternehmensanalyse umfasst drei Ebenen:</a:t>
+            </a:r>
+          </a:p>
+        </p:txBody>
+      </p:sp>
+      <p:sp>
+        <p:nvSpPr>
+          <p:cNvPr id="9" name="Rectangle 8"/>
           <p:cNvSpPr/>
           <p:nvPr/>
         </p:nvSpPr>
@@ -8983,7 +9369,7 @@
       </p:sp>
       <p:sp>
         <p:nvSpPr>
-          <p:cNvPr id="9" name="TextBox 8"/>
+          <p:cNvPr id="10" name="TextBox 9"/>
           <p:cNvSpPr txBox="1"/>
           <p:nvPr/>
         </p:nvSpPr>
@@ -9012,41 +9398,6 @@
                 <a:latin typeface="JetBrains Mono"/>
               </a:rPr>
               <a:t>Benedikt Zoller Coaching  ·  FKB Campus  ·  M22</a:t>
-            </a:r>
-          </a:p>
-        </p:txBody>
-      </p:sp>
-      <p:sp>
-        <p:nvSpPr>
-          <p:cNvPr id="10" name="TextBox 9"/>
-          <p:cNvSpPr txBox="1"/>
-          <p:nvPr/>
-        </p:nvSpPr>
-        <p:spPr>
-          <a:xfrm>
-            <a:off x="7176211" y="6583680"/>
-            <a:ext cx="4326940" cy="256032"/>
-          </a:xfrm>
-          <a:prstGeom prst="rect">
-            <a:avLst/>
-          </a:prstGeom>
-          <a:noFill/>
-        </p:spPr>
-        <p:txBody>
-          <a:bodyPr wrap="none">
-            <a:spAutoFit/>
-          </a:bodyPr>
-          <a:lstStyle/>
-          <a:p>
-            <a:pPr algn="r"/>
-            <a:r>
-              <a:rPr sz="700">
-                <a:solidFill>
-                  <a:srgbClr val="A0B4D2"/>
-                </a:solidFill>
-                <a:latin typeface="JetBrains Mono"/>
-              </a:rPr>
-              <a:t>Schaubild</a:t>
             </a:r>
           </a:p>
         </p:txBody>
@@ -9084,7 +9435,7 @@
             <a:avLst/>
           </a:prstGeom>
           <a:solidFill>
-            <a:srgbClr val="EDEDF3"/>
+            <a:srgbClr val="FFFFFF"/>
           </a:solidFill>
           <a:ln>
             <a:noFill/>
@@ -9185,51 +9536,43 @@
                 </a:solidFill>
                 <a:latin typeface="JetBrains Mono"/>
               </a:rPr>
-              <a:t>M22  ·  INHALT</a:t>
-            </a:r>
-          </a:p>
-        </p:txBody>
-      </p:sp>
-      <p:sp>
-        <p:nvSpPr>
-          <p:cNvPr id="5" name="Rectangle 4"/>
-          <p:cNvSpPr/>
-          <p:nvPr/>
-        </p:nvSpPr>
-        <p:spPr>
-          <a:xfrm>
-            <a:off x="0" y="1234440"/>
-            <a:ext cx="12188952" cy="12700"/>
-          </a:xfrm>
-          <a:prstGeom prst="rect">
-            <a:avLst/>
-          </a:prstGeom>
-          <a:solidFill>
-            <a:srgbClr val="D8DFE4"/>
-          </a:solidFill>
-          <a:ln>
-            <a:noFill/>
-          </a:ln>
-        </p:spPr>
-        <p:style>
-          <a:lnRef idx="1">
-            <a:schemeClr val="accent1"/>
-          </a:lnRef>
-          <a:fillRef idx="3">
-            <a:schemeClr val="accent1"/>
-          </a:fillRef>
-          <a:effectRef idx="2">
-            <a:schemeClr val="accent1"/>
-          </a:effectRef>
-          <a:fontRef idx="minor">
-            <a:schemeClr val="lt1"/>
-          </a:fontRef>
-        </p:style>
-        <p:txBody>
-          <a:bodyPr rtlCol="0" anchor="ctr"/>
-          <a:lstStyle/>
-          <a:p>
-            <a:pPr algn="ctr"/>
+              <a:t>M22  ·  SCHAUBILD</a:t>
+            </a:r>
+          </a:p>
+        </p:txBody>
+      </p:sp>
+      <p:sp>
+        <p:nvSpPr>
+          <p:cNvPr id="5" name="TextBox 4"/>
+          <p:cNvSpPr txBox="1"/>
+          <p:nvPr/>
+        </p:nvSpPr>
+        <p:spPr>
+          <a:xfrm>
+            <a:off x="685800" y="502920"/>
+            <a:ext cx="10817352" cy="594360"/>
+          </a:xfrm>
+          <a:prstGeom prst="rect">
+            <a:avLst/>
+          </a:prstGeom>
+          <a:noFill/>
+        </p:spPr>
+        <p:txBody>
+          <a:bodyPr wrap="square">
+            <a:spAutoFit/>
+          </a:bodyPr>
+          <a:lstStyle/>
+          <a:p>
+            <a:pPr algn="l"/>
+            <a:r>
+              <a:rPr sz="2000" b="1" i="0">
+                <a:solidFill>
+                  <a:srgbClr val="1F2C56"/>
+                </a:solidFill>
+                <a:latin typeface="Source Serif 4"/>
+              </a:rPr>
+              <a:t>Drei Analyse-Ebenen der qualitativen Kreditwürdigkeitsanalys</a:t>
+            </a:r>
           </a:p>
         </p:txBody>
       </p:sp>
@@ -9241,8 +9584,8 @@
         </p:nvSpPr>
         <p:spPr>
           <a:xfrm>
-            <a:off x="685800" y="502920"/>
-            <a:ext cx="36576" cy="658368"/>
+            <a:off x="685800" y="1143000"/>
+            <a:ext cx="10817352" cy="25400"/>
           </a:xfrm>
           <a:prstGeom prst="rect">
             <a:avLst/>
@@ -9276,124 +9619,33 @@
           </a:p>
         </p:txBody>
       </p:sp>
-      <p:sp>
-        <p:nvSpPr>
-          <p:cNvPr id="7" name="TextBox 6"/>
-          <p:cNvSpPr txBox="1"/>
-          <p:nvPr/>
-        </p:nvSpPr>
-        <p:spPr>
-          <a:xfrm>
-            <a:off x="813816" y="502920"/>
-            <a:ext cx="10634472" cy="685800"/>
-          </a:xfrm>
-          <a:prstGeom prst="rect">
-            <a:avLst/>
-          </a:prstGeom>
-          <a:noFill/>
-        </p:spPr>
-        <p:txBody>
-          <a:bodyPr wrap="square">
-            <a:spAutoFit/>
-          </a:bodyPr>
-          <a:lstStyle/>
-          <a:p>
-            <a:pPr algn="l"/>
-            <a:r>
-              <a:rPr sz="2400" b="1" i="0">
-                <a:solidFill>
-                  <a:srgbClr val="1F2C56"/>
-                </a:solidFill>
-                <a:latin typeface="Source Serif 4"/>
-              </a:rPr>
-              <a:t>Framework 1: Branchenanalyse mit Porter's Five Forces</a:t>
-            </a:r>
-          </a:p>
-        </p:txBody>
-      </p:sp>
-      <p:sp>
-        <p:nvSpPr>
-          <p:cNvPr id="8" name="TextBox 7"/>
-          <p:cNvSpPr txBox="1"/>
-          <p:nvPr/>
-        </p:nvSpPr>
-        <p:spPr>
-          <a:xfrm>
-            <a:off x="685800" y="1417320"/>
-            <a:ext cx="10817352" cy="5029200"/>
-          </a:xfrm>
-          <a:prstGeom prst="rect">
-            <a:avLst/>
-          </a:prstGeom>
-          <a:noFill/>
-        </p:spPr>
-        <p:txBody>
-          <a:bodyPr wrap="square">
-            <a:spAutoFit/>
-          </a:bodyPr>
-          <a:lstStyle/>
-          <a:p>
-            <a:pPr>
-              <a:spcBef>
-                <a:spcPts val="1000"/>
-              </a:spcBef>
-              <a:spcAft>
-                <a:spcPts val="200"/>
-              </a:spcAft>
-            </a:pPr>
-            <a:r>
-              <a:rPr sz="800" b="1">
-                <a:solidFill>
-                  <a:srgbClr val="78808C"/>
-                </a:solidFill>
-                <a:latin typeface="JetBrains Mono"/>
-              </a:rPr>
-              <a:t>GRUNDPRINZIP</a:t>
-            </a:r>
-          </a:p>
-          <a:p>
-            <a:pPr>
-              <a:spcBef>
-                <a:spcPts val="400"/>
-              </a:spcBef>
-              <a:spcAft>
-                <a:spcPts val="200"/>
-              </a:spcAft>
-            </a:pPr>
-            <a:r>
-              <a:rPr sz="1200">
-                <a:solidFill>
-                  <a:srgbClr val="3D5466"/>
-                </a:solidFill>
-                <a:latin typeface="Arial"/>
-              </a:rPr>
-              <a:t>Die fünf Kräfte im Überblick:</a:t>
-            </a:r>
-          </a:p>
-          <a:p>
-            <a:pPr>
-              <a:spcBef>
-                <a:spcPts val="1000"/>
-              </a:spcBef>
-              <a:spcAft>
-                <a:spcPts val="200"/>
-              </a:spcAft>
-            </a:pPr>
-            <a:r>
-              <a:rPr sz="800" b="1">
-                <a:solidFill>
-                  <a:srgbClr val="78808C"/>
-                </a:solidFill>
-                <a:latin typeface="JetBrains Mono"/>
-              </a:rPr>
-              <a:t>EINSCHRÄNKUNGEN UND VERWENDUNGSREGELN</a:t>
-            </a:r>
-          </a:p>
-        </p:txBody>
-      </p:sp>
-      <p:sp>
-        <p:nvSpPr>
-          <p:cNvPr id="9" name="Rectangle 8"/>
+      <p:pic>
+        <p:nvPicPr>
+          <p:cNvPr id="7" name="Picture 6" descr="image.png"/>
+          <p:cNvPicPr>
+            <a:picLocks noChangeAspect="1"/>
+          </p:cNvPicPr>
+          <p:nvPr/>
+        </p:nvPicPr>
+        <p:blipFill>
+          <a:blip r:embed="rId2"/>
+          <a:stretch>
+            <a:fillRect/>
+          </a:stretch>
+        </p:blipFill>
+        <p:spPr>
+          <a:xfrm>
+            <a:off x="2303489" y="1325880"/>
+            <a:ext cx="7581973" cy="4937760"/>
+          </a:xfrm>
+          <a:prstGeom prst="rect">
+            <a:avLst/>
+          </a:prstGeom>
+        </p:spPr>
+      </p:pic>
+      <p:sp>
+        <p:nvSpPr>
+          <p:cNvPr id="8" name="Rectangle 7"/>
           <p:cNvSpPr/>
           <p:nvPr/>
         </p:nvSpPr>
@@ -9436,7 +9688,7 @@
       </p:sp>
       <p:sp>
         <p:nvSpPr>
-          <p:cNvPr id="10" name="TextBox 9"/>
+          <p:cNvPr id="9" name="TextBox 8"/>
           <p:cNvSpPr txBox="1"/>
           <p:nvPr/>
         </p:nvSpPr>
@@ -9465,6 +9717,41 @@
                 <a:latin typeface="JetBrains Mono"/>
               </a:rPr>
               <a:t>Benedikt Zoller Coaching  ·  FKB Campus  ·  M22</a:t>
+            </a:r>
+          </a:p>
+        </p:txBody>
+      </p:sp>
+      <p:sp>
+        <p:nvSpPr>
+          <p:cNvPr id="10" name="TextBox 9"/>
+          <p:cNvSpPr txBox="1"/>
+          <p:nvPr/>
+        </p:nvSpPr>
+        <p:spPr>
+          <a:xfrm>
+            <a:off x="7176211" y="6583680"/>
+            <a:ext cx="4326940" cy="256032"/>
+          </a:xfrm>
+          <a:prstGeom prst="rect">
+            <a:avLst/>
+          </a:prstGeom>
+          <a:noFill/>
+        </p:spPr>
+        <p:txBody>
+          <a:bodyPr wrap="none">
+            <a:spAutoFit/>
+          </a:bodyPr>
+          <a:lstStyle/>
+          <a:p>
+            <a:pPr algn="r"/>
+            <a:r>
+              <a:rPr sz="700">
+                <a:solidFill>
+                  <a:srgbClr val="A0B4D2"/>
+                </a:solidFill>
+                <a:latin typeface="JetBrains Mono"/>
+              </a:rPr>
+              <a:t>Schaubild</a:t>
             </a:r>
           </a:p>
         </p:txBody>
@@ -9502,7 +9789,7 @@
             <a:avLst/>
           </a:prstGeom>
           <a:solidFill>
-            <a:srgbClr val="FFFFFF"/>
+            <a:srgbClr val="EDEDF3"/>
           </a:solidFill>
           <a:ln>
             <a:noFill/>
@@ -9603,43 +9890,51 @@
                 </a:solidFill>
                 <a:latin typeface="JetBrains Mono"/>
               </a:rPr>
-              <a:t>M22  ·  SCHAUBILD</a:t>
-            </a:r>
-          </a:p>
-        </p:txBody>
-      </p:sp>
-      <p:sp>
-        <p:nvSpPr>
-          <p:cNvPr id="5" name="TextBox 4"/>
-          <p:cNvSpPr txBox="1"/>
-          <p:nvPr/>
-        </p:nvSpPr>
-        <p:spPr>
-          <a:xfrm>
-            <a:off x="685800" y="502920"/>
-            <a:ext cx="10817352" cy="594360"/>
-          </a:xfrm>
-          <a:prstGeom prst="rect">
-            <a:avLst/>
-          </a:prstGeom>
-          <a:noFill/>
-        </p:spPr>
-        <p:txBody>
-          <a:bodyPr wrap="square">
-            <a:spAutoFit/>
-          </a:bodyPr>
-          <a:lstStyle/>
-          <a:p>
-            <a:pPr algn="l"/>
-            <a:r>
-              <a:rPr sz="2000" b="1" i="0">
-                <a:solidFill>
-                  <a:srgbClr val="1F2C56"/>
-                </a:solidFill>
-                <a:latin typeface="Source Serif 4"/>
-              </a:rPr>
-              <a:t>Five-Forces-Modell nach Porter</a:t>
-            </a:r>
+              <a:t>M22  ·  INHALT</a:t>
+            </a:r>
+          </a:p>
+        </p:txBody>
+      </p:sp>
+      <p:sp>
+        <p:nvSpPr>
+          <p:cNvPr id="5" name="Rectangle 4"/>
+          <p:cNvSpPr/>
+          <p:nvPr/>
+        </p:nvSpPr>
+        <p:spPr>
+          <a:xfrm>
+            <a:off x="0" y="1234440"/>
+            <a:ext cx="12188952" cy="12700"/>
+          </a:xfrm>
+          <a:prstGeom prst="rect">
+            <a:avLst/>
+          </a:prstGeom>
+          <a:solidFill>
+            <a:srgbClr val="D8DFE4"/>
+          </a:solidFill>
+          <a:ln>
+            <a:noFill/>
+          </a:ln>
+        </p:spPr>
+        <p:style>
+          <a:lnRef idx="1">
+            <a:schemeClr val="accent1"/>
+          </a:lnRef>
+          <a:fillRef idx="3">
+            <a:schemeClr val="accent1"/>
+          </a:fillRef>
+          <a:effectRef idx="2">
+            <a:schemeClr val="accent1"/>
+          </a:effectRef>
+          <a:fontRef idx="minor">
+            <a:schemeClr val="lt1"/>
+          </a:fontRef>
+        </p:style>
+        <p:txBody>
+          <a:bodyPr rtlCol="0" anchor="ctr"/>
+          <a:lstStyle/>
+          <a:p>
+            <a:pPr algn="ctr"/>
           </a:p>
         </p:txBody>
       </p:sp>
@@ -9651,8 +9946,8 @@
         </p:nvSpPr>
         <p:spPr>
           <a:xfrm>
-            <a:off x="685800" y="1143000"/>
-            <a:ext cx="10817352" cy="25400"/>
+            <a:off x="685800" y="502920"/>
+            <a:ext cx="36576" cy="658368"/>
           </a:xfrm>
           <a:prstGeom prst="rect">
             <a:avLst/>
@@ -9686,33 +9981,124 @@
           </a:p>
         </p:txBody>
       </p:sp>
-      <p:pic>
-        <p:nvPicPr>
-          <p:cNvPr id="7" name="Picture 6" descr="image.png"/>
-          <p:cNvPicPr>
-            <a:picLocks noChangeAspect="1"/>
-          </p:cNvPicPr>
-          <p:nvPr/>
-        </p:nvPicPr>
-        <p:blipFill>
-          <a:blip r:embed="rId2"/>
-          <a:stretch>
-            <a:fillRect/>
-          </a:stretch>
-        </p:blipFill>
-        <p:spPr>
-          <a:xfrm>
-            <a:off x="2554863" y="1325880"/>
-            <a:ext cx="7079225" cy="4937760"/>
-          </a:xfrm>
-          <a:prstGeom prst="rect">
-            <a:avLst/>
-          </a:prstGeom>
-        </p:spPr>
-      </p:pic>
-      <p:sp>
-        <p:nvSpPr>
-          <p:cNvPr id="8" name="Rectangle 7"/>
+      <p:sp>
+        <p:nvSpPr>
+          <p:cNvPr id="7" name="TextBox 6"/>
+          <p:cNvSpPr txBox="1"/>
+          <p:nvPr/>
+        </p:nvSpPr>
+        <p:spPr>
+          <a:xfrm>
+            <a:off x="813816" y="502920"/>
+            <a:ext cx="10634472" cy="685800"/>
+          </a:xfrm>
+          <a:prstGeom prst="rect">
+            <a:avLst/>
+          </a:prstGeom>
+          <a:noFill/>
+        </p:spPr>
+        <p:txBody>
+          <a:bodyPr wrap="square">
+            <a:spAutoFit/>
+          </a:bodyPr>
+          <a:lstStyle/>
+          <a:p>
+            <a:pPr algn="l"/>
+            <a:r>
+              <a:rPr sz="2400" b="1" i="0">
+                <a:solidFill>
+                  <a:srgbClr val="1F2C56"/>
+                </a:solidFill>
+                <a:latin typeface="Source Serif 4"/>
+              </a:rPr>
+              <a:t>Framework 1: Branchenanalyse mit Porter's Five Forces</a:t>
+            </a:r>
+          </a:p>
+        </p:txBody>
+      </p:sp>
+      <p:sp>
+        <p:nvSpPr>
+          <p:cNvPr id="8" name="TextBox 7"/>
+          <p:cNvSpPr txBox="1"/>
+          <p:nvPr/>
+        </p:nvSpPr>
+        <p:spPr>
+          <a:xfrm>
+            <a:off x="685800" y="1417320"/>
+            <a:ext cx="10817352" cy="5029200"/>
+          </a:xfrm>
+          <a:prstGeom prst="rect">
+            <a:avLst/>
+          </a:prstGeom>
+          <a:noFill/>
+        </p:spPr>
+        <p:txBody>
+          <a:bodyPr wrap="square">
+            <a:spAutoFit/>
+          </a:bodyPr>
+          <a:lstStyle/>
+          <a:p>
+            <a:pPr>
+              <a:spcBef>
+                <a:spcPts val="1000"/>
+              </a:spcBef>
+              <a:spcAft>
+                <a:spcPts val="200"/>
+              </a:spcAft>
+            </a:pPr>
+            <a:r>
+              <a:rPr sz="800" b="1">
+                <a:solidFill>
+                  <a:srgbClr val="78808C"/>
+                </a:solidFill>
+                <a:latin typeface="JetBrains Mono"/>
+              </a:rPr>
+              <a:t>GRUNDPRINZIP</a:t>
+            </a:r>
+          </a:p>
+          <a:p>
+            <a:pPr>
+              <a:spcBef>
+                <a:spcPts val="400"/>
+              </a:spcBef>
+              <a:spcAft>
+                <a:spcPts val="200"/>
+              </a:spcAft>
+            </a:pPr>
+            <a:r>
+              <a:rPr sz="1200">
+                <a:solidFill>
+                  <a:srgbClr val="3D5466"/>
+                </a:solidFill>
+                <a:latin typeface="Arial"/>
+              </a:rPr>
+              <a:t>Die fünf Kräfte im Überblick:</a:t>
+            </a:r>
+          </a:p>
+          <a:p>
+            <a:pPr>
+              <a:spcBef>
+                <a:spcPts val="1000"/>
+              </a:spcBef>
+              <a:spcAft>
+                <a:spcPts val="200"/>
+              </a:spcAft>
+            </a:pPr>
+            <a:r>
+              <a:rPr sz="800" b="1">
+                <a:solidFill>
+                  <a:srgbClr val="78808C"/>
+                </a:solidFill>
+                <a:latin typeface="JetBrains Mono"/>
+              </a:rPr>
+              <a:t>EINSCHRÄNKUNGEN UND VERWENDUNGSREGELN</a:t>
+            </a:r>
+          </a:p>
+        </p:txBody>
+      </p:sp>
+      <p:sp>
+        <p:nvSpPr>
+          <p:cNvPr id="9" name="Rectangle 8"/>
           <p:cNvSpPr/>
           <p:nvPr/>
         </p:nvSpPr>
@@ -9755,7 +10141,7 @@
       </p:sp>
       <p:sp>
         <p:nvSpPr>
-          <p:cNvPr id="9" name="TextBox 8"/>
+          <p:cNvPr id="10" name="TextBox 9"/>
           <p:cNvSpPr txBox="1"/>
           <p:nvPr/>
         </p:nvSpPr>
@@ -9784,41 +10170,6 @@
                 <a:latin typeface="JetBrains Mono"/>
               </a:rPr>
               <a:t>Benedikt Zoller Coaching  ·  FKB Campus  ·  M22</a:t>
-            </a:r>
-          </a:p>
-        </p:txBody>
-      </p:sp>
-      <p:sp>
-        <p:nvSpPr>
-          <p:cNvPr id="10" name="TextBox 9"/>
-          <p:cNvSpPr txBox="1"/>
-          <p:nvPr/>
-        </p:nvSpPr>
-        <p:spPr>
-          <a:xfrm>
-            <a:off x="7176211" y="6583680"/>
-            <a:ext cx="4326940" cy="256032"/>
-          </a:xfrm>
-          <a:prstGeom prst="rect">
-            <a:avLst/>
-          </a:prstGeom>
-          <a:noFill/>
-        </p:spPr>
-        <p:txBody>
-          <a:bodyPr wrap="none">
-            <a:spAutoFit/>
-          </a:bodyPr>
-          <a:lstStyle/>
-          <a:p>
-            <a:pPr algn="r"/>
-            <a:r>
-              <a:rPr sz="700">
-                <a:solidFill>
-                  <a:srgbClr val="A0B4D2"/>
-                </a:solidFill>
-                <a:latin typeface="JetBrains Mono"/>
-              </a:rPr>
-              <a:t>Schaubild</a:t>
             </a:r>
           </a:p>
         </p:txBody>
@@ -9856,7 +10207,7 @@
             <a:avLst/>
           </a:prstGeom>
           <a:solidFill>
-            <a:srgbClr val="EDEDF3"/>
+            <a:srgbClr val="FFFFFF"/>
           </a:solidFill>
           <a:ln>
             <a:noFill/>
@@ -9957,51 +10308,43 @@
                 </a:solidFill>
                 <a:latin typeface="JetBrains Mono"/>
               </a:rPr>
-              <a:t>M22  ·  INHALT</a:t>
-            </a:r>
-          </a:p>
-        </p:txBody>
-      </p:sp>
-      <p:sp>
-        <p:nvSpPr>
-          <p:cNvPr id="5" name="Rectangle 4"/>
-          <p:cNvSpPr/>
-          <p:nvPr/>
-        </p:nvSpPr>
-        <p:spPr>
-          <a:xfrm>
-            <a:off x="0" y="1234440"/>
-            <a:ext cx="12188952" cy="12700"/>
-          </a:xfrm>
-          <a:prstGeom prst="rect">
-            <a:avLst/>
-          </a:prstGeom>
-          <a:solidFill>
-            <a:srgbClr val="D8DFE4"/>
-          </a:solidFill>
-          <a:ln>
-            <a:noFill/>
-          </a:ln>
-        </p:spPr>
-        <p:style>
-          <a:lnRef idx="1">
-            <a:schemeClr val="accent1"/>
-          </a:lnRef>
-          <a:fillRef idx="3">
-            <a:schemeClr val="accent1"/>
-          </a:fillRef>
-          <a:effectRef idx="2">
-            <a:schemeClr val="accent1"/>
-          </a:effectRef>
-          <a:fontRef idx="minor">
-            <a:schemeClr val="lt1"/>
-          </a:fontRef>
-        </p:style>
-        <p:txBody>
-          <a:bodyPr rtlCol="0" anchor="ctr"/>
-          <a:lstStyle/>
-          <a:p>
-            <a:pPr algn="ctr"/>
+              <a:t>M22  ·  SCHAUBILD</a:t>
+            </a:r>
+          </a:p>
+        </p:txBody>
+      </p:sp>
+      <p:sp>
+        <p:nvSpPr>
+          <p:cNvPr id="5" name="TextBox 4"/>
+          <p:cNvSpPr txBox="1"/>
+          <p:nvPr/>
+        </p:nvSpPr>
+        <p:spPr>
+          <a:xfrm>
+            <a:off x="685800" y="502920"/>
+            <a:ext cx="10817352" cy="594360"/>
+          </a:xfrm>
+          <a:prstGeom prst="rect">
+            <a:avLst/>
+          </a:prstGeom>
+          <a:noFill/>
+        </p:spPr>
+        <p:txBody>
+          <a:bodyPr wrap="square">
+            <a:spAutoFit/>
+          </a:bodyPr>
+          <a:lstStyle/>
+          <a:p>
+            <a:pPr algn="l"/>
+            <a:r>
+              <a:rPr sz="2000" b="1" i="0">
+                <a:solidFill>
+                  <a:srgbClr val="1F2C56"/>
+                </a:solidFill>
+                <a:latin typeface="Source Serif 4"/>
+              </a:rPr>
+              <a:t>Five-Forces-Modell nach Porter</a:t>
+            </a:r>
           </a:p>
         </p:txBody>
       </p:sp>
@@ -10013,8 +10356,8 @@
         </p:nvSpPr>
         <p:spPr>
           <a:xfrm>
-            <a:off x="685800" y="502920"/>
-            <a:ext cx="36576" cy="658368"/>
+            <a:off x="685800" y="1143000"/>
+            <a:ext cx="10817352" cy="25400"/>
           </a:xfrm>
           <a:prstGeom prst="rect">
             <a:avLst/>
@@ -10048,276 +10391,33 @@
           </a:p>
         </p:txBody>
       </p:sp>
-      <p:sp>
-        <p:nvSpPr>
-          <p:cNvPr id="7" name="TextBox 6"/>
-          <p:cNvSpPr txBox="1"/>
-          <p:nvPr/>
-        </p:nvSpPr>
-        <p:spPr>
-          <a:xfrm>
-            <a:off x="813816" y="502920"/>
-            <a:ext cx="10634472" cy="685800"/>
-          </a:xfrm>
-          <a:prstGeom prst="rect">
-            <a:avLst/>
-          </a:prstGeom>
-          <a:noFill/>
-        </p:spPr>
-        <p:txBody>
-          <a:bodyPr wrap="square">
-            <a:spAutoFit/>
-          </a:bodyPr>
-          <a:lstStyle/>
-          <a:p>
-            <a:pPr algn="l"/>
-            <a:r>
-              <a:rPr sz="2400" b="1" i="0">
-                <a:solidFill>
-                  <a:srgbClr val="1F2C56"/>
-                </a:solidFill>
-                <a:latin typeface="Source Serif 4"/>
-              </a:rPr>
-              <a:t>Framework 1b: Generische Wettbewerbsstrategien und das Stuck-in-the-Middle-Risiko</a:t>
-            </a:r>
-          </a:p>
-        </p:txBody>
-      </p:sp>
-      <p:sp>
-        <p:nvSpPr>
-          <p:cNvPr id="8" name="TextBox 7"/>
-          <p:cNvSpPr txBox="1"/>
-          <p:nvPr/>
-        </p:nvSpPr>
-        <p:spPr>
-          <a:xfrm>
-            <a:off x="685800" y="1417320"/>
-            <a:ext cx="10817352" cy="5029200"/>
-          </a:xfrm>
-          <a:prstGeom prst="rect">
-            <a:avLst/>
-          </a:prstGeom>
-          <a:noFill/>
-        </p:spPr>
-        <p:txBody>
-          <a:bodyPr wrap="square">
-            <a:spAutoFit/>
-          </a:bodyPr>
-          <a:lstStyle/>
-          <a:p>
-            <a:pPr>
-              <a:spcBef>
-                <a:spcPts val="1000"/>
-              </a:spcBef>
-              <a:spcAft>
-                <a:spcPts val="200"/>
-              </a:spcAft>
-            </a:pPr>
-            <a:r>
-              <a:rPr sz="800" b="1">
-                <a:solidFill>
-                  <a:srgbClr val="78808C"/>
-                </a:solidFill>
-                <a:latin typeface="JetBrains Mono"/>
-              </a:rPr>
-              <a:t>DIE DREI GRUNDSTRATEGIEN NACH PORTER (1980)</a:t>
-            </a:r>
-          </a:p>
-          <a:p>
-            <a:pPr>
-              <a:spcBef>
-                <a:spcPts val="400"/>
-              </a:spcBef>
-              <a:spcAft>
-                <a:spcPts val="200"/>
-              </a:spcAft>
-            </a:pPr>
-            <a:r>
-              <a:rPr sz="1200">
-                <a:solidFill>
-                  <a:srgbClr val="3D5466"/>
-                </a:solidFill>
-                <a:latin typeface="Arial"/>
-              </a:rPr>
-              <a:t>Eine vierte Option gibt es laut Porter (1980) nicht — ein Unternehmen, das keine klare Strategie wählt, hat keine.</a:t>
-            </a:r>
-          </a:p>
-          <a:p>
-            <a:pPr>
-              <a:spcBef>
-                <a:spcPts val="1000"/>
-              </a:spcBef>
-              <a:spcAft>
-                <a:spcPts val="200"/>
-              </a:spcAft>
-            </a:pPr>
-            <a:r>
-              <a:rPr sz="800" b="1">
-                <a:solidFill>
-                  <a:srgbClr val="78808C"/>
-                </a:solidFill>
-                <a:latin typeface="JetBrains Mono"/>
-              </a:rPr>
-              <a:t>DAS STUCK-IN-THE-MIDDLE-PROBLEM</a:t>
-            </a:r>
-          </a:p>
-          <a:p>
-            <a:pPr>
-              <a:spcBef>
-                <a:spcPts val="400"/>
-              </a:spcBef>
-              <a:spcAft>
-                <a:spcPts val="200"/>
-              </a:spcAft>
-            </a:pPr>
-            <a:r>
-              <a:rPr sz="1200">
-                <a:solidFill>
-                  <a:srgbClr val="3D5466"/>
-                </a:solidFill>
-                <a:latin typeface="Arial"/>
-              </a:rPr>
-              <a:t>Warum das für Kreditberater relevant ist:</a:t>
-            </a:r>
-          </a:p>
-          <a:p>
-            <a:pPr>
-              <a:spcBef>
-                <a:spcPts val="400"/>
-              </a:spcBef>
-              <a:spcAft>
-                <a:spcPts val="200"/>
-              </a:spcAft>
-            </a:pPr>
-            <a:r>
-              <a:rPr sz="1200">
-                <a:solidFill>
-                  <a:srgbClr val="3D5466"/>
-                </a:solidFill>
-                <a:latin typeface="Arial"/>
-              </a:rPr>
-              <a:t>Warnsignale für Stuck in the Middle im Kundengespräch:</a:t>
-            </a:r>
-          </a:p>
-          <a:p>
-            <a:pPr>
-              <a:spcBef>
-                <a:spcPts val="400"/>
-              </a:spcBef>
-              <a:spcAft>
-                <a:spcPts val="200"/>
-              </a:spcAft>
-            </a:pPr>
-            <a:r>
-              <a:rPr sz="1300">
-                <a:solidFill>
-                  <a:srgbClr val="3D5466"/>
-                </a:solidFill>
-                <a:latin typeface="Arial"/>
-              </a:rPr>
-              <a:t>▸  Unklare Antwort auf die Frage: „Was ist Ihr Alleinstellungsmerkmal — und wofür bezahlen Ihre Kunden gerne mehr?"</a:t>
-            </a:r>
-          </a:p>
-          <a:p>
-            <a:pPr>
-              <a:spcBef>
-                <a:spcPts val="400"/>
-              </a:spcBef>
-              <a:spcAft>
-                <a:spcPts val="200"/>
-              </a:spcAft>
-            </a:pPr>
-            <a:r>
-              <a:rPr sz="1300">
-                <a:solidFill>
-                  <a:srgbClr val="3D5466"/>
-                </a:solidFill>
-                <a:latin typeface="Arial"/>
-              </a:rPr>
-              <a:t>▸  Gleichzeitig Preisdruck von günstigeren Wettbewerbern und Qualitätsdruck von Premiumanbietern</a:t>
-            </a:r>
-          </a:p>
-          <a:p>
-            <a:pPr>
-              <a:spcBef>
-                <a:spcPts val="400"/>
-              </a:spcBef>
-              <a:spcAft>
-                <a:spcPts val="200"/>
-              </a:spcAft>
-            </a:pPr>
-            <a:r>
-              <a:rPr sz="1300">
-                <a:solidFill>
-                  <a:srgbClr val="3D5466"/>
-                </a:solidFill>
-                <a:latin typeface="Arial"/>
-              </a:rPr>
-              <a:t>▸  Rückläufige Marge trotz stabilem Umsatz</a:t>
-            </a:r>
-          </a:p>
-          <a:p>
-            <a:pPr>
-              <a:spcBef>
-                <a:spcPts val="400"/>
-              </a:spcBef>
-              <a:spcAft>
-                <a:spcPts val="200"/>
-              </a:spcAft>
-            </a:pPr>
-            <a:r>
-              <a:rPr sz="1300">
-                <a:solidFill>
-                  <a:srgbClr val="3D5466"/>
-                </a:solidFill>
-                <a:latin typeface="Arial"/>
-              </a:rPr>
-              <a:t>▸  Investitionen in beide Richtungen: gleichzeitig Kostenoptimierung und Qualitätsausbau ohne klare Priorisierung</a:t>
-            </a:r>
-          </a:p>
-          <a:p>
-            <a:pPr>
-              <a:spcBef>
-                <a:spcPts val="400"/>
-              </a:spcBef>
-              <a:spcAft>
-                <a:spcPts val="200"/>
-              </a:spcAft>
-            </a:pPr>
-            <a:r>
-              <a:rPr sz="1300">
-                <a:solidFill>
-                  <a:srgbClr val="3D5466"/>
-                </a:solidFill>
-                <a:latin typeface="Arial"/>
-              </a:rPr>
-              <a:t>▸  GF-Aussagen wie: „Wir machen alles — wir sind flexibel"</a:t>
-            </a:r>
-          </a:p>
-          <a:p>
-            <a:pPr>
-              <a:spcBef>
-                <a:spcPts val="400"/>
-              </a:spcBef>
-              <a:spcAft>
-                <a:spcPts val="200"/>
-              </a:spcAft>
-            </a:pPr>
-            <a:r>
-              <a:rPr sz="1200">
-                <a:solidFill>
-                  <a:srgbClr val="3D5466"/>
-                </a:solidFill>
-                <a:latin typeface="Arial"/>
-              </a:rPr>
-              <a:t>Stuck in the Middle und der Haller-Fall:</a:t>
-            </a:r>
-          </a:p>
-        </p:txBody>
-      </p:sp>
-      <p:sp>
-        <p:nvSpPr>
-          <p:cNvPr id="9" name="Rectangle 8"/>
+      <p:pic>
+        <p:nvPicPr>
+          <p:cNvPr id="7" name="Picture 6" descr="image.png"/>
+          <p:cNvPicPr>
+            <a:picLocks noChangeAspect="1"/>
+          </p:cNvPicPr>
+          <p:nvPr/>
+        </p:nvPicPr>
+        <p:blipFill>
+          <a:blip r:embed="rId2"/>
+          <a:stretch>
+            <a:fillRect/>
+          </a:stretch>
+        </p:blipFill>
+        <p:spPr>
+          <a:xfrm>
+            <a:off x="2554863" y="1325880"/>
+            <a:ext cx="7079225" cy="4937760"/>
+          </a:xfrm>
+          <a:prstGeom prst="rect">
+            <a:avLst/>
+          </a:prstGeom>
+        </p:spPr>
+      </p:pic>
+      <p:sp>
+        <p:nvSpPr>
+          <p:cNvPr id="8" name="Rectangle 7"/>
           <p:cNvSpPr/>
           <p:nvPr/>
         </p:nvSpPr>
@@ -10360,7 +10460,7 @@
       </p:sp>
       <p:sp>
         <p:nvSpPr>
-          <p:cNvPr id="10" name="TextBox 9"/>
+          <p:cNvPr id="9" name="TextBox 8"/>
           <p:cNvSpPr txBox="1"/>
           <p:nvPr/>
         </p:nvSpPr>
@@ -10389,6 +10489,41 @@
                 <a:latin typeface="JetBrains Mono"/>
               </a:rPr>
               <a:t>Benedikt Zoller Coaching  ·  FKB Campus  ·  M22</a:t>
+            </a:r>
+          </a:p>
+        </p:txBody>
+      </p:sp>
+      <p:sp>
+        <p:nvSpPr>
+          <p:cNvPr id="10" name="TextBox 9"/>
+          <p:cNvSpPr txBox="1"/>
+          <p:nvPr/>
+        </p:nvSpPr>
+        <p:spPr>
+          <a:xfrm>
+            <a:off x="7176211" y="6583680"/>
+            <a:ext cx="4326940" cy="256032"/>
+          </a:xfrm>
+          <a:prstGeom prst="rect">
+            <a:avLst/>
+          </a:prstGeom>
+          <a:noFill/>
+        </p:spPr>
+        <p:txBody>
+          <a:bodyPr wrap="none">
+            <a:spAutoFit/>
+          </a:bodyPr>
+          <a:lstStyle/>
+          <a:p>
+            <a:pPr algn="r"/>
+            <a:r>
+              <a:rPr sz="700">
+                <a:solidFill>
+                  <a:srgbClr val="A0B4D2"/>
+                </a:solidFill>
+                <a:latin typeface="JetBrains Mono"/>
+              </a:rPr>
+              <a:t>Schaubild</a:t>
             </a:r>
           </a:p>
         </p:txBody>
@@ -10426,7 +10561,7 @@
             <a:avLst/>
           </a:prstGeom>
           <a:solidFill>
-            <a:srgbClr val="FFFFFF"/>
+            <a:srgbClr val="EDEDF3"/>
           </a:solidFill>
           <a:ln>
             <a:noFill/>
@@ -10527,43 +10662,51 @@
                 </a:solidFill>
                 <a:latin typeface="JetBrains Mono"/>
               </a:rPr>
-              <a:t>M22  ·  SCHAUBILD</a:t>
-            </a:r>
-          </a:p>
-        </p:txBody>
-      </p:sp>
-      <p:sp>
-        <p:nvSpPr>
-          <p:cNvPr id="5" name="TextBox 4"/>
-          <p:cNvSpPr txBox="1"/>
-          <p:nvPr/>
-        </p:nvSpPr>
-        <p:spPr>
-          <a:xfrm>
-            <a:off x="685800" y="502920"/>
-            <a:ext cx="10817352" cy="594360"/>
-          </a:xfrm>
-          <a:prstGeom prst="rect">
-            <a:avLst/>
-          </a:prstGeom>
-          <a:noFill/>
-        </p:spPr>
-        <p:txBody>
-          <a:bodyPr wrap="square">
-            <a:spAutoFit/>
-          </a:bodyPr>
-          <a:lstStyle/>
-          <a:p>
-            <a:pPr algn="l"/>
-            <a:r>
-              <a:rPr sz="2000" b="1" i="0">
-                <a:solidFill>
-                  <a:srgbClr val="1F2C56"/>
-                </a:solidFill>
-                <a:latin typeface="Source Serif 4"/>
-              </a:rPr>
-              <a:t>Wettbewerbsstrategie-Matrix nach Porter</a:t>
-            </a:r>
+              <a:t>M22  ·  INHALT</a:t>
+            </a:r>
+          </a:p>
+        </p:txBody>
+      </p:sp>
+      <p:sp>
+        <p:nvSpPr>
+          <p:cNvPr id="5" name="Rectangle 4"/>
+          <p:cNvSpPr/>
+          <p:nvPr/>
+        </p:nvSpPr>
+        <p:spPr>
+          <a:xfrm>
+            <a:off x="0" y="1234440"/>
+            <a:ext cx="12188952" cy="12700"/>
+          </a:xfrm>
+          <a:prstGeom prst="rect">
+            <a:avLst/>
+          </a:prstGeom>
+          <a:solidFill>
+            <a:srgbClr val="D8DFE4"/>
+          </a:solidFill>
+          <a:ln>
+            <a:noFill/>
+          </a:ln>
+        </p:spPr>
+        <p:style>
+          <a:lnRef idx="1">
+            <a:schemeClr val="accent1"/>
+          </a:lnRef>
+          <a:fillRef idx="3">
+            <a:schemeClr val="accent1"/>
+          </a:fillRef>
+          <a:effectRef idx="2">
+            <a:schemeClr val="accent1"/>
+          </a:effectRef>
+          <a:fontRef idx="minor">
+            <a:schemeClr val="lt1"/>
+          </a:fontRef>
+        </p:style>
+        <p:txBody>
+          <a:bodyPr rtlCol="0" anchor="ctr"/>
+          <a:lstStyle/>
+          <a:p>
+            <a:pPr algn="ctr"/>
           </a:p>
         </p:txBody>
       </p:sp>
@@ -10575,8 +10718,8 @@
         </p:nvSpPr>
         <p:spPr>
           <a:xfrm>
-            <a:off x="685800" y="1143000"/>
-            <a:ext cx="10817352" cy="25400"/>
+            <a:off x="685800" y="502920"/>
+            <a:ext cx="36576" cy="658368"/>
           </a:xfrm>
           <a:prstGeom prst="rect">
             <a:avLst/>
@@ -10610,33 +10753,276 @@
           </a:p>
         </p:txBody>
       </p:sp>
-      <p:pic>
-        <p:nvPicPr>
-          <p:cNvPr id="7" name="Picture 6" descr="image.png"/>
-          <p:cNvPicPr>
-            <a:picLocks noChangeAspect="1"/>
-          </p:cNvPicPr>
-          <p:nvPr/>
-        </p:nvPicPr>
-        <p:blipFill>
-          <a:blip r:embed="rId2"/>
-          <a:stretch>
-            <a:fillRect/>
-          </a:stretch>
-        </p:blipFill>
-        <p:spPr>
-          <a:xfrm>
-            <a:off x="2303489" y="1325880"/>
-            <a:ext cx="7581973" cy="4937760"/>
-          </a:xfrm>
-          <a:prstGeom prst="rect">
-            <a:avLst/>
-          </a:prstGeom>
-        </p:spPr>
-      </p:pic>
-      <p:sp>
-        <p:nvSpPr>
-          <p:cNvPr id="8" name="Rectangle 7"/>
+      <p:sp>
+        <p:nvSpPr>
+          <p:cNvPr id="7" name="TextBox 6"/>
+          <p:cNvSpPr txBox="1"/>
+          <p:nvPr/>
+        </p:nvSpPr>
+        <p:spPr>
+          <a:xfrm>
+            <a:off x="813816" y="502920"/>
+            <a:ext cx="10634472" cy="685800"/>
+          </a:xfrm>
+          <a:prstGeom prst="rect">
+            <a:avLst/>
+          </a:prstGeom>
+          <a:noFill/>
+        </p:spPr>
+        <p:txBody>
+          <a:bodyPr wrap="square">
+            <a:spAutoFit/>
+          </a:bodyPr>
+          <a:lstStyle/>
+          <a:p>
+            <a:pPr algn="l"/>
+            <a:r>
+              <a:rPr sz="2400" b="1" i="0">
+                <a:solidFill>
+                  <a:srgbClr val="1F2C56"/>
+                </a:solidFill>
+                <a:latin typeface="Source Serif 4"/>
+              </a:rPr>
+              <a:t>Framework 1b: Generische Wettbewerbsstrategien und das Stuck-in-the-Middle-Risiko</a:t>
+            </a:r>
+          </a:p>
+        </p:txBody>
+      </p:sp>
+      <p:sp>
+        <p:nvSpPr>
+          <p:cNvPr id="8" name="TextBox 7"/>
+          <p:cNvSpPr txBox="1"/>
+          <p:nvPr/>
+        </p:nvSpPr>
+        <p:spPr>
+          <a:xfrm>
+            <a:off x="685800" y="1417320"/>
+            <a:ext cx="10817352" cy="5029200"/>
+          </a:xfrm>
+          <a:prstGeom prst="rect">
+            <a:avLst/>
+          </a:prstGeom>
+          <a:noFill/>
+        </p:spPr>
+        <p:txBody>
+          <a:bodyPr wrap="square">
+            <a:spAutoFit/>
+          </a:bodyPr>
+          <a:lstStyle/>
+          <a:p>
+            <a:pPr>
+              <a:spcBef>
+                <a:spcPts val="1000"/>
+              </a:spcBef>
+              <a:spcAft>
+                <a:spcPts val="200"/>
+              </a:spcAft>
+            </a:pPr>
+            <a:r>
+              <a:rPr sz="800" b="1">
+                <a:solidFill>
+                  <a:srgbClr val="78808C"/>
+                </a:solidFill>
+                <a:latin typeface="JetBrains Mono"/>
+              </a:rPr>
+              <a:t>DIE DREI GRUNDSTRATEGIEN NACH PORTER (1980)</a:t>
+            </a:r>
+          </a:p>
+          <a:p>
+            <a:pPr>
+              <a:spcBef>
+                <a:spcPts val="400"/>
+              </a:spcBef>
+              <a:spcAft>
+                <a:spcPts val="200"/>
+              </a:spcAft>
+            </a:pPr>
+            <a:r>
+              <a:rPr sz="1200">
+                <a:solidFill>
+                  <a:srgbClr val="3D5466"/>
+                </a:solidFill>
+                <a:latin typeface="Arial"/>
+              </a:rPr>
+              <a:t>Eine vierte Option gibt es laut Porter (1980) nicht — ein Unternehmen, das keine klare Strategie wählt, hat keine.</a:t>
+            </a:r>
+          </a:p>
+          <a:p>
+            <a:pPr>
+              <a:spcBef>
+                <a:spcPts val="1000"/>
+              </a:spcBef>
+              <a:spcAft>
+                <a:spcPts val="200"/>
+              </a:spcAft>
+            </a:pPr>
+            <a:r>
+              <a:rPr sz="800" b="1">
+                <a:solidFill>
+                  <a:srgbClr val="78808C"/>
+                </a:solidFill>
+                <a:latin typeface="JetBrains Mono"/>
+              </a:rPr>
+              <a:t>DAS STUCK-IN-THE-MIDDLE-PROBLEM</a:t>
+            </a:r>
+          </a:p>
+          <a:p>
+            <a:pPr>
+              <a:spcBef>
+                <a:spcPts val="400"/>
+              </a:spcBef>
+              <a:spcAft>
+                <a:spcPts val="200"/>
+              </a:spcAft>
+            </a:pPr>
+            <a:r>
+              <a:rPr sz="1200">
+                <a:solidFill>
+                  <a:srgbClr val="3D5466"/>
+                </a:solidFill>
+                <a:latin typeface="Arial"/>
+              </a:rPr>
+              <a:t>Warum das für Kreditberater relevant ist:</a:t>
+            </a:r>
+          </a:p>
+          <a:p>
+            <a:pPr>
+              <a:spcBef>
+                <a:spcPts val="400"/>
+              </a:spcBef>
+              <a:spcAft>
+                <a:spcPts val="200"/>
+              </a:spcAft>
+            </a:pPr>
+            <a:r>
+              <a:rPr sz="1200">
+                <a:solidFill>
+                  <a:srgbClr val="3D5466"/>
+                </a:solidFill>
+                <a:latin typeface="Arial"/>
+              </a:rPr>
+              <a:t>Warnsignale für Stuck in the Middle im Kundengespräch:</a:t>
+            </a:r>
+          </a:p>
+          <a:p>
+            <a:pPr>
+              <a:spcBef>
+                <a:spcPts val="400"/>
+              </a:spcBef>
+              <a:spcAft>
+                <a:spcPts val="200"/>
+              </a:spcAft>
+            </a:pPr>
+            <a:r>
+              <a:rPr sz="1300">
+                <a:solidFill>
+                  <a:srgbClr val="3D5466"/>
+                </a:solidFill>
+                <a:latin typeface="Arial"/>
+              </a:rPr>
+              <a:t>▸  Unklare Antwort auf die Frage: „Was ist Ihr Alleinstellungsmerkmal — und wofür bezahlen Ihre Kunden gerne mehr?"</a:t>
+            </a:r>
+          </a:p>
+          <a:p>
+            <a:pPr>
+              <a:spcBef>
+                <a:spcPts val="400"/>
+              </a:spcBef>
+              <a:spcAft>
+                <a:spcPts val="200"/>
+              </a:spcAft>
+            </a:pPr>
+            <a:r>
+              <a:rPr sz="1300">
+                <a:solidFill>
+                  <a:srgbClr val="3D5466"/>
+                </a:solidFill>
+                <a:latin typeface="Arial"/>
+              </a:rPr>
+              <a:t>▸  Gleichzeitig Preisdruck von günstigeren Wettbewerbern und Qualitätsdruck von Premiumanbietern</a:t>
+            </a:r>
+          </a:p>
+          <a:p>
+            <a:pPr>
+              <a:spcBef>
+                <a:spcPts val="400"/>
+              </a:spcBef>
+              <a:spcAft>
+                <a:spcPts val="200"/>
+              </a:spcAft>
+            </a:pPr>
+            <a:r>
+              <a:rPr sz="1300">
+                <a:solidFill>
+                  <a:srgbClr val="3D5466"/>
+                </a:solidFill>
+                <a:latin typeface="Arial"/>
+              </a:rPr>
+              <a:t>▸  Rückläufige Marge trotz stabilem Umsatz</a:t>
+            </a:r>
+          </a:p>
+          <a:p>
+            <a:pPr>
+              <a:spcBef>
+                <a:spcPts val="400"/>
+              </a:spcBef>
+              <a:spcAft>
+                <a:spcPts val="200"/>
+              </a:spcAft>
+            </a:pPr>
+            <a:r>
+              <a:rPr sz="1300">
+                <a:solidFill>
+                  <a:srgbClr val="3D5466"/>
+                </a:solidFill>
+                <a:latin typeface="Arial"/>
+              </a:rPr>
+              <a:t>▸  Investitionen in beide Richtungen: gleichzeitig Kostenoptimierung und Qualitätsausbau ohne klare Priorisierung</a:t>
+            </a:r>
+          </a:p>
+          <a:p>
+            <a:pPr>
+              <a:spcBef>
+                <a:spcPts val="400"/>
+              </a:spcBef>
+              <a:spcAft>
+                <a:spcPts val="200"/>
+              </a:spcAft>
+            </a:pPr>
+            <a:r>
+              <a:rPr sz="1300">
+                <a:solidFill>
+                  <a:srgbClr val="3D5466"/>
+                </a:solidFill>
+                <a:latin typeface="Arial"/>
+              </a:rPr>
+              <a:t>▸  GF-Aussagen wie: „Wir machen alles — wir sind flexibel"</a:t>
+            </a:r>
+          </a:p>
+          <a:p>
+            <a:pPr>
+              <a:spcBef>
+                <a:spcPts val="400"/>
+              </a:spcBef>
+              <a:spcAft>
+                <a:spcPts val="200"/>
+              </a:spcAft>
+            </a:pPr>
+            <a:r>
+              <a:rPr sz="1200">
+                <a:solidFill>
+                  <a:srgbClr val="3D5466"/>
+                </a:solidFill>
+                <a:latin typeface="Arial"/>
+              </a:rPr>
+              <a:t>Stuck in the Middle und der Haller-Fall:</a:t>
+            </a:r>
+          </a:p>
+        </p:txBody>
+      </p:sp>
+      <p:sp>
+        <p:nvSpPr>
+          <p:cNvPr id="9" name="Rectangle 8"/>
           <p:cNvSpPr/>
           <p:nvPr/>
         </p:nvSpPr>
@@ -10679,7 +11065,7 @@
       </p:sp>
       <p:sp>
         <p:nvSpPr>
-          <p:cNvPr id="9" name="TextBox 8"/>
+          <p:cNvPr id="10" name="TextBox 9"/>
           <p:cNvSpPr txBox="1"/>
           <p:nvPr/>
         </p:nvSpPr>
@@ -10708,41 +11094,6 @@
                 <a:latin typeface="JetBrains Mono"/>
               </a:rPr>
               <a:t>Benedikt Zoller Coaching  ·  FKB Campus  ·  M22</a:t>
-            </a:r>
-          </a:p>
-        </p:txBody>
-      </p:sp>
-      <p:sp>
-        <p:nvSpPr>
-          <p:cNvPr id="10" name="TextBox 9"/>
-          <p:cNvSpPr txBox="1"/>
-          <p:nvPr/>
-        </p:nvSpPr>
-        <p:spPr>
-          <a:xfrm>
-            <a:off x="7176211" y="6583680"/>
-            <a:ext cx="4326940" cy="256032"/>
-          </a:xfrm>
-          <a:prstGeom prst="rect">
-            <a:avLst/>
-          </a:prstGeom>
-          <a:noFill/>
-        </p:spPr>
-        <p:txBody>
-          <a:bodyPr wrap="none">
-            <a:spAutoFit/>
-          </a:bodyPr>
-          <a:lstStyle/>
-          <a:p>
-            <a:pPr algn="r"/>
-            <a:r>
-              <a:rPr sz="700">
-                <a:solidFill>
-                  <a:srgbClr val="A0B4D2"/>
-                </a:solidFill>
-                <a:latin typeface="JetBrains Mono"/>
-              </a:rPr>
-              <a:t>Schaubild</a:t>
             </a:r>
           </a:p>
         </p:txBody>
@@ -10780,7 +11131,7 @@
             <a:avLst/>
           </a:prstGeom>
           <a:solidFill>
-            <a:srgbClr val="EDEDF3"/>
+            <a:srgbClr val="FFFFFF"/>
           </a:solidFill>
           <a:ln>
             <a:noFill/>
@@ -10881,51 +11232,43 @@
                 </a:solidFill>
                 <a:latin typeface="JetBrains Mono"/>
               </a:rPr>
-              <a:t>M22  ·  INHALT</a:t>
-            </a:r>
-          </a:p>
-        </p:txBody>
-      </p:sp>
-      <p:sp>
-        <p:nvSpPr>
-          <p:cNvPr id="5" name="Rectangle 4"/>
-          <p:cNvSpPr/>
-          <p:nvPr/>
-        </p:nvSpPr>
-        <p:spPr>
-          <a:xfrm>
-            <a:off x="0" y="1234440"/>
-            <a:ext cx="12188952" cy="12700"/>
-          </a:xfrm>
-          <a:prstGeom prst="rect">
-            <a:avLst/>
-          </a:prstGeom>
-          <a:solidFill>
-            <a:srgbClr val="D8DFE4"/>
-          </a:solidFill>
-          <a:ln>
-            <a:noFill/>
-          </a:ln>
-        </p:spPr>
-        <p:style>
-          <a:lnRef idx="1">
-            <a:schemeClr val="accent1"/>
-          </a:lnRef>
-          <a:fillRef idx="3">
-            <a:schemeClr val="accent1"/>
-          </a:fillRef>
-          <a:effectRef idx="2">
-            <a:schemeClr val="accent1"/>
-          </a:effectRef>
-          <a:fontRef idx="minor">
-            <a:schemeClr val="lt1"/>
-          </a:fontRef>
-        </p:style>
-        <p:txBody>
-          <a:bodyPr rtlCol="0" anchor="ctr"/>
-          <a:lstStyle/>
-          <a:p>
-            <a:pPr algn="ctr"/>
+              <a:t>M22  ·  SCHAUBILD</a:t>
+            </a:r>
+          </a:p>
+        </p:txBody>
+      </p:sp>
+      <p:sp>
+        <p:nvSpPr>
+          <p:cNvPr id="5" name="TextBox 4"/>
+          <p:cNvSpPr txBox="1"/>
+          <p:nvPr/>
+        </p:nvSpPr>
+        <p:spPr>
+          <a:xfrm>
+            <a:off x="685800" y="502920"/>
+            <a:ext cx="10817352" cy="594360"/>
+          </a:xfrm>
+          <a:prstGeom prst="rect">
+            <a:avLst/>
+          </a:prstGeom>
+          <a:noFill/>
+        </p:spPr>
+        <p:txBody>
+          <a:bodyPr wrap="square">
+            <a:spAutoFit/>
+          </a:bodyPr>
+          <a:lstStyle/>
+          <a:p>
+            <a:pPr algn="l"/>
+            <a:r>
+              <a:rPr sz="2000" b="1" i="0">
+                <a:solidFill>
+                  <a:srgbClr val="1F2C56"/>
+                </a:solidFill>
+                <a:latin typeface="Source Serif 4"/>
+              </a:rPr>
+              <a:t>Wettbewerbsstrategie-Matrix nach Porter</a:t>
+            </a:r>
           </a:p>
         </p:txBody>
       </p:sp>
@@ -10937,8 +11280,8 @@
         </p:nvSpPr>
         <p:spPr>
           <a:xfrm>
-            <a:off x="685800" y="502920"/>
-            <a:ext cx="36576" cy="658368"/>
+            <a:off x="685800" y="1143000"/>
+            <a:ext cx="10817352" cy="25400"/>
           </a:xfrm>
           <a:prstGeom prst="rect">
             <a:avLst/>
@@ -10972,41 +11315,30 @@
           </a:p>
         </p:txBody>
       </p:sp>
-      <p:sp>
-        <p:nvSpPr>
-          <p:cNvPr id="7" name="TextBox 6"/>
-          <p:cNvSpPr txBox="1"/>
-          <p:nvPr/>
-        </p:nvSpPr>
-        <p:spPr>
-          <a:xfrm>
-            <a:off x="813816" y="502920"/>
-            <a:ext cx="10634472" cy="685800"/>
-          </a:xfrm>
-          <a:prstGeom prst="rect">
-            <a:avLst/>
-          </a:prstGeom>
-          <a:noFill/>
-        </p:spPr>
-        <p:txBody>
-          <a:bodyPr wrap="square">
-            <a:spAutoFit/>
-          </a:bodyPr>
-          <a:lstStyle/>
-          <a:p>
-            <a:pPr algn="l"/>
-            <a:r>
-              <a:rPr sz="2400" b="1" i="0">
-                <a:solidFill>
-                  <a:srgbClr val="1F2C56"/>
-                </a:solidFill>
-                <a:latin typeface="Source Serif 4"/>
-              </a:rPr>
-              <a:t>Framework 2: Business Model Canvas als Robustheitscheck *(Vertiefung / Selbststudium)*</a:t>
-            </a:r>
-          </a:p>
-        </p:txBody>
-      </p:sp>
+      <p:pic>
+        <p:nvPicPr>
+          <p:cNvPr id="7" name="Picture 6" descr="image.png"/>
+          <p:cNvPicPr>
+            <a:picLocks noChangeAspect="1"/>
+          </p:cNvPicPr>
+          <p:nvPr/>
+        </p:nvPicPr>
+        <p:blipFill>
+          <a:blip r:embed="rId2"/>
+          <a:stretch>
+            <a:fillRect/>
+          </a:stretch>
+        </p:blipFill>
+        <p:spPr>
+          <a:xfrm>
+            <a:off x="2303489" y="1325880"/>
+            <a:ext cx="7581973" cy="4937760"/>
+          </a:xfrm>
+          <a:prstGeom prst="rect">
+            <a:avLst/>
+          </a:prstGeom>
+        </p:spPr>
+      </p:pic>
       <p:sp>
         <p:nvSpPr>
           <p:cNvPr id="8" name="Rectangle 7"/>
@@ -11081,6 +11413,41 @@
                 <a:latin typeface="JetBrains Mono"/>
               </a:rPr>
               <a:t>Benedikt Zoller Coaching  ·  FKB Campus  ·  M22</a:t>
+            </a:r>
+          </a:p>
+        </p:txBody>
+      </p:sp>
+      <p:sp>
+        <p:nvSpPr>
+          <p:cNvPr id="10" name="TextBox 9"/>
+          <p:cNvSpPr txBox="1"/>
+          <p:nvPr/>
+        </p:nvSpPr>
+        <p:spPr>
+          <a:xfrm>
+            <a:off x="7176211" y="6583680"/>
+            <a:ext cx="4326940" cy="256032"/>
+          </a:xfrm>
+          <a:prstGeom prst="rect">
+            <a:avLst/>
+          </a:prstGeom>
+          <a:noFill/>
+        </p:spPr>
+        <p:txBody>
+          <a:bodyPr wrap="none">
+            <a:spAutoFit/>
+          </a:bodyPr>
+          <a:lstStyle/>
+          <a:p>
+            <a:pPr algn="r"/>
+            <a:r>
+              <a:rPr sz="700">
+                <a:solidFill>
+                  <a:srgbClr val="A0B4D2"/>
+                </a:solidFill>
+                <a:latin typeface="JetBrains Mono"/>
+              </a:rPr>
+              <a:t>Schaubild</a:t>
             </a:r>
           </a:p>
         </p:txBody>

--- a/protected-downloads/praesentation/M22.pptx
+++ b/protected-downloads/praesentation/M22.pptx
@@ -22,6 +22,7 @@
     <p:sldId id="270" r:id="rId22"/>
     <p:sldId id="271" r:id="rId23"/>
     <p:sldId id="272" r:id="rId24"/>
+    <p:sldId id="273" r:id="rId25"/>
   </p:sldIdLst>
   <p:sldSz cx="12188952" cy="6858000" type="screen4x3"/>
   <p:notesSz cx="6858000" cy="9144000"/>
@@ -543,76 +544,6 @@
 </p:notes>
 </file>
 
-<file path=ppt/notesSlides/notesSlide10.xml><?xml version="1.0" encoding="utf-8"?>
-<p:notes xmlns:a="http://schemas.openxmlformats.org/drawingml/2006/main" xmlns:p="http://schemas.openxmlformats.org/presentationml/2006/main" xmlns:r="http://schemas.openxmlformats.org/officeDocument/2006/relationships">
-  <p:cSld>
-    <p:spTree>
-      <p:nvGrpSpPr>
-        <p:cNvPr id="1" name=""/>
-        <p:cNvGrpSpPr/>
-        <p:nvPr/>
-      </p:nvGrpSpPr>
-      <p:grpSpPr>
-        <a:xfrm>
-          <a:off x="0" y="0"/>
-          <a:ext cx="0" cy="0"/>
-          <a:chOff x="0" y="0"/>
-          <a:chExt cx="0" cy="0"/>
-        </a:xfrm>
-      </p:grpSpPr>
-      <p:sp>
-        <p:nvSpPr>
-          <p:cNvPr id="2" name="Slide Image Placeholder 1"/>
-          <p:cNvSpPr>
-            <a:spLocks noGrp="1"/>
-          </p:cNvSpPr>
-          <p:nvPr>
-            <p:ph type="sldImg" idx="2"/>
-          </p:nvPr>
-        </p:nvSpPr>
-        <p:spPr/>
-      </p:sp>
-      <p:sp>
-        <p:nvSpPr>
-          <p:cNvPr id="3" name="Notes Placeholder 2"/>
-          <p:cNvSpPr>
-            <a:spLocks noGrp="1"/>
-          </p:cNvSpPr>
-          <p:nvPr>
-            <p:ph type="body" idx="3" sz="quarter"/>
-          </p:nvPr>
-        </p:nvSpPr>
-        <p:spPr/>
-        <p:txBody>
-          <a:bodyPr/>
-          <a:lstStyle/>
-          <a:p>
-            <a:r>
-              <a:t>Siehe Trainerhandbuch (Sektion 3) für Moderationshinweise, Timing und erwartete Teilnehmerreaktionen.</a:t>
-            </a:r>
-          </a:p>
-        </p:txBody>
-      </p:sp>
-      <p:sp>
-        <p:nvSpPr>
-          <p:cNvPr id="4" name="Slide Number Placeholder 3"/>
-          <p:cNvSpPr>
-            <a:spLocks noGrp="1"/>
-          </p:cNvSpPr>
-          <p:nvPr>
-            <p:ph type="sldNum" idx="5" sz="quarter"/>
-          </p:nvPr>
-        </p:nvSpPr>
-        <p:spPr/>
-      </p:sp>
-    </p:spTree>
-  </p:cSld>
-  <p:clrMapOvr>
-    <a:masterClrMapping/>
-  </p:clrMapOvr>
-</p:notes>
-</file>
-
 <file path=ppt/notesSlides/notesSlide2.xml><?xml version="1.0" encoding="utf-8"?>
 <p:notes xmlns:a="http://schemas.openxmlformats.org/drawingml/2006/main" xmlns:p="http://schemas.openxmlformats.org/presentationml/2006/main" xmlns:r="http://schemas.openxmlformats.org/officeDocument/2006/relationships">
   <p:cSld>
@@ -798,7 +729,7 @@
           <a:lstStyle/>
           <a:p>
             <a:r>
-              <a:t>Trainer-Hinweis: Das Business Model Canvas ist kein Pflichtbestandteil des Workshop-Ablaufs — es dient als Referenzrahmen und Selbststudium-Werkzeug. Im Workshop-Setting fokussieren wir auf Five Forces, Generische Strategien und SWOT. Teilnehmer, die das BMC vertiefen möchten, finden hier den kreditwirtschaftlichen Übertrag.</a:t>
+              <a:t>Siehe Trainerhandbuch (Sektion 3) für Moderationshinweise, Timing und erwartete Teilnehmerreaktionen.</a:t>
             </a:r>
           </a:p>
         </p:txBody>
@@ -868,7 +799,7 @@
           <a:lstStyle/>
           <a:p>
             <a:r>
-              <a:t>Siehe Trainerhandbuch (Sektion 3) für Moderationshinweise, Timing und erwartete Teilnehmerreaktionen.</a:t>
+              <a:t>Moderation (HB Sec 3): Gleiche Gruppen. AB-2 und AB-3 gleichzeitig austeilen. AB-2 SWOT: Ergebnisse aus Five Forces in SWOT-Raster übertragen; explizit: „Markieren Sie die drei größten Red Flags für das Kreditvotum." AB-3 Krediturteil: Formulierung in max. 5 Sätzen mit: 1. Strategische Positionierung (max. 2 Sätze) 2. Identifizierte Risikofaktoren mit Fallbezug (1–2 Sätze) 3. Kreditempfehlung mit Bedingung oder Vorbehalt (1 Satz) Häufiger Fehler: Empfehlung ohne Begründung oder Risiken ohne Strategiebezug. Korrekturimpuls: „Ihr Kreditausschuss fragt: Woher wissen Sie das? — Was ist Ihre Antwort?"</a:t>
             </a:r>
           </a:p>
         </p:txBody>
@@ -938,7 +869,7 @@
           <a:lstStyle/>
           <a:p>
             <a:r>
-              <a:t>Moderation (HB Sec 3): Gleiche Gruppen. AB-2 und AB-3 gleichzeitig austeilen. AB-2 SWOT: Ergebnisse aus Five Forces in SWOT-Raster übertragen; explizit: „Markieren Sie die drei größten Red Flags für das Kreditvotum." AB-3 Krediturteil: Formulierung in max. 5 Sätzen mit: 1. Strategische Positionierung (max. 2 Sätze) 2. Identifizierte Risikofaktoren mit Fallbezug (1–2 Sätze) 3. Kreditempfehlung mit Bedingung oder Vorbehalt (1 Satz) Häufiger Fehler: Empfehlung ohne Begründung oder Risiken ohne Strategiebezug. Korrekturimpuls: „Ihr Kreditausschuss fragt: Woher wissen Sie das? — Was ist Ihre Antwort?"</a:t>
+              <a:t>Moderation (HB Sec 3): Methode: Problembasiertes Lernen in Kleingruppen (Barrows, 1986) Fallblatt Haller GmbH austeilen, 2 Minuten Lesezeit, dann AB-1 austeilen. Aufgabenstellung (Trainer liest vor): „Analysieren Sie die Wettbewerbssituation der Haller GmbH mit dem Five-Forces-Modell. Bewerten Sie jede Kraft von 1 (gering) bis 3 (hoch). Bestimmen Sie: Welche generische Strategie verfolgt Haller — oder ist das Unternehmen stuck in the middle? Begründen Sie." Gruppen: 3–4 Personen, 20 Minuten Arbeitszeit. Trainer-Runde durch den Raum (ab Minute 5):</a:t>
             </a:r>
           </a:p>
         </p:txBody>
@@ -1008,7 +939,52 @@
           <a:lstStyle/>
           <a:p>
             <a:r>
-              <a:t>Moderation (HB Sec 3): Methode: Problembasiertes Lernen in Kleingruppen (Barrows, 1986) Fallblatt Haller GmbH austeilen, 2 Minuten Lesezeit, dann AB-1 austeilen. Aufgabenstellung (Trainer liest vor): „Analysieren Sie die Wettbewerbssituation der Haller GmbH mit dem Five-Forces-Modell. Bewerten Sie jede Kraft von 1 (gering) bis 3 (hoch). Bestimmen Sie: Welche generische Strategie verfolgt Haller — oder ist das Unternehmen stuck in the middle? Begründen Sie." Gruppen: 3–4 Personen, 20 Minuten Arbeitszeit. Trainer-Runde durch den Raum (ab Minute 5):</a:t>
+              <a:t>AB-1 Musterlösung (Trainer-Version)</a:t>
+            </a:r>
+          </a:p>
+          <a:p>
+            <a:r>
+              <a:t>Gesamteinschätzung Branchenattraktivität: mittel bis niedrig. Dominierende Risiken: Kundenklumpen + Niedrigpreiswettbewerb aus Asien. Für die Kreditwürdigkeitsbeurteilung ist die Abhängigkeit von Kunde A das zentrale qualitative Red Flag.</a:t>
+            </a:r>
+          </a:p>
+          <a:p>
+            <a:r>
+              <a:t>Strategische Positionierung: Haller verfolgt implizit eine Differenzierungsstrategie (Qualität, Liefertreue, Präzisions-Know-how). Diese Strategie ist solange tragfähig, wie der Qualitätsvorteil verteidigbar bleibt. Mit dem Eintritt asiatischer Wettbewerber und ohne erkennbare Reinvestition in neue Differenzierungsmerkmale droht jedoch ein Stuck-in-the-Middle: nicht günstig genug für Preiskampf, aber zunehmend weniger differenziert. Klassisches Signal: GF Haller kann vermutlich nicht klar benennen, was das Unternehmen in 5 Jahren noch einzigartig macht.</a:t>
+            </a:r>
+          </a:p>
+          <a:p>
+            <a:r>
+              <a:t>AB-2 Musterlösung (Trainer-Version)</a:t>
+            </a:r>
+          </a:p>
+          <a:p>
+            <a:r>
+              <a:t>Stärken: (1) Langjährige Kundenbindungen, hohe Liefertreue und Qualitätsstandard; (2) Erfahrenes Facharbeiterteam mit spezifischem Präzisions-Know-how (VRIN-Ressource nach Barney, 1991); (3) Gesunde Eigenkapitalquote (31,4 %) und positiver DSCR (1,42x)</a:t>
+            </a:r>
+          </a:p>
+          <a:p>
+            <a:r>
+              <a:t>Schwächen: (1) ! Extreme Kundenabhängigkeit (Kunde A = 60 % Umsatz — Klumpenrisiko); (2) ! Fehlende Nachfolgeplanung (GF 63 Jahre, kein Nachfolger); (3) Veralteter Maschinenpark (Ø 9 Jahre, letzte große Investition 2019)</a:t>
+            </a:r>
+          </a:p>
+          <a:p>
+            <a:r>
+              <a:t>Chancen: (1) Reshoring-Trend — europäische Kunden bauen asiatische Abhängigkeiten ab; (2) Wachstum im Bereich Elektromobilität-Komponenten als Diversifikationsoption; (3) Förderprogramme für KMU-Digitalisierung (z. B. go-digital, BMWi)</a:t>
+            </a:r>
+          </a:p>
+          <a:p>
+            <a:r>
+              <a:t>Risiken: (1) ! Asiatischer Niedrigpreiswettbewerb bereits im Markt; (2) Fachkräfteverlust durch Altersabgänge ohne Nachbesetzung; (3) Abhängigkeit vom Konjunkturzyklus des Maschinenbaus</a:t>
+            </a:r>
+          </a:p>
+          <a:p>
+            <a:r>
+              <a:t>Die drei kritischsten: (1) Klumpenrisiko Kunde A — Wegfall würde Deckungsbeitrag auf 40 % reduzieren; Zahlungsunfähigkeit droht. (2) Nachfolgerisiko GF Haller — kein Managementnachfolger = operatives Schlüsselpersonenrisiko. (3) Preiserosion durch asiatische Wettbewerber — mittelfristige Margenkompression strukturell angelegt.</a:t>
+            </a:r>
+          </a:p>
+          <a:p>
+            <a:r>
+              <a:t>Kreditvorlage-Formulierungsvorschlag: „Die Haller GmbH verfügt über eine solide Bilanzstruktur und ein qualifiziertes Facharbeiterteam als nachhaltige Wettbewerbsressource. Die Kreditwürdigkeit wird jedoch durch drei qualitative Risiken erheblich belastet: das extreme Klumpenrisiko auf Kundenseite (Kunde A: 60 % Umsatzanteil), das ungeklärte Nachfolgeproblem des 63-jährigen Alleingeschäftsführers sowie den strukturell zunehmenden Preisdruck durch asiatische Wettbewerber. Diese Faktoren erfordern eine differenzierte Bewertung und ggf. Absicherungsmaßnahmen im Kreditrahmen."</a:t>
             </a:r>
           </a:p>
         </p:txBody>
@@ -1078,52 +1054,7 @@
           <a:lstStyle/>
           <a:p>
             <a:r>
-              <a:t>AB-1 Musterlösung (Trainer-Version)</a:t>
-            </a:r>
-          </a:p>
-          <a:p>
-            <a:r>
-              <a:t>Gesamteinschätzung Branchenattraktivität: mittel bis niedrig. Dominierende Risiken: Kundenklumpen + Niedrigpreiswettbewerb aus Asien. Für die Kreditwürdigkeitsbeurteilung ist die Abhängigkeit von Kunde A das zentrale qualitative Red Flag.</a:t>
-            </a:r>
-          </a:p>
-          <a:p>
-            <a:r>
-              <a:t>Strategische Positionierung: Haller verfolgt implizit eine Differenzierungsstrategie (Qualität, Liefertreue, Präzisions-Know-how). Diese Strategie ist solange tragfähig, wie der Qualitätsvorteil verteidigbar bleibt. Mit dem Eintritt asiatischer Wettbewerber und ohne erkennbare Reinvestition in neue Differenzierungsmerkmale droht jedoch ein Stuck-in-the-Middle: nicht günstig genug für Preiskampf, aber zunehmend weniger differenziert. Klassisches Signal: GF Haller kann vermutlich nicht klar benennen, was das Unternehmen in 5 Jahren noch einzigartig macht.</a:t>
-            </a:r>
-          </a:p>
-          <a:p>
-            <a:r>
-              <a:t>AB-2 Musterlösung (Trainer-Version)</a:t>
-            </a:r>
-          </a:p>
-          <a:p>
-            <a:r>
-              <a:t>Stärken: (1) Langjährige Kundenbindungen, hohe Liefertreue und Qualitätsstandard; (2) Erfahrenes Facharbeiterteam mit spezifischem Präzisions-Know-how (VRIN-Ressource nach Barney, 1991); (3) Gesunde Eigenkapitalquote (31,4 %) und positiver DSCR (1,42x)</a:t>
-            </a:r>
-          </a:p>
-          <a:p>
-            <a:r>
-              <a:t>Schwächen: (1) ! Extreme Kundenabhängigkeit (Kunde A = 60 % Umsatz — Klumpenrisiko); (2) ! Fehlende Nachfolgeplanung (GF 63 Jahre, kein Nachfolger); (3) Veralteter Maschinenpark (Ø 9 Jahre, letzte große Investition 2019)</a:t>
-            </a:r>
-          </a:p>
-          <a:p>
-            <a:r>
-              <a:t>Chancen: (1) Reshoring-Trend — europäische Kunden bauen asiatische Abhängigkeiten ab; (2) Wachstum im Bereich Elektromobilität-Komponenten als Diversifikationsoption; (3) Förderprogramme für KMU-Digitalisierung (z. B. go-digital, BMWi)</a:t>
-            </a:r>
-          </a:p>
-          <a:p>
-            <a:r>
-              <a:t>Risiken: (1) ! Asiatischer Niedrigpreiswettbewerb bereits im Markt; (2) Fachkräfteverlust durch Altersabgänge ohne Nachbesetzung; (3) Abhängigkeit vom Konjunkturzyklus des Maschinenbaus</a:t>
-            </a:r>
-          </a:p>
-          <a:p>
-            <a:r>
-              <a:t>Die drei kritischsten: (1) Klumpenrisiko Kunde A — Wegfall würde Deckungsbeitrag auf 40 % reduzieren; Zahlungsunfähigkeit droht. (2) Nachfolgerisiko GF Haller — kein Managementnachfolger = operatives Schlüsselpersonenrisiko. (3) Preiserosion durch asiatische Wettbewerber — mittelfristige Margenkompression strukturell angelegt.</a:t>
-            </a:r>
-          </a:p>
-          <a:p>
-            <a:r>
-              <a:t>Kreditvorlage-Formulierungsvorschlag: „Die Haller GmbH verfügt über eine solide Bilanzstruktur und ein qualifiziertes Facharbeiterteam als nachhaltige Wettbewerbsressource. Die Kreditwürdigkeit wird jedoch durch drei qualitative Risiken erheblich belastet: das extreme Klumpenrisiko auf Kundenseite (Kunde A: 60 % Umsatzanteil), das ungeklärte Nachfolgeproblem des 63-jährigen Alleingeschäftsführers sowie den strukturell zunehmenden Preisdruck durch asiatische Wettbewerber. Diese Faktoren erfordern eine differenzierte Bewertung und ggf. Absicherungsmaßnahmen im Kreditrahmen."</a:t>
+              <a:t>Trainer-Hinweis: Die Kennzahlen der Haller GmbH sind quantitativ unauffällig. Genau darin liegt die didaktische Stärke des Fallbeispiels: Teilnehmer sollen erkennen, dass ein auf den ersten Blick gesundes Unternehmen qualitativ erhebliche Risiken trägt, die sich in einer reinen Bilanzanalyse nicht zeigen.</a:t>
             </a:r>
           </a:p>
         </p:txBody>
@@ -1193,7 +1124,7 @@
           <a:lstStyle/>
           <a:p>
             <a:r>
-              <a:t>Trainer-Hinweis: Die Kennzahlen der Haller GmbH sind quantitativ unauffällig. Genau darin liegt die didaktische Stärke des Fallbeispiels: Teilnehmer sollen erkennen, dass ein auf den ersten Blick gesundes Unternehmen qualitativ erhebliche Risiken trägt, die sich in einer reinen Bilanzanalyse nicht zeigen.</a:t>
+              <a:t>Siehe Trainerhandbuch (Sektion 3) für Moderationshinweise, Timing und erwartete Teilnehmerreaktionen.</a:t>
             </a:r>
           </a:p>
         </p:txBody>
@@ -5011,14 +4942,94 @@
                 </a:solidFill>
                 <a:latin typeface="Source Serif 4"/>
               </a:rPr>
-              <a:t>Framework 2: Business Model Canvas als Robustheitscheck *(Vertiefung / Selbststudium)*</a:t>
-            </a:r>
-          </a:p>
-        </p:txBody>
-      </p:sp>
-      <p:sp>
-        <p:nvSpPr>
-          <p:cNvPr id="8" name="Rectangle 7"/>
+              <a:t>Framework 2: Business Model Canvas als Robustheitscheck</a:t>
+            </a:r>
+          </a:p>
+        </p:txBody>
+      </p:sp>
+      <p:sp>
+        <p:nvSpPr>
+          <p:cNvPr id="8" name="TextBox 7"/>
+          <p:cNvSpPr txBox="1"/>
+          <p:nvPr/>
+        </p:nvSpPr>
+        <p:spPr>
+          <a:xfrm>
+            <a:off x="685800" y="1417320"/>
+            <a:ext cx="10817352" cy="5029200"/>
+          </a:xfrm>
+          <a:prstGeom prst="rect">
+            <a:avLst/>
+          </a:prstGeom>
+          <a:noFill/>
+        </p:spPr>
+        <p:txBody>
+          <a:bodyPr wrap="square">
+            <a:spAutoFit/>
+          </a:bodyPr>
+          <a:lstStyle/>
+          <a:p>
+            <a:pPr>
+              <a:spcBef>
+                <a:spcPts val="1000"/>
+              </a:spcBef>
+              <a:spcAft>
+                <a:spcPts val="200"/>
+              </a:spcAft>
+            </a:pPr>
+            <a:r>
+              <a:rPr sz="800" b="1">
+                <a:solidFill>
+                  <a:srgbClr val="78808C"/>
+                </a:solidFill>
+                <a:latin typeface="JetBrains Mono"/>
+              </a:rPr>
+              <a:t>GRUNDSTRUKTUR</a:t>
+            </a:r>
+          </a:p>
+          <a:p>
+            <a:pPr>
+              <a:spcBef>
+                <a:spcPts val="400"/>
+              </a:spcBef>
+              <a:spcAft>
+                <a:spcPts val="200"/>
+              </a:spcAft>
+            </a:pPr>
+            <a:r>
+              <a:rPr sz="1300">
+                <a:solidFill>
+                  <a:srgbClr val="3D5466"/>
+                </a:solidFill>
+                <a:latin typeface="Arial"/>
+              </a:rPr>
+              <a:t>▸  Gruppe A – Ertragsstabilität (rechte Canvas-Seite)</a:t>
+            </a:r>
+          </a:p>
+          <a:p>
+            <a:pPr>
+              <a:spcBef>
+                <a:spcPts val="400"/>
+              </a:spcBef>
+              <a:spcAft>
+                <a:spcPts val="200"/>
+              </a:spcAft>
+            </a:pPr>
+            <a:r>
+              <a:rPr sz="1300">
+                <a:solidFill>
+                  <a:srgbClr val="3D5466"/>
+                </a:solidFill>
+                <a:latin typeface="Arial"/>
+              </a:rPr>
+              <a:t>▸  Gruppe B – Kostenstruktur &amp; Abhängigkeiten (linke Canvas-Seite)</a:t>
+            </a:r>
+          </a:p>
+        </p:txBody>
+      </p:sp>
+      <p:sp>
+        <p:nvSpPr>
+          <p:cNvPr id="9" name="Rectangle 8"/>
           <p:cNvSpPr/>
           <p:nvPr/>
         </p:nvSpPr>
@@ -5061,7 +5072,7 @@
       </p:sp>
       <p:sp>
         <p:nvSpPr>
-          <p:cNvPr id="9" name="TextBox 8"/>
+          <p:cNvPr id="10" name="TextBox 9"/>
           <p:cNvSpPr txBox="1"/>
           <p:nvPr/>
         </p:nvSpPr>
@@ -5349,7 +5360,7 @@
                 </a:solidFill>
                 <a:latin typeface="Source Serif 4"/>
               </a:rPr>
-              <a:t>Framework 2: Business Model Canvas als Robustheitscheck</a:t>
+              <a:t>Framework 3: SWOT als Kreditrisikofilter</a:t>
             </a:r>
           </a:p>
         </p:txBody>
@@ -5391,7 +5402,7 @@
                 </a:solidFill>
                 <a:latin typeface="JetBrains Mono"/>
               </a:rPr>
-              <a:t>GRUNDSTRUKTUR</a:t>
+              <a:t>VON DER STRATEGISCHEN SWOT ZUR RISIKOKLASSIFIZIERUNG</a:t>
             </a:r>
           </a:p>
           <a:p>
@@ -5404,13 +5415,13 @@
               </a:spcAft>
             </a:pPr>
             <a:r>
-              <a:rPr sz="1200">
+              <a:rPr sz="1300">
                 <a:solidFill>
                   <a:srgbClr val="3D5466"/>
                 </a:solidFill>
                 <a:latin typeface="Arial"/>
               </a:rPr>
-              <a:t>Gruppe A – Ertragsstabilität (rechte Canvas-Seite)</a:t>
+              <a:t>▸  Kreditrelevante SWOT-Lesart:</a:t>
             </a:r>
           </a:p>
           <a:p>
@@ -5423,13 +5434,70 @@
               </a:spcAft>
             </a:pPr>
             <a:r>
-              <a:rPr sz="1200">
+              <a:rPr sz="1300">
                 <a:solidFill>
                   <a:srgbClr val="3D5466"/>
                 </a:solidFill>
                 <a:latin typeface="Arial"/>
               </a:rPr>
-              <a:t>Gruppe B – Kostenstruktur &amp; Abhängigkeiten (linke Canvas-Seite)</a:t>
+              <a:t>▸  Kritische Hinweise zur SWOT im Kreditkontext (nach Welge &amp; Al-Laham, 2012):</a:t>
+            </a:r>
+          </a:p>
+          <a:p>
+            <a:pPr>
+              <a:spcBef>
+                <a:spcPts val="400"/>
+              </a:spcBef>
+              <a:spcAft>
+                <a:spcPts val="200"/>
+              </a:spcAft>
+            </a:pPr>
+            <a:r>
+              <a:rPr sz="1300">
+                <a:solidFill>
+                  <a:srgbClr val="3D5466"/>
+                </a:solidFill>
+                <a:latin typeface="Arial"/>
+              </a:rPr>
+              <a:t>▸  Alle Faktoren erscheinen formal gleichwertig — Berater müssen aktiv gewichten</a:t>
+            </a:r>
+          </a:p>
+          <a:p>
+            <a:pPr>
+              <a:spcBef>
+                <a:spcPts val="400"/>
+              </a:spcBef>
+              <a:spcAft>
+                <a:spcPts val="200"/>
+              </a:spcAft>
+            </a:pPr>
+            <a:r>
+              <a:rPr sz="1300">
+                <a:solidFill>
+                  <a:srgbClr val="3D5466"/>
+                </a:solidFill>
+                <a:latin typeface="Arial"/>
+              </a:rPr>
+              <a:t>▸  Subjektive Unternehmersicht dominiert; externe Verifikation (z. B. Branchendaten) ist nötig</a:t>
+            </a:r>
+          </a:p>
+          <a:p>
+            <a:pPr>
+              <a:spcBef>
+                <a:spcPts val="400"/>
+              </a:spcBef>
+              <a:spcAft>
+                <a:spcPts val="200"/>
+              </a:spcAft>
+            </a:pPr>
+            <a:r>
+              <a:rPr sz="1300">
+                <a:solidFill>
+                  <a:srgbClr val="3D5466"/>
+                </a:solidFill>
+                <a:latin typeface="Arial"/>
+              </a:rPr>
+              <a:t>▸  Die SWOT liefert ein Lagebild, keine Prognose; strategische Dynamik muss separat eingeschätzt werden</a:t>
             </a:r>
           </a:p>
         </p:txBody>
@@ -5767,7 +5835,7 @@
                 </a:solidFill>
                 <a:latin typeface="Source Serif 4"/>
               </a:rPr>
-              <a:t>Framework 3: SWOT als Kreditrisikofilter</a:t>
+              <a:t>Framework 4: Strategische Ressourcenstärke (Resource-based View)</a:t>
             </a:r>
           </a:p>
         </p:txBody>
@@ -5793,25 +5861,6 @@
             <a:spAutoFit/>
           </a:bodyPr>
           <a:lstStyle/>
-          <a:p>
-            <a:pPr>
-              <a:spcBef>
-                <a:spcPts val="1000"/>
-              </a:spcBef>
-              <a:spcAft>
-                <a:spcPts val="200"/>
-              </a:spcAft>
-            </a:pPr>
-            <a:r>
-              <a:rPr sz="800" b="1">
-                <a:solidFill>
-                  <a:srgbClr val="78808C"/>
-                </a:solidFill>
-                <a:latin typeface="JetBrains Mono"/>
-              </a:rPr>
-              <a:t>VON DER STRATEGISCHEN SWOT ZUR RISIKOKLASSIFIZIERUNG</a:t>
-            </a:r>
-          </a:p>
           <a:p>
             <a:pPr>
               <a:spcBef>
@@ -5822,13 +5871,13 @@
               </a:spcAft>
             </a:pPr>
             <a:r>
-              <a:rPr sz="1200">
+              <a:rPr sz="1300">
                 <a:solidFill>
                   <a:srgbClr val="3D5466"/>
                 </a:solidFill>
                 <a:latin typeface="Arial"/>
               </a:rPr>
-              <a:t>Kreditrelevante SWOT-Lesart:</a:t>
+              <a:t>▸  Beispiele kreditrelevanter VRIN-Ressourcen im Mittelstand:</a:t>
             </a:r>
           </a:p>
           <a:p>
@@ -5841,13 +5890,13 @@
               </a:spcAft>
             </a:pPr>
             <a:r>
-              <a:rPr sz="1200">
+              <a:rPr sz="1300">
                 <a:solidFill>
                   <a:srgbClr val="3D5466"/>
                 </a:solidFill>
                 <a:latin typeface="Arial"/>
               </a:rPr>
-              <a:t>Kritische Hinweise zur SWOT im Kreditkontext (nach Welge &amp; Al-Laham, 2012):</a:t>
+              <a:t>▸  Spezialisiertes Know-how mit langjähriger Entwicklungszeit (schwer zu kopieren)</a:t>
             </a:r>
           </a:p>
           <a:p>
@@ -5866,7 +5915,7 @@
                 </a:solidFill>
                 <a:latin typeface="Arial"/>
               </a:rPr>
-              <a:t>▸  Alle Faktoren erscheinen formal gleichwertig — Berater müssen aktiv gewichten</a:t>
+              <a:t>▸  Exklusivlieferantenverträge oder Zulassungen (selten, nicht substituierbar)</a:t>
             </a:r>
           </a:p>
           <a:p>
@@ -5885,7 +5934,7 @@
                 </a:solidFill>
                 <a:latin typeface="Arial"/>
               </a:rPr>
-              <a:t>▸  Subjektive Unternehmersicht dominiert; externe Verifikation (z. B. Branchendaten) ist nötig</a:t>
+              <a:t>▸  Langfristige Kundenbeziehungen mit Wechselkosten auf Kundenseite (wertvoll, nicht imitierbar)</a:t>
             </a:r>
           </a:p>
           <a:p>
@@ -5904,7 +5953,7 @@
                 </a:solidFill>
                 <a:latin typeface="Arial"/>
               </a:rPr>
-              <a:t>▸  Die SWOT liefert ein Lagebild, keine Prognose; strategische Dynamik muss separat eingeschätzt werden</a:t>
+              <a:t>▸  Qualifizierte Fachkräfte mit spezifischer Expertise (Schlüsselpersonenrisiko = Kehrseite)</a:t>
             </a:r>
           </a:p>
         </p:txBody>
@@ -6121,7 +6170,7 @@
                 </a:solidFill>
                 <a:latin typeface="JetBrains Mono"/>
               </a:rPr>
-              <a:t>M22  ·  INHALT</a:t>
+              <a:t>M22  ·  ARBEITSBLATT</a:t>
             </a:r>
           </a:p>
         </p:txBody>
@@ -6242,7 +6291,7 @@
                 </a:solidFill>
                 <a:latin typeface="Source Serif 4"/>
               </a:rPr>
-              <a:t>Framework 4: Strategische Ressourcenstärke (Resource-based View)</a:t>
+              <a:t>Praxisfall: Präzisionswerk Haller GmbH</a:t>
             </a:r>
           </a:p>
         </p:txBody>
@@ -6255,8 +6304,8 @@
         </p:nvSpPr>
         <p:spPr>
           <a:xfrm>
-            <a:off x="685800" y="1417320"/>
-            <a:ext cx="10817352" cy="5029200"/>
+            <a:off x="685800" y="1554480"/>
+            <a:ext cx="10817352" cy="3840480"/>
           </a:xfrm>
           <a:prstGeom prst="rect">
             <a:avLst/>
@@ -6278,13 +6327,13 @@
               </a:spcAft>
             </a:pPr>
             <a:r>
-              <a:rPr sz="1200">
+              <a:rPr sz="1400">
                 <a:solidFill>
                   <a:srgbClr val="3D5466"/>
                 </a:solidFill>
                 <a:latin typeface="Arial"/>
               </a:rPr>
-              <a:t>Beispiele kreditrelevanter VRIN-Ressourcen im Mittelstand:</a:t>
+              <a:t>▸  Unternehmensportrait</a:t>
             </a:r>
           </a:p>
           <a:p>
@@ -6297,13 +6346,13 @@
               </a:spcAft>
             </a:pPr>
             <a:r>
-              <a:rPr sz="1300">
+              <a:rPr sz="1400">
                 <a:solidFill>
                   <a:srgbClr val="3D5466"/>
                 </a:solidFill>
                 <a:latin typeface="Arial"/>
               </a:rPr>
-              <a:t>▸  Spezialisiertes Know-how mit langjähriger Entwicklungszeit (schwer zu kopieren)</a:t>
+              <a:t>▸  Kennzahlen Geschäftsjahr 2024:</a:t>
             </a:r>
           </a:p>
           <a:p>
@@ -6316,13 +6365,13 @@
               </a:spcAft>
             </a:pPr>
             <a:r>
-              <a:rPr sz="1300">
+              <a:rPr sz="1400">
                 <a:solidFill>
                   <a:srgbClr val="3D5466"/>
                 </a:solidFill>
                 <a:latin typeface="Arial"/>
               </a:rPr>
-              <a:t>▸  Exklusivlieferantenverträge oder Zulassungen (selten, nicht substituierbar)</a:t>
+              <a:t>▸  *Branchenbenchmark: VDMA Maschinenbau-Statistik 2024; zeb-Mittelstandsstudie 2023</a:t>
             </a:r>
           </a:p>
           <a:p>
@@ -6335,13 +6384,13 @@
               </a:spcAft>
             </a:pPr>
             <a:r>
-              <a:rPr sz="1300">
+              <a:rPr sz="1400">
                 <a:solidFill>
                   <a:srgbClr val="3D5466"/>
                 </a:solidFill>
                 <a:latin typeface="Arial"/>
               </a:rPr>
-              <a:t>▸  Langfristige Kundenbeziehungen mit Wechselkosten auf Kundenseite (wertvoll, nicht imitierbar)</a:t>
+              <a:t>▸  Strategische Ausgangssituation:</a:t>
             </a:r>
           </a:p>
           <a:p>
@@ -6354,13 +6403,13 @@
               </a:spcAft>
             </a:pPr>
             <a:r>
-              <a:rPr sz="1300">
+              <a:rPr sz="1400">
                 <a:solidFill>
                   <a:srgbClr val="3D5466"/>
                 </a:solidFill>
                 <a:latin typeface="Arial"/>
               </a:rPr>
-              <a:t>▸  Qualifizierte Fachkräfte mit spezifischer Expertise (Schlüsselpersonenrisiko = Kehrseite)</a:t>
+              <a:t>▸  Drei Hauptkunden, einer davon (Maschinenbaukonzern aus Baden-Württemberg) stellt 60 % des Jahresumsatzes</a:t>
             </a:r>
           </a:p>
         </p:txBody>
@@ -6368,6 +6417,84 @@
       <p:sp>
         <p:nvSpPr>
           <p:cNvPr id="9" name="Rectangle 8"/>
+          <p:cNvSpPr/>
+          <p:nvPr/>
+        </p:nvSpPr>
+        <p:spPr>
+          <a:xfrm>
+            <a:off x="685800" y="5486400"/>
+            <a:ext cx="10817352" cy="640080"/>
+          </a:xfrm>
+          <a:prstGeom prst="rect">
+            <a:avLst/>
+          </a:prstGeom>
+          <a:solidFill>
+            <a:srgbClr val="1F2C56"/>
+          </a:solidFill>
+          <a:ln>
+            <a:noFill/>
+          </a:ln>
+        </p:spPr>
+        <p:style>
+          <a:lnRef idx="1">
+            <a:schemeClr val="accent1"/>
+          </a:lnRef>
+          <a:fillRef idx="3">
+            <a:schemeClr val="accent1"/>
+          </a:fillRef>
+          <a:effectRef idx="2">
+            <a:schemeClr val="accent1"/>
+          </a:effectRef>
+          <a:fontRef idx="minor">
+            <a:schemeClr val="lt1"/>
+          </a:fontRef>
+        </p:style>
+        <p:txBody>
+          <a:bodyPr rtlCol="0" anchor="ctr"/>
+          <a:lstStyle/>
+          <a:p>
+            <a:pPr algn="ctr"/>
+          </a:p>
+        </p:txBody>
+      </p:sp>
+      <p:sp>
+        <p:nvSpPr>
+          <p:cNvPr id="10" name="TextBox 9"/>
+          <p:cNvSpPr txBox="1"/>
+          <p:nvPr/>
+        </p:nvSpPr>
+        <p:spPr>
+          <a:xfrm>
+            <a:off x="868680" y="5596128"/>
+            <a:ext cx="10451592" cy="457200"/>
+          </a:xfrm>
+          <a:prstGeom prst="rect">
+            <a:avLst/>
+          </a:prstGeom>
+          <a:noFill/>
+        </p:spPr>
+        <p:txBody>
+          <a:bodyPr wrap="square">
+            <a:spAutoFit/>
+          </a:bodyPr>
+          <a:lstStyle/>
+          <a:p>
+            <a:pPr algn="l"/>
+            <a:r>
+              <a:rPr sz="1300" b="1" i="0">
+                <a:solidFill>
+                  <a:srgbClr val="FFFFFF"/>
+                </a:solidFill>
+                <a:latin typeface="Arial"/>
+              </a:rPr>
+              <a:t>→  Bearbeitung im Teilnehmer-Workbook (Arbeitsblatt mit Ausfüllfeldern)</a:t>
+            </a:r>
+          </a:p>
+        </p:txBody>
+      </p:sp>
+      <p:sp>
+        <p:nvSpPr>
+          <p:cNvPr id="11" name="Rectangle 10"/>
           <p:cNvSpPr/>
           <p:nvPr/>
         </p:nvSpPr>
@@ -6410,7 +6537,7 @@
       </p:sp>
       <p:sp>
         <p:nvSpPr>
-          <p:cNvPr id="10" name="TextBox 9"/>
+          <p:cNvPr id="12" name="TextBox 11"/>
           <p:cNvSpPr txBox="1"/>
           <p:nvPr/>
         </p:nvSpPr>
@@ -6577,7 +6704,7 @@
                 </a:solidFill>
                 <a:latin typeface="JetBrains Mono"/>
               </a:rPr>
-              <a:t>M22  ·  ARBEITSBLATT</a:t>
+              <a:t>M22  ·  INHALT</a:t>
             </a:r>
           </a:p>
         </p:txBody>
@@ -6698,7 +6825,7 @@
                 </a:solidFill>
                 <a:latin typeface="Source Serif 4"/>
               </a:rPr>
-              <a:t>Praxisfall: Präzisionswerk Haller GmbH</a:t>
+              <a:t>Kennzahlen- und Formelkarte: Qualitative Kreditwürdigkeitsanalyse</a:t>
             </a:r>
           </a:p>
         </p:txBody>
@@ -6711,8 +6838,8 @@
         </p:nvSpPr>
         <p:spPr>
           <a:xfrm>
-            <a:off x="685800" y="1554480"/>
-            <a:ext cx="10817352" cy="3840480"/>
+            <a:off x="685800" y="1417320"/>
+            <a:ext cx="10817352" cy="5029200"/>
           </a:xfrm>
           <a:prstGeom prst="rect">
             <a:avLst/>
@@ -6727,96 +6854,39 @@
           <a:p>
             <a:pPr>
               <a:spcBef>
-                <a:spcPts val="400"/>
+                <a:spcPts val="1000"/>
               </a:spcBef>
               <a:spcAft>
                 <a:spcPts val="200"/>
               </a:spcAft>
             </a:pPr>
             <a:r>
-              <a:rPr sz="1400">
-                <a:solidFill>
-                  <a:srgbClr val="3D5466"/>
-                </a:solidFill>
-                <a:latin typeface="Arial"/>
+              <a:rPr sz="800" b="1">
+                <a:solidFill>
+                  <a:srgbClr val="78808C"/>
+                </a:solidFill>
+                <a:latin typeface="JetBrains Mono"/>
               </a:rPr>
-              <a:t>▸  Unternehmensportrait</a:t>
+              <a:t>STRATEGISCHE RED-FLAG-CHECKLISTE</a:t>
             </a:r>
           </a:p>
           <a:p>
             <a:pPr>
               <a:spcBef>
-                <a:spcPts val="400"/>
+                <a:spcPts val="1000"/>
               </a:spcBef>
               <a:spcAft>
                 <a:spcPts val="200"/>
               </a:spcAft>
             </a:pPr>
             <a:r>
-              <a:rPr sz="1400">
-                <a:solidFill>
-                  <a:srgbClr val="3D5466"/>
-                </a:solidFill>
-                <a:latin typeface="Arial"/>
+              <a:rPr sz="800" b="1">
+                <a:solidFill>
+                  <a:srgbClr val="78808C"/>
+                </a:solidFill>
+                <a:latin typeface="JetBrains Mono"/>
               </a:rPr>
-              <a:t>▸  Kennzahlen Geschäftsjahr 2024:</a:t>
-            </a:r>
-          </a:p>
-          <a:p>
-            <a:pPr>
-              <a:spcBef>
-                <a:spcPts val="400"/>
-              </a:spcBef>
-              <a:spcAft>
-                <a:spcPts val="200"/>
-              </a:spcAft>
-            </a:pPr>
-            <a:r>
-              <a:rPr sz="1400">
-                <a:solidFill>
-                  <a:srgbClr val="3D5466"/>
-                </a:solidFill>
-                <a:latin typeface="Arial"/>
-              </a:rPr>
-              <a:t>▸  *Branchenbenchmark: VDMA Maschinenbau-Statistik 2024; zeb-Mittelstandsstudie 2023</a:t>
-            </a:r>
-          </a:p>
-          <a:p>
-            <a:pPr>
-              <a:spcBef>
-                <a:spcPts val="400"/>
-              </a:spcBef>
-              <a:spcAft>
-                <a:spcPts val="200"/>
-              </a:spcAft>
-            </a:pPr>
-            <a:r>
-              <a:rPr sz="1400">
-                <a:solidFill>
-                  <a:srgbClr val="3D5466"/>
-                </a:solidFill>
-                <a:latin typeface="Arial"/>
-              </a:rPr>
-              <a:t>▸  Strategische Ausgangssituation:</a:t>
-            </a:r>
-          </a:p>
-          <a:p>
-            <a:pPr>
-              <a:spcBef>
-                <a:spcPts val="400"/>
-              </a:spcBef>
-              <a:spcAft>
-                <a:spcPts val="200"/>
-              </a:spcAft>
-            </a:pPr>
-            <a:r>
-              <a:rPr sz="1400">
-                <a:solidFill>
-                  <a:srgbClr val="3D5466"/>
-                </a:solidFill>
-                <a:latin typeface="Arial"/>
-              </a:rPr>
-              <a:t>▸  Drei Hauptkunden, einer davon (Maschinenbaukonzern aus Baden-Württemberg) stellt 60 % des Jahresumsatzes</a:t>
+              <a:t>QUANTITATIVE UNTERSTÜTZUNGSKENNZAHLEN</a:t>
             </a:r>
           </a:p>
         </p:txBody>
@@ -6824,84 +6894,6 @@
       <p:sp>
         <p:nvSpPr>
           <p:cNvPr id="9" name="Rectangle 8"/>
-          <p:cNvSpPr/>
-          <p:nvPr/>
-        </p:nvSpPr>
-        <p:spPr>
-          <a:xfrm>
-            <a:off x="685800" y="5486400"/>
-            <a:ext cx="10817352" cy="640080"/>
-          </a:xfrm>
-          <a:prstGeom prst="rect">
-            <a:avLst/>
-          </a:prstGeom>
-          <a:solidFill>
-            <a:srgbClr val="1F2C56"/>
-          </a:solidFill>
-          <a:ln>
-            <a:noFill/>
-          </a:ln>
-        </p:spPr>
-        <p:style>
-          <a:lnRef idx="1">
-            <a:schemeClr val="accent1"/>
-          </a:lnRef>
-          <a:fillRef idx="3">
-            <a:schemeClr val="accent1"/>
-          </a:fillRef>
-          <a:effectRef idx="2">
-            <a:schemeClr val="accent1"/>
-          </a:effectRef>
-          <a:fontRef idx="minor">
-            <a:schemeClr val="lt1"/>
-          </a:fontRef>
-        </p:style>
-        <p:txBody>
-          <a:bodyPr rtlCol="0" anchor="ctr"/>
-          <a:lstStyle/>
-          <a:p>
-            <a:pPr algn="ctr"/>
-          </a:p>
-        </p:txBody>
-      </p:sp>
-      <p:sp>
-        <p:nvSpPr>
-          <p:cNvPr id="10" name="TextBox 9"/>
-          <p:cNvSpPr txBox="1"/>
-          <p:nvPr/>
-        </p:nvSpPr>
-        <p:spPr>
-          <a:xfrm>
-            <a:off x="868680" y="5596128"/>
-            <a:ext cx="10451592" cy="457200"/>
-          </a:xfrm>
-          <a:prstGeom prst="rect">
-            <a:avLst/>
-          </a:prstGeom>
-          <a:noFill/>
-        </p:spPr>
-        <p:txBody>
-          <a:bodyPr wrap="square">
-            <a:spAutoFit/>
-          </a:bodyPr>
-          <a:lstStyle/>
-          <a:p>
-            <a:pPr algn="l"/>
-            <a:r>
-              <a:rPr sz="1300" b="1" i="0">
-                <a:solidFill>
-                  <a:srgbClr val="FFFFFF"/>
-                </a:solidFill>
-                <a:latin typeface="Arial"/>
-              </a:rPr>
-              <a:t>→  Bearbeitung im Teilnehmer-Workbook (Arbeitsblatt mit Ausfüllfeldern)</a:t>
-            </a:r>
-          </a:p>
-        </p:txBody>
-      </p:sp>
-      <p:sp>
-        <p:nvSpPr>
-          <p:cNvPr id="11" name="Rectangle 10"/>
           <p:cNvSpPr/>
           <p:nvPr/>
         </p:nvSpPr>
@@ -6944,7 +6936,7 @@
       </p:sp>
       <p:sp>
         <p:nvSpPr>
-          <p:cNvPr id="12" name="TextBox 11"/>
+          <p:cNvPr id="10" name="TextBox 9"/>
           <p:cNvSpPr txBox="1"/>
           <p:nvPr/>
         </p:nvSpPr>
@@ -7010,7 +7002,7 @@
             <a:avLst/>
           </a:prstGeom>
           <a:solidFill>
-            <a:srgbClr val="EDEDF3"/>
+            <a:srgbClr val="FFFFFF"/>
           </a:solidFill>
           <a:ln>
             <a:noFill/>
@@ -7111,51 +7103,43 @@
                 </a:solidFill>
                 <a:latin typeface="JetBrains Mono"/>
               </a:rPr>
-              <a:t>M22  ·  INHALT</a:t>
-            </a:r>
-          </a:p>
-        </p:txBody>
-      </p:sp>
-      <p:sp>
-        <p:nvSpPr>
-          <p:cNvPr id="5" name="Rectangle 4"/>
-          <p:cNvSpPr/>
-          <p:nvPr/>
-        </p:nvSpPr>
-        <p:spPr>
-          <a:xfrm>
-            <a:off x="0" y="1234440"/>
-            <a:ext cx="12188952" cy="12700"/>
-          </a:xfrm>
-          <a:prstGeom prst="rect">
-            <a:avLst/>
-          </a:prstGeom>
-          <a:solidFill>
-            <a:srgbClr val="D8DFE4"/>
-          </a:solidFill>
-          <a:ln>
-            <a:noFill/>
-          </a:ln>
-        </p:spPr>
-        <p:style>
-          <a:lnRef idx="1">
-            <a:schemeClr val="accent1"/>
-          </a:lnRef>
-          <a:fillRef idx="3">
-            <a:schemeClr val="accent1"/>
-          </a:fillRef>
-          <a:effectRef idx="2">
-            <a:schemeClr val="accent1"/>
-          </a:effectRef>
-          <a:fontRef idx="minor">
-            <a:schemeClr val="lt1"/>
-          </a:fontRef>
-        </p:style>
-        <p:txBody>
-          <a:bodyPr rtlCol="0" anchor="ctr"/>
-          <a:lstStyle/>
-          <a:p>
-            <a:pPr algn="ctr"/>
+              <a:t>M22  ·  ÜBERSICHT</a:t>
+            </a:r>
+          </a:p>
+        </p:txBody>
+      </p:sp>
+      <p:sp>
+        <p:nvSpPr>
+          <p:cNvPr id="5" name="TextBox 4"/>
+          <p:cNvSpPr txBox="1"/>
+          <p:nvPr/>
+        </p:nvSpPr>
+        <p:spPr>
+          <a:xfrm>
+            <a:off x="685800" y="502920"/>
+            <a:ext cx="10817352" cy="594360"/>
+          </a:xfrm>
+          <a:prstGeom prst="rect">
+            <a:avLst/>
+          </a:prstGeom>
+          <a:noFill/>
+        </p:spPr>
+        <p:txBody>
+          <a:bodyPr wrap="square">
+            <a:spAutoFit/>
+          </a:bodyPr>
+          <a:lstStyle/>
+          <a:p>
+            <a:pPr algn="l"/>
+            <a:r>
+              <a:rPr sz="2000" b="1" i="0">
+                <a:solidFill>
+                  <a:srgbClr val="1F2C56"/>
+                </a:solidFill>
+                <a:latin typeface="Source Serif 4"/>
+              </a:rPr>
+              <a:t>Kennzahlen- und Formelkarte: Qualitative Kreditwürdigkeitsanalyse</a:t>
+            </a:r>
           </a:p>
         </p:txBody>
       </p:sp>
@@ -7167,8 +7151,8 @@
         </p:nvSpPr>
         <p:spPr>
           <a:xfrm>
-            <a:off x="685800" y="502920"/>
-            <a:ext cx="36576" cy="658368"/>
+            <a:off x="685800" y="1143000"/>
+            <a:ext cx="10817352" cy="25400"/>
           </a:xfrm>
           <a:prstGeom prst="rect">
             <a:avLst/>
@@ -7202,105 +7186,496 @@
           </a:p>
         </p:txBody>
       </p:sp>
-      <p:sp>
-        <p:nvSpPr>
-          <p:cNvPr id="7" name="TextBox 6"/>
-          <p:cNvSpPr txBox="1"/>
-          <p:nvPr/>
-        </p:nvSpPr>
-        <p:spPr>
-          <a:xfrm>
-            <a:off x="813816" y="502920"/>
-            <a:ext cx="10634472" cy="685800"/>
-          </a:xfrm>
-          <a:prstGeom prst="rect">
-            <a:avLst/>
-          </a:prstGeom>
-          <a:noFill/>
-        </p:spPr>
-        <p:txBody>
-          <a:bodyPr wrap="square">
-            <a:spAutoFit/>
-          </a:bodyPr>
-          <a:lstStyle/>
-          <a:p>
-            <a:pPr algn="l"/>
-            <a:r>
-              <a:rPr sz="2400" b="1" i="0">
-                <a:solidFill>
-                  <a:srgbClr val="1F2C56"/>
-                </a:solidFill>
-                <a:latin typeface="Source Serif 4"/>
-              </a:rPr>
-              <a:t>Kennzahlen- und Formelkarte: Qualitative Kreditwürdigkeitsanalyse</a:t>
-            </a:r>
-          </a:p>
-        </p:txBody>
-      </p:sp>
-      <p:sp>
-        <p:nvSpPr>
-          <p:cNvPr id="8" name="TextBox 7"/>
-          <p:cNvSpPr txBox="1"/>
-          <p:nvPr/>
-        </p:nvSpPr>
-        <p:spPr>
-          <a:xfrm>
-            <a:off x="685800" y="1417320"/>
-            <a:ext cx="10817352" cy="5029200"/>
-          </a:xfrm>
-          <a:prstGeom prst="rect">
-            <a:avLst/>
-          </a:prstGeom>
-          <a:noFill/>
-        </p:spPr>
-        <p:txBody>
-          <a:bodyPr wrap="square">
-            <a:spAutoFit/>
-          </a:bodyPr>
-          <a:lstStyle/>
-          <a:p>
-            <a:pPr>
-              <a:spcBef>
-                <a:spcPts val="1000"/>
-              </a:spcBef>
-              <a:spcAft>
-                <a:spcPts val="200"/>
-              </a:spcAft>
-            </a:pPr>
-            <a:r>
-              <a:rPr sz="800" b="1">
-                <a:solidFill>
-                  <a:srgbClr val="78808C"/>
-                </a:solidFill>
-                <a:latin typeface="JetBrains Mono"/>
-              </a:rPr>
-              <a:t>STRATEGISCHE RED-FLAG-CHECKLISTE</a:t>
-            </a:r>
-          </a:p>
-          <a:p>
-            <a:pPr>
-              <a:spcBef>
-                <a:spcPts val="1000"/>
-              </a:spcBef>
-              <a:spcAft>
-                <a:spcPts val="200"/>
-              </a:spcAft>
-            </a:pPr>
-            <a:r>
-              <a:rPr sz="800" b="1">
-                <a:solidFill>
-                  <a:srgbClr val="78808C"/>
-                </a:solidFill>
-                <a:latin typeface="JetBrains Mono"/>
-              </a:rPr>
-              <a:t>QUANTITATIVE UNTERSTÜTZUNGSKENNZAHLEN</a:t>
-            </a:r>
-          </a:p>
-        </p:txBody>
-      </p:sp>
-      <p:sp>
-        <p:nvSpPr>
-          <p:cNvPr id="9" name="Rectangle 8"/>
+      <p:graphicFrame>
+        <p:nvGraphicFramePr>
+          <p:cNvPr id="7" name="Table 6"/>
+          <p:cNvGraphicFramePr>
+            <a:graphicFrameLocks noGrp="1"/>
+          </p:cNvGraphicFramePr>
+          <p:nvPr/>
+        </p:nvGraphicFramePr>
+        <p:xfrm>
+          <a:off x="685800" y="1417320"/>
+          <a:ext cx="10817352" cy="3072384"/>
+        </p:xfrm>
+        <a:graphic>
+          <a:graphicData uri="http://schemas.openxmlformats.org/drawingml/2006/table">
+            <a:tbl>
+              <a:tblPr firstRow="1" bandRow="1">
+                <a:tableStyleId>{5C22544A-7EE6-4342-B048-85BDC9FD1C3A}</a:tableStyleId>
+              </a:tblPr>
+              <a:tblGrid>
+                <a:gridCol w="3605784"/>
+                <a:gridCol w="3605784"/>
+                <a:gridCol w="3605784"/>
+              </a:tblGrid>
+              <a:tr h="384048">
+                <a:tc>
+                  <a:txBody>
+                    <a:bodyPr/>
+                    <a:lstStyle/>
+                    <a:p>
+                      <a:r>
+                        <a:rPr sz="1100" b="1">
+                          <a:solidFill>
+                            <a:srgbClr val="FFFFFF"/>
+                          </a:solidFill>
+                          <a:latin typeface="Arial"/>
+                        </a:rPr>
+                        <a:t>Red Flag</a:t>
+                      </a:r>
+                    </a:p>
+                  </a:txBody>
+                  <a:tcPr>
+                    <a:solidFill>
+                      <a:srgbClr val="1F2C56"/>
+                    </a:solidFill>
+                  </a:tcPr>
+                </a:tc>
+                <a:tc>
+                  <a:txBody>
+                    <a:bodyPr/>
+                    <a:lstStyle/>
+                    <a:p>
+                      <a:r>
+                        <a:rPr sz="1100" b="1">
+                          <a:solidFill>
+                            <a:srgbClr val="FFFFFF"/>
+                          </a:solidFill>
+                          <a:latin typeface="Arial"/>
+                        </a:rPr>
+                        <a:t>Schwellenwert / Hinweis</a:t>
+                      </a:r>
+                    </a:p>
+                  </a:txBody>
+                  <a:tcPr>
+                    <a:solidFill>
+                      <a:srgbClr val="1F2C56"/>
+                    </a:solidFill>
+                  </a:tcPr>
+                </a:tc>
+                <a:tc>
+                  <a:txBody>
+                    <a:bodyPr/>
+                    <a:lstStyle/>
+                    <a:p>
+                      <a:r>
+                        <a:rPr sz="1100" b="1">
+                          <a:solidFill>
+                            <a:srgbClr val="FFFFFF"/>
+                          </a:solidFill>
+                          <a:latin typeface="Arial"/>
+                        </a:rPr>
+                        <a:t>Beurteilung Haller GmbH</a:t>
+                      </a:r>
+                    </a:p>
+                  </a:txBody>
+                  <a:tcPr>
+                    <a:solidFill>
+                      <a:srgbClr val="1F2C56"/>
+                    </a:solidFill>
+                  </a:tcPr>
+                </a:tc>
+              </a:tr>
+              <a:tr h="384048">
+                <a:tc>
+                  <a:txBody>
+                    <a:bodyPr/>
+                    <a:lstStyle/>
+                    <a:p>
+                      <a:r>
+                        <a:rPr sz="1050">
+                          <a:solidFill>
+                            <a:srgbClr val="3D5466"/>
+                          </a:solidFill>
+                          <a:latin typeface="Arial"/>
+                        </a:rPr>
+                        <a:t>Kundenklumpenrisiko</a:t>
+                      </a:r>
+                    </a:p>
+                  </a:txBody>
+                  <a:tcPr/>
+                </a:tc>
+                <a:tc>
+                  <a:txBody>
+                    <a:bodyPr/>
+                    <a:lstStyle/>
+                    <a:p>
+                      <a:r>
+                        <a:rPr sz="1050">
+                          <a:solidFill>
+                            <a:srgbClr val="3D5466"/>
+                          </a:solidFill>
+                          <a:latin typeface="Arial"/>
+                        </a:rPr>
+                        <a:t>Ein Kunde &gt; 30 % Umsatz</a:t>
+                      </a:r>
+                    </a:p>
+                  </a:txBody>
+                  <a:tcPr/>
+                </a:tc>
+                <a:tc>
+                  <a:txBody>
+                    <a:bodyPr/>
+                    <a:lstStyle/>
+                    <a:p>
+                      <a:r>
+                        <a:rPr sz="1050">
+                          <a:solidFill>
+                            <a:srgbClr val="3D5466"/>
+                          </a:solidFill>
+                          <a:latin typeface="Arial"/>
+                        </a:rPr>
+                        <a:t>! Ja — Kunde A: 60 %</a:t>
+                      </a:r>
+                    </a:p>
+                  </a:txBody>
+                  <a:tcPr/>
+                </a:tc>
+              </a:tr>
+              <a:tr h="384048">
+                <a:tc>
+                  <a:txBody>
+                    <a:bodyPr/>
+                    <a:lstStyle/>
+                    <a:p>
+                      <a:r>
+                        <a:rPr sz="1050">
+                          <a:solidFill>
+                            <a:srgbClr val="3D5466"/>
+                          </a:solidFill>
+                          <a:latin typeface="Arial"/>
+                        </a:rPr>
+                        <a:t>Lieferantenklumpenrisiko</a:t>
+                      </a:r>
+                    </a:p>
+                  </a:txBody>
+                  <a:tcPr/>
+                </a:tc>
+                <a:tc>
+                  <a:txBody>
+                    <a:bodyPr/>
+                    <a:lstStyle/>
+                    <a:p>
+                      <a:r>
+                        <a:rPr sz="1050">
+                          <a:solidFill>
+                            <a:srgbClr val="3D5466"/>
+                          </a:solidFill>
+                          <a:latin typeface="Arial"/>
+                        </a:rPr>
+                        <a:t>Ein Lieferant &gt; 50 % Beschaffung</a:t>
+                      </a:r>
+                    </a:p>
+                  </a:txBody>
+                  <a:tcPr/>
+                </a:tc>
+                <a:tc>
+                  <a:txBody>
+                    <a:bodyPr/>
+                    <a:lstStyle/>
+                    <a:p>
+                      <a:r>
+                        <a:rPr sz="1050">
+                          <a:solidFill>
+                            <a:srgbClr val="3D5466"/>
+                          </a:solidFill>
+                          <a:latin typeface="Arial"/>
+                        </a:rPr>
+                        <a:t>Prüfen</a:t>
+                      </a:r>
+                    </a:p>
+                  </a:txBody>
+                  <a:tcPr/>
+                </a:tc>
+              </a:tr>
+              <a:tr h="384048">
+                <a:tc>
+                  <a:txBody>
+                    <a:bodyPr/>
+                    <a:lstStyle/>
+                    <a:p>
+                      <a:r>
+                        <a:rPr sz="1050">
+                          <a:solidFill>
+                            <a:srgbClr val="3D5466"/>
+                          </a:solidFill>
+                          <a:latin typeface="Arial"/>
+                        </a:rPr>
+                        <a:t>Nachfolgelücke GF</a:t>
+                      </a:r>
+                    </a:p>
+                  </a:txBody>
+                  <a:tcPr/>
+                </a:tc>
+                <a:tc>
+                  <a:txBody>
+                    <a:bodyPr/>
+                    <a:lstStyle/>
+                    <a:p>
+                      <a:r>
+                        <a:rPr sz="1050">
+                          <a:solidFill>
+                            <a:srgbClr val="3D5466"/>
+                          </a:solidFill>
+                          <a:latin typeface="Arial"/>
+                        </a:rPr>
+                        <a:t>GF &gt; 60 Jahre, kein Nachfolger</a:t>
+                      </a:r>
+                    </a:p>
+                  </a:txBody>
+                  <a:tcPr/>
+                </a:tc>
+                <a:tc>
+                  <a:txBody>
+                    <a:bodyPr/>
+                    <a:lstStyle/>
+                    <a:p>
+                      <a:r>
+                        <a:rPr sz="1050">
+                          <a:solidFill>
+                            <a:srgbClr val="3D5466"/>
+                          </a:solidFill>
+                          <a:latin typeface="Arial"/>
+                        </a:rPr>
+                        <a:t>! Ja</a:t>
+                      </a:r>
+                    </a:p>
+                  </a:txBody>
+                  <a:tcPr/>
+                </a:tc>
+              </a:tr>
+              <a:tr h="384048">
+                <a:tc>
+                  <a:txBody>
+                    <a:bodyPr/>
+                    <a:lstStyle/>
+                    <a:p>
+                      <a:r>
+                        <a:rPr sz="1050">
+                          <a:solidFill>
+                            <a:srgbClr val="3D5466"/>
+                          </a:solidFill>
+                          <a:latin typeface="Arial"/>
+                        </a:rPr>
+                        <a:t>Maschinenalter / Investitionsstau</a:t>
+                      </a:r>
+                    </a:p>
+                  </a:txBody>
+                  <a:tcPr/>
+                </a:tc>
+                <a:tc>
+                  <a:txBody>
+                    <a:bodyPr/>
+                    <a:lstStyle/>
+                    <a:p>
+                      <a:r>
+                        <a:rPr sz="1050">
+                          <a:solidFill>
+                            <a:srgbClr val="3D5466"/>
+                          </a:solidFill>
+                          <a:latin typeface="Arial"/>
+                        </a:rPr>
+                        <a:t>Ø &gt; 8 Jahre ohne Erneuerungsinvestition</a:t>
+                      </a:r>
+                    </a:p>
+                  </a:txBody>
+                  <a:tcPr/>
+                </a:tc>
+                <a:tc>
+                  <a:txBody>
+                    <a:bodyPr/>
+                    <a:lstStyle/>
+                    <a:p>
+                      <a:r>
+                        <a:rPr sz="1050">
+                          <a:solidFill>
+                            <a:srgbClr val="3D5466"/>
+                          </a:solidFill>
+                          <a:latin typeface="Arial"/>
+                        </a:rPr>
+                        <a:t>Ja (Ø 9 Jahre)</a:t>
+                      </a:r>
+                    </a:p>
+                  </a:txBody>
+                  <a:tcPr/>
+                </a:tc>
+              </a:tr>
+              <a:tr h="384048">
+                <a:tc>
+                  <a:txBody>
+                    <a:bodyPr/>
+                    <a:lstStyle/>
+                    <a:p>
+                      <a:r>
+                        <a:rPr sz="1050">
+                          <a:solidFill>
+                            <a:srgbClr val="3D5466"/>
+                          </a:solidFill>
+                          <a:latin typeface="Arial"/>
+                        </a:rPr>
+                        <a:t>Marktkonzentration</a:t>
+                      </a:r>
+                    </a:p>
+                  </a:txBody>
+                  <a:tcPr/>
+                </a:tc>
+                <a:tc>
+                  <a:txBody>
+                    <a:bodyPr/>
+                    <a:lstStyle/>
+                    <a:p>
+                      <a:r>
+                        <a:rPr sz="1050">
+                          <a:solidFill>
+                            <a:srgbClr val="3D5466"/>
+                          </a:solidFill>
+                          <a:latin typeface="Arial"/>
+                        </a:rPr>
+                        <a:t>Branche mit &lt; 5 relevanten Abnehmern</a:t>
+                      </a:r>
+                    </a:p>
+                  </a:txBody>
+                  <a:tcPr/>
+                </a:tc>
+                <a:tc>
+                  <a:txBody>
+                    <a:bodyPr/>
+                    <a:lstStyle/>
+                    <a:p>
+                      <a:r>
+                        <a:rPr sz="1050">
+                          <a:solidFill>
+                            <a:srgbClr val="3D5466"/>
+                          </a:solidFill>
+                          <a:latin typeface="Arial"/>
+                        </a:rPr>
+                        <a:t>Prüfen</a:t>
+                      </a:r>
+                    </a:p>
+                  </a:txBody>
+                  <a:tcPr/>
+                </a:tc>
+              </a:tr>
+              <a:tr h="384048">
+                <a:tc>
+                  <a:txBody>
+                    <a:bodyPr/>
+                    <a:lstStyle/>
+                    <a:p>
+                      <a:r>
+                        <a:rPr sz="1050">
+                          <a:solidFill>
+                            <a:srgbClr val="3D5466"/>
+                          </a:solidFill>
+                          <a:latin typeface="Arial"/>
+                        </a:rPr>
+                        <a:t>Exportabhängigkeit</a:t>
+                      </a:r>
+                    </a:p>
+                  </a:txBody>
+                  <a:tcPr/>
+                </a:tc>
+                <a:tc>
+                  <a:txBody>
+                    <a:bodyPr/>
+                    <a:lstStyle/>
+                    <a:p>
+                      <a:r>
+                        <a:rPr sz="1050">
+                          <a:solidFill>
+                            <a:srgbClr val="3D5466"/>
+                          </a:solidFill>
+                          <a:latin typeface="Arial"/>
+                        </a:rPr>
+                        <a:t>0 % Export in preissensitiver Branche</a:t>
+                      </a:r>
+                    </a:p>
+                  </a:txBody>
+                  <a:tcPr/>
+                </a:tc>
+                <a:tc>
+                  <a:txBody>
+                    <a:bodyPr/>
+                    <a:lstStyle/>
+                    <a:p>
+                      <a:r>
+                        <a:rPr sz="1050">
+                          <a:solidFill>
+                            <a:srgbClr val="3D5466"/>
+                          </a:solidFill>
+                          <a:latin typeface="Arial"/>
+                        </a:rPr>
+                        <a:t>Nein — umgekehrt: kein Export als Risiko</a:t>
+                      </a:r>
+                    </a:p>
+                  </a:txBody>
+                  <a:tcPr/>
+                </a:tc>
+              </a:tr>
+              <a:tr h="384048">
+                <a:tc>
+                  <a:txBody>
+                    <a:bodyPr/>
+                    <a:lstStyle/>
+                    <a:p>
+                      <a:r>
+                        <a:rPr sz="1050">
+                          <a:solidFill>
+                            <a:srgbClr val="3D5466"/>
+                          </a:solidFill>
+                          <a:latin typeface="Arial"/>
+                        </a:rPr>
+                        <a:t>Schlüsselpersonenrisiken</a:t>
+                      </a:r>
+                    </a:p>
+                  </a:txBody>
+                  <a:tcPr/>
+                </a:tc>
+                <a:tc>
+                  <a:txBody>
+                    <a:bodyPr/>
+                    <a:lstStyle/>
+                    <a:p>
+                      <a:r>
+                        <a:rPr sz="1050">
+                          <a:solidFill>
+                            <a:srgbClr val="3D5466"/>
+                          </a:solidFill>
+                          <a:latin typeface="Arial"/>
+                        </a:rPr>
+                        <a:t>Unverzichtbare Einzelperson ohne Vertretung</a:t>
+                      </a:r>
+                    </a:p>
+                  </a:txBody>
+                  <a:tcPr/>
+                </a:tc>
+                <a:tc>
+                  <a:txBody>
+                    <a:bodyPr/>
+                    <a:lstStyle/>
+                    <a:p>
+                      <a:r>
+                        <a:rPr sz="1050">
+                          <a:solidFill>
+                            <a:srgbClr val="3D5466"/>
+                          </a:solidFill>
+                          <a:latin typeface="Arial"/>
+                        </a:rPr>
+                        <a:t>! Ja (GF Haller)</a:t>
+                      </a:r>
+                    </a:p>
+                  </a:txBody>
+                  <a:tcPr/>
+                </a:tc>
+              </a:tr>
+            </a:tbl>
+          </a:graphicData>
+        </a:graphic>
+      </p:graphicFrame>
+      <p:sp>
+        <p:nvSpPr>
+          <p:cNvPr id="8" name="Rectangle 7"/>
           <p:cNvSpPr/>
           <p:nvPr/>
         </p:nvSpPr>
@@ -7343,7 +7718,7 @@
       </p:sp>
       <p:sp>
         <p:nvSpPr>
-          <p:cNvPr id="10" name="TextBox 9"/>
+          <p:cNvPr id="9" name="TextBox 8"/>
           <p:cNvSpPr txBox="1"/>
           <p:nvPr/>
         </p:nvSpPr>
@@ -7372,6 +7747,41 @@
                 <a:latin typeface="JetBrains Mono"/>
               </a:rPr>
               <a:t>Benedikt Zoller Coaching  ·  FKB Campus  ·  M22</a:t>
+            </a:r>
+          </a:p>
+        </p:txBody>
+      </p:sp>
+      <p:sp>
+        <p:nvSpPr>
+          <p:cNvPr id="10" name="TextBox 9"/>
+          <p:cNvSpPr txBox="1"/>
+          <p:nvPr/>
+        </p:nvSpPr>
+        <p:spPr>
+          <a:xfrm>
+            <a:off x="7176211" y="6583680"/>
+            <a:ext cx="4326940" cy="256032"/>
+          </a:xfrm>
+          <a:prstGeom prst="rect">
+            <a:avLst/>
+          </a:prstGeom>
+          <a:noFill/>
+        </p:spPr>
+        <p:txBody>
+          <a:bodyPr wrap="none">
+            <a:spAutoFit/>
+          </a:bodyPr>
+          <a:lstStyle/>
+          <a:p>
+            <a:pPr algn="r"/>
+            <a:r>
+              <a:rPr sz="700">
+                <a:solidFill>
+                  <a:srgbClr val="A0B4D2"/>
+                </a:solidFill>
+                <a:latin typeface="JetBrains Mono"/>
+              </a:rPr>
+              <a:t>Übersicht</a:t>
             </a:r>
           </a:p>
         </p:txBody>
@@ -7510,7 +7920,7 @@
                 </a:solidFill>
                 <a:latin typeface="JetBrains Mono"/>
               </a:rPr>
-              <a:t>M22  ·  SCHAUBILD</a:t>
+              <a:t>M22  ·  ÜBERSICHT</a:t>
             </a:r>
           </a:p>
         </p:txBody>
@@ -7545,7 +7955,7 @@
                 </a:solidFill>
                 <a:latin typeface="Source Serif 4"/>
               </a:rPr>
-              <a:t>Handlungsempfehlung</a:t>
+              <a:t>Kennzahlen- und Formelkarte: Qualitative Kreditwürdigkeitsanalyse</a:t>
             </a:r>
           </a:p>
         </p:txBody>
@@ -7593,30 +8003,420 @@
           </a:p>
         </p:txBody>
       </p:sp>
-      <p:pic>
-        <p:nvPicPr>
-          <p:cNvPr id="7" name="Picture 6" descr="image.png"/>
-          <p:cNvPicPr>
-            <a:picLocks noChangeAspect="1"/>
-          </p:cNvPicPr>
-          <p:nvPr/>
-        </p:nvPicPr>
-        <p:blipFill>
-          <a:blip r:embed="rId2"/>
-          <a:stretch>
-            <a:fillRect/>
-          </a:stretch>
-        </p:blipFill>
-        <p:spPr>
-          <a:xfrm>
-            <a:off x="2303489" y="1325880"/>
-            <a:ext cx="7581973" cy="4937760"/>
-          </a:xfrm>
-          <a:prstGeom prst="rect">
-            <a:avLst/>
-          </a:prstGeom>
-        </p:spPr>
-      </p:pic>
+      <p:graphicFrame>
+        <p:nvGraphicFramePr>
+          <p:cNvPr id="7" name="Table 6"/>
+          <p:cNvGraphicFramePr>
+            <a:graphicFrameLocks noGrp="1"/>
+          </p:cNvGraphicFramePr>
+          <p:nvPr/>
+        </p:nvGraphicFramePr>
+        <p:xfrm>
+          <a:off x="685800" y="1417320"/>
+          <a:ext cx="10817352" cy="1920240"/>
+        </p:xfrm>
+        <a:graphic>
+          <a:graphicData uri="http://schemas.openxmlformats.org/drawingml/2006/table">
+            <a:tbl>
+              <a:tblPr firstRow="1" bandRow="1">
+                <a:tableStyleId>{5C22544A-7EE6-4342-B048-85BDC9FD1C3A}</a:tableStyleId>
+              </a:tblPr>
+              <a:tblGrid>
+                <a:gridCol w="2704338"/>
+                <a:gridCol w="2704338"/>
+                <a:gridCol w="2704338"/>
+                <a:gridCol w="2704338"/>
+              </a:tblGrid>
+              <a:tr h="384048">
+                <a:tc>
+                  <a:txBody>
+                    <a:bodyPr/>
+                    <a:lstStyle/>
+                    <a:p>
+                      <a:r>
+                        <a:rPr sz="1100" b="1">
+                          <a:solidFill>
+                            <a:srgbClr val="FFFFFF"/>
+                          </a:solidFill>
+                          <a:latin typeface="Arial"/>
+                        </a:rPr>
+                        <a:t>Kennzahl</a:t>
+                      </a:r>
+                    </a:p>
+                  </a:txBody>
+                  <a:tcPr>
+                    <a:solidFill>
+                      <a:srgbClr val="1F2C56"/>
+                    </a:solidFill>
+                  </a:tcPr>
+                </a:tc>
+                <a:tc>
+                  <a:txBody>
+                    <a:bodyPr/>
+                    <a:lstStyle/>
+                    <a:p>
+                      <a:r>
+                        <a:rPr sz="1100" b="1">
+                          <a:solidFill>
+                            <a:srgbClr val="FFFFFF"/>
+                          </a:solidFill>
+                          <a:latin typeface="Arial"/>
+                        </a:rPr>
+                        <a:t>Formel</a:t>
+                      </a:r>
+                    </a:p>
+                  </a:txBody>
+                  <a:tcPr>
+                    <a:solidFill>
+                      <a:srgbClr val="1F2C56"/>
+                    </a:solidFill>
+                  </a:tcPr>
+                </a:tc>
+                <a:tc>
+                  <a:txBody>
+                    <a:bodyPr/>
+                    <a:lstStyle/>
+                    <a:p>
+                      <a:r>
+                        <a:rPr sz="1100" b="1">
+                          <a:solidFill>
+                            <a:srgbClr val="FFFFFF"/>
+                          </a:solidFill>
+                          <a:latin typeface="Arial"/>
+                        </a:rPr>
+                        <a:t>Orientierungswert</a:t>
+                      </a:r>
+                    </a:p>
+                  </a:txBody>
+                  <a:tcPr>
+                    <a:solidFill>
+                      <a:srgbClr val="1F2C56"/>
+                    </a:solidFill>
+                  </a:tcPr>
+                </a:tc>
+                <a:tc>
+                  <a:txBody>
+                    <a:bodyPr/>
+                    <a:lstStyle/>
+                    <a:p>
+                      <a:r>
+                        <a:rPr sz="1100" b="1">
+                          <a:solidFill>
+                            <a:srgbClr val="FFFFFF"/>
+                          </a:solidFill>
+                          <a:latin typeface="Arial"/>
+                        </a:rPr>
+                        <a:t>Haller GmbH 2024</a:t>
+                      </a:r>
+                    </a:p>
+                  </a:txBody>
+                  <a:tcPr>
+                    <a:solidFill>
+                      <a:srgbClr val="1F2C56"/>
+                    </a:solidFill>
+                  </a:tcPr>
+                </a:tc>
+              </a:tr>
+              <a:tr h="384048">
+                <a:tc>
+                  <a:txBody>
+                    <a:bodyPr/>
+                    <a:lstStyle/>
+                    <a:p>
+                      <a:r>
+                        <a:rPr sz="1050">
+                          <a:solidFill>
+                            <a:srgbClr val="3D5466"/>
+                          </a:solidFill>
+                          <a:latin typeface="Arial"/>
+                        </a:rPr>
+                        <a:t>DSCR</a:t>
+                      </a:r>
+                    </a:p>
+                  </a:txBody>
+                  <a:tcPr/>
+                </a:tc>
+                <a:tc>
+                  <a:txBody>
+                    <a:bodyPr/>
+                    <a:lstStyle/>
+                    <a:p>
+                      <a:r>
+                        <a:rPr sz="1050">
+                          <a:solidFill>
+                            <a:srgbClr val="3D5466"/>
+                          </a:solidFill>
+                          <a:latin typeface="Arial"/>
+                        </a:rPr>
+                        <a:t>EBITDA / Schuldendienst</a:t>
+                      </a:r>
+                    </a:p>
+                  </a:txBody>
+                  <a:tcPr/>
+                </a:tc>
+                <a:tc>
+                  <a:txBody>
+                    <a:bodyPr/>
+                    <a:lstStyle/>
+                    <a:p>
+                      <a:r>
+                        <a:rPr sz="1050">
+                          <a:solidFill>
+                            <a:srgbClr val="3D5466"/>
+                          </a:solidFill>
+                          <a:latin typeface="Arial"/>
+                        </a:rPr>
+                        <a:t>&gt; 1,25</a:t>
+                      </a:r>
+                    </a:p>
+                  </a:txBody>
+                  <a:tcPr/>
+                </a:tc>
+                <a:tc>
+                  <a:txBody>
+                    <a:bodyPr/>
+                    <a:lstStyle/>
+                    <a:p>
+                      <a:r>
+                        <a:rPr sz="1050">
+                          <a:solidFill>
+                            <a:srgbClr val="3D5466"/>
+                          </a:solidFill>
+                          <a:latin typeface="Arial"/>
+                        </a:rPr>
+                        <a:t>1,42 — stabil</a:t>
+                      </a:r>
+                    </a:p>
+                  </a:txBody>
+                  <a:tcPr/>
+                </a:tc>
+              </a:tr>
+              <a:tr h="384048">
+                <a:tc>
+                  <a:txBody>
+                    <a:bodyPr/>
+                    <a:lstStyle/>
+                    <a:p>
+                      <a:r>
+                        <a:rPr sz="1050">
+                          <a:solidFill>
+                            <a:srgbClr val="3D5466"/>
+                          </a:solidFill>
+                          <a:latin typeface="Arial"/>
+                        </a:rPr>
+                        <a:t>Zinsdeckungsgrad</a:t>
+                      </a:r>
+                    </a:p>
+                  </a:txBody>
+                  <a:tcPr/>
+                </a:tc>
+                <a:tc>
+                  <a:txBody>
+                    <a:bodyPr/>
+                    <a:lstStyle/>
+                    <a:p>
+                      <a:r>
+                        <a:rPr sz="1050">
+                          <a:solidFill>
+                            <a:srgbClr val="3D5466"/>
+                          </a:solidFill>
+                          <a:latin typeface="Arial"/>
+                        </a:rPr>
+                        <a:t>EBIT / Zinsaufwand</a:t>
+                      </a:r>
+                    </a:p>
+                  </a:txBody>
+                  <a:tcPr/>
+                </a:tc>
+                <a:tc>
+                  <a:txBody>
+                    <a:bodyPr/>
+                    <a:lstStyle/>
+                    <a:p>
+                      <a:r>
+                        <a:rPr sz="1050">
+                          <a:solidFill>
+                            <a:srgbClr val="3D5466"/>
+                          </a:solidFill>
+                          <a:latin typeface="Arial"/>
+                        </a:rPr>
+                        <a:t>&gt; 3,0</a:t>
+                      </a:r>
+                    </a:p>
+                  </a:txBody>
+                  <a:tcPr/>
+                </a:tc>
+                <a:tc>
+                  <a:txBody>
+                    <a:bodyPr/>
+                    <a:lstStyle/>
+                    <a:p>
+                      <a:r>
+                        <a:rPr sz="1050">
+                          <a:solidFill>
+                            <a:srgbClr val="3D5466"/>
+                          </a:solidFill>
+                          <a:latin typeface="Arial"/>
+                        </a:rPr>
+                        <a:t>3,8 — stabil</a:t>
+                      </a:r>
+                    </a:p>
+                  </a:txBody>
+                  <a:tcPr/>
+                </a:tc>
+              </a:tr>
+              <a:tr h="384048">
+                <a:tc>
+                  <a:txBody>
+                    <a:bodyPr/>
+                    <a:lstStyle/>
+                    <a:p>
+                      <a:r>
+                        <a:rPr sz="1050">
+                          <a:solidFill>
+                            <a:srgbClr val="3D5466"/>
+                          </a:solidFill>
+                          <a:latin typeface="Arial"/>
+                        </a:rPr>
+                        <a:t>Eigenkapitalquote</a:t>
+                      </a:r>
+                    </a:p>
+                  </a:txBody>
+                  <a:tcPr/>
+                </a:tc>
+                <a:tc>
+                  <a:txBody>
+                    <a:bodyPr/>
+                    <a:lstStyle/>
+                    <a:p>
+                      <a:r>
+                        <a:rPr sz="1050">
+                          <a:solidFill>
+                            <a:srgbClr val="3D5466"/>
+                          </a:solidFill>
+                          <a:latin typeface="Arial"/>
+                        </a:rPr>
+                        <a:t>EK / Bilanzsumme</a:t>
+                      </a:r>
+                    </a:p>
+                  </a:txBody>
+                  <a:tcPr/>
+                </a:tc>
+                <a:tc>
+                  <a:txBody>
+                    <a:bodyPr/>
+                    <a:lstStyle/>
+                    <a:p>
+                      <a:r>
+                        <a:rPr sz="1050">
+                          <a:solidFill>
+                            <a:srgbClr val="3D5466"/>
+                          </a:solidFill>
+                          <a:latin typeface="Arial"/>
+                        </a:rPr>
+                        <a:t>&gt; 20 %</a:t>
+                      </a:r>
+                    </a:p>
+                  </a:txBody>
+                  <a:tcPr/>
+                </a:tc>
+                <a:tc>
+                  <a:txBody>
+                    <a:bodyPr/>
+                    <a:lstStyle/>
+                    <a:p>
+                      <a:r>
+                        <a:rPr sz="1050">
+                          <a:solidFill>
+                            <a:srgbClr val="3D5466"/>
+                          </a:solidFill>
+                          <a:latin typeface="Arial"/>
+                        </a:rPr>
+                        <a:t>31,4 % — gut</a:t>
+                      </a:r>
+                    </a:p>
+                  </a:txBody>
+                  <a:tcPr/>
+                </a:tc>
+              </a:tr>
+              <a:tr h="384048">
+                <a:tc>
+                  <a:txBody>
+                    <a:bodyPr/>
+                    <a:lstStyle/>
+                    <a:p>
+                      <a:r>
+                        <a:rPr sz="1050">
+                          <a:solidFill>
+                            <a:srgbClr val="3D5466"/>
+                          </a:solidFill>
+                          <a:latin typeface="Arial"/>
+                        </a:rPr>
+                        <a:t>EBIT-Marge</a:t>
+                      </a:r>
+                    </a:p>
+                  </a:txBody>
+                  <a:tcPr/>
+                </a:tc>
+                <a:tc>
+                  <a:txBody>
+                    <a:bodyPr/>
+                    <a:lstStyle/>
+                    <a:p>
+                      <a:r>
+                        <a:rPr sz="1050">
+                          <a:solidFill>
+                            <a:srgbClr val="3D5466"/>
+                          </a:solidFill>
+                          <a:latin typeface="Arial"/>
+                        </a:rPr>
+                        <a:t>EBIT / Umsatz</a:t>
+                      </a:r>
+                    </a:p>
+                  </a:txBody>
+                  <a:tcPr/>
+                </a:tc>
+                <a:tc>
+                  <a:txBody>
+                    <a:bodyPr/>
+                    <a:lstStyle/>
+                    <a:p>
+                      <a:r>
+                        <a:rPr sz="1050">
+                          <a:solidFill>
+                            <a:srgbClr val="3D5466"/>
+                          </a:solidFill>
+                          <a:latin typeface="Arial"/>
+                        </a:rPr>
+                        <a:t>Branche: 5,8 %</a:t>
+                      </a:r>
+                    </a:p>
+                  </a:txBody>
+                  <a:tcPr/>
+                </a:tc>
+                <a:tc>
+                  <a:txBody>
+                    <a:bodyPr/>
+                    <a:lstStyle/>
+                    <a:p>
+                      <a:r>
+                        <a:rPr sz="1050">
+                          <a:solidFill>
+                            <a:srgbClr val="3D5466"/>
+                          </a:solidFill>
+                          <a:latin typeface="Arial"/>
+                        </a:rPr>
+                        <a:t>6,7 % — über Branche</a:t>
+                      </a:r>
+                    </a:p>
+                  </a:txBody>
+                  <a:tcPr/>
+                </a:tc>
+              </a:tr>
+            </a:tbl>
+          </a:graphicData>
+        </a:graphic>
+      </p:graphicFrame>
       <p:sp>
         <p:nvSpPr>
           <p:cNvPr id="8" name="Rectangle 7"/>
@@ -7725,7 +8525,7 @@
                 </a:solidFill>
                 <a:latin typeface="JetBrains Mono"/>
               </a:rPr>
-              <a:t>Schaubild</a:t>
+              <a:t>Übersicht</a:t>
             </a:r>
           </a:p>
         </p:txBody>
@@ -7763,6 +8563,360 @@
             <a:avLst/>
           </a:prstGeom>
           <a:solidFill>
+            <a:srgbClr val="FFFFFF"/>
+          </a:solidFill>
+          <a:ln>
+            <a:noFill/>
+          </a:ln>
+        </p:spPr>
+        <p:style>
+          <a:lnRef idx="1">
+            <a:schemeClr val="accent1"/>
+          </a:lnRef>
+          <a:fillRef idx="3">
+            <a:schemeClr val="accent1"/>
+          </a:fillRef>
+          <a:effectRef idx="2">
+            <a:schemeClr val="accent1"/>
+          </a:effectRef>
+          <a:fontRef idx="minor">
+            <a:schemeClr val="lt1"/>
+          </a:fontRef>
+        </p:style>
+        <p:txBody>
+          <a:bodyPr rtlCol="0" anchor="ctr"/>
+          <a:lstStyle/>
+          <a:p>
+            <a:pPr algn="ctr"/>
+          </a:p>
+        </p:txBody>
+      </p:sp>
+      <p:sp>
+        <p:nvSpPr>
+          <p:cNvPr id="3" name="Rectangle 2"/>
+          <p:cNvSpPr/>
+          <p:nvPr/>
+        </p:nvSpPr>
+        <p:spPr>
+          <a:xfrm>
+            <a:off x="0" y="0"/>
+            <a:ext cx="12188952" cy="50292"/>
+          </a:xfrm>
+          <a:prstGeom prst="rect">
+            <a:avLst/>
+          </a:prstGeom>
+          <a:solidFill>
+            <a:srgbClr val="1F2C56"/>
+          </a:solidFill>
+          <a:ln>
+            <a:noFill/>
+          </a:ln>
+        </p:spPr>
+        <p:style>
+          <a:lnRef idx="1">
+            <a:schemeClr val="accent1"/>
+          </a:lnRef>
+          <a:fillRef idx="3">
+            <a:schemeClr val="accent1"/>
+          </a:fillRef>
+          <a:effectRef idx="2">
+            <a:schemeClr val="accent1"/>
+          </a:effectRef>
+          <a:fontRef idx="minor">
+            <a:schemeClr val="lt1"/>
+          </a:fontRef>
+        </p:style>
+        <p:txBody>
+          <a:bodyPr rtlCol="0" anchor="ctr"/>
+          <a:lstStyle/>
+          <a:p>
+            <a:pPr algn="ctr"/>
+          </a:p>
+        </p:txBody>
+      </p:sp>
+      <p:sp>
+        <p:nvSpPr>
+          <p:cNvPr id="4" name="TextBox 3"/>
+          <p:cNvSpPr txBox="1"/>
+          <p:nvPr/>
+        </p:nvSpPr>
+        <p:spPr>
+          <a:xfrm>
+            <a:off x="685800" y="109728"/>
+            <a:ext cx="10817352" cy="228600"/>
+          </a:xfrm>
+          <a:prstGeom prst="rect">
+            <a:avLst/>
+          </a:prstGeom>
+          <a:noFill/>
+        </p:spPr>
+        <p:txBody>
+          <a:bodyPr wrap="none">
+            <a:spAutoFit/>
+          </a:bodyPr>
+          <a:lstStyle/>
+          <a:p>
+            <a:pPr algn="l"/>
+            <a:r>
+              <a:rPr sz="750">
+                <a:solidFill>
+                  <a:srgbClr val="78808C"/>
+                </a:solidFill>
+                <a:latin typeface="JetBrains Mono"/>
+              </a:rPr>
+              <a:t>M22  ·  SCHAUBILD</a:t>
+            </a:r>
+          </a:p>
+        </p:txBody>
+      </p:sp>
+      <p:sp>
+        <p:nvSpPr>
+          <p:cNvPr id="5" name="TextBox 4"/>
+          <p:cNvSpPr txBox="1"/>
+          <p:nvPr/>
+        </p:nvSpPr>
+        <p:spPr>
+          <a:xfrm>
+            <a:off x="685800" y="502920"/>
+            <a:ext cx="10817352" cy="594360"/>
+          </a:xfrm>
+          <a:prstGeom prst="rect">
+            <a:avLst/>
+          </a:prstGeom>
+          <a:noFill/>
+        </p:spPr>
+        <p:txBody>
+          <a:bodyPr wrap="square">
+            <a:spAutoFit/>
+          </a:bodyPr>
+          <a:lstStyle/>
+          <a:p>
+            <a:pPr algn="l"/>
+            <a:r>
+              <a:rPr sz="2000" b="1" i="0">
+                <a:solidFill>
+                  <a:srgbClr val="1F2C56"/>
+                </a:solidFill>
+                <a:latin typeface="Source Serif 4"/>
+              </a:rPr>
+              <a:t>Handlungsempfehlung</a:t>
+            </a:r>
+          </a:p>
+        </p:txBody>
+      </p:sp>
+      <p:sp>
+        <p:nvSpPr>
+          <p:cNvPr id="6" name="Rectangle 5"/>
+          <p:cNvSpPr/>
+          <p:nvPr/>
+        </p:nvSpPr>
+        <p:spPr>
+          <a:xfrm>
+            <a:off x="685800" y="1143000"/>
+            <a:ext cx="10817352" cy="25400"/>
+          </a:xfrm>
+          <a:prstGeom prst="rect">
+            <a:avLst/>
+          </a:prstGeom>
+          <a:solidFill>
+            <a:srgbClr val="D9C089"/>
+          </a:solidFill>
+          <a:ln>
+            <a:noFill/>
+          </a:ln>
+        </p:spPr>
+        <p:style>
+          <a:lnRef idx="1">
+            <a:schemeClr val="accent1"/>
+          </a:lnRef>
+          <a:fillRef idx="3">
+            <a:schemeClr val="accent1"/>
+          </a:fillRef>
+          <a:effectRef idx="2">
+            <a:schemeClr val="accent1"/>
+          </a:effectRef>
+          <a:fontRef idx="minor">
+            <a:schemeClr val="lt1"/>
+          </a:fontRef>
+        </p:style>
+        <p:txBody>
+          <a:bodyPr rtlCol="0" anchor="ctr"/>
+          <a:lstStyle/>
+          <a:p>
+            <a:pPr algn="ctr"/>
+          </a:p>
+        </p:txBody>
+      </p:sp>
+      <p:pic>
+        <p:nvPicPr>
+          <p:cNvPr id="7" name="Picture 6" descr="image.png"/>
+          <p:cNvPicPr>
+            <a:picLocks noChangeAspect="1"/>
+          </p:cNvPicPr>
+          <p:nvPr/>
+        </p:nvPicPr>
+        <p:blipFill>
+          <a:blip r:embed="rId2"/>
+          <a:stretch>
+            <a:fillRect/>
+          </a:stretch>
+        </p:blipFill>
+        <p:spPr>
+          <a:xfrm>
+            <a:off x="2303489" y="1325880"/>
+            <a:ext cx="7581973" cy="4937760"/>
+          </a:xfrm>
+          <a:prstGeom prst="rect">
+            <a:avLst/>
+          </a:prstGeom>
+        </p:spPr>
+      </p:pic>
+      <p:sp>
+        <p:nvSpPr>
+          <p:cNvPr id="8" name="Rectangle 7"/>
+          <p:cNvSpPr/>
+          <p:nvPr/>
+        </p:nvSpPr>
+        <p:spPr>
+          <a:xfrm>
+            <a:off x="0" y="6510528"/>
+            <a:ext cx="12188952" cy="347472"/>
+          </a:xfrm>
+          <a:prstGeom prst="rect">
+            <a:avLst/>
+          </a:prstGeom>
+          <a:solidFill>
+            <a:srgbClr val="0A1937"/>
+          </a:solidFill>
+          <a:ln>
+            <a:noFill/>
+          </a:ln>
+        </p:spPr>
+        <p:style>
+          <a:lnRef idx="1">
+            <a:schemeClr val="accent1"/>
+          </a:lnRef>
+          <a:fillRef idx="3">
+            <a:schemeClr val="accent1"/>
+          </a:fillRef>
+          <a:effectRef idx="2">
+            <a:schemeClr val="accent1"/>
+          </a:effectRef>
+          <a:fontRef idx="minor">
+            <a:schemeClr val="lt1"/>
+          </a:fontRef>
+        </p:style>
+        <p:txBody>
+          <a:bodyPr rtlCol="0" anchor="ctr"/>
+          <a:lstStyle/>
+          <a:p>
+            <a:pPr algn="ctr"/>
+          </a:p>
+        </p:txBody>
+      </p:sp>
+      <p:sp>
+        <p:nvSpPr>
+          <p:cNvPr id="9" name="TextBox 8"/>
+          <p:cNvSpPr txBox="1"/>
+          <p:nvPr/>
+        </p:nvSpPr>
+        <p:spPr>
+          <a:xfrm>
+            <a:off x="685800" y="6583680"/>
+            <a:ext cx="6490411" cy="256032"/>
+          </a:xfrm>
+          <a:prstGeom prst="rect">
+            <a:avLst/>
+          </a:prstGeom>
+          <a:noFill/>
+        </p:spPr>
+        <p:txBody>
+          <a:bodyPr wrap="none">
+            <a:spAutoFit/>
+          </a:bodyPr>
+          <a:lstStyle/>
+          <a:p>
+            <a:pPr algn="l"/>
+            <a:r>
+              <a:rPr sz="700">
+                <a:solidFill>
+                  <a:srgbClr val="A0B4D2"/>
+                </a:solidFill>
+                <a:latin typeface="JetBrains Mono"/>
+              </a:rPr>
+              <a:t>Benedikt Zoller Coaching  ·  FKB Campus  ·  M22</a:t>
+            </a:r>
+          </a:p>
+        </p:txBody>
+      </p:sp>
+      <p:sp>
+        <p:nvSpPr>
+          <p:cNvPr id="10" name="TextBox 9"/>
+          <p:cNvSpPr txBox="1"/>
+          <p:nvPr/>
+        </p:nvSpPr>
+        <p:spPr>
+          <a:xfrm>
+            <a:off x="7176211" y="6583680"/>
+            <a:ext cx="4326940" cy="256032"/>
+          </a:xfrm>
+          <a:prstGeom prst="rect">
+            <a:avLst/>
+          </a:prstGeom>
+          <a:noFill/>
+        </p:spPr>
+        <p:txBody>
+          <a:bodyPr wrap="none">
+            <a:spAutoFit/>
+          </a:bodyPr>
+          <a:lstStyle/>
+          <a:p>
+            <a:pPr algn="r"/>
+            <a:r>
+              <a:rPr sz="700">
+                <a:solidFill>
+                  <a:srgbClr val="A0B4D2"/>
+                </a:solidFill>
+                <a:latin typeface="JetBrains Mono"/>
+              </a:rPr>
+              <a:t>Schaubild</a:t>
+            </a:r>
+          </a:p>
+        </p:txBody>
+      </p:sp>
+    </p:spTree>
+  </p:cSld>
+  <p:clrMapOvr>
+    <a:masterClrMapping/>
+  </p:clrMapOvr>
+</p:sld>
+</file>
+
+<file path=ppt/slides/slide18.xml><?xml version="1.0" encoding="utf-8"?>
+<p:sld xmlns:a="http://schemas.openxmlformats.org/drawingml/2006/main" xmlns:p="http://schemas.openxmlformats.org/presentationml/2006/main" xmlns:r="http://schemas.openxmlformats.org/officeDocument/2006/relationships">
+  <p:cSld>
+    <p:spTree>
+      <p:nvGrpSpPr>
+        <p:cNvPr id="1" name=""/>
+        <p:cNvGrpSpPr/>
+        <p:nvPr/>
+      </p:nvGrpSpPr>
+      <p:grpSpPr/>
+      <p:sp>
+        <p:nvSpPr>
+          <p:cNvPr id="2" name="Rectangle 1"/>
+          <p:cNvSpPr/>
+          <p:nvPr/>
+        </p:nvSpPr>
+        <p:spPr>
+          <a:xfrm>
+            <a:off x="0" y="0"/>
+            <a:ext cx="12188952" cy="6858000"/>
+          </a:xfrm>
+          <a:prstGeom prst="rect">
+            <a:avLst/>
+          </a:prstGeom>
+          <a:solidFill>
             <a:srgbClr val="EDEDF3"/>
           </a:solidFill>
           <a:ln>
@@ -8021,13 +9175,13 @@
               </a:spcAft>
             </a:pPr>
             <a:r>
-              <a:rPr sz="1200">
+              <a:rPr sz="1300">
                 <a:solidFill>
                   <a:srgbClr val="3D5466"/>
                 </a:solidFill>
                 <a:latin typeface="Arial"/>
               </a:rPr>
-              <a:t>Nehmen Sie sich nach dem Modul 10 Minuten Zeit für folgende Fragen:</a:t>
+              <a:t>▸  Nehmen Sie sich nach dem Modul 10 Minuten Zeit für folgende Fragen:</a:t>
             </a:r>
           </a:p>
           <a:p>
@@ -9313,13 +10467,13 @@
               </a:spcAft>
             </a:pPr>
             <a:r>
-              <a:rPr sz="1200">
+              <a:rPr sz="1300">
                 <a:solidFill>
                   <a:srgbClr val="3D5466"/>
                 </a:solidFill>
                 <a:latin typeface="Arial"/>
               </a:rPr>
-              <a:t>Eine vollständige qualitative Unternehmensanalyse umfasst drei Ebenen:</a:t>
+              <a:t>▸  Eine vollständige qualitative Unternehmensanalyse umfasst drei Ebenen:</a:t>
             </a:r>
           </a:p>
         </p:txBody>
@@ -10066,13 +11220,13 @@
               </a:spcAft>
             </a:pPr>
             <a:r>
-              <a:rPr sz="1200">
+              <a:rPr sz="1300">
                 <a:solidFill>
                   <a:srgbClr val="3D5466"/>
                 </a:solidFill>
                 <a:latin typeface="Arial"/>
               </a:rPr>
-              <a:t>Die fünf Kräfte im Überblick:</a:t>
+              <a:t>▸  Die fünf Kräfte im Überblick:</a:t>
             </a:r>
           </a:p>
           <a:p>
@@ -10838,13 +11992,13 @@
               </a:spcAft>
             </a:pPr>
             <a:r>
-              <a:rPr sz="1200">
+              <a:rPr sz="1300">
                 <a:solidFill>
                   <a:srgbClr val="3D5466"/>
                 </a:solidFill>
                 <a:latin typeface="Arial"/>
               </a:rPr>
-              <a:t>Eine vierte Option gibt es laut Porter (1980) nicht — ein Unternehmen, das keine klare Strategie wählt, hat keine.</a:t>
+              <a:t>▸  Eine vierte Option gibt es laut Porter (1980) nicht — ein Unternehmen, das keine klare Strategie wählt, hat keine.</a:t>
             </a:r>
           </a:p>
           <a:p>
@@ -10876,13 +12030,13 @@
               </a:spcAft>
             </a:pPr>
             <a:r>
-              <a:rPr sz="1200">
+              <a:rPr sz="1300">
                 <a:solidFill>
                   <a:srgbClr val="3D5466"/>
                 </a:solidFill>
                 <a:latin typeface="Arial"/>
               </a:rPr>
-              <a:t>Warum das für Kreditberater relevant ist:</a:t>
+              <a:t>▸  Warum das für Kreditberater relevant ist:</a:t>
             </a:r>
           </a:p>
           <a:p>
@@ -10895,13 +12049,13 @@
               </a:spcAft>
             </a:pPr>
             <a:r>
-              <a:rPr sz="1200">
+              <a:rPr sz="1300">
                 <a:solidFill>
                   <a:srgbClr val="3D5466"/>
                 </a:solidFill>
                 <a:latin typeface="Arial"/>
               </a:rPr>
-              <a:t>Warnsignale für Stuck in the Middle im Kundengespräch:</a:t>
+              <a:t>▸  Warnsignale für Stuck in the Middle im Kundengespräch:</a:t>
             </a:r>
           </a:p>
           <a:p>
@@ -11009,13 +12163,13 @@
               </a:spcAft>
             </a:pPr>
             <a:r>
-              <a:rPr sz="1200">
+              <a:rPr sz="1300">
                 <a:solidFill>
                   <a:srgbClr val="3D5466"/>
                 </a:solidFill>
                 <a:latin typeface="Arial"/>
               </a:rPr>
-              <a:t>Stuck in the Middle und der Haller-Fall:</a:t>
+              <a:t>▸  Stuck in the Middle und der Haller-Fall:</a:t>
             </a:r>
           </a:p>
         </p:txBody>

--- a/protected-downloads/praesentation/M22.pptx
+++ b/protected-downloads/praesentation/M22.pptx
@@ -4647,7 +4647,7 @@
                 </a:solidFill>
                 <a:latin typeface="JetBrains Mono"/>
               </a:rPr>
-              <a:t>Benedikt Zoller Coaching  ·  FKB Campus  ·  2026</a:t>
+              <a:t>FKB Campus  ·  2026</a:t>
             </a:r>
           </a:p>
         </p:txBody>
@@ -5100,7 +5100,7 @@
                 </a:solidFill>
                 <a:latin typeface="JetBrains Mono"/>
               </a:rPr>
-              <a:t>Benedikt Zoller Coaching  ·  FKB Campus  ·  M22</a:t>
+              <a:t>FKB Campus  ·  M22</a:t>
             </a:r>
           </a:p>
         </p:txBody>
@@ -5575,7 +5575,7 @@
                 </a:solidFill>
                 <a:latin typeface="JetBrains Mono"/>
               </a:rPr>
-              <a:t>Benedikt Zoller Coaching  ·  FKB Campus  ·  M22</a:t>
+              <a:t>FKB Campus  ·  M22</a:t>
             </a:r>
           </a:p>
         </p:txBody>
@@ -6031,7 +6031,7 @@
                 </a:solidFill>
                 <a:latin typeface="JetBrains Mono"/>
               </a:rPr>
-              <a:t>Benedikt Zoller Coaching  ·  FKB Campus  ·  M22</a:t>
+              <a:t>FKB Campus  ·  M22</a:t>
             </a:r>
           </a:p>
         </p:txBody>
@@ -6565,7 +6565,7 @@
                 </a:solidFill>
                 <a:latin typeface="JetBrains Mono"/>
               </a:rPr>
-              <a:t>Benedikt Zoller Coaching  ·  FKB Campus  ·  M22</a:t>
+              <a:t>FKB Campus  ·  M22</a:t>
             </a:r>
           </a:p>
         </p:txBody>
@@ -6964,7 +6964,7 @@
                 </a:solidFill>
                 <a:latin typeface="JetBrains Mono"/>
               </a:rPr>
-              <a:t>Benedikt Zoller Coaching  ·  FKB Campus  ·  M22</a:t>
+              <a:t>FKB Campus  ·  M22</a:t>
             </a:r>
           </a:p>
         </p:txBody>
@@ -7746,7 +7746,7 @@
                 </a:solidFill>
                 <a:latin typeface="JetBrains Mono"/>
               </a:rPr>
-              <a:t>Benedikt Zoller Coaching  ·  FKB Campus  ·  M22</a:t>
+              <a:t>FKB Campus  ·  M22</a:t>
             </a:r>
           </a:p>
         </p:txBody>
@@ -8490,7 +8490,7 @@
                 </a:solidFill>
                 <a:latin typeface="JetBrains Mono"/>
               </a:rPr>
-              <a:t>Benedikt Zoller Coaching  ·  FKB Campus  ·  M22</a:t>
+              <a:t>FKB Campus  ·  M22</a:t>
             </a:r>
           </a:p>
         </p:txBody>
@@ -8844,7 +8844,7 @@
                 </a:solidFill>
                 <a:latin typeface="JetBrains Mono"/>
               </a:rPr>
-              <a:t>Benedikt Zoller Coaching  ·  FKB Campus  ·  M22</a:t>
+              <a:t>FKB Campus  ·  M22</a:t>
             </a:r>
           </a:p>
         </p:txBody>
@@ -9335,7 +9335,7 @@
                 </a:solidFill>
                 <a:latin typeface="JetBrains Mono"/>
               </a:rPr>
-              <a:t>Benedikt Zoller Coaching  ·  FKB Campus  ·  M22</a:t>
+              <a:t>FKB Campus  ·  M22</a:t>
             </a:r>
           </a:p>
         </p:txBody>
@@ -9701,7 +9701,7 @@
                 </a:solidFill>
                 <a:latin typeface="JetBrains Mono"/>
               </a:rPr>
-              <a:t>Benedikt Zoller Coaching  ·  FKB Campus  ·  M22</a:t>
+              <a:t>FKB Campus  ·  M22</a:t>
             </a:r>
           </a:p>
         </p:txBody>
@@ -10133,7 +10133,7 @@
                 </a:solidFill>
                 <a:latin typeface="JetBrains Mono"/>
               </a:rPr>
-              <a:t>Benedikt Zoller Coaching  ·  FKB Campus  ·  M22</a:t>
+              <a:t>FKB Campus  ·  M22</a:t>
             </a:r>
           </a:p>
         </p:txBody>
@@ -10551,7 +10551,7 @@
                 </a:solidFill>
                 <a:latin typeface="JetBrains Mono"/>
               </a:rPr>
-              <a:t>Benedikt Zoller Coaching  ·  FKB Campus  ·  M22</a:t>
+              <a:t>FKB Campus  ·  M22</a:t>
             </a:r>
           </a:p>
         </p:txBody>
@@ -10870,7 +10870,7 @@
                 </a:solidFill>
                 <a:latin typeface="JetBrains Mono"/>
               </a:rPr>
-              <a:t>Benedikt Zoller Coaching  ·  FKB Campus  ·  M22</a:t>
+              <a:t>FKB Campus  ·  M22</a:t>
             </a:r>
           </a:p>
         </p:txBody>
@@ -11323,7 +11323,7 @@
                 </a:solidFill>
                 <a:latin typeface="JetBrains Mono"/>
               </a:rPr>
-              <a:t>Benedikt Zoller Coaching  ·  FKB Campus  ·  M22</a:t>
+              <a:t>FKB Campus  ·  M22</a:t>
             </a:r>
           </a:p>
         </p:txBody>
@@ -11642,7 +11642,7 @@
                 </a:solidFill>
                 <a:latin typeface="JetBrains Mono"/>
               </a:rPr>
-              <a:t>Benedikt Zoller Coaching  ·  FKB Campus  ·  M22</a:t>
+              <a:t>FKB Campus  ·  M22</a:t>
             </a:r>
           </a:p>
         </p:txBody>
@@ -12247,7 +12247,7 @@
                 </a:solidFill>
                 <a:latin typeface="JetBrains Mono"/>
               </a:rPr>
-              <a:t>Benedikt Zoller Coaching  ·  FKB Campus  ·  M22</a:t>
+              <a:t>FKB Campus  ·  M22</a:t>
             </a:r>
           </a:p>
         </p:txBody>
@@ -12566,7 +12566,7 @@
                 </a:solidFill>
                 <a:latin typeface="JetBrains Mono"/>
               </a:rPr>
-              <a:t>Benedikt Zoller Coaching  ·  FKB Campus  ·  M22</a:t>
+              <a:t>FKB Campus  ·  M22</a:t>
             </a:r>
           </a:p>
         </p:txBody>

--- a/protected-downloads/praesentation/M22.pptx
+++ b/protected-downloads/praesentation/M22.pptx
@@ -799,7 +799,7 @@
           <a:lstStyle/>
           <a:p>
             <a:r>
-              <a:t>Moderation (HB Sec 3): Gleiche Gruppen. AB-2 und AB-3 gleichzeitig austeilen. AB-2 SWOT: Ergebnisse aus Five Forces in SWOT-Raster übertragen; explizit: „Markieren Sie die drei größten Red Flags für das Kreditvotum." AB-3 Krediturteil: Formulierung in max. 5 Sätzen mit: 1. Strategische Positionierung (max. 2 Sätze) 2. Identifizierte Risikofaktoren mit Fallbezug (1–2 Sätze) 3. Kreditempfehlung mit Bedingung oder Vorbehalt (1 Satz) Häufiger Fehler: Empfehlung ohne Begründung oder Risiken ohne Strategiebezug. Korrekturimpuls: „Ihr Kreditausschuss fragt: Woher wissen Sie das? — Was ist Ihre Antwort?"</a:t>
+              <a:t>Moderation (HB Sec 3): Gleiche Gruppen. AB-2 und AB-3 gleichzeitig austeilen. Zeitfenster: 30 Minuten (25 Min. Arbeit, 5 Min. Trainer-Rundgang und Abschluss). Für Gruppen mit Einsteiger-Profil: Eine zu 50 % ausgefüllte SWOT (AB-2) ist akzeptabel – das Krediturteil (AB-3) hat Priorität. AB-2 SWOT: Ergebnisse aus Five Forces in SWOT-Raster übertragen; explizit: „Markieren Sie die drei größten Red Flags für das Kreditvotum." Schnelle Teilnehmer (Zusatzaufgabe): Wer AB-3 früh fertig hat, erhält mündlich (oder über den AB-3-Erweiterungskasten): „Szenario: Haller plant statt des Betriebsmittelkredits ein Investitionsdarlehen über 1,2 Mio. EUR für neue CNC-Maschinen. Was ändert sich an Ihrer qualitativen Einschätzung – und was bleibt? Formulieren Sie einen Satz fürs Kreditvotum unter dieser Annahme." AB-3 Krediturteil: Formulierung in max. 5 Sätzen mit: 1. Strategische Positionierung (max. 2 Sätze) 2. Identifizierte Risikofaktoren mit Fallbezug (1–2 Sätze) 3. Kreditempfehlung mit Bedingung oder Vorbehalt (1 Satz) Häufiger Fehler: Empfehlung ohne Begründung oder Risiken ohne Strategiebezug. Korrekturimpuls: „Ihr Kreditausschuss fragt: Woher wissen Sie das? — Was ist Ihre Antwort?"</a:t>
             </a:r>
           </a:p>
         </p:txBody>

--- a/protected-downloads/praesentation/M22.pptx
+++ b/protected-downloads/praesentation/M22.pptx
@@ -4569,7 +4569,7 @@
                 </a:solidFill>
                 <a:latin typeface="Arial"/>
               </a:rPr>
-              <a:t>v0.2</a:t>
+              <a:t>v1.0</a:t>
             </a:r>
           </a:p>
         </p:txBody>

--- a/protected-downloads/praesentation/M22.pptx
+++ b/protected-downloads/praesentation/M22.pptx
@@ -23,6 +23,7 @@
     <p:sldId id="271" r:id="rId23"/>
     <p:sldId id="272" r:id="rId24"/>
     <p:sldId id="273" r:id="rId25"/>
+    <p:sldId id="274" r:id="rId26"/>
   </p:sldIdLst>
   <p:sldSz cx="12188952" cy="6858000" type="screen4x3"/>
   <p:notesSz cx="6858000" cy="9144000"/>
@@ -519,6 +520,76 @@
           <a:lstStyle/>
           <a:p>
             <a:r>
+              <a:t>Agenda aus dem Ablaufplan (Sektion 3.1). Timing und Pausen siehe Trainerhandbuch.</a:t>
+            </a:r>
+          </a:p>
+        </p:txBody>
+      </p:sp>
+      <p:sp>
+        <p:nvSpPr>
+          <p:cNvPr id="4" name="Slide Number Placeholder 3"/>
+          <p:cNvSpPr>
+            <a:spLocks noGrp="1"/>
+          </p:cNvSpPr>
+          <p:nvPr>
+            <p:ph type="sldNum" idx="5" sz="quarter"/>
+          </p:nvPr>
+        </p:nvSpPr>
+        <p:spPr/>
+      </p:sp>
+    </p:spTree>
+  </p:cSld>
+  <p:clrMapOvr>
+    <a:masterClrMapping/>
+  </p:clrMapOvr>
+</p:notes>
+</file>
+
+<file path=ppt/notesSlides/notesSlide10.xml><?xml version="1.0" encoding="utf-8"?>
+<p:notes xmlns:a="http://schemas.openxmlformats.org/drawingml/2006/main" xmlns:p="http://schemas.openxmlformats.org/presentationml/2006/main" xmlns:r="http://schemas.openxmlformats.org/officeDocument/2006/relationships">
+  <p:cSld>
+    <p:spTree>
+      <p:nvGrpSpPr>
+        <p:cNvPr id="1" name=""/>
+        <p:cNvGrpSpPr/>
+        <p:nvPr/>
+      </p:nvGrpSpPr>
+      <p:grpSpPr>
+        <a:xfrm>
+          <a:off x="0" y="0"/>
+          <a:ext cx="0" cy="0"/>
+          <a:chOff x="0" y="0"/>
+          <a:chExt cx="0" cy="0"/>
+        </a:xfrm>
+      </p:grpSpPr>
+      <p:sp>
+        <p:nvSpPr>
+          <p:cNvPr id="2" name="Slide Image Placeholder 1"/>
+          <p:cNvSpPr>
+            <a:spLocks noGrp="1"/>
+          </p:cNvSpPr>
+          <p:nvPr>
+            <p:ph type="sldImg" idx="2"/>
+          </p:nvPr>
+        </p:nvSpPr>
+        <p:spPr/>
+      </p:sp>
+      <p:sp>
+        <p:nvSpPr>
+          <p:cNvPr id="3" name="Notes Placeholder 2"/>
+          <p:cNvSpPr>
+            <a:spLocks noGrp="1"/>
+          </p:cNvSpPr>
+          <p:nvPr>
+            <p:ph type="body" idx="3" sz="quarter"/>
+          </p:nvPr>
+        </p:nvSpPr>
+        <p:spPr/>
+        <p:txBody>
+          <a:bodyPr/>
+          <a:lstStyle/>
+          <a:p>
+            <a:r>
               <a:t>Siehe Trainerhandbuch (Sektion 3) für Moderationshinweise, Timing und erwartete Teilnehmerreaktionen.</a:t>
             </a:r>
           </a:p>
@@ -589,7 +660,7 @@
           <a:lstStyle/>
           <a:p>
             <a:r>
-              <a:t>Moderation (HB Sec 3): Methode: Problembasiertes Lernen in Kleingruppen (Barrows, 1986) Fallblatt Haller GmbH austeilen, 2 Minuten Lesezeit, dann AB-1 austeilen. Aufgabenstellung (Trainer liest vor): „Analysieren Sie die Wettbewerbssituation der Haller GmbH mit dem Five-Forces-Modell. Bewerten Sie jede Kraft von 1 (gering) bis 3 (hoch). Bestimmen Sie: Welche generische Strategie verfolgt Haller — oder ist das Unternehmen stuck in the middle? Begründen Sie." Gruppen: 3–4 Personen, 20 Minuten Arbeitszeit. Trainer-Runde durch den Raum (ab Minute 5):</a:t>
+              <a:t>Siehe Trainerhandbuch (Sektion 3) für Moderationshinweise, Timing und erwartete Teilnehmerreaktionen.</a:t>
             </a:r>
           </a:p>
         </p:txBody>
@@ -659,7 +730,7 @@
           <a:lstStyle/>
           <a:p>
             <a:r>
-              <a:t>Siehe Trainerhandbuch (Sektion 3) für Moderationshinweise, Timing und erwartete Teilnehmerreaktionen.</a:t>
+              <a:t>Moderation (HB Sec 3): Methode: Problembasiertes Lernen in Kleingruppen (Barrows, 1986) Fallblatt Haller GmbH austeilen, 2 Minuten Lesezeit, dann AB-1 austeilen. Aufgabenstellung (Trainer liest vor): „Analysieren Sie die Wettbewerbssituation der Haller GmbH mit dem Five-Forces-Modell. Bewerten Sie jede Kraft von 1 (gering) bis 3 (hoch). Bestimmen Sie: Welche generische Strategie verfolgt Haller — oder ist das Unternehmen stuck in the middle? Begründen Sie." Gruppen: 3–4 Personen, 20 Minuten Arbeitszeit. Trainer-Runde durch den Raum (ab Minute 5):</a:t>
             </a:r>
           </a:p>
         </p:txBody>
@@ -799,7 +870,7 @@
           <a:lstStyle/>
           <a:p>
             <a:r>
-              <a:t>Moderation (HB Sec 3): Gleiche Gruppen. AB-2 und AB-3 gleichzeitig austeilen. Zeitfenster: 30 Minuten (25 Min. Arbeit, 5 Min. Trainer-Rundgang und Abschluss). Für Gruppen mit Einsteiger-Profil: Eine zu 50 % ausgefüllte SWOT (AB-2) ist akzeptabel – das Krediturteil (AB-3) hat Priorität. AB-2 SWOT: Ergebnisse aus Five Forces in SWOT-Raster übertragen; explizit: „Markieren Sie die drei größten Red Flags für das Kreditvotum." Schnelle Teilnehmer (Zusatzaufgabe): Wer AB-3 früh fertig hat, erhält mündlich (oder über den AB-3-Erweiterungskasten): „Szenario: Haller plant statt des Betriebsmittelkredits ein Investitionsdarlehen über 1,2 Mio. EUR für neue CNC-Maschinen. Was ändert sich an Ihrer qualitativen Einschätzung – und was bleibt? Formulieren Sie einen Satz fürs Kreditvotum unter dieser Annahme." AB-3 Krediturteil: Formulierung in max. 5 Sätzen mit: 1. Strategische Positionierung (max. 2 Sätze) 2. Identifizierte Risikofaktoren mit Fallbezug (1–2 Sätze) 3. Kreditempfehlung mit Bedingung oder Vorbehalt (1 Satz) Häufiger Fehler: Empfehlung ohne Begründung oder Risiken ohne Strategiebezug. Korrekturimpuls: „Ihr Kreditausschuss fragt: Woher wissen Sie das? — Was ist Ihre Antwort?"</a:t>
+              <a:t>Siehe Trainerhandbuch (Sektion 3) für Moderationshinweise, Timing und erwartete Teilnehmerreaktionen.</a:t>
             </a:r>
           </a:p>
         </p:txBody>
@@ -869,7 +940,7 @@
           <a:lstStyle/>
           <a:p>
             <a:r>
-              <a:t>Moderation (HB Sec 3): Methode: Problembasiertes Lernen in Kleingruppen (Barrows, 1986) Fallblatt Haller GmbH austeilen, 2 Minuten Lesezeit, dann AB-1 austeilen. Aufgabenstellung (Trainer liest vor): „Analysieren Sie die Wettbewerbssituation der Haller GmbH mit dem Five-Forces-Modell. Bewerten Sie jede Kraft von 1 (gering) bis 3 (hoch). Bestimmen Sie: Welche generische Strategie verfolgt Haller — oder ist das Unternehmen stuck in the middle? Begründen Sie." Gruppen: 3–4 Personen, 20 Minuten Arbeitszeit. Trainer-Runde durch den Raum (ab Minute 5):</a:t>
+              <a:t>Moderation (HB Sec 3): Gleiche Gruppen. AB-2 und AB-3 gleichzeitig austeilen. Zeitfenster: 30 Minuten (25 Min. Arbeit, 5 Min. Trainer-Rundgang und Abschluss). Für Gruppen mit Einsteiger-Profil: Eine zu 50 % ausgefüllte SWOT (AB-2) ist akzeptabel – das Krediturteil (AB-3) hat Priorität. AB-2 SWOT: Ergebnisse aus Five Forces in SWOT-Raster übertragen; explizit: „Markieren Sie die drei größten Red Flags für das Kreditvotum." Schnelle Teilnehmer (Zusatzaufgabe): Wer AB-3 früh fertig hat, erhält mündlich (oder über den AB-3-Erweiterungskasten): „Szenario: Haller plant statt des Betriebsmittelkredits ein Investitionsdarlehen über 1,2 Mio. EUR für neue CNC-Maschinen. Was ändert sich an Ihrer qualitativen Einschätzung – und was bleibt? Formulieren Sie einen Satz fürs Kreditvotum unter dieser Annahme." AB-3 Krediturteil: Formulierung in max. 5 Sätzen mit: 1. Strategische Positionierung (max. 2 Sätze) 2. Identifizierte Risikofaktoren mit Fallbezug (1–2 Sätze) 3. Kreditempfehlung mit Bedingung oder Vorbehalt (1 Satz) Häufiger Fehler: Empfehlung ohne Begründung oder Risiken ohne Strategiebezug. Korrekturimpuls: „Ihr Kreditausschuss fragt: Woher wissen Sie das? — Was ist Ihre Antwort?"</a:t>
             </a:r>
           </a:p>
         </p:txBody>
@@ -939,52 +1010,7 @@
           <a:lstStyle/>
           <a:p>
             <a:r>
-              <a:t>AB-1 Musterlösung (Trainer-Version)</a:t>
-            </a:r>
-          </a:p>
-          <a:p>
-            <a:r>
-              <a:t>Gesamteinschätzung Branchenattraktivität: mittel bis niedrig. Dominierende Risiken: Kundenklumpen + Niedrigpreiswettbewerb aus Asien. Für die Kreditwürdigkeitsbeurteilung ist die Abhängigkeit von Kunde A das zentrale qualitative Red Flag.</a:t>
-            </a:r>
-          </a:p>
-          <a:p>
-            <a:r>
-              <a:t>Strategische Positionierung: Haller verfolgt implizit eine Differenzierungsstrategie (Qualität, Liefertreue, Präzisions-Know-how). Diese Strategie ist solange tragfähig, wie der Qualitätsvorteil verteidigbar bleibt. Mit dem Eintritt asiatischer Wettbewerber und ohne erkennbare Reinvestition in neue Differenzierungsmerkmale droht jedoch ein Stuck-in-the-Middle: nicht günstig genug für Preiskampf, aber zunehmend weniger differenziert. Klassisches Signal: GF Haller kann vermutlich nicht klar benennen, was das Unternehmen in 5 Jahren noch einzigartig macht.</a:t>
-            </a:r>
-          </a:p>
-          <a:p>
-            <a:r>
-              <a:t>AB-2 Musterlösung (Trainer-Version)</a:t>
-            </a:r>
-          </a:p>
-          <a:p>
-            <a:r>
-              <a:t>Stärken: (1) Langjährige Kundenbindungen, hohe Liefertreue und Qualitätsstandard; (2) Erfahrenes Facharbeiterteam mit spezifischem Präzisions-Know-how (VRIN-Ressource nach Barney, 1991); (3) Gesunde Eigenkapitalquote (31,4 %) und positiver DSCR (1,42x)</a:t>
-            </a:r>
-          </a:p>
-          <a:p>
-            <a:r>
-              <a:t>Schwächen: (1) ! Extreme Kundenabhängigkeit (Kunde A = 60 % Umsatz — Klumpenrisiko); (2) ! Fehlende Nachfolgeplanung (GF 63 Jahre, kein Nachfolger); (3) Veralteter Maschinenpark (Ø 9 Jahre, letzte große Investition 2019)</a:t>
-            </a:r>
-          </a:p>
-          <a:p>
-            <a:r>
-              <a:t>Chancen: (1) Reshoring-Trend — europäische Kunden bauen asiatische Abhängigkeiten ab; (2) Wachstum im Bereich Elektromobilität-Komponenten als Diversifikationsoption; (3) Förderprogramme für KMU-Digitalisierung (z. B. go-digital, BMWi)</a:t>
-            </a:r>
-          </a:p>
-          <a:p>
-            <a:r>
-              <a:t>Risiken: (1) ! Asiatischer Niedrigpreiswettbewerb bereits im Markt; (2) Fachkräfteverlust durch Altersabgänge ohne Nachbesetzung; (3) Abhängigkeit vom Konjunkturzyklus des Maschinenbaus</a:t>
-            </a:r>
-          </a:p>
-          <a:p>
-            <a:r>
-              <a:t>Die drei kritischsten: (1) Klumpenrisiko Kunde A — Wegfall würde Deckungsbeitrag auf 40 % reduzieren; Zahlungsunfähigkeit droht. (2) Nachfolgerisiko GF Haller — kein Managementnachfolger = operatives Schlüsselpersonenrisiko. (3) Preiserosion durch asiatische Wettbewerber — mittelfristige Margenkompression strukturell angelegt.</a:t>
-            </a:r>
-          </a:p>
-          <a:p>
-            <a:r>
-              <a:t>Kreditvorlage-Formulierungsvorschlag: „Die Haller GmbH verfügt über eine solide Bilanzstruktur und ein qualifiziertes Facharbeiterteam als nachhaltige Wettbewerbsressource. Die Kreditwürdigkeit wird jedoch durch drei qualitative Risiken erheblich belastet: das extreme Klumpenrisiko auf Kundenseite (Kunde A: 60 % Umsatzanteil), das ungeklärte Nachfolgeproblem des 63-jährigen Alleingeschäftsführers sowie den strukturell zunehmenden Preisdruck durch asiatische Wettbewerber. Diese Faktoren erfordern eine differenzierte Bewertung und ggf. Absicherungsmaßnahmen im Kreditrahmen."</a:t>
+              <a:t>Moderation (HB Sec 3): Methode: Problembasiertes Lernen in Kleingruppen (Barrows, 1986) Fallblatt Haller GmbH austeilen, 2 Minuten Lesezeit, dann AB-1 austeilen. Aufgabenstellung (Trainer liest vor): „Analysieren Sie die Wettbewerbssituation der Haller GmbH mit dem Five-Forces-Modell. Bewerten Sie jede Kraft von 1 (gering) bis 3 (hoch). Bestimmen Sie: Welche generische Strategie verfolgt Haller — oder ist das Unternehmen stuck in the middle? Begründen Sie." Gruppen: 3–4 Personen, 20 Minuten Arbeitszeit. Trainer-Runde durch den Raum (ab Minute 5):</a:t>
             </a:r>
           </a:p>
         </p:txBody>
@@ -1054,7 +1080,52 @@
           <a:lstStyle/>
           <a:p>
             <a:r>
-              <a:t>Trainer-Hinweis: Die Kennzahlen der Haller GmbH sind quantitativ unauffällig. Genau darin liegt die didaktische Stärke des Fallbeispiels: Teilnehmer sollen erkennen, dass ein auf den ersten Blick gesundes Unternehmen qualitativ erhebliche Risiken trägt, die sich in einer reinen Bilanzanalyse nicht zeigen.</a:t>
+              <a:t>AB-1 Musterlösung (Trainer-Version)</a:t>
+            </a:r>
+          </a:p>
+          <a:p>
+            <a:r>
+              <a:t>Gesamteinschätzung Branchenattraktivität: mittel bis niedrig. Dominierende Risiken: Kundenklumpen + Niedrigpreiswettbewerb aus Asien. Für die Kreditwürdigkeitsbeurteilung ist die Abhängigkeit von Kunde A das zentrale qualitative Red Flag.</a:t>
+            </a:r>
+          </a:p>
+          <a:p>
+            <a:r>
+              <a:t>Strategische Positionierung: Haller verfolgt implizit eine Differenzierungsstrategie (Qualität, Liefertreue, Präzisions-Know-how). Diese Strategie ist solange tragfähig, wie der Qualitätsvorteil verteidigbar bleibt. Mit dem Eintritt asiatischer Wettbewerber und ohne erkennbare Reinvestition in neue Differenzierungsmerkmale droht jedoch ein Stuck-in-the-Middle: nicht günstig genug für Preiskampf, aber zunehmend weniger differenziert. Klassisches Signal: GF Haller kann vermutlich nicht klar benennen, was das Unternehmen in 5 Jahren noch einzigartig macht.</a:t>
+            </a:r>
+          </a:p>
+          <a:p>
+            <a:r>
+              <a:t>AB-2 Musterlösung (Trainer-Version)</a:t>
+            </a:r>
+          </a:p>
+          <a:p>
+            <a:r>
+              <a:t>Stärken: (1) Langjährige Kundenbindungen, hohe Liefertreue und Qualitätsstandard; (2) Erfahrenes Facharbeiterteam mit spezifischem Präzisions-Know-how (VRIN-Ressource nach Barney, 1991); (3) Gesunde Eigenkapitalquote (31,4 %) und positiver DSCR (1,42x)</a:t>
+            </a:r>
+          </a:p>
+          <a:p>
+            <a:r>
+              <a:t>Schwächen: (1) ! Extreme Kundenabhängigkeit (Kunde A = 60 % Umsatz — Klumpenrisiko); (2) ! Fehlende Nachfolgeplanung (GF 63 Jahre, kein Nachfolger); (3) Veralteter Maschinenpark (Ø 9 Jahre, letzte große Investition 2019)</a:t>
+            </a:r>
+          </a:p>
+          <a:p>
+            <a:r>
+              <a:t>Chancen: (1) Reshoring-Trend — europäische Kunden bauen asiatische Abhängigkeiten ab; (2) Wachstum im Bereich Elektromobilität-Komponenten als Diversifikationsoption; (3) Förderprogramme für KMU-Digitalisierung (z. B. go-digital, BMWi)</a:t>
+            </a:r>
+          </a:p>
+          <a:p>
+            <a:r>
+              <a:t>Risiken: (1) ! Asiatischer Niedrigpreiswettbewerb bereits im Markt; (2) Fachkräfteverlust durch Altersabgänge ohne Nachbesetzung; (3) Abhängigkeit vom Konjunkturzyklus des Maschinenbaus</a:t>
+            </a:r>
+          </a:p>
+          <a:p>
+            <a:r>
+              <a:t>Die drei kritischsten: (1) Klumpenrisiko Kunde A — Wegfall würde Deckungsbeitrag auf 40 % reduzieren; Zahlungsunfähigkeit droht. (2) Nachfolgerisiko GF Haller — kein Managementnachfolger = operatives Schlüsselpersonenrisiko. (3) Preiserosion durch asiatische Wettbewerber — mittelfristige Margenkompression strukturell angelegt.</a:t>
+            </a:r>
+          </a:p>
+          <a:p>
+            <a:r>
+              <a:t>Kreditvorlage-Formulierungsvorschlag: „Die Haller GmbH verfügt über eine solide Bilanzstruktur und ein qualifiziertes Facharbeiterteam als nachhaltige Wettbewerbsressource. Die Kreditwürdigkeit wird jedoch durch drei qualitative Risiken erheblich belastet: das extreme Klumpenrisiko auf Kundenseite (Kunde A: 60 % Umsatzanteil), das ungeklärte Nachfolgeproblem des 63-jährigen Alleingeschäftsführers sowie den strukturell zunehmenden Preisdruck durch asiatische Wettbewerber. Diese Faktoren erfordern eine differenzierte Bewertung und ggf. Absicherungsmaßnahmen im Kreditrahmen."</a:t>
             </a:r>
           </a:p>
         </p:txBody>
@@ -1124,7 +1195,7 @@
           <a:lstStyle/>
           <a:p>
             <a:r>
-              <a:t>Siehe Trainerhandbuch (Sektion 3) für Moderationshinweise, Timing und erwartete Teilnehmerreaktionen.</a:t>
+              <a:t>Trainer-Hinweis: Die Kennzahlen der Haller GmbH sind quantitativ unauffällig. Genau darin liegt die didaktische Stärke des Fallbeispiels: Teilnehmer sollen erkennen, dass ein auf den ersten Blick gesundes Unternehmen qualitativ erhebliche Risiken trägt, die sich in einer reinen Bilanzanalyse nicht zeigen.</a:t>
             </a:r>
           </a:p>
         </p:txBody>
@@ -4720,7 +4791,7 @@
             <a:avLst/>
           </a:prstGeom>
           <a:solidFill>
-            <a:srgbClr val="EDEDF3"/>
+            <a:srgbClr val="FFFFFF"/>
           </a:solidFill>
           <a:ln>
             <a:noFill/>
@@ -4821,51 +4892,43 @@
                 </a:solidFill>
                 <a:latin typeface="JetBrains Mono"/>
               </a:rPr>
-              <a:t>M22  ·  INHALT</a:t>
-            </a:r>
-          </a:p>
-        </p:txBody>
-      </p:sp>
-      <p:sp>
-        <p:nvSpPr>
-          <p:cNvPr id="5" name="Rectangle 4"/>
-          <p:cNvSpPr/>
-          <p:nvPr/>
-        </p:nvSpPr>
-        <p:spPr>
-          <a:xfrm>
-            <a:off x="0" y="1234440"/>
-            <a:ext cx="12188952" cy="12700"/>
-          </a:xfrm>
-          <a:prstGeom prst="rect">
-            <a:avLst/>
-          </a:prstGeom>
-          <a:solidFill>
-            <a:srgbClr val="D8DFE4"/>
-          </a:solidFill>
-          <a:ln>
-            <a:noFill/>
-          </a:ln>
-        </p:spPr>
-        <p:style>
-          <a:lnRef idx="1">
-            <a:schemeClr val="accent1"/>
-          </a:lnRef>
-          <a:fillRef idx="3">
-            <a:schemeClr val="accent1"/>
-          </a:fillRef>
-          <a:effectRef idx="2">
-            <a:schemeClr val="accent1"/>
-          </a:effectRef>
-          <a:fontRef idx="minor">
-            <a:schemeClr val="lt1"/>
-          </a:fontRef>
-        </p:style>
-        <p:txBody>
-          <a:bodyPr rtlCol="0" anchor="ctr"/>
-          <a:lstStyle/>
-          <a:p>
-            <a:pPr algn="ctr"/>
+              <a:t>M22  ·  SCHAUBILD</a:t>
+            </a:r>
+          </a:p>
+        </p:txBody>
+      </p:sp>
+      <p:sp>
+        <p:nvSpPr>
+          <p:cNvPr id="5" name="TextBox 4"/>
+          <p:cNvSpPr txBox="1"/>
+          <p:nvPr/>
+        </p:nvSpPr>
+        <p:spPr>
+          <a:xfrm>
+            <a:off x="685800" y="502920"/>
+            <a:ext cx="10817352" cy="594360"/>
+          </a:xfrm>
+          <a:prstGeom prst="rect">
+            <a:avLst/>
+          </a:prstGeom>
+          <a:noFill/>
+        </p:spPr>
+        <p:txBody>
+          <a:bodyPr wrap="square">
+            <a:spAutoFit/>
+          </a:bodyPr>
+          <a:lstStyle/>
+          <a:p>
+            <a:pPr algn="l"/>
+            <a:r>
+              <a:rPr sz="2000" b="1" i="0">
+                <a:solidFill>
+                  <a:srgbClr val="1F2C56"/>
+                </a:solidFill>
+                <a:latin typeface="Source Serif 4"/>
+              </a:rPr>
+              <a:t>Wettbewerbsstrategie-Matrix nach Porter</a:t>
+            </a:r>
           </a:p>
         </p:txBody>
       </p:sp>
@@ -4877,8 +4940,8 @@
         </p:nvSpPr>
         <p:spPr>
           <a:xfrm>
-            <a:off x="685800" y="502920"/>
-            <a:ext cx="36576" cy="658368"/>
+            <a:off x="685800" y="1143000"/>
+            <a:ext cx="10817352" cy="25400"/>
           </a:xfrm>
           <a:prstGeom prst="rect">
             <a:avLst/>
@@ -4912,124 +4975,33 @@
           </a:p>
         </p:txBody>
       </p:sp>
-      <p:sp>
-        <p:nvSpPr>
-          <p:cNvPr id="7" name="TextBox 6"/>
-          <p:cNvSpPr txBox="1"/>
-          <p:nvPr/>
-        </p:nvSpPr>
-        <p:spPr>
-          <a:xfrm>
-            <a:off x="813816" y="502920"/>
-            <a:ext cx="10634472" cy="685800"/>
-          </a:xfrm>
-          <a:prstGeom prst="rect">
-            <a:avLst/>
-          </a:prstGeom>
-          <a:noFill/>
-        </p:spPr>
-        <p:txBody>
-          <a:bodyPr wrap="square">
-            <a:spAutoFit/>
-          </a:bodyPr>
-          <a:lstStyle/>
-          <a:p>
-            <a:pPr algn="l"/>
-            <a:r>
-              <a:rPr sz="2400" b="1" i="0">
-                <a:solidFill>
-                  <a:srgbClr val="1F2C56"/>
-                </a:solidFill>
-                <a:latin typeface="Source Serif 4"/>
-              </a:rPr>
-              <a:t>Framework 2: Business Model Canvas als Robustheitscheck</a:t>
-            </a:r>
-          </a:p>
-        </p:txBody>
-      </p:sp>
-      <p:sp>
-        <p:nvSpPr>
-          <p:cNvPr id="8" name="TextBox 7"/>
-          <p:cNvSpPr txBox="1"/>
-          <p:nvPr/>
-        </p:nvSpPr>
-        <p:spPr>
-          <a:xfrm>
-            <a:off x="685800" y="1417320"/>
-            <a:ext cx="10817352" cy="5029200"/>
-          </a:xfrm>
-          <a:prstGeom prst="rect">
-            <a:avLst/>
-          </a:prstGeom>
-          <a:noFill/>
-        </p:spPr>
-        <p:txBody>
-          <a:bodyPr wrap="square">
-            <a:spAutoFit/>
-          </a:bodyPr>
-          <a:lstStyle/>
-          <a:p>
-            <a:pPr>
-              <a:spcBef>
-                <a:spcPts val="1000"/>
-              </a:spcBef>
-              <a:spcAft>
-                <a:spcPts val="200"/>
-              </a:spcAft>
-            </a:pPr>
-            <a:r>
-              <a:rPr sz="800" b="1">
-                <a:solidFill>
-                  <a:srgbClr val="78808C"/>
-                </a:solidFill>
-                <a:latin typeface="JetBrains Mono"/>
-              </a:rPr>
-              <a:t>GRUNDSTRUKTUR</a:t>
-            </a:r>
-          </a:p>
-          <a:p>
-            <a:pPr>
-              <a:spcBef>
-                <a:spcPts val="400"/>
-              </a:spcBef>
-              <a:spcAft>
-                <a:spcPts val="200"/>
-              </a:spcAft>
-            </a:pPr>
-            <a:r>
-              <a:rPr sz="1300">
-                <a:solidFill>
-                  <a:srgbClr val="3D5466"/>
-                </a:solidFill>
-                <a:latin typeface="Arial"/>
-              </a:rPr>
-              <a:t>▸  Gruppe A – Ertragsstabilität (rechte Canvas-Seite)</a:t>
-            </a:r>
-          </a:p>
-          <a:p>
-            <a:pPr>
-              <a:spcBef>
-                <a:spcPts val="400"/>
-              </a:spcBef>
-              <a:spcAft>
-                <a:spcPts val="200"/>
-              </a:spcAft>
-            </a:pPr>
-            <a:r>
-              <a:rPr sz="1300">
-                <a:solidFill>
-                  <a:srgbClr val="3D5466"/>
-                </a:solidFill>
-                <a:latin typeface="Arial"/>
-              </a:rPr>
-              <a:t>▸  Gruppe B – Kostenstruktur &amp; Abhängigkeiten (linke Canvas-Seite)</a:t>
-            </a:r>
-          </a:p>
-        </p:txBody>
-      </p:sp>
-      <p:sp>
-        <p:nvSpPr>
-          <p:cNvPr id="9" name="Rectangle 8"/>
+      <p:pic>
+        <p:nvPicPr>
+          <p:cNvPr id="7" name="Picture 6" descr="image.png"/>
+          <p:cNvPicPr>
+            <a:picLocks noChangeAspect="1"/>
+          </p:cNvPicPr>
+          <p:nvPr/>
+        </p:nvPicPr>
+        <p:blipFill>
+          <a:blip r:embed="rId2"/>
+          <a:stretch>
+            <a:fillRect/>
+          </a:stretch>
+        </p:blipFill>
+        <p:spPr>
+          <a:xfrm>
+            <a:off x="2303489" y="1325880"/>
+            <a:ext cx="7581973" cy="4937760"/>
+          </a:xfrm>
+          <a:prstGeom prst="rect">
+            <a:avLst/>
+          </a:prstGeom>
+        </p:spPr>
+      </p:pic>
+      <p:sp>
+        <p:nvSpPr>
+          <p:cNvPr id="8" name="Rectangle 7"/>
           <p:cNvSpPr/>
           <p:nvPr/>
         </p:nvSpPr>
@@ -5072,7 +5044,7 @@
       </p:sp>
       <p:sp>
         <p:nvSpPr>
-          <p:cNvPr id="10" name="TextBox 9"/>
+          <p:cNvPr id="9" name="TextBox 8"/>
           <p:cNvSpPr txBox="1"/>
           <p:nvPr/>
         </p:nvSpPr>
@@ -5101,6 +5073,41 @@
                 <a:latin typeface="JetBrains Mono"/>
               </a:rPr>
               <a:t>FKB Campus  ·  M22</a:t>
+            </a:r>
+          </a:p>
+        </p:txBody>
+      </p:sp>
+      <p:sp>
+        <p:nvSpPr>
+          <p:cNvPr id="10" name="TextBox 9"/>
+          <p:cNvSpPr txBox="1"/>
+          <p:nvPr/>
+        </p:nvSpPr>
+        <p:spPr>
+          <a:xfrm>
+            <a:off x="7176211" y="6583680"/>
+            <a:ext cx="4326940" cy="256032"/>
+          </a:xfrm>
+          <a:prstGeom prst="rect">
+            <a:avLst/>
+          </a:prstGeom>
+          <a:noFill/>
+        </p:spPr>
+        <p:txBody>
+          <a:bodyPr wrap="none">
+            <a:spAutoFit/>
+          </a:bodyPr>
+          <a:lstStyle/>
+          <a:p>
+            <a:pPr algn="r"/>
+            <a:r>
+              <a:rPr sz="700">
+                <a:solidFill>
+                  <a:srgbClr val="A0B4D2"/>
+                </a:solidFill>
+                <a:latin typeface="JetBrains Mono"/>
+              </a:rPr>
+              <a:t>Schaubild</a:t>
             </a:r>
           </a:p>
         </p:txBody>
@@ -5360,7 +5367,7 @@
                 </a:solidFill>
                 <a:latin typeface="Source Serif 4"/>
               </a:rPr>
-              <a:t>Framework 3: SWOT als Kreditrisikofilter</a:t>
+              <a:t>Framework 2: Business Model Canvas als Robustheitscheck</a:t>
             </a:r>
           </a:p>
         </p:txBody>
@@ -5402,7 +5409,7 @@
                 </a:solidFill>
                 <a:latin typeface="JetBrains Mono"/>
               </a:rPr>
-              <a:t>VON DER STRATEGISCHEN SWOT ZUR RISIKOKLASSIFIZIERUNG</a:t>
+              <a:t>GRUNDSTRUKTUR</a:t>
             </a:r>
           </a:p>
           <a:p>
@@ -5421,7 +5428,7 @@
                 </a:solidFill>
                 <a:latin typeface="Arial"/>
               </a:rPr>
-              <a:t>▸  Kreditrelevante SWOT-Lesart:</a:t>
+              <a:t>▸  Gruppe A – Ertragsstabilität (rechte Canvas-Seite)</a:t>
             </a:r>
           </a:p>
           <a:p>
@@ -5440,64 +5447,7 @@
                 </a:solidFill>
                 <a:latin typeface="Arial"/>
               </a:rPr>
-              <a:t>▸  Kritische Hinweise zur SWOT im Kreditkontext (nach Welge &amp; Al-Laham, 2012):</a:t>
-            </a:r>
-          </a:p>
-          <a:p>
-            <a:pPr>
-              <a:spcBef>
-                <a:spcPts val="400"/>
-              </a:spcBef>
-              <a:spcAft>
-                <a:spcPts val="200"/>
-              </a:spcAft>
-            </a:pPr>
-            <a:r>
-              <a:rPr sz="1300">
-                <a:solidFill>
-                  <a:srgbClr val="3D5466"/>
-                </a:solidFill>
-                <a:latin typeface="Arial"/>
-              </a:rPr>
-              <a:t>▸  Alle Faktoren erscheinen formal gleichwertig — Berater müssen aktiv gewichten</a:t>
-            </a:r>
-          </a:p>
-          <a:p>
-            <a:pPr>
-              <a:spcBef>
-                <a:spcPts val="400"/>
-              </a:spcBef>
-              <a:spcAft>
-                <a:spcPts val="200"/>
-              </a:spcAft>
-            </a:pPr>
-            <a:r>
-              <a:rPr sz="1300">
-                <a:solidFill>
-                  <a:srgbClr val="3D5466"/>
-                </a:solidFill>
-                <a:latin typeface="Arial"/>
-              </a:rPr>
-              <a:t>▸  Subjektive Unternehmersicht dominiert; externe Verifikation (z. B. Branchendaten) ist nötig</a:t>
-            </a:r>
-          </a:p>
-          <a:p>
-            <a:pPr>
-              <a:spcBef>
-                <a:spcPts val="400"/>
-              </a:spcBef>
-              <a:spcAft>
-                <a:spcPts val="200"/>
-              </a:spcAft>
-            </a:pPr>
-            <a:r>
-              <a:rPr sz="1300">
-                <a:solidFill>
-                  <a:srgbClr val="3D5466"/>
-                </a:solidFill>
-                <a:latin typeface="Arial"/>
-              </a:rPr>
-              <a:t>▸  Die SWOT liefert ein Lagebild, keine Prognose; strategische Dynamik muss separat eingeschätzt werden</a:t>
+              <a:t>▸  Gruppe B – Kostenstruktur &amp; Abhängigkeiten (linke Canvas-Seite)</a:t>
             </a:r>
           </a:p>
         </p:txBody>
@@ -5835,7 +5785,7 @@
                 </a:solidFill>
                 <a:latin typeface="Source Serif 4"/>
               </a:rPr>
-              <a:t>Framework 4: Strategische Ressourcenstärke (Resource-based View)</a:t>
+              <a:t>Framework 3: SWOT als Kreditrisikofilter</a:t>
             </a:r>
           </a:p>
         </p:txBody>
@@ -5861,6 +5811,25 @@
             <a:spAutoFit/>
           </a:bodyPr>
           <a:lstStyle/>
+          <a:p>
+            <a:pPr>
+              <a:spcBef>
+                <a:spcPts val="1000"/>
+              </a:spcBef>
+              <a:spcAft>
+                <a:spcPts val="200"/>
+              </a:spcAft>
+            </a:pPr>
+            <a:r>
+              <a:rPr sz="800" b="1">
+                <a:solidFill>
+                  <a:srgbClr val="78808C"/>
+                </a:solidFill>
+                <a:latin typeface="JetBrains Mono"/>
+              </a:rPr>
+              <a:t>VON DER STRATEGISCHEN SWOT ZUR RISIKOKLASSIFIZIERUNG</a:t>
+            </a:r>
+          </a:p>
           <a:p>
             <a:pPr>
               <a:spcBef>
@@ -5877,7 +5846,7 @@
                 </a:solidFill>
                 <a:latin typeface="Arial"/>
               </a:rPr>
-              <a:t>▸  Beispiele kreditrelevanter VRIN-Ressourcen im Mittelstand:</a:t>
+              <a:t>▸  Kreditrelevante SWOT-Lesart:</a:t>
             </a:r>
           </a:p>
           <a:p>
@@ -5896,7 +5865,7 @@
                 </a:solidFill>
                 <a:latin typeface="Arial"/>
               </a:rPr>
-              <a:t>▸  Spezialisiertes Know-how mit langjähriger Entwicklungszeit (schwer zu kopieren)</a:t>
+              <a:t>▸  Kritische Hinweise zur SWOT im Kreditkontext (nach Welge &amp; Al-Laham, 2012):</a:t>
             </a:r>
           </a:p>
           <a:p>
@@ -5915,7 +5884,7 @@
                 </a:solidFill>
                 <a:latin typeface="Arial"/>
               </a:rPr>
-              <a:t>▸  Exklusivlieferantenverträge oder Zulassungen (selten, nicht substituierbar)</a:t>
+              <a:t>▸  Alle Faktoren erscheinen formal gleichwertig — Berater müssen aktiv gewichten</a:t>
             </a:r>
           </a:p>
           <a:p>
@@ -5934,7 +5903,7 @@
                 </a:solidFill>
                 <a:latin typeface="Arial"/>
               </a:rPr>
-              <a:t>▸  Langfristige Kundenbeziehungen mit Wechselkosten auf Kundenseite (wertvoll, nicht imitierbar)</a:t>
+              <a:t>▸  Subjektive Unternehmersicht dominiert; externe Verifikation (z. B. Branchendaten) ist nötig</a:t>
             </a:r>
           </a:p>
           <a:p>
@@ -5953,7 +5922,7 @@
                 </a:solidFill>
                 <a:latin typeface="Arial"/>
               </a:rPr>
-              <a:t>▸  Qualifizierte Fachkräfte mit spezifischer Expertise (Schlüsselpersonenrisiko = Kehrseite)</a:t>
+              <a:t>▸  Die SWOT liefert ein Lagebild, keine Prognose; strategische Dynamik muss separat eingeschätzt werden</a:t>
             </a:r>
           </a:p>
         </p:txBody>
@@ -6170,7 +6139,7 @@
                 </a:solidFill>
                 <a:latin typeface="JetBrains Mono"/>
               </a:rPr>
-              <a:t>M22  ·  ARBEITSBLATT</a:t>
+              <a:t>M22  ·  INHALT</a:t>
             </a:r>
           </a:p>
         </p:txBody>
@@ -6291,7 +6260,7 @@
                 </a:solidFill>
                 <a:latin typeface="Source Serif 4"/>
               </a:rPr>
-              <a:t>Praxisfall: Präzisionswerk Haller GmbH</a:t>
+              <a:t>Framework 4: Strategische Ressourcenstärke (Resource-based View)</a:t>
             </a:r>
           </a:p>
         </p:txBody>
@@ -6304,8 +6273,8 @@
         </p:nvSpPr>
         <p:spPr>
           <a:xfrm>
-            <a:off x="685800" y="1554480"/>
-            <a:ext cx="10817352" cy="3840480"/>
+            <a:off x="685800" y="1417320"/>
+            <a:ext cx="10817352" cy="5029200"/>
           </a:xfrm>
           <a:prstGeom prst="rect">
             <a:avLst/>
@@ -6327,13 +6296,13 @@
               </a:spcAft>
             </a:pPr>
             <a:r>
-              <a:rPr sz="1400">
+              <a:rPr sz="1300">
                 <a:solidFill>
                   <a:srgbClr val="3D5466"/>
                 </a:solidFill>
                 <a:latin typeface="Arial"/>
               </a:rPr>
-              <a:t>▸  Unternehmensportrait</a:t>
+              <a:t>▸  Beispiele kreditrelevanter VRIN-Ressourcen im Mittelstand:</a:t>
             </a:r>
           </a:p>
           <a:p>
@@ -6346,13 +6315,13 @@
               </a:spcAft>
             </a:pPr>
             <a:r>
-              <a:rPr sz="1400">
+              <a:rPr sz="1300">
                 <a:solidFill>
                   <a:srgbClr val="3D5466"/>
                 </a:solidFill>
                 <a:latin typeface="Arial"/>
               </a:rPr>
-              <a:t>▸  Kennzahlen Geschäftsjahr 2024:</a:t>
+              <a:t>▸  Spezialisiertes Know-how mit langjähriger Entwicklungszeit (schwer zu kopieren)</a:t>
             </a:r>
           </a:p>
           <a:p>
@@ -6365,13 +6334,13 @@
               </a:spcAft>
             </a:pPr>
             <a:r>
-              <a:rPr sz="1400">
+              <a:rPr sz="1300">
                 <a:solidFill>
                   <a:srgbClr val="3D5466"/>
                 </a:solidFill>
                 <a:latin typeface="Arial"/>
               </a:rPr>
-              <a:t>▸  *Branchenbenchmark: VDMA Maschinenbau-Statistik 2024; zeb-Mittelstandsstudie 2023</a:t>
+              <a:t>▸  Exklusivlieferantenverträge oder Zulassungen (selten, nicht substituierbar)</a:t>
             </a:r>
           </a:p>
           <a:p>
@@ -6384,13 +6353,13 @@
               </a:spcAft>
             </a:pPr>
             <a:r>
-              <a:rPr sz="1400">
+              <a:rPr sz="1300">
                 <a:solidFill>
                   <a:srgbClr val="3D5466"/>
                 </a:solidFill>
                 <a:latin typeface="Arial"/>
               </a:rPr>
-              <a:t>▸  Strategische Ausgangssituation:</a:t>
+              <a:t>▸  Langfristige Kundenbeziehungen mit Wechselkosten auf Kundenseite (wertvoll, nicht imitierbar)</a:t>
             </a:r>
           </a:p>
           <a:p>
@@ -6403,13 +6372,13 @@
               </a:spcAft>
             </a:pPr>
             <a:r>
-              <a:rPr sz="1400">
+              <a:rPr sz="1300">
                 <a:solidFill>
                   <a:srgbClr val="3D5466"/>
                 </a:solidFill>
                 <a:latin typeface="Arial"/>
               </a:rPr>
-              <a:t>▸  Drei Hauptkunden, einer davon (Maschinenbaukonzern aus Baden-Württemberg) stellt 60 % des Jahresumsatzes</a:t>
+              <a:t>▸  Qualifizierte Fachkräfte mit spezifischer Expertise (Schlüsselpersonenrisiko = Kehrseite)</a:t>
             </a:r>
           </a:p>
         </p:txBody>
@@ -6417,84 +6386,6 @@
       <p:sp>
         <p:nvSpPr>
           <p:cNvPr id="9" name="Rectangle 8"/>
-          <p:cNvSpPr/>
-          <p:nvPr/>
-        </p:nvSpPr>
-        <p:spPr>
-          <a:xfrm>
-            <a:off x="685800" y="5486400"/>
-            <a:ext cx="10817352" cy="640080"/>
-          </a:xfrm>
-          <a:prstGeom prst="rect">
-            <a:avLst/>
-          </a:prstGeom>
-          <a:solidFill>
-            <a:srgbClr val="1F2C56"/>
-          </a:solidFill>
-          <a:ln>
-            <a:noFill/>
-          </a:ln>
-        </p:spPr>
-        <p:style>
-          <a:lnRef idx="1">
-            <a:schemeClr val="accent1"/>
-          </a:lnRef>
-          <a:fillRef idx="3">
-            <a:schemeClr val="accent1"/>
-          </a:fillRef>
-          <a:effectRef idx="2">
-            <a:schemeClr val="accent1"/>
-          </a:effectRef>
-          <a:fontRef idx="minor">
-            <a:schemeClr val="lt1"/>
-          </a:fontRef>
-        </p:style>
-        <p:txBody>
-          <a:bodyPr rtlCol="0" anchor="ctr"/>
-          <a:lstStyle/>
-          <a:p>
-            <a:pPr algn="ctr"/>
-          </a:p>
-        </p:txBody>
-      </p:sp>
-      <p:sp>
-        <p:nvSpPr>
-          <p:cNvPr id="10" name="TextBox 9"/>
-          <p:cNvSpPr txBox="1"/>
-          <p:nvPr/>
-        </p:nvSpPr>
-        <p:spPr>
-          <a:xfrm>
-            <a:off x="868680" y="5596128"/>
-            <a:ext cx="10451592" cy="457200"/>
-          </a:xfrm>
-          <a:prstGeom prst="rect">
-            <a:avLst/>
-          </a:prstGeom>
-          <a:noFill/>
-        </p:spPr>
-        <p:txBody>
-          <a:bodyPr wrap="square">
-            <a:spAutoFit/>
-          </a:bodyPr>
-          <a:lstStyle/>
-          <a:p>
-            <a:pPr algn="l"/>
-            <a:r>
-              <a:rPr sz="1300" b="1" i="0">
-                <a:solidFill>
-                  <a:srgbClr val="FFFFFF"/>
-                </a:solidFill>
-                <a:latin typeface="Arial"/>
-              </a:rPr>
-              <a:t>→  Bearbeitung im Teilnehmer-Workbook (Arbeitsblatt mit Ausfüllfeldern)</a:t>
-            </a:r>
-          </a:p>
-        </p:txBody>
-      </p:sp>
-      <p:sp>
-        <p:nvSpPr>
-          <p:cNvPr id="11" name="Rectangle 10"/>
           <p:cNvSpPr/>
           <p:nvPr/>
         </p:nvSpPr>
@@ -6537,7 +6428,7 @@
       </p:sp>
       <p:sp>
         <p:nvSpPr>
-          <p:cNvPr id="12" name="TextBox 11"/>
+          <p:cNvPr id="10" name="TextBox 9"/>
           <p:cNvSpPr txBox="1"/>
           <p:nvPr/>
         </p:nvSpPr>
@@ -6704,7 +6595,7 @@
                 </a:solidFill>
                 <a:latin typeface="JetBrains Mono"/>
               </a:rPr>
-              <a:t>M22  ·  INHALT</a:t>
+              <a:t>M22  ·  ARBEITSBLATT</a:t>
             </a:r>
           </a:p>
         </p:txBody>
@@ -6825,7 +6716,7 @@
                 </a:solidFill>
                 <a:latin typeface="Source Serif 4"/>
               </a:rPr>
-              <a:t>Kennzahlen- und Formelkarte: Qualitative Kreditwürdigkeitsanalyse</a:t>
+              <a:t>Praxisfall: Präzisionswerk Haller GmbH</a:t>
             </a:r>
           </a:p>
         </p:txBody>
@@ -6838,8 +6729,8 @@
         </p:nvSpPr>
         <p:spPr>
           <a:xfrm>
-            <a:off x="685800" y="1417320"/>
-            <a:ext cx="10817352" cy="5029200"/>
+            <a:off x="685800" y="1554480"/>
+            <a:ext cx="10817352" cy="3840480"/>
           </a:xfrm>
           <a:prstGeom prst="rect">
             <a:avLst/>
@@ -6854,39 +6745,96 @@
           <a:p>
             <a:pPr>
               <a:spcBef>
-                <a:spcPts val="1000"/>
+                <a:spcPts val="400"/>
               </a:spcBef>
               <a:spcAft>
                 <a:spcPts val="200"/>
               </a:spcAft>
             </a:pPr>
             <a:r>
-              <a:rPr sz="800" b="1">
-                <a:solidFill>
-                  <a:srgbClr val="78808C"/>
-                </a:solidFill>
-                <a:latin typeface="JetBrains Mono"/>
-              </a:rPr>
-              <a:t>STRATEGISCHE RED-FLAG-CHECKLISTE</a:t>
+              <a:rPr sz="1400">
+                <a:solidFill>
+                  <a:srgbClr val="3D5466"/>
+                </a:solidFill>
+                <a:latin typeface="Arial"/>
+              </a:rPr>
+              <a:t>▸  Unternehmensportrait</a:t>
             </a:r>
           </a:p>
           <a:p>
             <a:pPr>
               <a:spcBef>
-                <a:spcPts val="1000"/>
+                <a:spcPts val="400"/>
               </a:spcBef>
               <a:spcAft>
                 <a:spcPts val="200"/>
               </a:spcAft>
             </a:pPr>
             <a:r>
-              <a:rPr sz="800" b="1">
-                <a:solidFill>
-                  <a:srgbClr val="78808C"/>
-                </a:solidFill>
-                <a:latin typeface="JetBrains Mono"/>
-              </a:rPr>
-              <a:t>QUANTITATIVE UNTERSTÜTZUNGSKENNZAHLEN</a:t>
+              <a:rPr sz="1400">
+                <a:solidFill>
+                  <a:srgbClr val="3D5466"/>
+                </a:solidFill>
+                <a:latin typeface="Arial"/>
+              </a:rPr>
+              <a:t>▸  Kennzahlen Geschäftsjahr 2024:</a:t>
+            </a:r>
+          </a:p>
+          <a:p>
+            <a:pPr>
+              <a:spcBef>
+                <a:spcPts val="400"/>
+              </a:spcBef>
+              <a:spcAft>
+                <a:spcPts val="200"/>
+              </a:spcAft>
+            </a:pPr>
+            <a:r>
+              <a:rPr sz="1400">
+                <a:solidFill>
+                  <a:srgbClr val="3D5466"/>
+                </a:solidFill>
+                <a:latin typeface="Arial"/>
+              </a:rPr>
+              <a:t>▸  *Branchenbenchmark: VDMA Maschinenbau-Statistik 2024; zeb-Mittelstandsstudie 2023</a:t>
+            </a:r>
+          </a:p>
+          <a:p>
+            <a:pPr>
+              <a:spcBef>
+                <a:spcPts val="400"/>
+              </a:spcBef>
+              <a:spcAft>
+                <a:spcPts val="200"/>
+              </a:spcAft>
+            </a:pPr>
+            <a:r>
+              <a:rPr sz="1400">
+                <a:solidFill>
+                  <a:srgbClr val="3D5466"/>
+                </a:solidFill>
+                <a:latin typeface="Arial"/>
+              </a:rPr>
+              <a:t>▸  Strategische Ausgangssituation:</a:t>
+            </a:r>
+          </a:p>
+          <a:p>
+            <a:pPr>
+              <a:spcBef>
+                <a:spcPts val="400"/>
+              </a:spcBef>
+              <a:spcAft>
+                <a:spcPts val="200"/>
+              </a:spcAft>
+            </a:pPr>
+            <a:r>
+              <a:rPr sz="1400">
+                <a:solidFill>
+                  <a:srgbClr val="3D5466"/>
+                </a:solidFill>
+                <a:latin typeface="Arial"/>
+              </a:rPr>
+              <a:t>▸  Drei Hauptkunden, einer davon (Maschinenbaukonzern aus Baden-Württemberg) stellt 60 % des Jahresumsatzes</a:t>
             </a:r>
           </a:p>
         </p:txBody>
@@ -6894,6 +6842,84 @@
       <p:sp>
         <p:nvSpPr>
           <p:cNvPr id="9" name="Rectangle 8"/>
+          <p:cNvSpPr/>
+          <p:nvPr/>
+        </p:nvSpPr>
+        <p:spPr>
+          <a:xfrm>
+            <a:off x="685800" y="5486400"/>
+            <a:ext cx="10817352" cy="640080"/>
+          </a:xfrm>
+          <a:prstGeom prst="rect">
+            <a:avLst/>
+          </a:prstGeom>
+          <a:solidFill>
+            <a:srgbClr val="1F2C56"/>
+          </a:solidFill>
+          <a:ln>
+            <a:noFill/>
+          </a:ln>
+        </p:spPr>
+        <p:style>
+          <a:lnRef idx="1">
+            <a:schemeClr val="accent1"/>
+          </a:lnRef>
+          <a:fillRef idx="3">
+            <a:schemeClr val="accent1"/>
+          </a:fillRef>
+          <a:effectRef idx="2">
+            <a:schemeClr val="accent1"/>
+          </a:effectRef>
+          <a:fontRef idx="minor">
+            <a:schemeClr val="lt1"/>
+          </a:fontRef>
+        </p:style>
+        <p:txBody>
+          <a:bodyPr rtlCol="0" anchor="ctr"/>
+          <a:lstStyle/>
+          <a:p>
+            <a:pPr algn="ctr"/>
+          </a:p>
+        </p:txBody>
+      </p:sp>
+      <p:sp>
+        <p:nvSpPr>
+          <p:cNvPr id="10" name="TextBox 9"/>
+          <p:cNvSpPr txBox="1"/>
+          <p:nvPr/>
+        </p:nvSpPr>
+        <p:spPr>
+          <a:xfrm>
+            <a:off x="868680" y="5596128"/>
+            <a:ext cx="10451592" cy="457200"/>
+          </a:xfrm>
+          <a:prstGeom prst="rect">
+            <a:avLst/>
+          </a:prstGeom>
+          <a:noFill/>
+        </p:spPr>
+        <p:txBody>
+          <a:bodyPr wrap="square">
+            <a:spAutoFit/>
+          </a:bodyPr>
+          <a:lstStyle/>
+          <a:p>
+            <a:pPr algn="l"/>
+            <a:r>
+              <a:rPr sz="1300" b="1" i="0">
+                <a:solidFill>
+                  <a:srgbClr val="FFFFFF"/>
+                </a:solidFill>
+                <a:latin typeface="Arial"/>
+              </a:rPr>
+              <a:t>→  Bearbeitung im Teilnehmer-Workbook (Arbeitsblatt mit Ausfüllfeldern)</a:t>
+            </a:r>
+          </a:p>
+        </p:txBody>
+      </p:sp>
+      <p:sp>
+        <p:nvSpPr>
+          <p:cNvPr id="11" name="Rectangle 10"/>
           <p:cNvSpPr/>
           <p:nvPr/>
         </p:nvSpPr>
@@ -6936,7 +6962,7 @@
       </p:sp>
       <p:sp>
         <p:nvSpPr>
-          <p:cNvPr id="10" name="TextBox 9"/>
+          <p:cNvPr id="12" name="TextBox 11"/>
           <p:cNvSpPr txBox="1"/>
           <p:nvPr/>
         </p:nvSpPr>
@@ -6978,6 +7004,405 @@
 </file>
 
 <file path=ppt/slides/slide15.xml><?xml version="1.0" encoding="utf-8"?>
+<p:sld xmlns:a="http://schemas.openxmlformats.org/drawingml/2006/main" xmlns:p="http://schemas.openxmlformats.org/presentationml/2006/main" xmlns:r="http://schemas.openxmlformats.org/officeDocument/2006/relationships">
+  <p:cSld>
+    <p:spTree>
+      <p:nvGrpSpPr>
+        <p:cNvPr id="1" name=""/>
+        <p:cNvGrpSpPr/>
+        <p:nvPr/>
+      </p:nvGrpSpPr>
+      <p:grpSpPr/>
+      <p:sp>
+        <p:nvSpPr>
+          <p:cNvPr id="2" name="Rectangle 1"/>
+          <p:cNvSpPr/>
+          <p:nvPr/>
+        </p:nvSpPr>
+        <p:spPr>
+          <a:xfrm>
+            <a:off x="0" y="0"/>
+            <a:ext cx="12188952" cy="6858000"/>
+          </a:xfrm>
+          <a:prstGeom prst="rect">
+            <a:avLst/>
+          </a:prstGeom>
+          <a:solidFill>
+            <a:srgbClr val="EDEDF3"/>
+          </a:solidFill>
+          <a:ln>
+            <a:noFill/>
+          </a:ln>
+        </p:spPr>
+        <p:style>
+          <a:lnRef idx="1">
+            <a:schemeClr val="accent1"/>
+          </a:lnRef>
+          <a:fillRef idx="3">
+            <a:schemeClr val="accent1"/>
+          </a:fillRef>
+          <a:effectRef idx="2">
+            <a:schemeClr val="accent1"/>
+          </a:effectRef>
+          <a:fontRef idx="minor">
+            <a:schemeClr val="lt1"/>
+          </a:fontRef>
+        </p:style>
+        <p:txBody>
+          <a:bodyPr rtlCol="0" anchor="ctr"/>
+          <a:lstStyle/>
+          <a:p>
+            <a:pPr algn="ctr"/>
+          </a:p>
+        </p:txBody>
+      </p:sp>
+      <p:sp>
+        <p:nvSpPr>
+          <p:cNvPr id="3" name="Rectangle 2"/>
+          <p:cNvSpPr/>
+          <p:nvPr/>
+        </p:nvSpPr>
+        <p:spPr>
+          <a:xfrm>
+            <a:off x="0" y="0"/>
+            <a:ext cx="12188952" cy="50292"/>
+          </a:xfrm>
+          <a:prstGeom prst="rect">
+            <a:avLst/>
+          </a:prstGeom>
+          <a:solidFill>
+            <a:srgbClr val="1F2C56"/>
+          </a:solidFill>
+          <a:ln>
+            <a:noFill/>
+          </a:ln>
+        </p:spPr>
+        <p:style>
+          <a:lnRef idx="1">
+            <a:schemeClr val="accent1"/>
+          </a:lnRef>
+          <a:fillRef idx="3">
+            <a:schemeClr val="accent1"/>
+          </a:fillRef>
+          <a:effectRef idx="2">
+            <a:schemeClr val="accent1"/>
+          </a:effectRef>
+          <a:fontRef idx="minor">
+            <a:schemeClr val="lt1"/>
+          </a:fontRef>
+        </p:style>
+        <p:txBody>
+          <a:bodyPr rtlCol="0" anchor="ctr"/>
+          <a:lstStyle/>
+          <a:p>
+            <a:pPr algn="ctr"/>
+          </a:p>
+        </p:txBody>
+      </p:sp>
+      <p:sp>
+        <p:nvSpPr>
+          <p:cNvPr id="4" name="TextBox 3"/>
+          <p:cNvSpPr txBox="1"/>
+          <p:nvPr/>
+        </p:nvSpPr>
+        <p:spPr>
+          <a:xfrm>
+            <a:off x="685800" y="109728"/>
+            <a:ext cx="10817352" cy="228600"/>
+          </a:xfrm>
+          <a:prstGeom prst="rect">
+            <a:avLst/>
+          </a:prstGeom>
+          <a:noFill/>
+        </p:spPr>
+        <p:txBody>
+          <a:bodyPr wrap="none">
+            <a:spAutoFit/>
+          </a:bodyPr>
+          <a:lstStyle/>
+          <a:p>
+            <a:pPr algn="l"/>
+            <a:r>
+              <a:rPr sz="750">
+                <a:solidFill>
+                  <a:srgbClr val="78808C"/>
+                </a:solidFill>
+                <a:latin typeface="JetBrains Mono"/>
+              </a:rPr>
+              <a:t>M22  ·  INHALT</a:t>
+            </a:r>
+          </a:p>
+        </p:txBody>
+      </p:sp>
+      <p:sp>
+        <p:nvSpPr>
+          <p:cNvPr id="5" name="Rectangle 4"/>
+          <p:cNvSpPr/>
+          <p:nvPr/>
+        </p:nvSpPr>
+        <p:spPr>
+          <a:xfrm>
+            <a:off x="0" y="1234440"/>
+            <a:ext cx="12188952" cy="12700"/>
+          </a:xfrm>
+          <a:prstGeom prst="rect">
+            <a:avLst/>
+          </a:prstGeom>
+          <a:solidFill>
+            <a:srgbClr val="D8DFE4"/>
+          </a:solidFill>
+          <a:ln>
+            <a:noFill/>
+          </a:ln>
+        </p:spPr>
+        <p:style>
+          <a:lnRef idx="1">
+            <a:schemeClr val="accent1"/>
+          </a:lnRef>
+          <a:fillRef idx="3">
+            <a:schemeClr val="accent1"/>
+          </a:fillRef>
+          <a:effectRef idx="2">
+            <a:schemeClr val="accent1"/>
+          </a:effectRef>
+          <a:fontRef idx="minor">
+            <a:schemeClr val="lt1"/>
+          </a:fontRef>
+        </p:style>
+        <p:txBody>
+          <a:bodyPr rtlCol="0" anchor="ctr"/>
+          <a:lstStyle/>
+          <a:p>
+            <a:pPr algn="ctr"/>
+          </a:p>
+        </p:txBody>
+      </p:sp>
+      <p:sp>
+        <p:nvSpPr>
+          <p:cNvPr id="6" name="Rectangle 5"/>
+          <p:cNvSpPr/>
+          <p:nvPr/>
+        </p:nvSpPr>
+        <p:spPr>
+          <a:xfrm>
+            <a:off x="685800" y="502920"/>
+            <a:ext cx="36576" cy="658368"/>
+          </a:xfrm>
+          <a:prstGeom prst="rect">
+            <a:avLst/>
+          </a:prstGeom>
+          <a:solidFill>
+            <a:srgbClr val="D9C089"/>
+          </a:solidFill>
+          <a:ln>
+            <a:noFill/>
+          </a:ln>
+        </p:spPr>
+        <p:style>
+          <a:lnRef idx="1">
+            <a:schemeClr val="accent1"/>
+          </a:lnRef>
+          <a:fillRef idx="3">
+            <a:schemeClr val="accent1"/>
+          </a:fillRef>
+          <a:effectRef idx="2">
+            <a:schemeClr val="accent1"/>
+          </a:effectRef>
+          <a:fontRef idx="minor">
+            <a:schemeClr val="lt1"/>
+          </a:fontRef>
+        </p:style>
+        <p:txBody>
+          <a:bodyPr rtlCol="0" anchor="ctr"/>
+          <a:lstStyle/>
+          <a:p>
+            <a:pPr algn="ctr"/>
+          </a:p>
+        </p:txBody>
+      </p:sp>
+      <p:sp>
+        <p:nvSpPr>
+          <p:cNvPr id="7" name="TextBox 6"/>
+          <p:cNvSpPr txBox="1"/>
+          <p:nvPr/>
+        </p:nvSpPr>
+        <p:spPr>
+          <a:xfrm>
+            <a:off x="813816" y="502920"/>
+            <a:ext cx="10634472" cy="685800"/>
+          </a:xfrm>
+          <a:prstGeom prst="rect">
+            <a:avLst/>
+          </a:prstGeom>
+          <a:noFill/>
+        </p:spPr>
+        <p:txBody>
+          <a:bodyPr wrap="square">
+            <a:spAutoFit/>
+          </a:bodyPr>
+          <a:lstStyle/>
+          <a:p>
+            <a:pPr algn="l"/>
+            <a:r>
+              <a:rPr sz="2400" b="1" i="0">
+                <a:solidFill>
+                  <a:srgbClr val="1F2C56"/>
+                </a:solidFill>
+                <a:latin typeface="Source Serif 4"/>
+              </a:rPr>
+              <a:t>Kennzahlen- und Formelkarte: Qualitative Kreditwürdigkeitsanalyse</a:t>
+            </a:r>
+          </a:p>
+        </p:txBody>
+      </p:sp>
+      <p:sp>
+        <p:nvSpPr>
+          <p:cNvPr id="8" name="TextBox 7"/>
+          <p:cNvSpPr txBox="1"/>
+          <p:nvPr/>
+        </p:nvSpPr>
+        <p:spPr>
+          <a:xfrm>
+            <a:off x="685800" y="1417320"/>
+            <a:ext cx="10817352" cy="5029200"/>
+          </a:xfrm>
+          <a:prstGeom prst="rect">
+            <a:avLst/>
+          </a:prstGeom>
+          <a:noFill/>
+        </p:spPr>
+        <p:txBody>
+          <a:bodyPr wrap="square">
+            <a:spAutoFit/>
+          </a:bodyPr>
+          <a:lstStyle/>
+          <a:p>
+            <a:pPr>
+              <a:spcBef>
+                <a:spcPts val="1000"/>
+              </a:spcBef>
+              <a:spcAft>
+                <a:spcPts val="200"/>
+              </a:spcAft>
+            </a:pPr>
+            <a:r>
+              <a:rPr sz="800" b="1">
+                <a:solidFill>
+                  <a:srgbClr val="78808C"/>
+                </a:solidFill>
+                <a:latin typeface="JetBrains Mono"/>
+              </a:rPr>
+              <a:t>STRATEGISCHE RED-FLAG-CHECKLISTE</a:t>
+            </a:r>
+          </a:p>
+          <a:p>
+            <a:pPr>
+              <a:spcBef>
+                <a:spcPts val="1000"/>
+              </a:spcBef>
+              <a:spcAft>
+                <a:spcPts val="200"/>
+              </a:spcAft>
+            </a:pPr>
+            <a:r>
+              <a:rPr sz="800" b="1">
+                <a:solidFill>
+                  <a:srgbClr val="78808C"/>
+                </a:solidFill>
+                <a:latin typeface="JetBrains Mono"/>
+              </a:rPr>
+              <a:t>QUANTITATIVE UNTERSTÜTZUNGSKENNZAHLEN</a:t>
+            </a:r>
+          </a:p>
+        </p:txBody>
+      </p:sp>
+      <p:sp>
+        <p:nvSpPr>
+          <p:cNvPr id="9" name="Rectangle 8"/>
+          <p:cNvSpPr/>
+          <p:nvPr/>
+        </p:nvSpPr>
+        <p:spPr>
+          <a:xfrm>
+            <a:off x="0" y="6510528"/>
+            <a:ext cx="12188952" cy="347472"/>
+          </a:xfrm>
+          <a:prstGeom prst="rect">
+            <a:avLst/>
+          </a:prstGeom>
+          <a:solidFill>
+            <a:srgbClr val="0A1937"/>
+          </a:solidFill>
+          <a:ln>
+            <a:noFill/>
+          </a:ln>
+        </p:spPr>
+        <p:style>
+          <a:lnRef idx="1">
+            <a:schemeClr val="accent1"/>
+          </a:lnRef>
+          <a:fillRef idx="3">
+            <a:schemeClr val="accent1"/>
+          </a:fillRef>
+          <a:effectRef idx="2">
+            <a:schemeClr val="accent1"/>
+          </a:effectRef>
+          <a:fontRef idx="minor">
+            <a:schemeClr val="lt1"/>
+          </a:fontRef>
+        </p:style>
+        <p:txBody>
+          <a:bodyPr rtlCol="0" anchor="ctr"/>
+          <a:lstStyle/>
+          <a:p>
+            <a:pPr algn="ctr"/>
+          </a:p>
+        </p:txBody>
+      </p:sp>
+      <p:sp>
+        <p:nvSpPr>
+          <p:cNvPr id="10" name="TextBox 9"/>
+          <p:cNvSpPr txBox="1"/>
+          <p:nvPr/>
+        </p:nvSpPr>
+        <p:spPr>
+          <a:xfrm>
+            <a:off x="685800" y="6583680"/>
+            <a:ext cx="6490411" cy="256032"/>
+          </a:xfrm>
+          <a:prstGeom prst="rect">
+            <a:avLst/>
+          </a:prstGeom>
+          <a:noFill/>
+        </p:spPr>
+        <p:txBody>
+          <a:bodyPr wrap="none">
+            <a:spAutoFit/>
+          </a:bodyPr>
+          <a:lstStyle/>
+          <a:p>
+            <a:pPr algn="l"/>
+            <a:r>
+              <a:rPr sz="700">
+                <a:solidFill>
+                  <a:srgbClr val="A0B4D2"/>
+                </a:solidFill>
+                <a:latin typeface="JetBrains Mono"/>
+              </a:rPr>
+              <a:t>FKB Campus  ·  M22</a:t>
+            </a:r>
+          </a:p>
+        </p:txBody>
+      </p:sp>
+    </p:spTree>
+  </p:cSld>
+  <p:clrMapOvr>
+    <a:masterClrMapping/>
+  </p:clrMapOvr>
+</p:sld>
+</file>
+
+<file path=ppt/slides/slide16.xml><?xml version="1.0" encoding="utf-8"?>
 <p:sld xmlns:a="http://schemas.openxmlformats.org/drawingml/2006/main" xmlns:p="http://schemas.openxmlformats.org/presentationml/2006/main" xmlns:r="http://schemas.openxmlformats.org/officeDocument/2006/relationships">
   <p:cSld>
     <p:spTree>
@@ -7794,7 +8219,7 @@
 </p:sld>
 </file>
 
-<file path=ppt/slides/slide16.xml><?xml version="1.0" encoding="utf-8"?>
+<file path=ppt/slides/slide17.xml><?xml version="1.0" encoding="utf-8"?>
 <p:sld xmlns:a="http://schemas.openxmlformats.org/drawingml/2006/main" xmlns:p="http://schemas.openxmlformats.org/presentationml/2006/main" xmlns:r="http://schemas.openxmlformats.org/officeDocument/2006/relationships">
   <p:cSld>
     <p:spTree>
@@ -8538,7 +8963,7 @@
 </p:sld>
 </file>
 
-<file path=ppt/slides/slide17.xml><?xml version="1.0" encoding="utf-8"?>
+<file path=ppt/slides/slide18.xml><?xml version="1.0" encoding="utf-8"?>
 <p:sld xmlns:a="http://schemas.openxmlformats.org/drawingml/2006/main" xmlns:p="http://schemas.openxmlformats.org/presentationml/2006/main" xmlns:r="http://schemas.openxmlformats.org/officeDocument/2006/relationships">
   <p:cSld>
     <p:spTree>
@@ -8892,7 +9317,7 @@
 </p:sld>
 </file>
 
-<file path=ppt/slides/slide18.xml><?xml version="1.0" encoding="utf-8"?>
+<file path=ppt/slides/slide19.xml><?xml version="1.0" encoding="utf-8"?>
 <p:sld xmlns:a="http://schemas.openxmlformats.org/drawingml/2006/main" xmlns:p="http://schemas.openxmlformats.org/presentationml/2006/main" xmlns:r="http://schemas.openxmlformats.org/officeDocument/2006/relationships">
   <p:cSld>
     <p:spTree>
@@ -10272,7 +10697,7 @@
                 </a:solidFill>
                 <a:latin typeface="JetBrains Mono"/>
               </a:rPr>
-              <a:t>M22  ·  INHALT</a:t>
+              <a:t>AGENDA  ·  M22</a:t>
             </a:r>
           </a:p>
         </p:txBody>
@@ -10322,57 +10747,14 @@
       </p:sp>
       <p:sp>
         <p:nvSpPr>
-          <p:cNvPr id="6" name="Rectangle 5"/>
-          <p:cNvSpPr/>
+          <p:cNvPr id="6" name="TextBox 5"/>
+          <p:cNvSpPr txBox="1"/>
           <p:nvPr/>
         </p:nvSpPr>
         <p:spPr>
           <a:xfrm>
             <a:off x="685800" y="502920"/>
-            <a:ext cx="36576" cy="658368"/>
-          </a:xfrm>
-          <a:prstGeom prst="rect">
-            <a:avLst/>
-          </a:prstGeom>
-          <a:solidFill>
-            <a:srgbClr val="D9C089"/>
-          </a:solidFill>
-          <a:ln>
-            <a:noFill/>
-          </a:ln>
-        </p:spPr>
-        <p:style>
-          <a:lnRef idx="1">
-            <a:schemeClr val="accent1"/>
-          </a:lnRef>
-          <a:fillRef idx="3">
-            <a:schemeClr val="accent1"/>
-          </a:fillRef>
-          <a:effectRef idx="2">
-            <a:schemeClr val="accent1"/>
-          </a:effectRef>
-          <a:fontRef idx="minor">
-            <a:schemeClr val="lt1"/>
-          </a:fontRef>
-        </p:style>
-        <p:txBody>
-          <a:bodyPr rtlCol="0" anchor="ctr"/>
-          <a:lstStyle/>
-          <a:p>
-            <a:pPr algn="ctr"/>
-          </a:p>
-        </p:txBody>
-      </p:sp>
-      <p:sp>
-        <p:nvSpPr>
-          <p:cNvPr id="7" name="TextBox 6"/>
-          <p:cNvSpPr txBox="1"/>
-          <p:nvPr/>
-        </p:nvSpPr>
-        <p:spPr>
-          <a:xfrm>
-            <a:off x="813816" y="502920"/>
-            <a:ext cx="10634472" cy="685800"/>
+            <a:ext cx="10817352" cy="658368"/>
           </a:xfrm>
           <a:prstGeom prst="rect">
             <a:avLst/>
@@ -10387,27 +10769,27 @@
           <a:p>
             <a:pPr algn="l"/>
             <a:r>
-              <a:rPr sz="2400" b="1" i="0">
+              <a:rPr sz="2600" b="1" i="0">
                 <a:solidFill>
                   <a:srgbClr val="1F2C56"/>
                 </a:solidFill>
                 <a:latin typeface="Source Serif 4"/>
               </a:rPr>
-              <a:t>Theoretischer Hintergrund: Warum Strategie zur Kreditwürdigkeit gehört</a:t>
-            </a:r>
-          </a:p>
-        </p:txBody>
-      </p:sp>
-      <p:sp>
-        <p:nvSpPr>
-          <p:cNvPr id="8" name="TextBox 7"/>
+              <a:t>So läuft das Modul</a:t>
+            </a:r>
+          </a:p>
+        </p:txBody>
+      </p:sp>
+      <p:sp>
+        <p:nvSpPr>
+          <p:cNvPr id="7" name="TextBox 6"/>
           <p:cNvSpPr txBox="1"/>
           <p:nvPr/>
         </p:nvSpPr>
         <p:spPr>
           <a:xfrm>
-            <a:off x="685800" y="1417320"/>
-            <a:ext cx="10817352" cy="5029200"/>
+            <a:off x="685800" y="1463040"/>
+            <a:ext cx="10817352" cy="4937760"/>
           </a:xfrm>
           <a:prstGeom prst="rect">
             <a:avLst/>
@@ -10422,65 +10804,267 @@
           <a:p>
             <a:pPr>
               <a:spcBef>
-                <a:spcPts val="1000"/>
+                <a:spcPts val="700"/>
               </a:spcBef>
               <a:spcAft>
-                <a:spcPts val="200"/>
+                <a:spcPts val="100"/>
               </a:spcAft>
             </a:pPr>
             <a:r>
-              <a:rPr sz="800" b="1">
+              <a:rPr sz="1200">
                 <a:solidFill>
                   <a:srgbClr val="78808C"/>
                 </a:solidFill>
-                <a:latin typeface="JetBrains Mono"/>
-              </a:rPr>
-              <a:t>VOM BILANZBILD ZUM ZUKUNFTSURTEIL</a:t>
+                <a:latin typeface="Consolas"/>
+              </a:rPr>
+              <a:t>0–10        </a:t>
+            </a:r>
+            <a:r>
+              <a:rPr sz="1500" b="1">
+                <a:solidFill>
+                  <a:srgbClr val="3D5466"/>
+                </a:solidFill>
+                <a:latin typeface="Arial"/>
+              </a:rPr>
+              <a:t>  Einstieg &amp; Aktivierung</a:t>
+            </a:r>
+            <a:r>
+              <a:rPr sz="1200">
+                <a:solidFill>
+                  <a:srgbClr val="78808C"/>
+                </a:solidFill>
+                <a:latin typeface="Arial"/>
+              </a:rPr>
+              <a:t>  ·  Blitzlicht, Plenum</a:t>
             </a:r>
           </a:p>
           <a:p>
             <a:pPr>
               <a:spcBef>
-                <a:spcPts val="1000"/>
+                <a:spcPts val="700"/>
               </a:spcBef>
               <a:spcAft>
-                <a:spcPts val="200"/>
+                <a:spcPts val="100"/>
               </a:spcAft>
             </a:pPr>
             <a:r>
-              <a:rPr sz="800" b="1">
+              <a:rPr sz="1200">
                 <a:solidFill>
                   <a:srgbClr val="78808C"/>
                 </a:solidFill>
-                <a:latin typeface="JetBrains Mono"/>
-              </a:rPr>
-              <a:t>DAS DREI-EBENEN-MODELL DER QUALITATIVEN KREDITWÜRDIGKEITSANALYSE</a:t>
+                <a:latin typeface="Consolas"/>
+              </a:rPr>
+              <a:t>10–30       </a:t>
+            </a:r>
+            <a:r>
+              <a:rPr sz="1500" b="1">
+                <a:solidFill>
+                  <a:srgbClr val="3D5466"/>
+                </a:solidFill>
+                <a:latin typeface="Arial"/>
+              </a:rPr>
+              <a:t>  Theorie-Input</a:t>
+            </a:r>
+            <a:r>
+              <a:rPr sz="1200">
+                <a:solidFill>
+                  <a:srgbClr val="78808C"/>
+                </a:solidFill>
+                <a:latin typeface="Arial"/>
+              </a:rPr>
+              <a:t>  ·  Trainer-Input</a:t>
             </a:r>
           </a:p>
           <a:p>
             <a:pPr>
               <a:spcBef>
-                <a:spcPts val="400"/>
+                <a:spcPts val="700"/>
               </a:spcBef>
               <a:spcAft>
-                <a:spcPts val="200"/>
+                <a:spcPts val="100"/>
               </a:spcAft>
             </a:pPr>
             <a:r>
-              <a:rPr sz="1300">
+              <a:rPr sz="1200">
+                <a:solidFill>
+                  <a:srgbClr val="78808C"/>
+                </a:solidFill>
+                <a:latin typeface="Consolas"/>
+              </a:rPr>
+              <a:t>30–55       </a:t>
+            </a:r>
+            <a:r>
+              <a:rPr sz="1500" b="1">
                 <a:solidFill>
                   <a:srgbClr val="3D5466"/>
                 </a:solidFill>
                 <a:latin typeface="Arial"/>
               </a:rPr>
-              <a:t>▸  Eine vollständige qualitative Unternehmensanalyse umfasst drei Ebenen:</a:t>
-            </a:r>
-          </a:p>
-        </p:txBody>
-      </p:sp>
-      <p:sp>
-        <p:nvSpPr>
-          <p:cNvPr id="9" name="Rectangle 8"/>
+              <a:t>  Gruppenarbeit AB-1</a:t>
+            </a:r>
+            <a:r>
+              <a:rPr sz="1200">
+                <a:solidFill>
+                  <a:srgbClr val="78808C"/>
+                </a:solidFill>
+                <a:latin typeface="Arial"/>
+              </a:rPr>
+              <a:t>  ·  Problembasiertes Lernen, Kleingruppen</a:t>
+            </a:r>
+          </a:p>
+          <a:p>
+            <a:pPr>
+              <a:spcBef>
+                <a:spcPts val="700"/>
+              </a:spcBef>
+              <a:spcAft>
+                <a:spcPts val="100"/>
+              </a:spcAft>
+            </a:pPr>
+            <a:r>
+              <a:rPr sz="1200">
+                <a:solidFill>
+                  <a:srgbClr val="78808C"/>
+                </a:solidFill>
+                <a:latin typeface="Consolas"/>
+              </a:rPr>
+              <a:t>55–65       </a:t>
+            </a:r>
+            <a:r>
+              <a:rPr sz="1500" b="1">
+                <a:solidFill>
+                  <a:srgbClr val="3D5466"/>
+                </a:solidFill>
+                <a:latin typeface="Arial"/>
+              </a:rPr>
+              <a:t>  Plenumspräsentation AB-1</a:t>
+            </a:r>
+            <a:r>
+              <a:rPr sz="1200">
+                <a:solidFill>
+                  <a:srgbClr val="78808C"/>
+                </a:solidFill>
+                <a:latin typeface="Arial"/>
+              </a:rPr>
+              <a:t>  ·  Präsentation, Plenum</a:t>
+            </a:r>
+          </a:p>
+          <a:p>
+            <a:pPr>
+              <a:spcBef>
+                <a:spcPts val="700"/>
+              </a:spcBef>
+              <a:spcAft>
+                <a:spcPts val="100"/>
+              </a:spcAft>
+            </a:pPr>
+            <a:r>
+              <a:rPr sz="1200">
+                <a:solidFill>
+                  <a:srgbClr val="78808C"/>
+                </a:solidFill>
+                <a:latin typeface="Consolas"/>
+              </a:rPr>
+              <a:t>65–95       </a:t>
+            </a:r>
+            <a:r>
+              <a:rPr sz="1500" b="1">
+                <a:solidFill>
+                  <a:srgbClr val="3D5466"/>
+                </a:solidFill>
+                <a:latin typeface="Arial"/>
+              </a:rPr>
+              <a:t>  Gruppenarbeit AB-2 + AB-3</a:t>
+            </a:r>
+            <a:r>
+              <a:rPr sz="1200">
+                <a:solidFill>
+                  <a:srgbClr val="78808C"/>
+                </a:solidFill>
+                <a:latin typeface="Arial"/>
+              </a:rPr>
+              <a:t>  ·  Kleingruppen</a:t>
+            </a:r>
+          </a:p>
+          <a:p>
+            <a:pPr>
+              <a:spcBef>
+                <a:spcPts val="700"/>
+              </a:spcBef>
+              <a:spcAft>
+                <a:spcPts val="100"/>
+              </a:spcAft>
+            </a:pPr>
+            <a:r>
+              <a:rPr sz="1200">
+                <a:solidFill>
+                  <a:srgbClr val="78808C"/>
+                </a:solidFill>
+                <a:latin typeface="Consolas"/>
+              </a:rPr>
+              <a:t>95–115      </a:t>
+            </a:r>
+            <a:r>
+              <a:rPr sz="1500" b="1">
+                <a:solidFill>
+                  <a:srgbClr val="3D5466"/>
+                </a:solidFill>
+                <a:latin typeface="Arial"/>
+              </a:rPr>
+              <a:t>  Auswertung &amp; Debriefing</a:t>
+            </a:r>
+            <a:r>
+              <a:rPr sz="1200">
+                <a:solidFill>
+                  <a:srgbClr val="78808C"/>
+                </a:solidFill>
+                <a:latin typeface="Arial"/>
+              </a:rPr>
+              <a:t>  ·  Plenum, Diskussion</a:t>
+            </a:r>
+          </a:p>
+          <a:p>
+            <a:pPr>
+              <a:spcBef>
+                <a:spcPts val="700"/>
+              </a:spcBef>
+              <a:spcAft>
+                <a:spcPts val="100"/>
+              </a:spcAft>
+            </a:pPr>
+            <a:r>
+              <a:rPr sz="1200">
+                <a:solidFill>
+                  <a:srgbClr val="78808C"/>
+                </a:solidFill>
+                <a:latin typeface="Consolas"/>
+              </a:rPr>
+              <a:t>115–127     </a:t>
+            </a:r>
+            <a:r>
+              <a:rPr sz="1500" b="1">
+                <a:solidFill>
+                  <a:srgbClr val="3D5466"/>
+                </a:solidFill>
+                <a:latin typeface="Arial"/>
+              </a:rPr>
+              <a:t>  Transfer &amp; Abschluss</a:t>
+            </a:r>
+            <a:r>
+              <a:rPr sz="1200">
+                <a:solidFill>
+                  <a:srgbClr val="78808C"/>
+                </a:solidFill>
+                <a:latin typeface="Arial"/>
+              </a:rPr>
+              <a:t>  ·  Plenum</a:t>
+            </a:r>
+          </a:p>
+        </p:txBody>
+      </p:sp>
+      <p:sp>
+        <p:nvSpPr>
+          <p:cNvPr id="8" name="Rectangle 7"/>
           <p:cNvSpPr/>
           <p:nvPr/>
         </p:nvSpPr>
@@ -10523,7 +11107,7 @@
       </p:sp>
       <p:sp>
         <p:nvSpPr>
-          <p:cNvPr id="10" name="TextBox 9"/>
+          <p:cNvPr id="9" name="TextBox 8"/>
           <p:cNvSpPr txBox="1"/>
           <p:nvPr/>
         </p:nvSpPr>
@@ -10589,7 +11173,7 @@
             <a:avLst/>
           </a:prstGeom>
           <a:solidFill>
-            <a:srgbClr val="FFFFFF"/>
+            <a:srgbClr val="EDEDF3"/>
           </a:solidFill>
           <a:ln>
             <a:noFill/>
@@ -10690,43 +11274,51 @@
                 </a:solidFill>
                 <a:latin typeface="JetBrains Mono"/>
               </a:rPr>
-              <a:t>M22  ·  SCHAUBILD</a:t>
-            </a:r>
-          </a:p>
-        </p:txBody>
-      </p:sp>
-      <p:sp>
-        <p:nvSpPr>
-          <p:cNvPr id="5" name="TextBox 4"/>
-          <p:cNvSpPr txBox="1"/>
-          <p:nvPr/>
-        </p:nvSpPr>
-        <p:spPr>
-          <a:xfrm>
-            <a:off x="685800" y="502920"/>
-            <a:ext cx="10817352" cy="594360"/>
-          </a:xfrm>
-          <a:prstGeom prst="rect">
-            <a:avLst/>
-          </a:prstGeom>
-          <a:noFill/>
-        </p:spPr>
-        <p:txBody>
-          <a:bodyPr wrap="square">
-            <a:spAutoFit/>
-          </a:bodyPr>
-          <a:lstStyle/>
-          <a:p>
-            <a:pPr algn="l"/>
-            <a:r>
-              <a:rPr sz="2000" b="1" i="0">
-                <a:solidFill>
-                  <a:srgbClr val="1F2C56"/>
-                </a:solidFill>
-                <a:latin typeface="Source Serif 4"/>
-              </a:rPr>
-              <a:t>Drei Analyse-Ebenen der qualitativen Kreditwürdigkeitsanalys</a:t>
-            </a:r>
+              <a:t>M22  ·  INHALT</a:t>
+            </a:r>
+          </a:p>
+        </p:txBody>
+      </p:sp>
+      <p:sp>
+        <p:nvSpPr>
+          <p:cNvPr id="5" name="Rectangle 4"/>
+          <p:cNvSpPr/>
+          <p:nvPr/>
+        </p:nvSpPr>
+        <p:spPr>
+          <a:xfrm>
+            <a:off x="0" y="1234440"/>
+            <a:ext cx="12188952" cy="12700"/>
+          </a:xfrm>
+          <a:prstGeom prst="rect">
+            <a:avLst/>
+          </a:prstGeom>
+          <a:solidFill>
+            <a:srgbClr val="D8DFE4"/>
+          </a:solidFill>
+          <a:ln>
+            <a:noFill/>
+          </a:ln>
+        </p:spPr>
+        <p:style>
+          <a:lnRef idx="1">
+            <a:schemeClr val="accent1"/>
+          </a:lnRef>
+          <a:fillRef idx="3">
+            <a:schemeClr val="accent1"/>
+          </a:fillRef>
+          <a:effectRef idx="2">
+            <a:schemeClr val="accent1"/>
+          </a:effectRef>
+          <a:fontRef idx="minor">
+            <a:schemeClr val="lt1"/>
+          </a:fontRef>
+        </p:style>
+        <p:txBody>
+          <a:bodyPr rtlCol="0" anchor="ctr"/>
+          <a:lstStyle/>
+          <a:p>
+            <a:pPr algn="ctr"/>
           </a:p>
         </p:txBody>
       </p:sp>
@@ -10738,8 +11330,8 @@
         </p:nvSpPr>
         <p:spPr>
           <a:xfrm>
-            <a:off x="685800" y="1143000"/>
-            <a:ext cx="10817352" cy="25400"/>
+            <a:off x="685800" y="502920"/>
+            <a:ext cx="36576" cy="658368"/>
           </a:xfrm>
           <a:prstGeom prst="rect">
             <a:avLst/>
@@ -10773,33 +11365,124 @@
           </a:p>
         </p:txBody>
       </p:sp>
-      <p:pic>
-        <p:nvPicPr>
-          <p:cNvPr id="7" name="Picture 6" descr="image.png"/>
-          <p:cNvPicPr>
-            <a:picLocks noChangeAspect="1"/>
-          </p:cNvPicPr>
-          <p:nvPr/>
-        </p:nvPicPr>
-        <p:blipFill>
-          <a:blip r:embed="rId2"/>
-          <a:stretch>
-            <a:fillRect/>
-          </a:stretch>
-        </p:blipFill>
-        <p:spPr>
-          <a:xfrm>
-            <a:off x="2303489" y="1325880"/>
-            <a:ext cx="7581973" cy="4937760"/>
-          </a:xfrm>
-          <a:prstGeom prst="rect">
-            <a:avLst/>
-          </a:prstGeom>
-        </p:spPr>
-      </p:pic>
-      <p:sp>
-        <p:nvSpPr>
-          <p:cNvPr id="8" name="Rectangle 7"/>
+      <p:sp>
+        <p:nvSpPr>
+          <p:cNvPr id="7" name="TextBox 6"/>
+          <p:cNvSpPr txBox="1"/>
+          <p:nvPr/>
+        </p:nvSpPr>
+        <p:spPr>
+          <a:xfrm>
+            <a:off x="813816" y="502920"/>
+            <a:ext cx="10634472" cy="685800"/>
+          </a:xfrm>
+          <a:prstGeom prst="rect">
+            <a:avLst/>
+          </a:prstGeom>
+          <a:noFill/>
+        </p:spPr>
+        <p:txBody>
+          <a:bodyPr wrap="square">
+            <a:spAutoFit/>
+          </a:bodyPr>
+          <a:lstStyle/>
+          <a:p>
+            <a:pPr algn="l"/>
+            <a:r>
+              <a:rPr sz="2400" b="1" i="0">
+                <a:solidFill>
+                  <a:srgbClr val="1F2C56"/>
+                </a:solidFill>
+                <a:latin typeface="Source Serif 4"/>
+              </a:rPr>
+              <a:t>Theoretischer Hintergrund: Warum Strategie zur Kreditwürdigkeit gehört</a:t>
+            </a:r>
+          </a:p>
+        </p:txBody>
+      </p:sp>
+      <p:sp>
+        <p:nvSpPr>
+          <p:cNvPr id="8" name="TextBox 7"/>
+          <p:cNvSpPr txBox="1"/>
+          <p:nvPr/>
+        </p:nvSpPr>
+        <p:spPr>
+          <a:xfrm>
+            <a:off x="685800" y="1417320"/>
+            <a:ext cx="10817352" cy="5029200"/>
+          </a:xfrm>
+          <a:prstGeom prst="rect">
+            <a:avLst/>
+          </a:prstGeom>
+          <a:noFill/>
+        </p:spPr>
+        <p:txBody>
+          <a:bodyPr wrap="square">
+            <a:spAutoFit/>
+          </a:bodyPr>
+          <a:lstStyle/>
+          <a:p>
+            <a:pPr>
+              <a:spcBef>
+                <a:spcPts val="1000"/>
+              </a:spcBef>
+              <a:spcAft>
+                <a:spcPts val="200"/>
+              </a:spcAft>
+            </a:pPr>
+            <a:r>
+              <a:rPr sz="800" b="1">
+                <a:solidFill>
+                  <a:srgbClr val="78808C"/>
+                </a:solidFill>
+                <a:latin typeface="JetBrains Mono"/>
+              </a:rPr>
+              <a:t>VOM BILANZBILD ZUM ZUKUNFTSURTEIL</a:t>
+            </a:r>
+          </a:p>
+          <a:p>
+            <a:pPr>
+              <a:spcBef>
+                <a:spcPts val="1000"/>
+              </a:spcBef>
+              <a:spcAft>
+                <a:spcPts val="200"/>
+              </a:spcAft>
+            </a:pPr>
+            <a:r>
+              <a:rPr sz="800" b="1">
+                <a:solidFill>
+                  <a:srgbClr val="78808C"/>
+                </a:solidFill>
+                <a:latin typeface="JetBrains Mono"/>
+              </a:rPr>
+              <a:t>DAS DREI-EBENEN-MODELL DER QUALITATIVEN KREDITWÜRDIGKEITSANALYSE</a:t>
+            </a:r>
+          </a:p>
+          <a:p>
+            <a:pPr>
+              <a:spcBef>
+                <a:spcPts val="400"/>
+              </a:spcBef>
+              <a:spcAft>
+                <a:spcPts val="200"/>
+              </a:spcAft>
+            </a:pPr>
+            <a:r>
+              <a:rPr sz="1300">
+                <a:solidFill>
+                  <a:srgbClr val="3D5466"/>
+                </a:solidFill>
+                <a:latin typeface="Arial"/>
+              </a:rPr>
+              <a:t>▸  Eine vollständige qualitative Unternehmensanalyse umfasst drei Ebenen:</a:t>
+            </a:r>
+          </a:p>
+        </p:txBody>
+      </p:sp>
+      <p:sp>
+        <p:nvSpPr>
+          <p:cNvPr id="9" name="Rectangle 8"/>
           <p:cNvSpPr/>
           <p:nvPr/>
         </p:nvSpPr>
@@ -10842,7 +11525,7 @@
       </p:sp>
       <p:sp>
         <p:nvSpPr>
-          <p:cNvPr id="9" name="TextBox 8"/>
+          <p:cNvPr id="10" name="TextBox 9"/>
           <p:cNvSpPr txBox="1"/>
           <p:nvPr/>
         </p:nvSpPr>
@@ -10871,41 +11554,6 @@
                 <a:latin typeface="JetBrains Mono"/>
               </a:rPr>
               <a:t>FKB Campus  ·  M22</a:t>
-            </a:r>
-          </a:p>
-        </p:txBody>
-      </p:sp>
-      <p:sp>
-        <p:nvSpPr>
-          <p:cNvPr id="10" name="TextBox 9"/>
-          <p:cNvSpPr txBox="1"/>
-          <p:nvPr/>
-        </p:nvSpPr>
-        <p:spPr>
-          <a:xfrm>
-            <a:off x="7176211" y="6583680"/>
-            <a:ext cx="4326940" cy="256032"/>
-          </a:xfrm>
-          <a:prstGeom prst="rect">
-            <a:avLst/>
-          </a:prstGeom>
-          <a:noFill/>
-        </p:spPr>
-        <p:txBody>
-          <a:bodyPr wrap="none">
-            <a:spAutoFit/>
-          </a:bodyPr>
-          <a:lstStyle/>
-          <a:p>
-            <a:pPr algn="r"/>
-            <a:r>
-              <a:rPr sz="700">
-                <a:solidFill>
-                  <a:srgbClr val="A0B4D2"/>
-                </a:solidFill>
-                <a:latin typeface="JetBrains Mono"/>
-              </a:rPr>
-              <a:t>Schaubild</a:t>
             </a:r>
           </a:p>
         </p:txBody>
@@ -10943,7 +11591,7 @@
             <a:avLst/>
           </a:prstGeom>
           <a:solidFill>
-            <a:srgbClr val="EDEDF3"/>
+            <a:srgbClr val="FFFFFF"/>
           </a:solidFill>
           <a:ln>
             <a:noFill/>
@@ -11044,51 +11692,43 @@
                 </a:solidFill>
                 <a:latin typeface="JetBrains Mono"/>
               </a:rPr>
-              <a:t>M22  ·  INHALT</a:t>
-            </a:r>
-          </a:p>
-        </p:txBody>
-      </p:sp>
-      <p:sp>
-        <p:nvSpPr>
-          <p:cNvPr id="5" name="Rectangle 4"/>
-          <p:cNvSpPr/>
-          <p:nvPr/>
-        </p:nvSpPr>
-        <p:spPr>
-          <a:xfrm>
-            <a:off x="0" y="1234440"/>
-            <a:ext cx="12188952" cy="12700"/>
-          </a:xfrm>
-          <a:prstGeom prst="rect">
-            <a:avLst/>
-          </a:prstGeom>
-          <a:solidFill>
-            <a:srgbClr val="D8DFE4"/>
-          </a:solidFill>
-          <a:ln>
-            <a:noFill/>
-          </a:ln>
-        </p:spPr>
-        <p:style>
-          <a:lnRef idx="1">
-            <a:schemeClr val="accent1"/>
-          </a:lnRef>
-          <a:fillRef idx="3">
-            <a:schemeClr val="accent1"/>
-          </a:fillRef>
-          <a:effectRef idx="2">
-            <a:schemeClr val="accent1"/>
-          </a:effectRef>
-          <a:fontRef idx="minor">
-            <a:schemeClr val="lt1"/>
-          </a:fontRef>
-        </p:style>
-        <p:txBody>
-          <a:bodyPr rtlCol="0" anchor="ctr"/>
-          <a:lstStyle/>
-          <a:p>
-            <a:pPr algn="ctr"/>
+              <a:t>M22  ·  SCHAUBILD</a:t>
+            </a:r>
+          </a:p>
+        </p:txBody>
+      </p:sp>
+      <p:sp>
+        <p:nvSpPr>
+          <p:cNvPr id="5" name="TextBox 4"/>
+          <p:cNvSpPr txBox="1"/>
+          <p:nvPr/>
+        </p:nvSpPr>
+        <p:spPr>
+          <a:xfrm>
+            <a:off x="685800" y="502920"/>
+            <a:ext cx="10817352" cy="594360"/>
+          </a:xfrm>
+          <a:prstGeom prst="rect">
+            <a:avLst/>
+          </a:prstGeom>
+          <a:noFill/>
+        </p:spPr>
+        <p:txBody>
+          <a:bodyPr wrap="square">
+            <a:spAutoFit/>
+          </a:bodyPr>
+          <a:lstStyle/>
+          <a:p>
+            <a:pPr algn="l"/>
+            <a:r>
+              <a:rPr sz="2000" b="1" i="0">
+                <a:solidFill>
+                  <a:srgbClr val="1F2C56"/>
+                </a:solidFill>
+                <a:latin typeface="Source Serif 4"/>
+              </a:rPr>
+              <a:t>Drei Analyse-Ebenen der qualitativen Kreditwürdigkeitsanalys</a:t>
+            </a:r>
           </a:p>
         </p:txBody>
       </p:sp>
@@ -11100,8 +11740,8 @@
         </p:nvSpPr>
         <p:spPr>
           <a:xfrm>
-            <a:off x="685800" y="502920"/>
-            <a:ext cx="36576" cy="658368"/>
+            <a:off x="685800" y="1143000"/>
+            <a:ext cx="10817352" cy="25400"/>
           </a:xfrm>
           <a:prstGeom prst="rect">
             <a:avLst/>
@@ -11135,124 +11775,33 @@
           </a:p>
         </p:txBody>
       </p:sp>
-      <p:sp>
-        <p:nvSpPr>
-          <p:cNvPr id="7" name="TextBox 6"/>
-          <p:cNvSpPr txBox="1"/>
-          <p:nvPr/>
-        </p:nvSpPr>
-        <p:spPr>
-          <a:xfrm>
-            <a:off x="813816" y="502920"/>
-            <a:ext cx="10634472" cy="685800"/>
-          </a:xfrm>
-          <a:prstGeom prst="rect">
-            <a:avLst/>
-          </a:prstGeom>
-          <a:noFill/>
-        </p:spPr>
-        <p:txBody>
-          <a:bodyPr wrap="square">
-            <a:spAutoFit/>
-          </a:bodyPr>
-          <a:lstStyle/>
-          <a:p>
-            <a:pPr algn="l"/>
-            <a:r>
-              <a:rPr sz="2400" b="1" i="0">
-                <a:solidFill>
-                  <a:srgbClr val="1F2C56"/>
-                </a:solidFill>
-                <a:latin typeface="Source Serif 4"/>
-              </a:rPr>
-              <a:t>Framework 1: Branchenanalyse mit Porter's Five Forces</a:t>
-            </a:r>
-          </a:p>
-        </p:txBody>
-      </p:sp>
-      <p:sp>
-        <p:nvSpPr>
-          <p:cNvPr id="8" name="TextBox 7"/>
-          <p:cNvSpPr txBox="1"/>
-          <p:nvPr/>
-        </p:nvSpPr>
-        <p:spPr>
-          <a:xfrm>
-            <a:off x="685800" y="1417320"/>
-            <a:ext cx="10817352" cy="5029200"/>
-          </a:xfrm>
-          <a:prstGeom prst="rect">
-            <a:avLst/>
-          </a:prstGeom>
-          <a:noFill/>
-        </p:spPr>
-        <p:txBody>
-          <a:bodyPr wrap="square">
-            <a:spAutoFit/>
-          </a:bodyPr>
-          <a:lstStyle/>
-          <a:p>
-            <a:pPr>
-              <a:spcBef>
-                <a:spcPts val="1000"/>
-              </a:spcBef>
-              <a:spcAft>
-                <a:spcPts val="200"/>
-              </a:spcAft>
-            </a:pPr>
-            <a:r>
-              <a:rPr sz="800" b="1">
-                <a:solidFill>
-                  <a:srgbClr val="78808C"/>
-                </a:solidFill>
-                <a:latin typeface="JetBrains Mono"/>
-              </a:rPr>
-              <a:t>GRUNDPRINZIP</a:t>
-            </a:r>
-          </a:p>
-          <a:p>
-            <a:pPr>
-              <a:spcBef>
-                <a:spcPts val="400"/>
-              </a:spcBef>
-              <a:spcAft>
-                <a:spcPts val="200"/>
-              </a:spcAft>
-            </a:pPr>
-            <a:r>
-              <a:rPr sz="1300">
-                <a:solidFill>
-                  <a:srgbClr val="3D5466"/>
-                </a:solidFill>
-                <a:latin typeface="Arial"/>
-              </a:rPr>
-              <a:t>▸  Die fünf Kräfte im Überblick:</a:t>
-            </a:r>
-          </a:p>
-          <a:p>
-            <a:pPr>
-              <a:spcBef>
-                <a:spcPts val="1000"/>
-              </a:spcBef>
-              <a:spcAft>
-                <a:spcPts val="200"/>
-              </a:spcAft>
-            </a:pPr>
-            <a:r>
-              <a:rPr sz="800" b="1">
-                <a:solidFill>
-                  <a:srgbClr val="78808C"/>
-                </a:solidFill>
-                <a:latin typeface="JetBrains Mono"/>
-              </a:rPr>
-              <a:t>EINSCHRÄNKUNGEN UND VERWENDUNGSREGELN</a:t>
-            </a:r>
-          </a:p>
-        </p:txBody>
-      </p:sp>
-      <p:sp>
-        <p:nvSpPr>
-          <p:cNvPr id="9" name="Rectangle 8"/>
+      <p:pic>
+        <p:nvPicPr>
+          <p:cNvPr id="7" name="Picture 6" descr="image.png"/>
+          <p:cNvPicPr>
+            <a:picLocks noChangeAspect="1"/>
+          </p:cNvPicPr>
+          <p:nvPr/>
+        </p:nvPicPr>
+        <p:blipFill>
+          <a:blip r:embed="rId2"/>
+          <a:stretch>
+            <a:fillRect/>
+          </a:stretch>
+        </p:blipFill>
+        <p:spPr>
+          <a:xfrm>
+            <a:off x="2303489" y="1325880"/>
+            <a:ext cx="7581973" cy="4937760"/>
+          </a:xfrm>
+          <a:prstGeom prst="rect">
+            <a:avLst/>
+          </a:prstGeom>
+        </p:spPr>
+      </p:pic>
+      <p:sp>
+        <p:nvSpPr>
+          <p:cNvPr id="8" name="Rectangle 7"/>
           <p:cNvSpPr/>
           <p:nvPr/>
         </p:nvSpPr>
@@ -11295,7 +11844,7 @@
       </p:sp>
       <p:sp>
         <p:nvSpPr>
-          <p:cNvPr id="10" name="TextBox 9"/>
+          <p:cNvPr id="9" name="TextBox 8"/>
           <p:cNvSpPr txBox="1"/>
           <p:nvPr/>
         </p:nvSpPr>
@@ -11324,6 +11873,41 @@
                 <a:latin typeface="JetBrains Mono"/>
               </a:rPr>
               <a:t>FKB Campus  ·  M22</a:t>
+            </a:r>
+          </a:p>
+        </p:txBody>
+      </p:sp>
+      <p:sp>
+        <p:nvSpPr>
+          <p:cNvPr id="10" name="TextBox 9"/>
+          <p:cNvSpPr txBox="1"/>
+          <p:nvPr/>
+        </p:nvSpPr>
+        <p:spPr>
+          <a:xfrm>
+            <a:off x="7176211" y="6583680"/>
+            <a:ext cx="4326940" cy="256032"/>
+          </a:xfrm>
+          <a:prstGeom prst="rect">
+            <a:avLst/>
+          </a:prstGeom>
+          <a:noFill/>
+        </p:spPr>
+        <p:txBody>
+          <a:bodyPr wrap="none">
+            <a:spAutoFit/>
+          </a:bodyPr>
+          <a:lstStyle/>
+          <a:p>
+            <a:pPr algn="r"/>
+            <a:r>
+              <a:rPr sz="700">
+                <a:solidFill>
+                  <a:srgbClr val="A0B4D2"/>
+                </a:solidFill>
+                <a:latin typeface="JetBrains Mono"/>
+              </a:rPr>
+              <a:t>Schaubild</a:t>
             </a:r>
           </a:p>
         </p:txBody>
@@ -11361,7 +11945,7 @@
             <a:avLst/>
           </a:prstGeom>
           <a:solidFill>
-            <a:srgbClr val="FFFFFF"/>
+            <a:srgbClr val="EDEDF3"/>
           </a:solidFill>
           <a:ln>
             <a:noFill/>
@@ -11462,43 +12046,51 @@
                 </a:solidFill>
                 <a:latin typeface="JetBrains Mono"/>
               </a:rPr>
-              <a:t>M22  ·  SCHAUBILD</a:t>
-            </a:r>
-          </a:p>
-        </p:txBody>
-      </p:sp>
-      <p:sp>
-        <p:nvSpPr>
-          <p:cNvPr id="5" name="TextBox 4"/>
-          <p:cNvSpPr txBox="1"/>
-          <p:nvPr/>
-        </p:nvSpPr>
-        <p:spPr>
-          <a:xfrm>
-            <a:off x="685800" y="502920"/>
-            <a:ext cx="10817352" cy="594360"/>
-          </a:xfrm>
-          <a:prstGeom prst="rect">
-            <a:avLst/>
-          </a:prstGeom>
-          <a:noFill/>
-        </p:spPr>
-        <p:txBody>
-          <a:bodyPr wrap="square">
-            <a:spAutoFit/>
-          </a:bodyPr>
-          <a:lstStyle/>
-          <a:p>
-            <a:pPr algn="l"/>
-            <a:r>
-              <a:rPr sz="2000" b="1" i="0">
-                <a:solidFill>
-                  <a:srgbClr val="1F2C56"/>
-                </a:solidFill>
-                <a:latin typeface="Source Serif 4"/>
-              </a:rPr>
-              <a:t>Five-Forces-Modell nach Porter</a:t>
-            </a:r>
+              <a:t>M22  ·  INHALT</a:t>
+            </a:r>
+          </a:p>
+        </p:txBody>
+      </p:sp>
+      <p:sp>
+        <p:nvSpPr>
+          <p:cNvPr id="5" name="Rectangle 4"/>
+          <p:cNvSpPr/>
+          <p:nvPr/>
+        </p:nvSpPr>
+        <p:spPr>
+          <a:xfrm>
+            <a:off x="0" y="1234440"/>
+            <a:ext cx="12188952" cy="12700"/>
+          </a:xfrm>
+          <a:prstGeom prst="rect">
+            <a:avLst/>
+          </a:prstGeom>
+          <a:solidFill>
+            <a:srgbClr val="D8DFE4"/>
+          </a:solidFill>
+          <a:ln>
+            <a:noFill/>
+          </a:ln>
+        </p:spPr>
+        <p:style>
+          <a:lnRef idx="1">
+            <a:schemeClr val="accent1"/>
+          </a:lnRef>
+          <a:fillRef idx="3">
+            <a:schemeClr val="accent1"/>
+          </a:fillRef>
+          <a:effectRef idx="2">
+            <a:schemeClr val="accent1"/>
+          </a:effectRef>
+          <a:fontRef idx="minor">
+            <a:schemeClr val="lt1"/>
+          </a:fontRef>
+        </p:style>
+        <p:txBody>
+          <a:bodyPr rtlCol="0" anchor="ctr"/>
+          <a:lstStyle/>
+          <a:p>
+            <a:pPr algn="ctr"/>
           </a:p>
         </p:txBody>
       </p:sp>
@@ -11510,8 +12102,8 @@
         </p:nvSpPr>
         <p:spPr>
           <a:xfrm>
-            <a:off x="685800" y="1143000"/>
-            <a:ext cx="10817352" cy="25400"/>
+            <a:off x="685800" y="502920"/>
+            <a:ext cx="36576" cy="658368"/>
           </a:xfrm>
           <a:prstGeom prst="rect">
             <a:avLst/>
@@ -11545,33 +12137,124 @@
           </a:p>
         </p:txBody>
       </p:sp>
-      <p:pic>
-        <p:nvPicPr>
-          <p:cNvPr id="7" name="Picture 6" descr="image.png"/>
-          <p:cNvPicPr>
-            <a:picLocks noChangeAspect="1"/>
-          </p:cNvPicPr>
-          <p:nvPr/>
-        </p:nvPicPr>
-        <p:blipFill>
-          <a:blip r:embed="rId2"/>
-          <a:stretch>
-            <a:fillRect/>
-          </a:stretch>
-        </p:blipFill>
-        <p:spPr>
-          <a:xfrm>
-            <a:off x="2554863" y="1325880"/>
-            <a:ext cx="7079225" cy="4937760"/>
-          </a:xfrm>
-          <a:prstGeom prst="rect">
-            <a:avLst/>
-          </a:prstGeom>
-        </p:spPr>
-      </p:pic>
-      <p:sp>
-        <p:nvSpPr>
-          <p:cNvPr id="8" name="Rectangle 7"/>
+      <p:sp>
+        <p:nvSpPr>
+          <p:cNvPr id="7" name="TextBox 6"/>
+          <p:cNvSpPr txBox="1"/>
+          <p:nvPr/>
+        </p:nvSpPr>
+        <p:spPr>
+          <a:xfrm>
+            <a:off x="813816" y="502920"/>
+            <a:ext cx="10634472" cy="685800"/>
+          </a:xfrm>
+          <a:prstGeom prst="rect">
+            <a:avLst/>
+          </a:prstGeom>
+          <a:noFill/>
+        </p:spPr>
+        <p:txBody>
+          <a:bodyPr wrap="square">
+            <a:spAutoFit/>
+          </a:bodyPr>
+          <a:lstStyle/>
+          <a:p>
+            <a:pPr algn="l"/>
+            <a:r>
+              <a:rPr sz="2400" b="1" i="0">
+                <a:solidFill>
+                  <a:srgbClr val="1F2C56"/>
+                </a:solidFill>
+                <a:latin typeface="Source Serif 4"/>
+              </a:rPr>
+              <a:t>Framework 1: Branchenanalyse mit Porter's Five Forces</a:t>
+            </a:r>
+          </a:p>
+        </p:txBody>
+      </p:sp>
+      <p:sp>
+        <p:nvSpPr>
+          <p:cNvPr id="8" name="TextBox 7"/>
+          <p:cNvSpPr txBox="1"/>
+          <p:nvPr/>
+        </p:nvSpPr>
+        <p:spPr>
+          <a:xfrm>
+            <a:off x="685800" y="1417320"/>
+            <a:ext cx="10817352" cy="5029200"/>
+          </a:xfrm>
+          <a:prstGeom prst="rect">
+            <a:avLst/>
+          </a:prstGeom>
+          <a:noFill/>
+        </p:spPr>
+        <p:txBody>
+          <a:bodyPr wrap="square">
+            <a:spAutoFit/>
+          </a:bodyPr>
+          <a:lstStyle/>
+          <a:p>
+            <a:pPr>
+              <a:spcBef>
+                <a:spcPts val="1000"/>
+              </a:spcBef>
+              <a:spcAft>
+                <a:spcPts val="200"/>
+              </a:spcAft>
+            </a:pPr>
+            <a:r>
+              <a:rPr sz="800" b="1">
+                <a:solidFill>
+                  <a:srgbClr val="78808C"/>
+                </a:solidFill>
+                <a:latin typeface="JetBrains Mono"/>
+              </a:rPr>
+              <a:t>GRUNDPRINZIP</a:t>
+            </a:r>
+          </a:p>
+          <a:p>
+            <a:pPr>
+              <a:spcBef>
+                <a:spcPts val="400"/>
+              </a:spcBef>
+              <a:spcAft>
+                <a:spcPts val="200"/>
+              </a:spcAft>
+            </a:pPr>
+            <a:r>
+              <a:rPr sz="1300">
+                <a:solidFill>
+                  <a:srgbClr val="3D5466"/>
+                </a:solidFill>
+                <a:latin typeface="Arial"/>
+              </a:rPr>
+              <a:t>▸  Die fünf Kräfte im Überblick:</a:t>
+            </a:r>
+          </a:p>
+          <a:p>
+            <a:pPr>
+              <a:spcBef>
+                <a:spcPts val="1000"/>
+              </a:spcBef>
+              <a:spcAft>
+                <a:spcPts val="200"/>
+              </a:spcAft>
+            </a:pPr>
+            <a:r>
+              <a:rPr sz="800" b="1">
+                <a:solidFill>
+                  <a:srgbClr val="78808C"/>
+                </a:solidFill>
+                <a:latin typeface="JetBrains Mono"/>
+              </a:rPr>
+              <a:t>EINSCHRÄNKUNGEN UND VERWENDUNGSREGELN</a:t>
+            </a:r>
+          </a:p>
+        </p:txBody>
+      </p:sp>
+      <p:sp>
+        <p:nvSpPr>
+          <p:cNvPr id="9" name="Rectangle 8"/>
           <p:cNvSpPr/>
           <p:nvPr/>
         </p:nvSpPr>
@@ -11614,7 +12297,7 @@
       </p:sp>
       <p:sp>
         <p:nvSpPr>
-          <p:cNvPr id="9" name="TextBox 8"/>
+          <p:cNvPr id="10" name="TextBox 9"/>
           <p:cNvSpPr txBox="1"/>
           <p:nvPr/>
         </p:nvSpPr>
@@ -11643,41 +12326,6 @@
                 <a:latin typeface="JetBrains Mono"/>
               </a:rPr>
               <a:t>FKB Campus  ·  M22</a:t>
-            </a:r>
-          </a:p>
-        </p:txBody>
-      </p:sp>
-      <p:sp>
-        <p:nvSpPr>
-          <p:cNvPr id="10" name="TextBox 9"/>
-          <p:cNvSpPr txBox="1"/>
-          <p:nvPr/>
-        </p:nvSpPr>
-        <p:spPr>
-          <a:xfrm>
-            <a:off x="7176211" y="6583680"/>
-            <a:ext cx="4326940" cy="256032"/>
-          </a:xfrm>
-          <a:prstGeom prst="rect">
-            <a:avLst/>
-          </a:prstGeom>
-          <a:noFill/>
-        </p:spPr>
-        <p:txBody>
-          <a:bodyPr wrap="none">
-            <a:spAutoFit/>
-          </a:bodyPr>
-          <a:lstStyle/>
-          <a:p>
-            <a:pPr algn="r"/>
-            <a:r>
-              <a:rPr sz="700">
-                <a:solidFill>
-                  <a:srgbClr val="A0B4D2"/>
-                </a:solidFill>
-                <a:latin typeface="JetBrains Mono"/>
-              </a:rPr>
-              <a:t>Schaubild</a:t>
             </a:r>
           </a:p>
         </p:txBody>
@@ -11715,7 +12363,7 @@
             <a:avLst/>
           </a:prstGeom>
           <a:solidFill>
-            <a:srgbClr val="EDEDF3"/>
+            <a:srgbClr val="FFFFFF"/>
           </a:solidFill>
           <a:ln>
             <a:noFill/>
@@ -11816,51 +12464,43 @@
                 </a:solidFill>
                 <a:latin typeface="JetBrains Mono"/>
               </a:rPr>
-              <a:t>M22  ·  INHALT</a:t>
-            </a:r>
-          </a:p>
-        </p:txBody>
-      </p:sp>
-      <p:sp>
-        <p:nvSpPr>
-          <p:cNvPr id="5" name="Rectangle 4"/>
-          <p:cNvSpPr/>
-          <p:nvPr/>
-        </p:nvSpPr>
-        <p:spPr>
-          <a:xfrm>
-            <a:off x="0" y="1234440"/>
-            <a:ext cx="12188952" cy="12700"/>
-          </a:xfrm>
-          <a:prstGeom prst="rect">
-            <a:avLst/>
-          </a:prstGeom>
-          <a:solidFill>
-            <a:srgbClr val="D8DFE4"/>
-          </a:solidFill>
-          <a:ln>
-            <a:noFill/>
-          </a:ln>
-        </p:spPr>
-        <p:style>
-          <a:lnRef idx="1">
-            <a:schemeClr val="accent1"/>
-          </a:lnRef>
-          <a:fillRef idx="3">
-            <a:schemeClr val="accent1"/>
-          </a:fillRef>
-          <a:effectRef idx="2">
-            <a:schemeClr val="accent1"/>
-          </a:effectRef>
-          <a:fontRef idx="minor">
-            <a:schemeClr val="lt1"/>
-          </a:fontRef>
-        </p:style>
-        <p:txBody>
-          <a:bodyPr rtlCol="0" anchor="ctr"/>
-          <a:lstStyle/>
-          <a:p>
-            <a:pPr algn="ctr"/>
+              <a:t>M22  ·  SCHAUBILD</a:t>
+            </a:r>
+          </a:p>
+        </p:txBody>
+      </p:sp>
+      <p:sp>
+        <p:nvSpPr>
+          <p:cNvPr id="5" name="TextBox 4"/>
+          <p:cNvSpPr txBox="1"/>
+          <p:nvPr/>
+        </p:nvSpPr>
+        <p:spPr>
+          <a:xfrm>
+            <a:off x="685800" y="502920"/>
+            <a:ext cx="10817352" cy="594360"/>
+          </a:xfrm>
+          <a:prstGeom prst="rect">
+            <a:avLst/>
+          </a:prstGeom>
+          <a:noFill/>
+        </p:spPr>
+        <p:txBody>
+          <a:bodyPr wrap="square">
+            <a:spAutoFit/>
+          </a:bodyPr>
+          <a:lstStyle/>
+          <a:p>
+            <a:pPr algn="l"/>
+            <a:r>
+              <a:rPr sz="2000" b="1" i="0">
+                <a:solidFill>
+                  <a:srgbClr val="1F2C56"/>
+                </a:solidFill>
+                <a:latin typeface="Source Serif 4"/>
+              </a:rPr>
+              <a:t>Five-Forces-Modell nach Porter</a:t>
+            </a:r>
           </a:p>
         </p:txBody>
       </p:sp>
@@ -11872,8 +12512,8 @@
         </p:nvSpPr>
         <p:spPr>
           <a:xfrm>
-            <a:off x="685800" y="502920"/>
-            <a:ext cx="36576" cy="658368"/>
+            <a:off x="685800" y="1143000"/>
+            <a:ext cx="10817352" cy="25400"/>
           </a:xfrm>
           <a:prstGeom prst="rect">
             <a:avLst/>
@@ -11907,276 +12547,33 @@
           </a:p>
         </p:txBody>
       </p:sp>
-      <p:sp>
-        <p:nvSpPr>
-          <p:cNvPr id="7" name="TextBox 6"/>
-          <p:cNvSpPr txBox="1"/>
-          <p:nvPr/>
-        </p:nvSpPr>
-        <p:spPr>
-          <a:xfrm>
-            <a:off x="813816" y="502920"/>
-            <a:ext cx="10634472" cy="685800"/>
-          </a:xfrm>
-          <a:prstGeom prst="rect">
-            <a:avLst/>
-          </a:prstGeom>
-          <a:noFill/>
-        </p:spPr>
-        <p:txBody>
-          <a:bodyPr wrap="square">
-            <a:spAutoFit/>
-          </a:bodyPr>
-          <a:lstStyle/>
-          <a:p>
-            <a:pPr algn="l"/>
-            <a:r>
-              <a:rPr sz="2400" b="1" i="0">
-                <a:solidFill>
-                  <a:srgbClr val="1F2C56"/>
-                </a:solidFill>
-                <a:latin typeface="Source Serif 4"/>
-              </a:rPr>
-              <a:t>Framework 1b: Generische Wettbewerbsstrategien und das Stuck-in-the-Middle-Risiko</a:t>
-            </a:r>
-          </a:p>
-        </p:txBody>
-      </p:sp>
-      <p:sp>
-        <p:nvSpPr>
-          <p:cNvPr id="8" name="TextBox 7"/>
-          <p:cNvSpPr txBox="1"/>
-          <p:nvPr/>
-        </p:nvSpPr>
-        <p:spPr>
-          <a:xfrm>
-            <a:off x="685800" y="1417320"/>
-            <a:ext cx="10817352" cy="5029200"/>
-          </a:xfrm>
-          <a:prstGeom prst="rect">
-            <a:avLst/>
-          </a:prstGeom>
-          <a:noFill/>
-        </p:spPr>
-        <p:txBody>
-          <a:bodyPr wrap="square">
-            <a:spAutoFit/>
-          </a:bodyPr>
-          <a:lstStyle/>
-          <a:p>
-            <a:pPr>
-              <a:spcBef>
-                <a:spcPts val="1000"/>
-              </a:spcBef>
-              <a:spcAft>
-                <a:spcPts val="200"/>
-              </a:spcAft>
-            </a:pPr>
-            <a:r>
-              <a:rPr sz="800" b="1">
-                <a:solidFill>
-                  <a:srgbClr val="78808C"/>
-                </a:solidFill>
-                <a:latin typeface="JetBrains Mono"/>
-              </a:rPr>
-              <a:t>DIE DREI GRUNDSTRATEGIEN NACH PORTER (1980)</a:t>
-            </a:r>
-          </a:p>
-          <a:p>
-            <a:pPr>
-              <a:spcBef>
-                <a:spcPts val="400"/>
-              </a:spcBef>
-              <a:spcAft>
-                <a:spcPts val="200"/>
-              </a:spcAft>
-            </a:pPr>
-            <a:r>
-              <a:rPr sz="1300">
-                <a:solidFill>
-                  <a:srgbClr val="3D5466"/>
-                </a:solidFill>
-                <a:latin typeface="Arial"/>
-              </a:rPr>
-              <a:t>▸  Eine vierte Option gibt es laut Porter (1980) nicht — ein Unternehmen, das keine klare Strategie wählt, hat keine.</a:t>
-            </a:r>
-          </a:p>
-          <a:p>
-            <a:pPr>
-              <a:spcBef>
-                <a:spcPts val="1000"/>
-              </a:spcBef>
-              <a:spcAft>
-                <a:spcPts val="200"/>
-              </a:spcAft>
-            </a:pPr>
-            <a:r>
-              <a:rPr sz="800" b="1">
-                <a:solidFill>
-                  <a:srgbClr val="78808C"/>
-                </a:solidFill>
-                <a:latin typeface="JetBrains Mono"/>
-              </a:rPr>
-              <a:t>DAS STUCK-IN-THE-MIDDLE-PROBLEM</a:t>
-            </a:r>
-          </a:p>
-          <a:p>
-            <a:pPr>
-              <a:spcBef>
-                <a:spcPts val="400"/>
-              </a:spcBef>
-              <a:spcAft>
-                <a:spcPts val="200"/>
-              </a:spcAft>
-            </a:pPr>
-            <a:r>
-              <a:rPr sz="1300">
-                <a:solidFill>
-                  <a:srgbClr val="3D5466"/>
-                </a:solidFill>
-                <a:latin typeface="Arial"/>
-              </a:rPr>
-              <a:t>▸  Warum das für Kreditberater relevant ist:</a:t>
-            </a:r>
-          </a:p>
-          <a:p>
-            <a:pPr>
-              <a:spcBef>
-                <a:spcPts val="400"/>
-              </a:spcBef>
-              <a:spcAft>
-                <a:spcPts val="200"/>
-              </a:spcAft>
-            </a:pPr>
-            <a:r>
-              <a:rPr sz="1300">
-                <a:solidFill>
-                  <a:srgbClr val="3D5466"/>
-                </a:solidFill>
-                <a:latin typeface="Arial"/>
-              </a:rPr>
-              <a:t>▸  Warnsignale für Stuck in the Middle im Kundengespräch:</a:t>
-            </a:r>
-          </a:p>
-          <a:p>
-            <a:pPr>
-              <a:spcBef>
-                <a:spcPts val="400"/>
-              </a:spcBef>
-              <a:spcAft>
-                <a:spcPts val="200"/>
-              </a:spcAft>
-            </a:pPr>
-            <a:r>
-              <a:rPr sz="1300">
-                <a:solidFill>
-                  <a:srgbClr val="3D5466"/>
-                </a:solidFill>
-                <a:latin typeface="Arial"/>
-              </a:rPr>
-              <a:t>▸  Unklare Antwort auf die Frage: „Was ist Ihr Alleinstellungsmerkmal — und wofür bezahlen Ihre Kunden gerne mehr?"</a:t>
-            </a:r>
-          </a:p>
-          <a:p>
-            <a:pPr>
-              <a:spcBef>
-                <a:spcPts val="400"/>
-              </a:spcBef>
-              <a:spcAft>
-                <a:spcPts val="200"/>
-              </a:spcAft>
-            </a:pPr>
-            <a:r>
-              <a:rPr sz="1300">
-                <a:solidFill>
-                  <a:srgbClr val="3D5466"/>
-                </a:solidFill>
-                <a:latin typeface="Arial"/>
-              </a:rPr>
-              <a:t>▸  Gleichzeitig Preisdruck von günstigeren Wettbewerbern und Qualitätsdruck von Premiumanbietern</a:t>
-            </a:r>
-          </a:p>
-          <a:p>
-            <a:pPr>
-              <a:spcBef>
-                <a:spcPts val="400"/>
-              </a:spcBef>
-              <a:spcAft>
-                <a:spcPts val="200"/>
-              </a:spcAft>
-            </a:pPr>
-            <a:r>
-              <a:rPr sz="1300">
-                <a:solidFill>
-                  <a:srgbClr val="3D5466"/>
-                </a:solidFill>
-                <a:latin typeface="Arial"/>
-              </a:rPr>
-              <a:t>▸  Rückläufige Marge trotz stabilem Umsatz</a:t>
-            </a:r>
-          </a:p>
-          <a:p>
-            <a:pPr>
-              <a:spcBef>
-                <a:spcPts val="400"/>
-              </a:spcBef>
-              <a:spcAft>
-                <a:spcPts val="200"/>
-              </a:spcAft>
-            </a:pPr>
-            <a:r>
-              <a:rPr sz="1300">
-                <a:solidFill>
-                  <a:srgbClr val="3D5466"/>
-                </a:solidFill>
-                <a:latin typeface="Arial"/>
-              </a:rPr>
-              <a:t>▸  Investitionen in beide Richtungen: gleichzeitig Kostenoptimierung und Qualitätsausbau ohne klare Priorisierung</a:t>
-            </a:r>
-          </a:p>
-          <a:p>
-            <a:pPr>
-              <a:spcBef>
-                <a:spcPts val="400"/>
-              </a:spcBef>
-              <a:spcAft>
-                <a:spcPts val="200"/>
-              </a:spcAft>
-            </a:pPr>
-            <a:r>
-              <a:rPr sz="1300">
-                <a:solidFill>
-                  <a:srgbClr val="3D5466"/>
-                </a:solidFill>
-                <a:latin typeface="Arial"/>
-              </a:rPr>
-              <a:t>▸  GF-Aussagen wie: „Wir machen alles — wir sind flexibel"</a:t>
-            </a:r>
-          </a:p>
-          <a:p>
-            <a:pPr>
-              <a:spcBef>
-                <a:spcPts val="400"/>
-              </a:spcBef>
-              <a:spcAft>
-                <a:spcPts val="200"/>
-              </a:spcAft>
-            </a:pPr>
-            <a:r>
-              <a:rPr sz="1300">
-                <a:solidFill>
-                  <a:srgbClr val="3D5466"/>
-                </a:solidFill>
-                <a:latin typeface="Arial"/>
-              </a:rPr>
-              <a:t>▸  Stuck in the Middle und der Haller-Fall:</a:t>
-            </a:r>
-          </a:p>
-        </p:txBody>
-      </p:sp>
-      <p:sp>
-        <p:nvSpPr>
-          <p:cNvPr id="9" name="Rectangle 8"/>
+      <p:pic>
+        <p:nvPicPr>
+          <p:cNvPr id="7" name="Picture 6" descr="image.png"/>
+          <p:cNvPicPr>
+            <a:picLocks noChangeAspect="1"/>
+          </p:cNvPicPr>
+          <p:nvPr/>
+        </p:nvPicPr>
+        <p:blipFill>
+          <a:blip r:embed="rId2"/>
+          <a:stretch>
+            <a:fillRect/>
+          </a:stretch>
+        </p:blipFill>
+        <p:spPr>
+          <a:xfrm>
+            <a:off x="2554863" y="1325880"/>
+            <a:ext cx="7079225" cy="4937760"/>
+          </a:xfrm>
+          <a:prstGeom prst="rect">
+            <a:avLst/>
+          </a:prstGeom>
+        </p:spPr>
+      </p:pic>
+      <p:sp>
+        <p:nvSpPr>
+          <p:cNvPr id="8" name="Rectangle 7"/>
           <p:cNvSpPr/>
           <p:nvPr/>
         </p:nvSpPr>
@@ -12219,7 +12616,7 @@
       </p:sp>
       <p:sp>
         <p:nvSpPr>
-          <p:cNvPr id="10" name="TextBox 9"/>
+          <p:cNvPr id="9" name="TextBox 8"/>
           <p:cNvSpPr txBox="1"/>
           <p:nvPr/>
         </p:nvSpPr>
@@ -12248,6 +12645,41 @@
                 <a:latin typeface="JetBrains Mono"/>
               </a:rPr>
               <a:t>FKB Campus  ·  M22</a:t>
+            </a:r>
+          </a:p>
+        </p:txBody>
+      </p:sp>
+      <p:sp>
+        <p:nvSpPr>
+          <p:cNvPr id="10" name="TextBox 9"/>
+          <p:cNvSpPr txBox="1"/>
+          <p:nvPr/>
+        </p:nvSpPr>
+        <p:spPr>
+          <a:xfrm>
+            <a:off x="7176211" y="6583680"/>
+            <a:ext cx="4326940" cy="256032"/>
+          </a:xfrm>
+          <a:prstGeom prst="rect">
+            <a:avLst/>
+          </a:prstGeom>
+          <a:noFill/>
+        </p:spPr>
+        <p:txBody>
+          <a:bodyPr wrap="none">
+            <a:spAutoFit/>
+          </a:bodyPr>
+          <a:lstStyle/>
+          <a:p>
+            <a:pPr algn="r"/>
+            <a:r>
+              <a:rPr sz="700">
+                <a:solidFill>
+                  <a:srgbClr val="A0B4D2"/>
+                </a:solidFill>
+                <a:latin typeface="JetBrains Mono"/>
+              </a:rPr>
+              <a:t>Schaubild</a:t>
             </a:r>
           </a:p>
         </p:txBody>
@@ -12285,7 +12717,7 @@
             <a:avLst/>
           </a:prstGeom>
           <a:solidFill>
-            <a:srgbClr val="FFFFFF"/>
+            <a:srgbClr val="EDEDF3"/>
           </a:solidFill>
           <a:ln>
             <a:noFill/>
@@ -12386,43 +12818,51 @@
                 </a:solidFill>
                 <a:latin typeface="JetBrains Mono"/>
               </a:rPr>
-              <a:t>M22  ·  SCHAUBILD</a:t>
-            </a:r>
-          </a:p>
-        </p:txBody>
-      </p:sp>
-      <p:sp>
-        <p:nvSpPr>
-          <p:cNvPr id="5" name="TextBox 4"/>
-          <p:cNvSpPr txBox="1"/>
-          <p:nvPr/>
-        </p:nvSpPr>
-        <p:spPr>
-          <a:xfrm>
-            <a:off x="685800" y="502920"/>
-            <a:ext cx="10817352" cy="594360"/>
-          </a:xfrm>
-          <a:prstGeom prst="rect">
-            <a:avLst/>
-          </a:prstGeom>
-          <a:noFill/>
-        </p:spPr>
-        <p:txBody>
-          <a:bodyPr wrap="square">
-            <a:spAutoFit/>
-          </a:bodyPr>
-          <a:lstStyle/>
-          <a:p>
-            <a:pPr algn="l"/>
-            <a:r>
-              <a:rPr sz="2000" b="1" i="0">
-                <a:solidFill>
-                  <a:srgbClr val="1F2C56"/>
-                </a:solidFill>
-                <a:latin typeface="Source Serif 4"/>
-              </a:rPr>
-              <a:t>Wettbewerbsstrategie-Matrix nach Porter</a:t>
-            </a:r>
+              <a:t>M22  ·  INHALT</a:t>
+            </a:r>
+          </a:p>
+        </p:txBody>
+      </p:sp>
+      <p:sp>
+        <p:nvSpPr>
+          <p:cNvPr id="5" name="Rectangle 4"/>
+          <p:cNvSpPr/>
+          <p:nvPr/>
+        </p:nvSpPr>
+        <p:spPr>
+          <a:xfrm>
+            <a:off x="0" y="1234440"/>
+            <a:ext cx="12188952" cy="12700"/>
+          </a:xfrm>
+          <a:prstGeom prst="rect">
+            <a:avLst/>
+          </a:prstGeom>
+          <a:solidFill>
+            <a:srgbClr val="D8DFE4"/>
+          </a:solidFill>
+          <a:ln>
+            <a:noFill/>
+          </a:ln>
+        </p:spPr>
+        <p:style>
+          <a:lnRef idx="1">
+            <a:schemeClr val="accent1"/>
+          </a:lnRef>
+          <a:fillRef idx="3">
+            <a:schemeClr val="accent1"/>
+          </a:fillRef>
+          <a:effectRef idx="2">
+            <a:schemeClr val="accent1"/>
+          </a:effectRef>
+          <a:fontRef idx="minor">
+            <a:schemeClr val="lt1"/>
+          </a:fontRef>
+        </p:style>
+        <p:txBody>
+          <a:bodyPr rtlCol="0" anchor="ctr"/>
+          <a:lstStyle/>
+          <a:p>
+            <a:pPr algn="ctr"/>
           </a:p>
         </p:txBody>
       </p:sp>
@@ -12434,8 +12874,8 @@
         </p:nvSpPr>
         <p:spPr>
           <a:xfrm>
-            <a:off x="685800" y="1143000"/>
-            <a:ext cx="10817352" cy="25400"/>
+            <a:off x="685800" y="502920"/>
+            <a:ext cx="36576" cy="658368"/>
           </a:xfrm>
           <a:prstGeom prst="rect">
             <a:avLst/>
@@ -12469,33 +12909,276 @@
           </a:p>
         </p:txBody>
       </p:sp>
-      <p:pic>
-        <p:nvPicPr>
-          <p:cNvPr id="7" name="Picture 6" descr="image.png"/>
-          <p:cNvPicPr>
-            <a:picLocks noChangeAspect="1"/>
-          </p:cNvPicPr>
-          <p:nvPr/>
-        </p:nvPicPr>
-        <p:blipFill>
-          <a:blip r:embed="rId2"/>
-          <a:stretch>
-            <a:fillRect/>
-          </a:stretch>
-        </p:blipFill>
-        <p:spPr>
-          <a:xfrm>
-            <a:off x="2303489" y="1325880"/>
-            <a:ext cx="7581973" cy="4937760"/>
-          </a:xfrm>
-          <a:prstGeom prst="rect">
-            <a:avLst/>
-          </a:prstGeom>
-        </p:spPr>
-      </p:pic>
-      <p:sp>
-        <p:nvSpPr>
-          <p:cNvPr id="8" name="Rectangle 7"/>
+      <p:sp>
+        <p:nvSpPr>
+          <p:cNvPr id="7" name="TextBox 6"/>
+          <p:cNvSpPr txBox="1"/>
+          <p:nvPr/>
+        </p:nvSpPr>
+        <p:spPr>
+          <a:xfrm>
+            <a:off x="813816" y="502920"/>
+            <a:ext cx="10634472" cy="685800"/>
+          </a:xfrm>
+          <a:prstGeom prst="rect">
+            <a:avLst/>
+          </a:prstGeom>
+          <a:noFill/>
+        </p:spPr>
+        <p:txBody>
+          <a:bodyPr wrap="square">
+            <a:spAutoFit/>
+          </a:bodyPr>
+          <a:lstStyle/>
+          <a:p>
+            <a:pPr algn="l"/>
+            <a:r>
+              <a:rPr sz="2400" b="1" i="0">
+                <a:solidFill>
+                  <a:srgbClr val="1F2C56"/>
+                </a:solidFill>
+                <a:latin typeface="Source Serif 4"/>
+              </a:rPr>
+              <a:t>Framework 1b: Generische Wettbewerbsstrategien und das Stuck-in-the-Middle-Risiko</a:t>
+            </a:r>
+          </a:p>
+        </p:txBody>
+      </p:sp>
+      <p:sp>
+        <p:nvSpPr>
+          <p:cNvPr id="8" name="TextBox 7"/>
+          <p:cNvSpPr txBox="1"/>
+          <p:nvPr/>
+        </p:nvSpPr>
+        <p:spPr>
+          <a:xfrm>
+            <a:off x="685800" y="1417320"/>
+            <a:ext cx="10817352" cy="5029200"/>
+          </a:xfrm>
+          <a:prstGeom prst="rect">
+            <a:avLst/>
+          </a:prstGeom>
+          <a:noFill/>
+        </p:spPr>
+        <p:txBody>
+          <a:bodyPr wrap="square">
+            <a:spAutoFit/>
+          </a:bodyPr>
+          <a:lstStyle/>
+          <a:p>
+            <a:pPr>
+              <a:spcBef>
+                <a:spcPts val="1000"/>
+              </a:spcBef>
+              <a:spcAft>
+                <a:spcPts val="200"/>
+              </a:spcAft>
+            </a:pPr>
+            <a:r>
+              <a:rPr sz="800" b="1">
+                <a:solidFill>
+                  <a:srgbClr val="78808C"/>
+                </a:solidFill>
+                <a:latin typeface="JetBrains Mono"/>
+              </a:rPr>
+              <a:t>DIE DREI GRUNDSTRATEGIEN NACH PORTER (1980)</a:t>
+            </a:r>
+          </a:p>
+          <a:p>
+            <a:pPr>
+              <a:spcBef>
+                <a:spcPts val="400"/>
+              </a:spcBef>
+              <a:spcAft>
+                <a:spcPts val="200"/>
+              </a:spcAft>
+            </a:pPr>
+            <a:r>
+              <a:rPr sz="1300">
+                <a:solidFill>
+                  <a:srgbClr val="3D5466"/>
+                </a:solidFill>
+                <a:latin typeface="Arial"/>
+              </a:rPr>
+              <a:t>▸  Eine vierte Option gibt es laut Porter (1980) nicht — ein Unternehmen, das keine klare Strategie wählt, hat keine.</a:t>
+            </a:r>
+          </a:p>
+          <a:p>
+            <a:pPr>
+              <a:spcBef>
+                <a:spcPts val="1000"/>
+              </a:spcBef>
+              <a:spcAft>
+                <a:spcPts val="200"/>
+              </a:spcAft>
+            </a:pPr>
+            <a:r>
+              <a:rPr sz="800" b="1">
+                <a:solidFill>
+                  <a:srgbClr val="78808C"/>
+                </a:solidFill>
+                <a:latin typeface="JetBrains Mono"/>
+              </a:rPr>
+              <a:t>DAS STUCK-IN-THE-MIDDLE-PROBLEM</a:t>
+            </a:r>
+          </a:p>
+          <a:p>
+            <a:pPr>
+              <a:spcBef>
+                <a:spcPts val="400"/>
+              </a:spcBef>
+              <a:spcAft>
+                <a:spcPts val="200"/>
+              </a:spcAft>
+            </a:pPr>
+            <a:r>
+              <a:rPr sz="1300">
+                <a:solidFill>
+                  <a:srgbClr val="3D5466"/>
+                </a:solidFill>
+                <a:latin typeface="Arial"/>
+              </a:rPr>
+              <a:t>▸  Warum das für Kreditberater relevant ist:</a:t>
+            </a:r>
+          </a:p>
+          <a:p>
+            <a:pPr>
+              <a:spcBef>
+                <a:spcPts val="400"/>
+              </a:spcBef>
+              <a:spcAft>
+                <a:spcPts val="200"/>
+              </a:spcAft>
+            </a:pPr>
+            <a:r>
+              <a:rPr sz="1300">
+                <a:solidFill>
+                  <a:srgbClr val="3D5466"/>
+                </a:solidFill>
+                <a:latin typeface="Arial"/>
+              </a:rPr>
+              <a:t>▸  Warnsignale für Stuck in the Middle im Kundengespräch:</a:t>
+            </a:r>
+          </a:p>
+          <a:p>
+            <a:pPr>
+              <a:spcBef>
+                <a:spcPts val="400"/>
+              </a:spcBef>
+              <a:spcAft>
+                <a:spcPts val="200"/>
+              </a:spcAft>
+            </a:pPr>
+            <a:r>
+              <a:rPr sz="1300">
+                <a:solidFill>
+                  <a:srgbClr val="3D5466"/>
+                </a:solidFill>
+                <a:latin typeface="Arial"/>
+              </a:rPr>
+              <a:t>▸  Unklare Antwort auf die Frage: „Was ist Ihr Alleinstellungsmerkmal — und wofür bezahlen Ihre Kunden gerne mehr?"</a:t>
+            </a:r>
+          </a:p>
+          <a:p>
+            <a:pPr>
+              <a:spcBef>
+                <a:spcPts val="400"/>
+              </a:spcBef>
+              <a:spcAft>
+                <a:spcPts val="200"/>
+              </a:spcAft>
+            </a:pPr>
+            <a:r>
+              <a:rPr sz="1300">
+                <a:solidFill>
+                  <a:srgbClr val="3D5466"/>
+                </a:solidFill>
+                <a:latin typeface="Arial"/>
+              </a:rPr>
+              <a:t>▸  Gleichzeitig Preisdruck von günstigeren Wettbewerbern und Qualitätsdruck von Premiumanbietern</a:t>
+            </a:r>
+          </a:p>
+          <a:p>
+            <a:pPr>
+              <a:spcBef>
+                <a:spcPts val="400"/>
+              </a:spcBef>
+              <a:spcAft>
+                <a:spcPts val="200"/>
+              </a:spcAft>
+            </a:pPr>
+            <a:r>
+              <a:rPr sz="1300">
+                <a:solidFill>
+                  <a:srgbClr val="3D5466"/>
+                </a:solidFill>
+                <a:latin typeface="Arial"/>
+              </a:rPr>
+              <a:t>▸  Rückläufige Marge trotz stabilem Umsatz</a:t>
+            </a:r>
+          </a:p>
+          <a:p>
+            <a:pPr>
+              <a:spcBef>
+                <a:spcPts val="400"/>
+              </a:spcBef>
+              <a:spcAft>
+                <a:spcPts val="200"/>
+              </a:spcAft>
+            </a:pPr>
+            <a:r>
+              <a:rPr sz="1300">
+                <a:solidFill>
+                  <a:srgbClr val="3D5466"/>
+                </a:solidFill>
+                <a:latin typeface="Arial"/>
+              </a:rPr>
+              <a:t>▸  Investitionen in beide Richtungen: gleichzeitig Kostenoptimierung und Qualitätsausbau ohne klare Priorisierung</a:t>
+            </a:r>
+          </a:p>
+          <a:p>
+            <a:pPr>
+              <a:spcBef>
+                <a:spcPts val="400"/>
+              </a:spcBef>
+              <a:spcAft>
+                <a:spcPts val="200"/>
+              </a:spcAft>
+            </a:pPr>
+            <a:r>
+              <a:rPr sz="1300">
+                <a:solidFill>
+                  <a:srgbClr val="3D5466"/>
+                </a:solidFill>
+                <a:latin typeface="Arial"/>
+              </a:rPr>
+              <a:t>▸  GF-Aussagen wie: „Wir machen alles — wir sind flexibel"</a:t>
+            </a:r>
+          </a:p>
+          <a:p>
+            <a:pPr>
+              <a:spcBef>
+                <a:spcPts val="400"/>
+              </a:spcBef>
+              <a:spcAft>
+                <a:spcPts val="200"/>
+              </a:spcAft>
+            </a:pPr>
+            <a:r>
+              <a:rPr sz="1300">
+                <a:solidFill>
+                  <a:srgbClr val="3D5466"/>
+                </a:solidFill>
+                <a:latin typeface="Arial"/>
+              </a:rPr>
+              <a:t>▸  Stuck in the Middle und der Haller-Fall:</a:t>
+            </a:r>
+          </a:p>
+        </p:txBody>
+      </p:sp>
+      <p:sp>
+        <p:nvSpPr>
+          <p:cNvPr id="9" name="Rectangle 8"/>
           <p:cNvSpPr/>
           <p:nvPr/>
         </p:nvSpPr>
@@ -12538,7 +13221,7 @@
       </p:sp>
       <p:sp>
         <p:nvSpPr>
-          <p:cNvPr id="9" name="TextBox 8"/>
+          <p:cNvPr id="10" name="TextBox 9"/>
           <p:cNvSpPr txBox="1"/>
           <p:nvPr/>
         </p:nvSpPr>
@@ -12567,41 +13250,6 @@
                 <a:latin typeface="JetBrains Mono"/>
               </a:rPr>
               <a:t>FKB Campus  ·  M22</a:t>
-            </a:r>
-          </a:p>
-        </p:txBody>
-      </p:sp>
-      <p:sp>
-        <p:nvSpPr>
-          <p:cNvPr id="10" name="TextBox 9"/>
-          <p:cNvSpPr txBox="1"/>
-          <p:nvPr/>
-        </p:nvSpPr>
-        <p:spPr>
-          <a:xfrm>
-            <a:off x="7176211" y="6583680"/>
-            <a:ext cx="4326940" cy="256032"/>
-          </a:xfrm>
-          <a:prstGeom prst="rect">
-            <a:avLst/>
-          </a:prstGeom>
-          <a:noFill/>
-        </p:spPr>
-        <p:txBody>
-          <a:bodyPr wrap="none">
-            <a:spAutoFit/>
-          </a:bodyPr>
-          <a:lstStyle/>
-          <a:p>
-            <a:pPr algn="r"/>
-            <a:r>
-              <a:rPr sz="700">
-                <a:solidFill>
-                  <a:srgbClr val="A0B4D2"/>
-                </a:solidFill>
-                <a:latin typeface="JetBrains Mono"/>
-              </a:rPr>
-              <a:t>Schaubild</a:t>
             </a:r>
           </a:p>
         </p:txBody>

--- a/protected-downloads/praesentation/M22.pptx
+++ b/protected-downloads/praesentation/M22.pptx
@@ -4315,7 +4315,7 @@
                 <a:solidFill>
                   <a:srgbClr val="C8D2E6"/>
                 </a:solidFill>
-                <a:latin typeface="JetBrains Mono"/>
+                <a:latin typeface="Consolas"/>
               </a:rPr>
               <a:t>FKB CAMPUS  ·  FIRMENKUNDENAKADEMIE  ·  M22</a:t>
             </a:r>
@@ -4350,7 +4350,7 @@
                 <a:solidFill>
                   <a:srgbClr val="FFFFFF"/>
                 </a:solidFill>
-                <a:latin typeface="Source Serif 4"/>
+                <a:latin typeface="Arial"/>
               </a:rPr>
               <a:t>Geschäftsmodell &amp; Strategie bewerten</a:t>
             </a:r>
@@ -4385,7 +4385,7 @@
                 <a:solidFill>
                   <a:srgbClr val="BECDE6"/>
                 </a:solidFill>
-                <a:latin typeface="Source Serif 4"/>
+                <a:latin typeface="Arial"/>
               </a:rPr>
               <a:t>Strategische Unternehmensanalyse als Kern der Kreditwürdigkeitsbeurteilung</a:t>
             </a:r>
@@ -4463,7 +4463,7 @@
                 <a:solidFill>
                   <a:srgbClr val="A0B4D2"/>
                 </a:solidFill>
-                <a:latin typeface="JetBrains Mono"/>
+                <a:latin typeface="Consolas"/>
               </a:rPr>
               <a:t>KOMPETENZFELD</a:t>
             </a:r>
@@ -4533,7 +4533,7 @@
                 <a:solidFill>
                   <a:srgbClr val="A0B4D2"/>
                 </a:solidFill>
-                <a:latin typeface="JetBrains Mono"/>
+                <a:latin typeface="Consolas"/>
               </a:rPr>
               <a:t>KOMPETENZSTUFE</a:t>
             </a:r>
@@ -4603,7 +4603,7 @@
                 <a:solidFill>
                   <a:srgbClr val="A0B4D2"/>
                 </a:solidFill>
-                <a:latin typeface="JetBrains Mono"/>
+                <a:latin typeface="Consolas"/>
               </a:rPr>
               <a:t>VERSION</a:t>
             </a:r>
@@ -4716,7 +4716,7 @@
                 <a:solidFill>
                   <a:srgbClr val="96A5BE"/>
                 </a:solidFill>
-                <a:latin typeface="JetBrains Mono"/>
+                <a:latin typeface="Consolas"/>
               </a:rPr>
               <a:t>FKB Campus  ·  2026</a:t>
             </a:r>
@@ -4751,7 +4751,7 @@
                 <a:solidFill>
                   <a:srgbClr val="96A5BE"/>
                 </a:solidFill>
-                <a:latin typeface="JetBrains Mono"/>
+                <a:latin typeface="Consolas"/>
               </a:rPr>
               <a:t>Trainer-Präsentation</a:t>
             </a:r>
@@ -4890,7 +4890,7 @@
                 <a:solidFill>
                   <a:srgbClr val="78808C"/>
                 </a:solidFill>
-                <a:latin typeface="JetBrains Mono"/>
+                <a:latin typeface="Consolas"/>
               </a:rPr>
               <a:t>M22  ·  SCHAUBILD</a:t>
             </a:r>
@@ -4925,7 +4925,7 @@
                 <a:solidFill>
                   <a:srgbClr val="1F2C56"/>
                 </a:solidFill>
-                <a:latin typeface="Source Serif 4"/>
+                <a:latin typeface="Arial"/>
               </a:rPr>
               <a:t>Wettbewerbsstrategie-Matrix nach Porter</a:t>
             </a:r>
@@ -5070,7 +5070,7 @@
                 <a:solidFill>
                   <a:srgbClr val="A0B4D2"/>
                 </a:solidFill>
-                <a:latin typeface="JetBrains Mono"/>
+                <a:latin typeface="Consolas"/>
               </a:rPr>
               <a:t>FKB Campus  ·  M22</a:t>
             </a:r>
@@ -5105,7 +5105,7 @@
                 <a:solidFill>
                   <a:srgbClr val="A0B4D2"/>
                 </a:solidFill>
-                <a:latin typeface="JetBrains Mono"/>
+                <a:latin typeface="Consolas"/>
               </a:rPr>
               <a:t>Schaubild</a:t>
             </a:r>
@@ -5244,7 +5244,7 @@
                 <a:solidFill>
                   <a:srgbClr val="78808C"/>
                 </a:solidFill>
-                <a:latin typeface="JetBrains Mono"/>
+                <a:latin typeface="Consolas"/>
               </a:rPr>
               <a:t>M22  ·  INHALT</a:t>
             </a:r>
@@ -5365,7 +5365,7 @@
                 <a:solidFill>
                   <a:srgbClr val="1F2C56"/>
                 </a:solidFill>
-                <a:latin typeface="Source Serif 4"/>
+                <a:latin typeface="Arial"/>
               </a:rPr>
               <a:t>Framework 2: Business Model Canvas als Robustheitscheck</a:t>
             </a:r>
@@ -5381,7 +5381,7 @@
         <p:spPr>
           <a:xfrm>
             <a:off x="685800" y="1417320"/>
-            <a:ext cx="10817352" cy="5029200"/>
+            <a:ext cx="10817352" cy="4892040"/>
           </a:xfrm>
           <a:prstGeom prst="rect">
             <a:avLst/>
@@ -5389,7 +5389,7 @@
           <a:noFill/>
         </p:spPr>
         <p:txBody>
-          <a:bodyPr wrap="square">
+          <a:bodyPr wrap="square" anchor="ctr">
             <a:spAutoFit/>
           </a:bodyPr>
           <a:lstStyle/>
@@ -5407,13 +5407,13 @@
                 <a:solidFill>
                   <a:srgbClr val="78808C"/>
                 </a:solidFill>
-                <a:latin typeface="JetBrains Mono"/>
+                <a:latin typeface="Consolas"/>
               </a:rPr>
               <a:t>GRUNDSTRUKTUR</a:t>
             </a:r>
           </a:p>
           <a:p>
-            <a:pPr>
+            <a:pPr marL="190500" indent="-190500">
               <a:spcBef>
                 <a:spcPts val="400"/>
               </a:spcBef>
@@ -5432,7 +5432,7 @@
             </a:r>
           </a:p>
           <a:p>
-            <a:pPr>
+            <a:pPr marL="190500" indent="-190500">
               <a:spcBef>
                 <a:spcPts val="400"/>
               </a:spcBef>
@@ -5523,7 +5523,7 @@
                 <a:solidFill>
                   <a:srgbClr val="A0B4D2"/>
                 </a:solidFill>
-                <a:latin typeface="JetBrains Mono"/>
+                <a:latin typeface="Consolas"/>
               </a:rPr>
               <a:t>FKB Campus  ·  M22</a:t>
             </a:r>
@@ -5662,7 +5662,7 @@
                 <a:solidFill>
                   <a:srgbClr val="78808C"/>
                 </a:solidFill>
-                <a:latin typeface="JetBrains Mono"/>
+                <a:latin typeface="Consolas"/>
               </a:rPr>
               <a:t>M22  ·  INHALT</a:t>
             </a:r>
@@ -5783,7 +5783,7 @@
                 <a:solidFill>
                   <a:srgbClr val="1F2C56"/>
                 </a:solidFill>
-                <a:latin typeface="Source Serif 4"/>
+                <a:latin typeface="Arial"/>
               </a:rPr>
               <a:t>Framework 3: SWOT als Kreditrisikofilter</a:t>
             </a:r>
@@ -5799,7 +5799,7 @@
         <p:spPr>
           <a:xfrm>
             <a:off x="685800" y="1417320"/>
-            <a:ext cx="10817352" cy="5029200"/>
+            <a:ext cx="10817352" cy="4892040"/>
           </a:xfrm>
           <a:prstGeom prst="rect">
             <a:avLst/>
@@ -5825,13 +5825,13 @@
                 <a:solidFill>
                   <a:srgbClr val="78808C"/>
                 </a:solidFill>
-                <a:latin typeface="JetBrains Mono"/>
+                <a:latin typeface="Consolas"/>
               </a:rPr>
               <a:t>VON DER STRATEGISCHEN SWOT ZUR RISIKOKLASSIFIZIERUNG</a:t>
             </a:r>
           </a:p>
           <a:p>
-            <a:pPr>
+            <a:pPr marL="190500" indent="-190500">
               <a:spcBef>
                 <a:spcPts val="400"/>
               </a:spcBef>
@@ -5850,7 +5850,7 @@
             </a:r>
           </a:p>
           <a:p>
-            <a:pPr>
+            <a:pPr marL="190500" indent="-190500">
               <a:spcBef>
                 <a:spcPts val="400"/>
               </a:spcBef>
@@ -5869,7 +5869,7 @@
             </a:r>
           </a:p>
           <a:p>
-            <a:pPr>
+            <a:pPr marL="190500" indent="-190500">
               <a:spcBef>
                 <a:spcPts val="400"/>
               </a:spcBef>
@@ -5888,7 +5888,7 @@
             </a:r>
           </a:p>
           <a:p>
-            <a:pPr>
+            <a:pPr marL="190500" indent="-190500">
               <a:spcBef>
                 <a:spcPts val="400"/>
               </a:spcBef>
@@ -5907,7 +5907,7 @@
             </a:r>
           </a:p>
           <a:p>
-            <a:pPr>
+            <a:pPr marL="190500" indent="-190500">
               <a:spcBef>
                 <a:spcPts val="400"/>
               </a:spcBef>
@@ -5998,7 +5998,7 @@
                 <a:solidFill>
                   <a:srgbClr val="A0B4D2"/>
                 </a:solidFill>
-                <a:latin typeface="JetBrains Mono"/>
+                <a:latin typeface="Consolas"/>
               </a:rPr>
               <a:t>FKB Campus  ·  M22</a:t>
             </a:r>
@@ -6137,7 +6137,7 @@
                 <a:solidFill>
                   <a:srgbClr val="78808C"/>
                 </a:solidFill>
-                <a:latin typeface="JetBrains Mono"/>
+                <a:latin typeface="Consolas"/>
               </a:rPr>
               <a:t>M22  ·  INHALT</a:t>
             </a:r>
@@ -6258,7 +6258,7 @@
                 <a:solidFill>
                   <a:srgbClr val="1F2C56"/>
                 </a:solidFill>
-                <a:latin typeface="Source Serif 4"/>
+                <a:latin typeface="Arial"/>
               </a:rPr>
               <a:t>Framework 4: Strategische Ressourcenstärke (Resource-based View)</a:t>
             </a:r>
@@ -6274,7 +6274,7 @@
         <p:spPr>
           <a:xfrm>
             <a:off x="685800" y="1417320"/>
-            <a:ext cx="10817352" cy="5029200"/>
+            <a:ext cx="10817352" cy="4892040"/>
           </a:xfrm>
           <a:prstGeom prst="rect">
             <a:avLst/>
@@ -6282,12 +6282,12 @@
           <a:noFill/>
         </p:spPr>
         <p:txBody>
-          <a:bodyPr wrap="square">
+          <a:bodyPr wrap="square" anchor="ctr">
             <a:spAutoFit/>
           </a:bodyPr>
           <a:lstStyle/>
           <a:p>
-            <a:pPr>
+            <a:pPr marL="190500" indent="-190500">
               <a:spcBef>
                 <a:spcPts val="400"/>
               </a:spcBef>
@@ -6306,7 +6306,7 @@
             </a:r>
           </a:p>
           <a:p>
-            <a:pPr>
+            <a:pPr marL="190500" indent="-190500">
               <a:spcBef>
                 <a:spcPts val="400"/>
               </a:spcBef>
@@ -6325,7 +6325,7 @@
             </a:r>
           </a:p>
           <a:p>
-            <a:pPr>
+            <a:pPr marL="190500" indent="-190500">
               <a:spcBef>
                 <a:spcPts val="400"/>
               </a:spcBef>
@@ -6344,7 +6344,7 @@
             </a:r>
           </a:p>
           <a:p>
-            <a:pPr>
+            <a:pPr marL="190500" indent="-190500">
               <a:spcBef>
                 <a:spcPts val="400"/>
               </a:spcBef>
@@ -6363,7 +6363,7 @@
             </a:r>
           </a:p>
           <a:p>
-            <a:pPr>
+            <a:pPr marL="190500" indent="-190500">
               <a:spcBef>
                 <a:spcPts val="400"/>
               </a:spcBef>
@@ -6454,7 +6454,7 @@
                 <a:solidFill>
                   <a:srgbClr val="A0B4D2"/>
                 </a:solidFill>
-                <a:latin typeface="JetBrains Mono"/>
+                <a:latin typeface="Consolas"/>
               </a:rPr>
               <a:t>FKB Campus  ·  M22</a:t>
             </a:r>
@@ -6593,7 +6593,7 @@
                 <a:solidFill>
                   <a:srgbClr val="78808C"/>
                 </a:solidFill>
-                <a:latin typeface="JetBrains Mono"/>
+                <a:latin typeface="Consolas"/>
               </a:rPr>
               <a:t>M22  ·  ARBEITSBLATT</a:t>
             </a:r>
@@ -6714,7 +6714,7 @@
                 <a:solidFill>
                   <a:srgbClr val="1F2C56"/>
                 </a:solidFill>
-                <a:latin typeface="Source Serif 4"/>
+                <a:latin typeface="Arial"/>
               </a:rPr>
               <a:t>Praxisfall: Präzisionswerk Haller GmbH</a:t>
             </a:r>
@@ -6743,7 +6743,7 @@
           </a:bodyPr>
           <a:lstStyle/>
           <a:p>
-            <a:pPr>
+            <a:pPr marL="190500" indent="-190500">
               <a:spcBef>
                 <a:spcPts val="400"/>
               </a:spcBef>
@@ -6762,7 +6762,7 @@
             </a:r>
           </a:p>
           <a:p>
-            <a:pPr>
+            <a:pPr marL="190500" indent="-190500">
               <a:spcBef>
                 <a:spcPts val="400"/>
               </a:spcBef>
@@ -6781,7 +6781,7 @@
             </a:r>
           </a:p>
           <a:p>
-            <a:pPr>
+            <a:pPr marL="190500" indent="-190500">
               <a:spcBef>
                 <a:spcPts val="400"/>
               </a:spcBef>
@@ -6800,7 +6800,7 @@
             </a:r>
           </a:p>
           <a:p>
-            <a:pPr>
+            <a:pPr marL="190500" indent="-190500">
               <a:spcBef>
                 <a:spcPts val="400"/>
               </a:spcBef>
@@ -6819,7 +6819,7 @@
             </a:r>
           </a:p>
           <a:p>
-            <a:pPr>
+            <a:pPr marL="190500" indent="-190500">
               <a:spcBef>
                 <a:spcPts val="400"/>
               </a:spcBef>
@@ -6988,7 +6988,7 @@
                 <a:solidFill>
                   <a:srgbClr val="A0B4D2"/>
                 </a:solidFill>
-                <a:latin typeface="JetBrains Mono"/>
+                <a:latin typeface="Consolas"/>
               </a:rPr>
               <a:t>FKB Campus  ·  M22</a:t>
             </a:r>
@@ -7127,7 +7127,7 @@
                 <a:solidFill>
                   <a:srgbClr val="78808C"/>
                 </a:solidFill>
-                <a:latin typeface="JetBrains Mono"/>
+                <a:latin typeface="Consolas"/>
               </a:rPr>
               <a:t>M22  ·  INHALT</a:t>
             </a:r>
@@ -7248,7 +7248,7 @@
                 <a:solidFill>
                   <a:srgbClr val="1F2C56"/>
                 </a:solidFill>
-                <a:latin typeface="Source Serif 4"/>
+                <a:latin typeface="Arial"/>
               </a:rPr>
               <a:t>Kennzahlen- und Formelkarte: Qualitative Kreditwürdigkeitsanalyse</a:t>
             </a:r>
@@ -7264,7 +7264,7 @@
         <p:spPr>
           <a:xfrm>
             <a:off x="685800" y="1417320"/>
-            <a:ext cx="10817352" cy="5029200"/>
+            <a:ext cx="10817352" cy="4892040"/>
           </a:xfrm>
           <a:prstGeom prst="rect">
             <a:avLst/>
@@ -7272,48 +7272,11 @@
           <a:noFill/>
         </p:spPr>
         <p:txBody>
-          <a:bodyPr wrap="square">
+          <a:bodyPr wrap="square" anchor="ctr">
             <a:spAutoFit/>
           </a:bodyPr>
           <a:lstStyle/>
-          <a:p>
-            <a:pPr>
-              <a:spcBef>
-                <a:spcPts val="1000"/>
-              </a:spcBef>
-              <a:spcAft>
-                <a:spcPts val="200"/>
-              </a:spcAft>
-            </a:pPr>
-            <a:r>
-              <a:rPr sz="800" b="1">
-                <a:solidFill>
-                  <a:srgbClr val="78808C"/>
-                </a:solidFill>
-                <a:latin typeface="JetBrains Mono"/>
-              </a:rPr>
-              <a:t>STRATEGISCHE RED-FLAG-CHECKLISTE</a:t>
-            </a:r>
-          </a:p>
-          <a:p>
-            <a:pPr>
-              <a:spcBef>
-                <a:spcPts val="1000"/>
-              </a:spcBef>
-              <a:spcAft>
-                <a:spcPts val="200"/>
-              </a:spcAft>
-            </a:pPr>
-            <a:r>
-              <a:rPr sz="800" b="1">
-                <a:solidFill>
-                  <a:srgbClr val="78808C"/>
-                </a:solidFill>
-                <a:latin typeface="JetBrains Mono"/>
-              </a:rPr>
-              <a:t>QUANTITATIVE UNTERSTÜTZUNGSKENNZAHLEN</a:t>
-            </a:r>
-          </a:p>
+          <a:p/>
         </p:txBody>
       </p:sp>
       <p:sp>
@@ -7387,7 +7350,7 @@
                 <a:solidFill>
                   <a:srgbClr val="A0B4D2"/>
                 </a:solidFill>
-                <a:latin typeface="JetBrains Mono"/>
+                <a:latin typeface="Consolas"/>
               </a:rPr>
               <a:t>FKB Campus  ·  M22</a:t>
             </a:r>
@@ -7526,7 +7489,7 @@
                 <a:solidFill>
                   <a:srgbClr val="78808C"/>
                 </a:solidFill>
-                <a:latin typeface="JetBrains Mono"/>
+                <a:latin typeface="Consolas"/>
               </a:rPr>
               <a:t>M22  ·  ÜBERSICHT</a:t>
             </a:r>
@@ -7561,7 +7524,7 @@
                 <a:solidFill>
                   <a:srgbClr val="1F2C56"/>
                 </a:solidFill>
-                <a:latin typeface="Source Serif 4"/>
+                <a:latin typeface="Arial"/>
               </a:rPr>
               <a:t>Kennzahlen- und Formelkarte: Qualitative Kreditwürdigkeitsanalyse</a:t>
             </a:r>
@@ -8169,7 +8132,7 @@
                 <a:solidFill>
                   <a:srgbClr val="A0B4D2"/>
                 </a:solidFill>
-                <a:latin typeface="JetBrains Mono"/>
+                <a:latin typeface="Consolas"/>
               </a:rPr>
               <a:t>FKB Campus  ·  M22</a:t>
             </a:r>
@@ -8204,7 +8167,7 @@
                 <a:solidFill>
                   <a:srgbClr val="A0B4D2"/>
                 </a:solidFill>
-                <a:latin typeface="JetBrains Mono"/>
+                <a:latin typeface="Consolas"/>
               </a:rPr>
               <a:t>Übersicht</a:t>
             </a:r>
@@ -8343,7 +8306,7 @@
                 <a:solidFill>
                   <a:srgbClr val="78808C"/>
                 </a:solidFill>
-                <a:latin typeface="JetBrains Mono"/>
+                <a:latin typeface="Consolas"/>
               </a:rPr>
               <a:t>M22  ·  ÜBERSICHT</a:t>
             </a:r>
@@ -8378,7 +8341,7 @@
                 <a:solidFill>
                   <a:srgbClr val="1F2C56"/>
                 </a:solidFill>
-                <a:latin typeface="Source Serif 4"/>
+                <a:latin typeface="Arial"/>
               </a:rPr>
               <a:t>Kennzahlen- und Formelkarte: Qualitative Kreditwürdigkeitsanalyse</a:t>
             </a:r>
@@ -8913,7 +8876,7 @@
                 <a:solidFill>
                   <a:srgbClr val="A0B4D2"/>
                 </a:solidFill>
-                <a:latin typeface="JetBrains Mono"/>
+                <a:latin typeface="Consolas"/>
               </a:rPr>
               <a:t>FKB Campus  ·  M22</a:t>
             </a:r>
@@ -8948,7 +8911,7 @@
                 <a:solidFill>
                   <a:srgbClr val="A0B4D2"/>
                 </a:solidFill>
-                <a:latin typeface="JetBrains Mono"/>
+                <a:latin typeface="Consolas"/>
               </a:rPr>
               <a:t>Übersicht</a:t>
             </a:r>
@@ -9087,7 +9050,7 @@
                 <a:solidFill>
                   <a:srgbClr val="78808C"/>
                 </a:solidFill>
-                <a:latin typeface="JetBrains Mono"/>
+                <a:latin typeface="Consolas"/>
               </a:rPr>
               <a:t>M22  ·  SCHAUBILD</a:t>
             </a:r>
@@ -9122,7 +9085,7 @@
                 <a:solidFill>
                   <a:srgbClr val="1F2C56"/>
                 </a:solidFill>
-                <a:latin typeface="Source Serif 4"/>
+                <a:latin typeface="Arial"/>
               </a:rPr>
               <a:t>Handlungsempfehlung</a:t>
             </a:r>
@@ -9267,7 +9230,7 @@
                 <a:solidFill>
                   <a:srgbClr val="A0B4D2"/>
                 </a:solidFill>
-                <a:latin typeface="JetBrains Mono"/>
+                <a:latin typeface="Consolas"/>
               </a:rPr>
               <a:t>FKB Campus  ·  M22</a:t>
             </a:r>
@@ -9302,7 +9265,7 @@
                 <a:solidFill>
                   <a:srgbClr val="A0B4D2"/>
                 </a:solidFill>
-                <a:latin typeface="JetBrains Mono"/>
+                <a:latin typeface="Consolas"/>
               </a:rPr>
               <a:t>Schaubild</a:t>
             </a:r>
@@ -9441,7 +9404,7 @@
                 <a:solidFill>
                   <a:srgbClr val="78808C"/>
                 </a:solidFill>
-                <a:latin typeface="JetBrains Mono"/>
+                <a:latin typeface="Consolas"/>
               </a:rPr>
               <a:t>M22  ·  INHALT</a:t>
             </a:r>
@@ -9562,7 +9525,7 @@
                 <a:solidFill>
                   <a:srgbClr val="1F2C56"/>
                 </a:solidFill>
-                <a:latin typeface="Source Serif 4"/>
+                <a:latin typeface="Arial"/>
               </a:rPr>
               <a:t>Reflexionsfragen</a:t>
             </a:r>
@@ -9578,7 +9541,7 @@
         <p:spPr>
           <a:xfrm>
             <a:off x="685800" y="1417320"/>
-            <a:ext cx="10817352" cy="5029200"/>
+            <a:ext cx="10817352" cy="4892040"/>
           </a:xfrm>
           <a:prstGeom prst="rect">
             <a:avLst/>
@@ -9586,12 +9549,12 @@
           <a:noFill/>
         </p:spPr>
         <p:txBody>
-          <a:bodyPr wrap="square">
+          <a:bodyPr wrap="square" anchor="ctr">
             <a:spAutoFit/>
           </a:bodyPr>
           <a:lstStyle/>
           <a:p>
-            <a:pPr>
+            <a:pPr marL="190500" indent="-190500">
               <a:spcBef>
                 <a:spcPts val="400"/>
               </a:spcBef>
@@ -9610,7 +9573,7 @@
             </a:r>
           </a:p>
           <a:p>
-            <a:pPr>
+            <a:pPr marL="190500" indent="-190500">
               <a:spcBef>
                 <a:spcPts val="400"/>
               </a:spcBef>
@@ -9629,7 +9592,7 @@
             </a:r>
           </a:p>
           <a:p>
-            <a:pPr>
+            <a:pPr marL="190500" indent="-190500">
               <a:spcBef>
                 <a:spcPts val="400"/>
               </a:spcBef>
@@ -9648,7 +9611,7 @@
             </a:r>
           </a:p>
           <a:p>
-            <a:pPr>
+            <a:pPr marL="190500" indent="-190500">
               <a:spcBef>
                 <a:spcPts val="400"/>
               </a:spcBef>
@@ -9667,7 +9630,7 @@
             </a:r>
           </a:p>
           <a:p>
-            <a:pPr>
+            <a:pPr marL="190500" indent="-190500">
               <a:spcBef>
                 <a:spcPts val="400"/>
               </a:spcBef>
@@ -9758,7 +9721,7 @@
                 <a:solidFill>
                   <a:srgbClr val="A0B4D2"/>
                 </a:solidFill>
-                <a:latin typeface="JetBrains Mono"/>
+                <a:latin typeface="Consolas"/>
               </a:rPr>
               <a:t>FKB Campus  ·  M22</a:t>
             </a:r>
@@ -9897,7 +9860,7 @@
                 <a:solidFill>
                   <a:srgbClr val="78808C"/>
                 </a:solidFill>
-                <a:latin typeface="JetBrains Mono"/>
+                <a:latin typeface="Consolas"/>
               </a:rPr>
               <a:t>ÜBERBLICK  ·  M22</a:t>
             </a:r>
@@ -9975,7 +9938,7 @@
                 <a:solidFill>
                   <a:srgbClr val="1F2C56"/>
                 </a:solidFill>
-                <a:latin typeface="Source Serif 4"/>
+                <a:latin typeface="Arial"/>
               </a:rPr>
               <a:t>Worum geht es heute</a:t>
             </a:r>
@@ -10124,7 +10087,7 @@
                 <a:solidFill>
                   <a:srgbClr val="A0B4D2"/>
                 </a:solidFill>
-                <a:latin typeface="JetBrains Mono"/>
+                <a:latin typeface="Consolas"/>
               </a:rPr>
               <a:t>FKB Campus  ·  M22</a:t>
             </a:r>
@@ -10263,7 +10226,7 @@
                 <a:solidFill>
                   <a:srgbClr val="78808C"/>
                 </a:solidFill>
-                <a:latin typeface="JetBrains Mono"/>
+                <a:latin typeface="Consolas"/>
               </a:rPr>
               <a:t>LERNZIELE  ·  M22</a:t>
             </a:r>
@@ -10341,7 +10304,7 @@
                 <a:solidFill>
                   <a:srgbClr val="1F2C56"/>
                 </a:solidFill>
-                <a:latin typeface="Source Serif 4"/>
+                <a:latin typeface="Arial"/>
               </a:rPr>
               <a:t>Was Sie heute mitnehmen</a:t>
             </a:r>
@@ -10556,7 +10519,7 @@
                 <a:solidFill>
                   <a:srgbClr val="A0B4D2"/>
                 </a:solidFill>
-                <a:latin typeface="JetBrains Mono"/>
+                <a:latin typeface="Consolas"/>
               </a:rPr>
               <a:t>FKB Campus  ·  M22</a:t>
             </a:r>
@@ -10695,7 +10658,7 @@
                 <a:solidFill>
                   <a:srgbClr val="78808C"/>
                 </a:solidFill>
-                <a:latin typeface="JetBrains Mono"/>
+                <a:latin typeface="Consolas"/>
               </a:rPr>
               <a:t>AGENDA  ·  M22</a:t>
             </a:r>
@@ -10773,7 +10736,7 @@
                 <a:solidFill>
                   <a:srgbClr val="1F2C56"/>
                 </a:solidFill>
-                <a:latin typeface="Source Serif 4"/>
+                <a:latin typeface="Arial"/>
               </a:rPr>
               <a:t>So läuft das Modul</a:t>
             </a:r>
@@ -11133,7 +11096,7 @@
                 <a:solidFill>
                   <a:srgbClr val="A0B4D2"/>
                 </a:solidFill>
-                <a:latin typeface="JetBrains Mono"/>
+                <a:latin typeface="Consolas"/>
               </a:rPr>
               <a:t>FKB Campus  ·  M22</a:t>
             </a:r>
@@ -11272,7 +11235,7 @@
                 <a:solidFill>
                   <a:srgbClr val="78808C"/>
                 </a:solidFill>
-                <a:latin typeface="JetBrains Mono"/>
+                <a:latin typeface="Consolas"/>
               </a:rPr>
               <a:t>M22  ·  INHALT</a:t>
             </a:r>
@@ -11393,7 +11356,7 @@
                 <a:solidFill>
                   <a:srgbClr val="1F2C56"/>
                 </a:solidFill>
-                <a:latin typeface="Source Serif 4"/>
+                <a:latin typeface="Arial"/>
               </a:rPr>
               <a:t>Theoretischer Hintergrund: Warum Strategie zur Kreditwürdigkeit gehört</a:t>
             </a:r>
@@ -11409,7 +11372,7 @@
         <p:spPr>
           <a:xfrm>
             <a:off x="685800" y="1417320"/>
-            <a:ext cx="10817352" cy="5029200"/>
+            <a:ext cx="10817352" cy="4892040"/>
           </a:xfrm>
           <a:prstGeom prst="rect">
             <a:avLst/>
@@ -11417,7 +11380,7 @@
           <a:noFill/>
         </p:spPr>
         <p:txBody>
-          <a:bodyPr wrap="square">
+          <a:bodyPr wrap="square" anchor="ctr">
             <a:spAutoFit/>
           </a:bodyPr>
           <a:lstStyle/>
@@ -11435,32 +11398,13 @@
                 <a:solidFill>
                   <a:srgbClr val="78808C"/>
                 </a:solidFill>
-                <a:latin typeface="JetBrains Mono"/>
-              </a:rPr>
-              <a:t>VOM BILANZBILD ZUM ZUKUNFTSURTEIL</a:t>
-            </a:r>
-          </a:p>
-          <a:p>
-            <a:pPr>
-              <a:spcBef>
-                <a:spcPts val="1000"/>
-              </a:spcBef>
-              <a:spcAft>
-                <a:spcPts val="200"/>
-              </a:spcAft>
-            </a:pPr>
-            <a:r>
-              <a:rPr sz="800" b="1">
-                <a:solidFill>
-                  <a:srgbClr val="78808C"/>
-                </a:solidFill>
-                <a:latin typeface="JetBrains Mono"/>
+                <a:latin typeface="Consolas"/>
               </a:rPr>
               <a:t>DAS DREI-EBENEN-MODELL DER QUALITATIVEN KREDITWÜRDIGKEITSANALYSE</a:t>
             </a:r>
           </a:p>
           <a:p>
-            <a:pPr>
+            <a:pPr marL="190500" indent="-190500">
               <a:spcBef>
                 <a:spcPts val="400"/>
               </a:spcBef>
@@ -11551,7 +11495,7 @@
                 <a:solidFill>
                   <a:srgbClr val="A0B4D2"/>
                 </a:solidFill>
-                <a:latin typeface="JetBrains Mono"/>
+                <a:latin typeface="Consolas"/>
               </a:rPr>
               <a:t>FKB Campus  ·  M22</a:t>
             </a:r>
@@ -11690,7 +11634,7 @@
                 <a:solidFill>
                   <a:srgbClr val="78808C"/>
                 </a:solidFill>
-                <a:latin typeface="JetBrains Mono"/>
+                <a:latin typeface="Consolas"/>
               </a:rPr>
               <a:t>M22  ·  SCHAUBILD</a:t>
             </a:r>
@@ -11725,7 +11669,7 @@
                 <a:solidFill>
                   <a:srgbClr val="1F2C56"/>
                 </a:solidFill>
-                <a:latin typeface="Source Serif 4"/>
+                <a:latin typeface="Arial"/>
               </a:rPr>
               <a:t>Drei Analyse-Ebenen der qualitativen Kreditwürdigkeitsanalys</a:t>
             </a:r>
@@ -11870,7 +11814,7 @@
                 <a:solidFill>
                   <a:srgbClr val="A0B4D2"/>
                 </a:solidFill>
-                <a:latin typeface="JetBrains Mono"/>
+                <a:latin typeface="Consolas"/>
               </a:rPr>
               <a:t>FKB Campus  ·  M22</a:t>
             </a:r>
@@ -11905,7 +11849,7 @@
                 <a:solidFill>
                   <a:srgbClr val="A0B4D2"/>
                 </a:solidFill>
-                <a:latin typeface="JetBrains Mono"/>
+                <a:latin typeface="Consolas"/>
               </a:rPr>
               <a:t>Schaubild</a:t>
             </a:r>
@@ -12044,7 +11988,7 @@
                 <a:solidFill>
                   <a:srgbClr val="78808C"/>
                 </a:solidFill>
-                <a:latin typeface="JetBrains Mono"/>
+                <a:latin typeface="Consolas"/>
               </a:rPr>
               <a:t>M22  ·  INHALT</a:t>
             </a:r>
@@ -12165,7 +12109,7 @@
                 <a:solidFill>
                   <a:srgbClr val="1F2C56"/>
                 </a:solidFill>
-                <a:latin typeface="Source Serif 4"/>
+                <a:latin typeface="Arial"/>
               </a:rPr>
               <a:t>Framework 1: Branchenanalyse mit Porter's Five Forces</a:t>
             </a:r>
@@ -12181,7 +12125,7 @@
         <p:spPr>
           <a:xfrm>
             <a:off x="685800" y="1417320"/>
-            <a:ext cx="10817352" cy="5029200"/>
+            <a:ext cx="10817352" cy="4892040"/>
           </a:xfrm>
           <a:prstGeom prst="rect">
             <a:avLst/>
@@ -12189,7 +12133,7 @@
           <a:noFill/>
         </p:spPr>
         <p:txBody>
-          <a:bodyPr wrap="square">
+          <a:bodyPr wrap="square" anchor="ctr">
             <a:spAutoFit/>
           </a:bodyPr>
           <a:lstStyle/>
@@ -12207,13 +12151,13 @@
                 <a:solidFill>
                   <a:srgbClr val="78808C"/>
                 </a:solidFill>
-                <a:latin typeface="JetBrains Mono"/>
+                <a:latin typeface="Consolas"/>
               </a:rPr>
               <a:t>GRUNDPRINZIP</a:t>
             </a:r>
           </a:p>
           <a:p>
-            <a:pPr>
+            <a:pPr marL="190500" indent="-190500">
               <a:spcBef>
                 <a:spcPts val="400"/>
               </a:spcBef>
@@ -12231,25 +12175,6 @@
               <a:t>▸  Die fünf Kräfte im Überblick:</a:t>
             </a:r>
           </a:p>
-          <a:p>
-            <a:pPr>
-              <a:spcBef>
-                <a:spcPts val="1000"/>
-              </a:spcBef>
-              <a:spcAft>
-                <a:spcPts val="200"/>
-              </a:spcAft>
-            </a:pPr>
-            <a:r>
-              <a:rPr sz="800" b="1">
-                <a:solidFill>
-                  <a:srgbClr val="78808C"/>
-                </a:solidFill>
-                <a:latin typeface="JetBrains Mono"/>
-              </a:rPr>
-              <a:t>EINSCHRÄNKUNGEN UND VERWENDUNGSREGELN</a:t>
-            </a:r>
-          </a:p>
         </p:txBody>
       </p:sp>
       <p:sp>
@@ -12323,7 +12248,7 @@
                 <a:solidFill>
                   <a:srgbClr val="A0B4D2"/>
                 </a:solidFill>
-                <a:latin typeface="JetBrains Mono"/>
+                <a:latin typeface="Consolas"/>
               </a:rPr>
               <a:t>FKB Campus  ·  M22</a:t>
             </a:r>
@@ -12462,7 +12387,7 @@
                 <a:solidFill>
                   <a:srgbClr val="78808C"/>
                 </a:solidFill>
-                <a:latin typeface="JetBrains Mono"/>
+                <a:latin typeface="Consolas"/>
               </a:rPr>
               <a:t>M22  ·  SCHAUBILD</a:t>
             </a:r>
@@ -12497,7 +12422,7 @@
                 <a:solidFill>
                   <a:srgbClr val="1F2C56"/>
                 </a:solidFill>
-                <a:latin typeface="Source Serif 4"/>
+                <a:latin typeface="Arial"/>
               </a:rPr>
               <a:t>Five-Forces-Modell nach Porter</a:t>
             </a:r>
@@ -12642,7 +12567,7 @@
                 <a:solidFill>
                   <a:srgbClr val="A0B4D2"/>
                 </a:solidFill>
-                <a:latin typeface="JetBrains Mono"/>
+                <a:latin typeface="Consolas"/>
               </a:rPr>
               <a:t>FKB Campus  ·  M22</a:t>
             </a:r>
@@ -12677,7 +12602,7 @@
                 <a:solidFill>
                   <a:srgbClr val="A0B4D2"/>
                 </a:solidFill>
-                <a:latin typeface="JetBrains Mono"/>
+                <a:latin typeface="Consolas"/>
               </a:rPr>
               <a:t>Schaubild</a:t>
             </a:r>
@@ -12816,7 +12741,7 @@
                 <a:solidFill>
                   <a:srgbClr val="78808C"/>
                 </a:solidFill>
-                <a:latin typeface="JetBrains Mono"/>
+                <a:latin typeface="Consolas"/>
               </a:rPr>
               <a:t>M22  ·  INHALT</a:t>
             </a:r>
@@ -12937,7 +12862,7 @@
                 <a:solidFill>
                   <a:srgbClr val="1F2C56"/>
                 </a:solidFill>
-                <a:latin typeface="Source Serif 4"/>
+                <a:latin typeface="Arial"/>
               </a:rPr>
               <a:t>Framework 1b: Generische Wettbewerbsstrategien und das Stuck-in-the-Middle-Risiko</a:t>
             </a:r>
@@ -12953,7 +12878,7 @@
         <p:spPr>
           <a:xfrm>
             <a:off x="685800" y="1417320"/>
-            <a:ext cx="10817352" cy="5029200"/>
+            <a:ext cx="10817352" cy="4892040"/>
           </a:xfrm>
           <a:prstGeom prst="rect">
             <a:avLst/>
@@ -12979,13 +12904,13 @@
                 <a:solidFill>
                   <a:srgbClr val="78808C"/>
                 </a:solidFill>
-                <a:latin typeface="JetBrains Mono"/>
+                <a:latin typeface="Consolas"/>
               </a:rPr>
               <a:t>DIE DREI GRUNDSTRATEGIEN NACH PORTER (1980)</a:t>
             </a:r>
           </a:p>
           <a:p>
-            <a:pPr>
+            <a:pPr marL="190500" indent="-190500">
               <a:spcBef>
                 <a:spcPts val="400"/>
               </a:spcBef>
@@ -13017,13 +12942,13 @@
                 <a:solidFill>
                   <a:srgbClr val="78808C"/>
                 </a:solidFill>
-                <a:latin typeface="JetBrains Mono"/>
+                <a:latin typeface="Consolas"/>
               </a:rPr>
               <a:t>DAS STUCK-IN-THE-MIDDLE-PROBLEM</a:t>
             </a:r>
           </a:p>
           <a:p>
-            <a:pPr>
+            <a:pPr marL="190500" indent="-190500">
               <a:spcBef>
                 <a:spcPts val="400"/>
               </a:spcBef>
@@ -13042,7 +12967,7 @@
             </a:r>
           </a:p>
           <a:p>
-            <a:pPr>
+            <a:pPr marL="190500" indent="-190500">
               <a:spcBef>
                 <a:spcPts val="400"/>
               </a:spcBef>
@@ -13061,7 +12986,7 @@
             </a:r>
           </a:p>
           <a:p>
-            <a:pPr>
+            <a:pPr marL="190500" indent="-190500">
               <a:spcBef>
                 <a:spcPts val="400"/>
               </a:spcBef>
@@ -13080,7 +13005,7 @@
             </a:r>
           </a:p>
           <a:p>
-            <a:pPr>
+            <a:pPr marL="190500" indent="-190500">
               <a:spcBef>
                 <a:spcPts val="400"/>
               </a:spcBef>
@@ -13099,7 +13024,7 @@
             </a:r>
           </a:p>
           <a:p>
-            <a:pPr>
+            <a:pPr marL="190500" indent="-190500">
               <a:spcBef>
                 <a:spcPts val="400"/>
               </a:spcBef>
@@ -13118,7 +13043,7 @@
             </a:r>
           </a:p>
           <a:p>
-            <a:pPr>
+            <a:pPr marL="190500" indent="-190500">
               <a:spcBef>
                 <a:spcPts val="400"/>
               </a:spcBef>
@@ -13137,7 +13062,7 @@
             </a:r>
           </a:p>
           <a:p>
-            <a:pPr>
+            <a:pPr marL="190500" indent="-190500">
               <a:spcBef>
                 <a:spcPts val="400"/>
               </a:spcBef>
@@ -13156,7 +13081,7 @@
             </a:r>
           </a:p>
           <a:p>
-            <a:pPr>
+            <a:pPr marL="190500" indent="-190500">
               <a:spcBef>
                 <a:spcPts val="400"/>
               </a:spcBef>
@@ -13247,7 +13172,7 @@
                 <a:solidFill>
                   <a:srgbClr val="A0B4D2"/>
                 </a:solidFill>
-                <a:latin typeface="JetBrains Mono"/>
+                <a:latin typeface="Consolas"/>
               </a:rPr>
               <a:t>FKB Campus  ·  M22</a:t>
             </a:r>

--- a/protected-downloads/praesentation/M22.pptx
+++ b/protected-downloads/praesentation/M22.pptx
@@ -24,6 +24,8 @@
     <p:sldId id="272" r:id="rId24"/>
     <p:sldId id="273" r:id="rId25"/>
     <p:sldId id="274" r:id="rId26"/>
+    <p:sldId id="275" r:id="rId27"/>
+    <p:sldId id="276" r:id="rId28"/>
   </p:sldIdLst>
   <p:sldSz cx="12188952" cy="6858000" type="screen4x3"/>
   <p:notesSz cx="6858000" cy="9144000"/>
@@ -590,7 +592,147 @@
           <a:lstStyle/>
           <a:p>
             <a:r>
-              <a:t>Siehe Trainerhandbuch (Sektion 3) für Moderationshinweise, Timing und erwartete Teilnehmerreaktionen.</a:t>
+              <a:t>Die Karte verbindet erkanntes Signal, passendes Framework und konkrete Kreditmaßnahme – das Werkzeug für den Alltag.</a:t>
+            </a:r>
+          </a:p>
+        </p:txBody>
+      </p:sp>
+      <p:sp>
+        <p:nvSpPr>
+          <p:cNvPr id="4" name="Slide Number Placeholder 3"/>
+          <p:cNvSpPr>
+            <a:spLocks noGrp="1"/>
+          </p:cNvSpPr>
+          <p:nvPr>
+            <p:ph type="sldNum" idx="5" sz="quarter"/>
+          </p:nvPr>
+        </p:nvSpPr>
+        <p:spPr/>
+      </p:sp>
+    </p:spTree>
+  </p:cSld>
+  <p:clrMapOvr>
+    <a:masterClrMapping/>
+  </p:clrMapOvr>
+</p:notes>
+</file>
+
+<file path=ppt/notesSlides/notesSlide11.xml><?xml version="1.0" encoding="utf-8"?>
+<p:notes xmlns:a="http://schemas.openxmlformats.org/drawingml/2006/main" xmlns:p="http://schemas.openxmlformats.org/presentationml/2006/main" xmlns:r="http://schemas.openxmlformats.org/officeDocument/2006/relationships">
+  <p:cSld>
+    <p:spTree>
+      <p:nvGrpSpPr>
+        <p:cNvPr id="1" name=""/>
+        <p:cNvGrpSpPr/>
+        <p:nvPr/>
+      </p:nvGrpSpPr>
+      <p:grpSpPr>
+        <a:xfrm>
+          <a:off x="0" y="0"/>
+          <a:ext cx="0" cy="0"/>
+          <a:chOff x="0" y="0"/>
+          <a:chExt cx="0" cy="0"/>
+        </a:xfrm>
+      </p:grpSpPr>
+      <p:sp>
+        <p:nvSpPr>
+          <p:cNvPr id="2" name="Slide Image Placeholder 1"/>
+          <p:cNvSpPr>
+            <a:spLocks noGrp="1"/>
+          </p:cNvSpPr>
+          <p:nvPr>
+            <p:ph type="sldImg" idx="2"/>
+          </p:nvPr>
+        </p:nvSpPr>
+        <p:spPr/>
+      </p:sp>
+      <p:sp>
+        <p:nvSpPr>
+          <p:cNvPr id="3" name="Notes Placeholder 2"/>
+          <p:cNvSpPr>
+            <a:spLocks noGrp="1"/>
+          </p:cNvSpPr>
+          <p:nvPr>
+            <p:ph type="body" idx="3" sz="quarter"/>
+          </p:nvPr>
+        </p:nvSpPr>
+        <p:spPr/>
+        <p:txBody>
+          <a:bodyPr/>
+          <a:lstStyle/>
+          <a:p>
+            <a:r>
+              <a:t>Transferaufgabe: Five Forces auf einen eigenen Bestandskunden anwenden.</a:t>
+            </a:r>
+          </a:p>
+        </p:txBody>
+      </p:sp>
+      <p:sp>
+        <p:nvSpPr>
+          <p:cNvPr id="4" name="Slide Number Placeholder 3"/>
+          <p:cNvSpPr>
+            <a:spLocks noGrp="1"/>
+          </p:cNvSpPr>
+          <p:nvPr>
+            <p:ph type="sldNum" idx="5" sz="quarter"/>
+          </p:nvPr>
+        </p:nvSpPr>
+        <p:spPr/>
+      </p:sp>
+    </p:spTree>
+  </p:cSld>
+  <p:clrMapOvr>
+    <a:masterClrMapping/>
+  </p:clrMapOvr>
+</p:notes>
+</file>
+
+<file path=ppt/notesSlides/notesSlide12.xml><?xml version="1.0" encoding="utf-8"?>
+<p:notes xmlns:a="http://schemas.openxmlformats.org/drawingml/2006/main" xmlns:p="http://schemas.openxmlformats.org/presentationml/2006/main" xmlns:r="http://schemas.openxmlformats.org/officeDocument/2006/relationships">
+  <p:cSld>
+    <p:spTree>
+      <p:nvGrpSpPr>
+        <p:cNvPr id="1" name=""/>
+        <p:cNvGrpSpPr/>
+        <p:nvPr/>
+      </p:nvGrpSpPr>
+      <p:grpSpPr>
+        <a:xfrm>
+          <a:off x="0" y="0"/>
+          <a:ext cx="0" cy="0"/>
+          <a:chOff x="0" y="0"/>
+          <a:chExt cx="0" cy="0"/>
+        </a:xfrm>
+      </p:grpSpPr>
+      <p:sp>
+        <p:nvSpPr>
+          <p:cNvPr id="2" name="Slide Image Placeholder 1"/>
+          <p:cNvSpPr>
+            <a:spLocks noGrp="1"/>
+          </p:cNvSpPr>
+          <p:nvPr>
+            <p:ph type="sldImg" idx="2"/>
+          </p:nvPr>
+        </p:nvSpPr>
+        <p:spPr/>
+      </p:sp>
+      <p:sp>
+        <p:nvSpPr>
+          <p:cNvPr id="3" name="Notes Placeholder 2"/>
+          <p:cNvSpPr>
+            <a:spLocks noGrp="1"/>
+          </p:cNvSpPr>
+          <p:nvPr>
+            <p:ph type="body" idx="3" sz="quarter"/>
+          </p:nvPr>
+        </p:nvSpPr>
+        <p:spPr/>
+        <p:txBody>
+          <a:bodyPr/>
+          <a:lstStyle/>
+          <a:p>
+            <a:r>
+              <a:t>Selbstcheck als Transferanker.</a:t>
             </a:r>
           </a:p>
         </p:txBody>
@@ -660,7 +802,7 @@
           <a:lstStyle/>
           <a:p>
             <a:r>
-              <a:t>Siehe Trainerhandbuch (Sektion 3) für Moderationshinweise, Timing und erwartete Teilnehmerreaktionen.</a:t>
+              <a:t>Provokanter Fall-Teaser: solide Zahlen ≠ sichere Kreditentscheidung. „Was fehlt für die Entscheidung?"</a:t>
             </a:r>
           </a:p>
         </p:txBody>
@@ -730,6 +872,11 @@
           <a:lstStyle/>
           <a:p>
             <a:r>
+              <a:t>Wenn alle fünf Kräfte ähnlich bewertet werden, gezielt nachfragen, welche wirklich dominiert.</a:t>
+            </a:r>
+          </a:p>
+          <a:p>
+            <a:r>
               <a:t>Moderation (HB Sec 3): Methode: Problembasiertes Lernen in Kleingruppen (Barrows, 1986) Fallblatt Haller GmbH austeilen, 2 Minuten Lesezeit, dann AB-1 austeilen. Aufgabenstellung (Trainer liest vor): „Analysieren Sie die Wettbewerbssituation der Haller GmbH mit dem Five-Forces-Modell. Bewerten Sie jede Kraft von 1 (gering) bis 3 (hoch). Bestimmen Sie: Welche generische Strategie verfolgt Haller — oder ist das Unternehmen stuck in the middle? Begründen Sie." Gruppen: 3–4 Personen, 20 Minuten Arbeitszeit. Trainer-Runde durch den Raum (ab Minute 5):</a:t>
             </a:r>
           </a:p>
@@ -800,7 +947,7 @@
           <a:lstStyle/>
           <a:p>
             <a:r>
-              <a:t>Siehe Trainerhandbuch (Sektion 3) für Moderationshinweise, Timing und erwartete Teilnehmerreaktionen.</a:t>
+              <a:t>Haller ist ein Differenzierer (Präzision) – aber mit einem Klumpenrisiko, das die Position gefährdet.</a:t>
             </a:r>
           </a:p>
         </p:txBody>
@@ -870,7 +1017,7 @@
           <a:lstStyle/>
           <a:p>
             <a:r>
-              <a:t>Siehe Trainerhandbuch (Sektion 3) für Moderationshinweise, Timing und erwartete Teilnehmerreaktionen.</a:t>
+              <a:t>Bei Haller sofort sichtbar: ein Kundensegment trägt 60 % – das Modell steht auf einem Bein.</a:t>
             </a:r>
           </a:p>
         </p:txBody>
@@ -940,6 +1087,11 @@
           <a:lstStyle/>
           <a:p>
             <a:r>
+              <a:t>Haller: Stärke Präzision/Reputation, Schwäche Kundenkonzentration + fehlende Nachfolge trifft auf Risiko Konjunktur/Maschinenbau.</a:t>
+            </a:r>
+          </a:p>
+          <a:p>
+            <a:r>
               <a:t>Moderation (HB Sec 3): Gleiche Gruppen. AB-2 und AB-3 gleichzeitig austeilen. Zeitfenster: 30 Minuten (25 Min. Arbeit, 5 Min. Trainer-Rundgang und Abschluss). Für Gruppen mit Einsteiger-Profil: Eine zu 50 % ausgefüllte SWOT (AB-2) ist akzeptabel – das Krediturteil (AB-3) hat Priorität. AB-2 SWOT: Ergebnisse aus Five Forces in SWOT-Raster übertragen; explizit: „Markieren Sie die drei größten Red Flags für das Kreditvotum." Schnelle Teilnehmer (Zusatzaufgabe): Wer AB-3 früh fertig hat, erhält mündlich (oder über den AB-3-Erweiterungskasten): „Szenario: Haller plant statt des Betriebsmittelkredits ein Investitionsdarlehen über 1,2 Mio. EUR für neue CNC-Maschinen. Was ändert sich an Ihrer qualitativen Einschätzung – und was bleibt? Formulieren Sie einen Satz fürs Kreditvotum unter dieser Annahme." AB-3 Krediturteil: Formulierung in max. 5 Sätzen mit: 1. Strategische Positionierung (max. 2 Sätze) 2. Identifizierte Risikofaktoren mit Fallbezug (1–2 Sätze) 3. Kreditempfehlung mit Bedingung oder Vorbehalt (1 Satz) Häufiger Fehler: Empfehlung ohne Begründung oder Risiken ohne Strategiebezug. Korrekturimpuls: „Ihr Kreditausschuss fragt: Woher wissen Sie das? — Was ist Ihre Antwort?"</a:t>
             </a:r>
           </a:p>
@@ -1010,7 +1162,7 @@
           <a:lstStyle/>
           <a:p>
             <a:r>
-              <a:t>Moderation (HB Sec 3): Methode: Problembasiertes Lernen in Kleingruppen (Barrows, 1986) Fallblatt Haller GmbH austeilen, 2 Minuten Lesezeit, dann AB-1 austeilen. Aufgabenstellung (Trainer liest vor): „Analysieren Sie die Wettbewerbssituation der Haller GmbH mit dem Five-Forces-Modell. Bewerten Sie jede Kraft von 1 (gering) bis 3 (hoch). Bestimmen Sie: Welche generische Strategie verfolgt Haller — oder ist das Unternehmen stuck in the middle? Begründen Sie." Gruppen: 3–4 Personen, 20 Minuten Arbeitszeit. Trainer-Runde durch den Raum (ab Minute 5):</a:t>
+              <a:t>Hallers Präzisions-Know-how ist stark, aber am 63-jährigen GF hängend – Ressource mit Ablaufdatum.</a:t>
             </a:r>
           </a:p>
         </p:txBody>
@@ -1080,52 +1232,7 @@
           <a:lstStyle/>
           <a:p>
             <a:r>
-              <a:t>AB-1 Musterlösung (Trainer-Version)</a:t>
-            </a:r>
-          </a:p>
-          <a:p>
-            <a:r>
-              <a:t>Gesamteinschätzung Branchenattraktivität: mittel bis niedrig. Dominierende Risiken: Kundenklumpen + Niedrigpreiswettbewerb aus Asien. Für die Kreditwürdigkeitsbeurteilung ist die Abhängigkeit von Kunde A das zentrale qualitative Red Flag.</a:t>
-            </a:r>
-          </a:p>
-          <a:p>
-            <a:r>
-              <a:t>Strategische Positionierung: Haller verfolgt implizit eine Differenzierungsstrategie (Qualität, Liefertreue, Präzisions-Know-how). Diese Strategie ist solange tragfähig, wie der Qualitätsvorteil verteidigbar bleibt. Mit dem Eintritt asiatischer Wettbewerber und ohne erkennbare Reinvestition in neue Differenzierungsmerkmale droht jedoch ein Stuck-in-the-Middle: nicht günstig genug für Preiskampf, aber zunehmend weniger differenziert. Klassisches Signal: GF Haller kann vermutlich nicht klar benennen, was das Unternehmen in 5 Jahren noch einzigartig macht.</a:t>
-            </a:r>
-          </a:p>
-          <a:p>
-            <a:r>
-              <a:t>AB-2 Musterlösung (Trainer-Version)</a:t>
-            </a:r>
-          </a:p>
-          <a:p>
-            <a:r>
-              <a:t>Stärken: (1) Langjährige Kundenbindungen, hohe Liefertreue und Qualitätsstandard; (2) Erfahrenes Facharbeiterteam mit spezifischem Präzisions-Know-how (VRIN-Ressource nach Barney, 1991); (3) Gesunde Eigenkapitalquote (31,4 %) und positiver DSCR (1,42x)</a:t>
-            </a:r>
-          </a:p>
-          <a:p>
-            <a:r>
-              <a:t>Schwächen: (1) ! Extreme Kundenabhängigkeit (Kunde A = 60 % Umsatz — Klumpenrisiko); (2) ! Fehlende Nachfolgeplanung (GF 63 Jahre, kein Nachfolger); (3) Veralteter Maschinenpark (Ø 9 Jahre, letzte große Investition 2019)</a:t>
-            </a:r>
-          </a:p>
-          <a:p>
-            <a:r>
-              <a:t>Chancen: (1) Reshoring-Trend — europäische Kunden bauen asiatische Abhängigkeiten ab; (2) Wachstum im Bereich Elektromobilität-Komponenten als Diversifikationsoption; (3) Förderprogramme für KMU-Digitalisierung (z. B. go-digital, BMWi)</a:t>
-            </a:r>
-          </a:p>
-          <a:p>
-            <a:r>
-              <a:t>Risiken: (1) ! Asiatischer Niedrigpreiswettbewerb bereits im Markt; (2) Fachkräfteverlust durch Altersabgänge ohne Nachbesetzung; (3) Abhängigkeit vom Konjunkturzyklus des Maschinenbaus</a:t>
-            </a:r>
-          </a:p>
-          <a:p>
-            <a:r>
-              <a:t>Die drei kritischsten: (1) Klumpenrisiko Kunde A — Wegfall würde Deckungsbeitrag auf 40 % reduzieren; Zahlungsunfähigkeit droht. (2) Nachfolgerisiko GF Haller — kein Managementnachfolger = operatives Schlüsselpersonenrisiko. (3) Preiserosion durch asiatische Wettbewerber — mittelfristige Margenkompression strukturell angelegt.</a:t>
-            </a:r>
-          </a:p>
-          <a:p>
-            <a:r>
-              <a:t>Kreditvorlage-Formulierungsvorschlag: „Die Haller GmbH verfügt über eine solide Bilanzstruktur und ein qualifiziertes Facharbeiterteam als nachhaltige Wettbewerbsressource. Die Kreditwürdigkeit wird jedoch durch drei qualitative Risiken erheblich belastet: das extreme Klumpenrisiko auf Kundenseite (Kunde A: 60 % Umsatzanteil), das ungeklärte Nachfolgeproblem des 63-jährigen Alleingeschäftsführers sowie den strukturell zunehmenden Preisdruck durch asiatische Wettbewerber. Diese Faktoren erfordern eine differenzierte Bewertung und ggf. Absicherungsmaßnahmen im Kreditrahmen."</a:t>
+              <a:t>Die Zahlen sind solide – die beiden entscheidenden Risiken (Klumpen, Nachfolge) stehen in keiner Kennzahl.</a:t>
             </a:r>
           </a:p>
         </p:txBody>
@@ -1195,7 +1302,12 @@
           <a:lstStyle/>
           <a:p>
             <a:r>
-              <a:t>Trainer-Hinweis: Die Kennzahlen der Haller GmbH sind quantitativ unauffällig. Genau darin liegt die didaktische Stärke des Fallbeispiels: Teilnehmer sollen erkennen, dass ein auf den ersten Blick gesundes Unternehmen qualitativ erhebliche Risiken trägt, die sich in einer reinen Bilanzanalyse nicht zeigen.</a:t>
+              <a:t>AB-1 Musterlösung (Trainer-Version)</a:t>
+            </a:r>
+          </a:p>
+          <a:p>
+            <a:r>
+              <a:t>Kernbefund: solide Zahlen, aber zwei existenzielle qualitative Risiken (60 %-Klumpen, Nachfolge). Empfehlung: Kredit mit Auflagen (Diversifizierung, Nachfolgeplanung) statt reiner Zahlenfreigabe.</a:t>
             </a:r>
           </a:p>
         </p:txBody>
@@ -4791,7 +4903,7 @@
             <a:avLst/>
           </a:prstGeom>
           <a:solidFill>
-            <a:srgbClr val="FFFFFF"/>
+            <a:srgbClr val="EDEDF3"/>
           </a:solidFill>
           <a:ln>
             <a:noFill/>
@@ -4892,43 +5004,51 @@
                 </a:solidFill>
                 <a:latin typeface="Consolas"/>
               </a:rPr>
-              <a:t>M22  ·  SCHAUBILD</a:t>
-            </a:r>
-          </a:p>
-        </p:txBody>
-      </p:sp>
-      <p:sp>
-        <p:nvSpPr>
-          <p:cNvPr id="5" name="TextBox 4"/>
-          <p:cNvSpPr txBox="1"/>
-          <p:nvPr/>
-        </p:nvSpPr>
-        <p:spPr>
-          <a:xfrm>
-            <a:off x="685800" y="502920"/>
-            <a:ext cx="10817352" cy="594360"/>
-          </a:xfrm>
-          <a:prstGeom prst="rect">
-            <a:avLst/>
-          </a:prstGeom>
-          <a:noFill/>
-        </p:spPr>
-        <p:txBody>
-          <a:bodyPr wrap="square">
-            <a:spAutoFit/>
-          </a:bodyPr>
-          <a:lstStyle/>
-          <a:p>
-            <a:pPr algn="l"/>
-            <a:r>
-              <a:rPr sz="2000" b="1" i="0">
-                <a:solidFill>
-                  <a:srgbClr val="1F2C56"/>
-                </a:solidFill>
-                <a:latin typeface="Arial"/>
-              </a:rPr>
-              <a:t>Wettbewerbsstrategie-Matrix nach Porter</a:t>
-            </a:r>
+              <a:t>M22  ·  INHALT</a:t>
+            </a:r>
+          </a:p>
+        </p:txBody>
+      </p:sp>
+      <p:sp>
+        <p:nvSpPr>
+          <p:cNvPr id="5" name="Rectangle 4"/>
+          <p:cNvSpPr/>
+          <p:nvPr/>
+        </p:nvSpPr>
+        <p:spPr>
+          <a:xfrm>
+            <a:off x="0" y="1234440"/>
+            <a:ext cx="12188952" cy="12700"/>
+          </a:xfrm>
+          <a:prstGeom prst="rect">
+            <a:avLst/>
+          </a:prstGeom>
+          <a:solidFill>
+            <a:srgbClr val="D8DFE4"/>
+          </a:solidFill>
+          <a:ln>
+            <a:noFill/>
+          </a:ln>
+        </p:spPr>
+        <p:style>
+          <a:lnRef idx="1">
+            <a:schemeClr val="accent1"/>
+          </a:lnRef>
+          <a:fillRef idx="3">
+            <a:schemeClr val="accent1"/>
+          </a:fillRef>
+          <a:effectRef idx="2">
+            <a:schemeClr val="accent1"/>
+          </a:effectRef>
+          <a:fontRef idx="minor">
+            <a:schemeClr val="lt1"/>
+          </a:fontRef>
+        </p:style>
+        <p:txBody>
+          <a:bodyPr rtlCol="0" anchor="ctr"/>
+          <a:lstStyle/>
+          <a:p>
+            <a:pPr algn="ctr"/>
           </a:p>
         </p:txBody>
       </p:sp>
@@ -4940,8 +5060,8 @@
         </p:nvSpPr>
         <p:spPr>
           <a:xfrm>
-            <a:off x="685800" y="1143000"/>
-            <a:ext cx="10817352" cy="25400"/>
+            <a:off x="685800" y="502920"/>
+            <a:ext cx="36576" cy="658368"/>
           </a:xfrm>
           <a:prstGeom prst="rect">
             <a:avLst/>
@@ -4975,33 +5095,124 @@
           </a:p>
         </p:txBody>
       </p:sp>
-      <p:pic>
-        <p:nvPicPr>
-          <p:cNvPr id="7" name="Picture 6" descr="image.png"/>
-          <p:cNvPicPr>
-            <a:picLocks noChangeAspect="1"/>
-          </p:cNvPicPr>
-          <p:nvPr/>
-        </p:nvPicPr>
-        <p:blipFill>
-          <a:blip r:embed="rId2"/>
-          <a:stretch>
-            <a:fillRect/>
-          </a:stretch>
-        </p:blipFill>
-        <p:spPr>
-          <a:xfrm>
-            <a:off x="2303489" y="1325880"/>
-            <a:ext cx="7581973" cy="4937760"/>
-          </a:xfrm>
-          <a:prstGeom prst="rect">
-            <a:avLst/>
-          </a:prstGeom>
-        </p:spPr>
-      </p:pic>
-      <p:sp>
-        <p:nvSpPr>
-          <p:cNvPr id="8" name="Rectangle 7"/>
+      <p:sp>
+        <p:nvSpPr>
+          <p:cNvPr id="7" name="TextBox 6"/>
+          <p:cNvSpPr txBox="1"/>
+          <p:nvPr/>
+        </p:nvSpPr>
+        <p:spPr>
+          <a:xfrm>
+            <a:off x="813816" y="502920"/>
+            <a:ext cx="10634472" cy="685800"/>
+          </a:xfrm>
+          <a:prstGeom prst="rect">
+            <a:avLst/>
+          </a:prstGeom>
+          <a:noFill/>
+        </p:spPr>
+        <p:txBody>
+          <a:bodyPr wrap="square">
+            <a:spAutoFit/>
+          </a:bodyPr>
+          <a:lstStyle/>
+          <a:p>
+            <a:pPr algn="l"/>
+            <a:r>
+              <a:rPr sz="2400" b="1" i="0">
+                <a:solidFill>
+                  <a:srgbClr val="1F2C56"/>
+                </a:solidFill>
+                <a:latin typeface="Arial"/>
+              </a:rPr>
+              <a:t>Framework 1b: die Wettbewerbsstrategie einordnen</a:t>
+            </a:r>
+          </a:p>
+        </p:txBody>
+      </p:sp>
+      <p:sp>
+        <p:nvSpPr>
+          <p:cNvPr id="8" name="TextBox 7"/>
+          <p:cNvSpPr txBox="1"/>
+          <p:nvPr/>
+        </p:nvSpPr>
+        <p:spPr>
+          <a:xfrm>
+            <a:off x="685800" y="1417320"/>
+            <a:ext cx="10817352" cy="4892040"/>
+          </a:xfrm>
+          <a:prstGeom prst="rect">
+            <a:avLst/>
+          </a:prstGeom>
+          <a:noFill/>
+        </p:spPr>
+        <p:txBody>
+          <a:bodyPr wrap="square" anchor="ctr">
+            <a:spAutoFit/>
+          </a:bodyPr>
+          <a:lstStyle/>
+          <a:p>
+            <a:pPr marL="177800" indent="-177800">
+              <a:spcBef>
+                <a:spcPts val="600"/>
+              </a:spcBef>
+              <a:spcAft>
+                <a:spcPts val="200"/>
+              </a:spcAft>
+            </a:pPr>
+            <a:r>
+              <a:rPr sz="1200" i="1">
+                <a:solidFill>
+                  <a:srgbClr val="3D5466"/>
+                </a:solidFill>
+                <a:latin typeface="Arial"/>
+              </a:rPr>
+              <a:t>→  Kostenführerschaft oder Differenzierung – wer keine klare Position hat, steckt in der Mitte fest und verdient am wenigsten.</a:t>
+            </a:r>
+          </a:p>
+          <a:p>
+            <a:pPr marL="190500" indent="-190500">
+              <a:spcBef>
+                <a:spcPts val="400"/>
+              </a:spcBef>
+              <a:spcAft>
+                <a:spcPts val="200"/>
+              </a:spcAft>
+            </a:pPr>
+            <a:r>
+              <a:rPr sz="1300">
+                <a:solidFill>
+                  <a:srgbClr val="3D5466"/>
+                </a:solidFill>
+                <a:latin typeface="Arial"/>
+              </a:rPr>
+              <a:t>▸  Generische Strategien nach Porter: Kostenführerschaft, Differenzierung, Fokus.</a:t>
+            </a:r>
+          </a:p>
+          <a:p>
+            <a:pPr marL="190500" indent="-190500">
+              <a:spcBef>
+                <a:spcPts val="400"/>
+              </a:spcBef>
+              <a:spcAft>
+                <a:spcPts val="200"/>
+              </a:spcAft>
+            </a:pPr>
+            <a:r>
+              <a:rPr sz="1300">
+                <a:solidFill>
+                  <a:srgbClr val="3D5466"/>
+                </a:solidFill>
+                <a:latin typeface="Arial"/>
+              </a:rPr>
+              <a:t>▸  Die Strategie muss zur Branchenstruktur passen, sonst trägt sie nicht.</a:t>
+            </a:r>
+          </a:p>
+        </p:txBody>
+      </p:sp>
+      <p:sp>
+        <p:nvSpPr>
+          <p:cNvPr id="9" name="Rectangle 8"/>
           <p:cNvSpPr/>
           <p:nvPr/>
         </p:nvSpPr>
@@ -5044,7 +5255,7 @@
       </p:sp>
       <p:sp>
         <p:nvSpPr>
-          <p:cNvPr id="9" name="TextBox 8"/>
+          <p:cNvPr id="10" name="TextBox 9"/>
           <p:cNvSpPr txBox="1"/>
           <p:nvPr/>
         </p:nvSpPr>
@@ -5073,41 +5284,6 @@
                 <a:latin typeface="Consolas"/>
               </a:rPr>
               <a:t>FKB Campus  ·  M22</a:t>
-            </a:r>
-          </a:p>
-        </p:txBody>
-      </p:sp>
-      <p:sp>
-        <p:nvSpPr>
-          <p:cNvPr id="10" name="TextBox 9"/>
-          <p:cNvSpPr txBox="1"/>
-          <p:nvPr/>
-        </p:nvSpPr>
-        <p:spPr>
-          <a:xfrm>
-            <a:off x="7176211" y="6583680"/>
-            <a:ext cx="4326940" cy="256032"/>
-          </a:xfrm>
-          <a:prstGeom prst="rect">
-            <a:avLst/>
-          </a:prstGeom>
-          <a:noFill/>
-        </p:spPr>
-        <p:txBody>
-          <a:bodyPr wrap="none">
-            <a:spAutoFit/>
-          </a:bodyPr>
-          <a:lstStyle/>
-          <a:p>
-            <a:pPr algn="r"/>
-            <a:r>
-              <a:rPr sz="700">
-                <a:solidFill>
-                  <a:srgbClr val="A0B4D2"/>
-                </a:solidFill>
-                <a:latin typeface="Consolas"/>
-              </a:rPr>
-              <a:t>Schaubild</a:t>
             </a:r>
           </a:p>
         </p:txBody>
@@ -5145,7 +5321,7 @@
             <a:avLst/>
           </a:prstGeom>
           <a:solidFill>
-            <a:srgbClr val="EDEDF3"/>
+            <a:srgbClr val="FFFFFF"/>
           </a:solidFill>
           <a:ln>
             <a:noFill/>
@@ -5246,51 +5422,43 @@
                 </a:solidFill>
                 <a:latin typeface="Consolas"/>
               </a:rPr>
-              <a:t>M22  ·  INHALT</a:t>
-            </a:r>
-          </a:p>
-        </p:txBody>
-      </p:sp>
-      <p:sp>
-        <p:nvSpPr>
-          <p:cNvPr id="5" name="Rectangle 4"/>
-          <p:cNvSpPr/>
-          <p:nvPr/>
-        </p:nvSpPr>
-        <p:spPr>
-          <a:xfrm>
-            <a:off x="0" y="1234440"/>
-            <a:ext cx="12188952" cy="12700"/>
-          </a:xfrm>
-          <a:prstGeom prst="rect">
-            <a:avLst/>
-          </a:prstGeom>
-          <a:solidFill>
-            <a:srgbClr val="D8DFE4"/>
-          </a:solidFill>
-          <a:ln>
-            <a:noFill/>
-          </a:ln>
-        </p:spPr>
-        <p:style>
-          <a:lnRef idx="1">
-            <a:schemeClr val="accent1"/>
-          </a:lnRef>
-          <a:fillRef idx="3">
-            <a:schemeClr val="accent1"/>
-          </a:fillRef>
-          <a:effectRef idx="2">
-            <a:schemeClr val="accent1"/>
-          </a:effectRef>
-          <a:fontRef idx="minor">
-            <a:schemeClr val="lt1"/>
-          </a:fontRef>
-        </p:style>
-        <p:txBody>
-          <a:bodyPr rtlCol="0" anchor="ctr"/>
-          <a:lstStyle/>
-          <a:p>
-            <a:pPr algn="ctr"/>
+              <a:t>M22  ·  SCHAUBILD</a:t>
+            </a:r>
+          </a:p>
+        </p:txBody>
+      </p:sp>
+      <p:sp>
+        <p:nvSpPr>
+          <p:cNvPr id="5" name="TextBox 4"/>
+          <p:cNvSpPr txBox="1"/>
+          <p:nvPr/>
+        </p:nvSpPr>
+        <p:spPr>
+          <a:xfrm>
+            <a:off x="685800" y="502920"/>
+            <a:ext cx="10817352" cy="594360"/>
+          </a:xfrm>
+          <a:prstGeom prst="rect">
+            <a:avLst/>
+          </a:prstGeom>
+          <a:noFill/>
+        </p:spPr>
+        <p:txBody>
+          <a:bodyPr wrap="square">
+            <a:spAutoFit/>
+          </a:bodyPr>
+          <a:lstStyle/>
+          <a:p>
+            <a:pPr algn="l"/>
+            <a:r>
+              <a:rPr sz="2000" b="1" i="0">
+                <a:solidFill>
+                  <a:srgbClr val="1F2C56"/>
+                </a:solidFill>
+                <a:latin typeface="Arial"/>
+              </a:rPr>
+              <a:t>Wettbewerbsstrategie-Matrix nach Porter</a:t>
+            </a:r>
           </a:p>
         </p:txBody>
       </p:sp>
@@ -5302,8 +5470,8 @@
         </p:nvSpPr>
         <p:spPr>
           <a:xfrm>
-            <a:off x="685800" y="502920"/>
-            <a:ext cx="36576" cy="658368"/>
+            <a:off x="685800" y="1143000"/>
+            <a:ext cx="10817352" cy="25400"/>
           </a:xfrm>
           <a:prstGeom prst="rect">
             <a:avLst/>
@@ -5337,124 +5505,33 @@
           </a:p>
         </p:txBody>
       </p:sp>
-      <p:sp>
-        <p:nvSpPr>
-          <p:cNvPr id="7" name="TextBox 6"/>
-          <p:cNvSpPr txBox="1"/>
-          <p:nvPr/>
-        </p:nvSpPr>
-        <p:spPr>
-          <a:xfrm>
-            <a:off x="813816" y="502920"/>
-            <a:ext cx="10634472" cy="685800"/>
-          </a:xfrm>
-          <a:prstGeom prst="rect">
-            <a:avLst/>
-          </a:prstGeom>
-          <a:noFill/>
-        </p:spPr>
-        <p:txBody>
-          <a:bodyPr wrap="square">
-            <a:spAutoFit/>
-          </a:bodyPr>
-          <a:lstStyle/>
-          <a:p>
-            <a:pPr algn="l"/>
-            <a:r>
-              <a:rPr sz="2400" b="1" i="0">
-                <a:solidFill>
-                  <a:srgbClr val="1F2C56"/>
-                </a:solidFill>
-                <a:latin typeface="Arial"/>
-              </a:rPr>
-              <a:t>Framework 2: Business Model Canvas als Robustheitscheck</a:t>
-            </a:r>
-          </a:p>
-        </p:txBody>
-      </p:sp>
-      <p:sp>
-        <p:nvSpPr>
-          <p:cNvPr id="8" name="TextBox 7"/>
-          <p:cNvSpPr txBox="1"/>
-          <p:nvPr/>
-        </p:nvSpPr>
-        <p:spPr>
-          <a:xfrm>
-            <a:off x="685800" y="1417320"/>
-            <a:ext cx="10817352" cy="4892040"/>
-          </a:xfrm>
-          <a:prstGeom prst="rect">
-            <a:avLst/>
-          </a:prstGeom>
-          <a:noFill/>
-        </p:spPr>
-        <p:txBody>
-          <a:bodyPr wrap="square" anchor="ctr">
-            <a:spAutoFit/>
-          </a:bodyPr>
-          <a:lstStyle/>
-          <a:p>
-            <a:pPr>
-              <a:spcBef>
-                <a:spcPts val="1000"/>
-              </a:spcBef>
-              <a:spcAft>
-                <a:spcPts val="200"/>
-              </a:spcAft>
-            </a:pPr>
-            <a:r>
-              <a:rPr sz="800" b="1">
-                <a:solidFill>
-                  <a:srgbClr val="78808C"/>
-                </a:solidFill>
-                <a:latin typeface="Consolas"/>
-              </a:rPr>
-              <a:t>GRUNDSTRUKTUR</a:t>
-            </a:r>
-          </a:p>
-          <a:p>
-            <a:pPr marL="190500" indent="-190500">
-              <a:spcBef>
-                <a:spcPts val="400"/>
-              </a:spcBef>
-              <a:spcAft>
-                <a:spcPts val="200"/>
-              </a:spcAft>
-            </a:pPr>
-            <a:r>
-              <a:rPr sz="1300">
-                <a:solidFill>
-                  <a:srgbClr val="3D5466"/>
-                </a:solidFill>
-                <a:latin typeface="Arial"/>
-              </a:rPr>
-              <a:t>▸  Gruppe A – Ertragsstabilität (rechte Canvas-Seite)</a:t>
-            </a:r>
-          </a:p>
-          <a:p>
-            <a:pPr marL="190500" indent="-190500">
-              <a:spcBef>
-                <a:spcPts val="400"/>
-              </a:spcBef>
-              <a:spcAft>
-                <a:spcPts val="200"/>
-              </a:spcAft>
-            </a:pPr>
-            <a:r>
-              <a:rPr sz="1300">
-                <a:solidFill>
-                  <a:srgbClr val="3D5466"/>
-                </a:solidFill>
-                <a:latin typeface="Arial"/>
-              </a:rPr>
-              <a:t>▸  Gruppe B – Kostenstruktur &amp; Abhängigkeiten (linke Canvas-Seite)</a:t>
-            </a:r>
-          </a:p>
-        </p:txBody>
-      </p:sp>
-      <p:sp>
-        <p:nvSpPr>
-          <p:cNvPr id="9" name="Rectangle 8"/>
+      <p:pic>
+        <p:nvPicPr>
+          <p:cNvPr id="7" name="Picture 6" descr="image.png"/>
+          <p:cNvPicPr>
+            <a:picLocks noChangeAspect="1"/>
+          </p:cNvPicPr>
+          <p:nvPr/>
+        </p:nvPicPr>
+        <p:blipFill>
+          <a:blip r:embed="rId2"/>
+          <a:stretch>
+            <a:fillRect/>
+          </a:stretch>
+        </p:blipFill>
+        <p:spPr>
+          <a:xfrm>
+            <a:off x="2303489" y="1325880"/>
+            <a:ext cx="7581973" cy="4937760"/>
+          </a:xfrm>
+          <a:prstGeom prst="rect">
+            <a:avLst/>
+          </a:prstGeom>
+        </p:spPr>
+      </p:pic>
+      <p:sp>
+        <p:nvSpPr>
+          <p:cNvPr id="8" name="Rectangle 7"/>
           <p:cNvSpPr/>
           <p:nvPr/>
         </p:nvSpPr>
@@ -5497,7 +5574,7 @@
       </p:sp>
       <p:sp>
         <p:nvSpPr>
-          <p:cNvPr id="10" name="TextBox 9"/>
+          <p:cNvPr id="9" name="TextBox 8"/>
           <p:cNvSpPr txBox="1"/>
           <p:nvPr/>
         </p:nvSpPr>
@@ -5526,6 +5603,41 @@
                 <a:latin typeface="Consolas"/>
               </a:rPr>
               <a:t>FKB Campus  ·  M22</a:t>
+            </a:r>
+          </a:p>
+        </p:txBody>
+      </p:sp>
+      <p:sp>
+        <p:nvSpPr>
+          <p:cNvPr id="10" name="TextBox 9"/>
+          <p:cNvSpPr txBox="1"/>
+          <p:nvPr/>
+        </p:nvSpPr>
+        <p:spPr>
+          <a:xfrm>
+            <a:off x="7176211" y="6583680"/>
+            <a:ext cx="4326940" cy="256032"/>
+          </a:xfrm>
+          <a:prstGeom prst="rect">
+            <a:avLst/>
+          </a:prstGeom>
+          <a:noFill/>
+        </p:spPr>
+        <p:txBody>
+          <a:bodyPr wrap="none">
+            <a:spAutoFit/>
+          </a:bodyPr>
+          <a:lstStyle/>
+          <a:p>
+            <a:pPr algn="r"/>
+            <a:r>
+              <a:rPr sz="700">
+                <a:solidFill>
+                  <a:srgbClr val="A0B4D2"/>
+                </a:solidFill>
+                <a:latin typeface="Consolas"/>
+              </a:rPr>
+              <a:t>Schaubild</a:t>
             </a:r>
           </a:p>
         </p:txBody>
@@ -5785,7 +5897,7 @@
                 </a:solidFill>
                 <a:latin typeface="Arial"/>
               </a:rPr>
-              <a:t>Framework 3: SWOT als Kreditrisikofilter</a:t>
+              <a:t>Framework 2: das Geschäftsmodell auf Robustheit prüfen</a:t>
             </a:r>
           </a:p>
         </p:txBody>
@@ -5807,27 +5919,27 @@
           <a:noFill/>
         </p:spPr>
         <p:txBody>
-          <a:bodyPr wrap="square">
+          <a:bodyPr wrap="square" anchor="ctr">
             <a:spAutoFit/>
           </a:bodyPr>
           <a:lstStyle/>
           <a:p>
-            <a:pPr>
+            <a:pPr marL="177800" indent="-177800">
               <a:spcBef>
-                <a:spcPts val="1000"/>
+                <a:spcPts val="600"/>
               </a:spcBef>
               <a:spcAft>
                 <a:spcPts val="200"/>
               </a:spcAft>
             </a:pPr>
             <a:r>
-              <a:rPr sz="800" b="1">
-                <a:solidFill>
-                  <a:srgbClr val="78808C"/>
-                </a:solidFill>
-                <a:latin typeface="Consolas"/>
+              <a:rPr sz="1200" i="1">
+                <a:solidFill>
+                  <a:srgbClr val="3D5466"/>
+                </a:solidFill>
+                <a:latin typeface="Arial"/>
               </a:rPr>
-              <a:t>VON DER STRATEGISCHEN SWOT ZUR RISIKOKLASSIFIZIERUNG</a:t>
+              <a:t>→  Das Business Model Canvas macht sichtbar, ob ein Geschäftsmodell auf einem Bein steht oder auf mehreren.</a:t>
             </a:r>
           </a:p>
           <a:p>
@@ -5846,7 +5958,7 @@
                 </a:solidFill>
                 <a:latin typeface="Arial"/>
               </a:rPr>
-              <a:t>▸  Kreditrelevante SWOT-Lesart:</a:t>
+              <a:t>▸  Neun Bausteine: von Kundensegmenten über Wertangebot bis Kostenstruktur.</a:t>
             </a:r>
           </a:p>
           <a:p>
@@ -5865,64 +5977,7 @@
                 </a:solidFill>
                 <a:latin typeface="Arial"/>
               </a:rPr>
-              <a:t>▸  Kritische Hinweise zur SWOT im Kreditkontext (nach Welge &amp; Al-Laham, 2012):</a:t>
-            </a:r>
-          </a:p>
-          <a:p>
-            <a:pPr marL="190500" indent="-190500">
-              <a:spcBef>
-                <a:spcPts val="400"/>
-              </a:spcBef>
-              <a:spcAft>
-                <a:spcPts val="200"/>
-              </a:spcAft>
-            </a:pPr>
-            <a:r>
-              <a:rPr sz="1300">
-                <a:solidFill>
-                  <a:srgbClr val="3D5466"/>
-                </a:solidFill>
-                <a:latin typeface="Arial"/>
-              </a:rPr>
-              <a:t>▸  Alle Faktoren erscheinen formal gleichwertig — Berater müssen aktiv gewichten</a:t>
-            </a:r>
-          </a:p>
-          <a:p>
-            <a:pPr marL="190500" indent="-190500">
-              <a:spcBef>
-                <a:spcPts val="400"/>
-              </a:spcBef>
-              <a:spcAft>
-                <a:spcPts val="200"/>
-              </a:spcAft>
-            </a:pPr>
-            <a:r>
-              <a:rPr sz="1300">
-                <a:solidFill>
-                  <a:srgbClr val="3D5466"/>
-                </a:solidFill>
-                <a:latin typeface="Arial"/>
-              </a:rPr>
-              <a:t>▸  Subjektive Unternehmersicht dominiert; externe Verifikation (z. B. Branchendaten) ist nötig</a:t>
-            </a:r>
-          </a:p>
-          <a:p>
-            <a:pPr marL="190500" indent="-190500">
-              <a:spcBef>
-                <a:spcPts val="400"/>
-              </a:spcBef>
-              <a:spcAft>
-                <a:spcPts val="200"/>
-              </a:spcAft>
-            </a:pPr>
-            <a:r>
-              <a:rPr sz="1300">
-                <a:solidFill>
-                  <a:srgbClr val="3D5466"/>
-                </a:solidFill>
-                <a:latin typeface="Arial"/>
-              </a:rPr>
-              <a:t>▸  Die SWOT liefert ein Lagebild, keine Prognose; strategische Dynamik muss separat eingeschätzt werden</a:t>
+              <a:t>▸  Robustheit zeigt sich in der Abhängigkeit von einzelnen Kunden, Lieferanten oder Personen.</a:t>
             </a:r>
           </a:p>
         </p:txBody>
@@ -6260,7 +6315,7 @@
                 </a:solidFill>
                 <a:latin typeface="Arial"/>
               </a:rPr>
-              <a:t>Framework 4: Strategische Ressourcenstärke (Resource-based View)</a:t>
+              <a:t>Framework 3: SWOT als Kreditrisikofilter</a:t>
             </a:r>
           </a:p>
         </p:txBody>
@@ -6286,6 +6341,25 @@
             <a:spAutoFit/>
           </a:bodyPr>
           <a:lstStyle/>
+          <a:p>
+            <a:pPr marL="177800" indent="-177800">
+              <a:spcBef>
+                <a:spcPts val="600"/>
+              </a:spcBef>
+              <a:spcAft>
+                <a:spcPts val="200"/>
+              </a:spcAft>
+            </a:pPr>
+            <a:r>
+              <a:rPr sz="1200" i="1">
+                <a:solidFill>
+                  <a:srgbClr val="3D5466"/>
+                </a:solidFill>
+                <a:latin typeface="Arial"/>
+              </a:rPr>
+              <a:t>→  SWOT wird zum Risikofilter, wenn man Chancen und Risiken konsequent auf die Kreditfrage bezieht.</a:t>
+            </a:r>
+          </a:p>
           <a:p>
             <a:pPr marL="190500" indent="-190500">
               <a:spcBef>
@@ -6302,7 +6376,7 @@
                 </a:solidFill>
                 <a:latin typeface="Arial"/>
               </a:rPr>
-              <a:t>▸  Beispiele kreditrelevanter VRIN-Ressourcen im Mittelstand:</a:t>
+              <a:t>▸  Stärken und Schwächen (intern), Chancen und Risiken (extern).</a:t>
             </a:r>
           </a:p>
           <a:p>
@@ -6321,64 +6395,7 @@
                 </a:solidFill>
                 <a:latin typeface="Arial"/>
               </a:rPr>
-              <a:t>▸  Spezialisiertes Know-how mit langjähriger Entwicklungszeit (schwer zu kopieren)</a:t>
-            </a:r>
-          </a:p>
-          <a:p>
-            <a:pPr marL="190500" indent="-190500">
-              <a:spcBef>
-                <a:spcPts val="400"/>
-              </a:spcBef>
-              <a:spcAft>
-                <a:spcPts val="200"/>
-              </a:spcAft>
-            </a:pPr>
-            <a:r>
-              <a:rPr sz="1300">
-                <a:solidFill>
-                  <a:srgbClr val="3D5466"/>
-                </a:solidFill>
-                <a:latin typeface="Arial"/>
-              </a:rPr>
-              <a:t>▸  Exklusivlieferantenverträge oder Zulassungen (selten, nicht substituierbar)</a:t>
-            </a:r>
-          </a:p>
-          <a:p>
-            <a:pPr marL="190500" indent="-190500">
-              <a:spcBef>
-                <a:spcPts val="400"/>
-              </a:spcBef>
-              <a:spcAft>
-                <a:spcPts val="200"/>
-              </a:spcAft>
-            </a:pPr>
-            <a:r>
-              <a:rPr sz="1300">
-                <a:solidFill>
-                  <a:srgbClr val="3D5466"/>
-                </a:solidFill>
-                <a:latin typeface="Arial"/>
-              </a:rPr>
-              <a:t>▸  Langfristige Kundenbeziehungen mit Wechselkosten auf Kundenseite (wertvoll, nicht imitierbar)</a:t>
-            </a:r>
-          </a:p>
-          <a:p>
-            <a:pPr marL="190500" indent="-190500">
-              <a:spcBef>
-                <a:spcPts val="400"/>
-              </a:spcBef>
-              <a:spcAft>
-                <a:spcPts val="200"/>
-              </a:spcAft>
-            </a:pPr>
-            <a:r>
-              <a:rPr sz="1300">
-                <a:solidFill>
-                  <a:srgbClr val="3D5466"/>
-                </a:solidFill>
-                <a:latin typeface="Arial"/>
-              </a:rPr>
-              <a:t>▸  Qualifizierte Fachkräfte mit spezifischer Expertise (Schlüsselpersonenrisiko = Kehrseite)</a:t>
+              <a:t>▸  Entscheidend ist die Verknüpfung: Welche Schwäche trifft auf welches externe Risiko?</a:t>
             </a:r>
           </a:p>
         </p:txBody>
@@ -6595,7 +6612,7 @@
                 </a:solidFill>
                 <a:latin typeface="Consolas"/>
               </a:rPr>
-              <a:t>M22  ·  ARBEITSBLATT</a:t>
+              <a:t>M22  ·  INHALT</a:t>
             </a:r>
           </a:p>
         </p:txBody>
@@ -6716,7 +6733,7 @@
                 </a:solidFill>
                 <a:latin typeface="Arial"/>
               </a:rPr>
-              <a:t>Praxisfall: Präzisionswerk Haller GmbH</a:t>
+              <a:t>Framework 4: die Ressourcenstärke bewerten</a:t>
             </a:r>
           </a:p>
         </p:txBody>
@@ -6729,8 +6746,8 @@
         </p:nvSpPr>
         <p:spPr>
           <a:xfrm>
-            <a:off x="685800" y="1554480"/>
-            <a:ext cx="10817352" cy="3840480"/>
+            <a:off x="685800" y="1417320"/>
+            <a:ext cx="10817352" cy="4892040"/>
           </a:xfrm>
           <a:prstGeom prst="rect">
             <a:avLst/>
@@ -6738,10 +6755,29 @@
           <a:noFill/>
         </p:spPr>
         <p:txBody>
-          <a:bodyPr wrap="square">
+          <a:bodyPr wrap="square" anchor="ctr">
             <a:spAutoFit/>
           </a:bodyPr>
           <a:lstStyle/>
+          <a:p>
+            <a:pPr marL="177800" indent="-177800">
+              <a:spcBef>
+                <a:spcPts val="600"/>
+              </a:spcBef>
+              <a:spcAft>
+                <a:spcPts val="200"/>
+              </a:spcAft>
+            </a:pPr>
+            <a:r>
+              <a:rPr sz="1200" i="1">
+                <a:solidFill>
+                  <a:srgbClr val="3D5466"/>
+                </a:solidFill>
+                <a:latin typeface="Arial"/>
+              </a:rPr>
+              <a:t>→  Nach dem Resource-Based View entscheiden schwer imitierbare Ressourcen über den dauerhaften Wettbewerbsvorteil.</a:t>
+            </a:r>
+          </a:p>
           <a:p>
             <a:pPr marL="190500" indent="-190500">
               <a:spcBef>
@@ -6752,13 +6788,13 @@
               </a:spcAft>
             </a:pPr>
             <a:r>
-              <a:rPr sz="1400">
+              <a:rPr sz="1300">
                 <a:solidFill>
                   <a:srgbClr val="3D5466"/>
                 </a:solidFill>
                 <a:latin typeface="Arial"/>
               </a:rPr>
-              <a:t>▸  Unternehmensportrait</a:t>
+              <a:t>▸  Wertvoll, selten, schwer imitierbar, organisatorisch nutzbar (VRIO).</a:t>
             </a:r>
           </a:p>
           <a:p>
@@ -6771,70 +6807,13 @@
               </a:spcAft>
             </a:pPr>
             <a:r>
-              <a:rPr sz="1400">
+              <a:rPr sz="1300">
                 <a:solidFill>
                   <a:srgbClr val="3D5466"/>
                 </a:solidFill>
                 <a:latin typeface="Arial"/>
               </a:rPr>
-              <a:t>▸  Kennzahlen Geschäftsjahr 2024:</a:t>
-            </a:r>
-          </a:p>
-          <a:p>
-            <a:pPr marL="190500" indent="-190500">
-              <a:spcBef>
-                <a:spcPts val="400"/>
-              </a:spcBef>
-              <a:spcAft>
-                <a:spcPts val="200"/>
-              </a:spcAft>
-            </a:pPr>
-            <a:r>
-              <a:rPr sz="1400">
-                <a:solidFill>
-                  <a:srgbClr val="3D5466"/>
-                </a:solidFill>
-                <a:latin typeface="Arial"/>
-              </a:rPr>
-              <a:t>▸  *Branchenbenchmark: VDMA Maschinenbau-Statistik 2024; zeb-Mittelstandsstudie 2023</a:t>
-            </a:r>
-          </a:p>
-          <a:p>
-            <a:pPr marL="190500" indent="-190500">
-              <a:spcBef>
-                <a:spcPts val="400"/>
-              </a:spcBef>
-              <a:spcAft>
-                <a:spcPts val="200"/>
-              </a:spcAft>
-            </a:pPr>
-            <a:r>
-              <a:rPr sz="1400">
-                <a:solidFill>
-                  <a:srgbClr val="3D5466"/>
-                </a:solidFill>
-                <a:latin typeface="Arial"/>
-              </a:rPr>
-              <a:t>▸  Strategische Ausgangssituation:</a:t>
-            </a:r>
-          </a:p>
-          <a:p>
-            <a:pPr marL="190500" indent="-190500">
-              <a:spcBef>
-                <a:spcPts val="400"/>
-              </a:spcBef>
-              <a:spcAft>
-                <a:spcPts val="200"/>
-              </a:spcAft>
-            </a:pPr>
-            <a:r>
-              <a:rPr sz="1400">
-                <a:solidFill>
-                  <a:srgbClr val="3D5466"/>
-                </a:solidFill>
-                <a:latin typeface="Arial"/>
-              </a:rPr>
-              <a:t>▸  Drei Hauptkunden, einer davon (Maschinenbaukonzern aus Baden-Württemberg) stellt 60 % des Jahresumsatzes</a:t>
+              <a:t>▸  Bei Familienbetrieben ist Wissen oft an eine Person gebunden – ein Nachfolgerisiko.</a:t>
             </a:r>
           </a:p>
         </p:txBody>
@@ -6842,84 +6821,6 @@
       <p:sp>
         <p:nvSpPr>
           <p:cNvPr id="9" name="Rectangle 8"/>
-          <p:cNvSpPr/>
-          <p:nvPr/>
-        </p:nvSpPr>
-        <p:spPr>
-          <a:xfrm>
-            <a:off x="685800" y="5486400"/>
-            <a:ext cx="10817352" cy="640080"/>
-          </a:xfrm>
-          <a:prstGeom prst="rect">
-            <a:avLst/>
-          </a:prstGeom>
-          <a:solidFill>
-            <a:srgbClr val="1F2C56"/>
-          </a:solidFill>
-          <a:ln>
-            <a:noFill/>
-          </a:ln>
-        </p:spPr>
-        <p:style>
-          <a:lnRef idx="1">
-            <a:schemeClr val="accent1"/>
-          </a:lnRef>
-          <a:fillRef idx="3">
-            <a:schemeClr val="accent1"/>
-          </a:fillRef>
-          <a:effectRef idx="2">
-            <a:schemeClr val="accent1"/>
-          </a:effectRef>
-          <a:fontRef idx="minor">
-            <a:schemeClr val="lt1"/>
-          </a:fontRef>
-        </p:style>
-        <p:txBody>
-          <a:bodyPr rtlCol="0" anchor="ctr"/>
-          <a:lstStyle/>
-          <a:p>
-            <a:pPr algn="ctr"/>
-          </a:p>
-        </p:txBody>
-      </p:sp>
-      <p:sp>
-        <p:nvSpPr>
-          <p:cNvPr id="10" name="TextBox 9"/>
-          <p:cNvSpPr txBox="1"/>
-          <p:nvPr/>
-        </p:nvSpPr>
-        <p:spPr>
-          <a:xfrm>
-            <a:off x="868680" y="5596128"/>
-            <a:ext cx="10451592" cy="457200"/>
-          </a:xfrm>
-          <a:prstGeom prst="rect">
-            <a:avLst/>
-          </a:prstGeom>
-          <a:noFill/>
-        </p:spPr>
-        <p:txBody>
-          <a:bodyPr wrap="square">
-            <a:spAutoFit/>
-          </a:bodyPr>
-          <a:lstStyle/>
-          <a:p>
-            <a:pPr algn="l"/>
-            <a:r>
-              <a:rPr sz="1300" b="1" i="0">
-                <a:solidFill>
-                  <a:srgbClr val="FFFFFF"/>
-                </a:solidFill>
-                <a:latin typeface="Arial"/>
-              </a:rPr>
-              <a:t>→  Bearbeitung im Teilnehmer-Workbook (Arbeitsblatt mit Ausfüllfeldern)</a:t>
-            </a:r>
-          </a:p>
-        </p:txBody>
-      </p:sp>
-      <p:sp>
-        <p:nvSpPr>
-          <p:cNvPr id="11" name="Rectangle 10"/>
           <p:cNvSpPr/>
           <p:nvPr/>
         </p:nvSpPr>
@@ -6962,7 +6863,7 @@
       </p:sp>
       <p:sp>
         <p:nvSpPr>
-          <p:cNvPr id="12" name="TextBox 11"/>
+          <p:cNvPr id="10" name="TextBox 9"/>
           <p:cNvSpPr txBox="1"/>
           <p:nvPr/>
         </p:nvSpPr>
@@ -7028,7 +6929,7 @@
             <a:avLst/>
           </a:prstGeom>
           <a:solidFill>
-            <a:srgbClr val="EDEDF3"/>
+            <a:srgbClr val="1F2C56"/>
           </a:solidFill>
           <a:ln>
             <a:noFill/>
@@ -7058,57 +6959,14 @@
       </p:sp>
       <p:sp>
         <p:nvSpPr>
-          <p:cNvPr id="3" name="Rectangle 2"/>
-          <p:cNvSpPr/>
-          <p:nvPr/>
-        </p:nvSpPr>
-        <p:spPr>
-          <a:xfrm>
-            <a:off x="0" y="0"/>
-            <a:ext cx="12188952" cy="50292"/>
-          </a:xfrm>
-          <a:prstGeom prst="rect">
-            <a:avLst/>
-          </a:prstGeom>
-          <a:solidFill>
-            <a:srgbClr val="1F2C56"/>
-          </a:solidFill>
-          <a:ln>
-            <a:noFill/>
-          </a:ln>
-        </p:spPr>
-        <p:style>
-          <a:lnRef idx="1">
-            <a:schemeClr val="accent1"/>
-          </a:lnRef>
-          <a:fillRef idx="3">
-            <a:schemeClr val="accent1"/>
-          </a:fillRef>
-          <a:effectRef idx="2">
-            <a:schemeClr val="accent1"/>
-          </a:effectRef>
-          <a:fontRef idx="minor">
-            <a:schemeClr val="lt1"/>
-          </a:fontRef>
-        </p:style>
-        <p:txBody>
-          <a:bodyPr rtlCol="0" anchor="ctr"/>
-          <a:lstStyle/>
-          <a:p>
-            <a:pPr algn="ctr"/>
-          </a:p>
-        </p:txBody>
-      </p:sp>
-      <p:sp>
-        <p:nvSpPr>
-          <p:cNvPr id="4" name="TextBox 3"/>
+          <p:cNvPr id="3" name="TextBox 2"/>
           <p:cNvSpPr txBox="1"/>
           <p:nvPr/>
         </p:nvSpPr>
         <p:spPr>
           <a:xfrm>
-            <a:off x="685800" y="109728"/>
-            <a:ext cx="10817352" cy="228600"/>
+            <a:off x="685800" y="2377440"/>
+            <a:ext cx="10817352" cy="365760"/>
           </a:xfrm>
           <a:prstGeom prst="rect">
             <a:avLst/>
@@ -7123,70 +6981,27 @@
           <a:p>
             <a:pPr algn="l"/>
             <a:r>
-              <a:rPr sz="750">
-                <a:solidFill>
-                  <a:srgbClr val="78808C"/>
+              <a:rPr sz="1200">
+                <a:solidFill>
+                  <a:srgbClr val="D9C089"/>
                 </a:solidFill>
                 <a:latin typeface="Consolas"/>
               </a:rPr>
-              <a:t>M22  ·  INHALT</a:t>
-            </a:r>
-          </a:p>
-        </p:txBody>
-      </p:sp>
-      <p:sp>
-        <p:nvSpPr>
-          <p:cNvPr id="5" name="Rectangle 4"/>
+              <a:t>100–115 MIN.</a:t>
+            </a:r>
+          </a:p>
+        </p:txBody>
+      </p:sp>
+      <p:sp>
+        <p:nvSpPr>
+          <p:cNvPr id="4" name="Rectangle 3"/>
           <p:cNvSpPr/>
           <p:nvPr/>
         </p:nvSpPr>
         <p:spPr>
           <a:xfrm>
-            <a:off x="0" y="1234440"/>
-            <a:ext cx="12188952" cy="12700"/>
-          </a:xfrm>
-          <a:prstGeom prst="rect">
-            <a:avLst/>
-          </a:prstGeom>
-          <a:solidFill>
-            <a:srgbClr val="D8DFE4"/>
-          </a:solidFill>
-          <a:ln>
-            <a:noFill/>
-          </a:ln>
-        </p:spPr>
-        <p:style>
-          <a:lnRef idx="1">
-            <a:schemeClr val="accent1"/>
-          </a:lnRef>
-          <a:fillRef idx="3">
-            <a:schemeClr val="accent1"/>
-          </a:fillRef>
-          <a:effectRef idx="2">
-            <a:schemeClr val="accent1"/>
-          </a:effectRef>
-          <a:fontRef idx="minor">
-            <a:schemeClr val="lt1"/>
-          </a:fontRef>
-        </p:style>
-        <p:txBody>
-          <a:bodyPr rtlCol="0" anchor="ctr"/>
-          <a:lstStyle/>
-          <a:p>
-            <a:pPr algn="ctr"/>
-          </a:p>
-        </p:txBody>
-      </p:sp>
-      <p:sp>
-        <p:nvSpPr>
-          <p:cNvPr id="6" name="Rectangle 5"/>
-          <p:cNvSpPr/>
-          <p:nvPr/>
-        </p:nvSpPr>
-        <p:spPr>
-          <a:xfrm>
-            <a:off x="685800" y="502920"/>
-            <a:ext cx="36576" cy="658368"/>
+            <a:off x="685800" y="2788920"/>
+            <a:ext cx="548640" cy="38100"/>
           </a:xfrm>
           <a:prstGeom prst="rect">
             <a:avLst/>
@@ -7222,14 +7037,14 @@
       </p:sp>
       <p:sp>
         <p:nvSpPr>
-          <p:cNvPr id="7" name="TextBox 6"/>
+          <p:cNvPr id="5" name="TextBox 4"/>
           <p:cNvSpPr txBox="1"/>
           <p:nvPr/>
         </p:nvSpPr>
         <p:spPr>
           <a:xfrm>
-            <a:off x="813816" y="502920"/>
-            <a:ext cx="10634472" cy="685800"/>
+            <a:off x="685800" y="3017520"/>
+            <a:ext cx="10817352" cy="1463040"/>
           </a:xfrm>
           <a:prstGeom prst="rect">
             <a:avLst/>
@@ -7244,27 +7059,27 @@
           <a:p>
             <a:pPr algn="l"/>
             <a:r>
-              <a:rPr sz="2400" b="1" i="0">
-                <a:solidFill>
-                  <a:srgbClr val="1F2C56"/>
+              <a:rPr sz="4000" b="1" i="0">
+                <a:solidFill>
+                  <a:srgbClr val="FFFFFF"/>
                 </a:solidFill>
                 <a:latin typeface="Arial"/>
               </a:rPr>
-              <a:t>Kennzahlen- und Formelkarte: Qualitative Kreditwürdigkeitsanalyse</a:t>
-            </a:r>
-          </a:p>
-        </p:txBody>
-      </p:sp>
-      <p:sp>
-        <p:nvSpPr>
-          <p:cNvPr id="8" name="TextBox 7"/>
+              <a:t>Praxisfall Präzisionswerk Haller</a:t>
+            </a:r>
+          </a:p>
+        </p:txBody>
+      </p:sp>
+      <p:sp>
+        <p:nvSpPr>
+          <p:cNvPr id="6" name="TextBox 5"/>
           <p:cNvSpPr txBox="1"/>
           <p:nvPr/>
         </p:nvSpPr>
         <p:spPr>
           <a:xfrm>
-            <a:off x="685800" y="1417320"/>
-            <a:ext cx="10817352" cy="4892040"/>
+            <a:off x="685800" y="4480560"/>
+            <a:ext cx="8653881" cy="1280160"/>
           </a:xfrm>
           <a:prstGeom prst="rect">
             <a:avLst/>
@@ -7272,66 +7087,34 @@
           <a:noFill/>
         </p:spPr>
         <p:txBody>
-          <a:bodyPr wrap="square" anchor="ctr">
+          <a:bodyPr wrap="square">
             <a:spAutoFit/>
           </a:bodyPr>
           <a:lstStyle/>
-          <a:p/>
-        </p:txBody>
-      </p:sp>
-      <p:sp>
-        <p:nvSpPr>
-          <p:cNvPr id="9" name="Rectangle 8"/>
-          <p:cNvSpPr/>
-          <p:nvPr/>
-        </p:nvSpPr>
-        <p:spPr>
-          <a:xfrm>
-            <a:off x="0" y="6510528"/>
-            <a:ext cx="12188952" cy="347472"/>
-          </a:xfrm>
-          <a:prstGeom prst="rect">
-            <a:avLst/>
-          </a:prstGeom>
-          <a:solidFill>
-            <a:srgbClr val="0A1937"/>
-          </a:solidFill>
-          <a:ln>
-            <a:noFill/>
-          </a:ln>
-        </p:spPr>
-        <p:style>
-          <a:lnRef idx="1">
-            <a:schemeClr val="accent1"/>
-          </a:lnRef>
-          <a:fillRef idx="3">
-            <a:schemeClr val="accent1"/>
-          </a:fillRef>
-          <a:effectRef idx="2">
-            <a:schemeClr val="accent1"/>
-          </a:effectRef>
-          <a:fontRef idx="minor">
-            <a:schemeClr val="lt1"/>
-          </a:fontRef>
-        </p:style>
-        <p:txBody>
-          <a:bodyPr rtlCol="0" anchor="ctr"/>
-          <a:lstStyle/>
-          <a:p>
-            <a:pPr algn="ctr"/>
-          </a:p>
-        </p:txBody>
-      </p:sp>
-      <p:sp>
-        <p:nvSpPr>
-          <p:cNvPr id="10" name="TextBox 9"/>
+          <a:p>
+            <a:pPr algn="l"/>
+            <a:r>
+              <a:rPr sz="1600" b="0" i="0">
+                <a:solidFill>
+                  <a:srgbClr val="C8D2E6"/>
+                </a:solidFill>
+                <a:latin typeface="Arial"/>
+              </a:rPr>
+              <a:t>Die vier Frameworks auf einen echten Kreditfall anwenden.</a:t>
+            </a:r>
+          </a:p>
+        </p:txBody>
+      </p:sp>
+      <p:sp>
+        <p:nvSpPr>
+          <p:cNvPr id="7" name="TextBox 6"/>
           <p:cNvSpPr txBox="1"/>
           <p:nvPr/>
         </p:nvSpPr>
         <p:spPr>
           <a:xfrm>
-            <a:off x="685800" y="6583680"/>
-            <a:ext cx="6490411" cy="256032"/>
+            <a:off x="685800" y="6355080"/>
+            <a:ext cx="10817352" cy="274320"/>
           </a:xfrm>
           <a:prstGeom prst="rect">
             <a:avLst/>
@@ -7348,7 +7131,7 @@
             <a:r>
               <a:rPr sz="700">
                 <a:solidFill>
-                  <a:srgbClr val="A0B4D2"/>
+                  <a:srgbClr val="8CA0C3"/>
                 </a:solidFill>
                 <a:latin typeface="Consolas"/>
               </a:rPr>
@@ -7526,7 +7309,7 @@
                 </a:solidFill>
                 <a:latin typeface="Arial"/>
               </a:rPr>
-              <a:t>Kennzahlen- und Formelkarte: Qualitative Kreditwürdigkeitsanalyse</a:t>
+              <a:t>Präzisionswerk Haller: Eckdaten und Risiken</a:t>
             </a:r>
           </a:p>
         </p:txBody>
@@ -7584,7 +7367,7 @@
         </p:nvGraphicFramePr>
         <p:xfrm>
           <a:off x="685800" y="1417320"/>
-          <a:ext cx="10817352" cy="3072384"/>
+          <a:ext cx="10817352" cy="1920240"/>
         </p:xfrm>
         <a:graphic>
           <a:graphicData uri="http://schemas.openxmlformats.org/drawingml/2006/table">
@@ -7610,7 +7393,7 @@
                           </a:solidFill>
                           <a:latin typeface="Arial"/>
                         </a:rPr>
-                        <a:t>Red Flag</a:t>
+                        <a:t>Merkmal</a:t>
                       </a:r>
                     </a:p>
                   </a:txBody>
@@ -7632,7 +7415,7 @@
                           </a:solidFill>
                           <a:latin typeface="Arial"/>
                         </a:rPr>
-                        <a:t>Schwellenwert / Hinweis</a:t>
+                        <a:t>Wert</a:t>
                       </a:r>
                     </a:p>
                   </a:txBody>
@@ -7654,7 +7437,7 @@
                           </a:solidFill>
                           <a:latin typeface="Arial"/>
                         </a:rPr>
-                        <a:t>Beurteilung Haller GmbH</a:t>
+                        <a:t>Bewertung</a:t>
                       </a:r>
                     </a:p>
                   </a:txBody>
@@ -7678,7 +7461,7 @@
                           </a:solidFill>
                           <a:latin typeface="Arial"/>
                         </a:rPr>
-                        <a:t>Kundenklumpenrisiko</a:t>
+                        <a:t>Umsatz 2024</a:t>
                       </a:r>
                     </a:p>
                   </a:txBody>
@@ -7696,7 +7479,7 @@
                           </a:solidFill>
                           <a:latin typeface="Arial"/>
                         </a:rPr>
-                        <a:t>Ein Kunde &gt; 30 % Umsatz</a:t>
+                        <a:t>7,2 Mio. EUR</a:t>
                       </a:r>
                     </a:p>
                   </a:txBody>
@@ -7714,1013 +7497,7 @@
                           </a:solidFill>
                           <a:latin typeface="Arial"/>
                         </a:rPr>
-                        <a:t>! Ja — Kunde A: 60 %</a:t>
-                      </a:r>
-                    </a:p>
-                  </a:txBody>
-                  <a:tcPr/>
-                </a:tc>
-              </a:tr>
-              <a:tr h="384048">
-                <a:tc>
-                  <a:txBody>
-                    <a:bodyPr/>
-                    <a:lstStyle/>
-                    <a:p>
-                      <a:r>
-                        <a:rPr sz="1050">
-                          <a:solidFill>
-                            <a:srgbClr val="3D5466"/>
-                          </a:solidFill>
-                          <a:latin typeface="Arial"/>
-                        </a:rPr>
-                        <a:t>Lieferantenklumpenrisiko</a:t>
-                      </a:r>
-                    </a:p>
-                  </a:txBody>
-                  <a:tcPr/>
-                </a:tc>
-                <a:tc>
-                  <a:txBody>
-                    <a:bodyPr/>
-                    <a:lstStyle/>
-                    <a:p>
-                      <a:r>
-                        <a:rPr sz="1050">
-                          <a:solidFill>
-                            <a:srgbClr val="3D5466"/>
-                          </a:solidFill>
-                          <a:latin typeface="Arial"/>
-                        </a:rPr>
-                        <a:t>Ein Lieferant &gt; 50 % Beschaffung</a:t>
-                      </a:r>
-                    </a:p>
-                  </a:txBody>
-                  <a:tcPr/>
-                </a:tc>
-                <a:tc>
-                  <a:txBody>
-                    <a:bodyPr/>
-                    <a:lstStyle/>
-                    <a:p>
-                      <a:r>
-                        <a:rPr sz="1050">
-                          <a:solidFill>
-                            <a:srgbClr val="3D5466"/>
-                          </a:solidFill>
-                          <a:latin typeface="Arial"/>
-                        </a:rPr>
-                        <a:t>Prüfen</a:t>
-                      </a:r>
-                    </a:p>
-                  </a:txBody>
-                  <a:tcPr/>
-                </a:tc>
-              </a:tr>
-              <a:tr h="384048">
-                <a:tc>
-                  <a:txBody>
-                    <a:bodyPr/>
-                    <a:lstStyle/>
-                    <a:p>
-                      <a:r>
-                        <a:rPr sz="1050">
-                          <a:solidFill>
-                            <a:srgbClr val="3D5466"/>
-                          </a:solidFill>
-                          <a:latin typeface="Arial"/>
-                        </a:rPr>
-                        <a:t>Nachfolgelücke GF</a:t>
-                      </a:r>
-                    </a:p>
-                  </a:txBody>
-                  <a:tcPr/>
-                </a:tc>
-                <a:tc>
-                  <a:txBody>
-                    <a:bodyPr/>
-                    <a:lstStyle/>
-                    <a:p>
-                      <a:r>
-                        <a:rPr sz="1050">
-                          <a:solidFill>
-                            <a:srgbClr val="3D5466"/>
-                          </a:solidFill>
-                          <a:latin typeface="Arial"/>
-                        </a:rPr>
-                        <a:t>GF &gt; 60 Jahre, kein Nachfolger</a:t>
-                      </a:r>
-                    </a:p>
-                  </a:txBody>
-                  <a:tcPr/>
-                </a:tc>
-                <a:tc>
-                  <a:txBody>
-                    <a:bodyPr/>
-                    <a:lstStyle/>
-                    <a:p>
-                      <a:r>
-                        <a:rPr sz="1050">
-                          <a:solidFill>
-                            <a:srgbClr val="3D5466"/>
-                          </a:solidFill>
-                          <a:latin typeface="Arial"/>
-                        </a:rPr>
-                        <a:t>! Ja</a:t>
-                      </a:r>
-                    </a:p>
-                  </a:txBody>
-                  <a:tcPr/>
-                </a:tc>
-              </a:tr>
-              <a:tr h="384048">
-                <a:tc>
-                  <a:txBody>
-                    <a:bodyPr/>
-                    <a:lstStyle/>
-                    <a:p>
-                      <a:r>
-                        <a:rPr sz="1050">
-                          <a:solidFill>
-                            <a:srgbClr val="3D5466"/>
-                          </a:solidFill>
-                          <a:latin typeface="Arial"/>
-                        </a:rPr>
-                        <a:t>Maschinenalter / Investitionsstau</a:t>
-                      </a:r>
-                    </a:p>
-                  </a:txBody>
-                  <a:tcPr/>
-                </a:tc>
-                <a:tc>
-                  <a:txBody>
-                    <a:bodyPr/>
-                    <a:lstStyle/>
-                    <a:p>
-                      <a:r>
-                        <a:rPr sz="1050">
-                          <a:solidFill>
-                            <a:srgbClr val="3D5466"/>
-                          </a:solidFill>
-                          <a:latin typeface="Arial"/>
-                        </a:rPr>
-                        <a:t>Ø &gt; 8 Jahre ohne Erneuerungsinvestition</a:t>
-                      </a:r>
-                    </a:p>
-                  </a:txBody>
-                  <a:tcPr/>
-                </a:tc>
-                <a:tc>
-                  <a:txBody>
-                    <a:bodyPr/>
-                    <a:lstStyle/>
-                    <a:p>
-                      <a:r>
-                        <a:rPr sz="1050">
-                          <a:solidFill>
-                            <a:srgbClr val="3D5466"/>
-                          </a:solidFill>
-                          <a:latin typeface="Arial"/>
-                        </a:rPr>
-                        <a:t>Ja (Ø 9 Jahre)</a:t>
-                      </a:r>
-                    </a:p>
-                  </a:txBody>
-                  <a:tcPr/>
-                </a:tc>
-              </a:tr>
-              <a:tr h="384048">
-                <a:tc>
-                  <a:txBody>
-                    <a:bodyPr/>
-                    <a:lstStyle/>
-                    <a:p>
-                      <a:r>
-                        <a:rPr sz="1050">
-                          <a:solidFill>
-                            <a:srgbClr val="3D5466"/>
-                          </a:solidFill>
-                          <a:latin typeface="Arial"/>
-                        </a:rPr>
-                        <a:t>Marktkonzentration</a:t>
-                      </a:r>
-                    </a:p>
-                  </a:txBody>
-                  <a:tcPr/>
-                </a:tc>
-                <a:tc>
-                  <a:txBody>
-                    <a:bodyPr/>
-                    <a:lstStyle/>
-                    <a:p>
-                      <a:r>
-                        <a:rPr sz="1050">
-                          <a:solidFill>
-                            <a:srgbClr val="3D5466"/>
-                          </a:solidFill>
-                          <a:latin typeface="Arial"/>
-                        </a:rPr>
-                        <a:t>Branche mit &lt; 5 relevanten Abnehmern</a:t>
-                      </a:r>
-                    </a:p>
-                  </a:txBody>
-                  <a:tcPr/>
-                </a:tc>
-                <a:tc>
-                  <a:txBody>
-                    <a:bodyPr/>
-                    <a:lstStyle/>
-                    <a:p>
-                      <a:r>
-                        <a:rPr sz="1050">
-                          <a:solidFill>
-                            <a:srgbClr val="3D5466"/>
-                          </a:solidFill>
-                          <a:latin typeface="Arial"/>
-                        </a:rPr>
-                        <a:t>Prüfen</a:t>
-                      </a:r>
-                    </a:p>
-                  </a:txBody>
-                  <a:tcPr/>
-                </a:tc>
-              </a:tr>
-              <a:tr h="384048">
-                <a:tc>
-                  <a:txBody>
-                    <a:bodyPr/>
-                    <a:lstStyle/>
-                    <a:p>
-                      <a:r>
-                        <a:rPr sz="1050">
-                          <a:solidFill>
-                            <a:srgbClr val="3D5466"/>
-                          </a:solidFill>
-                          <a:latin typeface="Arial"/>
-                        </a:rPr>
-                        <a:t>Exportabhängigkeit</a:t>
-                      </a:r>
-                    </a:p>
-                  </a:txBody>
-                  <a:tcPr/>
-                </a:tc>
-                <a:tc>
-                  <a:txBody>
-                    <a:bodyPr/>
-                    <a:lstStyle/>
-                    <a:p>
-                      <a:r>
-                        <a:rPr sz="1050">
-                          <a:solidFill>
-                            <a:srgbClr val="3D5466"/>
-                          </a:solidFill>
-                          <a:latin typeface="Arial"/>
-                        </a:rPr>
-                        <a:t>0 % Export in preissensitiver Branche</a:t>
-                      </a:r>
-                    </a:p>
-                  </a:txBody>
-                  <a:tcPr/>
-                </a:tc>
-                <a:tc>
-                  <a:txBody>
-                    <a:bodyPr/>
-                    <a:lstStyle/>
-                    <a:p>
-                      <a:r>
-                        <a:rPr sz="1050">
-                          <a:solidFill>
-                            <a:srgbClr val="3D5466"/>
-                          </a:solidFill>
-                          <a:latin typeface="Arial"/>
-                        </a:rPr>
-                        <a:t>Nein — umgekehrt: kein Export als Risiko</a:t>
-                      </a:r>
-                    </a:p>
-                  </a:txBody>
-                  <a:tcPr/>
-                </a:tc>
-              </a:tr>
-              <a:tr h="384048">
-                <a:tc>
-                  <a:txBody>
-                    <a:bodyPr/>
-                    <a:lstStyle/>
-                    <a:p>
-                      <a:r>
-                        <a:rPr sz="1050">
-                          <a:solidFill>
-                            <a:srgbClr val="3D5466"/>
-                          </a:solidFill>
-                          <a:latin typeface="Arial"/>
-                        </a:rPr>
-                        <a:t>Schlüsselpersonenrisiken</a:t>
-                      </a:r>
-                    </a:p>
-                  </a:txBody>
-                  <a:tcPr/>
-                </a:tc>
-                <a:tc>
-                  <a:txBody>
-                    <a:bodyPr/>
-                    <a:lstStyle/>
-                    <a:p>
-                      <a:r>
-                        <a:rPr sz="1050">
-                          <a:solidFill>
-                            <a:srgbClr val="3D5466"/>
-                          </a:solidFill>
-                          <a:latin typeface="Arial"/>
-                        </a:rPr>
-                        <a:t>Unverzichtbare Einzelperson ohne Vertretung</a:t>
-                      </a:r>
-                    </a:p>
-                  </a:txBody>
-                  <a:tcPr/>
-                </a:tc>
-                <a:tc>
-                  <a:txBody>
-                    <a:bodyPr/>
-                    <a:lstStyle/>
-                    <a:p>
-                      <a:r>
-                        <a:rPr sz="1050">
-                          <a:solidFill>
-                            <a:srgbClr val="3D5466"/>
-                          </a:solidFill>
-                          <a:latin typeface="Arial"/>
-                        </a:rPr>
-                        <a:t>! Ja (GF Haller)</a:t>
-                      </a:r>
-                    </a:p>
-                  </a:txBody>
-                  <a:tcPr/>
-                </a:tc>
-              </a:tr>
-            </a:tbl>
-          </a:graphicData>
-        </a:graphic>
-      </p:graphicFrame>
-      <p:sp>
-        <p:nvSpPr>
-          <p:cNvPr id="8" name="Rectangle 7"/>
-          <p:cNvSpPr/>
-          <p:nvPr/>
-        </p:nvSpPr>
-        <p:spPr>
-          <a:xfrm>
-            <a:off x="0" y="6510528"/>
-            <a:ext cx="12188952" cy="347472"/>
-          </a:xfrm>
-          <a:prstGeom prst="rect">
-            <a:avLst/>
-          </a:prstGeom>
-          <a:solidFill>
-            <a:srgbClr val="0A1937"/>
-          </a:solidFill>
-          <a:ln>
-            <a:noFill/>
-          </a:ln>
-        </p:spPr>
-        <p:style>
-          <a:lnRef idx="1">
-            <a:schemeClr val="accent1"/>
-          </a:lnRef>
-          <a:fillRef idx="3">
-            <a:schemeClr val="accent1"/>
-          </a:fillRef>
-          <a:effectRef idx="2">
-            <a:schemeClr val="accent1"/>
-          </a:effectRef>
-          <a:fontRef idx="minor">
-            <a:schemeClr val="lt1"/>
-          </a:fontRef>
-        </p:style>
-        <p:txBody>
-          <a:bodyPr rtlCol="0" anchor="ctr"/>
-          <a:lstStyle/>
-          <a:p>
-            <a:pPr algn="ctr"/>
-          </a:p>
-        </p:txBody>
-      </p:sp>
-      <p:sp>
-        <p:nvSpPr>
-          <p:cNvPr id="9" name="TextBox 8"/>
-          <p:cNvSpPr txBox="1"/>
-          <p:nvPr/>
-        </p:nvSpPr>
-        <p:spPr>
-          <a:xfrm>
-            <a:off x="685800" y="6583680"/>
-            <a:ext cx="6490411" cy="256032"/>
-          </a:xfrm>
-          <a:prstGeom prst="rect">
-            <a:avLst/>
-          </a:prstGeom>
-          <a:noFill/>
-        </p:spPr>
-        <p:txBody>
-          <a:bodyPr wrap="none">
-            <a:spAutoFit/>
-          </a:bodyPr>
-          <a:lstStyle/>
-          <a:p>
-            <a:pPr algn="l"/>
-            <a:r>
-              <a:rPr sz="700">
-                <a:solidFill>
-                  <a:srgbClr val="A0B4D2"/>
-                </a:solidFill>
-                <a:latin typeface="Consolas"/>
-              </a:rPr>
-              <a:t>FKB Campus  ·  M22</a:t>
-            </a:r>
-          </a:p>
-        </p:txBody>
-      </p:sp>
-      <p:sp>
-        <p:nvSpPr>
-          <p:cNvPr id="10" name="TextBox 9"/>
-          <p:cNvSpPr txBox="1"/>
-          <p:nvPr/>
-        </p:nvSpPr>
-        <p:spPr>
-          <a:xfrm>
-            <a:off x="7176211" y="6583680"/>
-            <a:ext cx="4326940" cy="256032"/>
-          </a:xfrm>
-          <a:prstGeom prst="rect">
-            <a:avLst/>
-          </a:prstGeom>
-          <a:noFill/>
-        </p:spPr>
-        <p:txBody>
-          <a:bodyPr wrap="none">
-            <a:spAutoFit/>
-          </a:bodyPr>
-          <a:lstStyle/>
-          <a:p>
-            <a:pPr algn="r"/>
-            <a:r>
-              <a:rPr sz="700">
-                <a:solidFill>
-                  <a:srgbClr val="A0B4D2"/>
-                </a:solidFill>
-                <a:latin typeface="Consolas"/>
-              </a:rPr>
-              <a:t>Übersicht</a:t>
-            </a:r>
-          </a:p>
-        </p:txBody>
-      </p:sp>
-    </p:spTree>
-  </p:cSld>
-  <p:clrMapOvr>
-    <a:masterClrMapping/>
-  </p:clrMapOvr>
-</p:sld>
-</file>
-
-<file path=ppt/slides/slide17.xml><?xml version="1.0" encoding="utf-8"?>
-<p:sld xmlns:a="http://schemas.openxmlformats.org/drawingml/2006/main" xmlns:p="http://schemas.openxmlformats.org/presentationml/2006/main" xmlns:r="http://schemas.openxmlformats.org/officeDocument/2006/relationships">
-  <p:cSld>
-    <p:spTree>
-      <p:nvGrpSpPr>
-        <p:cNvPr id="1" name=""/>
-        <p:cNvGrpSpPr/>
-        <p:nvPr/>
-      </p:nvGrpSpPr>
-      <p:grpSpPr/>
-      <p:sp>
-        <p:nvSpPr>
-          <p:cNvPr id="2" name="Rectangle 1"/>
-          <p:cNvSpPr/>
-          <p:nvPr/>
-        </p:nvSpPr>
-        <p:spPr>
-          <a:xfrm>
-            <a:off x="0" y="0"/>
-            <a:ext cx="12188952" cy="6858000"/>
-          </a:xfrm>
-          <a:prstGeom prst="rect">
-            <a:avLst/>
-          </a:prstGeom>
-          <a:solidFill>
-            <a:srgbClr val="FFFFFF"/>
-          </a:solidFill>
-          <a:ln>
-            <a:noFill/>
-          </a:ln>
-        </p:spPr>
-        <p:style>
-          <a:lnRef idx="1">
-            <a:schemeClr val="accent1"/>
-          </a:lnRef>
-          <a:fillRef idx="3">
-            <a:schemeClr val="accent1"/>
-          </a:fillRef>
-          <a:effectRef idx="2">
-            <a:schemeClr val="accent1"/>
-          </a:effectRef>
-          <a:fontRef idx="minor">
-            <a:schemeClr val="lt1"/>
-          </a:fontRef>
-        </p:style>
-        <p:txBody>
-          <a:bodyPr rtlCol="0" anchor="ctr"/>
-          <a:lstStyle/>
-          <a:p>
-            <a:pPr algn="ctr"/>
-          </a:p>
-        </p:txBody>
-      </p:sp>
-      <p:sp>
-        <p:nvSpPr>
-          <p:cNvPr id="3" name="Rectangle 2"/>
-          <p:cNvSpPr/>
-          <p:nvPr/>
-        </p:nvSpPr>
-        <p:spPr>
-          <a:xfrm>
-            <a:off x="0" y="0"/>
-            <a:ext cx="12188952" cy="50292"/>
-          </a:xfrm>
-          <a:prstGeom prst="rect">
-            <a:avLst/>
-          </a:prstGeom>
-          <a:solidFill>
-            <a:srgbClr val="1F2C56"/>
-          </a:solidFill>
-          <a:ln>
-            <a:noFill/>
-          </a:ln>
-        </p:spPr>
-        <p:style>
-          <a:lnRef idx="1">
-            <a:schemeClr val="accent1"/>
-          </a:lnRef>
-          <a:fillRef idx="3">
-            <a:schemeClr val="accent1"/>
-          </a:fillRef>
-          <a:effectRef idx="2">
-            <a:schemeClr val="accent1"/>
-          </a:effectRef>
-          <a:fontRef idx="minor">
-            <a:schemeClr val="lt1"/>
-          </a:fontRef>
-        </p:style>
-        <p:txBody>
-          <a:bodyPr rtlCol="0" anchor="ctr"/>
-          <a:lstStyle/>
-          <a:p>
-            <a:pPr algn="ctr"/>
-          </a:p>
-        </p:txBody>
-      </p:sp>
-      <p:sp>
-        <p:nvSpPr>
-          <p:cNvPr id="4" name="TextBox 3"/>
-          <p:cNvSpPr txBox="1"/>
-          <p:nvPr/>
-        </p:nvSpPr>
-        <p:spPr>
-          <a:xfrm>
-            <a:off x="685800" y="109728"/>
-            <a:ext cx="10817352" cy="228600"/>
-          </a:xfrm>
-          <a:prstGeom prst="rect">
-            <a:avLst/>
-          </a:prstGeom>
-          <a:noFill/>
-        </p:spPr>
-        <p:txBody>
-          <a:bodyPr wrap="none">
-            <a:spAutoFit/>
-          </a:bodyPr>
-          <a:lstStyle/>
-          <a:p>
-            <a:pPr algn="l"/>
-            <a:r>
-              <a:rPr sz="750">
-                <a:solidFill>
-                  <a:srgbClr val="78808C"/>
-                </a:solidFill>
-                <a:latin typeface="Consolas"/>
-              </a:rPr>
-              <a:t>M22  ·  ÜBERSICHT</a:t>
-            </a:r>
-          </a:p>
-        </p:txBody>
-      </p:sp>
-      <p:sp>
-        <p:nvSpPr>
-          <p:cNvPr id="5" name="TextBox 4"/>
-          <p:cNvSpPr txBox="1"/>
-          <p:nvPr/>
-        </p:nvSpPr>
-        <p:spPr>
-          <a:xfrm>
-            <a:off x="685800" y="502920"/>
-            <a:ext cx="10817352" cy="594360"/>
-          </a:xfrm>
-          <a:prstGeom prst="rect">
-            <a:avLst/>
-          </a:prstGeom>
-          <a:noFill/>
-        </p:spPr>
-        <p:txBody>
-          <a:bodyPr wrap="square">
-            <a:spAutoFit/>
-          </a:bodyPr>
-          <a:lstStyle/>
-          <a:p>
-            <a:pPr algn="l"/>
-            <a:r>
-              <a:rPr sz="2000" b="1" i="0">
-                <a:solidFill>
-                  <a:srgbClr val="1F2C56"/>
-                </a:solidFill>
-                <a:latin typeface="Arial"/>
-              </a:rPr>
-              <a:t>Kennzahlen- und Formelkarte: Qualitative Kreditwürdigkeitsanalyse</a:t>
-            </a:r>
-          </a:p>
-        </p:txBody>
-      </p:sp>
-      <p:sp>
-        <p:nvSpPr>
-          <p:cNvPr id="6" name="Rectangle 5"/>
-          <p:cNvSpPr/>
-          <p:nvPr/>
-        </p:nvSpPr>
-        <p:spPr>
-          <a:xfrm>
-            <a:off x="685800" y="1143000"/>
-            <a:ext cx="10817352" cy="25400"/>
-          </a:xfrm>
-          <a:prstGeom prst="rect">
-            <a:avLst/>
-          </a:prstGeom>
-          <a:solidFill>
-            <a:srgbClr val="D9C089"/>
-          </a:solidFill>
-          <a:ln>
-            <a:noFill/>
-          </a:ln>
-        </p:spPr>
-        <p:style>
-          <a:lnRef idx="1">
-            <a:schemeClr val="accent1"/>
-          </a:lnRef>
-          <a:fillRef idx="3">
-            <a:schemeClr val="accent1"/>
-          </a:fillRef>
-          <a:effectRef idx="2">
-            <a:schemeClr val="accent1"/>
-          </a:effectRef>
-          <a:fontRef idx="minor">
-            <a:schemeClr val="lt1"/>
-          </a:fontRef>
-        </p:style>
-        <p:txBody>
-          <a:bodyPr rtlCol="0" anchor="ctr"/>
-          <a:lstStyle/>
-          <a:p>
-            <a:pPr algn="ctr"/>
-          </a:p>
-        </p:txBody>
-      </p:sp>
-      <p:graphicFrame>
-        <p:nvGraphicFramePr>
-          <p:cNvPr id="7" name="Table 6"/>
-          <p:cNvGraphicFramePr>
-            <a:graphicFrameLocks noGrp="1"/>
-          </p:cNvGraphicFramePr>
-          <p:nvPr/>
-        </p:nvGraphicFramePr>
-        <p:xfrm>
-          <a:off x="685800" y="1417320"/>
-          <a:ext cx="10817352" cy="1920240"/>
-        </p:xfrm>
-        <a:graphic>
-          <a:graphicData uri="http://schemas.openxmlformats.org/drawingml/2006/table">
-            <a:tbl>
-              <a:tblPr firstRow="1" bandRow="1">
-                <a:tableStyleId>{5C22544A-7EE6-4342-B048-85BDC9FD1C3A}</a:tableStyleId>
-              </a:tblPr>
-              <a:tblGrid>
-                <a:gridCol w="2704338"/>
-                <a:gridCol w="2704338"/>
-                <a:gridCol w="2704338"/>
-                <a:gridCol w="2704338"/>
-              </a:tblGrid>
-              <a:tr h="384048">
-                <a:tc>
-                  <a:txBody>
-                    <a:bodyPr/>
-                    <a:lstStyle/>
-                    <a:p>
-                      <a:r>
-                        <a:rPr sz="1100" b="1">
-                          <a:solidFill>
-                            <a:srgbClr val="FFFFFF"/>
-                          </a:solidFill>
-                          <a:latin typeface="Arial"/>
-                        </a:rPr>
-                        <a:t>Kennzahl</a:t>
-                      </a:r>
-                    </a:p>
-                  </a:txBody>
-                  <a:tcPr>
-                    <a:solidFill>
-                      <a:srgbClr val="1F2C56"/>
-                    </a:solidFill>
-                  </a:tcPr>
-                </a:tc>
-                <a:tc>
-                  <a:txBody>
-                    <a:bodyPr/>
-                    <a:lstStyle/>
-                    <a:p>
-                      <a:r>
-                        <a:rPr sz="1100" b="1">
-                          <a:solidFill>
-                            <a:srgbClr val="FFFFFF"/>
-                          </a:solidFill>
-                          <a:latin typeface="Arial"/>
-                        </a:rPr>
-                        <a:t>Formel</a:t>
-                      </a:r>
-                    </a:p>
-                  </a:txBody>
-                  <a:tcPr>
-                    <a:solidFill>
-                      <a:srgbClr val="1F2C56"/>
-                    </a:solidFill>
-                  </a:tcPr>
-                </a:tc>
-                <a:tc>
-                  <a:txBody>
-                    <a:bodyPr/>
-                    <a:lstStyle/>
-                    <a:p>
-                      <a:r>
-                        <a:rPr sz="1100" b="1">
-                          <a:solidFill>
-                            <a:srgbClr val="FFFFFF"/>
-                          </a:solidFill>
-                          <a:latin typeface="Arial"/>
-                        </a:rPr>
-                        <a:t>Orientierungswert</a:t>
-                      </a:r>
-                    </a:p>
-                  </a:txBody>
-                  <a:tcPr>
-                    <a:solidFill>
-                      <a:srgbClr val="1F2C56"/>
-                    </a:solidFill>
-                  </a:tcPr>
-                </a:tc>
-                <a:tc>
-                  <a:txBody>
-                    <a:bodyPr/>
-                    <a:lstStyle/>
-                    <a:p>
-                      <a:r>
-                        <a:rPr sz="1100" b="1">
-                          <a:solidFill>
-                            <a:srgbClr val="FFFFFF"/>
-                          </a:solidFill>
-                          <a:latin typeface="Arial"/>
-                        </a:rPr>
-                        <a:t>Haller GmbH 2024</a:t>
-                      </a:r>
-                    </a:p>
-                  </a:txBody>
-                  <a:tcPr>
-                    <a:solidFill>
-                      <a:srgbClr val="1F2C56"/>
-                    </a:solidFill>
-                  </a:tcPr>
-                </a:tc>
-              </a:tr>
-              <a:tr h="384048">
-                <a:tc>
-                  <a:txBody>
-                    <a:bodyPr/>
-                    <a:lstStyle/>
-                    <a:p>
-                      <a:r>
-                        <a:rPr sz="1050">
-                          <a:solidFill>
-                            <a:srgbClr val="3D5466"/>
-                          </a:solidFill>
-                          <a:latin typeface="Arial"/>
-                        </a:rPr>
-                        <a:t>DSCR</a:t>
-                      </a:r>
-                    </a:p>
-                  </a:txBody>
-                  <a:tcPr/>
-                </a:tc>
-                <a:tc>
-                  <a:txBody>
-                    <a:bodyPr/>
-                    <a:lstStyle/>
-                    <a:p>
-                      <a:r>
-                        <a:rPr sz="1050">
-                          <a:solidFill>
-                            <a:srgbClr val="3D5466"/>
-                          </a:solidFill>
-                          <a:latin typeface="Arial"/>
-                        </a:rPr>
-                        <a:t>EBITDA / Schuldendienst</a:t>
-                      </a:r>
-                    </a:p>
-                  </a:txBody>
-                  <a:tcPr/>
-                </a:tc>
-                <a:tc>
-                  <a:txBody>
-                    <a:bodyPr/>
-                    <a:lstStyle/>
-                    <a:p>
-                      <a:r>
-                        <a:rPr sz="1050">
-                          <a:solidFill>
-                            <a:srgbClr val="3D5466"/>
-                          </a:solidFill>
-                          <a:latin typeface="Arial"/>
-                        </a:rPr>
-                        <a:t>&gt; 1,25</a:t>
-                      </a:r>
-                    </a:p>
-                  </a:txBody>
-                  <a:tcPr/>
-                </a:tc>
-                <a:tc>
-                  <a:txBody>
-                    <a:bodyPr/>
-                    <a:lstStyle/>
-                    <a:p>
-                      <a:r>
-                        <a:rPr sz="1050">
-                          <a:solidFill>
-                            <a:srgbClr val="3D5466"/>
-                          </a:solidFill>
-                          <a:latin typeface="Arial"/>
-                        </a:rPr>
-                        <a:t>1,42 — stabil</a:t>
-                      </a:r>
-                    </a:p>
-                  </a:txBody>
-                  <a:tcPr/>
-                </a:tc>
-              </a:tr>
-              <a:tr h="384048">
-                <a:tc>
-                  <a:txBody>
-                    <a:bodyPr/>
-                    <a:lstStyle/>
-                    <a:p>
-                      <a:r>
-                        <a:rPr sz="1050">
-                          <a:solidFill>
-                            <a:srgbClr val="3D5466"/>
-                          </a:solidFill>
-                          <a:latin typeface="Arial"/>
-                        </a:rPr>
-                        <a:t>Zinsdeckungsgrad</a:t>
-                      </a:r>
-                    </a:p>
-                  </a:txBody>
-                  <a:tcPr/>
-                </a:tc>
-                <a:tc>
-                  <a:txBody>
-                    <a:bodyPr/>
-                    <a:lstStyle/>
-                    <a:p>
-                      <a:r>
-                        <a:rPr sz="1050">
-                          <a:solidFill>
-                            <a:srgbClr val="3D5466"/>
-                          </a:solidFill>
-                          <a:latin typeface="Arial"/>
-                        </a:rPr>
-                        <a:t>EBIT / Zinsaufwand</a:t>
-                      </a:r>
-                    </a:p>
-                  </a:txBody>
-                  <a:tcPr/>
-                </a:tc>
-                <a:tc>
-                  <a:txBody>
-                    <a:bodyPr/>
-                    <a:lstStyle/>
-                    <a:p>
-                      <a:r>
-                        <a:rPr sz="1050">
-                          <a:solidFill>
-                            <a:srgbClr val="3D5466"/>
-                          </a:solidFill>
-                          <a:latin typeface="Arial"/>
-                        </a:rPr>
-                        <a:t>&gt; 3,0</a:t>
-                      </a:r>
-                    </a:p>
-                  </a:txBody>
-                  <a:tcPr/>
-                </a:tc>
-                <a:tc>
-                  <a:txBody>
-                    <a:bodyPr/>
-                    <a:lstStyle/>
-                    <a:p>
-                      <a:r>
-                        <a:rPr sz="1050">
-                          <a:solidFill>
-                            <a:srgbClr val="3D5466"/>
-                          </a:solidFill>
-                          <a:latin typeface="Arial"/>
-                        </a:rPr>
-                        <a:t>3,8 — stabil</a:t>
-                      </a:r>
-                    </a:p>
-                  </a:txBody>
-                  <a:tcPr/>
-                </a:tc>
-              </a:tr>
-              <a:tr h="384048">
-                <a:tc>
-                  <a:txBody>
-                    <a:bodyPr/>
-                    <a:lstStyle/>
-                    <a:p>
-                      <a:r>
-                        <a:rPr sz="1050">
-                          <a:solidFill>
-                            <a:srgbClr val="3D5466"/>
-                          </a:solidFill>
-                          <a:latin typeface="Arial"/>
-                        </a:rPr>
-                        <a:t>Eigenkapitalquote</a:t>
-                      </a:r>
-                    </a:p>
-                  </a:txBody>
-                  <a:tcPr/>
-                </a:tc>
-                <a:tc>
-                  <a:txBody>
-                    <a:bodyPr/>
-                    <a:lstStyle/>
-                    <a:p>
-                      <a:r>
-                        <a:rPr sz="1050">
-                          <a:solidFill>
-                            <a:srgbClr val="3D5466"/>
-                          </a:solidFill>
-                          <a:latin typeface="Arial"/>
-                        </a:rPr>
-                        <a:t>EK / Bilanzsumme</a:t>
-                      </a:r>
-                    </a:p>
-                  </a:txBody>
-                  <a:tcPr/>
-                </a:tc>
-                <a:tc>
-                  <a:txBody>
-                    <a:bodyPr/>
-                    <a:lstStyle/>
-                    <a:p>
-                      <a:r>
-                        <a:rPr sz="1050">
-                          <a:solidFill>
-                            <a:srgbClr val="3D5466"/>
-                          </a:solidFill>
-                          <a:latin typeface="Arial"/>
-                        </a:rPr>
-                        <a:t>&gt; 20 %</a:t>
-                      </a:r>
-                    </a:p>
-                  </a:txBody>
-                  <a:tcPr/>
-                </a:tc>
-                <a:tc>
-                  <a:txBody>
-                    <a:bodyPr/>
-                    <a:lstStyle/>
-                    <a:p>
-                      <a:r>
-                        <a:rPr sz="1050">
-                          <a:solidFill>
-                            <a:srgbClr val="3D5466"/>
-                          </a:solidFill>
-                          <a:latin typeface="Arial"/>
-                        </a:rPr>
-                        <a:t>31,4 % — gut</a:t>
+                        <a:t>wachsend</a:t>
                       </a:r>
                     </a:p>
                   </a:txBody>
@@ -8758,7 +7535,7 @@
                           </a:solidFill>
                           <a:latin typeface="Arial"/>
                         </a:rPr>
-                        <a:t>EBIT / Umsatz</a:t>
+                        <a:t>6,7 %</a:t>
                       </a:r>
                     </a:p>
                   </a:txBody>
@@ -8776,7 +7553,27 @@
                           </a:solidFill>
                           <a:latin typeface="Arial"/>
                         </a:rPr>
-                        <a:t>Branche: 5,8 %</a:t>
+                        <a:t>solide</a:t>
+                      </a:r>
+                    </a:p>
+                  </a:txBody>
+                  <a:tcPr/>
+                </a:tc>
+              </a:tr>
+              <a:tr h="384048">
+                <a:tc>
+                  <a:txBody>
+                    <a:bodyPr/>
+                    <a:lstStyle/>
+                    <a:p>
+                      <a:r>
+                        <a:rPr sz="1050">
+                          <a:solidFill>
+                            <a:srgbClr val="3D5466"/>
+                          </a:solidFill>
+                          <a:latin typeface="Arial"/>
+                        </a:rPr>
+                        <a:t>Hauptkunde A</a:t>
                       </a:r>
                     </a:p>
                   </a:txBody>
@@ -8794,7 +7591,81 @@
                           </a:solidFill>
                           <a:latin typeface="Arial"/>
                         </a:rPr>
-                        <a:t>6,7 % — über Branche</a:t>
+                        <a:t>60 % Umsatz</a:t>
+                      </a:r>
+                    </a:p>
+                  </a:txBody>
+                  <a:tcPr/>
+                </a:tc>
+                <a:tc>
+                  <a:txBody>
+                    <a:bodyPr/>
+                    <a:lstStyle/>
+                    <a:p>
+                      <a:r>
+                        <a:rPr sz="1050">
+                          <a:solidFill>
+                            <a:srgbClr val="3D5466"/>
+                          </a:solidFill>
+                          <a:latin typeface="Arial"/>
+                        </a:rPr>
+                        <a:t>Klumpenrisiko</a:t>
+                      </a:r>
+                    </a:p>
+                  </a:txBody>
+                  <a:tcPr/>
+                </a:tc>
+              </a:tr>
+              <a:tr h="384048">
+                <a:tc>
+                  <a:txBody>
+                    <a:bodyPr/>
+                    <a:lstStyle/>
+                    <a:p>
+                      <a:r>
+                        <a:rPr sz="1050">
+                          <a:solidFill>
+                            <a:srgbClr val="3D5466"/>
+                          </a:solidFill>
+                          <a:latin typeface="Arial"/>
+                        </a:rPr>
+                        <a:t>GF Andreas Haller</a:t>
+                      </a:r>
+                    </a:p>
+                  </a:txBody>
+                  <a:tcPr/>
+                </a:tc>
+                <a:tc>
+                  <a:txBody>
+                    <a:bodyPr/>
+                    <a:lstStyle/>
+                    <a:p>
+                      <a:r>
+                        <a:rPr sz="1050">
+                          <a:solidFill>
+                            <a:srgbClr val="3D5466"/>
+                          </a:solidFill>
+                          <a:latin typeface="Arial"/>
+                        </a:rPr>
+                        <a:t>63 J., kein Nachfolger</a:t>
+                      </a:r>
+                    </a:p>
+                  </a:txBody>
+                  <a:tcPr/>
+                </a:tc>
+                <a:tc>
+                  <a:txBody>
+                    <a:bodyPr/>
+                    <a:lstStyle/>
+                    <a:p>
+                      <a:r>
+                        <a:rPr sz="1050">
+                          <a:solidFill>
+                            <a:srgbClr val="3D5466"/>
+                          </a:solidFill>
+                          <a:latin typeface="Arial"/>
+                        </a:rPr>
+                        <a:t>Nachfolgerisiko</a:t>
                       </a:r>
                     </a:p>
                   </a:txBody>
@@ -8914,6 +7785,502 @@
                 <a:latin typeface="Consolas"/>
               </a:rPr>
               <a:t>Übersicht</a:t>
+            </a:r>
+          </a:p>
+        </p:txBody>
+      </p:sp>
+    </p:spTree>
+  </p:cSld>
+  <p:clrMapOvr>
+    <a:masterClrMapping/>
+  </p:clrMapOvr>
+</p:sld>
+</file>
+
+<file path=ppt/slides/slide17.xml><?xml version="1.0" encoding="utf-8"?>
+<p:sld xmlns:a="http://schemas.openxmlformats.org/drawingml/2006/main" xmlns:p="http://schemas.openxmlformats.org/presentationml/2006/main" xmlns:r="http://schemas.openxmlformats.org/officeDocument/2006/relationships">
+  <p:cSld>
+    <p:spTree>
+      <p:nvGrpSpPr>
+        <p:cNvPr id="1" name=""/>
+        <p:cNvGrpSpPr/>
+        <p:nvPr/>
+      </p:nvGrpSpPr>
+      <p:grpSpPr/>
+      <p:sp>
+        <p:nvSpPr>
+          <p:cNvPr id="2" name="Rectangle 1"/>
+          <p:cNvSpPr/>
+          <p:nvPr/>
+        </p:nvSpPr>
+        <p:spPr>
+          <a:xfrm>
+            <a:off x="0" y="0"/>
+            <a:ext cx="12188952" cy="6858000"/>
+          </a:xfrm>
+          <a:prstGeom prst="rect">
+            <a:avLst/>
+          </a:prstGeom>
+          <a:solidFill>
+            <a:srgbClr val="EDEDF3"/>
+          </a:solidFill>
+          <a:ln>
+            <a:noFill/>
+          </a:ln>
+        </p:spPr>
+        <p:style>
+          <a:lnRef idx="1">
+            <a:schemeClr val="accent1"/>
+          </a:lnRef>
+          <a:fillRef idx="3">
+            <a:schemeClr val="accent1"/>
+          </a:fillRef>
+          <a:effectRef idx="2">
+            <a:schemeClr val="accent1"/>
+          </a:effectRef>
+          <a:fontRef idx="minor">
+            <a:schemeClr val="lt1"/>
+          </a:fontRef>
+        </p:style>
+        <p:txBody>
+          <a:bodyPr rtlCol="0" anchor="ctr"/>
+          <a:lstStyle/>
+          <a:p>
+            <a:pPr algn="ctr"/>
+          </a:p>
+        </p:txBody>
+      </p:sp>
+      <p:sp>
+        <p:nvSpPr>
+          <p:cNvPr id="3" name="Rectangle 2"/>
+          <p:cNvSpPr/>
+          <p:nvPr/>
+        </p:nvSpPr>
+        <p:spPr>
+          <a:xfrm>
+            <a:off x="0" y="0"/>
+            <a:ext cx="12188952" cy="50292"/>
+          </a:xfrm>
+          <a:prstGeom prst="rect">
+            <a:avLst/>
+          </a:prstGeom>
+          <a:solidFill>
+            <a:srgbClr val="1F2C56"/>
+          </a:solidFill>
+          <a:ln>
+            <a:noFill/>
+          </a:ln>
+        </p:spPr>
+        <p:style>
+          <a:lnRef idx="1">
+            <a:schemeClr val="accent1"/>
+          </a:lnRef>
+          <a:fillRef idx="3">
+            <a:schemeClr val="accent1"/>
+          </a:fillRef>
+          <a:effectRef idx="2">
+            <a:schemeClr val="accent1"/>
+          </a:effectRef>
+          <a:fontRef idx="minor">
+            <a:schemeClr val="lt1"/>
+          </a:fontRef>
+        </p:style>
+        <p:txBody>
+          <a:bodyPr rtlCol="0" anchor="ctr"/>
+          <a:lstStyle/>
+          <a:p>
+            <a:pPr algn="ctr"/>
+          </a:p>
+        </p:txBody>
+      </p:sp>
+      <p:sp>
+        <p:nvSpPr>
+          <p:cNvPr id="4" name="TextBox 3"/>
+          <p:cNvSpPr txBox="1"/>
+          <p:nvPr/>
+        </p:nvSpPr>
+        <p:spPr>
+          <a:xfrm>
+            <a:off x="685800" y="109728"/>
+            <a:ext cx="10817352" cy="228600"/>
+          </a:xfrm>
+          <a:prstGeom prst="rect">
+            <a:avLst/>
+          </a:prstGeom>
+          <a:noFill/>
+        </p:spPr>
+        <p:txBody>
+          <a:bodyPr wrap="none">
+            <a:spAutoFit/>
+          </a:bodyPr>
+          <a:lstStyle/>
+          <a:p>
+            <a:pPr algn="l"/>
+            <a:r>
+              <a:rPr sz="750">
+                <a:solidFill>
+                  <a:srgbClr val="78808C"/>
+                </a:solidFill>
+                <a:latin typeface="Consolas"/>
+              </a:rPr>
+              <a:t>M22  ·  ARBEITSBLATT</a:t>
+            </a:r>
+          </a:p>
+        </p:txBody>
+      </p:sp>
+      <p:sp>
+        <p:nvSpPr>
+          <p:cNvPr id="5" name="Rectangle 4"/>
+          <p:cNvSpPr/>
+          <p:nvPr/>
+        </p:nvSpPr>
+        <p:spPr>
+          <a:xfrm>
+            <a:off x="0" y="1234440"/>
+            <a:ext cx="12188952" cy="12700"/>
+          </a:xfrm>
+          <a:prstGeom prst="rect">
+            <a:avLst/>
+          </a:prstGeom>
+          <a:solidFill>
+            <a:srgbClr val="D8DFE4"/>
+          </a:solidFill>
+          <a:ln>
+            <a:noFill/>
+          </a:ln>
+        </p:spPr>
+        <p:style>
+          <a:lnRef idx="1">
+            <a:schemeClr val="accent1"/>
+          </a:lnRef>
+          <a:fillRef idx="3">
+            <a:schemeClr val="accent1"/>
+          </a:fillRef>
+          <a:effectRef idx="2">
+            <a:schemeClr val="accent1"/>
+          </a:effectRef>
+          <a:fontRef idx="minor">
+            <a:schemeClr val="lt1"/>
+          </a:fontRef>
+        </p:style>
+        <p:txBody>
+          <a:bodyPr rtlCol="0" anchor="ctr"/>
+          <a:lstStyle/>
+          <a:p>
+            <a:pPr algn="ctr"/>
+          </a:p>
+        </p:txBody>
+      </p:sp>
+      <p:sp>
+        <p:nvSpPr>
+          <p:cNvPr id="6" name="Rectangle 5"/>
+          <p:cNvSpPr/>
+          <p:nvPr/>
+        </p:nvSpPr>
+        <p:spPr>
+          <a:xfrm>
+            <a:off x="685800" y="502920"/>
+            <a:ext cx="36576" cy="658368"/>
+          </a:xfrm>
+          <a:prstGeom prst="rect">
+            <a:avLst/>
+          </a:prstGeom>
+          <a:solidFill>
+            <a:srgbClr val="D9C089"/>
+          </a:solidFill>
+          <a:ln>
+            <a:noFill/>
+          </a:ln>
+        </p:spPr>
+        <p:style>
+          <a:lnRef idx="1">
+            <a:schemeClr val="accent1"/>
+          </a:lnRef>
+          <a:fillRef idx="3">
+            <a:schemeClr val="accent1"/>
+          </a:fillRef>
+          <a:effectRef idx="2">
+            <a:schemeClr val="accent1"/>
+          </a:effectRef>
+          <a:fontRef idx="minor">
+            <a:schemeClr val="lt1"/>
+          </a:fontRef>
+        </p:style>
+        <p:txBody>
+          <a:bodyPr rtlCol="0" anchor="ctr"/>
+          <a:lstStyle/>
+          <a:p>
+            <a:pPr algn="ctr"/>
+          </a:p>
+        </p:txBody>
+      </p:sp>
+      <p:sp>
+        <p:nvSpPr>
+          <p:cNvPr id="7" name="TextBox 6"/>
+          <p:cNvSpPr txBox="1"/>
+          <p:nvPr/>
+        </p:nvSpPr>
+        <p:spPr>
+          <a:xfrm>
+            <a:off x="813816" y="502920"/>
+            <a:ext cx="10634472" cy="685800"/>
+          </a:xfrm>
+          <a:prstGeom prst="rect">
+            <a:avLst/>
+          </a:prstGeom>
+          <a:noFill/>
+        </p:spPr>
+        <p:txBody>
+          <a:bodyPr wrap="square">
+            <a:spAutoFit/>
+          </a:bodyPr>
+          <a:lstStyle/>
+          <a:p>
+            <a:pPr algn="l"/>
+            <a:r>
+              <a:rPr sz="2400" b="1" i="0">
+                <a:solidFill>
+                  <a:srgbClr val="1F2C56"/>
+                </a:solidFill>
+                <a:latin typeface="Arial"/>
+              </a:rPr>
+              <a:t>Praxisfall Haller bearbeiten</a:t>
+            </a:r>
+          </a:p>
+        </p:txBody>
+      </p:sp>
+      <p:sp>
+        <p:nvSpPr>
+          <p:cNvPr id="8" name="TextBox 7"/>
+          <p:cNvSpPr txBox="1"/>
+          <p:nvPr/>
+        </p:nvSpPr>
+        <p:spPr>
+          <a:xfrm>
+            <a:off x="685800" y="1554480"/>
+            <a:ext cx="10817352" cy="3840480"/>
+          </a:xfrm>
+          <a:prstGeom prst="rect">
+            <a:avLst/>
+          </a:prstGeom>
+          <a:noFill/>
+        </p:spPr>
+        <p:txBody>
+          <a:bodyPr wrap="square">
+            <a:spAutoFit/>
+          </a:bodyPr>
+          <a:lstStyle/>
+          <a:p>
+            <a:pPr marL="190500" indent="-190500">
+              <a:spcBef>
+                <a:spcPts val="400"/>
+              </a:spcBef>
+              <a:spcAft>
+                <a:spcPts val="200"/>
+              </a:spcAft>
+            </a:pPr>
+            <a:r>
+              <a:rPr sz="1400">
+                <a:solidFill>
+                  <a:srgbClr val="3D5466"/>
+                </a:solidFill>
+                <a:latin typeface="Arial"/>
+              </a:rPr>
+              <a:t>▸  Analysieren Sie Haller mit Five Forces und der Wettbewerbsstrategie-Matrix (AB-1).</a:t>
+            </a:r>
+          </a:p>
+          <a:p>
+            <a:pPr marL="190500" indent="-190500">
+              <a:spcBef>
+                <a:spcPts val="400"/>
+              </a:spcBef>
+              <a:spcAft>
+                <a:spcPts val="200"/>
+              </a:spcAft>
+            </a:pPr>
+            <a:r>
+              <a:rPr sz="1400">
+                <a:solidFill>
+                  <a:srgbClr val="3D5466"/>
+                </a:solidFill>
+                <a:latin typeface="Arial"/>
+              </a:rPr>
+              <a:t>▸  Prüfen Sie die Robustheit des Geschäftsmodells (Canvas) und die Ressourcenstärke.</a:t>
+            </a:r>
+          </a:p>
+          <a:p>
+            <a:pPr marL="190500" indent="-190500">
+              <a:spcBef>
+                <a:spcPts val="400"/>
+              </a:spcBef>
+              <a:spcAft>
+                <a:spcPts val="200"/>
+              </a:spcAft>
+            </a:pPr>
+            <a:r>
+              <a:rPr sz="1400">
+                <a:solidFill>
+                  <a:srgbClr val="3D5466"/>
+                </a:solidFill>
+                <a:latin typeface="Arial"/>
+              </a:rPr>
+              <a:t>▸  Verdichten Sie die Befunde in einer SWOT und leiten Sie eine Kreditempfehlung ab.</a:t>
+            </a:r>
+          </a:p>
+        </p:txBody>
+      </p:sp>
+      <p:sp>
+        <p:nvSpPr>
+          <p:cNvPr id="9" name="Rectangle 8"/>
+          <p:cNvSpPr/>
+          <p:nvPr/>
+        </p:nvSpPr>
+        <p:spPr>
+          <a:xfrm>
+            <a:off x="685800" y="5486400"/>
+            <a:ext cx="10817352" cy="640080"/>
+          </a:xfrm>
+          <a:prstGeom prst="rect">
+            <a:avLst/>
+          </a:prstGeom>
+          <a:solidFill>
+            <a:srgbClr val="1F2C56"/>
+          </a:solidFill>
+          <a:ln>
+            <a:noFill/>
+          </a:ln>
+        </p:spPr>
+        <p:style>
+          <a:lnRef idx="1">
+            <a:schemeClr val="accent1"/>
+          </a:lnRef>
+          <a:fillRef idx="3">
+            <a:schemeClr val="accent1"/>
+          </a:fillRef>
+          <a:effectRef idx="2">
+            <a:schemeClr val="accent1"/>
+          </a:effectRef>
+          <a:fontRef idx="minor">
+            <a:schemeClr val="lt1"/>
+          </a:fontRef>
+        </p:style>
+        <p:txBody>
+          <a:bodyPr rtlCol="0" anchor="ctr"/>
+          <a:lstStyle/>
+          <a:p>
+            <a:pPr algn="ctr"/>
+          </a:p>
+        </p:txBody>
+      </p:sp>
+      <p:sp>
+        <p:nvSpPr>
+          <p:cNvPr id="10" name="TextBox 9"/>
+          <p:cNvSpPr txBox="1"/>
+          <p:nvPr/>
+        </p:nvSpPr>
+        <p:spPr>
+          <a:xfrm>
+            <a:off x="868680" y="5596128"/>
+            <a:ext cx="10451592" cy="457200"/>
+          </a:xfrm>
+          <a:prstGeom prst="rect">
+            <a:avLst/>
+          </a:prstGeom>
+          <a:noFill/>
+        </p:spPr>
+        <p:txBody>
+          <a:bodyPr wrap="square">
+            <a:spAutoFit/>
+          </a:bodyPr>
+          <a:lstStyle/>
+          <a:p>
+            <a:pPr algn="l"/>
+            <a:r>
+              <a:rPr sz="1300" b="1" i="0">
+                <a:solidFill>
+                  <a:srgbClr val="FFFFFF"/>
+                </a:solidFill>
+                <a:latin typeface="Arial"/>
+              </a:rPr>
+              <a:t>→  Bearbeitung im Teilnehmer-Workbook (Arbeitsblatt mit Ausfüllfeldern)</a:t>
+            </a:r>
+          </a:p>
+        </p:txBody>
+      </p:sp>
+      <p:sp>
+        <p:nvSpPr>
+          <p:cNvPr id="11" name="Rectangle 10"/>
+          <p:cNvSpPr/>
+          <p:nvPr/>
+        </p:nvSpPr>
+        <p:spPr>
+          <a:xfrm>
+            <a:off x="0" y="6510528"/>
+            <a:ext cx="12188952" cy="347472"/>
+          </a:xfrm>
+          <a:prstGeom prst="rect">
+            <a:avLst/>
+          </a:prstGeom>
+          <a:solidFill>
+            <a:srgbClr val="0A1937"/>
+          </a:solidFill>
+          <a:ln>
+            <a:noFill/>
+          </a:ln>
+        </p:spPr>
+        <p:style>
+          <a:lnRef idx="1">
+            <a:schemeClr val="accent1"/>
+          </a:lnRef>
+          <a:fillRef idx="3">
+            <a:schemeClr val="accent1"/>
+          </a:fillRef>
+          <a:effectRef idx="2">
+            <a:schemeClr val="accent1"/>
+          </a:effectRef>
+          <a:fontRef idx="minor">
+            <a:schemeClr val="lt1"/>
+          </a:fontRef>
+        </p:style>
+        <p:txBody>
+          <a:bodyPr rtlCol="0" anchor="ctr"/>
+          <a:lstStyle/>
+          <a:p>
+            <a:pPr algn="ctr"/>
+          </a:p>
+        </p:txBody>
+      </p:sp>
+      <p:sp>
+        <p:nvSpPr>
+          <p:cNvPr id="12" name="TextBox 11"/>
+          <p:cNvSpPr txBox="1"/>
+          <p:nvPr/>
+        </p:nvSpPr>
+        <p:spPr>
+          <a:xfrm>
+            <a:off x="685800" y="6583680"/>
+            <a:ext cx="6490411" cy="256032"/>
+          </a:xfrm>
+          <a:prstGeom prst="rect">
+            <a:avLst/>
+          </a:prstGeom>
+          <a:noFill/>
+        </p:spPr>
+        <p:txBody>
+          <a:bodyPr wrap="none">
+            <a:spAutoFit/>
+          </a:bodyPr>
+          <a:lstStyle/>
+          <a:p>
+            <a:pPr algn="l"/>
+            <a:r>
+              <a:rPr sz="700">
+                <a:solidFill>
+                  <a:srgbClr val="A0B4D2"/>
+                </a:solidFill>
+                <a:latin typeface="Consolas"/>
+              </a:rPr>
+              <a:t>FKB Campus  ·  M22</a:t>
             </a:r>
           </a:p>
         </p:txBody>
@@ -9087,7 +8454,7 @@
                 </a:solidFill>
                 <a:latin typeface="Arial"/>
               </a:rPr>
-              <a:t>Handlungsempfehlung</a:t>
+              <a:t>Handlungsempfehlung: vom Framework-Befund zur Kreditmaßnahme</a:t>
             </a:r>
           </a:p>
         </p:txBody>
@@ -9305,7 +8672,7 @@
             <a:avLst/>
           </a:prstGeom>
           <a:solidFill>
-            <a:srgbClr val="EDEDF3"/>
+            <a:srgbClr val="FFFFFF"/>
           </a:solidFill>
           <a:ln>
             <a:noFill/>
@@ -9406,51 +8773,43 @@
                 </a:solidFill>
                 <a:latin typeface="Consolas"/>
               </a:rPr>
-              <a:t>M22  ·  INHALT</a:t>
-            </a:r>
-          </a:p>
-        </p:txBody>
-      </p:sp>
-      <p:sp>
-        <p:nvSpPr>
-          <p:cNvPr id="5" name="Rectangle 4"/>
-          <p:cNvSpPr/>
-          <p:nvPr/>
-        </p:nvSpPr>
-        <p:spPr>
-          <a:xfrm>
-            <a:off x="0" y="1234440"/>
-            <a:ext cx="12188952" cy="12700"/>
-          </a:xfrm>
-          <a:prstGeom prst="rect">
-            <a:avLst/>
-          </a:prstGeom>
-          <a:solidFill>
-            <a:srgbClr val="D8DFE4"/>
-          </a:solidFill>
-          <a:ln>
-            <a:noFill/>
-          </a:ln>
-        </p:spPr>
-        <p:style>
-          <a:lnRef idx="1">
-            <a:schemeClr val="accent1"/>
-          </a:lnRef>
-          <a:fillRef idx="3">
-            <a:schemeClr val="accent1"/>
-          </a:fillRef>
-          <a:effectRef idx="2">
-            <a:schemeClr val="accent1"/>
-          </a:effectRef>
-          <a:fontRef idx="minor">
-            <a:schemeClr val="lt1"/>
-          </a:fontRef>
-        </p:style>
-        <p:txBody>
-          <a:bodyPr rtlCol="0" anchor="ctr"/>
-          <a:lstStyle/>
-          <a:p>
-            <a:pPr algn="ctr"/>
+              <a:t>M22  ·  ÜBERSICHT</a:t>
+            </a:r>
+          </a:p>
+        </p:txBody>
+      </p:sp>
+      <p:sp>
+        <p:nvSpPr>
+          <p:cNvPr id="5" name="TextBox 4"/>
+          <p:cNvSpPr txBox="1"/>
+          <p:nvPr/>
+        </p:nvSpPr>
+        <p:spPr>
+          <a:xfrm>
+            <a:off x="685800" y="502920"/>
+            <a:ext cx="10817352" cy="594360"/>
+          </a:xfrm>
+          <a:prstGeom prst="rect">
+            <a:avLst/>
+          </a:prstGeom>
+          <a:noFill/>
+        </p:spPr>
+        <p:txBody>
+          <a:bodyPr wrap="square">
+            <a:spAutoFit/>
+          </a:bodyPr>
+          <a:lstStyle/>
+          <a:p>
+            <a:pPr algn="l"/>
+            <a:r>
+              <a:rPr sz="2000" b="1" i="0">
+                <a:solidFill>
+                  <a:srgbClr val="1F2C56"/>
+                </a:solidFill>
+                <a:latin typeface="Arial"/>
+              </a:rPr>
+              <a:t>Kennzahlen- und Formelkarte: qualitative Kreditwürdigkeit</a:t>
+            </a:r>
           </a:p>
         </p:txBody>
       </p:sp>
@@ -9462,8 +8821,8 @@
         </p:nvSpPr>
         <p:spPr>
           <a:xfrm>
-            <a:off x="685800" y="502920"/>
-            <a:ext cx="36576" cy="658368"/>
+            <a:off x="685800" y="1143000"/>
+            <a:ext cx="10817352" cy="25400"/>
           </a:xfrm>
           <a:prstGeom prst="rect">
             <a:avLst/>
@@ -9497,162 +8856,272 @@
           </a:p>
         </p:txBody>
       </p:sp>
-      <p:sp>
-        <p:nvSpPr>
-          <p:cNvPr id="7" name="TextBox 6"/>
-          <p:cNvSpPr txBox="1"/>
-          <p:nvPr/>
-        </p:nvSpPr>
-        <p:spPr>
-          <a:xfrm>
-            <a:off x="813816" y="502920"/>
-            <a:ext cx="10634472" cy="685800"/>
-          </a:xfrm>
-          <a:prstGeom prst="rect">
-            <a:avLst/>
-          </a:prstGeom>
-          <a:noFill/>
-        </p:spPr>
-        <p:txBody>
-          <a:bodyPr wrap="square">
-            <a:spAutoFit/>
-          </a:bodyPr>
-          <a:lstStyle/>
-          <a:p>
-            <a:pPr algn="l"/>
-            <a:r>
-              <a:rPr sz="2400" b="1" i="0">
-                <a:solidFill>
-                  <a:srgbClr val="1F2C56"/>
-                </a:solidFill>
-                <a:latin typeface="Arial"/>
-              </a:rPr>
-              <a:t>Reflexionsfragen</a:t>
-            </a:r>
-          </a:p>
-        </p:txBody>
-      </p:sp>
-      <p:sp>
-        <p:nvSpPr>
-          <p:cNvPr id="8" name="TextBox 7"/>
-          <p:cNvSpPr txBox="1"/>
-          <p:nvPr/>
-        </p:nvSpPr>
-        <p:spPr>
-          <a:xfrm>
-            <a:off x="685800" y="1417320"/>
-            <a:ext cx="10817352" cy="4892040"/>
-          </a:xfrm>
-          <a:prstGeom prst="rect">
-            <a:avLst/>
-          </a:prstGeom>
-          <a:noFill/>
-        </p:spPr>
-        <p:txBody>
-          <a:bodyPr wrap="square" anchor="ctr">
-            <a:spAutoFit/>
-          </a:bodyPr>
-          <a:lstStyle/>
-          <a:p>
-            <a:pPr marL="190500" indent="-190500">
-              <a:spcBef>
-                <a:spcPts val="400"/>
-              </a:spcBef>
-              <a:spcAft>
-                <a:spcPts val="200"/>
-              </a:spcAft>
-            </a:pPr>
-            <a:r>
-              <a:rPr sz="1300">
-                <a:solidFill>
-                  <a:srgbClr val="3D5466"/>
-                </a:solidFill>
-                <a:latin typeface="Arial"/>
-              </a:rPr>
-              <a:t>▸  Nehmen Sie sich nach dem Modul 10 Minuten Zeit für folgende Fragen:</a:t>
-            </a:r>
-          </a:p>
-          <a:p>
-            <a:pPr marL="190500" indent="-190500">
-              <a:spcBef>
-                <a:spcPts val="400"/>
-              </a:spcBef>
-              <a:spcAft>
-                <a:spcPts val="200"/>
-              </a:spcAft>
-            </a:pPr>
-            <a:r>
-              <a:rPr sz="1300">
-                <a:solidFill>
-                  <a:srgbClr val="3D5466"/>
-                </a:solidFill>
-                <a:latin typeface="Arial"/>
-              </a:rPr>
-              <a:t>▸  Bei welchem Ihrer aktuellen Kunden würden Sie bei einer SWOT-Analyse das größte Klumpenrisiko vermuten? Was würden Sie in einem Gespräch ansprechen?</a:t>
-            </a:r>
-          </a:p>
-          <a:p>
-            <a:pPr marL="190500" indent="-190500">
-              <a:spcBef>
-                <a:spcPts val="400"/>
-              </a:spcBef>
-              <a:spcAft>
-                <a:spcPts val="200"/>
-              </a:spcAft>
-            </a:pPr>
-            <a:r>
-              <a:rPr sz="1300">
-                <a:solidFill>
-                  <a:srgbClr val="3D5466"/>
-                </a:solidFill>
-                <a:latin typeface="Arial"/>
-              </a:rPr>
-              <a:t>▸  Welche der drei Frameworks (Five Forces, Business Model Canvas, SWOT) finden Sie für Ihre Praxis am unmittelbar anwendbarsten — und warum?</a:t>
-            </a:r>
-          </a:p>
-          <a:p>
-            <a:pPr marL="190500" indent="-190500">
-              <a:spcBef>
-                <a:spcPts val="400"/>
-              </a:spcBef>
-              <a:spcAft>
-                <a:spcPts val="200"/>
-              </a:spcAft>
-            </a:pPr>
-            <a:r>
-              <a:rPr sz="1300">
-                <a:solidFill>
-                  <a:srgbClr val="3D5466"/>
-                </a:solidFill>
-                <a:latin typeface="Arial"/>
-              </a:rPr>
-              <a:t>▸  Haben Sie in den letzten 12 Monaten einen Kunden erlebt, bei dem strategische Warnsignale in der Kreditanalyse übersehen wurden? Was hätte eine qualitative Analyse ergeben?</a:t>
-            </a:r>
-          </a:p>
-          <a:p>
-            <a:pPr marL="190500" indent="-190500">
-              <a:spcBef>
-                <a:spcPts val="400"/>
-              </a:spcBef>
-              <a:spcAft>
-                <a:spcPts val="200"/>
-              </a:spcAft>
-            </a:pPr>
-            <a:r>
-              <a:rPr sz="1300">
-                <a:solidFill>
-                  <a:srgbClr val="3D5466"/>
-                </a:solidFill>
-                <a:latin typeface="Arial"/>
-              </a:rPr>
-              <a:t>▸  Wie würden Sie das qualitative Krediturteil zur Haller GmbH einem skeptischen Kreditausschuss überzeugend vertreten?</a:t>
-            </a:r>
-          </a:p>
-        </p:txBody>
-      </p:sp>
-      <p:sp>
-        <p:nvSpPr>
-          <p:cNvPr id="9" name="Rectangle 8"/>
+      <p:graphicFrame>
+        <p:nvGraphicFramePr>
+          <p:cNvPr id="7" name="Table 6"/>
+          <p:cNvGraphicFramePr>
+            <a:graphicFrameLocks noGrp="1"/>
+          </p:cNvGraphicFramePr>
+          <p:nvPr/>
+        </p:nvGraphicFramePr>
+        <p:xfrm>
+          <a:off x="685800" y="1417320"/>
+          <a:ext cx="10817352" cy="1536192"/>
+        </p:xfrm>
+        <a:graphic>
+          <a:graphicData uri="http://schemas.openxmlformats.org/drawingml/2006/table">
+            <a:tbl>
+              <a:tblPr firstRow="1" bandRow="1">
+                <a:tableStyleId>{5C22544A-7EE6-4342-B048-85BDC9FD1C3A}</a:tableStyleId>
+              </a:tblPr>
+              <a:tblGrid>
+                <a:gridCol w="3605784"/>
+                <a:gridCol w="3605784"/>
+                <a:gridCol w="3605784"/>
+              </a:tblGrid>
+              <a:tr h="384048">
+                <a:tc>
+                  <a:txBody>
+                    <a:bodyPr/>
+                    <a:lstStyle/>
+                    <a:p>
+                      <a:r>
+                        <a:rPr sz="1100" b="1">
+                          <a:solidFill>
+                            <a:srgbClr val="FFFFFF"/>
+                          </a:solidFill>
+                          <a:latin typeface="Arial"/>
+                        </a:rPr>
+                        <a:t>Signal</a:t>
+                      </a:r>
+                    </a:p>
+                  </a:txBody>
+                  <a:tcPr>
+                    <a:solidFill>
+                      <a:srgbClr val="1F2C56"/>
+                    </a:solidFill>
+                  </a:tcPr>
+                </a:tc>
+                <a:tc>
+                  <a:txBody>
+                    <a:bodyPr/>
+                    <a:lstStyle/>
+                    <a:p>
+                      <a:r>
+                        <a:rPr sz="1100" b="1">
+                          <a:solidFill>
+                            <a:srgbClr val="FFFFFF"/>
+                          </a:solidFill>
+                          <a:latin typeface="Arial"/>
+                        </a:rPr>
+                        <a:t>Framework</a:t>
+                      </a:r>
+                    </a:p>
+                  </a:txBody>
+                  <a:tcPr>
+                    <a:solidFill>
+                      <a:srgbClr val="1F2C56"/>
+                    </a:solidFill>
+                  </a:tcPr>
+                </a:tc>
+                <a:tc>
+                  <a:txBody>
+                    <a:bodyPr/>
+                    <a:lstStyle/>
+                    <a:p>
+                      <a:r>
+                        <a:rPr sz="1100" b="1">
+                          <a:solidFill>
+                            <a:srgbClr val="FFFFFF"/>
+                          </a:solidFill>
+                          <a:latin typeface="Arial"/>
+                        </a:rPr>
+                        <a:t>Kreditmaßnahme</a:t>
+                      </a:r>
+                    </a:p>
+                  </a:txBody>
+                  <a:tcPr>
+                    <a:solidFill>
+                      <a:srgbClr val="1F2C56"/>
+                    </a:solidFill>
+                  </a:tcPr>
+                </a:tc>
+              </a:tr>
+              <a:tr h="384048">
+                <a:tc>
+                  <a:txBody>
+                    <a:bodyPr/>
+                    <a:lstStyle/>
+                    <a:p>
+                      <a:r>
+                        <a:rPr sz="1050">
+                          <a:solidFill>
+                            <a:srgbClr val="3D5466"/>
+                          </a:solidFill>
+                          <a:latin typeface="Arial"/>
+                        </a:rPr>
+                        <a:t>Kundenkonzentration &gt; 30 %</a:t>
+                      </a:r>
+                    </a:p>
+                  </a:txBody>
+                  <a:tcPr/>
+                </a:tc>
+                <a:tc>
+                  <a:txBody>
+                    <a:bodyPr/>
+                    <a:lstStyle/>
+                    <a:p>
+                      <a:r>
+                        <a:rPr sz="1050">
+                          <a:solidFill>
+                            <a:srgbClr val="3D5466"/>
+                          </a:solidFill>
+                          <a:latin typeface="Arial"/>
+                        </a:rPr>
+                        <a:t>Canvas / Five Forces</a:t>
+                      </a:r>
+                    </a:p>
+                  </a:txBody>
+                  <a:tcPr/>
+                </a:tc>
+                <a:tc>
+                  <a:txBody>
+                    <a:bodyPr/>
+                    <a:lstStyle/>
+                    <a:p>
+                      <a:r>
+                        <a:rPr sz="1050">
+                          <a:solidFill>
+                            <a:srgbClr val="3D5466"/>
+                          </a:solidFill>
+                          <a:latin typeface="Arial"/>
+                        </a:rPr>
+                        <a:t>Diversifizierung als Auflage</a:t>
+                      </a:r>
+                    </a:p>
+                  </a:txBody>
+                  <a:tcPr/>
+                </a:tc>
+              </a:tr>
+              <a:tr h="384048">
+                <a:tc>
+                  <a:txBody>
+                    <a:bodyPr/>
+                    <a:lstStyle/>
+                    <a:p>
+                      <a:r>
+                        <a:rPr sz="1050">
+                          <a:solidFill>
+                            <a:srgbClr val="3D5466"/>
+                          </a:solidFill>
+                          <a:latin typeface="Arial"/>
+                        </a:rPr>
+                        <a:t>Keine Nachfolge, GF &gt; 60 J.</a:t>
+                      </a:r>
+                    </a:p>
+                  </a:txBody>
+                  <a:tcPr/>
+                </a:tc>
+                <a:tc>
+                  <a:txBody>
+                    <a:bodyPr/>
+                    <a:lstStyle/>
+                    <a:p>
+                      <a:r>
+                        <a:rPr sz="1050">
+                          <a:solidFill>
+                            <a:srgbClr val="3D5466"/>
+                          </a:solidFill>
+                          <a:latin typeface="Arial"/>
+                        </a:rPr>
+                        <a:t>Resource-Based View</a:t>
+                      </a:r>
+                    </a:p>
+                  </a:txBody>
+                  <a:tcPr/>
+                </a:tc>
+                <a:tc>
+                  <a:txBody>
+                    <a:bodyPr/>
+                    <a:lstStyle/>
+                    <a:p>
+                      <a:r>
+                        <a:rPr sz="1050">
+                          <a:solidFill>
+                            <a:srgbClr val="3D5466"/>
+                          </a:solidFill>
+                          <a:latin typeface="Arial"/>
+                        </a:rPr>
+                        <a:t>Nachfolgeplanung thematisieren</a:t>
+                      </a:r>
+                    </a:p>
+                  </a:txBody>
+                  <a:tcPr/>
+                </a:tc>
+              </a:tr>
+              <a:tr h="384048">
+                <a:tc>
+                  <a:txBody>
+                    <a:bodyPr/>
+                    <a:lstStyle/>
+                    <a:p>
+                      <a:r>
+                        <a:rPr sz="1050">
+                          <a:solidFill>
+                            <a:srgbClr val="3D5466"/>
+                          </a:solidFill>
+                          <a:latin typeface="Arial"/>
+                        </a:rPr>
+                        <a:t>Strategie „stuck in the middle"</a:t>
+                      </a:r>
+                    </a:p>
+                  </a:txBody>
+                  <a:tcPr/>
+                </a:tc>
+                <a:tc>
+                  <a:txBody>
+                    <a:bodyPr/>
+                    <a:lstStyle/>
+                    <a:p>
+                      <a:r>
+                        <a:rPr sz="1050">
+                          <a:solidFill>
+                            <a:srgbClr val="3D5466"/>
+                          </a:solidFill>
+                          <a:latin typeface="Arial"/>
+                        </a:rPr>
+                        <a:t>Wettbewerbsmatrix</a:t>
+                      </a:r>
+                    </a:p>
+                  </a:txBody>
+                  <a:tcPr/>
+                </a:tc>
+                <a:tc>
+                  <a:txBody>
+                    <a:bodyPr/>
+                    <a:lstStyle/>
+                    <a:p>
+                      <a:r>
+                        <a:rPr sz="1050">
+                          <a:solidFill>
+                            <a:srgbClr val="3D5466"/>
+                          </a:solidFill>
+                          <a:latin typeface="Arial"/>
+                        </a:rPr>
+                        <a:t>Positionierung hinterfragen</a:t>
+                      </a:r>
+                    </a:p>
+                  </a:txBody>
+                  <a:tcPr/>
+                </a:tc>
+              </a:tr>
+            </a:tbl>
+          </a:graphicData>
+        </a:graphic>
+      </p:graphicFrame>
+      <p:sp>
+        <p:nvSpPr>
+          <p:cNvPr id="8" name="Rectangle 7"/>
           <p:cNvSpPr/>
           <p:nvPr/>
         </p:nvSpPr>
@@ -9695,7 +9164,7 @@
       </p:sp>
       <p:sp>
         <p:nvSpPr>
-          <p:cNvPr id="10" name="TextBox 9"/>
+          <p:cNvPr id="9" name="TextBox 8"/>
           <p:cNvSpPr txBox="1"/>
           <p:nvPr/>
         </p:nvSpPr>
@@ -9724,6 +9193,41 @@
                 <a:latin typeface="Consolas"/>
               </a:rPr>
               <a:t>FKB Campus  ·  M22</a:t>
+            </a:r>
+          </a:p>
+        </p:txBody>
+      </p:sp>
+      <p:sp>
+        <p:nvSpPr>
+          <p:cNvPr id="10" name="TextBox 9"/>
+          <p:cNvSpPr txBox="1"/>
+          <p:nvPr/>
+        </p:nvSpPr>
+        <p:spPr>
+          <a:xfrm>
+            <a:off x="7176211" y="6583680"/>
+            <a:ext cx="4326940" cy="256032"/>
+          </a:xfrm>
+          <a:prstGeom prst="rect">
+            <a:avLst/>
+          </a:prstGeom>
+          <a:noFill/>
+        </p:spPr>
+        <p:txBody>
+          <a:bodyPr wrap="none">
+            <a:spAutoFit/>
+          </a:bodyPr>
+          <a:lstStyle/>
+          <a:p>
+            <a:pPr algn="r"/>
+            <a:r>
+              <a:rPr sz="700">
+                <a:solidFill>
+                  <a:srgbClr val="A0B4D2"/>
+                </a:solidFill>
+                <a:latin typeface="Consolas"/>
+              </a:rPr>
+              <a:t>Übersicht</a:t>
             </a:r>
           </a:p>
         </p:txBody>
@@ -10102,6 +9606,823 @@
 </p:sld>
 </file>
 
+<file path=ppt/slides/slide20.xml><?xml version="1.0" encoding="utf-8"?>
+<p:sld xmlns:a="http://schemas.openxmlformats.org/drawingml/2006/main" xmlns:p="http://schemas.openxmlformats.org/presentationml/2006/main" xmlns:r="http://schemas.openxmlformats.org/officeDocument/2006/relationships">
+  <p:cSld>
+    <p:spTree>
+      <p:nvGrpSpPr>
+        <p:cNvPr id="1" name=""/>
+        <p:cNvGrpSpPr/>
+        <p:nvPr/>
+      </p:nvGrpSpPr>
+      <p:grpSpPr/>
+      <p:sp>
+        <p:nvSpPr>
+          <p:cNvPr id="2" name="Rectangle 1"/>
+          <p:cNvSpPr/>
+          <p:nvPr/>
+        </p:nvSpPr>
+        <p:spPr>
+          <a:xfrm>
+            <a:off x="0" y="0"/>
+            <a:ext cx="12188952" cy="6858000"/>
+          </a:xfrm>
+          <a:prstGeom prst="rect">
+            <a:avLst/>
+          </a:prstGeom>
+          <a:solidFill>
+            <a:srgbClr val="EDEDF3"/>
+          </a:solidFill>
+          <a:ln>
+            <a:noFill/>
+          </a:ln>
+        </p:spPr>
+        <p:style>
+          <a:lnRef idx="1">
+            <a:schemeClr val="accent1"/>
+          </a:lnRef>
+          <a:fillRef idx="3">
+            <a:schemeClr val="accent1"/>
+          </a:fillRef>
+          <a:effectRef idx="2">
+            <a:schemeClr val="accent1"/>
+          </a:effectRef>
+          <a:fontRef idx="minor">
+            <a:schemeClr val="lt1"/>
+          </a:fontRef>
+        </p:style>
+        <p:txBody>
+          <a:bodyPr rtlCol="0" anchor="ctr"/>
+          <a:lstStyle/>
+          <a:p>
+            <a:pPr algn="ctr"/>
+          </a:p>
+        </p:txBody>
+      </p:sp>
+      <p:sp>
+        <p:nvSpPr>
+          <p:cNvPr id="3" name="Rectangle 2"/>
+          <p:cNvSpPr/>
+          <p:nvPr/>
+        </p:nvSpPr>
+        <p:spPr>
+          <a:xfrm>
+            <a:off x="0" y="0"/>
+            <a:ext cx="12188952" cy="50292"/>
+          </a:xfrm>
+          <a:prstGeom prst="rect">
+            <a:avLst/>
+          </a:prstGeom>
+          <a:solidFill>
+            <a:srgbClr val="1F2C56"/>
+          </a:solidFill>
+          <a:ln>
+            <a:noFill/>
+          </a:ln>
+        </p:spPr>
+        <p:style>
+          <a:lnRef idx="1">
+            <a:schemeClr val="accent1"/>
+          </a:lnRef>
+          <a:fillRef idx="3">
+            <a:schemeClr val="accent1"/>
+          </a:fillRef>
+          <a:effectRef idx="2">
+            <a:schemeClr val="accent1"/>
+          </a:effectRef>
+          <a:fontRef idx="minor">
+            <a:schemeClr val="lt1"/>
+          </a:fontRef>
+        </p:style>
+        <p:txBody>
+          <a:bodyPr rtlCol="0" anchor="ctr"/>
+          <a:lstStyle/>
+          <a:p>
+            <a:pPr algn="ctr"/>
+          </a:p>
+        </p:txBody>
+      </p:sp>
+      <p:sp>
+        <p:nvSpPr>
+          <p:cNvPr id="4" name="TextBox 3"/>
+          <p:cNvSpPr txBox="1"/>
+          <p:nvPr/>
+        </p:nvSpPr>
+        <p:spPr>
+          <a:xfrm>
+            <a:off x="685800" y="109728"/>
+            <a:ext cx="10817352" cy="228600"/>
+          </a:xfrm>
+          <a:prstGeom prst="rect">
+            <a:avLst/>
+          </a:prstGeom>
+          <a:noFill/>
+        </p:spPr>
+        <p:txBody>
+          <a:bodyPr wrap="none">
+            <a:spAutoFit/>
+          </a:bodyPr>
+          <a:lstStyle/>
+          <a:p>
+            <a:pPr algn="l"/>
+            <a:r>
+              <a:rPr sz="750">
+                <a:solidFill>
+                  <a:srgbClr val="78808C"/>
+                </a:solidFill>
+                <a:latin typeface="Consolas"/>
+              </a:rPr>
+              <a:t>M22  ·  INHALT</a:t>
+            </a:r>
+          </a:p>
+        </p:txBody>
+      </p:sp>
+      <p:sp>
+        <p:nvSpPr>
+          <p:cNvPr id="5" name="Rectangle 4"/>
+          <p:cNvSpPr/>
+          <p:nvPr/>
+        </p:nvSpPr>
+        <p:spPr>
+          <a:xfrm>
+            <a:off x="0" y="1234440"/>
+            <a:ext cx="12188952" cy="12700"/>
+          </a:xfrm>
+          <a:prstGeom prst="rect">
+            <a:avLst/>
+          </a:prstGeom>
+          <a:solidFill>
+            <a:srgbClr val="D8DFE4"/>
+          </a:solidFill>
+          <a:ln>
+            <a:noFill/>
+          </a:ln>
+        </p:spPr>
+        <p:style>
+          <a:lnRef idx="1">
+            <a:schemeClr val="accent1"/>
+          </a:lnRef>
+          <a:fillRef idx="3">
+            <a:schemeClr val="accent1"/>
+          </a:fillRef>
+          <a:effectRef idx="2">
+            <a:schemeClr val="accent1"/>
+          </a:effectRef>
+          <a:fontRef idx="minor">
+            <a:schemeClr val="lt1"/>
+          </a:fontRef>
+        </p:style>
+        <p:txBody>
+          <a:bodyPr rtlCol="0" anchor="ctr"/>
+          <a:lstStyle/>
+          <a:p>
+            <a:pPr algn="ctr"/>
+          </a:p>
+        </p:txBody>
+      </p:sp>
+      <p:sp>
+        <p:nvSpPr>
+          <p:cNvPr id="6" name="Rectangle 5"/>
+          <p:cNvSpPr/>
+          <p:nvPr/>
+        </p:nvSpPr>
+        <p:spPr>
+          <a:xfrm>
+            <a:off x="685800" y="502920"/>
+            <a:ext cx="36576" cy="658368"/>
+          </a:xfrm>
+          <a:prstGeom prst="rect">
+            <a:avLst/>
+          </a:prstGeom>
+          <a:solidFill>
+            <a:srgbClr val="D9C089"/>
+          </a:solidFill>
+          <a:ln>
+            <a:noFill/>
+          </a:ln>
+        </p:spPr>
+        <p:style>
+          <a:lnRef idx="1">
+            <a:schemeClr val="accent1"/>
+          </a:lnRef>
+          <a:fillRef idx="3">
+            <a:schemeClr val="accent1"/>
+          </a:fillRef>
+          <a:effectRef idx="2">
+            <a:schemeClr val="accent1"/>
+          </a:effectRef>
+          <a:fontRef idx="minor">
+            <a:schemeClr val="lt1"/>
+          </a:fontRef>
+        </p:style>
+        <p:txBody>
+          <a:bodyPr rtlCol="0" anchor="ctr"/>
+          <a:lstStyle/>
+          <a:p>
+            <a:pPr algn="ctr"/>
+          </a:p>
+        </p:txBody>
+      </p:sp>
+      <p:sp>
+        <p:nvSpPr>
+          <p:cNvPr id="7" name="TextBox 6"/>
+          <p:cNvSpPr txBox="1"/>
+          <p:nvPr/>
+        </p:nvSpPr>
+        <p:spPr>
+          <a:xfrm>
+            <a:off x="813816" y="502920"/>
+            <a:ext cx="10634472" cy="685800"/>
+          </a:xfrm>
+          <a:prstGeom prst="rect">
+            <a:avLst/>
+          </a:prstGeom>
+          <a:noFill/>
+        </p:spPr>
+        <p:txBody>
+          <a:bodyPr wrap="square">
+            <a:spAutoFit/>
+          </a:bodyPr>
+          <a:lstStyle/>
+          <a:p>
+            <a:pPr algn="l"/>
+            <a:r>
+              <a:rPr sz="2400" b="1" i="0">
+                <a:solidFill>
+                  <a:srgbClr val="1F2C56"/>
+                </a:solidFill>
+                <a:latin typeface="Arial"/>
+              </a:rPr>
+              <a:t>Prinzip dieses Moduls</a:t>
+            </a:r>
+          </a:p>
+        </p:txBody>
+      </p:sp>
+      <p:sp>
+        <p:nvSpPr>
+          <p:cNvPr id="8" name="TextBox 7"/>
+          <p:cNvSpPr txBox="1"/>
+          <p:nvPr/>
+        </p:nvSpPr>
+        <p:spPr>
+          <a:xfrm>
+            <a:off x="685800" y="1417320"/>
+            <a:ext cx="10817352" cy="4892040"/>
+          </a:xfrm>
+          <a:prstGeom prst="rect">
+            <a:avLst/>
+          </a:prstGeom>
+          <a:noFill/>
+        </p:spPr>
+        <p:txBody>
+          <a:bodyPr wrap="square" anchor="ctr">
+            <a:spAutoFit/>
+          </a:bodyPr>
+          <a:lstStyle/>
+          <a:p>
+            <a:pPr marL="177800" indent="-177800">
+              <a:spcBef>
+                <a:spcPts val="600"/>
+              </a:spcBef>
+              <a:spcAft>
+                <a:spcPts val="200"/>
+              </a:spcAft>
+            </a:pPr>
+            <a:r>
+              <a:rPr sz="1200" i="1">
+                <a:solidFill>
+                  <a:srgbClr val="3D5466"/>
+                </a:solidFill>
+                <a:latin typeface="Arial"/>
+              </a:rPr>
+              <a:t>→  Bewerte das Geschäftsmodell, nicht nur den Jahresabschluss.</a:t>
+            </a:r>
+          </a:p>
+          <a:p>
+            <a:pPr marL="190500" indent="-190500">
+              <a:spcBef>
+                <a:spcPts val="400"/>
+              </a:spcBef>
+              <a:spcAft>
+                <a:spcPts val="200"/>
+              </a:spcAft>
+            </a:pPr>
+            <a:r>
+              <a:rPr sz="1300">
+                <a:solidFill>
+                  <a:srgbClr val="3D5466"/>
+                </a:solidFill>
+                <a:latin typeface="Arial"/>
+              </a:rPr>
+              <a:t>▸  Klumpenrisiken, Nachfolge und Wettbewerbsdruck stehen in keiner Kennzahl, entscheiden aber über die Zukunft.</a:t>
+            </a:r>
+          </a:p>
+        </p:txBody>
+      </p:sp>
+      <p:sp>
+        <p:nvSpPr>
+          <p:cNvPr id="9" name="Rectangle 8"/>
+          <p:cNvSpPr/>
+          <p:nvPr/>
+        </p:nvSpPr>
+        <p:spPr>
+          <a:xfrm>
+            <a:off x="0" y="6510528"/>
+            <a:ext cx="12188952" cy="347472"/>
+          </a:xfrm>
+          <a:prstGeom prst="rect">
+            <a:avLst/>
+          </a:prstGeom>
+          <a:solidFill>
+            <a:srgbClr val="0A1937"/>
+          </a:solidFill>
+          <a:ln>
+            <a:noFill/>
+          </a:ln>
+        </p:spPr>
+        <p:style>
+          <a:lnRef idx="1">
+            <a:schemeClr val="accent1"/>
+          </a:lnRef>
+          <a:fillRef idx="3">
+            <a:schemeClr val="accent1"/>
+          </a:fillRef>
+          <a:effectRef idx="2">
+            <a:schemeClr val="accent1"/>
+          </a:effectRef>
+          <a:fontRef idx="minor">
+            <a:schemeClr val="lt1"/>
+          </a:fontRef>
+        </p:style>
+        <p:txBody>
+          <a:bodyPr rtlCol="0" anchor="ctr"/>
+          <a:lstStyle/>
+          <a:p>
+            <a:pPr algn="ctr"/>
+          </a:p>
+        </p:txBody>
+      </p:sp>
+      <p:sp>
+        <p:nvSpPr>
+          <p:cNvPr id="10" name="TextBox 9"/>
+          <p:cNvSpPr txBox="1"/>
+          <p:nvPr/>
+        </p:nvSpPr>
+        <p:spPr>
+          <a:xfrm>
+            <a:off x="685800" y="6583680"/>
+            <a:ext cx="6490411" cy="256032"/>
+          </a:xfrm>
+          <a:prstGeom prst="rect">
+            <a:avLst/>
+          </a:prstGeom>
+          <a:noFill/>
+        </p:spPr>
+        <p:txBody>
+          <a:bodyPr wrap="none">
+            <a:spAutoFit/>
+          </a:bodyPr>
+          <a:lstStyle/>
+          <a:p>
+            <a:pPr algn="l"/>
+            <a:r>
+              <a:rPr sz="700">
+                <a:solidFill>
+                  <a:srgbClr val="A0B4D2"/>
+                </a:solidFill>
+                <a:latin typeface="Consolas"/>
+              </a:rPr>
+              <a:t>FKB Campus  ·  M22</a:t>
+            </a:r>
+          </a:p>
+        </p:txBody>
+      </p:sp>
+    </p:spTree>
+  </p:cSld>
+  <p:clrMapOvr>
+    <a:masterClrMapping/>
+  </p:clrMapOvr>
+</p:sld>
+</file>
+
+<file path=ppt/slides/slide21.xml><?xml version="1.0" encoding="utf-8"?>
+<p:sld xmlns:a="http://schemas.openxmlformats.org/drawingml/2006/main" xmlns:p="http://schemas.openxmlformats.org/presentationml/2006/main" xmlns:r="http://schemas.openxmlformats.org/officeDocument/2006/relationships">
+  <p:cSld>
+    <p:spTree>
+      <p:nvGrpSpPr>
+        <p:cNvPr id="1" name=""/>
+        <p:cNvGrpSpPr/>
+        <p:nvPr/>
+      </p:nvGrpSpPr>
+      <p:grpSpPr/>
+      <p:sp>
+        <p:nvSpPr>
+          <p:cNvPr id="2" name="Rectangle 1"/>
+          <p:cNvSpPr/>
+          <p:nvPr/>
+        </p:nvSpPr>
+        <p:spPr>
+          <a:xfrm>
+            <a:off x="0" y="0"/>
+            <a:ext cx="12188952" cy="6858000"/>
+          </a:xfrm>
+          <a:prstGeom prst="rect">
+            <a:avLst/>
+          </a:prstGeom>
+          <a:solidFill>
+            <a:srgbClr val="EDEDF3"/>
+          </a:solidFill>
+          <a:ln>
+            <a:noFill/>
+          </a:ln>
+        </p:spPr>
+        <p:style>
+          <a:lnRef idx="1">
+            <a:schemeClr val="accent1"/>
+          </a:lnRef>
+          <a:fillRef idx="3">
+            <a:schemeClr val="accent1"/>
+          </a:fillRef>
+          <a:effectRef idx="2">
+            <a:schemeClr val="accent1"/>
+          </a:effectRef>
+          <a:fontRef idx="minor">
+            <a:schemeClr val="lt1"/>
+          </a:fontRef>
+        </p:style>
+        <p:txBody>
+          <a:bodyPr rtlCol="0" anchor="ctr"/>
+          <a:lstStyle/>
+          <a:p>
+            <a:pPr algn="ctr"/>
+          </a:p>
+        </p:txBody>
+      </p:sp>
+      <p:sp>
+        <p:nvSpPr>
+          <p:cNvPr id="3" name="Rectangle 2"/>
+          <p:cNvSpPr/>
+          <p:nvPr/>
+        </p:nvSpPr>
+        <p:spPr>
+          <a:xfrm>
+            <a:off x="0" y="0"/>
+            <a:ext cx="12188952" cy="50292"/>
+          </a:xfrm>
+          <a:prstGeom prst="rect">
+            <a:avLst/>
+          </a:prstGeom>
+          <a:solidFill>
+            <a:srgbClr val="1F2C56"/>
+          </a:solidFill>
+          <a:ln>
+            <a:noFill/>
+          </a:ln>
+        </p:spPr>
+        <p:style>
+          <a:lnRef idx="1">
+            <a:schemeClr val="accent1"/>
+          </a:lnRef>
+          <a:fillRef idx="3">
+            <a:schemeClr val="accent1"/>
+          </a:fillRef>
+          <a:effectRef idx="2">
+            <a:schemeClr val="accent1"/>
+          </a:effectRef>
+          <a:fontRef idx="minor">
+            <a:schemeClr val="lt1"/>
+          </a:fontRef>
+        </p:style>
+        <p:txBody>
+          <a:bodyPr rtlCol="0" anchor="ctr"/>
+          <a:lstStyle/>
+          <a:p>
+            <a:pPr algn="ctr"/>
+          </a:p>
+        </p:txBody>
+      </p:sp>
+      <p:sp>
+        <p:nvSpPr>
+          <p:cNvPr id="4" name="TextBox 3"/>
+          <p:cNvSpPr txBox="1"/>
+          <p:nvPr/>
+        </p:nvSpPr>
+        <p:spPr>
+          <a:xfrm>
+            <a:off x="685800" y="109728"/>
+            <a:ext cx="10817352" cy="228600"/>
+          </a:xfrm>
+          <a:prstGeom prst="rect">
+            <a:avLst/>
+          </a:prstGeom>
+          <a:noFill/>
+        </p:spPr>
+        <p:txBody>
+          <a:bodyPr wrap="none">
+            <a:spAutoFit/>
+          </a:bodyPr>
+          <a:lstStyle/>
+          <a:p>
+            <a:pPr algn="l"/>
+            <a:r>
+              <a:rPr sz="750">
+                <a:solidFill>
+                  <a:srgbClr val="78808C"/>
+                </a:solidFill>
+                <a:latin typeface="Consolas"/>
+              </a:rPr>
+              <a:t>M22  ·  INHALT</a:t>
+            </a:r>
+          </a:p>
+        </p:txBody>
+      </p:sp>
+      <p:sp>
+        <p:nvSpPr>
+          <p:cNvPr id="5" name="Rectangle 4"/>
+          <p:cNvSpPr/>
+          <p:nvPr/>
+        </p:nvSpPr>
+        <p:spPr>
+          <a:xfrm>
+            <a:off x="0" y="1234440"/>
+            <a:ext cx="12188952" cy="12700"/>
+          </a:xfrm>
+          <a:prstGeom prst="rect">
+            <a:avLst/>
+          </a:prstGeom>
+          <a:solidFill>
+            <a:srgbClr val="D8DFE4"/>
+          </a:solidFill>
+          <a:ln>
+            <a:noFill/>
+          </a:ln>
+        </p:spPr>
+        <p:style>
+          <a:lnRef idx="1">
+            <a:schemeClr val="accent1"/>
+          </a:lnRef>
+          <a:fillRef idx="3">
+            <a:schemeClr val="accent1"/>
+          </a:fillRef>
+          <a:effectRef idx="2">
+            <a:schemeClr val="accent1"/>
+          </a:effectRef>
+          <a:fontRef idx="minor">
+            <a:schemeClr val="lt1"/>
+          </a:fontRef>
+        </p:style>
+        <p:txBody>
+          <a:bodyPr rtlCol="0" anchor="ctr"/>
+          <a:lstStyle/>
+          <a:p>
+            <a:pPr algn="ctr"/>
+          </a:p>
+        </p:txBody>
+      </p:sp>
+      <p:sp>
+        <p:nvSpPr>
+          <p:cNvPr id="6" name="Rectangle 5"/>
+          <p:cNvSpPr/>
+          <p:nvPr/>
+        </p:nvSpPr>
+        <p:spPr>
+          <a:xfrm>
+            <a:off x="685800" y="502920"/>
+            <a:ext cx="36576" cy="658368"/>
+          </a:xfrm>
+          <a:prstGeom prst="rect">
+            <a:avLst/>
+          </a:prstGeom>
+          <a:solidFill>
+            <a:srgbClr val="D9C089"/>
+          </a:solidFill>
+          <a:ln>
+            <a:noFill/>
+          </a:ln>
+        </p:spPr>
+        <p:style>
+          <a:lnRef idx="1">
+            <a:schemeClr val="accent1"/>
+          </a:lnRef>
+          <a:fillRef idx="3">
+            <a:schemeClr val="accent1"/>
+          </a:fillRef>
+          <a:effectRef idx="2">
+            <a:schemeClr val="accent1"/>
+          </a:effectRef>
+          <a:fontRef idx="minor">
+            <a:schemeClr val="lt1"/>
+          </a:fontRef>
+        </p:style>
+        <p:txBody>
+          <a:bodyPr rtlCol="0" anchor="ctr"/>
+          <a:lstStyle/>
+          <a:p>
+            <a:pPr algn="ctr"/>
+          </a:p>
+        </p:txBody>
+      </p:sp>
+      <p:sp>
+        <p:nvSpPr>
+          <p:cNvPr id="7" name="TextBox 6"/>
+          <p:cNvSpPr txBox="1"/>
+          <p:nvPr/>
+        </p:nvSpPr>
+        <p:spPr>
+          <a:xfrm>
+            <a:off x="813816" y="502920"/>
+            <a:ext cx="10634472" cy="685800"/>
+          </a:xfrm>
+          <a:prstGeom prst="rect">
+            <a:avLst/>
+          </a:prstGeom>
+          <a:noFill/>
+        </p:spPr>
+        <p:txBody>
+          <a:bodyPr wrap="square">
+            <a:spAutoFit/>
+          </a:bodyPr>
+          <a:lstStyle/>
+          <a:p>
+            <a:pPr algn="l"/>
+            <a:r>
+              <a:rPr sz="2400" b="1" i="0">
+                <a:solidFill>
+                  <a:srgbClr val="1F2C56"/>
+                </a:solidFill>
+                <a:latin typeface="Arial"/>
+              </a:rPr>
+              <a:t>Reflexion und Selbstcheck</a:t>
+            </a:r>
+          </a:p>
+        </p:txBody>
+      </p:sp>
+      <p:sp>
+        <p:nvSpPr>
+          <p:cNvPr id="8" name="TextBox 7"/>
+          <p:cNvSpPr txBox="1"/>
+          <p:nvPr/>
+        </p:nvSpPr>
+        <p:spPr>
+          <a:xfrm>
+            <a:off x="685800" y="1417320"/>
+            <a:ext cx="10817352" cy="4892040"/>
+          </a:xfrm>
+          <a:prstGeom prst="rect">
+            <a:avLst/>
+          </a:prstGeom>
+          <a:noFill/>
+        </p:spPr>
+        <p:txBody>
+          <a:bodyPr wrap="square" anchor="ctr">
+            <a:spAutoFit/>
+          </a:bodyPr>
+          <a:lstStyle/>
+          <a:p>
+            <a:pPr marL="190500" indent="-190500">
+              <a:spcBef>
+                <a:spcPts val="400"/>
+              </a:spcBef>
+              <a:spcAft>
+                <a:spcPts val="200"/>
+              </a:spcAft>
+            </a:pPr>
+            <a:r>
+              <a:rPr sz="1300">
+                <a:solidFill>
+                  <a:srgbClr val="3D5466"/>
+                </a:solidFill>
+                <a:latin typeface="Arial"/>
+              </a:rPr>
+              <a:t>▸  Bei welchem Bestandskunden verbergen solide Zahlen ein qualitatives Risiko?</a:t>
+            </a:r>
+          </a:p>
+          <a:p>
+            <a:pPr marL="190500" indent="-190500">
+              <a:spcBef>
+                <a:spcPts val="400"/>
+              </a:spcBef>
+              <a:spcAft>
+                <a:spcPts val="200"/>
+              </a:spcAft>
+            </a:pPr>
+            <a:r>
+              <a:rPr sz="1300">
+                <a:solidFill>
+                  <a:srgbClr val="3D5466"/>
+                </a:solidFill>
+                <a:latin typeface="Arial"/>
+              </a:rPr>
+              <a:t>▸  Welches der vier Frameworks nehmen Sie als Erstes in Ihre nächste Kreditvorlage auf?</a:t>
+            </a:r>
+          </a:p>
+          <a:p>
+            <a:pPr marL="190500" indent="-190500">
+              <a:spcBef>
+                <a:spcPts val="400"/>
+              </a:spcBef>
+              <a:spcAft>
+                <a:spcPts val="200"/>
+              </a:spcAft>
+            </a:pPr>
+            <a:r>
+              <a:rPr sz="1300">
+                <a:solidFill>
+                  <a:srgbClr val="3D5466"/>
+                </a:solidFill>
+                <a:latin typeface="Arial"/>
+              </a:rPr>
+              <a:t>▸  Wie formulieren Sie eine Framework-Erkenntnis im Kundengespräch, ohne zu belehren?</a:t>
+            </a:r>
+          </a:p>
+        </p:txBody>
+      </p:sp>
+      <p:sp>
+        <p:nvSpPr>
+          <p:cNvPr id="9" name="Rectangle 8"/>
+          <p:cNvSpPr/>
+          <p:nvPr/>
+        </p:nvSpPr>
+        <p:spPr>
+          <a:xfrm>
+            <a:off x="0" y="6510528"/>
+            <a:ext cx="12188952" cy="347472"/>
+          </a:xfrm>
+          <a:prstGeom prst="rect">
+            <a:avLst/>
+          </a:prstGeom>
+          <a:solidFill>
+            <a:srgbClr val="0A1937"/>
+          </a:solidFill>
+          <a:ln>
+            <a:noFill/>
+          </a:ln>
+        </p:spPr>
+        <p:style>
+          <a:lnRef idx="1">
+            <a:schemeClr val="accent1"/>
+          </a:lnRef>
+          <a:fillRef idx="3">
+            <a:schemeClr val="accent1"/>
+          </a:fillRef>
+          <a:effectRef idx="2">
+            <a:schemeClr val="accent1"/>
+          </a:effectRef>
+          <a:fontRef idx="minor">
+            <a:schemeClr val="lt1"/>
+          </a:fontRef>
+        </p:style>
+        <p:txBody>
+          <a:bodyPr rtlCol="0" anchor="ctr"/>
+          <a:lstStyle/>
+          <a:p>
+            <a:pPr algn="ctr"/>
+          </a:p>
+        </p:txBody>
+      </p:sp>
+      <p:sp>
+        <p:nvSpPr>
+          <p:cNvPr id="10" name="TextBox 9"/>
+          <p:cNvSpPr txBox="1"/>
+          <p:nvPr/>
+        </p:nvSpPr>
+        <p:spPr>
+          <a:xfrm>
+            <a:off x="685800" y="6583680"/>
+            <a:ext cx="6490411" cy="256032"/>
+          </a:xfrm>
+          <a:prstGeom prst="rect">
+            <a:avLst/>
+          </a:prstGeom>
+          <a:noFill/>
+        </p:spPr>
+        <p:txBody>
+          <a:bodyPr wrap="none">
+            <a:spAutoFit/>
+          </a:bodyPr>
+          <a:lstStyle/>
+          <a:p>
+            <a:pPr algn="l"/>
+            <a:r>
+              <a:rPr sz="700">
+                <a:solidFill>
+                  <a:srgbClr val="A0B4D2"/>
+                </a:solidFill>
+                <a:latin typeface="Consolas"/>
+              </a:rPr>
+              <a:t>FKB Campus  ·  M22</a:t>
+            </a:r>
+          </a:p>
+        </p:txBody>
+      </p:sp>
+    </p:spTree>
+  </p:cSld>
+  <p:clrMapOvr>
+    <a:masterClrMapping/>
+  </p:clrMapOvr>
+</p:sld>
+</file>
+
 <file path=ppt/slides/slide3.xml><?xml version="1.0" encoding="utf-8"?>
 <p:sld xmlns:a="http://schemas.openxmlformats.org/drawingml/2006/main" xmlns:p="http://schemas.openxmlformats.org/presentationml/2006/main" xmlns:r="http://schemas.openxmlformats.org/officeDocument/2006/relationships">
   <p:cSld>
@@ -11358,7 +11679,7 @@
                 </a:solidFill>
                 <a:latin typeface="Arial"/>
               </a:rPr>
-              <a:t>Theoretischer Hintergrund: Warum Strategie zur Kreditwürdigkeit gehört</a:t>
+              <a:t>Warum solide Zahlen keine sichere Kreditentscheidung sind</a:t>
             </a:r>
           </a:p>
         </p:txBody>
@@ -11385,22 +11706,22 @@
           </a:bodyPr>
           <a:lstStyle/>
           <a:p>
-            <a:pPr>
+            <a:pPr marL="177800" indent="-177800">
               <a:spcBef>
-                <a:spcPts val="1000"/>
+                <a:spcPts val="600"/>
               </a:spcBef>
               <a:spcAft>
                 <a:spcPts val="200"/>
               </a:spcAft>
             </a:pPr>
             <a:r>
-              <a:rPr sz="800" b="1">
-                <a:solidFill>
-                  <a:srgbClr val="78808C"/>
-                </a:solidFill>
-                <a:latin typeface="Consolas"/>
+              <a:rPr sz="1200" i="1">
+                <a:solidFill>
+                  <a:srgbClr val="3D5466"/>
+                </a:solidFill>
+                <a:latin typeface="Arial"/>
               </a:rPr>
-              <a:t>DAS DREI-EBENEN-MODELL DER QUALITATIVEN KREDITWÜRDIGKEITSANALYSE</a:t>
+              <a:t>→  Bewerte das Geschäftsmodell, nicht nur den Jahresabschluss – Klumpenrisiken, Nachfolge und Wettbewerbsdruck stehen in keiner Kennzahl.</a:t>
             </a:r>
           </a:p>
           <a:p>
@@ -11419,7 +11740,26 @@
                 </a:solidFill>
                 <a:latin typeface="Arial"/>
               </a:rPr>
-              <a:t>▸  Eine vollständige qualitative Unternehmensanalyse umfasst drei Ebenen:</a:t>
+              <a:t>▸  Der Jahresabschluss zeigt die Vergangenheit; die Zukunftsfähigkeit steht zwischen den Zeilen.</a:t>
+            </a:r>
+          </a:p>
+          <a:p>
+            <a:pPr marL="190500" indent="-190500">
+              <a:spcBef>
+                <a:spcPts val="400"/>
+              </a:spcBef>
+              <a:spcAft>
+                <a:spcPts val="200"/>
+              </a:spcAft>
+            </a:pPr>
+            <a:r>
+              <a:rPr sz="1300">
+                <a:solidFill>
+                  <a:srgbClr val="3D5466"/>
+                </a:solidFill>
+                <a:latin typeface="Arial"/>
+              </a:rPr>
+              <a:t>▸  Qualitative Analyse arbeitet auf drei Ebenen: Branche, Geschäftsmodell, Ressourcen.</a:t>
             </a:r>
           </a:p>
         </p:txBody>
@@ -11671,7 +12011,7 @@
                 </a:solidFill>
                 <a:latin typeface="Arial"/>
               </a:rPr>
-              <a:t>Drei Analyse-Ebenen der qualitativen Kreditwürdigkeitsanalys</a:t>
+              <a:t>Drei Analyse-Ebenen der qualitativen Kreditwürdigkeit</a:t>
             </a:r>
           </a:p>
         </p:txBody>
@@ -11889,7 +12229,7 @@
             <a:avLst/>
           </a:prstGeom>
           <a:solidFill>
-            <a:srgbClr val="EDEDF3"/>
+            <a:srgbClr val="1F2C56"/>
           </a:solidFill>
           <a:ln>
             <a:noFill/>
@@ -11919,57 +12259,14 @@
       </p:sp>
       <p:sp>
         <p:nvSpPr>
-          <p:cNvPr id="3" name="Rectangle 2"/>
-          <p:cNvSpPr/>
-          <p:nvPr/>
-        </p:nvSpPr>
-        <p:spPr>
-          <a:xfrm>
-            <a:off x="0" y="0"/>
-            <a:ext cx="12188952" cy="50292"/>
-          </a:xfrm>
-          <a:prstGeom prst="rect">
-            <a:avLst/>
-          </a:prstGeom>
-          <a:solidFill>
-            <a:srgbClr val="1F2C56"/>
-          </a:solidFill>
-          <a:ln>
-            <a:noFill/>
-          </a:ln>
-        </p:spPr>
-        <p:style>
-          <a:lnRef idx="1">
-            <a:schemeClr val="accent1"/>
-          </a:lnRef>
-          <a:fillRef idx="3">
-            <a:schemeClr val="accent1"/>
-          </a:fillRef>
-          <a:effectRef idx="2">
-            <a:schemeClr val="accent1"/>
-          </a:effectRef>
-          <a:fontRef idx="minor">
-            <a:schemeClr val="lt1"/>
-          </a:fontRef>
-        </p:style>
-        <p:txBody>
-          <a:bodyPr rtlCol="0" anchor="ctr"/>
-          <a:lstStyle/>
-          <a:p>
-            <a:pPr algn="ctr"/>
-          </a:p>
-        </p:txBody>
-      </p:sp>
-      <p:sp>
-        <p:nvSpPr>
-          <p:cNvPr id="4" name="TextBox 3"/>
+          <p:cNvPr id="3" name="TextBox 2"/>
           <p:cNvSpPr txBox="1"/>
           <p:nvPr/>
         </p:nvSpPr>
         <p:spPr>
           <a:xfrm>
-            <a:off x="685800" y="109728"/>
-            <a:ext cx="10817352" cy="228600"/>
+            <a:off x="685800" y="2377440"/>
+            <a:ext cx="10817352" cy="365760"/>
           </a:xfrm>
           <a:prstGeom prst="rect">
             <a:avLst/>
@@ -11984,70 +12281,27 @@
           <a:p>
             <a:pPr algn="l"/>
             <a:r>
-              <a:rPr sz="750">
-                <a:solidFill>
-                  <a:srgbClr val="78808C"/>
+              <a:rPr sz="1200">
+                <a:solidFill>
+                  <a:srgbClr val="D9C089"/>
                 </a:solidFill>
                 <a:latin typeface="Consolas"/>
               </a:rPr>
-              <a:t>M22  ·  INHALT</a:t>
-            </a:r>
-          </a:p>
-        </p:txBody>
-      </p:sp>
-      <p:sp>
-        <p:nvSpPr>
-          <p:cNvPr id="5" name="Rectangle 4"/>
+              <a:t>10–100 MIN.</a:t>
+            </a:r>
+          </a:p>
+        </p:txBody>
+      </p:sp>
+      <p:sp>
+        <p:nvSpPr>
+          <p:cNvPr id="4" name="Rectangle 3"/>
           <p:cNvSpPr/>
           <p:nvPr/>
         </p:nvSpPr>
         <p:spPr>
           <a:xfrm>
-            <a:off x="0" y="1234440"/>
-            <a:ext cx="12188952" cy="12700"/>
-          </a:xfrm>
-          <a:prstGeom prst="rect">
-            <a:avLst/>
-          </a:prstGeom>
-          <a:solidFill>
-            <a:srgbClr val="D8DFE4"/>
-          </a:solidFill>
-          <a:ln>
-            <a:noFill/>
-          </a:ln>
-        </p:spPr>
-        <p:style>
-          <a:lnRef idx="1">
-            <a:schemeClr val="accent1"/>
-          </a:lnRef>
-          <a:fillRef idx="3">
-            <a:schemeClr val="accent1"/>
-          </a:fillRef>
-          <a:effectRef idx="2">
-            <a:schemeClr val="accent1"/>
-          </a:effectRef>
-          <a:fontRef idx="minor">
-            <a:schemeClr val="lt1"/>
-          </a:fontRef>
-        </p:style>
-        <p:txBody>
-          <a:bodyPr rtlCol="0" anchor="ctr"/>
-          <a:lstStyle/>
-          <a:p>
-            <a:pPr algn="ctr"/>
-          </a:p>
-        </p:txBody>
-      </p:sp>
-      <p:sp>
-        <p:nvSpPr>
-          <p:cNvPr id="6" name="Rectangle 5"/>
-          <p:cNvSpPr/>
-          <p:nvPr/>
-        </p:nvSpPr>
-        <p:spPr>
-          <a:xfrm>
-            <a:off x="685800" y="502920"/>
-            <a:ext cx="36576" cy="658368"/>
+            <a:off x="685800" y="2788920"/>
+            <a:ext cx="548640" cy="38100"/>
           </a:xfrm>
           <a:prstGeom prst="rect">
             <a:avLst/>
@@ -12083,14 +12337,14 @@
       </p:sp>
       <p:sp>
         <p:nvSpPr>
-          <p:cNvPr id="7" name="TextBox 6"/>
+          <p:cNvPr id="5" name="TextBox 4"/>
           <p:cNvSpPr txBox="1"/>
           <p:nvPr/>
         </p:nvSpPr>
         <p:spPr>
           <a:xfrm>
-            <a:off x="813816" y="502920"/>
-            <a:ext cx="10634472" cy="685800"/>
+            <a:off x="685800" y="3017520"/>
+            <a:ext cx="10817352" cy="1463040"/>
           </a:xfrm>
           <a:prstGeom prst="rect">
             <a:avLst/>
@@ -12105,27 +12359,27 @@
           <a:p>
             <a:pPr algn="l"/>
             <a:r>
-              <a:rPr sz="2400" b="1" i="0">
-                <a:solidFill>
-                  <a:srgbClr val="1F2C56"/>
+              <a:rPr sz="4000" b="1" i="0">
+                <a:solidFill>
+                  <a:srgbClr val="FFFFFF"/>
                 </a:solidFill>
                 <a:latin typeface="Arial"/>
               </a:rPr>
-              <a:t>Framework 1: Branchenanalyse mit Porter's Five Forces</a:t>
-            </a:r>
-          </a:p>
-        </p:txBody>
-      </p:sp>
-      <p:sp>
-        <p:nvSpPr>
-          <p:cNvPr id="8" name="TextBox 7"/>
+              <a:t>Vier Frameworks der qualitativen Analyse</a:t>
+            </a:r>
+          </a:p>
+        </p:txBody>
+      </p:sp>
+      <p:sp>
+        <p:nvSpPr>
+          <p:cNvPr id="6" name="TextBox 5"/>
           <p:cNvSpPr txBox="1"/>
           <p:nvPr/>
         </p:nvSpPr>
         <p:spPr>
           <a:xfrm>
-            <a:off x="685800" y="1417320"/>
-            <a:ext cx="10817352" cy="4892040"/>
+            <a:off x="685800" y="4480560"/>
+            <a:ext cx="8653881" cy="1280160"/>
           </a:xfrm>
           <a:prstGeom prst="rect">
             <a:avLst/>
@@ -12133,103 +12387,34 @@
           <a:noFill/>
         </p:spPr>
         <p:txBody>
-          <a:bodyPr wrap="square" anchor="ctr">
+          <a:bodyPr wrap="square">
             <a:spAutoFit/>
           </a:bodyPr>
           <a:lstStyle/>
           <a:p>
-            <a:pPr>
-              <a:spcBef>
-                <a:spcPts val="1000"/>
-              </a:spcBef>
-              <a:spcAft>
-                <a:spcPts val="200"/>
-              </a:spcAft>
-            </a:pPr>
-            <a:r>
-              <a:rPr sz="800" b="1">
-                <a:solidFill>
-                  <a:srgbClr val="78808C"/>
-                </a:solidFill>
-                <a:latin typeface="Consolas"/>
-              </a:rPr>
-              <a:t>GRUNDPRINZIP</a:t>
-            </a:r>
-          </a:p>
-          <a:p>
-            <a:pPr marL="190500" indent="-190500">
-              <a:spcBef>
-                <a:spcPts val="400"/>
-              </a:spcBef>
-              <a:spcAft>
-                <a:spcPts val="200"/>
-              </a:spcAft>
-            </a:pPr>
-            <a:r>
-              <a:rPr sz="1300">
-                <a:solidFill>
-                  <a:srgbClr val="3D5466"/>
+            <a:pPr algn="l"/>
+            <a:r>
+              <a:rPr sz="1600" b="0" i="0">
+                <a:solidFill>
+                  <a:srgbClr val="C8D2E6"/>
                 </a:solidFill>
                 <a:latin typeface="Arial"/>
               </a:rPr>
-              <a:t>▸  Die fünf Kräfte im Überblick:</a:t>
-            </a:r>
-          </a:p>
-        </p:txBody>
-      </p:sp>
-      <p:sp>
-        <p:nvSpPr>
-          <p:cNvPr id="9" name="Rectangle 8"/>
-          <p:cNvSpPr/>
-          <p:nvPr/>
-        </p:nvSpPr>
-        <p:spPr>
-          <a:xfrm>
-            <a:off x="0" y="6510528"/>
-            <a:ext cx="12188952" cy="347472"/>
-          </a:xfrm>
-          <a:prstGeom prst="rect">
-            <a:avLst/>
-          </a:prstGeom>
-          <a:solidFill>
-            <a:srgbClr val="0A1937"/>
-          </a:solidFill>
-          <a:ln>
-            <a:noFill/>
-          </a:ln>
-        </p:spPr>
-        <p:style>
-          <a:lnRef idx="1">
-            <a:schemeClr val="accent1"/>
-          </a:lnRef>
-          <a:fillRef idx="3">
-            <a:schemeClr val="accent1"/>
-          </a:fillRef>
-          <a:effectRef idx="2">
-            <a:schemeClr val="accent1"/>
-          </a:effectRef>
-          <a:fontRef idx="minor">
-            <a:schemeClr val="lt1"/>
-          </a:fontRef>
-        </p:style>
-        <p:txBody>
-          <a:bodyPr rtlCol="0" anchor="ctr"/>
-          <a:lstStyle/>
-          <a:p>
-            <a:pPr algn="ctr"/>
-          </a:p>
-        </p:txBody>
-      </p:sp>
-      <p:sp>
-        <p:nvSpPr>
-          <p:cNvPr id="10" name="TextBox 9"/>
+              <a:t>Branche, Wettbewerb, Geschäftsmodell und Ressourcen systematisch bewerten.</a:t>
+            </a:r>
+          </a:p>
+        </p:txBody>
+      </p:sp>
+      <p:sp>
+        <p:nvSpPr>
+          <p:cNvPr id="7" name="TextBox 6"/>
           <p:cNvSpPr txBox="1"/>
           <p:nvPr/>
         </p:nvSpPr>
         <p:spPr>
           <a:xfrm>
-            <a:off x="685800" y="6583680"/>
-            <a:ext cx="6490411" cy="256032"/>
+            <a:off x="685800" y="6355080"/>
+            <a:ext cx="10817352" cy="274320"/>
           </a:xfrm>
           <a:prstGeom prst="rect">
             <a:avLst/>
@@ -12246,7 +12431,7 @@
             <a:r>
               <a:rPr sz="700">
                 <a:solidFill>
-                  <a:srgbClr val="A0B4D2"/>
+                  <a:srgbClr val="8CA0C3"/>
                 </a:solidFill>
                 <a:latin typeface="Consolas"/>
               </a:rPr>
@@ -12288,7 +12473,7 @@
             <a:avLst/>
           </a:prstGeom>
           <a:solidFill>
-            <a:srgbClr val="FFFFFF"/>
+            <a:srgbClr val="EDEDF3"/>
           </a:solidFill>
           <a:ln>
             <a:noFill/>
@@ -12389,43 +12574,51 @@
                 </a:solidFill>
                 <a:latin typeface="Consolas"/>
               </a:rPr>
-              <a:t>M22  ·  SCHAUBILD</a:t>
-            </a:r>
-          </a:p>
-        </p:txBody>
-      </p:sp>
-      <p:sp>
-        <p:nvSpPr>
-          <p:cNvPr id="5" name="TextBox 4"/>
-          <p:cNvSpPr txBox="1"/>
-          <p:nvPr/>
-        </p:nvSpPr>
-        <p:spPr>
-          <a:xfrm>
-            <a:off x="685800" y="502920"/>
-            <a:ext cx="10817352" cy="594360"/>
-          </a:xfrm>
-          <a:prstGeom prst="rect">
-            <a:avLst/>
-          </a:prstGeom>
-          <a:noFill/>
-        </p:spPr>
-        <p:txBody>
-          <a:bodyPr wrap="square">
-            <a:spAutoFit/>
-          </a:bodyPr>
-          <a:lstStyle/>
-          <a:p>
-            <a:pPr algn="l"/>
-            <a:r>
-              <a:rPr sz="2000" b="1" i="0">
-                <a:solidFill>
-                  <a:srgbClr val="1F2C56"/>
-                </a:solidFill>
-                <a:latin typeface="Arial"/>
-              </a:rPr>
-              <a:t>Five-Forces-Modell nach Porter</a:t>
-            </a:r>
+              <a:t>M22  ·  INHALT</a:t>
+            </a:r>
+          </a:p>
+        </p:txBody>
+      </p:sp>
+      <p:sp>
+        <p:nvSpPr>
+          <p:cNvPr id="5" name="Rectangle 4"/>
+          <p:cNvSpPr/>
+          <p:nvPr/>
+        </p:nvSpPr>
+        <p:spPr>
+          <a:xfrm>
+            <a:off x="0" y="1234440"/>
+            <a:ext cx="12188952" cy="12700"/>
+          </a:xfrm>
+          <a:prstGeom prst="rect">
+            <a:avLst/>
+          </a:prstGeom>
+          <a:solidFill>
+            <a:srgbClr val="D8DFE4"/>
+          </a:solidFill>
+          <a:ln>
+            <a:noFill/>
+          </a:ln>
+        </p:spPr>
+        <p:style>
+          <a:lnRef idx="1">
+            <a:schemeClr val="accent1"/>
+          </a:lnRef>
+          <a:fillRef idx="3">
+            <a:schemeClr val="accent1"/>
+          </a:fillRef>
+          <a:effectRef idx="2">
+            <a:schemeClr val="accent1"/>
+          </a:effectRef>
+          <a:fontRef idx="minor">
+            <a:schemeClr val="lt1"/>
+          </a:fontRef>
+        </p:style>
+        <p:txBody>
+          <a:bodyPr rtlCol="0" anchor="ctr"/>
+          <a:lstStyle/>
+          <a:p>
+            <a:pPr algn="ctr"/>
           </a:p>
         </p:txBody>
       </p:sp>
@@ -12437,8 +12630,8 @@
         </p:nvSpPr>
         <p:spPr>
           <a:xfrm>
-            <a:off x="685800" y="1143000"/>
-            <a:ext cx="10817352" cy="25400"/>
+            <a:off x="685800" y="502920"/>
+            <a:ext cx="36576" cy="658368"/>
           </a:xfrm>
           <a:prstGeom prst="rect">
             <a:avLst/>
@@ -12472,33 +12665,124 @@
           </a:p>
         </p:txBody>
       </p:sp>
-      <p:pic>
-        <p:nvPicPr>
-          <p:cNvPr id="7" name="Picture 6" descr="image.png"/>
-          <p:cNvPicPr>
-            <a:picLocks noChangeAspect="1"/>
-          </p:cNvPicPr>
-          <p:nvPr/>
-        </p:nvPicPr>
-        <p:blipFill>
-          <a:blip r:embed="rId2"/>
-          <a:stretch>
-            <a:fillRect/>
-          </a:stretch>
-        </p:blipFill>
-        <p:spPr>
-          <a:xfrm>
-            <a:off x="2554863" y="1325880"/>
-            <a:ext cx="7079225" cy="4937760"/>
-          </a:xfrm>
-          <a:prstGeom prst="rect">
-            <a:avLst/>
-          </a:prstGeom>
-        </p:spPr>
-      </p:pic>
-      <p:sp>
-        <p:nvSpPr>
-          <p:cNvPr id="8" name="Rectangle 7"/>
+      <p:sp>
+        <p:nvSpPr>
+          <p:cNvPr id="7" name="TextBox 6"/>
+          <p:cNvSpPr txBox="1"/>
+          <p:nvPr/>
+        </p:nvSpPr>
+        <p:spPr>
+          <a:xfrm>
+            <a:off x="813816" y="502920"/>
+            <a:ext cx="10634472" cy="685800"/>
+          </a:xfrm>
+          <a:prstGeom prst="rect">
+            <a:avLst/>
+          </a:prstGeom>
+          <a:noFill/>
+        </p:spPr>
+        <p:txBody>
+          <a:bodyPr wrap="square">
+            <a:spAutoFit/>
+          </a:bodyPr>
+          <a:lstStyle/>
+          <a:p>
+            <a:pPr algn="l"/>
+            <a:r>
+              <a:rPr sz="2400" b="1" i="0">
+                <a:solidFill>
+                  <a:srgbClr val="1F2C56"/>
+                </a:solidFill>
+                <a:latin typeface="Arial"/>
+              </a:rPr>
+              <a:t>Framework 1: die Branche mit Five Forces lesen</a:t>
+            </a:r>
+          </a:p>
+        </p:txBody>
+      </p:sp>
+      <p:sp>
+        <p:nvSpPr>
+          <p:cNvPr id="8" name="TextBox 7"/>
+          <p:cNvSpPr txBox="1"/>
+          <p:nvPr/>
+        </p:nvSpPr>
+        <p:spPr>
+          <a:xfrm>
+            <a:off x="685800" y="1417320"/>
+            <a:ext cx="10817352" cy="4892040"/>
+          </a:xfrm>
+          <a:prstGeom prst="rect">
+            <a:avLst/>
+          </a:prstGeom>
+          <a:noFill/>
+        </p:spPr>
+        <p:txBody>
+          <a:bodyPr wrap="square" anchor="ctr">
+            <a:spAutoFit/>
+          </a:bodyPr>
+          <a:lstStyle/>
+          <a:p>
+            <a:pPr marL="177800" indent="-177800">
+              <a:spcBef>
+                <a:spcPts val="600"/>
+              </a:spcBef>
+              <a:spcAft>
+                <a:spcPts val="200"/>
+              </a:spcAft>
+            </a:pPr>
+            <a:r>
+              <a:rPr sz="1200" i="1">
+                <a:solidFill>
+                  <a:srgbClr val="3D5466"/>
+                </a:solidFill>
+                <a:latin typeface="Arial"/>
+              </a:rPr>
+              <a:t>→  Fünf Kräfte bestimmen, wie viel Ertrag eine Branche überhaupt zulässt – unabhängig von der einzelnen Bilanz.</a:t>
+            </a:r>
+          </a:p>
+          <a:p>
+            <a:pPr marL="190500" indent="-190500">
+              <a:spcBef>
+                <a:spcPts val="400"/>
+              </a:spcBef>
+              <a:spcAft>
+                <a:spcPts val="200"/>
+              </a:spcAft>
+            </a:pPr>
+            <a:r>
+              <a:rPr sz="1300">
+                <a:solidFill>
+                  <a:srgbClr val="3D5466"/>
+                </a:solidFill>
+                <a:latin typeface="Arial"/>
+              </a:rPr>
+              <a:t>▸  Wettbewerb, Lieferanten, Abnehmer, neue Anbieter, Substitute.</a:t>
+            </a:r>
+          </a:p>
+          <a:p>
+            <a:pPr marL="190500" indent="-190500">
+              <a:spcBef>
+                <a:spcPts val="400"/>
+              </a:spcBef>
+              <a:spcAft>
+                <a:spcPts val="200"/>
+              </a:spcAft>
+            </a:pPr>
+            <a:r>
+              <a:rPr sz="1300">
+                <a:solidFill>
+                  <a:srgbClr val="3D5466"/>
+                </a:solidFill>
+                <a:latin typeface="Arial"/>
+              </a:rPr>
+              <a:t>▸  Leitfrage: Welche Kraft dominiert gerade – und in drei Jahren?</a:t>
+            </a:r>
+          </a:p>
+        </p:txBody>
+      </p:sp>
+      <p:sp>
+        <p:nvSpPr>
+          <p:cNvPr id="9" name="Rectangle 8"/>
           <p:cNvSpPr/>
           <p:nvPr/>
         </p:nvSpPr>
@@ -12541,7 +12825,7 @@
       </p:sp>
       <p:sp>
         <p:nvSpPr>
-          <p:cNvPr id="9" name="TextBox 8"/>
+          <p:cNvPr id="10" name="TextBox 9"/>
           <p:cNvSpPr txBox="1"/>
           <p:nvPr/>
         </p:nvSpPr>
@@ -12570,41 +12854,6 @@
                 <a:latin typeface="Consolas"/>
               </a:rPr>
               <a:t>FKB Campus  ·  M22</a:t>
-            </a:r>
-          </a:p>
-        </p:txBody>
-      </p:sp>
-      <p:sp>
-        <p:nvSpPr>
-          <p:cNvPr id="10" name="TextBox 9"/>
-          <p:cNvSpPr txBox="1"/>
-          <p:nvPr/>
-        </p:nvSpPr>
-        <p:spPr>
-          <a:xfrm>
-            <a:off x="7176211" y="6583680"/>
-            <a:ext cx="4326940" cy="256032"/>
-          </a:xfrm>
-          <a:prstGeom prst="rect">
-            <a:avLst/>
-          </a:prstGeom>
-          <a:noFill/>
-        </p:spPr>
-        <p:txBody>
-          <a:bodyPr wrap="none">
-            <a:spAutoFit/>
-          </a:bodyPr>
-          <a:lstStyle/>
-          <a:p>
-            <a:pPr algn="r"/>
-            <a:r>
-              <a:rPr sz="700">
-                <a:solidFill>
-                  <a:srgbClr val="A0B4D2"/>
-                </a:solidFill>
-                <a:latin typeface="Consolas"/>
-              </a:rPr>
-              <a:t>Schaubild</a:t>
             </a:r>
           </a:p>
         </p:txBody>
@@ -12642,7 +12891,7 @@
             <a:avLst/>
           </a:prstGeom>
           <a:solidFill>
-            <a:srgbClr val="EDEDF3"/>
+            <a:srgbClr val="FFFFFF"/>
           </a:solidFill>
           <a:ln>
             <a:noFill/>
@@ -12743,51 +12992,43 @@
                 </a:solidFill>
                 <a:latin typeface="Consolas"/>
               </a:rPr>
-              <a:t>M22  ·  INHALT</a:t>
-            </a:r>
-          </a:p>
-        </p:txBody>
-      </p:sp>
-      <p:sp>
-        <p:nvSpPr>
-          <p:cNvPr id="5" name="Rectangle 4"/>
-          <p:cNvSpPr/>
-          <p:nvPr/>
-        </p:nvSpPr>
-        <p:spPr>
-          <a:xfrm>
-            <a:off x="0" y="1234440"/>
-            <a:ext cx="12188952" cy="12700"/>
-          </a:xfrm>
-          <a:prstGeom prst="rect">
-            <a:avLst/>
-          </a:prstGeom>
-          <a:solidFill>
-            <a:srgbClr val="D8DFE4"/>
-          </a:solidFill>
-          <a:ln>
-            <a:noFill/>
-          </a:ln>
-        </p:spPr>
-        <p:style>
-          <a:lnRef idx="1">
-            <a:schemeClr val="accent1"/>
-          </a:lnRef>
-          <a:fillRef idx="3">
-            <a:schemeClr val="accent1"/>
-          </a:fillRef>
-          <a:effectRef idx="2">
-            <a:schemeClr val="accent1"/>
-          </a:effectRef>
-          <a:fontRef idx="minor">
-            <a:schemeClr val="lt1"/>
-          </a:fontRef>
-        </p:style>
-        <p:txBody>
-          <a:bodyPr rtlCol="0" anchor="ctr"/>
-          <a:lstStyle/>
-          <a:p>
-            <a:pPr algn="ctr"/>
+              <a:t>M22  ·  SCHAUBILD</a:t>
+            </a:r>
+          </a:p>
+        </p:txBody>
+      </p:sp>
+      <p:sp>
+        <p:nvSpPr>
+          <p:cNvPr id="5" name="TextBox 4"/>
+          <p:cNvSpPr txBox="1"/>
+          <p:nvPr/>
+        </p:nvSpPr>
+        <p:spPr>
+          <a:xfrm>
+            <a:off x="685800" y="502920"/>
+            <a:ext cx="10817352" cy="594360"/>
+          </a:xfrm>
+          <a:prstGeom prst="rect">
+            <a:avLst/>
+          </a:prstGeom>
+          <a:noFill/>
+        </p:spPr>
+        <p:txBody>
+          <a:bodyPr wrap="square">
+            <a:spAutoFit/>
+          </a:bodyPr>
+          <a:lstStyle/>
+          <a:p>
+            <a:pPr algn="l"/>
+            <a:r>
+              <a:rPr sz="2000" b="1" i="0">
+                <a:solidFill>
+                  <a:srgbClr val="1F2C56"/>
+                </a:solidFill>
+                <a:latin typeface="Arial"/>
+              </a:rPr>
+              <a:t>Wettbewerbskräfte der Branche (Five Forces)</a:t>
+            </a:r>
           </a:p>
         </p:txBody>
       </p:sp>
@@ -12799,8 +13040,8 @@
         </p:nvSpPr>
         <p:spPr>
           <a:xfrm>
-            <a:off x="685800" y="502920"/>
-            <a:ext cx="36576" cy="658368"/>
+            <a:off x="685800" y="1143000"/>
+            <a:ext cx="10817352" cy="25400"/>
           </a:xfrm>
           <a:prstGeom prst="rect">
             <a:avLst/>
@@ -12834,276 +13075,33 @@
           </a:p>
         </p:txBody>
       </p:sp>
-      <p:sp>
-        <p:nvSpPr>
-          <p:cNvPr id="7" name="TextBox 6"/>
-          <p:cNvSpPr txBox="1"/>
-          <p:nvPr/>
-        </p:nvSpPr>
-        <p:spPr>
-          <a:xfrm>
-            <a:off x="813816" y="502920"/>
-            <a:ext cx="10634472" cy="685800"/>
-          </a:xfrm>
-          <a:prstGeom prst="rect">
-            <a:avLst/>
-          </a:prstGeom>
-          <a:noFill/>
-        </p:spPr>
-        <p:txBody>
-          <a:bodyPr wrap="square">
-            <a:spAutoFit/>
-          </a:bodyPr>
-          <a:lstStyle/>
-          <a:p>
-            <a:pPr algn="l"/>
-            <a:r>
-              <a:rPr sz="2400" b="1" i="0">
-                <a:solidFill>
-                  <a:srgbClr val="1F2C56"/>
-                </a:solidFill>
-                <a:latin typeface="Arial"/>
-              </a:rPr>
-              <a:t>Framework 1b: Generische Wettbewerbsstrategien und das Stuck-in-the-Middle-Risiko</a:t>
-            </a:r>
-          </a:p>
-        </p:txBody>
-      </p:sp>
-      <p:sp>
-        <p:nvSpPr>
-          <p:cNvPr id="8" name="TextBox 7"/>
-          <p:cNvSpPr txBox="1"/>
-          <p:nvPr/>
-        </p:nvSpPr>
-        <p:spPr>
-          <a:xfrm>
-            <a:off x="685800" y="1417320"/>
-            <a:ext cx="10817352" cy="4892040"/>
-          </a:xfrm>
-          <a:prstGeom prst="rect">
-            <a:avLst/>
-          </a:prstGeom>
-          <a:noFill/>
-        </p:spPr>
-        <p:txBody>
-          <a:bodyPr wrap="square">
-            <a:spAutoFit/>
-          </a:bodyPr>
-          <a:lstStyle/>
-          <a:p>
-            <a:pPr>
-              <a:spcBef>
-                <a:spcPts val="1000"/>
-              </a:spcBef>
-              <a:spcAft>
-                <a:spcPts val="200"/>
-              </a:spcAft>
-            </a:pPr>
-            <a:r>
-              <a:rPr sz="800" b="1">
-                <a:solidFill>
-                  <a:srgbClr val="78808C"/>
-                </a:solidFill>
-                <a:latin typeface="Consolas"/>
-              </a:rPr>
-              <a:t>DIE DREI GRUNDSTRATEGIEN NACH PORTER (1980)</a:t>
-            </a:r>
-          </a:p>
-          <a:p>
-            <a:pPr marL="190500" indent="-190500">
-              <a:spcBef>
-                <a:spcPts val="400"/>
-              </a:spcBef>
-              <a:spcAft>
-                <a:spcPts val="200"/>
-              </a:spcAft>
-            </a:pPr>
-            <a:r>
-              <a:rPr sz="1300">
-                <a:solidFill>
-                  <a:srgbClr val="3D5466"/>
-                </a:solidFill>
-                <a:latin typeface="Arial"/>
-              </a:rPr>
-              <a:t>▸  Eine vierte Option gibt es laut Porter (1980) nicht — ein Unternehmen, das keine klare Strategie wählt, hat keine.</a:t>
-            </a:r>
-          </a:p>
-          <a:p>
-            <a:pPr>
-              <a:spcBef>
-                <a:spcPts val="1000"/>
-              </a:spcBef>
-              <a:spcAft>
-                <a:spcPts val="200"/>
-              </a:spcAft>
-            </a:pPr>
-            <a:r>
-              <a:rPr sz="800" b="1">
-                <a:solidFill>
-                  <a:srgbClr val="78808C"/>
-                </a:solidFill>
-                <a:latin typeface="Consolas"/>
-              </a:rPr>
-              <a:t>DAS STUCK-IN-THE-MIDDLE-PROBLEM</a:t>
-            </a:r>
-          </a:p>
-          <a:p>
-            <a:pPr marL="190500" indent="-190500">
-              <a:spcBef>
-                <a:spcPts val="400"/>
-              </a:spcBef>
-              <a:spcAft>
-                <a:spcPts val="200"/>
-              </a:spcAft>
-            </a:pPr>
-            <a:r>
-              <a:rPr sz="1300">
-                <a:solidFill>
-                  <a:srgbClr val="3D5466"/>
-                </a:solidFill>
-                <a:latin typeface="Arial"/>
-              </a:rPr>
-              <a:t>▸  Warum das für Kreditberater relevant ist:</a:t>
-            </a:r>
-          </a:p>
-          <a:p>
-            <a:pPr marL="190500" indent="-190500">
-              <a:spcBef>
-                <a:spcPts val="400"/>
-              </a:spcBef>
-              <a:spcAft>
-                <a:spcPts val="200"/>
-              </a:spcAft>
-            </a:pPr>
-            <a:r>
-              <a:rPr sz="1300">
-                <a:solidFill>
-                  <a:srgbClr val="3D5466"/>
-                </a:solidFill>
-                <a:latin typeface="Arial"/>
-              </a:rPr>
-              <a:t>▸  Warnsignale für Stuck in the Middle im Kundengespräch:</a:t>
-            </a:r>
-          </a:p>
-          <a:p>
-            <a:pPr marL="190500" indent="-190500">
-              <a:spcBef>
-                <a:spcPts val="400"/>
-              </a:spcBef>
-              <a:spcAft>
-                <a:spcPts val="200"/>
-              </a:spcAft>
-            </a:pPr>
-            <a:r>
-              <a:rPr sz="1300">
-                <a:solidFill>
-                  <a:srgbClr val="3D5466"/>
-                </a:solidFill>
-                <a:latin typeface="Arial"/>
-              </a:rPr>
-              <a:t>▸  Unklare Antwort auf die Frage: „Was ist Ihr Alleinstellungsmerkmal — und wofür bezahlen Ihre Kunden gerne mehr?"</a:t>
-            </a:r>
-          </a:p>
-          <a:p>
-            <a:pPr marL="190500" indent="-190500">
-              <a:spcBef>
-                <a:spcPts val="400"/>
-              </a:spcBef>
-              <a:spcAft>
-                <a:spcPts val="200"/>
-              </a:spcAft>
-            </a:pPr>
-            <a:r>
-              <a:rPr sz="1300">
-                <a:solidFill>
-                  <a:srgbClr val="3D5466"/>
-                </a:solidFill>
-                <a:latin typeface="Arial"/>
-              </a:rPr>
-              <a:t>▸  Gleichzeitig Preisdruck von günstigeren Wettbewerbern und Qualitätsdruck von Premiumanbietern</a:t>
-            </a:r>
-          </a:p>
-          <a:p>
-            <a:pPr marL="190500" indent="-190500">
-              <a:spcBef>
-                <a:spcPts val="400"/>
-              </a:spcBef>
-              <a:spcAft>
-                <a:spcPts val="200"/>
-              </a:spcAft>
-            </a:pPr>
-            <a:r>
-              <a:rPr sz="1300">
-                <a:solidFill>
-                  <a:srgbClr val="3D5466"/>
-                </a:solidFill>
-                <a:latin typeface="Arial"/>
-              </a:rPr>
-              <a:t>▸  Rückläufige Marge trotz stabilem Umsatz</a:t>
-            </a:r>
-          </a:p>
-          <a:p>
-            <a:pPr marL="190500" indent="-190500">
-              <a:spcBef>
-                <a:spcPts val="400"/>
-              </a:spcBef>
-              <a:spcAft>
-                <a:spcPts val="200"/>
-              </a:spcAft>
-            </a:pPr>
-            <a:r>
-              <a:rPr sz="1300">
-                <a:solidFill>
-                  <a:srgbClr val="3D5466"/>
-                </a:solidFill>
-                <a:latin typeface="Arial"/>
-              </a:rPr>
-              <a:t>▸  Investitionen in beide Richtungen: gleichzeitig Kostenoptimierung und Qualitätsausbau ohne klare Priorisierung</a:t>
-            </a:r>
-          </a:p>
-          <a:p>
-            <a:pPr marL="190500" indent="-190500">
-              <a:spcBef>
-                <a:spcPts val="400"/>
-              </a:spcBef>
-              <a:spcAft>
-                <a:spcPts val="200"/>
-              </a:spcAft>
-            </a:pPr>
-            <a:r>
-              <a:rPr sz="1300">
-                <a:solidFill>
-                  <a:srgbClr val="3D5466"/>
-                </a:solidFill>
-                <a:latin typeface="Arial"/>
-              </a:rPr>
-              <a:t>▸  GF-Aussagen wie: „Wir machen alles — wir sind flexibel"</a:t>
-            </a:r>
-          </a:p>
-          <a:p>
-            <a:pPr marL="190500" indent="-190500">
-              <a:spcBef>
-                <a:spcPts val="400"/>
-              </a:spcBef>
-              <a:spcAft>
-                <a:spcPts val="200"/>
-              </a:spcAft>
-            </a:pPr>
-            <a:r>
-              <a:rPr sz="1300">
-                <a:solidFill>
-                  <a:srgbClr val="3D5466"/>
-                </a:solidFill>
-                <a:latin typeface="Arial"/>
-              </a:rPr>
-              <a:t>▸  Stuck in the Middle und der Haller-Fall:</a:t>
-            </a:r>
-          </a:p>
-        </p:txBody>
-      </p:sp>
-      <p:sp>
-        <p:nvSpPr>
-          <p:cNvPr id="9" name="Rectangle 8"/>
+      <p:pic>
+        <p:nvPicPr>
+          <p:cNvPr id="7" name="Picture 6" descr="image.png"/>
+          <p:cNvPicPr>
+            <a:picLocks noChangeAspect="1"/>
+          </p:cNvPicPr>
+          <p:nvPr/>
+        </p:nvPicPr>
+        <p:blipFill>
+          <a:blip r:embed="rId2"/>
+          <a:stretch>
+            <a:fillRect/>
+          </a:stretch>
+        </p:blipFill>
+        <p:spPr>
+          <a:xfrm>
+            <a:off x="2554863" y="1325880"/>
+            <a:ext cx="7079225" cy="4937760"/>
+          </a:xfrm>
+          <a:prstGeom prst="rect">
+            <a:avLst/>
+          </a:prstGeom>
+        </p:spPr>
+      </p:pic>
+      <p:sp>
+        <p:nvSpPr>
+          <p:cNvPr id="8" name="Rectangle 7"/>
           <p:cNvSpPr/>
           <p:nvPr/>
         </p:nvSpPr>
@@ -13146,7 +13144,7 @@
       </p:sp>
       <p:sp>
         <p:nvSpPr>
-          <p:cNvPr id="10" name="TextBox 9"/>
+          <p:cNvPr id="9" name="TextBox 8"/>
           <p:cNvSpPr txBox="1"/>
           <p:nvPr/>
         </p:nvSpPr>
@@ -13175,6 +13173,41 @@
                 <a:latin typeface="Consolas"/>
               </a:rPr>
               <a:t>FKB Campus  ·  M22</a:t>
+            </a:r>
+          </a:p>
+        </p:txBody>
+      </p:sp>
+      <p:sp>
+        <p:nvSpPr>
+          <p:cNvPr id="10" name="TextBox 9"/>
+          <p:cNvSpPr txBox="1"/>
+          <p:nvPr/>
+        </p:nvSpPr>
+        <p:spPr>
+          <a:xfrm>
+            <a:off x="7176211" y="6583680"/>
+            <a:ext cx="4326940" cy="256032"/>
+          </a:xfrm>
+          <a:prstGeom prst="rect">
+            <a:avLst/>
+          </a:prstGeom>
+          <a:noFill/>
+        </p:spPr>
+        <p:txBody>
+          <a:bodyPr wrap="none">
+            <a:spAutoFit/>
+          </a:bodyPr>
+          <a:lstStyle/>
+          <a:p>
+            <a:pPr algn="r"/>
+            <a:r>
+              <a:rPr sz="700">
+                <a:solidFill>
+                  <a:srgbClr val="A0B4D2"/>
+                </a:solidFill>
+                <a:latin typeface="Consolas"/>
+              </a:rPr>
+              <a:t>Schaubild</a:t>
             </a:r>
           </a:p>
         </p:txBody>
